--- a/presentation/ln_text_analysis.pptx
+++ b/presentation/ln_text_analysis.pptx
@@ -5,15 +5,31 @@
     <p:sldMasterId id="2147483648" r:id="rId1"/>
   </p:sldMasterIdLst>
   <p:notesMasterIdLst>
-    <p:notesMasterId r:id="rId8"/>
+    <p:notesMasterId r:id="rId24"/>
   </p:notesMasterIdLst>
   <p:sldIdLst>
     <p:sldId id="281" r:id="rId2"/>
     <p:sldId id="257" r:id="rId3"/>
     <p:sldId id="282" r:id="rId4"/>
-    <p:sldId id="264" r:id="rId5"/>
-    <p:sldId id="275" r:id="rId6"/>
-    <p:sldId id="280" r:id="rId7"/>
+    <p:sldId id="285" r:id="rId5"/>
+    <p:sldId id="286" r:id="rId6"/>
+    <p:sldId id="287" r:id="rId7"/>
+    <p:sldId id="288" r:id="rId8"/>
+    <p:sldId id="289" r:id="rId9"/>
+    <p:sldId id="290" r:id="rId10"/>
+    <p:sldId id="291" r:id="rId11"/>
+    <p:sldId id="292" r:id="rId12"/>
+    <p:sldId id="293" r:id="rId13"/>
+    <p:sldId id="294" r:id="rId14"/>
+    <p:sldId id="295" r:id="rId15"/>
+    <p:sldId id="296" r:id="rId16"/>
+    <p:sldId id="297" r:id="rId17"/>
+    <p:sldId id="300" r:id="rId18"/>
+    <p:sldId id="298" r:id="rId19"/>
+    <p:sldId id="299" r:id="rId20"/>
+    <p:sldId id="275" r:id="rId21"/>
+    <p:sldId id="301" r:id="rId22"/>
+    <p:sldId id="280" r:id="rId23"/>
   </p:sldIdLst>
   <p:sldSz cx="12192000" cy="6858000"/>
   <p:notesSz cx="6858000" cy="9144000"/>
@@ -23,9 +39,8 @@
         <p:sld r:id="rId2"/>
         <p:sld r:id="rId3"/>
         <p:sld r:id="rId4"/>
-        <p:sld r:id="rId5"/>
-        <p:sld r:id="rId6"/>
-        <p:sld r:id="rId7"/>
+        <p:sld r:id="rId21"/>
+        <p:sld r:id="rId23"/>
       </p:sldLst>
     </p:custShow>
     <p:custShow name="Streaming" id="1">
@@ -33,7 +48,6 @@
         <p:sld r:id="rId2"/>
         <p:sld r:id="rId3"/>
         <p:sld r:id="rId4"/>
-        <p:sld r:id="rId5"/>
       </p:sldLst>
     </p:custShow>
   </p:custShowLst>
@@ -233,7 +247,7 @@
           <a:p>
             <a:fld id="{E1184886-9C14-F646-94FD-4C50F4C24EDB}" type="datetimeFigureOut">
               <a:rPr lang="de-CH" smtClean="0"/>
-              <a:t>14.06.26</a:t>
+              <a:t>15.06.26</a:t>
             </a:fld>
             <a:endParaRPr lang="de-CH"/>
           </a:p>
@@ -589,6 +603,647 @@
 </p:notes>
 </file>
 
+<file path=ppt/notesSlides/notesSlide2.xml><?xml version="1.0" encoding="utf-8"?>
+<p:notes xmlns:a="http://schemas.openxmlformats.org/drawingml/2006/main" xmlns:r="http://schemas.openxmlformats.org/officeDocument/2006/relationships" xmlns:p="http://schemas.openxmlformats.org/presentationml/2006/main">
+  <p:cSld>
+    <p:spTree>
+      <p:nvGrpSpPr>
+        <p:cNvPr id="1" name=""/>
+        <p:cNvGrpSpPr/>
+        <p:nvPr/>
+      </p:nvGrpSpPr>
+      <p:grpSpPr>
+        <a:xfrm>
+          <a:off x="0" y="0"/>
+          <a:ext cx="0" cy="0"/>
+          <a:chOff x="0" y="0"/>
+          <a:chExt cx="0" cy="0"/>
+        </a:xfrm>
+      </p:grpSpPr>
+      <p:sp>
+        <p:nvSpPr>
+          <p:cNvPr id="2" name="Slide Image Placeholder 1"/>
+          <p:cNvSpPr>
+            <a:spLocks noGrp="1" noRot="1" noChangeAspect="1"/>
+          </p:cNvSpPr>
+          <p:nvPr>
+            <p:ph type="sldImg"/>
+          </p:nvPr>
+        </p:nvSpPr>
+        <p:spPr/>
+      </p:sp>
+      <p:sp>
+        <p:nvSpPr>
+          <p:cNvPr id="3" name="Notes Placeholder 2"/>
+          <p:cNvSpPr>
+            <a:spLocks noGrp="1"/>
+          </p:cNvSpPr>
+          <p:nvPr>
+            <p:ph type="body" idx="1"/>
+          </p:nvPr>
+        </p:nvSpPr>
+        <p:spPr/>
+        <p:txBody>
+          <a:bodyPr/>
+          <a:lstStyle/>
+          <a:p>
+            <a:endParaRPr lang="de-CH" dirty="0"/>
+          </a:p>
+        </p:txBody>
+      </p:sp>
+      <p:sp>
+        <p:nvSpPr>
+          <p:cNvPr id="4" name="Slide Number Placeholder 3"/>
+          <p:cNvSpPr>
+            <a:spLocks noGrp="1"/>
+          </p:cNvSpPr>
+          <p:nvPr>
+            <p:ph type="sldNum" sz="quarter" idx="5"/>
+          </p:nvPr>
+        </p:nvSpPr>
+        <p:spPr/>
+        <p:txBody>
+          <a:bodyPr/>
+          <a:lstStyle/>
+          <a:p>
+            <a:fld id="{6F406B0D-CDB9-7342-BFE1-3BBA81393C61}" type="slidenum">
+              <a:rPr lang="de-CH" smtClean="0"/>
+              <a:t>3</a:t>
+            </a:fld>
+            <a:endParaRPr lang="de-CH"/>
+          </a:p>
+        </p:txBody>
+      </p:sp>
+    </p:spTree>
+    <p:extLst>
+      <p:ext uri="{BB962C8B-B14F-4D97-AF65-F5344CB8AC3E}">
+        <p14:creationId xmlns:p14="http://schemas.microsoft.com/office/powerpoint/2010/main" val="4115400308"/>
+      </p:ext>
+    </p:extLst>
+  </p:cSld>
+  <p:clrMapOvr>
+    <a:masterClrMapping/>
+  </p:clrMapOvr>
+</p:notes>
+</file>
+
+<file path=ppt/notesSlides/notesSlide3.xml><?xml version="1.0" encoding="utf-8"?>
+<p:notes xmlns:a="http://schemas.openxmlformats.org/drawingml/2006/main" xmlns:r="http://schemas.openxmlformats.org/officeDocument/2006/relationships" xmlns:p="http://schemas.openxmlformats.org/presentationml/2006/main">
+  <p:cSld>
+    <p:spTree>
+      <p:nvGrpSpPr>
+        <p:cNvPr id="1" name=""/>
+        <p:cNvGrpSpPr/>
+        <p:nvPr/>
+      </p:nvGrpSpPr>
+      <p:grpSpPr>
+        <a:xfrm>
+          <a:off x="0" y="0"/>
+          <a:ext cx="0" cy="0"/>
+          <a:chOff x="0" y="0"/>
+          <a:chExt cx="0" cy="0"/>
+        </a:xfrm>
+      </p:grpSpPr>
+      <p:sp>
+        <p:nvSpPr>
+          <p:cNvPr id="2" name="Slide Image Placeholder 1"/>
+          <p:cNvSpPr>
+            <a:spLocks noGrp="1" noRot="1" noChangeAspect="1"/>
+          </p:cNvSpPr>
+          <p:nvPr>
+            <p:ph type="sldImg"/>
+          </p:nvPr>
+        </p:nvSpPr>
+        <p:spPr/>
+      </p:sp>
+      <p:sp>
+        <p:nvSpPr>
+          <p:cNvPr id="3" name="Notes Placeholder 2"/>
+          <p:cNvSpPr>
+            <a:spLocks noGrp="1"/>
+          </p:cNvSpPr>
+          <p:nvPr>
+            <p:ph type="body" idx="1"/>
+          </p:nvPr>
+        </p:nvSpPr>
+        <p:spPr/>
+        <p:txBody>
+          <a:bodyPr/>
+          <a:lstStyle/>
+          <a:p>
+            <a:endParaRPr lang="de-CH" dirty="0"/>
+          </a:p>
+        </p:txBody>
+      </p:sp>
+      <p:sp>
+        <p:nvSpPr>
+          <p:cNvPr id="4" name="Slide Number Placeholder 3"/>
+          <p:cNvSpPr>
+            <a:spLocks noGrp="1"/>
+          </p:cNvSpPr>
+          <p:nvPr>
+            <p:ph type="sldNum" sz="quarter" idx="5"/>
+          </p:nvPr>
+        </p:nvSpPr>
+        <p:spPr/>
+        <p:txBody>
+          <a:bodyPr/>
+          <a:lstStyle/>
+          <a:p>
+            <a:fld id="{6F406B0D-CDB9-7342-BFE1-3BBA81393C61}" type="slidenum">
+              <a:rPr lang="de-CH" smtClean="0"/>
+              <a:t>6</a:t>
+            </a:fld>
+            <a:endParaRPr lang="de-CH"/>
+          </a:p>
+        </p:txBody>
+      </p:sp>
+    </p:spTree>
+    <p:extLst>
+      <p:ext uri="{BB962C8B-B14F-4D97-AF65-F5344CB8AC3E}">
+        <p14:creationId xmlns:p14="http://schemas.microsoft.com/office/powerpoint/2010/main" val="2607970860"/>
+      </p:ext>
+    </p:extLst>
+  </p:cSld>
+  <p:clrMapOvr>
+    <a:masterClrMapping/>
+  </p:clrMapOvr>
+</p:notes>
+</file>
+
+<file path=ppt/notesSlides/notesSlide4.xml><?xml version="1.0" encoding="utf-8"?>
+<p:notes xmlns:a="http://schemas.openxmlformats.org/drawingml/2006/main" xmlns:r="http://schemas.openxmlformats.org/officeDocument/2006/relationships" xmlns:p="http://schemas.openxmlformats.org/presentationml/2006/main">
+  <p:cSld>
+    <p:spTree>
+      <p:nvGrpSpPr>
+        <p:cNvPr id="1" name=""/>
+        <p:cNvGrpSpPr/>
+        <p:nvPr/>
+      </p:nvGrpSpPr>
+      <p:grpSpPr>
+        <a:xfrm>
+          <a:off x="0" y="0"/>
+          <a:ext cx="0" cy="0"/>
+          <a:chOff x="0" y="0"/>
+          <a:chExt cx="0" cy="0"/>
+        </a:xfrm>
+      </p:grpSpPr>
+      <p:sp>
+        <p:nvSpPr>
+          <p:cNvPr id="2" name="Slide Image Placeholder 1"/>
+          <p:cNvSpPr>
+            <a:spLocks noGrp="1" noRot="1" noChangeAspect="1"/>
+          </p:cNvSpPr>
+          <p:nvPr>
+            <p:ph type="sldImg"/>
+          </p:nvPr>
+        </p:nvSpPr>
+        <p:spPr/>
+      </p:sp>
+      <p:sp>
+        <p:nvSpPr>
+          <p:cNvPr id="3" name="Notes Placeholder 2"/>
+          <p:cNvSpPr>
+            <a:spLocks noGrp="1"/>
+          </p:cNvSpPr>
+          <p:nvPr>
+            <p:ph type="body" idx="1"/>
+          </p:nvPr>
+        </p:nvSpPr>
+        <p:spPr/>
+        <p:txBody>
+          <a:bodyPr/>
+          <a:lstStyle/>
+          <a:p>
+            <a:r>
+              <a:rPr lang="de-CH" dirty="0" err="1"/>
+              <a:t>Xgboost</a:t>
+            </a:r>
+            <a:r>
+              <a:rPr lang="de-CH" dirty="0"/>
+              <a:t> fast überall am besten</a:t>
+            </a:r>
+          </a:p>
+          <a:p>
+            <a:r>
+              <a:rPr lang="de-CH" sz="1200" kern="1200" dirty="0" err="1">
+                <a:solidFill>
+                  <a:schemeClr val="tx1"/>
+                </a:solidFill>
+                <a:latin typeface="+mn-lt"/>
+                <a:ea typeface="+mn-ea"/>
+                <a:cs typeface="+mn-cs"/>
+              </a:rPr>
+              <a:t>Kindle_Store</a:t>
+            </a:r>
+            <a:r>
+              <a:rPr lang="de-CH" sz="1200" kern="1200" dirty="0">
+                <a:solidFill>
+                  <a:schemeClr val="tx1"/>
+                </a:solidFill>
+                <a:latin typeface="+mn-lt"/>
+                <a:ea typeface="+mn-ea"/>
+                <a:cs typeface="+mn-cs"/>
+              </a:rPr>
+              <a:t> für FCNN </a:t>
+            </a:r>
+            <a:r>
+              <a:rPr lang="de-CH" sz="1200" kern="1200" dirty="0" err="1">
+                <a:solidFill>
+                  <a:schemeClr val="tx1"/>
+                </a:solidFill>
+                <a:latin typeface="+mn-lt"/>
+                <a:ea typeface="+mn-ea"/>
+                <a:cs typeface="+mn-cs"/>
+              </a:rPr>
+              <a:t>umgewöhnlich</a:t>
+            </a:r>
+            <a:r>
+              <a:rPr lang="de-CH" sz="1200" kern="1200" dirty="0">
+                <a:solidFill>
+                  <a:schemeClr val="tx1"/>
+                </a:solidFill>
+                <a:latin typeface="+mn-lt"/>
+                <a:ea typeface="+mn-ea"/>
+                <a:cs typeface="+mn-cs"/>
+              </a:rPr>
+              <a:t> einfach</a:t>
+            </a:r>
+          </a:p>
+          <a:p>
+            <a:pPr marL="0" marR="0" lvl="0" indent="0" algn="l" defTabSz="914400" rtl="0" eaLnBrk="1" fontAlgn="auto" latinLnBrk="0" hangingPunct="1">
+              <a:lnSpc>
+                <a:spcPct val="100000"/>
+              </a:lnSpc>
+              <a:spcBef>
+                <a:spcPts val="0"/>
+              </a:spcBef>
+              <a:spcAft>
+                <a:spcPts val="0"/>
+              </a:spcAft>
+              <a:buClrTx/>
+              <a:buSzTx/>
+              <a:buFontTx/>
+              <a:buNone/>
+              <a:tabLst/>
+              <a:defRPr/>
+            </a:pPr>
+            <a:r>
+              <a:rPr lang="en-CH" sz="1200" kern="1200" dirty="0">
+                <a:solidFill>
+                  <a:schemeClr val="tx1"/>
+                </a:solidFill>
+                <a:latin typeface="+mn-lt"/>
+                <a:ea typeface="+mn-ea"/>
+                <a:cs typeface="+mn-cs"/>
+              </a:rPr>
+              <a:t>Sports &amp; Outdoors ist auffällig </a:t>
+            </a:r>
+            <a:r>
+              <a:rPr lang="en-CH" sz="1200" kern="1200" dirty="0">
+                <a:solidFill>
+                  <a:schemeClr val="tx1"/>
+                </a:solidFill>
+                <a:latin typeface="+mn-lt"/>
+                <a:ea typeface="+mn-ea"/>
+                <a:cs typeface="+mn-cs"/>
+                <a:sym typeface="Wingdings" pitchFamily="2" charset="2"/>
+              </a:rPr>
+              <a:t> xgboost 5% besser als FCNN</a:t>
+            </a:r>
+          </a:p>
+          <a:p>
+            <a:pPr marL="0" marR="0" lvl="0" indent="0" algn="l" defTabSz="914400" rtl="0" eaLnBrk="1" fontAlgn="auto" latinLnBrk="0" hangingPunct="1">
+              <a:lnSpc>
+                <a:spcPct val="100000"/>
+              </a:lnSpc>
+              <a:spcBef>
+                <a:spcPts val="0"/>
+              </a:spcBef>
+              <a:spcAft>
+                <a:spcPts val="0"/>
+              </a:spcAft>
+              <a:buClrTx/>
+              <a:buSzTx/>
+              <a:buFontTx/>
+              <a:buNone/>
+              <a:tabLst/>
+              <a:defRPr/>
+            </a:pPr>
+            <a:r>
+              <a:rPr lang="en-CH" sz="1200" kern="1200" dirty="0">
+                <a:solidFill>
+                  <a:schemeClr val="tx1"/>
+                </a:solidFill>
+                <a:latin typeface="+mn-lt"/>
+                <a:ea typeface="+mn-ea"/>
+                <a:cs typeface="+mn-cs"/>
+                <a:sym typeface="Wingdings" pitchFamily="2" charset="2"/>
+              </a:rPr>
+              <a:t>Movies_and_TV für alle schwierig</a:t>
+            </a:r>
+            <a:endParaRPr lang="en-CH" sz="1200" kern="1200" dirty="0">
+              <a:solidFill>
+                <a:schemeClr val="tx1"/>
+              </a:solidFill>
+              <a:latin typeface="+mn-lt"/>
+              <a:ea typeface="+mn-ea"/>
+              <a:cs typeface="+mn-cs"/>
+            </a:endParaRPr>
+          </a:p>
+          <a:p>
+            <a:endParaRPr lang="de-CH" dirty="0"/>
+          </a:p>
+        </p:txBody>
+      </p:sp>
+      <p:sp>
+        <p:nvSpPr>
+          <p:cNvPr id="4" name="Slide Number Placeholder 3"/>
+          <p:cNvSpPr>
+            <a:spLocks noGrp="1"/>
+          </p:cNvSpPr>
+          <p:nvPr>
+            <p:ph type="sldNum" sz="quarter" idx="5"/>
+          </p:nvPr>
+        </p:nvSpPr>
+        <p:spPr/>
+        <p:txBody>
+          <a:bodyPr/>
+          <a:lstStyle/>
+          <a:p>
+            <a:fld id="{6F406B0D-CDB9-7342-BFE1-3BBA81393C61}" type="slidenum">
+              <a:rPr lang="de-CH" smtClean="0"/>
+              <a:t>7</a:t>
+            </a:fld>
+            <a:endParaRPr lang="de-CH"/>
+          </a:p>
+        </p:txBody>
+      </p:sp>
+    </p:spTree>
+    <p:extLst>
+      <p:ext uri="{BB962C8B-B14F-4D97-AF65-F5344CB8AC3E}">
+        <p14:creationId xmlns:p14="http://schemas.microsoft.com/office/powerpoint/2010/main" val="3248071174"/>
+      </p:ext>
+    </p:extLst>
+  </p:cSld>
+  <p:clrMapOvr>
+    <a:masterClrMapping/>
+  </p:clrMapOvr>
+</p:notes>
+</file>
+
+<file path=ppt/notesSlides/notesSlide5.xml><?xml version="1.0" encoding="utf-8"?>
+<p:notes xmlns:a="http://schemas.openxmlformats.org/drawingml/2006/main" xmlns:r="http://schemas.openxmlformats.org/officeDocument/2006/relationships" xmlns:p="http://schemas.openxmlformats.org/presentationml/2006/main">
+  <p:cSld>
+    <p:spTree>
+      <p:nvGrpSpPr>
+        <p:cNvPr id="1" name=""/>
+        <p:cNvGrpSpPr/>
+        <p:nvPr/>
+      </p:nvGrpSpPr>
+      <p:grpSpPr>
+        <a:xfrm>
+          <a:off x="0" y="0"/>
+          <a:ext cx="0" cy="0"/>
+          <a:chOff x="0" y="0"/>
+          <a:chExt cx="0" cy="0"/>
+        </a:xfrm>
+      </p:grpSpPr>
+      <p:sp>
+        <p:nvSpPr>
+          <p:cNvPr id="2" name="Slide Image Placeholder 1"/>
+          <p:cNvSpPr>
+            <a:spLocks noGrp="1" noRot="1" noChangeAspect="1"/>
+          </p:cNvSpPr>
+          <p:nvPr>
+            <p:ph type="sldImg"/>
+          </p:nvPr>
+        </p:nvSpPr>
+        <p:spPr/>
+      </p:sp>
+      <p:sp>
+        <p:nvSpPr>
+          <p:cNvPr id="3" name="Notes Placeholder 2"/>
+          <p:cNvSpPr>
+            <a:spLocks noGrp="1"/>
+          </p:cNvSpPr>
+          <p:nvPr>
+            <p:ph type="body" idx="1"/>
+          </p:nvPr>
+        </p:nvSpPr>
+        <p:spPr/>
+        <p:txBody>
+          <a:bodyPr/>
+          <a:lstStyle/>
+          <a:p>
+            <a:endParaRPr lang="de-CH" dirty="0"/>
+          </a:p>
+        </p:txBody>
+      </p:sp>
+      <p:sp>
+        <p:nvSpPr>
+          <p:cNvPr id="4" name="Slide Number Placeholder 3"/>
+          <p:cNvSpPr>
+            <a:spLocks noGrp="1"/>
+          </p:cNvSpPr>
+          <p:nvPr>
+            <p:ph type="sldNum" sz="quarter" idx="5"/>
+          </p:nvPr>
+        </p:nvSpPr>
+        <p:spPr/>
+        <p:txBody>
+          <a:bodyPr/>
+          <a:lstStyle/>
+          <a:p>
+            <a:fld id="{6F406B0D-CDB9-7342-BFE1-3BBA81393C61}" type="slidenum">
+              <a:rPr lang="de-CH" smtClean="0"/>
+              <a:t>15</a:t>
+            </a:fld>
+            <a:endParaRPr lang="de-CH"/>
+          </a:p>
+        </p:txBody>
+      </p:sp>
+    </p:spTree>
+    <p:extLst>
+      <p:ext uri="{BB962C8B-B14F-4D97-AF65-F5344CB8AC3E}">
+        <p14:creationId xmlns:p14="http://schemas.microsoft.com/office/powerpoint/2010/main" val="763480941"/>
+      </p:ext>
+    </p:extLst>
+  </p:cSld>
+  <p:clrMapOvr>
+    <a:masterClrMapping/>
+  </p:clrMapOvr>
+</p:notes>
+</file>
+
+<file path=ppt/notesSlides/notesSlide6.xml><?xml version="1.0" encoding="utf-8"?>
+<p:notes xmlns:a="http://schemas.openxmlformats.org/drawingml/2006/main" xmlns:r="http://schemas.openxmlformats.org/officeDocument/2006/relationships" xmlns:p="http://schemas.openxmlformats.org/presentationml/2006/main">
+  <p:cSld>
+    <p:spTree>
+      <p:nvGrpSpPr>
+        <p:cNvPr id="1" name=""/>
+        <p:cNvGrpSpPr/>
+        <p:nvPr/>
+      </p:nvGrpSpPr>
+      <p:grpSpPr>
+        <a:xfrm>
+          <a:off x="0" y="0"/>
+          <a:ext cx="0" cy="0"/>
+          <a:chOff x="0" y="0"/>
+          <a:chExt cx="0" cy="0"/>
+        </a:xfrm>
+      </p:grpSpPr>
+      <p:sp>
+        <p:nvSpPr>
+          <p:cNvPr id="2" name="Slide Image Placeholder 1"/>
+          <p:cNvSpPr>
+            <a:spLocks noGrp="1" noRot="1" noChangeAspect="1"/>
+          </p:cNvSpPr>
+          <p:nvPr>
+            <p:ph type="sldImg"/>
+          </p:nvPr>
+        </p:nvSpPr>
+        <p:spPr/>
+      </p:sp>
+      <p:sp>
+        <p:nvSpPr>
+          <p:cNvPr id="3" name="Notes Placeholder 2"/>
+          <p:cNvSpPr>
+            <a:spLocks noGrp="1"/>
+          </p:cNvSpPr>
+          <p:nvPr>
+            <p:ph type="body" idx="1"/>
+          </p:nvPr>
+        </p:nvSpPr>
+        <p:spPr/>
+        <p:txBody>
+          <a:bodyPr/>
+          <a:lstStyle/>
+          <a:p>
+            <a:endParaRPr lang="de-CH" dirty="0"/>
+          </a:p>
+        </p:txBody>
+      </p:sp>
+      <p:sp>
+        <p:nvSpPr>
+          <p:cNvPr id="4" name="Slide Number Placeholder 3"/>
+          <p:cNvSpPr>
+            <a:spLocks noGrp="1"/>
+          </p:cNvSpPr>
+          <p:nvPr>
+            <p:ph type="sldNum" sz="quarter" idx="5"/>
+          </p:nvPr>
+        </p:nvSpPr>
+        <p:spPr/>
+        <p:txBody>
+          <a:bodyPr/>
+          <a:lstStyle/>
+          <a:p>
+            <a:fld id="{6F406B0D-CDB9-7342-BFE1-3BBA81393C61}" type="slidenum">
+              <a:rPr lang="de-CH" smtClean="0"/>
+              <a:t>16</a:t>
+            </a:fld>
+            <a:endParaRPr lang="de-CH"/>
+          </a:p>
+        </p:txBody>
+      </p:sp>
+    </p:spTree>
+    <p:extLst>
+      <p:ext uri="{BB962C8B-B14F-4D97-AF65-F5344CB8AC3E}">
+        <p14:creationId xmlns:p14="http://schemas.microsoft.com/office/powerpoint/2010/main" val="4023533460"/>
+      </p:ext>
+    </p:extLst>
+  </p:cSld>
+  <p:clrMapOvr>
+    <a:masterClrMapping/>
+  </p:clrMapOvr>
+</p:notes>
+</file>
+
+<file path=ppt/notesSlides/notesSlide7.xml><?xml version="1.0" encoding="utf-8"?>
+<p:notes xmlns:a="http://schemas.openxmlformats.org/drawingml/2006/main" xmlns:r="http://schemas.openxmlformats.org/officeDocument/2006/relationships" xmlns:p="http://schemas.openxmlformats.org/presentationml/2006/main">
+  <p:cSld>
+    <p:spTree>
+      <p:nvGrpSpPr>
+        <p:cNvPr id="1" name=""/>
+        <p:cNvGrpSpPr/>
+        <p:nvPr/>
+      </p:nvGrpSpPr>
+      <p:grpSpPr>
+        <a:xfrm>
+          <a:off x="0" y="0"/>
+          <a:ext cx="0" cy="0"/>
+          <a:chOff x="0" y="0"/>
+          <a:chExt cx="0" cy="0"/>
+        </a:xfrm>
+      </p:grpSpPr>
+      <p:sp>
+        <p:nvSpPr>
+          <p:cNvPr id="2" name="Slide Image Placeholder 1"/>
+          <p:cNvSpPr>
+            <a:spLocks noGrp="1" noRot="1" noChangeAspect="1"/>
+          </p:cNvSpPr>
+          <p:nvPr>
+            <p:ph type="sldImg"/>
+          </p:nvPr>
+        </p:nvSpPr>
+        <p:spPr/>
+      </p:sp>
+      <p:sp>
+        <p:nvSpPr>
+          <p:cNvPr id="3" name="Notes Placeholder 2"/>
+          <p:cNvSpPr>
+            <a:spLocks noGrp="1"/>
+          </p:cNvSpPr>
+          <p:nvPr>
+            <p:ph type="body" idx="1"/>
+          </p:nvPr>
+        </p:nvSpPr>
+        <p:spPr/>
+        <p:txBody>
+          <a:bodyPr/>
+          <a:lstStyle/>
+          <a:p>
+            <a:endParaRPr lang="de-CH" dirty="0"/>
+          </a:p>
+        </p:txBody>
+      </p:sp>
+      <p:sp>
+        <p:nvSpPr>
+          <p:cNvPr id="4" name="Slide Number Placeholder 3"/>
+          <p:cNvSpPr>
+            <a:spLocks noGrp="1"/>
+          </p:cNvSpPr>
+          <p:nvPr>
+            <p:ph type="sldNum" sz="quarter" idx="5"/>
+          </p:nvPr>
+        </p:nvSpPr>
+        <p:spPr/>
+        <p:txBody>
+          <a:bodyPr/>
+          <a:lstStyle/>
+          <a:p>
+            <a:fld id="{6F406B0D-CDB9-7342-BFE1-3BBA81393C61}" type="slidenum">
+              <a:rPr lang="de-CH" smtClean="0"/>
+              <a:t>21</a:t>
+            </a:fld>
+            <a:endParaRPr lang="de-CH"/>
+          </a:p>
+        </p:txBody>
+      </p:sp>
+    </p:spTree>
+    <p:extLst>
+      <p:ext uri="{BB962C8B-B14F-4D97-AF65-F5344CB8AC3E}">
+        <p14:creationId xmlns:p14="http://schemas.microsoft.com/office/powerpoint/2010/main" val="2801038869"/>
+      </p:ext>
+    </p:extLst>
+  </p:cSld>
+  <p:clrMapOvr>
+    <a:masterClrMapping/>
+  </p:clrMapOvr>
+</p:notes>
+</file>
+
 <file path=ppt/slideLayouts/slideLayout1.xml><?xml version="1.0" encoding="utf-8"?>
 <p:sldLayout xmlns:a="http://schemas.openxmlformats.org/drawingml/2006/main" xmlns:r="http://schemas.openxmlformats.org/officeDocument/2006/relationships" xmlns:p="http://schemas.openxmlformats.org/presentationml/2006/main" type="title" preserve="1">
   <p:cSld name="Title Slide">
@@ -738,7 +1393,7 @@
           <a:p>
             <a:fld id="{D01C3EBF-35A5-024B-8337-1FF7CA970669}" type="datetime4">
               <a:rPr lang="de-CH" smtClean="0"/>
-              <a:t>14. Juni 2026</a:t>
+              <a:t>15. Juni 2026</a:t>
             </a:fld>
             <a:endParaRPr lang="en-CH" dirty="0"/>
           </a:p>
@@ -942,7 +1597,7 @@
           <a:p>
             <a:fld id="{FABC503F-E78F-6642-9C43-7F779DDA9637}" type="datetime4">
               <a:rPr lang="de-CH" smtClean="0"/>
-              <a:t>14. Juni 2026</a:t>
+              <a:t>15. Juni 2026</a:t>
             </a:fld>
             <a:endParaRPr lang="en-CH"/>
           </a:p>
@@ -1156,7 +1811,7 @@
           <a:p>
             <a:fld id="{84D58EFF-D565-754D-8E1D-581A9C2ED513}" type="datetime4">
               <a:rPr lang="de-CH" smtClean="0"/>
-              <a:t>14. Juni 2026</a:t>
+              <a:t>15. Juni 2026</a:t>
             </a:fld>
             <a:endParaRPr lang="en-CH"/>
           </a:p>
@@ -1360,7 +2015,7 @@
           <a:p>
             <a:fld id="{EE15D7BA-2F5F-8E43-91CB-647D382EDB87}" type="datetime4">
               <a:rPr lang="de-CH" smtClean="0"/>
-              <a:t>14. Juni 2026</a:t>
+              <a:t>15. Juni 2026</a:t>
             </a:fld>
             <a:endParaRPr lang="en-CH"/>
           </a:p>
@@ -1640,7 +2295,7 @@
           <a:p>
             <a:fld id="{0AA40E02-4391-BD46-B0E7-635382A657F3}" type="datetime4">
               <a:rPr lang="de-CH" smtClean="0"/>
-              <a:t>14. Juni 2026</a:t>
+              <a:t>15. Juni 2026</a:t>
             </a:fld>
             <a:endParaRPr lang="en-CH"/>
           </a:p>
@@ -1912,7 +2567,7 @@
           <a:p>
             <a:fld id="{CB6715BD-3BCD-B048-A677-0FC99A942057}" type="datetime4">
               <a:rPr lang="de-CH" smtClean="0"/>
-              <a:t>14. Juni 2026</a:t>
+              <a:t>15. Juni 2026</a:t>
             </a:fld>
             <a:endParaRPr lang="en-CH"/>
           </a:p>
@@ -2331,7 +2986,7 @@
           <a:p>
             <a:fld id="{5433D90D-DE43-734C-AE99-F68BD94FD95C}" type="datetime4">
               <a:rPr lang="de-CH" smtClean="0"/>
-              <a:t>14. Juni 2026</a:t>
+              <a:t>15. Juni 2026</a:t>
             </a:fld>
             <a:endParaRPr lang="en-CH"/>
           </a:p>
@@ -2477,7 +3132,7 @@
           <a:p>
             <a:fld id="{8847DC07-8BC2-F84E-8FB1-AB2E6893E256}" type="datetime4">
               <a:rPr lang="de-CH" smtClean="0"/>
-              <a:t>14. Juni 2026</a:t>
+              <a:t>15. Juni 2026</a:t>
             </a:fld>
             <a:endParaRPr lang="en-CH"/>
           </a:p>
@@ -2594,7 +3249,7 @@
           <a:p>
             <a:fld id="{14C5E3DE-4EE6-2348-ACB8-6E5F19BEC610}" type="datetime4">
               <a:rPr lang="de-CH" smtClean="0"/>
-              <a:t>14. Juni 2026</a:t>
+              <a:t>15. Juni 2026</a:t>
             </a:fld>
             <a:endParaRPr lang="en-CH"/>
           </a:p>
@@ -2911,7 +3566,7 @@
           <a:p>
             <a:fld id="{3069C634-6B84-4143-A0D4-F8B2524245DA}" type="datetime4">
               <a:rPr lang="de-CH" smtClean="0"/>
-              <a:t>14. Juni 2026</a:t>
+              <a:t>15. Juni 2026</a:t>
             </a:fld>
             <a:endParaRPr lang="en-CH"/>
           </a:p>
@@ -3204,7 +3859,7 @@
           <a:p>
             <a:fld id="{6A59641C-6DA2-E742-8275-6CFD523E67DF}" type="datetime4">
               <a:rPr lang="de-CH" smtClean="0"/>
-              <a:t>14. Juni 2026</a:t>
+              <a:t>15. Juni 2026</a:t>
             </a:fld>
             <a:endParaRPr lang="en-CH"/>
           </a:p>
@@ -3451,7 +4106,7 @@
           <a:p>
             <a:fld id="{91BF76C2-678E-C049-84B9-885C068ABCCC}" type="datetime4">
               <a:rPr lang="de-CH" smtClean="0"/>
-              <a:t>14. Juni 2026</a:t>
+              <a:t>15. Juni 2026</a:t>
             </a:fld>
             <a:endParaRPr lang="en-CH"/>
           </a:p>
@@ -4118,6 +4773,2848 @@
 </p:sld>
 </file>
 
+<file path=ppt/slides/slide10.xml><?xml version="1.0" encoding="utf-8"?>
+<p:sld xmlns:a="http://schemas.openxmlformats.org/drawingml/2006/main" xmlns:r="http://schemas.openxmlformats.org/officeDocument/2006/relationships" xmlns:p="http://schemas.openxmlformats.org/presentationml/2006/main">
+  <p:cSld>
+    <p:spTree>
+      <p:nvGrpSpPr>
+        <p:cNvPr id="1" name=""/>
+        <p:cNvGrpSpPr/>
+        <p:nvPr/>
+      </p:nvGrpSpPr>
+      <p:grpSpPr>
+        <a:xfrm>
+          <a:off x="0" y="0"/>
+          <a:ext cx="0" cy="0"/>
+          <a:chOff x="0" y="0"/>
+          <a:chExt cx="0" cy="0"/>
+        </a:xfrm>
+      </p:grpSpPr>
+      <p:sp>
+        <p:nvSpPr>
+          <p:cNvPr id="2" name="Title 1">
+            <a:extLst>
+              <a:ext uri="{FF2B5EF4-FFF2-40B4-BE49-F238E27FC236}">
+                <a16:creationId xmlns:a16="http://schemas.microsoft.com/office/drawing/2014/main" id="{C1E3A41B-37A9-66BB-36C9-65705D888ADF}"/>
+              </a:ext>
+            </a:extLst>
+          </p:cNvPr>
+          <p:cNvSpPr>
+            <a:spLocks noGrp="1"/>
+          </p:cNvSpPr>
+          <p:nvPr>
+            <p:ph type="title"/>
+          </p:nvPr>
+        </p:nvSpPr>
+        <p:spPr/>
+        <p:txBody>
+          <a:bodyPr/>
+          <a:lstStyle/>
+          <a:p>
+            <a:r>
+              <a:rPr lang="de-CH" dirty="0" err="1"/>
+              <a:t>Accuracy</a:t>
+            </a:r>
+            <a:r>
+              <a:rPr lang="de-CH" dirty="0"/>
+              <a:t> </a:t>
+            </a:r>
+            <a:r>
+              <a:rPr lang="de-CH" dirty="0" err="1"/>
+              <a:t>by</a:t>
+            </a:r>
+            <a:r>
+              <a:rPr lang="de-CH" dirty="0"/>
+              <a:t> Text </a:t>
+            </a:r>
+            <a:r>
+              <a:rPr lang="de-CH" dirty="0" err="1"/>
+              <a:t>Length</a:t>
+            </a:r>
+            <a:endParaRPr lang="de-CH" dirty="0"/>
+          </a:p>
+        </p:txBody>
+      </p:sp>
+      <p:sp>
+        <p:nvSpPr>
+          <p:cNvPr id="4" name="Date Placeholder 3">
+            <a:extLst>
+              <a:ext uri="{FF2B5EF4-FFF2-40B4-BE49-F238E27FC236}">
+                <a16:creationId xmlns:a16="http://schemas.microsoft.com/office/drawing/2014/main" id="{35AFB39A-7AFD-97C9-6807-41533670CA57}"/>
+              </a:ext>
+            </a:extLst>
+          </p:cNvPr>
+          <p:cNvSpPr>
+            <a:spLocks noGrp="1"/>
+          </p:cNvSpPr>
+          <p:nvPr>
+            <p:ph type="dt" sz="half" idx="10"/>
+          </p:nvPr>
+        </p:nvSpPr>
+        <p:spPr/>
+        <p:txBody>
+          <a:bodyPr/>
+          <a:lstStyle/>
+          <a:p>
+            <a:fld id="{EE15D7BA-2F5F-8E43-91CB-647D382EDB87}" type="datetime4">
+              <a:rPr lang="de-CH" smtClean="0"/>
+              <a:t>15. Juni 2026</a:t>
+            </a:fld>
+            <a:endParaRPr lang="en-CH"/>
+          </a:p>
+        </p:txBody>
+      </p:sp>
+      <p:sp>
+        <p:nvSpPr>
+          <p:cNvPr id="5" name="Footer Placeholder 4">
+            <a:extLst>
+              <a:ext uri="{FF2B5EF4-FFF2-40B4-BE49-F238E27FC236}">
+                <a16:creationId xmlns:a16="http://schemas.microsoft.com/office/drawing/2014/main" id="{6982E87C-38FE-42A3-2567-D2902DC6F276}"/>
+              </a:ext>
+            </a:extLst>
+          </p:cNvPr>
+          <p:cNvSpPr>
+            <a:spLocks noGrp="1"/>
+          </p:cNvSpPr>
+          <p:nvPr>
+            <p:ph type="ftr" sz="quarter" idx="11"/>
+          </p:nvPr>
+        </p:nvSpPr>
+        <p:spPr/>
+        <p:txBody>
+          <a:bodyPr/>
+          <a:lstStyle/>
+          <a:p>
+            <a:r>
+              <a:rPr lang="en-GB"/>
+              <a:t>Text Analysis- Svetlana Khominich, Ralph Müller, David Beer </a:t>
+            </a:r>
+            <a:endParaRPr lang="en-CH" dirty="0"/>
+          </a:p>
+        </p:txBody>
+      </p:sp>
+      <p:sp>
+        <p:nvSpPr>
+          <p:cNvPr id="6" name="Slide Number Placeholder 5">
+            <a:extLst>
+              <a:ext uri="{FF2B5EF4-FFF2-40B4-BE49-F238E27FC236}">
+                <a16:creationId xmlns:a16="http://schemas.microsoft.com/office/drawing/2014/main" id="{0A29BA85-097B-7D3E-74A4-3210BA072918}"/>
+              </a:ext>
+            </a:extLst>
+          </p:cNvPr>
+          <p:cNvSpPr>
+            <a:spLocks noGrp="1"/>
+          </p:cNvSpPr>
+          <p:nvPr>
+            <p:ph type="sldNum" sz="quarter" idx="12"/>
+          </p:nvPr>
+        </p:nvSpPr>
+        <p:spPr/>
+        <p:txBody>
+          <a:bodyPr/>
+          <a:lstStyle/>
+          <a:p>
+            <a:fld id="{221FD296-2B0C-4A4B-AFAC-2E3A842869F0}" type="slidenum">
+              <a:rPr lang="en-CH" smtClean="0"/>
+              <a:t>10</a:t>
+            </a:fld>
+            <a:endParaRPr lang="en-CH"/>
+          </a:p>
+        </p:txBody>
+      </p:sp>
+      <p:pic>
+        <p:nvPicPr>
+          <p:cNvPr id="8" name="Content Placeholder 7">
+            <a:extLst>
+              <a:ext uri="{FF2B5EF4-FFF2-40B4-BE49-F238E27FC236}">
+                <a16:creationId xmlns:a16="http://schemas.microsoft.com/office/drawing/2014/main" id="{5369F6E4-6FC0-20AA-A685-D18A3187930C}"/>
+              </a:ext>
+            </a:extLst>
+          </p:cNvPr>
+          <p:cNvPicPr>
+            <a:picLocks noGrp="1" noChangeAspect="1"/>
+          </p:cNvPicPr>
+          <p:nvPr>
+            <p:ph idx="1"/>
+          </p:nvPr>
+        </p:nvPicPr>
+        <p:blipFill>
+          <a:blip r:embed="rId2"/>
+          <a:stretch>
+            <a:fillRect/>
+          </a:stretch>
+        </p:blipFill>
+        <p:spPr>
+          <a:xfrm>
+            <a:off x="256330" y="1217171"/>
+            <a:ext cx="11097470" cy="5548735"/>
+          </a:xfrm>
+          <a:prstGeom prst="rect">
+            <a:avLst/>
+          </a:prstGeom>
+        </p:spPr>
+      </p:pic>
+      <p:sp>
+        <p:nvSpPr>
+          <p:cNvPr id="9" name="Rounded Rectangular Callout 8">
+            <a:extLst>
+              <a:ext uri="{FF2B5EF4-FFF2-40B4-BE49-F238E27FC236}">
+                <a16:creationId xmlns:a16="http://schemas.microsoft.com/office/drawing/2014/main" id="{FDBD2C71-1D39-EF3F-15D5-07A1665810E2}"/>
+              </a:ext>
+            </a:extLst>
+          </p:cNvPr>
+          <p:cNvSpPr/>
+          <p:nvPr/>
+        </p:nvSpPr>
+        <p:spPr>
+          <a:xfrm>
+            <a:off x="9465013" y="4564170"/>
+            <a:ext cx="2296438" cy="1605776"/>
+          </a:xfrm>
+          <a:prstGeom prst="wedgeRoundRectCallout">
+            <a:avLst>
+              <a:gd name="adj1" fmla="val -95051"/>
+              <a:gd name="adj2" fmla="val -48060"/>
+              <a:gd name="adj3" fmla="val 16667"/>
+            </a:avLst>
+          </a:prstGeom>
+          <a:solidFill>
+            <a:schemeClr val="accent4">
+              <a:lumMod val="20000"/>
+              <a:lumOff val="80000"/>
+            </a:schemeClr>
+          </a:solidFill>
+        </p:spPr>
+        <p:style>
+          <a:lnRef idx="2">
+            <a:schemeClr val="accent1">
+              <a:shade val="15000"/>
+            </a:schemeClr>
+          </a:lnRef>
+          <a:fillRef idx="1">
+            <a:schemeClr val="accent1"/>
+          </a:fillRef>
+          <a:effectRef idx="0">
+            <a:schemeClr val="accent1"/>
+          </a:effectRef>
+          <a:fontRef idx="minor">
+            <a:schemeClr val="lt1"/>
+          </a:fontRef>
+        </p:style>
+        <p:txBody>
+          <a:bodyPr rtlCol="0" anchor="ctr"/>
+          <a:lstStyle/>
+          <a:p>
+            <a:r>
+              <a:rPr lang="en-GB" dirty="0">
+                <a:solidFill>
+                  <a:schemeClr val="tx1"/>
+                </a:solidFill>
+              </a:rPr>
+              <a:t>J</a:t>
+            </a:r>
+            <a:r>
+              <a:rPr lang="en-CH" dirty="0">
+                <a:solidFill>
+                  <a:schemeClr val="tx1"/>
+                </a:solidFill>
+              </a:rPr>
+              <a:t>e länger der Text, desto besser die Klassifikation…</a:t>
+            </a:r>
+          </a:p>
+        </p:txBody>
+      </p:sp>
+    </p:spTree>
+    <p:extLst>
+      <p:ext uri="{BB962C8B-B14F-4D97-AF65-F5344CB8AC3E}">
+        <p14:creationId xmlns:p14="http://schemas.microsoft.com/office/powerpoint/2010/main" val="4228767217"/>
+      </p:ext>
+    </p:extLst>
+  </p:cSld>
+  <p:clrMapOvr>
+    <a:masterClrMapping/>
+  </p:clrMapOvr>
+</p:sld>
+</file>
+
+<file path=ppt/slides/slide11.xml><?xml version="1.0" encoding="utf-8"?>
+<p:sld xmlns:a="http://schemas.openxmlformats.org/drawingml/2006/main" xmlns:r="http://schemas.openxmlformats.org/officeDocument/2006/relationships" xmlns:p="http://schemas.openxmlformats.org/presentationml/2006/main">
+  <p:cSld>
+    <p:spTree>
+      <p:nvGrpSpPr>
+        <p:cNvPr id="1" name=""/>
+        <p:cNvGrpSpPr/>
+        <p:nvPr/>
+      </p:nvGrpSpPr>
+      <p:grpSpPr>
+        <a:xfrm>
+          <a:off x="0" y="0"/>
+          <a:ext cx="0" cy="0"/>
+          <a:chOff x="0" y="0"/>
+          <a:chExt cx="0" cy="0"/>
+        </a:xfrm>
+      </p:grpSpPr>
+      <p:sp>
+        <p:nvSpPr>
+          <p:cNvPr id="2" name="Title 1">
+            <a:extLst>
+              <a:ext uri="{FF2B5EF4-FFF2-40B4-BE49-F238E27FC236}">
+                <a16:creationId xmlns:a16="http://schemas.microsoft.com/office/drawing/2014/main" id="{83C36689-4936-AD12-781B-A7F6AD2693AE}"/>
+              </a:ext>
+            </a:extLst>
+          </p:cNvPr>
+          <p:cNvSpPr>
+            <a:spLocks noGrp="1"/>
+          </p:cNvSpPr>
+          <p:nvPr>
+            <p:ph type="title"/>
+          </p:nvPr>
+        </p:nvSpPr>
+        <p:spPr/>
+        <p:txBody>
+          <a:bodyPr/>
+          <a:lstStyle/>
+          <a:p>
+            <a:r>
+              <a:rPr lang="de-CH" dirty="0"/>
+              <a:t>Schwierigkeitsgrad</a:t>
+            </a:r>
+          </a:p>
+        </p:txBody>
+      </p:sp>
+      <p:sp>
+        <p:nvSpPr>
+          <p:cNvPr id="3" name="Content Placeholder 2">
+            <a:extLst>
+              <a:ext uri="{FF2B5EF4-FFF2-40B4-BE49-F238E27FC236}">
+                <a16:creationId xmlns:a16="http://schemas.microsoft.com/office/drawing/2014/main" id="{7AB590AC-F7F1-4B44-467F-4378CC8400E0}"/>
+              </a:ext>
+            </a:extLst>
+          </p:cNvPr>
+          <p:cNvSpPr>
+            <a:spLocks noGrp="1"/>
+          </p:cNvSpPr>
+          <p:nvPr>
+            <p:ph idx="1"/>
+          </p:nvPr>
+        </p:nvSpPr>
+        <p:spPr/>
+        <p:txBody>
+          <a:bodyPr>
+            <a:normAutofit fontScale="25000" lnSpcReduction="20000"/>
+          </a:bodyPr>
+          <a:lstStyle/>
+          <a:p>
+            <a:r>
+              <a:rPr lang="de-CH" dirty="0"/>
+              <a:t>count    </a:t>
+            </a:r>
+            <a:r>
+              <a:rPr lang="de-CH" dirty="0" err="1"/>
+              <a:t>pct</a:t>
+            </a:r>
+            <a:endParaRPr lang="de-CH" dirty="0"/>
+          </a:p>
+          <a:p>
+            <a:r>
+              <a:rPr lang="de-CH" dirty="0" err="1"/>
+              <a:t>difficulty</a:t>
+            </a:r>
+            <a:r>
+              <a:rPr lang="de-CH" dirty="0"/>
+              <a:t>              </a:t>
+            </a:r>
+          </a:p>
+          <a:p>
+            <a:r>
+              <a:rPr lang="de-CH" dirty="0"/>
+              <a:t>0            6489  80.2%</a:t>
+            </a:r>
+          </a:p>
+          <a:p>
+            <a:r>
+              <a:rPr lang="de-CH" dirty="0"/>
+              <a:t>1             975  12.1%</a:t>
+            </a:r>
+          </a:p>
+          <a:p>
+            <a:r>
+              <a:rPr lang="de-CH" dirty="0"/>
+              <a:t>2             438   5.4%</a:t>
+            </a:r>
+          </a:p>
+          <a:p>
+            <a:r>
+              <a:rPr lang="de-CH" dirty="0"/>
+              <a:t>3             185   2.3%</a:t>
+            </a:r>
+          </a:p>
+          <a:p>
+            <a:r>
+              <a:rPr lang="de-CH" dirty="0"/>
+              <a:t>Durchschnittliche Schwierigkeit pro Kategorie:</a:t>
+            </a:r>
+          </a:p>
+          <a:p>
+            <a:r>
+              <a:rPr lang="de-CH" dirty="0"/>
+              <a:t>in </a:t>
+            </a:r>
+            <a:r>
+              <a:rPr lang="de-CH" dirty="0" err="1"/>
+              <a:t>sovieln</a:t>
+            </a:r>
+            <a:r>
+              <a:rPr lang="de-CH" dirty="0"/>
+              <a:t> Modellen pro 3 Modellen falsch</a:t>
+            </a:r>
+          </a:p>
+          <a:p>
+            <a:endParaRPr lang="de-CH" dirty="0"/>
+          </a:p>
+          <a:p>
+            <a:r>
+              <a:rPr lang="de-CH" dirty="0" err="1"/>
+              <a:t>category</a:t>
+            </a:r>
+            <a:endParaRPr lang="de-CH" dirty="0"/>
+          </a:p>
+          <a:p>
+            <a:r>
+              <a:rPr lang="de-CH" dirty="0"/>
+              <a:t>Movies_and_TV_5                 0.350365</a:t>
+            </a:r>
+          </a:p>
+          <a:p>
+            <a:r>
+              <a:rPr lang="de-CH" dirty="0"/>
+              <a:t>Sports_and_Outdoors_5           0.330346</a:t>
+            </a:r>
+          </a:p>
+          <a:p>
+            <a:r>
+              <a:rPr lang="de-CH" dirty="0"/>
+              <a:t>Pet_Supplies_5                  0.317673</a:t>
+            </a:r>
+          </a:p>
+          <a:p>
+            <a:r>
+              <a:rPr lang="de-CH" dirty="0"/>
+              <a:t>Books_5                         0.313569</a:t>
+            </a:r>
+          </a:p>
+          <a:p>
+            <a:r>
+              <a:rPr lang="de-CH" dirty="0"/>
+              <a:t>Toys_and_Games_5                0.289032</a:t>
+            </a:r>
+          </a:p>
+          <a:p>
+            <a:r>
+              <a:rPr lang="de-CH" dirty="0"/>
+              <a:t>Kindle_Store_5                  0.285282</a:t>
+            </a:r>
+          </a:p>
+          <a:p>
+            <a:r>
+              <a:rPr lang="de-CH" dirty="0"/>
+              <a:t>Electronics_5                   0.285156</a:t>
+            </a:r>
+          </a:p>
+          <a:p>
+            <a:r>
+              <a:rPr lang="de-CH" dirty="0"/>
+              <a:t>Tools_and_Home_Improvement_5    0.283898</a:t>
+            </a:r>
+          </a:p>
+          <a:p>
+            <a:r>
+              <a:rPr lang="de-CH" dirty="0"/>
+              <a:t>Clothing_Shoes_and_Jewelry_5    0.273063</a:t>
+            </a:r>
+          </a:p>
+          <a:p>
+            <a:r>
+              <a:rPr lang="de-CH" dirty="0"/>
+              <a:t>Home_and_Kitchen_5              0.251889</a:t>
+            </a:r>
+          </a:p>
+        </p:txBody>
+      </p:sp>
+      <p:sp>
+        <p:nvSpPr>
+          <p:cNvPr id="4" name="Date Placeholder 3">
+            <a:extLst>
+              <a:ext uri="{FF2B5EF4-FFF2-40B4-BE49-F238E27FC236}">
+                <a16:creationId xmlns:a16="http://schemas.microsoft.com/office/drawing/2014/main" id="{DD426F6E-52C7-152E-70B0-68B9D731F7C8}"/>
+              </a:ext>
+            </a:extLst>
+          </p:cNvPr>
+          <p:cNvSpPr>
+            <a:spLocks noGrp="1"/>
+          </p:cNvSpPr>
+          <p:nvPr>
+            <p:ph type="dt" sz="half" idx="10"/>
+          </p:nvPr>
+        </p:nvSpPr>
+        <p:spPr/>
+        <p:txBody>
+          <a:bodyPr/>
+          <a:lstStyle/>
+          <a:p>
+            <a:fld id="{EE15D7BA-2F5F-8E43-91CB-647D382EDB87}" type="datetime4">
+              <a:rPr lang="de-CH" smtClean="0"/>
+              <a:t>15. Juni 2026</a:t>
+            </a:fld>
+            <a:endParaRPr lang="en-CH"/>
+          </a:p>
+        </p:txBody>
+      </p:sp>
+      <p:sp>
+        <p:nvSpPr>
+          <p:cNvPr id="5" name="Footer Placeholder 4">
+            <a:extLst>
+              <a:ext uri="{FF2B5EF4-FFF2-40B4-BE49-F238E27FC236}">
+                <a16:creationId xmlns:a16="http://schemas.microsoft.com/office/drawing/2014/main" id="{7417FB27-E333-EC99-B05A-20C975438CC3}"/>
+              </a:ext>
+            </a:extLst>
+          </p:cNvPr>
+          <p:cNvSpPr>
+            <a:spLocks noGrp="1"/>
+          </p:cNvSpPr>
+          <p:nvPr>
+            <p:ph type="ftr" sz="quarter" idx="11"/>
+          </p:nvPr>
+        </p:nvSpPr>
+        <p:spPr/>
+        <p:txBody>
+          <a:bodyPr/>
+          <a:lstStyle/>
+          <a:p>
+            <a:r>
+              <a:rPr lang="en-GB"/>
+              <a:t>Text Analysis- Svetlana Khominich, Ralph Müller, David Beer </a:t>
+            </a:r>
+            <a:endParaRPr lang="en-CH" dirty="0"/>
+          </a:p>
+        </p:txBody>
+      </p:sp>
+      <p:sp>
+        <p:nvSpPr>
+          <p:cNvPr id="6" name="Slide Number Placeholder 5">
+            <a:extLst>
+              <a:ext uri="{FF2B5EF4-FFF2-40B4-BE49-F238E27FC236}">
+                <a16:creationId xmlns:a16="http://schemas.microsoft.com/office/drawing/2014/main" id="{80D9DB74-E0F1-A817-63A6-DE14C1B4BACD}"/>
+              </a:ext>
+            </a:extLst>
+          </p:cNvPr>
+          <p:cNvSpPr>
+            <a:spLocks noGrp="1"/>
+          </p:cNvSpPr>
+          <p:nvPr>
+            <p:ph type="sldNum" sz="quarter" idx="12"/>
+          </p:nvPr>
+        </p:nvSpPr>
+        <p:spPr/>
+        <p:txBody>
+          <a:bodyPr/>
+          <a:lstStyle/>
+          <a:p>
+            <a:fld id="{221FD296-2B0C-4A4B-AFAC-2E3A842869F0}" type="slidenum">
+              <a:rPr lang="en-CH" smtClean="0"/>
+              <a:t>11</a:t>
+            </a:fld>
+            <a:endParaRPr lang="en-CH"/>
+          </a:p>
+        </p:txBody>
+      </p:sp>
+    </p:spTree>
+    <p:extLst>
+      <p:ext uri="{BB962C8B-B14F-4D97-AF65-F5344CB8AC3E}">
+        <p14:creationId xmlns:p14="http://schemas.microsoft.com/office/powerpoint/2010/main" val="4120881710"/>
+      </p:ext>
+    </p:extLst>
+  </p:cSld>
+  <p:clrMapOvr>
+    <a:masterClrMapping/>
+  </p:clrMapOvr>
+</p:sld>
+</file>
+
+<file path=ppt/slides/slide12.xml><?xml version="1.0" encoding="utf-8"?>
+<p:sld xmlns:a="http://schemas.openxmlformats.org/drawingml/2006/main" xmlns:r="http://schemas.openxmlformats.org/officeDocument/2006/relationships" xmlns:p="http://schemas.openxmlformats.org/presentationml/2006/main">
+  <p:cSld>
+    <p:spTree>
+      <p:nvGrpSpPr>
+        <p:cNvPr id="1" name=""/>
+        <p:cNvGrpSpPr/>
+        <p:nvPr/>
+      </p:nvGrpSpPr>
+      <p:grpSpPr>
+        <a:xfrm>
+          <a:off x="0" y="0"/>
+          <a:ext cx="0" cy="0"/>
+          <a:chOff x="0" y="0"/>
+          <a:chExt cx="0" cy="0"/>
+        </a:xfrm>
+      </p:grpSpPr>
+      <p:sp>
+        <p:nvSpPr>
+          <p:cNvPr id="2" name="Title 1">
+            <a:extLst>
+              <a:ext uri="{FF2B5EF4-FFF2-40B4-BE49-F238E27FC236}">
+                <a16:creationId xmlns:a16="http://schemas.microsoft.com/office/drawing/2014/main" id="{E5343DC8-6B67-956D-A475-15936391A2CD}"/>
+              </a:ext>
+            </a:extLst>
+          </p:cNvPr>
+          <p:cNvSpPr>
+            <a:spLocks noGrp="1"/>
+          </p:cNvSpPr>
+          <p:nvPr>
+            <p:ph type="title"/>
+          </p:nvPr>
+        </p:nvSpPr>
+        <p:spPr/>
+        <p:txBody>
+          <a:bodyPr/>
+          <a:lstStyle/>
+          <a:p>
+            <a:r>
+              <a:rPr lang="de-CH" dirty="0"/>
+              <a:t>Neue Features</a:t>
+            </a:r>
+          </a:p>
+        </p:txBody>
+      </p:sp>
+      <p:sp>
+        <p:nvSpPr>
+          <p:cNvPr id="3" name="Content Placeholder 2">
+            <a:extLst>
+              <a:ext uri="{FF2B5EF4-FFF2-40B4-BE49-F238E27FC236}">
+                <a16:creationId xmlns:a16="http://schemas.microsoft.com/office/drawing/2014/main" id="{112B0117-29F3-C724-365C-BAA89CAAB485}"/>
+              </a:ext>
+            </a:extLst>
+          </p:cNvPr>
+          <p:cNvSpPr>
+            <a:spLocks noGrp="1"/>
+          </p:cNvSpPr>
+          <p:nvPr>
+            <p:ph idx="1"/>
+          </p:nvPr>
+        </p:nvSpPr>
+        <p:spPr/>
+        <p:txBody>
+          <a:bodyPr>
+            <a:normAutofit fontScale="92500" lnSpcReduction="20000"/>
+          </a:bodyPr>
+          <a:lstStyle/>
+          <a:p>
+            <a:r>
+              <a:rPr lang="de-CH" dirty="0"/>
+              <a:t>Textlänge</a:t>
+            </a:r>
+          </a:p>
+          <a:p>
+            <a:pPr lvl="1"/>
+            <a:r>
+              <a:rPr lang="en-CH" dirty="0"/>
+              <a:t>char_len → Anzahl Zeichen</a:t>
+            </a:r>
+          </a:p>
+          <a:p>
+            <a:pPr lvl="1"/>
+            <a:r>
+              <a:rPr lang="en-CH" dirty="0"/>
+              <a:t>word_len → Anzahl Wörter</a:t>
+            </a:r>
+          </a:p>
+          <a:p>
+            <a:r>
+              <a:rPr lang="de-CH" dirty="0"/>
+              <a:t>Satzstruktur</a:t>
+            </a:r>
+          </a:p>
+          <a:p>
+            <a:pPr lvl="1"/>
+            <a:r>
+              <a:rPr lang="en-CH" dirty="0"/>
+              <a:t>sentence_count → Anzahl Sätze im Text</a:t>
+            </a:r>
+          </a:p>
+          <a:p>
+            <a:r>
+              <a:rPr lang="de-CH" dirty="0"/>
+              <a:t>Wortstruktur</a:t>
+            </a:r>
+          </a:p>
+          <a:p>
+            <a:pPr lvl="1"/>
+            <a:r>
+              <a:rPr lang="en-CH" dirty="0"/>
+              <a:t>avg_word_len → durchschnittliche Wortlänge</a:t>
+            </a:r>
+          </a:p>
+          <a:p>
+            <a:r>
+              <a:rPr lang="de-CH" dirty="0"/>
+              <a:t>Satzzeichen</a:t>
+            </a:r>
+          </a:p>
+          <a:p>
+            <a:pPr lvl="1"/>
+            <a:r>
+              <a:rPr lang="en-CH" dirty="0"/>
+              <a:t>exclamation_count → Anzahl „!“</a:t>
+            </a:r>
+          </a:p>
+          <a:p>
+            <a:pPr lvl="1"/>
+            <a:r>
+              <a:rPr lang="en-CH" dirty="0"/>
+              <a:t>question_count → Anzahl „?“</a:t>
+            </a:r>
+          </a:p>
+          <a:p>
+            <a:r>
+              <a:rPr lang="de-CH" dirty="0"/>
+              <a:t>Schreibstil</a:t>
+            </a:r>
+          </a:p>
+          <a:p>
+            <a:pPr lvl="1"/>
+            <a:r>
+              <a:rPr lang="en-CH" dirty="0"/>
+              <a:t>uppercase_ratio → Anteil Großbuchstaben im Text</a:t>
+            </a:r>
+          </a:p>
+          <a:p>
+            <a:pPr lvl="1"/>
+            <a:endParaRPr lang="de-CH" dirty="0"/>
+          </a:p>
+        </p:txBody>
+      </p:sp>
+      <p:sp>
+        <p:nvSpPr>
+          <p:cNvPr id="4" name="Date Placeholder 3">
+            <a:extLst>
+              <a:ext uri="{FF2B5EF4-FFF2-40B4-BE49-F238E27FC236}">
+                <a16:creationId xmlns:a16="http://schemas.microsoft.com/office/drawing/2014/main" id="{21A5216F-0FB5-D36B-A374-2D85908BEB23}"/>
+              </a:ext>
+            </a:extLst>
+          </p:cNvPr>
+          <p:cNvSpPr>
+            <a:spLocks noGrp="1"/>
+          </p:cNvSpPr>
+          <p:nvPr>
+            <p:ph type="dt" sz="half" idx="10"/>
+          </p:nvPr>
+        </p:nvSpPr>
+        <p:spPr/>
+        <p:txBody>
+          <a:bodyPr/>
+          <a:lstStyle/>
+          <a:p>
+            <a:fld id="{EE15D7BA-2F5F-8E43-91CB-647D382EDB87}" type="datetime4">
+              <a:rPr lang="de-CH" smtClean="0"/>
+              <a:t>15. Juni 2026</a:t>
+            </a:fld>
+            <a:endParaRPr lang="en-CH"/>
+          </a:p>
+        </p:txBody>
+      </p:sp>
+      <p:sp>
+        <p:nvSpPr>
+          <p:cNvPr id="5" name="Footer Placeholder 4">
+            <a:extLst>
+              <a:ext uri="{FF2B5EF4-FFF2-40B4-BE49-F238E27FC236}">
+                <a16:creationId xmlns:a16="http://schemas.microsoft.com/office/drawing/2014/main" id="{94EE23FD-82A7-138C-BB3D-0FF03138E6A2}"/>
+              </a:ext>
+            </a:extLst>
+          </p:cNvPr>
+          <p:cNvSpPr>
+            <a:spLocks noGrp="1"/>
+          </p:cNvSpPr>
+          <p:nvPr>
+            <p:ph type="ftr" sz="quarter" idx="11"/>
+          </p:nvPr>
+        </p:nvSpPr>
+        <p:spPr/>
+        <p:txBody>
+          <a:bodyPr/>
+          <a:lstStyle/>
+          <a:p>
+            <a:r>
+              <a:rPr lang="en-GB"/>
+              <a:t>Text Analysis- Svetlana Khominich, Ralph Müller, David Beer </a:t>
+            </a:r>
+            <a:endParaRPr lang="en-CH" dirty="0"/>
+          </a:p>
+        </p:txBody>
+      </p:sp>
+      <p:sp>
+        <p:nvSpPr>
+          <p:cNvPr id="6" name="Slide Number Placeholder 5">
+            <a:extLst>
+              <a:ext uri="{FF2B5EF4-FFF2-40B4-BE49-F238E27FC236}">
+                <a16:creationId xmlns:a16="http://schemas.microsoft.com/office/drawing/2014/main" id="{41E16A25-923F-A463-0205-74591BAF311C}"/>
+              </a:ext>
+            </a:extLst>
+          </p:cNvPr>
+          <p:cNvSpPr>
+            <a:spLocks noGrp="1"/>
+          </p:cNvSpPr>
+          <p:nvPr>
+            <p:ph type="sldNum" sz="quarter" idx="12"/>
+          </p:nvPr>
+        </p:nvSpPr>
+        <p:spPr/>
+        <p:txBody>
+          <a:bodyPr/>
+          <a:lstStyle/>
+          <a:p>
+            <a:fld id="{221FD296-2B0C-4A4B-AFAC-2E3A842869F0}" type="slidenum">
+              <a:rPr lang="en-CH" smtClean="0"/>
+              <a:t>12</a:t>
+            </a:fld>
+            <a:endParaRPr lang="en-CH"/>
+          </a:p>
+        </p:txBody>
+      </p:sp>
+    </p:spTree>
+    <p:extLst>
+      <p:ext uri="{BB962C8B-B14F-4D97-AF65-F5344CB8AC3E}">
+        <p14:creationId xmlns:p14="http://schemas.microsoft.com/office/powerpoint/2010/main" val="3326337657"/>
+      </p:ext>
+    </p:extLst>
+  </p:cSld>
+  <p:clrMapOvr>
+    <a:masterClrMapping/>
+  </p:clrMapOvr>
+</p:sld>
+</file>
+
+<file path=ppt/slides/slide13.xml><?xml version="1.0" encoding="utf-8"?>
+<p:sld xmlns:a="http://schemas.openxmlformats.org/drawingml/2006/main" xmlns:r="http://schemas.openxmlformats.org/officeDocument/2006/relationships" xmlns:p="http://schemas.openxmlformats.org/presentationml/2006/main">
+  <p:cSld>
+    <p:spTree>
+      <p:nvGrpSpPr>
+        <p:cNvPr id="1" name=""/>
+        <p:cNvGrpSpPr/>
+        <p:nvPr/>
+      </p:nvGrpSpPr>
+      <p:grpSpPr>
+        <a:xfrm>
+          <a:off x="0" y="0"/>
+          <a:ext cx="0" cy="0"/>
+          <a:chOff x="0" y="0"/>
+          <a:chExt cx="0" cy="0"/>
+        </a:xfrm>
+      </p:grpSpPr>
+      <p:sp>
+        <p:nvSpPr>
+          <p:cNvPr id="2" name="Title 1">
+            <a:extLst>
+              <a:ext uri="{FF2B5EF4-FFF2-40B4-BE49-F238E27FC236}">
+                <a16:creationId xmlns:a16="http://schemas.microsoft.com/office/drawing/2014/main" id="{7EBD88F3-E0C7-ABCA-B9C9-30DB8AAE601B}"/>
+              </a:ext>
+            </a:extLst>
+          </p:cNvPr>
+          <p:cNvSpPr>
+            <a:spLocks noGrp="1"/>
+          </p:cNvSpPr>
+          <p:nvPr>
+            <p:ph type="title"/>
+          </p:nvPr>
+        </p:nvSpPr>
+        <p:spPr/>
+        <p:txBody>
+          <a:bodyPr/>
+          <a:lstStyle/>
+          <a:p>
+            <a:r>
+              <a:rPr lang="de-CH" dirty="0"/>
+              <a:t>Korrelation Schwierigkeit / Features</a:t>
+            </a:r>
+          </a:p>
+        </p:txBody>
+      </p:sp>
+      <p:sp>
+        <p:nvSpPr>
+          <p:cNvPr id="3" name="Content Placeholder 2">
+            <a:extLst>
+              <a:ext uri="{FF2B5EF4-FFF2-40B4-BE49-F238E27FC236}">
+                <a16:creationId xmlns:a16="http://schemas.microsoft.com/office/drawing/2014/main" id="{864C35EB-F541-D831-6C85-0304F0C6F6DC}"/>
+              </a:ext>
+            </a:extLst>
+          </p:cNvPr>
+          <p:cNvSpPr>
+            <a:spLocks noGrp="1"/>
+          </p:cNvSpPr>
+          <p:nvPr>
+            <p:ph idx="1"/>
+          </p:nvPr>
+        </p:nvSpPr>
+        <p:spPr/>
+        <p:txBody>
+          <a:bodyPr/>
+          <a:lstStyle/>
+          <a:p>
+            <a:r>
+              <a:rPr lang="de-CH" dirty="0"/>
+              <a:t>Feature		</a:t>
+            </a:r>
+            <a:r>
+              <a:rPr lang="de-CH" dirty="0" err="1"/>
+              <a:t>mean</a:t>
+            </a:r>
+            <a:r>
+              <a:rPr lang="de-CH" dirty="0"/>
+              <a:t>  		</a:t>
+            </a:r>
+            <a:r>
+              <a:rPr lang="de-CH" dirty="0" err="1"/>
+              <a:t>corr_with_difficulty</a:t>
+            </a:r>
+            <a:endParaRPr lang="de-CH" dirty="0"/>
+          </a:p>
+          <a:p>
+            <a:r>
+              <a:rPr lang="de-CH" dirty="0" err="1"/>
+              <a:t>uppercase_ratio</a:t>
+            </a:r>
+            <a:r>
+              <a:rPr lang="de-CH" dirty="0"/>
+              <a:t>      0.029              0.061</a:t>
+            </a:r>
+          </a:p>
+          <a:p>
+            <a:r>
+              <a:rPr lang="de-CH" dirty="0" err="1"/>
+              <a:t>avg_word_len</a:t>
+            </a:r>
+            <a:r>
+              <a:rPr lang="de-CH" dirty="0"/>
+              <a:t>         4.206            -0.003</a:t>
+            </a:r>
+          </a:p>
+          <a:p>
+            <a:r>
+              <a:rPr lang="de-CH" dirty="0" err="1"/>
+              <a:t>exclamation_count</a:t>
+            </a:r>
+            <a:r>
+              <a:rPr lang="de-CH" dirty="0"/>
+              <a:t>    0.407             -0.027</a:t>
+            </a:r>
+          </a:p>
+          <a:p>
+            <a:r>
+              <a:rPr lang="de-CH" dirty="0" err="1"/>
+              <a:t>question_count</a:t>
+            </a:r>
+            <a:r>
+              <a:rPr lang="de-CH" dirty="0"/>
+              <a:t>       0.060             -0.047</a:t>
+            </a:r>
+          </a:p>
+          <a:p>
+            <a:r>
+              <a:rPr lang="de-CH" dirty="0" err="1"/>
+              <a:t>sentence_count</a:t>
+            </a:r>
+            <a:r>
+              <a:rPr lang="de-CH" dirty="0"/>
+              <a:t>       5.603             -0.191</a:t>
+            </a:r>
+          </a:p>
+          <a:p>
+            <a:r>
+              <a:rPr lang="de-CH" dirty="0" err="1"/>
+              <a:t>char_len</a:t>
+            </a:r>
+            <a:r>
+              <a:rPr lang="de-CH" dirty="0"/>
+              <a:t>           354.598             -0.205</a:t>
+            </a:r>
+          </a:p>
+          <a:p>
+            <a:r>
+              <a:rPr lang="de-CH" dirty="0" err="1"/>
+              <a:t>word_len</a:t>
+            </a:r>
+            <a:r>
+              <a:rPr lang="de-CH" dirty="0"/>
+              <a:t>            68.066             -0.206</a:t>
+            </a:r>
+          </a:p>
+        </p:txBody>
+      </p:sp>
+      <p:sp>
+        <p:nvSpPr>
+          <p:cNvPr id="4" name="Date Placeholder 3">
+            <a:extLst>
+              <a:ext uri="{FF2B5EF4-FFF2-40B4-BE49-F238E27FC236}">
+                <a16:creationId xmlns:a16="http://schemas.microsoft.com/office/drawing/2014/main" id="{C0DEEB3E-7BAE-1A92-A291-7728BDC75E8B}"/>
+              </a:ext>
+            </a:extLst>
+          </p:cNvPr>
+          <p:cNvSpPr>
+            <a:spLocks noGrp="1"/>
+          </p:cNvSpPr>
+          <p:nvPr>
+            <p:ph type="dt" sz="half" idx="10"/>
+          </p:nvPr>
+        </p:nvSpPr>
+        <p:spPr/>
+        <p:txBody>
+          <a:bodyPr/>
+          <a:lstStyle/>
+          <a:p>
+            <a:fld id="{EE15D7BA-2F5F-8E43-91CB-647D382EDB87}" type="datetime4">
+              <a:rPr lang="de-CH" smtClean="0"/>
+              <a:t>15. Juni 2026</a:t>
+            </a:fld>
+            <a:endParaRPr lang="en-CH"/>
+          </a:p>
+        </p:txBody>
+      </p:sp>
+      <p:sp>
+        <p:nvSpPr>
+          <p:cNvPr id="5" name="Footer Placeholder 4">
+            <a:extLst>
+              <a:ext uri="{FF2B5EF4-FFF2-40B4-BE49-F238E27FC236}">
+                <a16:creationId xmlns:a16="http://schemas.microsoft.com/office/drawing/2014/main" id="{9B1E3E48-9BBA-9F97-FCAE-5AB32DE39E08}"/>
+              </a:ext>
+            </a:extLst>
+          </p:cNvPr>
+          <p:cNvSpPr>
+            <a:spLocks noGrp="1"/>
+          </p:cNvSpPr>
+          <p:nvPr>
+            <p:ph type="ftr" sz="quarter" idx="11"/>
+          </p:nvPr>
+        </p:nvSpPr>
+        <p:spPr/>
+        <p:txBody>
+          <a:bodyPr/>
+          <a:lstStyle/>
+          <a:p>
+            <a:r>
+              <a:rPr lang="en-GB"/>
+              <a:t>Text Analysis- Svetlana Khominich, Ralph Müller, David Beer </a:t>
+            </a:r>
+            <a:endParaRPr lang="en-CH" dirty="0"/>
+          </a:p>
+        </p:txBody>
+      </p:sp>
+      <p:sp>
+        <p:nvSpPr>
+          <p:cNvPr id="6" name="Slide Number Placeholder 5">
+            <a:extLst>
+              <a:ext uri="{FF2B5EF4-FFF2-40B4-BE49-F238E27FC236}">
+                <a16:creationId xmlns:a16="http://schemas.microsoft.com/office/drawing/2014/main" id="{2DB5A815-DB33-5B9D-9352-651643196563}"/>
+              </a:ext>
+            </a:extLst>
+          </p:cNvPr>
+          <p:cNvSpPr>
+            <a:spLocks noGrp="1"/>
+          </p:cNvSpPr>
+          <p:nvPr>
+            <p:ph type="sldNum" sz="quarter" idx="12"/>
+          </p:nvPr>
+        </p:nvSpPr>
+        <p:spPr/>
+        <p:txBody>
+          <a:bodyPr/>
+          <a:lstStyle/>
+          <a:p>
+            <a:fld id="{221FD296-2B0C-4A4B-AFAC-2E3A842869F0}" type="slidenum">
+              <a:rPr lang="en-CH" smtClean="0"/>
+              <a:t>13</a:t>
+            </a:fld>
+            <a:endParaRPr lang="en-CH"/>
+          </a:p>
+        </p:txBody>
+      </p:sp>
+      <p:sp>
+        <p:nvSpPr>
+          <p:cNvPr id="7" name="Rounded Rectangular Callout 6">
+            <a:extLst>
+              <a:ext uri="{FF2B5EF4-FFF2-40B4-BE49-F238E27FC236}">
+                <a16:creationId xmlns:a16="http://schemas.microsoft.com/office/drawing/2014/main" id="{C597F510-B8C5-CF4F-6950-F26671755087}"/>
+              </a:ext>
+            </a:extLst>
+          </p:cNvPr>
+          <p:cNvSpPr/>
+          <p:nvPr/>
+        </p:nvSpPr>
+        <p:spPr>
+          <a:xfrm>
+            <a:off x="8153400" y="4850826"/>
+            <a:ext cx="3949430" cy="1326137"/>
+          </a:xfrm>
+          <a:prstGeom prst="wedgeRoundRectCallout">
+            <a:avLst>
+              <a:gd name="adj1" fmla="val -63468"/>
+              <a:gd name="adj2" fmla="val 5765"/>
+              <a:gd name="adj3" fmla="val 16667"/>
+            </a:avLst>
+          </a:prstGeom>
+          <a:solidFill>
+            <a:schemeClr val="accent4">
+              <a:lumMod val="20000"/>
+              <a:lumOff val="80000"/>
+            </a:schemeClr>
+          </a:solidFill>
+        </p:spPr>
+        <p:style>
+          <a:lnRef idx="2">
+            <a:schemeClr val="accent1">
+              <a:shade val="15000"/>
+            </a:schemeClr>
+          </a:lnRef>
+          <a:fillRef idx="1">
+            <a:schemeClr val="accent1"/>
+          </a:fillRef>
+          <a:effectRef idx="0">
+            <a:schemeClr val="accent1"/>
+          </a:effectRef>
+          <a:fontRef idx="minor">
+            <a:schemeClr val="lt1"/>
+          </a:fontRef>
+        </p:style>
+        <p:txBody>
+          <a:bodyPr rtlCol="0" anchor="ctr"/>
+          <a:lstStyle/>
+          <a:p>
+            <a:r>
+              <a:rPr lang="en-CH" dirty="0">
+                <a:solidFill>
+                  <a:schemeClr val="tx1"/>
+                </a:solidFill>
+              </a:rPr>
+              <a:t>Pos. Korr., höherer Wert, schwieriger</a:t>
+            </a:r>
+          </a:p>
+          <a:p>
+            <a:r>
+              <a:rPr lang="en-CH" dirty="0">
+                <a:solidFill>
+                  <a:schemeClr val="tx1"/>
+                </a:solidFill>
+              </a:rPr>
+              <a:t>Neg. Korr., höherer Wert, einfacher</a:t>
+            </a:r>
+          </a:p>
+        </p:txBody>
+      </p:sp>
+    </p:spTree>
+    <p:extLst>
+      <p:ext uri="{BB962C8B-B14F-4D97-AF65-F5344CB8AC3E}">
+        <p14:creationId xmlns:p14="http://schemas.microsoft.com/office/powerpoint/2010/main" val="2840500397"/>
+      </p:ext>
+    </p:extLst>
+  </p:cSld>
+  <p:clrMapOvr>
+    <a:masterClrMapping/>
+  </p:clrMapOvr>
+</p:sld>
+</file>
+
+<file path=ppt/slides/slide14.xml><?xml version="1.0" encoding="utf-8"?>
+<p:sld xmlns:a="http://schemas.openxmlformats.org/drawingml/2006/main" xmlns:r="http://schemas.openxmlformats.org/officeDocument/2006/relationships" xmlns:p="http://schemas.openxmlformats.org/presentationml/2006/main">
+  <p:cSld>
+    <p:spTree>
+      <p:nvGrpSpPr>
+        <p:cNvPr id="1" name=""/>
+        <p:cNvGrpSpPr/>
+        <p:nvPr/>
+      </p:nvGrpSpPr>
+      <p:grpSpPr>
+        <a:xfrm>
+          <a:off x="0" y="0"/>
+          <a:ext cx="0" cy="0"/>
+          <a:chOff x="0" y="0"/>
+          <a:chExt cx="0" cy="0"/>
+        </a:xfrm>
+      </p:grpSpPr>
+      <p:sp>
+        <p:nvSpPr>
+          <p:cNvPr id="2" name="Title 1">
+            <a:extLst>
+              <a:ext uri="{FF2B5EF4-FFF2-40B4-BE49-F238E27FC236}">
+                <a16:creationId xmlns:a16="http://schemas.microsoft.com/office/drawing/2014/main" id="{AEC4960E-3B29-A9B1-B2E3-915A2069D8AC}"/>
+              </a:ext>
+            </a:extLst>
+          </p:cNvPr>
+          <p:cNvSpPr>
+            <a:spLocks noGrp="1"/>
+          </p:cNvSpPr>
+          <p:nvPr>
+            <p:ph type="title"/>
+          </p:nvPr>
+        </p:nvSpPr>
+        <p:spPr/>
+        <p:txBody>
+          <a:bodyPr>
+            <a:normAutofit/>
+          </a:bodyPr>
+          <a:lstStyle/>
+          <a:p>
+            <a:r>
+              <a:rPr lang="en-CH" dirty="0"/>
+              <a:t>Ling. Schwierigkeit - # Named Entities</a:t>
+            </a:r>
+            <a:endParaRPr lang="de-CH" dirty="0"/>
+          </a:p>
+        </p:txBody>
+      </p:sp>
+      <p:sp>
+        <p:nvSpPr>
+          <p:cNvPr id="3" name="Content Placeholder 2">
+            <a:extLst>
+              <a:ext uri="{FF2B5EF4-FFF2-40B4-BE49-F238E27FC236}">
+                <a16:creationId xmlns:a16="http://schemas.microsoft.com/office/drawing/2014/main" id="{85BAEF8B-F803-9F49-9F6B-A8918D19F6F1}"/>
+              </a:ext>
+            </a:extLst>
+          </p:cNvPr>
+          <p:cNvSpPr>
+            <a:spLocks noGrp="1"/>
+          </p:cNvSpPr>
+          <p:nvPr>
+            <p:ph idx="1"/>
+          </p:nvPr>
+        </p:nvSpPr>
+        <p:spPr/>
+        <p:txBody>
+          <a:bodyPr>
+            <a:normAutofit fontScale="92500" lnSpcReduction="20000"/>
+          </a:bodyPr>
+          <a:lstStyle/>
+          <a:p>
+            <a:r>
+              <a:rPr lang="de-CH" dirty="0" err="1"/>
+              <a:t>Spacy</a:t>
+            </a:r>
+            <a:endParaRPr lang="de-CH" dirty="0"/>
+          </a:p>
+          <a:p>
+            <a:r>
+              <a:rPr lang="en-CH" dirty="0"/>
+              <a:t>I bought an iPhone from Apple for $999 in New York</a:t>
+            </a:r>
+          </a:p>
+          <a:p>
+            <a:r>
+              <a:rPr lang="en-CH" dirty="0"/>
+              <a:t>ents: [iPhone (PRODUCT), Apple (ORG), $999 (MONEY), New York (GPE)]</a:t>
+            </a:r>
+          </a:p>
+          <a:p>
+            <a:r>
+              <a:rPr lang="en-CH" dirty="0"/>
+              <a:t>→ entity_count = 4</a:t>
+            </a:r>
+          </a:p>
+          <a:p>
+            <a:endParaRPr lang="en-CH" dirty="0"/>
+          </a:p>
+          <a:p>
+            <a:r>
+              <a:rPr lang="en-CH" dirty="0"/>
+              <a:t>difficulty 	count_texts 	mean_entities</a:t>
+            </a:r>
+          </a:p>
+          <a:p>
+            <a:r>
+              <a:rPr lang="en-CH" dirty="0"/>
+              <a:t>0 		6489 		2.29</a:t>
+            </a:r>
+          </a:p>
+          <a:p>
+            <a:r>
+              <a:rPr lang="en-CH" dirty="0"/>
+              <a:t>1 		975 		1.28</a:t>
+            </a:r>
+          </a:p>
+          <a:p>
+            <a:r>
+              <a:rPr lang="en-CH" dirty="0"/>
+              <a:t>2 		438 		1.13</a:t>
+            </a:r>
+          </a:p>
+          <a:p>
+            <a:r>
+              <a:rPr lang="en-CH" dirty="0"/>
+              <a:t>3 		185 		0.76</a:t>
+            </a:r>
+          </a:p>
+          <a:p>
+            <a:endParaRPr lang="en-CH" dirty="0"/>
+          </a:p>
+          <a:p>
+            <a:endParaRPr lang="de-CH" dirty="0"/>
+          </a:p>
+        </p:txBody>
+      </p:sp>
+      <p:sp>
+        <p:nvSpPr>
+          <p:cNvPr id="4" name="Date Placeholder 3">
+            <a:extLst>
+              <a:ext uri="{FF2B5EF4-FFF2-40B4-BE49-F238E27FC236}">
+                <a16:creationId xmlns:a16="http://schemas.microsoft.com/office/drawing/2014/main" id="{304BFCC6-A60F-F773-E7B6-076AD40838EE}"/>
+              </a:ext>
+            </a:extLst>
+          </p:cNvPr>
+          <p:cNvSpPr>
+            <a:spLocks noGrp="1"/>
+          </p:cNvSpPr>
+          <p:nvPr>
+            <p:ph type="dt" sz="half" idx="10"/>
+          </p:nvPr>
+        </p:nvSpPr>
+        <p:spPr/>
+        <p:txBody>
+          <a:bodyPr/>
+          <a:lstStyle/>
+          <a:p>
+            <a:fld id="{EE15D7BA-2F5F-8E43-91CB-647D382EDB87}" type="datetime4">
+              <a:rPr lang="de-CH" smtClean="0"/>
+              <a:t>15. Juni 2026</a:t>
+            </a:fld>
+            <a:endParaRPr lang="en-CH"/>
+          </a:p>
+        </p:txBody>
+      </p:sp>
+      <p:sp>
+        <p:nvSpPr>
+          <p:cNvPr id="5" name="Footer Placeholder 4">
+            <a:extLst>
+              <a:ext uri="{FF2B5EF4-FFF2-40B4-BE49-F238E27FC236}">
+                <a16:creationId xmlns:a16="http://schemas.microsoft.com/office/drawing/2014/main" id="{B5D5E7A7-540E-CD57-16EA-C7D15CF2D6FE}"/>
+              </a:ext>
+            </a:extLst>
+          </p:cNvPr>
+          <p:cNvSpPr>
+            <a:spLocks noGrp="1"/>
+          </p:cNvSpPr>
+          <p:nvPr>
+            <p:ph type="ftr" sz="quarter" idx="11"/>
+          </p:nvPr>
+        </p:nvSpPr>
+        <p:spPr/>
+        <p:txBody>
+          <a:bodyPr/>
+          <a:lstStyle/>
+          <a:p>
+            <a:r>
+              <a:rPr lang="en-GB"/>
+              <a:t>Text Analysis- Svetlana Khominich, Ralph Müller, David Beer </a:t>
+            </a:r>
+            <a:endParaRPr lang="en-CH" dirty="0"/>
+          </a:p>
+        </p:txBody>
+      </p:sp>
+      <p:sp>
+        <p:nvSpPr>
+          <p:cNvPr id="6" name="Slide Number Placeholder 5">
+            <a:extLst>
+              <a:ext uri="{FF2B5EF4-FFF2-40B4-BE49-F238E27FC236}">
+                <a16:creationId xmlns:a16="http://schemas.microsoft.com/office/drawing/2014/main" id="{7D4AF4F4-F2F6-E4A0-5908-B926D70744D9}"/>
+              </a:ext>
+            </a:extLst>
+          </p:cNvPr>
+          <p:cNvSpPr>
+            <a:spLocks noGrp="1"/>
+          </p:cNvSpPr>
+          <p:nvPr>
+            <p:ph type="sldNum" sz="quarter" idx="12"/>
+          </p:nvPr>
+        </p:nvSpPr>
+        <p:spPr/>
+        <p:txBody>
+          <a:bodyPr/>
+          <a:lstStyle/>
+          <a:p>
+            <a:fld id="{221FD296-2B0C-4A4B-AFAC-2E3A842869F0}" type="slidenum">
+              <a:rPr lang="en-CH" smtClean="0"/>
+              <a:t>14</a:t>
+            </a:fld>
+            <a:endParaRPr lang="en-CH"/>
+          </a:p>
+        </p:txBody>
+      </p:sp>
+      <p:sp>
+        <p:nvSpPr>
+          <p:cNvPr id="7" name="Rounded Rectangular Callout 6">
+            <a:extLst>
+              <a:ext uri="{FF2B5EF4-FFF2-40B4-BE49-F238E27FC236}">
+                <a16:creationId xmlns:a16="http://schemas.microsoft.com/office/drawing/2014/main" id="{FF7682DA-2547-898D-9C50-86B0CEA5DB22}"/>
+              </a:ext>
+            </a:extLst>
+          </p:cNvPr>
+          <p:cNvSpPr/>
+          <p:nvPr/>
+        </p:nvSpPr>
+        <p:spPr>
+          <a:xfrm>
+            <a:off x="8153400" y="4850826"/>
+            <a:ext cx="3949430" cy="1326137"/>
+          </a:xfrm>
+          <a:prstGeom prst="wedgeRoundRectCallout">
+            <a:avLst>
+              <a:gd name="adj1" fmla="val -63468"/>
+              <a:gd name="adj2" fmla="val 5765"/>
+              <a:gd name="adj3" fmla="val 16667"/>
+            </a:avLst>
+          </a:prstGeom>
+          <a:solidFill>
+            <a:schemeClr val="accent4">
+              <a:lumMod val="20000"/>
+              <a:lumOff val="80000"/>
+            </a:schemeClr>
+          </a:solidFill>
+        </p:spPr>
+        <p:style>
+          <a:lnRef idx="2">
+            <a:schemeClr val="accent1">
+              <a:shade val="15000"/>
+            </a:schemeClr>
+          </a:lnRef>
+          <a:fillRef idx="1">
+            <a:schemeClr val="accent1"/>
+          </a:fillRef>
+          <a:effectRef idx="0">
+            <a:schemeClr val="accent1"/>
+          </a:effectRef>
+          <a:fontRef idx="minor">
+            <a:schemeClr val="lt1"/>
+          </a:fontRef>
+        </p:style>
+        <p:txBody>
+          <a:bodyPr rtlCol="0" anchor="ctr"/>
+          <a:lstStyle/>
+          <a:p>
+            <a:r>
+              <a:rPr lang="en-CH" dirty="0">
+                <a:solidFill>
+                  <a:schemeClr val="tx1"/>
+                </a:solidFill>
+              </a:rPr>
+              <a:t>Texte die schwieriger sind haben weniger Named Entities</a:t>
+            </a:r>
+          </a:p>
+        </p:txBody>
+      </p:sp>
+    </p:spTree>
+    <p:extLst>
+      <p:ext uri="{BB962C8B-B14F-4D97-AF65-F5344CB8AC3E}">
+        <p14:creationId xmlns:p14="http://schemas.microsoft.com/office/powerpoint/2010/main" val="1051331100"/>
+      </p:ext>
+    </p:extLst>
+  </p:cSld>
+  <p:clrMapOvr>
+    <a:masterClrMapping/>
+  </p:clrMapOvr>
+</p:sld>
+</file>
+
+<file path=ppt/slides/slide15.xml><?xml version="1.0" encoding="utf-8"?>
+<p:sld xmlns:a="http://schemas.openxmlformats.org/drawingml/2006/main" xmlns:r="http://schemas.openxmlformats.org/officeDocument/2006/relationships" xmlns:p="http://schemas.openxmlformats.org/presentationml/2006/main">
+  <p:cSld>
+    <p:spTree>
+      <p:nvGrpSpPr>
+        <p:cNvPr id="1" name=""/>
+        <p:cNvGrpSpPr/>
+        <p:nvPr/>
+      </p:nvGrpSpPr>
+      <p:grpSpPr>
+        <a:xfrm>
+          <a:off x="0" y="0"/>
+          <a:ext cx="0" cy="0"/>
+          <a:chOff x="0" y="0"/>
+          <a:chExt cx="0" cy="0"/>
+        </a:xfrm>
+      </p:grpSpPr>
+      <p:sp>
+        <p:nvSpPr>
+          <p:cNvPr id="2" name="Title 1">
+            <a:extLst>
+              <a:ext uri="{FF2B5EF4-FFF2-40B4-BE49-F238E27FC236}">
+                <a16:creationId xmlns:a16="http://schemas.microsoft.com/office/drawing/2014/main" id="{CDDBC91B-A22C-64DC-BD1C-AE2258C95382}"/>
+              </a:ext>
+            </a:extLst>
+          </p:cNvPr>
+          <p:cNvSpPr>
+            <a:spLocks noGrp="1"/>
+          </p:cNvSpPr>
+          <p:nvPr>
+            <p:ph type="title"/>
+          </p:nvPr>
+        </p:nvSpPr>
+        <p:spPr/>
+        <p:txBody>
+          <a:bodyPr>
+            <a:normAutofit/>
+          </a:bodyPr>
+          <a:lstStyle/>
+          <a:p>
+            <a:r>
+              <a:rPr lang="en-CH" dirty="0"/>
+              <a:t>Ambiguität / abstrakte Wörter</a:t>
+            </a:r>
+            <a:endParaRPr lang="de-CH" dirty="0"/>
+          </a:p>
+        </p:txBody>
+      </p:sp>
+      <p:sp>
+        <p:nvSpPr>
+          <p:cNvPr id="3" name="Content Placeholder 2">
+            <a:extLst>
+              <a:ext uri="{FF2B5EF4-FFF2-40B4-BE49-F238E27FC236}">
+                <a16:creationId xmlns:a16="http://schemas.microsoft.com/office/drawing/2014/main" id="{05A568C5-BD56-8902-B92C-AEC4D146348C}"/>
+              </a:ext>
+            </a:extLst>
+          </p:cNvPr>
+          <p:cNvSpPr>
+            <a:spLocks noGrp="1"/>
+          </p:cNvSpPr>
+          <p:nvPr>
+            <p:ph idx="1"/>
+          </p:nvPr>
+        </p:nvSpPr>
+        <p:spPr/>
+        <p:txBody>
+          <a:bodyPr>
+            <a:normAutofit/>
+          </a:bodyPr>
+          <a:lstStyle/>
+          <a:p>
+            <a:r>
+              <a:rPr lang="en-CH" dirty="0"/>
+              <a:t>Nutzung eines Concreteness Lexikons (Brysbaert et al.)</a:t>
+            </a:r>
+          </a:p>
+          <a:p>
+            <a:r>
+              <a:rPr lang="en-CH" dirty="0"/>
+              <a:t>Jedem Wort ist ein Wert zugeordnet (1-5)</a:t>
+            </a:r>
+          </a:p>
+          <a:p>
+            <a:pPr lvl="1"/>
+            <a:r>
+              <a:rPr lang="en-CH" dirty="0"/>
+              <a:t>1 sehr abstrakt (idea, good, quality)</a:t>
+            </a:r>
+          </a:p>
+          <a:p>
+            <a:pPr lvl="1"/>
+            <a:r>
+              <a:rPr lang="en-CH" dirty="0"/>
+              <a:t>5 seht konkret (dog, table)</a:t>
+            </a:r>
+          </a:p>
+          <a:p>
+            <a:r>
+              <a:rPr lang="en-CH" dirty="0"/>
+              <a:t>Für jeden Text:</a:t>
+            </a:r>
+          </a:p>
+          <a:p>
+            <a:pPr lvl="1"/>
+            <a:r>
+              <a:rPr lang="en-CH" dirty="0"/>
+              <a:t>Mittelwert aller bekannten Wörter rechnen</a:t>
+            </a:r>
+          </a:p>
+          <a:p>
+            <a:r>
+              <a:rPr lang="en-CH" dirty="0"/>
+              <a:t>Interpretation</a:t>
+            </a:r>
+          </a:p>
+          <a:p>
+            <a:r>
+              <a:rPr lang="en-CH" dirty="0"/>
+              <a:t>Kein klarer Trend über Difficulty Klassen</a:t>
+            </a:r>
+          </a:p>
+          <a:p>
+            <a:pPr lvl="1"/>
+            <a:r>
+              <a:rPr lang="en-CH" dirty="0"/>
+              <a:t>Werte sind sehr ähnlich über alle Klassen, ca. 2.3</a:t>
+            </a:r>
+          </a:p>
+          <a:p>
+            <a:endParaRPr lang="de-CH" dirty="0"/>
+          </a:p>
+        </p:txBody>
+      </p:sp>
+      <p:sp>
+        <p:nvSpPr>
+          <p:cNvPr id="4" name="Date Placeholder 3">
+            <a:extLst>
+              <a:ext uri="{FF2B5EF4-FFF2-40B4-BE49-F238E27FC236}">
+                <a16:creationId xmlns:a16="http://schemas.microsoft.com/office/drawing/2014/main" id="{E2F518B0-8644-7024-48B9-9A01A9355211}"/>
+              </a:ext>
+            </a:extLst>
+          </p:cNvPr>
+          <p:cNvSpPr>
+            <a:spLocks noGrp="1"/>
+          </p:cNvSpPr>
+          <p:nvPr>
+            <p:ph type="dt" sz="half" idx="10"/>
+          </p:nvPr>
+        </p:nvSpPr>
+        <p:spPr/>
+        <p:txBody>
+          <a:bodyPr/>
+          <a:lstStyle/>
+          <a:p>
+            <a:fld id="{EE15D7BA-2F5F-8E43-91CB-647D382EDB87}" type="datetime4">
+              <a:rPr lang="de-CH" smtClean="0"/>
+              <a:t>15. Juni 2026</a:t>
+            </a:fld>
+            <a:endParaRPr lang="en-CH"/>
+          </a:p>
+        </p:txBody>
+      </p:sp>
+      <p:sp>
+        <p:nvSpPr>
+          <p:cNvPr id="5" name="Footer Placeholder 4">
+            <a:extLst>
+              <a:ext uri="{FF2B5EF4-FFF2-40B4-BE49-F238E27FC236}">
+                <a16:creationId xmlns:a16="http://schemas.microsoft.com/office/drawing/2014/main" id="{9A77B753-D422-8715-5D97-C7528EDF25BE}"/>
+              </a:ext>
+            </a:extLst>
+          </p:cNvPr>
+          <p:cNvSpPr>
+            <a:spLocks noGrp="1"/>
+          </p:cNvSpPr>
+          <p:nvPr>
+            <p:ph type="ftr" sz="quarter" idx="11"/>
+          </p:nvPr>
+        </p:nvSpPr>
+        <p:spPr/>
+        <p:txBody>
+          <a:bodyPr/>
+          <a:lstStyle/>
+          <a:p>
+            <a:r>
+              <a:rPr lang="en-GB"/>
+              <a:t>Text Analysis- Svetlana Khominich, Ralph Müller, David Beer </a:t>
+            </a:r>
+            <a:endParaRPr lang="en-CH" dirty="0"/>
+          </a:p>
+        </p:txBody>
+      </p:sp>
+      <p:sp>
+        <p:nvSpPr>
+          <p:cNvPr id="6" name="Slide Number Placeholder 5">
+            <a:extLst>
+              <a:ext uri="{FF2B5EF4-FFF2-40B4-BE49-F238E27FC236}">
+                <a16:creationId xmlns:a16="http://schemas.microsoft.com/office/drawing/2014/main" id="{403E51DF-DD29-B90C-700B-81EA8241EDB8}"/>
+              </a:ext>
+            </a:extLst>
+          </p:cNvPr>
+          <p:cNvSpPr>
+            <a:spLocks noGrp="1"/>
+          </p:cNvSpPr>
+          <p:nvPr>
+            <p:ph type="sldNum" sz="quarter" idx="12"/>
+          </p:nvPr>
+        </p:nvSpPr>
+        <p:spPr/>
+        <p:txBody>
+          <a:bodyPr/>
+          <a:lstStyle/>
+          <a:p>
+            <a:fld id="{221FD296-2B0C-4A4B-AFAC-2E3A842869F0}" type="slidenum">
+              <a:rPr lang="en-CH" smtClean="0"/>
+              <a:t>15</a:t>
+            </a:fld>
+            <a:endParaRPr lang="en-CH"/>
+          </a:p>
+        </p:txBody>
+      </p:sp>
+      <p:sp>
+        <p:nvSpPr>
+          <p:cNvPr id="7" name="Rounded Rectangular Callout 6">
+            <a:extLst>
+              <a:ext uri="{FF2B5EF4-FFF2-40B4-BE49-F238E27FC236}">
+                <a16:creationId xmlns:a16="http://schemas.microsoft.com/office/drawing/2014/main" id="{C4E6F392-83B7-6AD4-ADF3-A55D03F53826}"/>
+              </a:ext>
+            </a:extLst>
+          </p:cNvPr>
+          <p:cNvSpPr/>
+          <p:nvPr/>
+        </p:nvSpPr>
+        <p:spPr>
+          <a:xfrm>
+            <a:off x="7628107" y="3226306"/>
+            <a:ext cx="3949430" cy="1326137"/>
+          </a:xfrm>
+          <a:prstGeom prst="wedgeRoundRectCallout">
+            <a:avLst>
+              <a:gd name="adj1" fmla="val -63468"/>
+              <a:gd name="adj2" fmla="val 5765"/>
+              <a:gd name="adj3" fmla="val 16667"/>
+            </a:avLst>
+          </a:prstGeom>
+          <a:solidFill>
+            <a:schemeClr val="accent4">
+              <a:lumMod val="20000"/>
+              <a:lumOff val="80000"/>
+            </a:schemeClr>
+          </a:solidFill>
+        </p:spPr>
+        <p:style>
+          <a:lnRef idx="2">
+            <a:schemeClr val="accent1">
+              <a:shade val="15000"/>
+            </a:schemeClr>
+          </a:lnRef>
+          <a:fillRef idx="1">
+            <a:schemeClr val="accent1"/>
+          </a:fillRef>
+          <a:effectRef idx="0">
+            <a:schemeClr val="accent1"/>
+          </a:effectRef>
+          <a:fontRef idx="minor">
+            <a:schemeClr val="lt1"/>
+          </a:fontRef>
+        </p:style>
+        <p:txBody>
+          <a:bodyPr rtlCol="0" anchor="ctr"/>
+          <a:lstStyle/>
+          <a:p>
+            <a:r>
+              <a:rPr lang="en-CH" dirty="0">
+                <a:solidFill>
+                  <a:schemeClr val="tx1"/>
+                </a:solidFill>
+              </a:rPr>
+              <a:t>Die difficulty-Klassen lassen sich nicht über Wort-Abstraktheit (Concreteness) unterscheiden</a:t>
+            </a:r>
+          </a:p>
+        </p:txBody>
+      </p:sp>
+    </p:spTree>
+    <p:extLst>
+      <p:ext uri="{BB962C8B-B14F-4D97-AF65-F5344CB8AC3E}">
+        <p14:creationId xmlns:p14="http://schemas.microsoft.com/office/powerpoint/2010/main" val="1008057135"/>
+      </p:ext>
+    </p:extLst>
+  </p:cSld>
+  <p:clrMapOvr>
+    <a:masterClrMapping/>
+  </p:clrMapOvr>
+</p:sld>
+</file>
+
+<file path=ppt/slides/slide16.xml><?xml version="1.0" encoding="utf-8"?>
+<p:sld xmlns:a="http://schemas.openxmlformats.org/drawingml/2006/main" xmlns:r="http://schemas.openxmlformats.org/officeDocument/2006/relationships" xmlns:p="http://schemas.openxmlformats.org/presentationml/2006/main">
+  <p:cSld>
+    <p:spTree>
+      <p:nvGrpSpPr>
+        <p:cNvPr id="1" name=""/>
+        <p:cNvGrpSpPr/>
+        <p:nvPr/>
+      </p:nvGrpSpPr>
+      <p:grpSpPr>
+        <a:xfrm>
+          <a:off x="0" y="0"/>
+          <a:ext cx="0" cy="0"/>
+          <a:chOff x="0" y="0"/>
+          <a:chExt cx="0" cy="0"/>
+        </a:xfrm>
+      </p:grpSpPr>
+      <p:sp>
+        <p:nvSpPr>
+          <p:cNvPr id="2" name="Title 1">
+            <a:extLst>
+              <a:ext uri="{FF2B5EF4-FFF2-40B4-BE49-F238E27FC236}">
+                <a16:creationId xmlns:a16="http://schemas.microsoft.com/office/drawing/2014/main" id="{75A68025-513E-82D3-920A-BD1B006A4138}"/>
+              </a:ext>
+            </a:extLst>
+          </p:cNvPr>
+          <p:cNvSpPr>
+            <a:spLocks noGrp="1"/>
+          </p:cNvSpPr>
+          <p:nvPr>
+            <p:ph type="title"/>
+          </p:nvPr>
+        </p:nvSpPr>
+        <p:spPr/>
+        <p:txBody>
+          <a:bodyPr/>
+          <a:lstStyle/>
+          <a:p>
+            <a:r>
+              <a:rPr lang="de-CH" dirty="0"/>
+              <a:t>Sentiment pro </a:t>
+            </a:r>
+            <a:r>
+              <a:rPr lang="de-CH" dirty="0" err="1"/>
+              <a:t>Difficulty</a:t>
+            </a:r>
+            <a:r>
+              <a:rPr lang="de-CH" dirty="0"/>
+              <a:t> Level</a:t>
+            </a:r>
+          </a:p>
+        </p:txBody>
+      </p:sp>
+      <p:sp>
+        <p:nvSpPr>
+          <p:cNvPr id="3" name="Content Placeholder 2">
+            <a:extLst>
+              <a:ext uri="{FF2B5EF4-FFF2-40B4-BE49-F238E27FC236}">
+                <a16:creationId xmlns:a16="http://schemas.microsoft.com/office/drawing/2014/main" id="{406A842B-1EB6-0958-650E-A3E17C2D5D71}"/>
+              </a:ext>
+            </a:extLst>
+          </p:cNvPr>
+          <p:cNvSpPr>
+            <a:spLocks noGrp="1"/>
+          </p:cNvSpPr>
+          <p:nvPr>
+            <p:ph idx="1"/>
+          </p:nvPr>
+        </p:nvSpPr>
+        <p:spPr/>
+        <p:txBody>
+          <a:bodyPr/>
+          <a:lstStyle/>
+          <a:p>
+            <a:r>
+              <a:rPr lang="de-CH" dirty="0"/>
+              <a:t>Sentiment mit </a:t>
+            </a:r>
+            <a:r>
+              <a:rPr lang="de-CH" dirty="0" err="1"/>
+              <a:t>TextBlob</a:t>
+            </a:r>
+            <a:r>
+              <a:rPr lang="de-CH" dirty="0"/>
+              <a:t> (&lt; 0 neg. &gt; 0 pos.)</a:t>
+            </a:r>
+          </a:p>
+          <a:p>
+            <a:pPr marL="0" indent="0">
+              <a:buNone/>
+            </a:pPr>
+            <a:r>
+              <a:rPr lang="en-CH" dirty="0"/>
+              <a:t>difficulty 	count_texts 	mean 		median</a:t>
+            </a:r>
+          </a:p>
+          <a:p>
+            <a:r>
+              <a:rPr lang="en-CH" dirty="0"/>
+              <a:t>0 		6489 		0.260 		0.251</a:t>
+            </a:r>
+          </a:p>
+          <a:p>
+            <a:r>
+              <a:rPr lang="en-CH" dirty="0"/>
+              <a:t>1 		975 		0.267 		0.271</a:t>
+            </a:r>
+          </a:p>
+          <a:p>
+            <a:r>
+              <a:rPr lang="en-CH" dirty="0"/>
+              <a:t>2 		438 		0.276 		0.267</a:t>
+            </a:r>
+          </a:p>
+          <a:p>
+            <a:r>
+              <a:rPr lang="en-CH" dirty="0"/>
+              <a:t>3 		185 		0.338	 	0.325</a:t>
+            </a:r>
+          </a:p>
+          <a:p>
+            <a:endParaRPr lang="de-CH" dirty="0"/>
+          </a:p>
+        </p:txBody>
+      </p:sp>
+      <p:sp>
+        <p:nvSpPr>
+          <p:cNvPr id="4" name="Date Placeholder 3">
+            <a:extLst>
+              <a:ext uri="{FF2B5EF4-FFF2-40B4-BE49-F238E27FC236}">
+                <a16:creationId xmlns:a16="http://schemas.microsoft.com/office/drawing/2014/main" id="{7362C563-97AF-F9F3-DC60-7855C498196D}"/>
+              </a:ext>
+            </a:extLst>
+          </p:cNvPr>
+          <p:cNvSpPr>
+            <a:spLocks noGrp="1"/>
+          </p:cNvSpPr>
+          <p:nvPr>
+            <p:ph type="dt" sz="half" idx="10"/>
+          </p:nvPr>
+        </p:nvSpPr>
+        <p:spPr/>
+        <p:txBody>
+          <a:bodyPr/>
+          <a:lstStyle/>
+          <a:p>
+            <a:fld id="{EE15D7BA-2F5F-8E43-91CB-647D382EDB87}" type="datetime4">
+              <a:rPr lang="de-CH" smtClean="0"/>
+              <a:t>15. Juni 2026</a:t>
+            </a:fld>
+            <a:endParaRPr lang="en-CH"/>
+          </a:p>
+        </p:txBody>
+      </p:sp>
+      <p:sp>
+        <p:nvSpPr>
+          <p:cNvPr id="5" name="Footer Placeholder 4">
+            <a:extLst>
+              <a:ext uri="{FF2B5EF4-FFF2-40B4-BE49-F238E27FC236}">
+                <a16:creationId xmlns:a16="http://schemas.microsoft.com/office/drawing/2014/main" id="{5EA722B6-06FF-0D34-BB39-F3A371849599}"/>
+              </a:ext>
+            </a:extLst>
+          </p:cNvPr>
+          <p:cNvSpPr>
+            <a:spLocks noGrp="1"/>
+          </p:cNvSpPr>
+          <p:nvPr>
+            <p:ph type="ftr" sz="quarter" idx="11"/>
+          </p:nvPr>
+        </p:nvSpPr>
+        <p:spPr/>
+        <p:txBody>
+          <a:bodyPr/>
+          <a:lstStyle/>
+          <a:p>
+            <a:r>
+              <a:rPr lang="en-GB"/>
+              <a:t>Text Analysis- Svetlana Khominich, Ralph Müller, David Beer </a:t>
+            </a:r>
+            <a:endParaRPr lang="en-CH" dirty="0"/>
+          </a:p>
+        </p:txBody>
+      </p:sp>
+      <p:sp>
+        <p:nvSpPr>
+          <p:cNvPr id="6" name="Slide Number Placeholder 5">
+            <a:extLst>
+              <a:ext uri="{FF2B5EF4-FFF2-40B4-BE49-F238E27FC236}">
+                <a16:creationId xmlns:a16="http://schemas.microsoft.com/office/drawing/2014/main" id="{2F5FDAF0-8E38-66DD-5E87-40BA888CB4FD}"/>
+              </a:ext>
+            </a:extLst>
+          </p:cNvPr>
+          <p:cNvSpPr>
+            <a:spLocks noGrp="1"/>
+          </p:cNvSpPr>
+          <p:nvPr>
+            <p:ph type="sldNum" sz="quarter" idx="12"/>
+          </p:nvPr>
+        </p:nvSpPr>
+        <p:spPr/>
+        <p:txBody>
+          <a:bodyPr/>
+          <a:lstStyle/>
+          <a:p>
+            <a:fld id="{221FD296-2B0C-4A4B-AFAC-2E3A842869F0}" type="slidenum">
+              <a:rPr lang="en-CH" smtClean="0"/>
+              <a:t>16</a:t>
+            </a:fld>
+            <a:endParaRPr lang="en-CH"/>
+          </a:p>
+        </p:txBody>
+      </p:sp>
+      <p:sp>
+        <p:nvSpPr>
+          <p:cNvPr id="7" name="Rounded Rectangular Callout 6">
+            <a:extLst>
+              <a:ext uri="{FF2B5EF4-FFF2-40B4-BE49-F238E27FC236}">
+                <a16:creationId xmlns:a16="http://schemas.microsoft.com/office/drawing/2014/main" id="{B4AB5B99-64A9-59C6-3A91-96117C4260EB}"/>
+              </a:ext>
+            </a:extLst>
+          </p:cNvPr>
+          <p:cNvSpPr/>
+          <p:nvPr/>
+        </p:nvSpPr>
+        <p:spPr>
+          <a:xfrm>
+            <a:off x="6762345" y="5113473"/>
+            <a:ext cx="3949430" cy="956587"/>
+          </a:xfrm>
+          <a:prstGeom prst="wedgeRoundRectCallout">
+            <a:avLst>
+              <a:gd name="adj1" fmla="val -63468"/>
+              <a:gd name="adj2" fmla="val 5765"/>
+              <a:gd name="adj3" fmla="val 16667"/>
+            </a:avLst>
+          </a:prstGeom>
+          <a:solidFill>
+            <a:schemeClr val="accent4">
+              <a:lumMod val="20000"/>
+              <a:lumOff val="80000"/>
+            </a:schemeClr>
+          </a:solidFill>
+        </p:spPr>
+        <p:style>
+          <a:lnRef idx="2">
+            <a:schemeClr val="accent1">
+              <a:shade val="15000"/>
+            </a:schemeClr>
+          </a:lnRef>
+          <a:fillRef idx="1">
+            <a:schemeClr val="accent1"/>
+          </a:fillRef>
+          <a:effectRef idx="0">
+            <a:schemeClr val="accent1"/>
+          </a:effectRef>
+          <a:fontRef idx="minor">
+            <a:schemeClr val="lt1"/>
+          </a:fontRef>
+        </p:style>
+        <p:txBody>
+          <a:bodyPr rtlCol="0" anchor="ctr"/>
+          <a:lstStyle/>
+          <a:p>
+            <a:r>
+              <a:rPr lang="en-GB" dirty="0">
+                <a:solidFill>
+                  <a:schemeClr val="tx1"/>
+                </a:solidFill>
+              </a:rPr>
+              <a:t>L</a:t>
+            </a:r>
+            <a:r>
+              <a:rPr lang="en-CH" dirty="0">
+                <a:solidFill>
+                  <a:schemeClr val="tx1"/>
+                </a:solidFill>
+              </a:rPr>
+              <a:t>eichter positiver Trend</a:t>
+            </a:r>
+          </a:p>
+          <a:p>
+            <a:r>
+              <a:rPr lang="en-CH" dirty="0">
+                <a:solidFill>
+                  <a:schemeClr val="tx1"/>
+                </a:solidFill>
+              </a:rPr>
+              <a:t>Sentiment steigt, Schwierigkeit wird höher</a:t>
+            </a:r>
+          </a:p>
+        </p:txBody>
+      </p:sp>
+    </p:spTree>
+    <p:extLst>
+      <p:ext uri="{BB962C8B-B14F-4D97-AF65-F5344CB8AC3E}">
+        <p14:creationId xmlns:p14="http://schemas.microsoft.com/office/powerpoint/2010/main" val="236313719"/>
+      </p:ext>
+    </p:extLst>
+  </p:cSld>
+  <p:clrMapOvr>
+    <a:masterClrMapping/>
+  </p:clrMapOvr>
+</p:sld>
+</file>
+
+<file path=ppt/slides/slide17.xml><?xml version="1.0" encoding="utf-8"?>
+<p:sld xmlns:a="http://schemas.openxmlformats.org/drawingml/2006/main" xmlns:r="http://schemas.openxmlformats.org/officeDocument/2006/relationships" xmlns:p="http://schemas.openxmlformats.org/presentationml/2006/main">
+  <p:cSld>
+    <p:spTree>
+      <p:nvGrpSpPr>
+        <p:cNvPr id="1" name=""/>
+        <p:cNvGrpSpPr/>
+        <p:nvPr/>
+      </p:nvGrpSpPr>
+      <p:grpSpPr>
+        <a:xfrm>
+          <a:off x="0" y="0"/>
+          <a:ext cx="0" cy="0"/>
+          <a:chOff x="0" y="0"/>
+          <a:chExt cx="0" cy="0"/>
+        </a:xfrm>
+      </p:grpSpPr>
+      <p:sp>
+        <p:nvSpPr>
+          <p:cNvPr id="2" name="Title 1">
+            <a:extLst>
+              <a:ext uri="{FF2B5EF4-FFF2-40B4-BE49-F238E27FC236}">
+                <a16:creationId xmlns:a16="http://schemas.microsoft.com/office/drawing/2014/main" id="{39C00302-ED21-2393-6CCB-7349AE9122E0}"/>
+              </a:ext>
+            </a:extLst>
+          </p:cNvPr>
+          <p:cNvSpPr>
+            <a:spLocks noGrp="1"/>
+          </p:cNvSpPr>
+          <p:nvPr>
+            <p:ph type="title"/>
+          </p:nvPr>
+        </p:nvSpPr>
+        <p:spPr/>
+        <p:txBody>
+          <a:bodyPr>
+            <a:normAutofit/>
+          </a:bodyPr>
+          <a:lstStyle/>
+          <a:p>
+            <a:r>
+              <a:rPr lang="en-CH" dirty="0"/>
+              <a:t>Wortfrequenz bad Predictions</a:t>
+            </a:r>
+            <a:endParaRPr lang="de-CH" dirty="0"/>
+          </a:p>
+        </p:txBody>
+      </p:sp>
+      <p:sp>
+        <p:nvSpPr>
+          <p:cNvPr id="3" name="Content Placeholder 2">
+            <a:extLst>
+              <a:ext uri="{FF2B5EF4-FFF2-40B4-BE49-F238E27FC236}">
+                <a16:creationId xmlns:a16="http://schemas.microsoft.com/office/drawing/2014/main" id="{CA84C977-5AEC-A87D-1D24-43BF540DD948}"/>
+              </a:ext>
+            </a:extLst>
+          </p:cNvPr>
+          <p:cNvSpPr>
+            <a:spLocks noGrp="1"/>
+          </p:cNvSpPr>
+          <p:nvPr>
+            <p:ph idx="1"/>
+          </p:nvPr>
+        </p:nvSpPr>
+        <p:spPr/>
+        <p:txBody>
+          <a:bodyPr>
+            <a:normAutofit fontScale="55000" lnSpcReduction="20000"/>
+          </a:bodyPr>
+          <a:lstStyle/>
+          <a:p>
+            <a:r>
+              <a:rPr lang="de-CH" dirty="0" err="1"/>
+              <a:t>CountVectorizer</a:t>
+            </a:r>
+            <a:r>
+              <a:rPr lang="de-CH" dirty="0"/>
+              <a:t> (Bag-</a:t>
+            </a:r>
+            <a:r>
+              <a:rPr lang="de-CH" dirty="0" err="1"/>
+              <a:t>of</a:t>
+            </a:r>
+            <a:r>
+              <a:rPr lang="de-CH" dirty="0"/>
+              <a:t>-Words)</a:t>
+            </a:r>
+          </a:p>
+          <a:p>
+            <a:r>
+              <a:rPr lang="de-CH" dirty="0" err="1"/>
+              <a:t>Stopwords</a:t>
+            </a:r>
+            <a:endParaRPr lang="de-CH" dirty="0"/>
+          </a:p>
+          <a:p>
+            <a:r>
+              <a:rPr lang="de-CH" dirty="0"/>
+              <a:t>Top 50 Wörter</a:t>
+            </a:r>
+          </a:p>
+          <a:p>
+            <a:r>
+              <a:rPr lang="de-CH" dirty="0"/>
+              <a:t> </a:t>
+            </a:r>
+            <a:r>
+              <a:rPr lang="de-CH" dirty="0" err="1"/>
+              <a:t>word</a:t>
+            </a:r>
+            <a:r>
+              <a:rPr lang="de-CH" dirty="0"/>
+              <a:t>  </a:t>
+            </a:r>
+            <a:r>
+              <a:rPr lang="de-CH" dirty="0" err="1"/>
+              <a:t>freq</a:t>
+            </a:r>
+            <a:endParaRPr lang="de-CH" dirty="0"/>
+          </a:p>
+          <a:p>
+            <a:r>
+              <a:rPr lang="de-CH" dirty="0" err="1"/>
+              <a:t>disc</a:t>
+            </a:r>
+            <a:r>
+              <a:rPr lang="de-CH" dirty="0"/>
+              <a:t>    84</a:t>
+            </a:r>
+          </a:p>
+          <a:p>
+            <a:r>
+              <a:rPr lang="de-CH" dirty="0" err="1"/>
+              <a:t>great</a:t>
+            </a:r>
+            <a:r>
+              <a:rPr lang="de-CH" dirty="0"/>
+              <a:t>    41</a:t>
+            </a:r>
+          </a:p>
+          <a:p>
+            <a:r>
+              <a:rPr lang="de-CH" dirty="0" err="1"/>
+              <a:t>good</a:t>
+            </a:r>
+            <a:r>
+              <a:rPr lang="de-CH" dirty="0"/>
+              <a:t>    37</a:t>
+            </a:r>
+          </a:p>
+          <a:p>
+            <a:r>
+              <a:rPr lang="de-CH" dirty="0" err="1"/>
+              <a:t>love</a:t>
+            </a:r>
+            <a:r>
+              <a:rPr lang="de-CH" dirty="0"/>
+              <a:t>    31</a:t>
+            </a:r>
+          </a:p>
+          <a:p>
+            <a:r>
+              <a:rPr lang="de-CH" dirty="0" err="1"/>
+              <a:t>format</a:t>
+            </a:r>
+            <a:r>
+              <a:rPr lang="de-CH" dirty="0"/>
+              <a:t>    26</a:t>
+            </a:r>
+          </a:p>
+          <a:p>
+            <a:r>
+              <a:rPr lang="de-CH" dirty="0" err="1"/>
+              <a:t>manual</a:t>
+            </a:r>
+            <a:r>
+              <a:rPr lang="de-CH" dirty="0"/>
+              <a:t>    23</a:t>
+            </a:r>
+          </a:p>
+          <a:p>
+            <a:r>
+              <a:rPr lang="de-CH" dirty="0" err="1"/>
+              <a:t>book</a:t>
+            </a:r>
+            <a:r>
+              <a:rPr lang="de-CH" dirty="0"/>
+              <a:t>    20</a:t>
+            </a:r>
+          </a:p>
+          <a:p>
+            <a:r>
+              <a:rPr lang="de-CH" dirty="0"/>
+              <a:t>cd    19</a:t>
+            </a:r>
+          </a:p>
+          <a:p>
+            <a:r>
+              <a:rPr lang="de-CH" dirty="0" err="1"/>
+              <a:t>read</a:t>
+            </a:r>
+            <a:r>
+              <a:rPr lang="de-CH" dirty="0"/>
+              <a:t>    19</a:t>
+            </a:r>
+          </a:p>
+          <a:p>
+            <a:r>
+              <a:rPr lang="de-CH" dirty="0"/>
+              <a:t>easy    18</a:t>
+            </a:r>
+          </a:p>
+          <a:p>
+            <a:r>
+              <a:rPr lang="de-CH" dirty="0" err="1"/>
+              <a:t>dog</a:t>
+            </a:r>
+            <a:r>
+              <a:rPr lang="de-CH" dirty="0"/>
+              <a:t>    16</a:t>
+            </a:r>
+          </a:p>
+        </p:txBody>
+      </p:sp>
+      <p:sp>
+        <p:nvSpPr>
+          <p:cNvPr id="4" name="Date Placeholder 3">
+            <a:extLst>
+              <a:ext uri="{FF2B5EF4-FFF2-40B4-BE49-F238E27FC236}">
+                <a16:creationId xmlns:a16="http://schemas.microsoft.com/office/drawing/2014/main" id="{228D2D2A-E1E7-AF08-3F74-3EAA6F4BC62C}"/>
+              </a:ext>
+            </a:extLst>
+          </p:cNvPr>
+          <p:cNvSpPr>
+            <a:spLocks noGrp="1"/>
+          </p:cNvSpPr>
+          <p:nvPr>
+            <p:ph type="dt" sz="half" idx="10"/>
+          </p:nvPr>
+        </p:nvSpPr>
+        <p:spPr/>
+        <p:txBody>
+          <a:bodyPr/>
+          <a:lstStyle/>
+          <a:p>
+            <a:fld id="{EE15D7BA-2F5F-8E43-91CB-647D382EDB87}" type="datetime4">
+              <a:rPr lang="de-CH" smtClean="0"/>
+              <a:t>15. Juni 2026</a:t>
+            </a:fld>
+            <a:endParaRPr lang="en-CH"/>
+          </a:p>
+        </p:txBody>
+      </p:sp>
+      <p:sp>
+        <p:nvSpPr>
+          <p:cNvPr id="5" name="Footer Placeholder 4">
+            <a:extLst>
+              <a:ext uri="{FF2B5EF4-FFF2-40B4-BE49-F238E27FC236}">
+                <a16:creationId xmlns:a16="http://schemas.microsoft.com/office/drawing/2014/main" id="{DE1DF519-D397-9206-3978-667B2E85EE27}"/>
+              </a:ext>
+            </a:extLst>
+          </p:cNvPr>
+          <p:cNvSpPr>
+            <a:spLocks noGrp="1"/>
+          </p:cNvSpPr>
+          <p:nvPr>
+            <p:ph type="ftr" sz="quarter" idx="11"/>
+          </p:nvPr>
+        </p:nvSpPr>
+        <p:spPr/>
+        <p:txBody>
+          <a:bodyPr/>
+          <a:lstStyle/>
+          <a:p>
+            <a:r>
+              <a:rPr lang="en-GB"/>
+              <a:t>Text Analysis- Svetlana Khominich, Ralph Müller, David Beer </a:t>
+            </a:r>
+            <a:endParaRPr lang="en-CH" dirty="0"/>
+          </a:p>
+        </p:txBody>
+      </p:sp>
+      <p:sp>
+        <p:nvSpPr>
+          <p:cNvPr id="6" name="Slide Number Placeholder 5">
+            <a:extLst>
+              <a:ext uri="{FF2B5EF4-FFF2-40B4-BE49-F238E27FC236}">
+                <a16:creationId xmlns:a16="http://schemas.microsoft.com/office/drawing/2014/main" id="{693A3DE6-BC6E-1016-C513-1D4CCA0D707D}"/>
+              </a:ext>
+            </a:extLst>
+          </p:cNvPr>
+          <p:cNvSpPr>
+            <a:spLocks noGrp="1"/>
+          </p:cNvSpPr>
+          <p:nvPr>
+            <p:ph type="sldNum" sz="quarter" idx="12"/>
+          </p:nvPr>
+        </p:nvSpPr>
+        <p:spPr/>
+        <p:txBody>
+          <a:bodyPr/>
+          <a:lstStyle/>
+          <a:p>
+            <a:fld id="{221FD296-2B0C-4A4B-AFAC-2E3A842869F0}" type="slidenum">
+              <a:rPr lang="en-CH" smtClean="0"/>
+              <a:t>17</a:t>
+            </a:fld>
+            <a:endParaRPr lang="en-CH"/>
+          </a:p>
+        </p:txBody>
+      </p:sp>
+      <p:sp>
+        <p:nvSpPr>
+          <p:cNvPr id="7" name="Rounded Rectangular Callout 6">
+            <a:extLst>
+              <a:ext uri="{FF2B5EF4-FFF2-40B4-BE49-F238E27FC236}">
+                <a16:creationId xmlns:a16="http://schemas.microsoft.com/office/drawing/2014/main" id="{12B5939C-00FB-2DB7-7C8A-BDC713898811}"/>
+              </a:ext>
+            </a:extLst>
+          </p:cNvPr>
+          <p:cNvSpPr/>
+          <p:nvPr/>
+        </p:nvSpPr>
+        <p:spPr>
+          <a:xfrm>
+            <a:off x="4855724" y="3245764"/>
+            <a:ext cx="2683212" cy="684212"/>
+          </a:xfrm>
+          <a:prstGeom prst="wedgeRoundRectCallout">
+            <a:avLst>
+              <a:gd name="adj1" fmla="val -63468"/>
+              <a:gd name="adj2" fmla="val 5765"/>
+              <a:gd name="adj3" fmla="val 16667"/>
+            </a:avLst>
+          </a:prstGeom>
+          <a:solidFill>
+            <a:schemeClr val="accent4">
+              <a:lumMod val="20000"/>
+              <a:lumOff val="80000"/>
+            </a:schemeClr>
+          </a:solidFill>
+        </p:spPr>
+        <p:style>
+          <a:lnRef idx="2">
+            <a:schemeClr val="accent1">
+              <a:shade val="15000"/>
+            </a:schemeClr>
+          </a:lnRef>
+          <a:fillRef idx="1">
+            <a:schemeClr val="accent1"/>
+          </a:fillRef>
+          <a:effectRef idx="0">
+            <a:schemeClr val="accent1"/>
+          </a:effectRef>
+          <a:fontRef idx="minor">
+            <a:schemeClr val="lt1"/>
+          </a:fontRef>
+        </p:style>
+        <p:txBody>
+          <a:bodyPr rtlCol="0" anchor="ctr"/>
+          <a:lstStyle/>
+          <a:p>
+            <a:r>
+              <a:rPr lang="de-CH" dirty="0">
+                <a:solidFill>
+                  <a:schemeClr val="tx1"/>
+                </a:solidFill>
+              </a:rPr>
+              <a:t>Great, </a:t>
+            </a:r>
+            <a:r>
+              <a:rPr lang="de-CH" dirty="0" err="1">
+                <a:solidFill>
+                  <a:schemeClr val="tx1"/>
+                </a:solidFill>
+              </a:rPr>
+              <a:t>good</a:t>
+            </a:r>
+            <a:r>
+              <a:rPr lang="de-CH" dirty="0">
+                <a:solidFill>
+                  <a:schemeClr val="tx1"/>
+                </a:solidFill>
+              </a:rPr>
+              <a:t>, </a:t>
+            </a:r>
+            <a:r>
+              <a:rPr lang="de-CH" dirty="0" err="1">
+                <a:solidFill>
+                  <a:schemeClr val="tx1"/>
+                </a:solidFill>
+              </a:rPr>
+              <a:t>love</a:t>
+            </a:r>
+            <a:r>
+              <a:rPr lang="de-CH" dirty="0">
+                <a:solidFill>
+                  <a:schemeClr val="tx1"/>
+                </a:solidFill>
+              </a:rPr>
+              <a:t> 👎🏻</a:t>
+            </a:r>
+            <a:endParaRPr lang="en-CH" dirty="0">
+              <a:solidFill>
+                <a:schemeClr val="tx1"/>
+              </a:solidFill>
+            </a:endParaRPr>
+          </a:p>
+        </p:txBody>
+      </p:sp>
+    </p:spTree>
+    <p:extLst>
+      <p:ext uri="{BB962C8B-B14F-4D97-AF65-F5344CB8AC3E}">
+        <p14:creationId xmlns:p14="http://schemas.microsoft.com/office/powerpoint/2010/main" val="3890322213"/>
+      </p:ext>
+    </p:extLst>
+  </p:cSld>
+  <p:clrMapOvr>
+    <a:masterClrMapping/>
+  </p:clrMapOvr>
+</p:sld>
+</file>
+
+<file path=ppt/slides/slide18.xml><?xml version="1.0" encoding="utf-8"?>
+<p:sld xmlns:a="http://schemas.openxmlformats.org/drawingml/2006/main" xmlns:r="http://schemas.openxmlformats.org/officeDocument/2006/relationships" xmlns:p="http://schemas.openxmlformats.org/presentationml/2006/main">
+  <p:cSld>
+    <p:spTree>
+      <p:nvGrpSpPr>
+        <p:cNvPr id="1" name=""/>
+        <p:cNvGrpSpPr/>
+        <p:nvPr/>
+      </p:nvGrpSpPr>
+      <p:grpSpPr>
+        <a:xfrm>
+          <a:off x="0" y="0"/>
+          <a:ext cx="0" cy="0"/>
+          <a:chOff x="0" y="0"/>
+          <a:chExt cx="0" cy="0"/>
+        </a:xfrm>
+      </p:grpSpPr>
+      <p:sp>
+        <p:nvSpPr>
+          <p:cNvPr id="2" name="Title 1">
+            <a:extLst>
+              <a:ext uri="{FF2B5EF4-FFF2-40B4-BE49-F238E27FC236}">
+                <a16:creationId xmlns:a16="http://schemas.microsoft.com/office/drawing/2014/main" id="{C920FCBD-11AF-2890-1169-632E0CC0EABB}"/>
+              </a:ext>
+            </a:extLst>
+          </p:cNvPr>
+          <p:cNvSpPr>
+            <a:spLocks noGrp="1"/>
+          </p:cNvSpPr>
+          <p:nvPr>
+            <p:ph type="title"/>
+          </p:nvPr>
+        </p:nvSpPr>
+        <p:spPr/>
+        <p:txBody>
+          <a:bodyPr/>
+          <a:lstStyle/>
+          <a:p>
+            <a:r>
+              <a:rPr lang="de-CH" dirty="0" err="1"/>
+              <a:t>Embeddings</a:t>
+            </a:r>
+            <a:r>
+              <a:rPr lang="de-CH" dirty="0"/>
+              <a:t> PCA, TSNE, UMAP…</a:t>
+            </a:r>
+          </a:p>
+        </p:txBody>
+      </p:sp>
+      <p:sp>
+        <p:nvSpPr>
+          <p:cNvPr id="3" name="Content Placeholder 2">
+            <a:extLst>
+              <a:ext uri="{FF2B5EF4-FFF2-40B4-BE49-F238E27FC236}">
+                <a16:creationId xmlns:a16="http://schemas.microsoft.com/office/drawing/2014/main" id="{EF706B76-DF3F-E4FB-2F4E-64E02221D2B1}"/>
+              </a:ext>
+            </a:extLst>
+          </p:cNvPr>
+          <p:cNvSpPr>
+            <a:spLocks noGrp="1"/>
+          </p:cNvSpPr>
+          <p:nvPr>
+            <p:ph idx="1"/>
+          </p:nvPr>
+        </p:nvSpPr>
+        <p:spPr/>
+        <p:txBody>
+          <a:bodyPr/>
+          <a:lstStyle/>
+          <a:p>
+            <a:r>
+              <a:rPr lang="de-CH" dirty="0"/>
+              <a:t>Transformer: </a:t>
+            </a:r>
+            <a:r>
+              <a:rPr lang="en-CH" dirty="0"/>
+              <a:t>BAAI/bge-base-en-v1.5</a:t>
+            </a:r>
+          </a:p>
+          <a:p>
+            <a:r>
+              <a:rPr lang="de-CH" dirty="0"/>
+              <a:t>Dimensionsreduktion und Darstellung auf Plot</a:t>
+            </a:r>
+          </a:p>
+          <a:p>
+            <a:r>
+              <a:rPr lang="en-CH" dirty="0"/>
+              <a:t>Rot/Blau gemischt → Fehler verteilen sich gleichmässig im Semantikraum. Es hat kein strukturelles Muster</a:t>
+            </a:r>
+          </a:p>
+          <a:p>
+            <a:endParaRPr lang="de-CH" dirty="0"/>
+          </a:p>
+        </p:txBody>
+      </p:sp>
+      <p:sp>
+        <p:nvSpPr>
+          <p:cNvPr id="4" name="Date Placeholder 3">
+            <a:extLst>
+              <a:ext uri="{FF2B5EF4-FFF2-40B4-BE49-F238E27FC236}">
+                <a16:creationId xmlns:a16="http://schemas.microsoft.com/office/drawing/2014/main" id="{7D3BCD11-496E-279C-80E2-9DC9FA51A4A7}"/>
+              </a:ext>
+            </a:extLst>
+          </p:cNvPr>
+          <p:cNvSpPr>
+            <a:spLocks noGrp="1"/>
+          </p:cNvSpPr>
+          <p:nvPr>
+            <p:ph type="dt" sz="half" idx="10"/>
+          </p:nvPr>
+        </p:nvSpPr>
+        <p:spPr/>
+        <p:txBody>
+          <a:bodyPr/>
+          <a:lstStyle/>
+          <a:p>
+            <a:fld id="{EE15D7BA-2F5F-8E43-91CB-647D382EDB87}" type="datetime4">
+              <a:rPr lang="de-CH" smtClean="0"/>
+              <a:t>15. Juni 2026</a:t>
+            </a:fld>
+            <a:endParaRPr lang="en-CH"/>
+          </a:p>
+        </p:txBody>
+      </p:sp>
+      <p:sp>
+        <p:nvSpPr>
+          <p:cNvPr id="5" name="Footer Placeholder 4">
+            <a:extLst>
+              <a:ext uri="{FF2B5EF4-FFF2-40B4-BE49-F238E27FC236}">
+                <a16:creationId xmlns:a16="http://schemas.microsoft.com/office/drawing/2014/main" id="{2C2B0016-9F80-20DE-FA2D-B80DB12CCB4B}"/>
+              </a:ext>
+            </a:extLst>
+          </p:cNvPr>
+          <p:cNvSpPr>
+            <a:spLocks noGrp="1"/>
+          </p:cNvSpPr>
+          <p:nvPr>
+            <p:ph type="ftr" sz="quarter" idx="11"/>
+          </p:nvPr>
+        </p:nvSpPr>
+        <p:spPr/>
+        <p:txBody>
+          <a:bodyPr/>
+          <a:lstStyle/>
+          <a:p>
+            <a:r>
+              <a:rPr lang="en-GB"/>
+              <a:t>Text Analysis- Svetlana Khominich, Ralph Müller, David Beer </a:t>
+            </a:r>
+            <a:endParaRPr lang="en-CH" dirty="0"/>
+          </a:p>
+        </p:txBody>
+      </p:sp>
+      <p:sp>
+        <p:nvSpPr>
+          <p:cNvPr id="6" name="Slide Number Placeholder 5">
+            <a:extLst>
+              <a:ext uri="{FF2B5EF4-FFF2-40B4-BE49-F238E27FC236}">
+                <a16:creationId xmlns:a16="http://schemas.microsoft.com/office/drawing/2014/main" id="{11B82D64-4F04-F2A9-97F9-560FF9B3A04A}"/>
+              </a:ext>
+            </a:extLst>
+          </p:cNvPr>
+          <p:cNvSpPr>
+            <a:spLocks noGrp="1"/>
+          </p:cNvSpPr>
+          <p:nvPr>
+            <p:ph type="sldNum" sz="quarter" idx="12"/>
+          </p:nvPr>
+        </p:nvSpPr>
+        <p:spPr/>
+        <p:txBody>
+          <a:bodyPr/>
+          <a:lstStyle/>
+          <a:p>
+            <a:fld id="{221FD296-2B0C-4A4B-AFAC-2E3A842869F0}" type="slidenum">
+              <a:rPr lang="en-CH" smtClean="0"/>
+              <a:t>18</a:t>
+            </a:fld>
+            <a:endParaRPr lang="en-CH"/>
+          </a:p>
+        </p:txBody>
+      </p:sp>
+    </p:spTree>
+    <p:extLst>
+      <p:ext uri="{BB962C8B-B14F-4D97-AF65-F5344CB8AC3E}">
+        <p14:creationId xmlns:p14="http://schemas.microsoft.com/office/powerpoint/2010/main" val="4097295119"/>
+      </p:ext>
+    </p:extLst>
+  </p:cSld>
+  <p:clrMapOvr>
+    <a:masterClrMapping/>
+  </p:clrMapOvr>
+</p:sld>
+</file>
+
+<file path=ppt/slides/slide19.xml><?xml version="1.0" encoding="utf-8"?>
+<p:sld xmlns:a="http://schemas.openxmlformats.org/drawingml/2006/main" xmlns:r="http://schemas.openxmlformats.org/officeDocument/2006/relationships" xmlns:p="http://schemas.openxmlformats.org/presentationml/2006/main">
+  <p:cSld>
+    <p:spTree>
+      <p:nvGrpSpPr>
+        <p:cNvPr id="1" name=""/>
+        <p:cNvGrpSpPr/>
+        <p:nvPr/>
+      </p:nvGrpSpPr>
+      <p:grpSpPr>
+        <a:xfrm>
+          <a:off x="0" y="0"/>
+          <a:ext cx="0" cy="0"/>
+          <a:chOff x="0" y="0"/>
+          <a:chExt cx="0" cy="0"/>
+        </a:xfrm>
+      </p:grpSpPr>
+      <p:sp>
+        <p:nvSpPr>
+          <p:cNvPr id="2" name="Title 1">
+            <a:extLst>
+              <a:ext uri="{FF2B5EF4-FFF2-40B4-BE49-F238E27FC236}">
+                <a16:creationId xmlns:a16="http://schemas.microsoft.com/office/drawing/2014/main" id="{37CA9EC5-4BB1-B24F-C221-B3E739738DC3}"/>
+              </a:ext>
+            </a:extLst>
+          </p:cNvPr>
+          <p:cNvSpPr>
+            <a:spLocks noGrp="1"/>
+          </p:cNvSpPr>
+          <p:nvPr>
+            <p:ph type="title"/>
+          </p:nvPr>
+        </p:nvSpPr>
+        <p:spPr/>
+        <p:txBody>
+          <a:bodyPr/>
+          <a:lstStyle/>
+          <a:p>
+            <a:r>
+              <a:rPr lang="de-CH" dirty="0"/>
+              <a:t>TSNE</a:t>
+            </a:r>
+          </a:p>
+        </p:txBody>
+      </p:sp>
+      <p:sp>
+        <p:nvSpPr>
+          <p:cNvPr id="4" name="Date Placeholder 3">
+            <a:extLst>
+              <a:ext uri="{FF2B5EF4-FFF2-40B4-BE49-F238E27FC236}">
+                <a16:creationId xmlns:a16="http://schemas.microsoft.com/office/drawing/2014/main" id="{E1320F55-DA85-72B3-5C22-F2CD6EF0E2F9}"/>
+              </a:ext>
+            </a:extLst>
+          </p:cNvPr>
+          <p:cNvSpPr>
+            <a:spLocks noGrp="1"/>
+          </p:cNvSpPr>
+          <p:nvPr>
+            <p:ph type="dt" sz="half" idx="10"/>
+          </p:nvPr>
+        </p:nvSpPr>
+        <p:spPr/>
+        <p:txBody>
+          <a:bodyPr/>
+          <a:lstStyle/>
+          <a:p>
+            <a:fld id="{EE15D7BA-2F5F-8E43-91CB-647D382EDB87}" type="datetime4">
+              <a:rPr lang="de-CH" smtClean="0"/>
+              <a:t>15. Juni 2026</a:t>
+            </a:fld>
+            <a:endParaRPr lang="en-CH"/>
+          </a:p>
+        </p:txBody>
+      </p:sp>
+      <p:sp>
+        <p:nvSpPr>
+          <p:cNvPr id="5" name="Footer Placeholder 4">
+            <a:extLst>
+              <a:ext uri="{FF2B5EF4-FFF2-40B4-BE49-F238E27FC236}">
+                <a16:creationId xmlns:a16="http://schemas.microsoft.com/office/drawing/2014/main" id="{A8788377-38C2-071C-EAAF-6E838949B50F}"/>
+              </a:ext>
+            </a:extLst>
+          </p:cNvPr>
+          <p:cNvSpPr>
+            <a:spLocks noGrp="1"/>
+          </p:cNvSpPr>
+          <p:nvPr>
+            <p:ph type="ftr" sz="quarter" idx="11"/>
+          </p:nvPr>
+        </p:nvSpPr>
+        <p:spPr/>
+        <p:txBody>
+          <a:bodyPr/>
+          <a:lstStyle/>
+          <a:p>
+            <a:r>
+              <a:rPr lang="en-GB"/>
+              <a:t>Text Analysis- Svetlana Khominich, Ralph Müller, David Beer </a:t>
+            </a:r>
+            <a:endParaRPr lang="en-CH" dirty="0"/>
+          </a:p>
+        </p:txBody>
+      </p:sp>
+      <p:sp>
+        <p:nvSpPr>
+          <p:cNvPr id="6" name="Slide Number Placeholder 5">
+            <a:extLst>
+              <a:ext uri="{FF2B5EF4-FFF2-40B4-BE49-F238E27FC236}">
+                <a16:creationId xmlns:a16="http://schemas.microsoft.com/office/drawing/2014/main" id="{53F8EE49-87F4-2B53-678F-BB813BB057A0}"/>
+              </a:ext>
+            </a:extLst>
+          </p:cNvPr>
+          <p:cNvSpPr>
+            <a:spLocks noGrp="1"/>
+          </p:cNvSpPr>
+          <p:nvPr>
+            <p:ph type="sldNum" sz="quarter" idx="12"/>
+          </p:nvPr>
+        </p:nvSpPr>
+        <p:spPr/>
+        <p:txBody>
+          <a:bodyPr/>
+          <a:lstStyle/>
+          <a:p>
+            <a:fld id="{221FD296-2B0C-4A4B-AFAC-2E3A842869F0}" type="slidenum">
+              <a:rPr lang="en-CH" smtClean="0"/>
+              <a:t>19</a:t>
+            </a:fld>
+            <a:endParaRPr lang="en-CH"/>
+          </a:p>
+        </p:txBody>
+      </p:sp>
+      <p:pic>
+        <p:nvPicPr>
+          <p:cNvPr id="8" name="Content Placeholder 7">
+            <a:extLst>
+              <a:ext uri="{FF2B5EF4-FFF2-40B4-BE49-F238E27FC236}">
+                <a16:creationId xmlns:a16="http://schemas.microsoft.com/office/drawing/2014/main" id="{9C11215E-3E17-B6F6-018C-A879E55E8661}"/>
+              </a:ext>
+            </a:extLst>
+          </p:cNvPr>
+          <p:cNvPicPr>
+            <a:picLocks noGrp="1" noChangeAspect="1"/>
+          </p:cNvPicPr>
+          <p:nvPr>
+            <p:ph idx="1"/>
+          </p:nvPr>
+        </p:nvPicPr>
+        <p:blipFill>
+          <a:blip r:embed="rId2"/>
+          <a:stretch>
+            <a:fillRect/>
+          </a:stretch>
+        </p:blipFill>
+        <p:spPr>
+          <a:xfrm>
+            <a:off x="1869332" y="937082"/>
+            <a:ext cx="7894558" cy="5920918"/>
+          </a:xfrm>
+          <a:prstGeom prst="rect">
+            <a:avLst/>
+          </a:prstGeom>
+        </p:spPr>
+      </p:pic>
+    </p:spTree>
+    <p:extLst>
+      <p:ext uri="{BB962C8B-B14F-4D97-AF65-F5344CB8AC3E}">
+        <p14:creationId xmlns:p14="http://schemas.microsoft.com/office/powerpoint/2010/main" val="3055462250"/>
+      </p:ext>
+    </p:extLst>
+  </p:cSld>
+  <p:clrMapOvr>
+    <a:masterClrMapping/>
+  </p:clrMapOvr>
+</p:sld>
+</file>
+
 <file path=ppt/slides/slide2.xml><?xml version="1.0" encoding="utf-8"?>
 <p:sld xmlns:a="http://schemas.openxmlformats.org/drawingml/2006/main" xmlns:r="http://schemas.openxmlformats.org/officeDocument/2006/relationships" xmlns:p="http://schemas.openxmlformats.org/presentationml/2006/main">
   <p:cSld>
@@ -4192,7 +7689,15 @@
           <a:p>
             <a:r>
               <a:rPr lang="de-CH" noProof="0" dirty="0"/>
-              <a:t>Datensatz … </a:t>
+              <a:t>Datensatz F</a:t>
+            </a:r>
+            <a:r>
+              <a:rPr lang="de-CH" dirty="0" err="1"/>
+              <a:t>ake</a:t>
+            </a:r>
+            <a:r>
+              <a:rPr lang="de-CH" dirty="0"/>
+              <a:t>-Reviews </a:t>
             </a:r>
             <a:r>
               <a:rPr lang="en-CH" dirty="0"/>
@@ -4203,13 +7708,13 @@
           <a:p>
             <a:r>
               <a:rPr lang="de-CH" dirty="0"/>
-              <a:t>X</a:t>
+              <a:t>Verschiedene Klassifikations-Modelle erstellen und lernen</a:t>
             </a:r>
           </a:p>
           <a:p>
             <a:r>
               <a:rPr lang="de-CH" dirty="0"/>
-              <a:t>X</a:t>
+              <a:t>Auswertung der Erkenntnisse</a:t>
             </a:r>
           </a:p>
           <a:p>
@@ -4341,7 +7846,7 @@
           <a:p>
             <a:fld id="{161001B4-7ECE-4C45-821A-DC5AE6F4A031}" type="datetime4">
               <a:rPr lang="de-CH" smtClean="0"/>
-              <a:t>14. Juni 2026</a:t>
+              <a:t>15. Juni 2026</a:t>
             </a:fld>
             <a:endParaRPr lang="en-CH"/>
           </a:p>
@@ -4351,6 +7856,861 @@
     <p:extLst>
       <p:ext uri="{BB962C8B-B14F-4D97-AF65-F5344CB8AC3E}">
         <p14:creationId xmlns:p14="http://schemas.microsoft.com/office/powerpoint/2010/main" val="2816945261"/>
+      </p:ext>
+    </p:extLst>
+  </p:cSld>
+  <p:clrMapOvr>
+    <a:masterClrMapping/>
+  </p:clrMapOvr>
+</p:sld>
+</file>
+
+<file path=ppt/slides/slide20.xml><?xml version="1.0" encoding="utf-8"?>
+<p:sld xmlns:a="http://schemas.openxmlformats.org/drawingml/2006/main" xmlns:r="http://schemas.openxmlformats.org/officeDocument/2006/relationships" xmlns:p="http://schemas.openxmlformats.org/presentationml/2006/main">
+  <p:cSld>
+    <p:spTree>
+      <p:nvGrpSpPr>
+        <p:cNvPr id="1" name=""/>
+        <p:cNvGrpSpPr/>
+        <p:nvPr/>
+      </p:nvGrpSpPr>
+      <p:grpSpPr>
+        <a:xfrm>
+          <a:off x="0" y="0"/>
+          <a:ext cx="0" cy="0"/>
+          <a:chOff x="0" y="0"/>
+          <a:chExt cx="0" cy="0"/>
+        </a:xfrm>
+      </p:grpSpPr>
+      <p:sp>
+        <p:nvSpPr>
+          <p:cNvPr id="2" name="Title 1">
+            <a:extLst>
+              <a:ext uri="{FF2B5EF4-FFF2-40B4-BE49-F238E27FC236}">
+                <a16:creationId xmlns:a16="http://schemas.microsoft.com/office/drawing/2014/main" id="{A5D38824-902F-A7CD-96B9-5B0EC43F4800}"/>
+              </a:ext>
+            </a:extLst>
+          </p:cNvPr>
+          <p:cNvSpPr>
+            <a:spLocks noGrp="1"/>
+          </p:cNvSpPr>
+          <p:nvPr>
+            <p:ph type="title"/>
+          </p:nvPr>
+        </p:nvSpPr>
+        <p:spPr/>
+        <p:txBody>
+          <a:bodyPr/>
+          <a:lstStyle/>
+          <a:p>
+            <a:r>
+              <a:rPr lang="de-CH" dirty="0"/>
+              <a:t>UMAP 2D Embedding Space</a:t>
+            </a:r>
+          </a:p>
+        </p:txBody>
+      </p:sp>
+      <p:sp>
+        <p:nvSpPr>
+          <p:cNvPr id="3" name="Content Placeholder 2">
+            <a:extLst>
+              <a:ext uri="{FF2B5EF4-FFF2-40B4-BE49-F238E27FC236}">
+                <a16:creationId xmlns:a16="http://schemas.microsoft.com/office/drawing/2014/main" id="{CFBAFA41-5C8E-4B46-968F-1CD7745333D6}"/>
+              </a:ext>
+            </a:extLst>
+          </p:cNvPr>
+          <p:cNvSpPr>
+            <a:spLocks noGrp="1"/>
+          </p:cNvSpPr>
+          <p:nvPr>
+            <p:ph idx="1"/>
+          </p:nvPr>
+        </p:nvSpPr>
+        <p:spPr/>
+        <p:txBody>
+          <a:bodyPr/>
+          <a:lstStyle/>
+          <a:p>
+            <a:r>
+              <a:rPr lang="de-CH" dirty="0">
+                <a:hlinkClick r:id="rId2"/>
+              </a:rPr>
+              <a:t>13_umap_embedding_space.html</a:t>
+            </a:r>
+            <a:endParaRPr lang="de-CH" dirty="0"/>
+          </a:p>
+          <a:p>
+            <a:endParaRPr lang="de-CH" dirty="0"/>
+          </a:p>
+        </p:txBody>
+      </p:sp>
+      <p:sp>
+        <p:nvSpPr>
+          <p:cNvPr id="4" name="Date Placeholder 3">
+            <a:extLst>
+              <a:ext uri="{FF2B5EF4-FFF2-40B4-BE49-F238E27FC236}">
+                <a16:creationId xmlns:a16="http://schemas.microsoft.com/office/drawing/2014/main" id="{EC60B57C-48FE-2C3C-75B7-23E5374B524C}"/>
+              </a:ext>
+            </a:extLst>
+          </p:cNvPr>
+          <p:cNvSpPr>
+            <a:spLocks noGrp="1"/>
+          </p:cNvSpPr>
+          <p:nvPr>
+            <p:ph type="dt" sz="half" idx="10"/>
+          </p:nvPr>
+        </p:nvSpPr>
+        <p:spPr>
+          <a:xfrm>
+            <a:off x="838200" y="6356350"/>
+            <a:ext cx="2743200" cy="365125"/>
+          </a:xfrm>
+        </p:spPr>
+        <p:txBody>
+          <a:bodyPr/>
+          <a:lstStyle/>
+          <a:p>
+            <a:fld id="{E66B3B6E-7E09-0142-B960-3BF02BFEB55D}" type="datetime4">
+              <a:rPr lang="de-CH" smtClean="0"/>
+              <a:t>15. Juni 2026</a:t>
+            </a:fld>
+            <a:endParaRPr lang="en-CH"/>
+          </a:p>
+        </p:txBody>
+      </p:sp>
+      <p:sp>
+        <p:nvSpPr>
+          <p:cNvPr id="5" name="Footer Placeholder 4">
+            <a:extLst>
+              <a:ext uri="{FF2B5EF4-FFF2-40B4-BE49-F238E27FC236}">
+                <a16:creationId xmlns:a16="http://schemas.microsoft.com/office/drawing/2014/main" id="{598B4F4E-D000-78BE-BBE0-29BBD4F9DD5F}"/>
+              </a:ext>
+            </a:extLst>
+          </p:cNvPr>
+          <p:cNvSpPr>
+            <a:spLocks noGrp="1"/>
+          </p:cNvSpPr>
+          <p:nvPr>
+            <p:ph type="ftr" sz="quarter" idx="11"/>
+          </p:nvPr>
+        </p:nvSpPr>
+        <p:spPr>
+          <a:xfrm>
+            <a:off x="4038600" y="6356350"/>
+            <a:ext cx="4114800" cy="365125"/>
+          </a:xfrm>
+        </p:spPr>
+        <p:txBody>
+          <a:bodyPr/>
+          <a:lstStyle/>
+          <a:p>
+            <a:r>
+              <a:rPr lang="en-GB"/>
+              <a:t>Text Analysis- Svetlana Khominich, Ralph Müller, David Beer </a:t>
+            </a:r>
+            <a:endParaRPr lang="en-CH"/>
+          </a:p>
+        </p:txBody>
+      </p:sp>
+      <p:sp>
+        <p:nvSpPr>
+          <p:cNvPr id="6" name="Slide Number Placeholder 5">
+            <a:extLst>
+              <a:ext uri="{FF2B5EF4-FFF2-40B4-BE49-F238E27FC236}">
+                <a16:creationId xmlns:a16="http://schemas.microsoft.com/office/drawing/2014/main" id="{BBF72F66-EA16-EBB6-D9B1-3C25CCF5EFED}"/>
+              </a:ext>
+            </a:extLst>
+          </p:cNvPr>
+          <p:cNvSpPr>
+            <a:spLocks noGrp="1"/>
+          </p:cNvSpPr>
+          <p:nvPr>
+            <p:ph type="sldNum" sz="quarter" idx="12"/>
+          </p:nvPr>
+        </p:nvSpPr>
+        <p:spPr>
+          <a:xfrm>
+            <a:off x="8610600" y="6356350"/>
+            <a:ext cx="2743200" cy="365125"/>
+          </a:xfrm>
+        </p:spPr>
+        <p:txBody>
+          <a:bodyPr/>
+          <a:lstStyle/>
+          <a:p>
+            <a:fld id="{221FD296-2B0C-4A4B-AFAC-2E3A842869F0}" type="slidenum">
+              <a:rPr lang="en-CH" smtClean="0"/>
+              <a:t>20</a:t>
+            </a:fld>
+            <a:endParaRPr lang="en-CH"/>
+          </a:p>
+        </p:txBody>
+      </p:sp>
+      <p:pic>
+        <p:nvPicPr>
+          <p:cNvPr id="7" name="Content Placeholder 5" descr="Monitor with solid fill">
+            <a:extLst>
+              <a:ext uri="{FF2B5EF4-FFF2-40B4-BE49-F238E27FC236}">
+                <a16:creationId xmlns:a16="http://schemas.microsoft.com/office/drawing/2014/main" id="{8FC53FA5-1E52-97FF-70EB-5F1038E70B4C}"/>
+              </a:ext>
+            </a:extLst>
+          </p:cNvPr>
+          <p:cNvPicPr>
+            <a:picLocks noChangeAspect="1"/>
+          </p:cNvPicPr>
+          <p:nvPr/>
+        </p:nvPicPr>
+        <p:blipFill>
+          <a:blip>
+            <a:extLst>
+              <a:ext uri="{96DAC541-7B7A-43D3-8B79-37D633B846F1}">
+                <asvg:svgBlip xmlns:asvg="http://schemas.microsoft.com/office/drawing/2016/SVG/main" r:embed="rId3"/>
+              </a:ext>
+            </a:extLst>
+          </a:blip>
+          <a:stretch>
+            <a:fillRect/>
+          </a:stretch>
+        </p:blipFill>
+        <p:spPr>
+          <a:xfrm>
+            <a:off x="3635076" y="1930475"/>
+            <a:ext cx="4448220" cy="4448220"/>
+          </a:xfrm>
+          <a:prstGeom prst="rect">
+            <a:avLst/>
+          </a:prstGeom>
+        </p:spPr>
+      </p:pic>
+      <p:pic>
+        <p:nvPicPr>
+          <p:cNvPr id="8" name="Graphic 7" descr="Bar chart with solid fill">
+            <a:extLst>
+              <a:ext uri="{FF2B5EF4-FFF2-40B4-BE49-F238E27FC236}">
+                <a16:creationId xmlns:a16="http://schemas.microsoft.com/office/drawing/2014/main" id="{C195EA94-734A-61CB-F2A0-09F4D8343B9E}"/>
+              </a:ext>
+            </a:extLst>
+          </p:cNvPr>
+          <p:cNvPicPr>
+            <a:picLocks noChangeAspect="1"/>
+          </p:cNvPicPr>
+          <p:nvPr/>
+        </p:nvPicPr>
+        <p:blipFill>
+          <a:blip>
+            <a:extLst>
+              <a:ext uri="{96DAC541-7B7A-43D3-8B79-37D633B846F1}">
+                <asvg:svgBlip xmlns:asvg="http://schemas.microsoft.com/office/drawing/2016/SVG/main" r:embed="rId4"/>
+              </a:ext>
+            </a:extLst>
+          </a:blip>
+          <a:stretch>
+            <a:fillRect/>
+          </a:stretch>
+        </p:blipFill>
+        <p:spPr>
+          <a:xfrm>
+            <a:off x="5859186" y="3210470"/>
+            <a:ext cx="1497994" cy="1462114"/>
+          </a:xfrm>
+          <a:prstGeom prst="rect">
+            <a:avLst/>
+          </a:prstGeom>
+        </p:spPr>
+      </p:pic>
+      <p:pic>
+        <p:nvPicPr>
+          <p:cNvPr id="9" name="Graphic 8" descr="Home with solid fill">
+            <a:extLst>
+              <a:ext uri="{FF2B5EF4-FFF2-40B4-BE49-F238E27FC236}">
+                <a16:creationId xmlns:a16="http://schemas.microsoft.com/office/drawing/2014/main" id="{922C611A-E30F-7252-CCB9-455407456B29}"/>
+              </a:ext>
+            </a:extLst>
+          </p:cNvPr>
+          <p:cNvPicPr>
+            <a:picLocks noChangeAspect="1"/>
+          </p:cNvPicPr>
+          <p:nvPr/>
+        </p:nvPicPr>
+        <p:blipFill>
+          <a:blip>
+            <a:extLst>
+              <a:ext uri="{96DAC541-7B7A-43D3-8B79-37D633B846F1}">
+                <asvg:svgBlip xmlns:asvg="http://schemas.microsoft.com/office/drawing/2016/SVG/main" r:embed="rId5"/>
+              </a:ext>
+            </a:extLst>
+          </a:blip>
+          <a:stretch>
+            <a:fillRect/>
+          </a:stretch>
+        </p:blipFill>
+        <p:spPr>
+          <a:xfrm>
+            <a:off x="4366932" y="2950639"/>
+            <a:ext cx="1732509" cy="1721945"/>
+          </a:xfrm>
+          <a:prstGeom prst="rect">
+            <a:avLst/>
+          </a:prstGeom>
+        </p:spPr>
+      </p:pic>
+    </p:spTree>
+    <p:extLst>
+      <p:ext uri="{BB962C8B-B14F-4D97-AF65-F5344CB8AC3E}">
+        <p14:creationId xmlns:p14="http://schemas.microsoft.com/office/powerpoint/2010/main" val="3068779260"/>
+      </p:ext>
+    </p:extLst>
+  </p:cSld>
+  <p:clrMapOvr>
+    <a:masterClrMapping/>
+  </p:clrMapOvr>
+</p:sld>
+</file>
+
+<file path=ppt/slides/slide21.xml><?xml version="1.0" encoding="utf-8"?>
+<p:sld xmlns:a="http://schemas.openxmlformats.org/drawingml/2006/main" xmlns:r="http://schemas.openxmlformats.org/officeDocument/2006/relationships" xmlns:p="http://schemas.openxmlformats.org/presentationml/2006/main">
+  <p:cSld>
+    <p:spTree>
+      <p:nvGrpSpPr>
+        <p:cNvPr id="1" name=""/>
+        <p:cNvGrpSpPr/>
+        <p:nvPr/>
+      </p:nvGrpSpPr>
+      <p:grpSpPr>
+        <a:xfrm>
+          <a:off x="0" y="0"/>
+          <a:ext cx="0" cy="0"/>
+          <a:chOff x="0" y="0"/>
+          <a:chExt cx="0" cy="0"/>
+        </a:xfrm>
+      </p:grpSpPr>
+      <p:sp>
+        <p:nvSpPr>
+          <p:cNvPr id="2" name="Title 1">
+            <a:extLst>
+              <a:ext uri="{FF2B5EF4-FFF2-40B4-BE49-F238E27FC236}">
+                <a16:creationId xmlns:a16="http://schemas.microsoft.com/office/drawing/2014/main" id="{6542805F-9EE1-5644-FCD9-ACFCDA3211AD}"/>
+              </a:ext>
+            </a:extLst>
+          </p:cNvPr>
+          <p:cNvSpPr>
+            <a:spLocks noGrp="1"/>
+          </p:cNvSpPr>
+          <p:nvPr>
+            <p:ph type="title"/>
+          </p:nvPr>
+        </p:nvSpPr>
+        <p:spPr/>
+        <p:txBody>
+          <a:bodyPr>
+            <a:normAutofit fontScale="90000"/>
+          </a:bodyPr>
+          <a:lstStyle/>
+          <a:p>
+            <a:r>
+              <a:rPr lang="en-CH" dirty="0"/>
+              <a:t>Was macht es schwer, richtig zu Klassifizieren?</a:t>
+            </a:r>
+            <a:endParaRPr lang="de-CH" dirty="0"/>
+          </a:p>
+        </p:txBody>
+      </p:sp>
+      <p:sp>
+        <p:nvSpPr>
+          <p:cNvPr id="3" name="Content Placeholder 2">
+            <a:extLst>
+              <a:ext uri="{FF2B5EF4-FFF2-40B4-BE49-F238E27FC236}">
+                <a16:creationId xmlns:a16="http://schemas.microsoft.com/office/drawing/2014/main" id="{DE9F2555-33A2-94BC-ADFE-902207060BBB}"/>
+              </a:ext>
+            </a:extLst>
+          </p:cNvPr>
+          <p:cNvSpPr>
+            <a:spLocks noGrp="1"/>
+          </p:cNvSpPr>
+          <p:nvPr>
+            <p:ph idx="1"/>
+          </p:nvPr>
+        </p:nvSpPr>
+        <p:spPr/>
+        <p:txBody>
+          <a:bodyPr>
+            <a:normAutofit lnSpcReduction="10000"/>
+          </a:bodyPr>
+          <a:lstStyle/>
+          <a:p>
+            <a:r>
+              <a:rPr lang="en-CH" dirty="0"/>
+              <a:t>welche Features erklären Vorhersage-Schwierigkeit? (mit RF)</a:t>
+            </a:r>
+          </a:p>
+          <a:p>
+            <a:r>
+              <a:rPr lang="en-GB" dirty="0"/>
+              <a:t>Feature Importance:</a:t>
+            </a:r>
+          </a:p>
+          <a:p>
+            <a:r>
+              <a:rPr lang="en-GB" dirty="0"/>
+              <a:t>  </a:t>
+            </a:r>
+            <a:r>
+              <a:rPr lang="en-GB" dirty="0" err="1"/>
+              <a:t>avg_word_len</a:t>
+            </a:r>
+            <a:r>
+              <a:rPr lang="en-GB" dirty="0"/>
+              <a:t>              	28.5%</a:t>
+            </a:r>
+          </a:p>
+          <a:p>
+            <a:r>
+              <a:rPr lang="en-GB" dirty="0"/>
+              <a:t>  </a:t>
+            </a:r>
+            <a:r>
+              <a:rPr lang="en-GB" dirty="0" err="1"/>
+              <a:t>uppercase_ratio</a:t>
+            </a:r>
+            <a:r>
+              <a:rPr lang="en-GB" dirty="0"/>
+              <a:t>           	25.3%</a:t>
+            </a:r>
+          </a:p>
+          <a:p>
+            <a:r>
+              <a:rPr lang="en-GB" dirty="0"/>
+              <a:t>  </a:t>
+            </a:r>
+            <a:r>
+              <a:rPr lang="en-GB" dirty="0" err="1"/>
+              <a:t>char_len</a:t>
+            </a:r>
+            <a:r>
+              <a:rPr lang="en-GB" dirty="0"/>
+              <a:t>                  	25.1%</a:t>
+            </a:r>
+          </a:p>
+          <a:p>
+            <a:r>
+              <a:rPr lang="en-GB" dirty="0"/>
+              <a:t>  </a:t>
+            </a:r>
+            <a:r>
+              <a:rPr lang="en-GB" dirty="0" err="1"/>
+              <a:t>word_len</a:t>
+            </a:r>
+            <a:r>
+              <a:rPr lang="en-GB" dirty="0"/>
+              <a:t>                  	9.2%</a:t>
+            </a:r>
+          </a:p>
+          <a:p>
+            <a:r>
+              <a:rPr lang="en-GB" dirty="0"/>
+              <a:t>  </a:t>
+            </a:r>
+            <a:r>
+              <a:rPr lang="en-GB" dirty="0" err="1"/>
+              <a:t>sentence_count</a:t>
+            </a:r>
+            <a:r>
+              <a:rPr lang="en-GB" dirty="0"/>
+              <a:t>            7.7%</a:t>
+            </a:r>
+          </a:p>
+          <a:p>
+            <a:r>
+              <a:rPr lang="en-GB" dirty="0"/>
+              <a:t>  </a:t>
+            </a:r>
+            <a:r>
+              <a:rPr lang="en-GB" dirty="0" err="1"/>
+              <a:t>exclamation_count</a:t>
+            </a:r>
+            <a:r>
+              <a:rPr lang="en-GB" dirty="0"/>
+              <a:t> 	3.8%</a:t>
+            </a:r>
+          </a:p>
+          <a:p>
+            <a:r>
+              <a:rPr lang="en-GB" dirty="0"/>
+              <a:t>  </a:t>
+            </a:r>
+            <a:r>
+              <a:rPr lang="en-GB" dirty="0" err="1"/>
+              <a:t>question_count</a:t>
+            </a:r>
+            <a:r>
+              <a:rPr lang="en-GB" dirty="0"/>
+              <a:t>            0.4%</a:t>
+            </a:r>
+            <a:endParaRPr lang="en-CH" dirty="0"/>
+          </a:p>
+          <a:p>
+            <a:endParaRPr lang="de-CH" dirty="0"/>
+          </a:p>
+        </p:txBody>
+      </p:sp>
+      <p:sp>
+        <p:nvSpPr>
+          <p:cNvPr id="4" name="Date Placeholder 3">
+            <a:extLst>
+              <a:ext uri="{FF2B5EF4-FFF2-40B4-BE49-F238E27FC236}">
+                <a16:creationId xmlns:a16="http://schemas.microsoft.com/office/drawing/2014/main" id="{AB5E8D05-4B0C-DE8F-957A-D035CF06D329}"/>
+              </a:ext>
+            </a:extLst>
+          </p:cNvPr>
+          <p:cNvSpPr>
+            <a:spLocks noGrp="1"/>
+          </p:cNvSpPr>
+          <p:nvPr>
+            <p:ph type="dt" sz="half" idx="10"/>
+          </p:nvPr>
+        </p:nvSpPr>
+        <p:spPr/>
+        <p:txBody>
+          <a:bodyPr/>
+          <a:lstStyle/>
+          <a:p>
+            <a:fld id="{EE15D7BA-2F5F-8E43-91CB-647D382EDB87}" type="datetime4">
+              <a:rPr lang="de-CH" smtClean="0"/>
+              <a:t>15. Juni 2026</a:t>
+            </a:fld>
+            <a:endParaRPr lang="en-CH"/>
+          </a:p>
+        </p:txBody>
+      </p:sp>
+      <p:sp>
+        <p:nvSpPr>
+          <p:cNvPr id="5" name="Footer Placeholder 4">
+            <a:extLst>
+              <a:ext uri="{FF2B5EF4-FFF2-40B4-BE49-F238E27FC236}">
+                <a16:creationId xmlns:a16="http://schemas.microsoft.com/office/drawing/2014/main" id="{0CAB726F-11F4-A734-B7F5-9349EB9326BD}"/>
+              </a:ext>
+            </a:extLst>
+          </p:cNvPr>
+          <p:cNvSpPr>
+            <a:spLocks noGrp="1"/>
+          </p:cNvSpPr>
+          <p:nvPr>
+            <p:ph type="ftr" sz="quarter" idx="11"/>
+          </p:nvPr>
+        </p:nvSpPr>
+        <p:spPr/>
+        <p:txBody>
+          <a:bodyPr/>
+          <a:lstStyle/>
+          <a:p>
+            <a:r>
+              <a:rPr lang="en-GB"/>
+              <a:t>Text Analysis- Svetlana Khominich, Ralph Müller, David Beer </a:t>
+            </a:r>
+            <a:endParaRPr lang="en-CH" dirty="0"/>
+          </a:p>
+        </p:txBody>
+      </p:sp>
+      <p:sp>
+        <p:nvSpPr>
+          <p:cNvPr id="6" name="Slide Number Placeholder 5">
+            <a:extLst>
+              <a:ext uri="{FF2B5EF4-FFF2-40B4-BE49-F238E27FC236}">
+                <a16:creationId xmlns:a16="http://schemas.microsoft.com/office/drawing/2014/main" id="{47DE6C6C-E49E-5A08-5EFE-57410C3D712E}"/>
+              </a:ext>
+            </a:extLst>
+          </p:cNvPr>
+          <p:cNvSpPr>
+            <a:spLocks noGrp="1"/>
+          </p:cNvSpPr>
+          <p:nvPr>
+            <p:ph type="sldNum" sz="quarter" idx="12"/>
+          </p:nvPr>
+        </p:nvSpPr>
+        <p:spPr/>
+        <p:txBody>
+          <a:bodyPr/>
+          <a:lstStyle/>
+          <a:p>
+            <a:fld id="{221FD296-2B0C-4A4B-AFAC-2E3A842869F0}" type="slidenum">
+              <a:rPr lang="en-CH" smtClean="0"/>
+              <a:t>21</a:t>
+            </a:fld>
+            <a:endParaRPr lang="en-CH"/>
+          </a:p>
+        </p:txBody>
+      </p:sp>
+      <p:sp>
+        <p:nvSpPr>
+          <p:cNvPr id="7" name="Rounded Rectangular Callout 6">
+            <a:extLst>
+              <a:ext uri="{FF2B5EF4-FFF2-40B4-BE49-F238E27FC236}">
+                <a16:creationId xmlns:a16="http://schemas.microsoft.com/office/drawing/2014/main" id="{0F1D92C1-2561-182F-558C-174DBE8C0998}"/>
+              </a:ext>
+            </a:extLst>
+          </p:cNvPr>
+          <p:cNvSpPr/>
+          <p:nvPr/>
+        </p:nvSpPr>
+        <p:spPr>
+          <a:xfrm>
+            <a:off x="6372427" y="3239311"/>
+            <a:ext cx="4476345" cy="1786663"/>
+          </a:xfrm>
+          <a:prstGeom prst="wedgeRoundRectCallout">
+            <a:avLst>
+              <a:gd name="adj1" fmla="val -63468"/>
+              <a:gd name="adj2" fmla="val 5765"/>
+              <a:gd name="adj3" fmla="val 16667"/>
+            </a:avLst>
+          </a:prstGeom>
+          <a:solidFill>
+            <a:schemeClr val="accent4">
+              <a:lumMod val="20000"/>
+              <a:lumOff val="80000"/>
+            </a:schemeClr>
+          </a:solidFill>
+        </p:spPr>
+        <p:style>
+          <a:lnRef idx="2">
+            <a:schemeClr val="accent1">
+              <a:shade val="15000"/>
+            </a:schemeClr>
+          </a:lnRef>
+          <a:fillRef idx="1">
+            <a:schemeClr val="accent1"/>
+          </a:fillRef>
+          <a:effectRef idx="0">
+            <a:schemeClr val="accent1"/>
+          </a:effectRef>
+          <a:fontRef idx="minor">
+            <a:schemeClr val="lt1"/>
+          </a:fontRef>
+        </p:style>
+        <p:txBody>
+          <a:bodyPr rtlCol="0" anchor="ctr"/>
+          <a:lstStyle/>
+          <a:p>
+            <a:r>
+              <a:rPr lang="en-CH" dirty="0">
+                <a:solidFill>
+                  <a:schemeClr val="tx1"/>
+                </a:solidFill>
+              </a:rPr>
+              <a:t>Die Schwierigkeit der Modellvorhersagen wird hauptsächlich durch einfache stilistische Eigenschaften des Textes bestimmt, insbesondere Länge, Wortstruktur und Grossschreibung.</a:t>
+            </a:r>
+          </a:p>
+        </p:txBody>
+      </p:sp>
+    </p:spTree>
+    <p:extLst>
+      <p:ext uri="{BB962C8B-B14F-4D97-AF65-F5344CB8AC3E}">
+        <p14:creationId xmlns:p14="http://schemas.microsoft.com/office/powerpoint/2010/main" val="951959906"/>
+      </p:ext>
+    </p:extLst>
+  </p:cSld>
+  <p:clrMapOvr>
+    <a:masterClrMapping/>
+  </p:clrMapOvr>
+</p:sld>
+</file>
+
+<file path=ppt/slides/slide22.xml><?xml version="1.0" encoding="utf-8"?>
+<p:sld xmlns:a="http://schemas.openxmlformats.org/drawingml/2006/main" xmlns:r="http://schemas.openxmlformats.org/officeDocument/2006/relationships" xmlns:p="http://schemas.openxmlformats.org/presentationml/2006/main">
+  <p:cSld>
+    <p:spTree>
+      <p:nvGrpSpPr>
+        <p:cNvPr id="1" name="">
+          <a:extLst>
+            <a:ext uri="{FF2B5EF4-FFF2-40B4-BE49-F238E27FC236}">
+              <a16:creationId xmlns:a16="http://schemas.microsoft.com/office/drawing/2014/main" id="{A55F640F-0583-663B-488C-719C41014E50}"/>
+            </a:ext>
+          </a:extLst>
+        </p:cNvPr>
+        <p:cNvGrpSpPr/>
+        <p:nvPr/>
+      </p:nvGrpSpPr>
+      <p:grpSpPr>
+        <a:xfrm>
+          <a:off x="0" y="0"/>
+          <a:ext cx="0" cy="0"/>
+          <a:chOff x="0" y="0"/>
+          <a:chExt cx="0" cy="0"/>
+        </a:xfrm>
+      </p:grpSpPr>
+      <p:sp>
+        <p:nvSpPr>
+          <p:cNvPr id="2" name="Title 1">
+            <a:extLst>
+              <a:ext uri="{FF2B5EF4-FFF2-40B4-BE49-F238E27FC236}">
+                <a16:creationId xmlns:a16="http://schemas.microsoft.com/office/drawing/2014/main" id="{54743C89-52C3-55C1-E592-460A7BF25602}"/>
+              </a:ext>
+            </a:extLst>
+          </p:cNvPr>
+          <p:cNvSpPr>
+            <a:spLocks noGrp="1"/>
+          </p:cNvSpPr>
+          <p:nvPr>
+            <p:ph type="title"/>
+          </p:nvPr>
+        </p:nvSpPr>
+        <p:spPr/>
+        <p:txBody>
+          <a:bodyPr/>
+          <a:lstStyle/>
+          <a:p>
+            <a:r>
+              <a:rPr lang="de-CH" dirty="0" err="1"/>
+              <a:t>Lessons</a:t>
+            </a:r>
+            <a:r>
+              <a:rPr lang="de-CH" dirty="0"/>
+              <a:t> </a:t>
+            </a:r>
+            <a:r>
+              <a:rPr lang="de-CH" dirty="0" err="1"/>
+              <a:t>learned</a:t>
+            </a:r>
+            <a:endParaRPr lang="de-CH" dirty="0"/>
+          </a:p>
+        </p:txBody>
+      </p:sp>
+      <p:sp>
+        <p:nvSpPr>
+          <p:cNvPr id="3" name="Content Placeholder 2">
+            <a:extLst>
+              <a:ext uri="{FF2B5EF4-FFF2-40B4-BE49-F238E27FC236}">
+                <a16:creationId xmlns:a16="http://schemas.microsoft.com/office/drawing/2014/main" id="{B24F0B65-5BC9-92BA-3863-40AAECB9651A}"/>
+              </a:ext>
+            </a:extLst>
+          </p:cNvPr>
+          <p:cNvSpPr>
+            <a:spLocks noGrp="1"/>
+          </p:cNvSpPr>
+          <p:nvPr>
+            <p:ph idx="1"/>
+          </p:nvPr>
+        </p:nvSpPr>
+        <p:spPr/>
+        <p:txBody>
+          <a:bodyPr vert="horz" lIns="91440" tIns="45720" rIns="91440" bIns="45720" rtlCol="0" anchor="t">
+            <a:normAutofit/>
+          </a:bodyPr>
+          <a:lstStyle/>
+          <a:p>
+            <a:r>
+              <a:rPr lang="de-CH" dirty="0"/>
+              <a:t>xxx</a:t>
+            </a:r>
+          </a:p>
+        </p:txBody>
+      </p:sp>
+      <p:sp>
+        <p:nvSpPr>
+          <p:cNvPr id="4" name="Footer Placeholder 3">
+            <a:extLst>
+              <a:ext uri="{FF2B5EF4-FFF2-40B4-BE49-F238E27FC236}">
+                <a16:creationId xmlns:a16="http://schemas.microsoft.com/office/drawing/2014/main" id="{B0C5934E-B049-8F00-977D-1AF08C716E97}"/>
+              </a:ext>
+            </a:extLst>
+          </p:cNvPr>
+          <p:cNvSpPr>
+            <a:spLocks noGrp="1"/>
+          </p:cNvSpPr>
+          <p:nvPr>
+            <p:ph type="ftr" sz="quarter" idx="11"/>
+          </p:nvPr>
+        </p:nvSpPr>
+        <p:spPr>
+          <a:xfrm>
+            <a:off x="4038600" y="6356350"/>
+            <a:ext cx="4114800" cy="365125"/>
+          </a:xfrm>
+        </p:spPr>
+        <p:txBody>
+          <a:bodyPr/>
+          <a:lstStyle/>
+          <a:p>
+            <a:r>
+              <a:rPr lang="en-GB"/>
+              <a:t>Text Analysis- Svetlana Khominich, Ralph Müller, David Beer </a:t>
+            </a:r>
+            <a:endParaRPr lang="en-CH"/>
+          </a:p>
+        </p:txBody>
+      </p:sp>
+      <p:sp>
+        <p:nvSpPr>
+          <p:cNvPr id="5" name="Slide Number Placeholder 4">
+            <a:extLst>
+              <a:ext uri="{FF2B5EF4-FFF2-40B4-BE49-F238E27FC236}">
+                <a16:creationId xmlns:a16="http://schemas.microsoft.com/office/drawing/2014/main" id="{9BB57C1C-5954-2D86-3BB9-3D0CCC63F3D1}"/>
+              </a:ext>
+            </a:extLst>
+          </p:cNvPr>
+          <p:cNvSpPr>
+            <a:spLocks noGrp="1"/>
+          </p:cNvSpPr>
+          <p:nvPr>
+            <p:ph type="sldNum" sz="quarter" idx="12"/>
+          </p:nvPr>
+        </p:nvSpPr>
+        <p:spPr>
+          <a:xfrm>
+            <a:off x="8610600" y="6356350"/>
+            <a:ext cx="2743200" cy="365125"/>
+          </a:xfrm>
+        </p:spPr>
+        <p:txBody>
+          <a:bodyPr/>
+          <a:lstStyle/>
+          <a:p>
+            <a:fld id="{221FD296-2B0C-4A4B-AFAC-2E3A842869F0}" type="slidenum">
+              <a:rPr lang="en-CH" smtClean="0"/>
+              <a:t>22</a:t>
+            </a:fld>
+            <a:endParaRPr lang="en-CH"/>
+          </a:p>
+        </p:txBody>
+      </p:sp>
+      <p:sp>
+        <p:nvSpPr>
+          <p:cNvPr id="6" name="Date Placeholder 5">
+            <a:extLst>
+              <a:ext uri="{FF2B5EF4-FFF2-40B4-BE49-F238E27FC236}">
+                <a16:creationId xmlns:a16="http://schemas.microsoft.com/office/drawing/2014/main" id="{51696BC9-3254-9262-8B07-49964788111F}"/>
+              </a:ext>
+            </a:extLst>
+          </p:cNvPr>
+          <p:cNvSpPr>
+            <a:spLocks noGrp="1"/>
+          </p:cNvSpPr>
+          <p:nvPr>
+            <p:ph type="dt" sz="half" idx="10"/>
+          </p:nvPr>
+        </p:nvSpPr>
+        <p:spPr>
+          <a:xfrm>
+            <a:off x="838200" y="6356350"/>
+            <a:ext cx="2743200" cy="365125"/>
+          </a:xfrm>
+        </p:spPr>
+        <p:txBody>
+          <a:bodyPr/>
+          <a:lstStyle/>
+          <a:p>
+            <a:fld id="{DD2E1766-9633-E747-BBED-E122B4E61F73}" type="datetime4">
+              <a:rPr lang="de-CH" smtClean="0"/>
+              <a:t>15. Juni 2026</a:t>
+            </a:fld>
+            <a:endParaRPr lang="en-CH"/>
+          </a:p>
+        </p:txBody>
+      </p:sp>
+    </p:spTree>
+    <p:extLst>
+      <p:ext uri="{BB962C8B-B14F-4D97-AF65-F5344CB8AC3E}">
+        <p14:creationId xmlns:p14="http://schemas.microsoft.com/office/powerpoint/2010/main" val="2108055749"/>
       </p:ext>
     </p:extLst>
   </p:cSld>
@@ -4435,12 +8795,12 @@
             </a:pPr>
             <a:r>
               <a:rPr lang="en-CH" dirty="0"/>
-              <a:t>Fake Reviews Dataset</a:t>
+              <a:t>Fake Reviews Dataset, Amazon</a:t>
             </a:r>
             <a:endParaRPr lang="en-US" dirty="0">
               <a:ea typeface="+mn-lt"/>
               <a:cs typeface="+mn-lt"/>
-              <a:hlinkClick r:id="rId2"/>
+              <a:hlinkClick r:id="rId3"/>
             </a:endParaRPr>
           </a:p>
           <a:p>
@@ -4453,10 +8813,85 @@
               <a:rPr lang="en-US" dirty="0">
                 <a:ea typeface="+mn-lt"/>
                 <a:cs typeface="+mn-lt"/>
-                <a:hlinkClick r:id="rId3"/>
+                <a:hlinkClick r:id="rId4"/>
               </a:rPr>
               <a:t>https://www.kaggle.com/datasets/muqaddasejaz/fake-reviews-dataset</a:t>
             </a:r>
+            <a:endParaRPr lang="en-US" dirty="0">
+              <a:ea typeface="+mn-lt"/>
+              <a:cs typeface="+mn-lt"/>
+            </a:endParaRPr>
+          </a:p>
+          <a:p>
+            <a:pPr>
+              <a:lnSpc>
+                <a:spcPct val="70000"/>
+              </a:lnSpc>
+            </a:pPr>
+            <a:r>
+              <a:rPr lang="en-US" dirty="0">
+                <a:ea typeface="+mn-lt"/>
+                <a:cs typeface="+mn-lt"/>
+              </a:rPr>
+              <a:t>40k </a:t>
+            </a:r>
+            <a:r>
+              <a:rPr lang="en-US" dirty="0" err="1">
+                <a:ea typeface="+mn-lt"/>
+                <a:cs typeface="+mn-lt"/>
+              </a:rPr>
+              <a:t>labled</a:t>
+            </a:r>
+            <a:r>
+              <a:rPr lang="en-US" dirty="0">
+                <a:ea typeface="+mn-lt"/>
+                <a:cs typeface="+mn-lt"/>
+              </a:rPr>
+              <a:t> reviews, balanced</a:t>
+            </a:r>
+          </a:p>
+          <a:p>
+            <a:pPr>
+              <a:lnSpc>
+                <a:spcPct val="70000"/>
+              </a:lnSpc>
+            </a:pPr>
+            <a:r>
+              <a:rPr lang="en-US" dirty="0">
+                <a:ea typeface="+mn-lt"/>
+                <a:cs typeface="+mn-lt"/>
+              </a:rPr>
+              <a:t>Features:</a:t>
+            </a:r>
+          </a:p>
+          <a:p>
+            <a:pPr lvl="1">
+              <a:lnSpc>
+                <a:spcPct val="70000"/>
+              </a:lnSpc>
+            </a:pPr>
+            <a:r>
+              <a:rPr lang="en-CH" dirty="0"/>
+              <a:t>category, rating (1-5), label (OR, CG), text_</a:t>
+            </a:r>
+          </a:p>
+          <a:p>
+            <a:pPr>
+              <a:lnSpc>
+                <a:spcPct val="70000"/>
+              </a:lnSpc>
+            </a:pPr>
+            <a:r>
+              <a:rPr lang="en-CH" dirty="0"/>
+              <a:t>CG wahrscheinlich mit GPT-2 von 2021 generiert</a:t>
+            </a:r>
+          </a:p>
+          <a:p>
+            <a:pPr lvl="1">
+              <a:lnSpc>
+                <a:spcPct val="70000"/>
+              </a:lnSpc>
+            </a:pPr>
             <a:endParaRPr lang="en-US" dirty="0">
               <a:ea typeface="+mn-lt"/>
               <a:cs typeface="+mn-lt"/>
@@ -4563,7 +8998,7 @@
           <a:p>
             <a:fld id="{5B6B9814-5720-3C42-99A0-04A4812F75FC}" type="datetime4">
               <a:rPr lang="de-CH" smtClean="0"/>
-              <a:t>14. Juni 2026</a:t>
+              <a:t>15. Juni 2026</a:t>
             </a:fld>
             <a:endParaRPr lang="en-CH"/>
           </a:p>
@@ -4601,35 +9036,10 @@
       </p:grpSpPr>
       <p:sp>
         <p:nvSpPr>
-          <p:cNvPr id="9" name="Content Placeholder 8">
-            <a:extLst>
-              <a:ext uri="{FF2B5EF4-FFF2-40B4-BE49-F238E27FC236}">
-                <a16:creationId xmlns:a16="http://schemas.microsoft.com/office/drawing/2014/main" id="{79C68A7B-B4B6-CFD8-D02E-1ACCFE2EAE44}"/>
-              </a:ext>
-            </a:extLst>
-          </p:cNvPr>
-          <p:cNvSpPr>
-            <a:spLocks noGrp="1"/>
-          </p:cNvSpPr>
-          <p:nvPr>
-            <p:ph idx="1"/>
-          </p:nvPr>
-        </p:nvSpPr>
-        <p:spPr/>
-        <p:txBody>
-          <a:bodyPr/>
-          <a:lstStyle/>
-          <a:p>
-            <a:endParaRPr lang="de-CH" dirty="0"/>
-          </a:p>
-        </p:txBody>
-      </p:sp>
-      <p:sp>
-        <p:nvSpPr>
           <p:cNvPr id="2" name="Title 1">
             <a:extLst>
               <a:ext uri="{FF2B5EF4-FFF2-40B4-BE49-F238E27FC236}">
-                <a16:creationId xmlns:a16="http://schemas.microsoft.com/office/drawing/2014/main" id="{93A8B34B-1714-6604-1612-DB6A56D1FA84}"/>
+                <a16:creationId xmlns:a16="http://schemas.microsoft.com/office/drawing/2014/main" id="{7FBE2075-DC3B-D0D5-04A4-CCB0A6995AAC}"/>
               </a:ext>
             </a:extLst>
           </p:cNvPr>
@@ -4642,17 +9052,24 @@
         </p:nvSpPr>
         <p:spPr/>
         <p:txBody>
-          <a:bodyPr/>
-          <a:lstStyle/>
-          <a:p>
-            <a:r>
-              <a:rPr lang="de-CH" dirty="0" err="1"/>
+          <a:bodyPr>
+            <a:normAutofit/>
+          </a:bodyPr>
+          <a:lstStyle/>
+          <a:p>
+            <a:r>
+              <a:rPr lang="de-CH" b="1" dirty="0" err="1"/>
               <a:t>Overview</a:t>
             </a:r>
-            <a:endParaRPr lang="de-CH" dirty="0" err="1">
-              <a:ea typeface="Calibri Light"/>
-              <a:cs typeface="Calibri Light"/>
-            </a:endParaRPr>
+            <a:r>
+              <a:rPr lang="de-CH" b="1" dirty="0"/>
+              <a:t> </a:t>
+            </a:r>
+            <a:r>
+              <a:rPr lang="en-CH" b="1" dirty="0"/>
+              <a:t>Classification Pipeline</a:t>
+            </a:r>
+            <a:endParaRPr lang="de-CH" b="1" dirty="0"/>
           </a:p>
         </p:txBody>
       </p:sp>
@@ -4661,7 +9078,7 @@
           <p:cNvPr id="4" name="Date Placeholder 3">
             <a:extLst>
               <a:ext uri="{FF2B5EF4-FFF2-40B4-BE49-F238E27FC236}">
-                <a16:creationId xmlns:a16="http://schemas.microsoft.com/office/drawing/2014/main" id="{436D76BC-CB41-73FE-C0AD-FDD5D95893AA}"/>
+                <a16:creationId xmlns:a16="http://schemas.microsoft.com/office/drawing/2014/main" id="{8AB20BD4-ABD7-3216-CD92-6E916E04F430}"/>
               </a:ext>
             </a:extLst>
           </p:cNvPr>
@@ -4672,19 +9089,14 @@
             <p:ph type="dt" sz="half" idx="10"/>
           </p:nvPr>
         </p:nvSpPr>
-        <p:spPr>
-          <a:xfrm>
-            <a:off x="838200" y="6356350"/>
-            <a:ext cx="2743200" cy="365125"/>
-          </a:xfrm>
-        </p:spPr>
-        <p:txBody>
-          <a:bodyPr/>
-          <a:lstStyle/>
-          <a:p>
-            <a:fld id="{30ECC365-4DE0-0143-9A1F-E3D7EE2DF178}" type="datetime4">
+        <p:spPr/>
+        <p:txBody>
+          <a:bodyPr/>
+          <a:lstStyle/>
+          <a:p>
+            <a:fld id="{EE15D7BA-2F5F-8E43-91CB-647D382EDB87}" type="datetime4">
               <a:rPr lang="de-CH" smtClean="0"/>
-              <a:t>14. Juni 2026</a:t>
+              <a:t>15. Juni 2026</a:t>
             </a:fld>
             <a:endParaRPr lang="en-CH"/>
           </a:p>
@@ -4695,7 +9107,7 @@
           <p:cNvPr id="5" name="Footer Placeholder 4">
             <a:extLst>
               <a:ext uri="{FF2B5EF4-FFF2-40B4-BE49-F238E27FC236}">
-                <a16:creationId xmlns:a16="http://schemas.microsoft.com/office/drawing/2014/main" id="{5E533E12-E42F-EEEC-C0B6-7AF854EA81BA}"/>
+                <a16:creationId xmlns:a16="http://schemas.microsoft.com/office/drawing/2014/main" id="{EF051346-861D-7B99-C114-37ECF012C4AD}"/>
               </a:ext>
             </a:extLst>
           </p:cNvPr>
@@ -4706,12 +9118,7 @@
             <p:ph type="ftr" sz="quarter" idx="11"/>
           </p:nvPr>
         </p:nvSpPr>
-        <p:spPr>
-          <a:xfrm>
-            <a:off x="4038600" y="6356350"/>
-            <a:ext cx="4114800" cy="365125"/>
-          </a:xfrm>
-        </p:spPr>
+        <p:spPr/>
         <p:txBody>
           <a:bodyPr/>
           <a:lstStyle/>
@@ -4720,7 +9127,7 @@
               <a:rPr lang="en-GB"/>
               <a:t>Text Analysis- Svetlana Khominich, Ralph Müller, David Beer </a:t>
             </a:r>
-            <a:endParaRPr lang="en-CH"/>
+            <a:endParaRPr lang="en-CH" dirty="0"/>
           </a:p>
         </p:txBody>
       </p:sp>
@@ -4729,7 +9136,7 @@
           <p:cNvPr id="6" name="Slide Number Placeholder 5">
             <a:extLst>
               <a:ext uri="{FF2B5EF4-FFF2-40B4-BE49-F238E27FC236}">
-                <a16:creationId xmlns:a16="http://schemas.microsoft.com/office/drawing/2014/main" id="{C0A33E2D-F770-2A7F-FD2B-2422537758F8}"/>
+                <a16:creationId xmlns:a16="http://schemas.microsoft.com/office/drawing/2014/main" id="{E2762CFE-14E7-0603-093B-6C4EC7414D94}"/>
               </a:ext>
             </a:extLst>
           </p:cNvPr>
@@ -4740,12 +9147,7 @@
             <p:ph type="sldNum" sz="quarter" idx="12"/>
           </p:nvPr>
         </p:nvSpPr>
-        <p:spPr>
-          <a:xfrm>
-            <a:off x="8610600" y="6356350"/>
-            <a:ext cx="2743200" cy="365125"/>
-          </a:xfrm>
-        </p:spPr>
+        <p:spPr/>
         <p:txBody>
           <a:bodyPr/>
           <a:lstStyle/>
@@ -4758,10 +9160,42 @@
           </a:p>
         </p:txBody>
       </p:sp>
+      <p:pic>
+        <p:nvPicPr>
+          <p:cNvPr id="20" name="Content Placeholder 19">
+            <a:extLst>
+              <a:ext uri="{FF2B5EF4-FFF2-40B4-BE49-F238E27FC236}">
+                <a16:creationId xmlns:a16="http://schemas.microsoft.com/office/drawing/2014/main" id="{79CA1111-CE3E-2048-48EC-70EDC3BAA35C}"/>
+              </a:ext>
+            </a:extLst>
+          </p:cNvPr>
+          <p:cNvPicPr>
+            <a:picLocks noGrp="1" noChangeAspect="1"/>
+          </p:cNvPicPr>
+          <p:nvPr>
+            <p:ph idx="1"/>
+          </p:nvPr>
+        </p:nvPicPr>
+        <p:blipFill>
+          <a:blip r:embed="rId2"/>
+          <a:stretch>
+            <a:fillRect/>
+          </a:stretch>
+        </p:blipFill>
+        <p:spPr>
+          <a:xfrm>
+            <a:off x="933751" y="1421995"/>
+            <a:ext cx="10324498" cy="5436005"/>
+          </a:xfrm>
+          <a:prstGeom prst="rect">
+            <a:avLst/>
+          </a:prstGeom>
+        </p:spPr>
+      </p:pic>
     </p:spTree>
     <p:extLst>
       <p:ext uri="{BB962C8B-B14F-4D97-AF65-F5344CB8AC3E}">
-        <p14:creationId xmlns:p14="http://schemas.microsoft.com/office/powerpoint/2010/main" val="2447189276"/>
+        <p14:creationId xmlns:p14="http://schemas.microsoft.com/office/powerpoint/2010/main" val="1199831788"/>
       </p:ext>
     </p:extLst>
   </p:cSld>
@@ -4793,7 +9227,7 @@
           <p:cNvPr id="2" name="Title 1">
             <a:extLst>
               <a:ext uri="{FF2B5EF4-FFF2-40B4-BE49-F238E27FC236}">
-                <a16:creationId xmlns:a16="http://schemas.microsoft.com/office/drawing/2014/main" id="{A5D38824-902F-A7CD-96B9-5B0EC43F4800}"/>
+                <a16:creationId xmlns:a16="http://schemas.microsoft.com/office/drawing/2014/main" id="{C41148E2-DCF5-2EAA-4C23-C5D366640940}"/>
               </a:ext>
             </a:extLst>
           </p:cNvPr>
@@ -4811,7 +9245,7 @@
           <a:p>
             <a:r>
               <a:rPr lang="de-CH" dirty="0"/>
-              <a:t>Life Demo</a:t>
+              <a:t>Output bei allen…</a:t>
             </a:r>
           </a:p>
         </p:txBody>
@@ -4821,7 +9255,7 @@
           <p:cNvPr id="3" name="Content Placeholder 2">
             <a:extLst>
               <a:ext uri="{FF2B5EF4-FFF2-40B4-BE49-F238E27FC236}">
-                <a16:creationId xmlns:a16="http://schemas.microsoft.com/office/drawing/2014/main" id="{CFBAFA41-5C8E-4B46-968F-1CD7745333D6}"/>
+                <a16:creationId xmlns:a16="http://schemas.microsoft.com/office/drawing/2014/main" id="{CDA8E83C-D92D-2BE8-9B4A-395F74B8FDE3}"/>
               </a:ext>
             </a:extLst>
           </p:cNvPr>
@@ -4838,16 +9272,25 @@
           <a:lstStyle/>
           <a:p>
             <a:r>
-              <a:rPr lang="de-CH" dirty="0">
-                <a:hlinkClick r:id="rId2"/>
-              </a:rPr>
-              <a:t>http://127.0.0.1:5000</a:t>
-            </a:r>
+              <a:rPr lang="en-CH" dirty="0"/>
+              <a:t>Learning Curves, Train und Val</a:t>
+            </a:r>
+          </a:p>
+          <a:p>
+            <a:r>
+              <a:rPr lang="en-CH" dirty="0"/>
+              <a:t>Konfusionsmatrix</a:t>
+            </a:r>
+          </a:p>
+          <a:p>
+            <a:r>
+              <a:rPr lang="en-CH" dirty="0"/>
+              <a:t>Classification Report, korrekte/falsche Predictions</a:t>
+            </a:r>
+          </a:p>
+          <a:p>
             <a:endParaRPr lang="de-CH" dirty="0"/>
           </a:p>
-          <a:p>
-            <a:endParaRPr lang="de-CH" dirty="0"/>
-          </a:p>
         </p:txBody>
       </p:sp>
       <p:sp>
@@ -4855,7 +9298,7 @@
           <p:cNvPr id="4" name="Date Placeholder 3">
             <a:extLst>
               <a:ext uri="{FF2B5EF4-FFF2-40B4-BE49-F238E27FC236}">
-                <a16:creationId xmlns:a16="http://schemas.microsoft.com/office/drawing/2014/main" id="{EC60B57C-48FE-2C3C-75B7-23E5374B524C}"/>
+                <a16:creationId xmlns:a16="http://schemas.microsoft.com/office/drawing/2014/main" id="{3E96AA63-75C2-A3DC-7738-AA93BBA3DC88}"/>
               </a:ext>
             </a:extLst>
           </p:cNvPr>
@@ -4866,19 +9309,14 @@
             <p:ph type="dt" sz="half" idx="10"/>
           </p:nvPr>
         </p:nvSpPr>
-        <p:spPr>
-          <a:xfrm>
-            <a:off x="838200" y="6356350"/>
-            <a:ext cx="2743200" cy="365125"/>
-          </a:xfrm>
-        </p:spPr>
-        <p:txBody>
-          <a:bodyPr/>
-          <a:lstStyle/>
-          <a:p>
-            <a:fld id="{E66B3B6E-7E09-0142-B960-3BF02BFEB55D}" type="datetime4">
+        <p:spPr/>
+        <p:txBody>
+          <a:bodyPr/>
+          <a:lstStyle/>
+          <a:p>
+            <a:fld id="{EE15D7BA-2F5F-8E43-91CB-647D382EDB87}" type="datetime4">
               <a:rPr lang="de-CH" smtClean="0"/>
-              <a:t>14. Juni 2026</a:t>
+              <a:t>15. Juni 2026</a:t>
             </a:fld>
             <a:endParaRPr lang="en-CH"/>
           </a:p>
@@ -4889,7 +9327,7 @@
           <p:cNvPr id="5" name="Footer Placeholder 4">
             <a:extLst>
               <a:ext uri="{FF2B5EF4-FFF2-40B4-BE49-F238E27FC236}">
-                <a16:creationId xmlns:a16="http://schemas.microsoft.com/office/drawing/2014/main" id="{598B4F4E-D000-78BE-BBE0-29BBD4F9DD5F}"/>
+                <a16:creationId xmlns:a16="http://schemas.microsoft.com/office/drawing/2014/main" id="{D8A6EFEE-7C9C-7F4D-3333-9861F0F9A4C8}"/>
               </a:ext>
             </a:extLst>
           </p:cNvPr>
@@ -4900,12 +9338,7 @@
             <p:ph type="ftr" sz="quarter" idx="11"/>
           </p:nvPr>
         </p:nvSpPr>
-        <p:spPr>
-          <a:xfrm>
-            <a:off x="4038600" y="6356350"/>
-            <a:ext cx="4114800" cy="365125"/>
-          </a:xfrm>
-        </p:spPr>
+        <p:spPr/>
         <p:txBody>
           <a:bodyPr/>
           <a:lstStyle/>
@@ -4914,7 +9347,7 @@
               <a:rPr lang="en-GB"/>
               <a:t>Text Analysis- Svetlana Khominich, Ralph Müller, David Beer </a:t>
             </a:r>
-            <a:endParaRPr lang="en-CH"/>
+            <a:endParaRPr lang="en-CH" dirty="0"/>
           </a:p>
         </p:txBody>
       </p:sp>
@@ -4923,7 +9356,7 @@
           <p:cNvPr id="6" name="Slide Number Placeholder 5">
             <a:extLst>
               <a:ext uri="{FF2B5EF4-FFF2-40B4-BE49-F238E27FC236}">
-                <a16:creationId xmlns:a16="http://schemas.microsoft.com/office/drawing/2014/main" id="{BBF72F66-EA16-EBB6-D9B1-3C25CCF5EFED}"/>
+                <a16:creationId xmlns:a16="http://schemas.microsoft.com/office/drawing/2014/main" id="{0FDD79F4-ED4C-2FEC-0050-140D09BDD0D0}"/>
               </a:ext>
             </a:extLst>
           </p:cNvPr>
@@ -4934,12 +9367,7 @@
             <p:ph type="sldNum" sz="quarter" idx="12"/>
           </p:nvPr>
         </p:nvSpPr>
-        <p:spPr>
-          <a:xfrm>
-            <a:off x="8610600" y="6356350"/>
-            <a:ext cx="2743200" cy="365125"/>
-          </a:xfrm>
-        </p:spPr>
+        <p:spPr/>
         <p:txBody>
           <a:bodyPr/>
           <a:lstStyle/>
@@ -4952,118 +9380,10 @@
           </a:p>
         </p:txBody>
       </p:sp>
-      <p:pic>
-        <p:nvPicPr>
-          <p:cNvPr id="7" name="Content Placeholder 5" descr="Monitor with solid fill">
-            <a:extLst>
-              <a:ext uri="{FF2B5EF4-FFF2-40B4-BE49-F238E27FC236}">
-                <a16:creationId xmlns:a16="http://schemas.microsoft.com/office/drawing/2014/main" id="{8FC53FA5-1E52-97FF-70EB-5F1038E70B4C}"/>
-              </a:ext>
-            </a:extLst>
-          </p:cNvPr>
-          <p:cNvPicPr>
-            <a:picLocks noChangeAspect="1"/>
-          </p:cNvPicPr>
-          <p:nvPr/>
-        </p:nvPicPr>
-        <p:blipFill>
-          <a:blip>
-            <a:extLst>
-              <a:ext uri="{96DAC541-7B7A-43D3-8B79-37D633B846F1}">
-                <asvg:svgBlip xmlns:asvg="http://schemas.microsoft.com/office/drawing/2016/SVG/main" r:embed="rId3"/>
-              </a:ext>
-            </a:extLst>
-          </a:blip>
-          <a:stretch>
-            <a:fillRect/>
-          </a:stretch>
-        </p:blipFill>
-        <p:spPr>
-          <a:xfrm>
-            <a:off x="3635076" y="1930475"/>
-            <a:ext cx="4448220" cy="4448220"/>
-          </a:xfrm>
-          <a:prstGeom prst="rect">
-            <a:avLst/>
-          </a:prstGeom>
-        </p:spPr>
-      </p:pic>
-      <p:pic>
-        <p:nvPicPr>
-          <p:cNvPr id="8" name="Graphic 7" descr="Bar chart with solid fill">
-            <a:extLst>
-              <a:ext uri="{FF2B5EF4-FFF2-40B4-BE49-F238E27FC236}">
-                <a16:creationId xmlns:a16="http://schemas.microsoft.com/office/drawing/2014/main" id="{C195EA94-734A-61CB-F2A0-09F4D8343B9E}"/>
-              </a:ext>
-            </a:extLst>
-          </p:cNvPr>
-          <p:cNvPicPr>
-            <a:picLocks noChangeAspect="1"/>
-          </p:cNvPicPr>
-          <p:nvPr/>
-        </p:nvPicPr>
-        <p:blipFill>
-          <a:blip>
-            <a:extLst>
-              <a:ext uri="{96DAC541-7B7A-43D3-8B79-37D633B846F1}">
-                <asvg:svgBlip xmlns:asvg="http://schemas.microsoft.com/office/drawing/2016/SVG/main" r:embed="rId4"/>
-              </a:ext>
-            </a:extLst>
-          </a:blip>
-          <a:stretch>
-            <a:fillRect/>
-          </a:stretch>
-        </p:blipFill>
-        <p:spPr>
-          <a:xfrm>
-            <a:off x="5859186" y="3210470"/>
-            <a:ext cx="1497994" cy="1462114"/>
-          </a:xfrm>
-          <a:prstGeom prst="rect">
-            <a:avLst/>
-          </a:prstGeom>
-        </p:spPr>
-      </p:pic>
-      <p:pic>
-        <p:nvPicPr>
-          <p:cNvPr id="9" name="Graphic 8" descr="Home with solid fill">
-            <a:extLst>
-              <a:ext uri="{FF2B5EF4-FFF2-40B4-BE49-F238E27FC236}">
-                <a16:creationId xmlns:a16="http://schemas.microsoft.com/office/drawing/2014/main" id="{922C611A-E30F-7252-CCB9-455407456B29}"/>
-              </a:ext>
-            </a:extLst>
-          </p:cNvPr>
-          <p:cNvPicPr>
-            <a:picLocks noChangeAspect="1"/>
-          </p:cNvPicPr>
-          <p:nvPr/>
-        </p:nvPicPr>
-        <p:blipFill>
-          <a:blip>
-            <a:extLst>
-              <a:ext uri="{96DAC541-7B7A-43D3-8B79-37D633B846F1}">
-                <asvg:svgBlip xmlns:asvg="http://schemas.microsoft.com/office/drawing/2016/SVG/main" r:embed="rId5"/>
-              </a:ext>
-            </a:extLst>
-          </a:blip>
-          <a:stretch>
-            <a:fillRect/>
-          </a:stretch>
-        </p:blipFill>
-        <p:spPr>
-          <a:xfrm>
-            <a:off x="4366932" y="2950639"/>
-            <a:ext cx="1732509" cy="1721945"/>
-          </a:xfrm>
-          <a:prstGeom prst="rect">
-            <a:avLst/>
-          </a:prstGeom>
-        </p:spPr>
-      </p:pic>
     </p:spTree>
     <p:extLst>
       <p:ext uri="{BB962C8B-B14F-4D97-AF65-F5344CB8AC3E}">
-        <p14:creationId xmlns:p14="http://schemas.microsoft.com/office/powerpoint/2010/main" val="3068779260"/>
+        <p14:creationId xmlns:p14="http://schemas.microsoft.com/office/powerpoint/2010/main" val="3922701098"/>
       </p:ext>
     </p:extLst>
   </p:cSld>
@@ -5078,13 +9398,7 @@
   <p:cSld>
     <p:spTree>
       <p:nvGrpSpPr>
-        <p:cNvPr id="1" name="">
-          <a:extLst>
-            <a:ext uri="{FF2B5EF4-FFF2-40B4-BE49-F238E27FC236}">
-              <a16:creationId xmlns:a16="http://schemas.microsoft.com/office/drawing/2014/main" id="{A55F640F-0583-663B-488C-719C41014E50}"/>
-            </a:ext>
-          </a:extLst>
-        </p:cNvPr>
+        <p:cNvPr id="1" name=""/>
         <p:cNvGrpSpPr/>
         <p:nvPr/>
       </p:nvGrpSpPr>
@@ -5101,7 +9415,7 @@
           <p:cNvPr id="2" name="Title 1">
             <a:extLst>
               <a:ext uri="{FF2B5EF4-FFF2-40B4-BE49-F238E27FC236}">
-                <a16:creationId xmlns:a16="http://schemas.microsoft.com/office/drawing/2014/main" id="{54743C89-52C3-55C1-E592-460A7BF25602}"/>
+                <a16:creationId xmlns:a16="http://schemas.microsoft.com/office/drawing/2014/main" id="{11A6B855-D997-6104-4817-9B2BB8723197}"/>
               </a:ext>
             </a:extLst>
           </p:cNvPr>
@@ -5117,58 +9431,152 @@
           <a:bodyPr/>
           <a:lstStyle/>
           <a:p>
+            <a:endParaRPr lang="de-CH"/>
+          </a:p>
+        </p:txBody>
+      </p:sp>
+      <p:sp>
+        <p:nvSpPr>
+          <p:cNvPr id="3" name="Content Placeholder 2">
+            <a:extLst>
+              <a:ext uri="{FF2B5EF4-FFF2-40B4-BE49-F238E27FC236}">
+                <a16:creationId xmlns:a16="http://schemas.microsoft.com/office/drawing/2014/main" id="{53F6FC48-7807-D021-109A-B7B91C237AB4}"/>
+              </a:ext>
+            </a:extLst>
+          </p:cNvPr>
+          <p:cNvSpPr>
+            <a:spLocks noGrp="1"/>
+          </p:cNvSpPr>
+          <p:nvPr>
+            <p:ph idx="1"/>
+          </p:nvPr>
+        </p:nvSpPr>
+        <p:spPr/>
+        <p:txBody>
+          <a:bodyPr>
+            <a:normAutofit fontScale="92500" lnSpcReduction="10000"/>
+          </a:bodyPr>
+          <a:lstStyle/>
+          <a:p>
+            <a:r>
+              <a:rPr lang="de-CH" dirty="0"/>
+              <a:t>Over all </a:t>
+            </a:r>
             <a:r>
               <a:rPr lang="de-CH" dirty="0" err="1"/>
-              <a:t>Lessons</a:t>
+              <a:t>performance</a:t>
+            </a:r>
+            <a:endParaRPr lang="de-CH" dirty="0"/>
+          </a:p>
+          <a:p>
+            <a:r>
+              <a:rPr lang="de-CH" dirty="0" err="1"/>
+              <a:t>accuracy</a:t>
+            </a:r>
+            <a:endParaRPr lang="de-CH" dirty="0"/>
+          </a:p>
+          <a:p>
+            <a:r>
+              <a:rPr lang="de-CH" dirty="0" err="1"/>
+              <a:t>xgboost</a:t>
             </a:r>
             <a:r>
               <a:rPr lang="de-CH" dirty="0"/>
-              <a:t> </a:t>
-            </a:r>
+              <a:t>         	0.91</a:t>
+            </a:r>
+          </a:p>
+          <a:p>
             <a:r>
               <a:rPr lang="de-CH" dirty="0" err="1"/>
-              <a:t>learned</a:t>
-            </a:r>
+              <a:t>class_fcnn_bge</a:t>
+            </a:r>
+            <a:r>
+              <a:rPr lang="de-CH" dirty="0"/>
+              <a:t>  	0.90</a:t>
+            </a:r>
+          </a:p>
+          <a:p>
+            <a:r>
+              <a:rPr lang="de-CH" dirty="0" err="1"/>
+              <a:t>random_forest</a:t>
+            </a:r>
+            <a:r>
+              <a:rPr lang="de-CH" dirty="0"/>
+              <a:t>   	0.88</a:t>
+            </a:r>
+          </a:p>
+          <a:p>
+            <a:r>
+              <a:rPr lang="de-CH" dirty="0" err="1"/>
+              <a:t>ensemble</a:t>
+            </a:r>
+            <a:r>
+              <a:rPr lang="de-CH" dirty="0"/>
+              <a:t>		0.92 </a:t>
+            </a:r>
+            <a:r>
+              <a:rPr lang="de-CH" dirty="0">
+                <a:sym typeface="Wingdings" pitchFamily="2" charset="2"/>
+              </a:rPr>
+              <a:t> </a:t>
+            </a:r>
+            <a:r>
+              <a:rPr lang="en-CH" dirty="0"/>
+              <a:t>Fehler sind unterschiedlich verteilt und nicht systematisch gleich</a:t>
+            </a:r>
+          </a:p>
+          <a:p>
             <a:endParaRPr lang="de-CH" dirty="0"/>
           </a:p>
-        </p:txBody>
-      </p:sp>
-      <p:sp>
-        <p:nvSpPr>
-          <p:cNvPr id="3" name="Content Placeholder 2">
-            <a:extLst>
-              <a:ext uri="{FF2B5EF4-FFF2-40B4-BE49-F238E27FC236}">
-                <a16:creationId xmlns:a16="http://schemas.microsoft.com/office/drawing/2014/main" id="{B24F0B65-5BC9-92BA-3863-40AAECB9651A}"/>
-              </a:ext>
-            </a:extLst>
-          </p:cNvPr>
-          <p:cNvSpPr>
-            <a:spLocks noGrp="1"/>
-          </p:cNvSpPr>
-          <p:nvPr>
-            <p:ph idx="1"/>
-          </p:nvPr>
-        </p:nvSpPr>
-        <p:spPr/>
-        <p:txBody>
-          <a:bodyPr vert="horz" lIns="91440" tIns="45720" rIns="91440" bIns="45720" rtlCol="0" anchor="t">
-            <a:normAutofit/>
-          </a:bodyPr>
-          <a:lstStyle/>
           <a:p>
             <a:r>
               <a:rPr lang="de-CH" dirty="0"/>
-              <a:t>xxx</a:t>
-            </a:r>
-          </a:p>
-        </p:txBody>
-      </p:sp>
-      <p:sp>
-        <p:nvSpPr>
-          <p:cNvPr id="4" name="Footer Placeholder 3">
-            <a:extLst>
-              <a:ext uri="{FF2B5EF4-FFF2-40B4-BE49-F238E27FC236}">
-                <a16:creationId xmlns:a16="http://schemas.microsoft.com/office/drawing/2014/main" id="{B0C5934E-B049-8F00-977D-1AF08C716E97}"/>
+              <a:t>Rating Analysis</a:t>
+            </a:r>
+          </a:p>
+          <a:p>
+            <a:r>
+              <a:rPr lang="de-CH" dirty="0"/>
+              <a:t>Model Agreement / Ensemble</a:t>
+            </a:r>
+          </a:p>
+        </p:txBody>
+      </p:sp>
+      <p:sp>
+        <p:nvSpPr>
+          <p:cNvPr id="4" name="Date Placeholder 3">
+            <a:extLst>
+              <a:ext uri="{FF2B5EF4-FFF2-40B4-BE49-F238E27FC236}">
+                <a16:creationId xmlns:a16="http://schemas.microsoft.com/office/drawing/2014/main" id="{1A0D72EC-9630-ED91-ED2B-8322147759A8}"/>
+              </a:ext>
+            </a:extLst>
+          </p:cNvPr>
+          <p:cNvSpPr>
+            <a:spLocks noGrp="1"/>
+          </p:cNvSpPr>
+          <p:nvPr>
+            <p:ph type="dt" sz="half" idx="10"/>
+          </p:nvPr>
+        </p:nvSpPr>
+        <p:spPr/>
+        <p:txBody>
+          <a:bodyPr/>
+          <a:lstStyle/>
+          <a:p>
+            <a:fld id="{EE15D7BA-2F5F-8E43-91CB-647D382EDB87}" type="datetime4">
+              <a:rPr lang="de-CH" smtClean="0"/>
+              <a:t>15. Juni 2026</a:t>
+            </a:fld>
+            <a:endParaRPr lang="en-CH"/>
+          </a:p>
+        </p:txBody>
+      </p:sp>
+      <p:sp>
+        <p:nvSpPr>
+          <p:cNvPr id="5" name="Footer Placeholder 4">
+            <a:extLst>
+              <a:ext uri="{FF2B5EF4-FFF2-40B4-BE49-F238E27FC236}">
+                <a16:creationId xmlns:a16="http://schemas.microsoft.com/office/drawing/2014/main" id="{06B4E51B-734E-AFBA-C645-5768258CF0CB}"/>
               </a:ext>
             </a:extLst>
           </p:cNvPr>
@@ -5179,12 +9587,7 @@
             <p:ph type="ftr" sz="quarter" idx="11"/>
           </p:nvPr>
         </p:nvSpPr>
-        <p:spPr>
-          <a:xfrm>
-            <a:off x="4038600" y="6356350"/>
-            <a:ext cx="4114800" cy="365125"/>
-          </a:xfrm>
-        </p:spPr>
+        <p:spPr/>
         <p:txBody>
           <a:bodyPr/>
           <a:lstStyle/>
@@ -5193,16 +9596,16 @@
               <a:rPr lang="en-GB"/>
               <a:t>Text Analysis- Svetlana Khominich, Ralph Müller, David Beer </a:t>
             </a:r>
-            <a:endParaRPr lang="en-CH"/>
-          </a:p>
-        </p:txBody>
-      </p:sp>
-      <p:sp>
-        <p:nvSpPr>
-          <p:cNvPr id="5" name="Slide Number Placeholder 4">
-            <a:extLst>
-              <a:ext uri="{FF2B5EF4-FFF2-40B4-BE49-F238E27FC236}">
-                <a16:creationId xmlns:a16="http://schemas.microsoft.com/office/drawing/2014/main" id="{9BB57C1C-5954-2D86-3BB9-3D0CCC63F3D1}"/>
+            <a:endParaRPr lang="en-CH" dirty="0"/>
+          </a:p>
+        </p:txBody>
+      </p:sp>
+      <p:sp>
+        <p:nvSpPr>
+          <p:cNvPr id="6" name="Slide Number Placeholder 5">
+            <a:extLst>
+              <a:ext uri="{FF2B5EF4-FFF2-40B4-BE49-F238E27FC236}">
+                <a16:creationId xmlns:a16="http://schemas.microsoft.com/office/drawing/2014/main" id="{1F192CD0-49D9-7102-0B03-FA9EF95430A9}"/>
               </a:ext>
             </a:extLst>
           </p:cNvPr>
@@ -5213,12 +9616,7 @@
             <p:ph type="sldNum" sz="quarter" idx="12"/>
           </p:nvPr>
         </p:nvSpPr>
-        <p:spPr>
-          <a:xfrm>
-            <a:off x="8610600" y="6356350"/>
-            <a:ext cx="2743200" cy="365125"/>
-          </a:xfrm>
-        </p:spPr>
+        <p:spPr/>
         <p:txBody>
           <a:bodyPr/>
           <a:lstStyle/>
@@ -5231,44 +9629,854 @@
           </a:p>
         </p:txBody>
       </p:sp>
-      <p:sp>
-        <p:nvSpPr>
-          <p:cNvPr id="6" name="Date Placeholder 5">
-            <a:extLst>
-              <a:ext uri="{FF2B5EF4-FFF2-40B4-BE49-F238E27FC236}">
-                <a16:creationId xmlns:a16="http://schemas.microsoft.com/office/drawing/2014/main" id="{51696BC9-3254-9262-8B07-49964788111F}"/>
-              </a:ext>
-            </a:extLst>
-          </p:cNvPr>
-          <p:cNvSpPr>
-            <a:spLocks noGrp="1"/>
-          </p:cNvSpPr>
-          <p:nvPr>
-            <p:ph type="dt" sz="half" idx="10"/>
-          </p:nvPr>
-        </p:nvSpPr>
-        <p:spPr>
-          <a:xfrm>
-            <a:off x="838200" y="6356350"/>
-            <a:ext cx="2743200" cy="365125"/>
-          </a:xfrm>
-        </p:spPr>
-        <p:txBody>
-          <a:bodyPr/>
-          <a:lstStyle/>
-          <a:p>
-            <a:fld id="{DD2E1766-9633-E747-BBED-E122B4E61F73}" type="datetime4">
-              <a:rPr lang="de-CH" smtClean="0"/>
-              <a:t>14. Juni 2026</a:t>
-            </a:fld>
-            <a:endParaRPr lang="en-CH"/>
-          </a:p>
-        </p:txBody>
-      </p:sp>
     </p:spTree>
     <p:extLst>
       <p:ext uri="{BB962C8B-B14F-4D97-AF65-F5344CB8AC3E}">
-        <p14:creationId xmlns:p14="http://schemas.microsoft.com/office/powerpoint/2010/main" val="2108055749"/>
+        <p14:creationId xmlns:p14="http://schemas.microsoft.com/office/powerpoint/2010/main" val="4163418582"/>
+      </p:ext>
+    </p:extLst>
+  </p:cSld>
+  <p:clrMapOvr>
+    <a:masterClrMapping/>
+  </p:clrMapOvr>
+</p:sld>
+</file>
+
+<file path=ppt/slides/slide7.xml><?xml version="1.0" encoding="utf-8"?>
+<p:sld xmlns:a="http://schemas.openxmlformats.org/drawingml/2006/main" xmlns:r="http://schemas.openxmlformats.org/officeDocument/2006/relationships" xmlns:p="http://schemas.openxmlformats.org/presentationml/2006/main">
+  <p:cSld>
+    <p:spTree>
+      <p:nvGrpSpPr>
+        <p:cNvPr id="1" name=""/>
+        <p:cNvGrpSpPr/>
+        <p:nvPr/>
+      </p:nvGrpSpPr>
+      <p:grpSpPr>
+        <a:xfrm>
+          <a:off x="0" y="0"/>
+          <a:ext cx="0" cy="0"/>
+          <a:chOff x="0" y="0"/>
+          <a:chExt cx="0" cy="0"/>
+        </a:xfrm>
+      </p:grpSpPr>
+      <p:sp>
+        <p:nvSpPr>
+          <p:cNvPr id="2" name="Title 1">
+            <a:extLst>
+              <a:ext uri="{FF2B5EF4-FFF2-40B4-BE49-F238E27FC236}">
+                <a16:creationId xmlns:a16="http://schemas.microsoft.com/office/drawing/2014/main" id="{46E601F9-3712-A85A-BD94-0336A598BDB5}"/>
+              </a:ext>
+            </a:extLst>
+          </p:cNvPr>
+          <p:cNvSpPr>
+            <a:spLocks noGrp="1"/>
+          </p:cNvSpPr>
+          <p:nvPr>
+            <p:ph type="title"/>
+          </p:nvPr>
+        </p:nvSpPr>
+        <p:spPr/>
+        <p:txBody>
+          <a:bodyPr/>
+          <a:lstStyle/>
+          <a:p>
+            <a:r>
+              <a:rPr lang="de-CH" dirty="0" err="1"/>
+              <a:t>Category</a:t>
+            </a:r>
+            <a:r>
+              <a:rPr lang="de-CH" dirty="0"/>
+              <a:t> Analysis</a:t>
+            </a:r>
+          </a:p>
+        </p:txBody>
+      </p:sp>
+      <p:sp>
+        <p:nvSpPr>
+          <p:cNvPr id="4" name="Date Placeholder 3">
+            <a:extLst>
+              <a:ext uri="{FF2B5EF4-FFF2-40B4-BE49-F238E27FC236}">
+                <a16:creationId xmlns:a16="http://schemas.microsoft.com/office/drawing/2014/main" id="{E2043066-F022-788F-73BE-53A17B75453D}"/>
+              </a:ext>
+            </a:extLst>
+          </p:cNvPr>
+          <p:cNvSpPr>
+            <a:spLocks noGrp="1"/>
+          </p:cNvSpPr>
+          <p:nvPr>
+            <p:ph type="dt" sz="half" idx="10"/>
+          </p:nvPr>
+        </p:nvSpPr>
+        <p:spPr/>
+        <p:txBody>
+          <a:bodyPr/>
+          <a:lstStyle/>
+          <a:p>
+            <a:fld id="{EE15D7BA-2F5F-8E43-91CB-647D382EDB87}" type="datetime4">
+              <a:rPr lang="de-CH" smtClean="0"/>
+              <a:t>15. Juni 2026</a:t>
+            </a:fld>
+            <a:endParaRPr lang="en-CH"/>
+          </a:p>
+        </p:txBody>
+      </p:sp>
+      <p:sp>
+        <p:nvSpPr>
+          <p:cNvPr id="5" name="Footer Placeholder 4">
+            <a:extLst>
+              <a:ext uri="{FF2B5EF4-FFF2-40B4-BE49-F238E27FC236}">
+                <a16:creationId xmlns:a16="http://schemas.microsoft.com/office/drawing/2014/main" id="{99D0B3EC-4B06-9C87-61A9-CAD9FD5ADAA3}"/>
+              </a:ext>
+            </a:extLst>
+          </p:cNvPr>
+          <p:cNvSpPr>
+            <a:spLocks noGrp="1"/>
+          </p:cNvSpPr>
+          <p:nvPr>
+            <p:ph type="ftr" sz="quarter" idx="11"/>
+          </p:nvPr>
+        </p:nvSpPr>
+        <p:spPr/>
+        <p:txBody>
+          <a:bodyPr/>
+          <a:lstStyle/>
+          <a:p>
+            <a:r>
+              <a:rPr lang="en-GB"/>
+              <a:t>Text Analysis- Svetlana Khominich, Ralph Müller, David Beer </a:t>
+            </a:r>
+            <a:endParaRPr lang="en-CH" dirty="0"/>
+          </a:p>
+        </p:txBody>
+      </p:sp>
+      <p:sp>
+        <p:nvSpPr>
+          <p:cNvPr id="6" name="Slide Number Placeholder 5">
+            <a:extLst>
+              <a:ext uri="{FF2B5EF4-FFF2-40B4-BE49-F238E27FC236}">
+                <a16:creationId xmlns:a16="http://schemas.microsoft.com/office/drawing/2014/main" id="{B3725A36-FCEE-0F5D-7F9B-85AF3364FE3C}"/>
+              </a:ext>
+            </a:extLst>
+          </p:cNvPr>
+          <p:cNvSpPr>
+            <a:spLocks noGrp="1"/>
+          </p:cNvSpPr>
+          <p:nvPr>
+            <p:ph type="sldNum" sz="quarter" idx="12"/>
+          </p:nvPr>
+        </p:nvSpPr>
+        <p:spPr/>
+        <p:txBody>
+          <a:bodyPr/>
+          <a:lstStyle/>
+          <a:p>
+            <a:fld id="{221FD296-2B0C-4A4B-AFAC-2E3A842869F0}" type="slidenum">
+              <a:rPr lang="en-CH" smtClean="0"/>
+              <a:t>7</a:t>
+            </a:fld>
+            <a:endParaRPr lang="en-CH"/>
+          </a:p>
+        </p:txBody>
+      </p:sp>
+      <p:pic>
+        <p:nvPicPr>
+          <p:cNvPr id="8" name="Content Placeholder 7">
+            <a:extLst>
+              <a:ext uri="{FF2B5EF4-FFF2-40B4-BE49-F238E27FC236}">
+                <a16:creationId xmlns:a16="http://schemas.microsoft.com/office/drawing/2014/main" id="{F7ABFF2E-1C82-5CAF-12EF-0D98ACB52B07}"/>
+              </a:ext>
+            </a:extLst>
+          </p:cNvPr>
+          <p:cNvPicPr>
+            <a:picLocks noGrp="1" noChangeAspect="1"/>
+          </p:cNvPicPr>
+          <p:nvPr>
+            <p:ph idx="1"/>
+          </p:nvPr>
+        </p:nvPicPr>
+        <p:blipFill>
+          <a:blip r:embed="rId3"/>
+          <a:stretch>
+            <a:fillRect/>
+          </a:stretch>
+        </p:blipFill>
+        <p:spPr>
+          <a:xfrm>
+            <a:off x="1719146" y="1022195"/>
+            <a:ext cx="8753707" cy="5835805"/>
+          </a:xfrm>
+          <a:prstGeom prst="rect">
+            <a:avLst/>
+          </a:prstGeom>
+        </p:spPr>
+      </p:pic>
+    </p:spTree>
+    <p:extLst>
+      <p:ext uri="{BB962C8B-B14F-4D97-AF65-F5344CB8AC3E}">
+        <p14:creationId xmlns:p14="http://schemas.microsoft.com/office/powerpoint/2010/main" val="1724154125"/>
+      </p:ext>
+    </p:extLst>
+  </p:cSld>
+  <p:clrMapOvr>
+    <a:masterClrMapping/>
+  </p:clrMapOvr>
+</p:sld>
+</file>
+
+<file path=ppt/slides/slide8.xml><?xml version="1.0" encoding="utf-8"?>
+<p:sld xmlns:a="http://schemas.openxmlformats.org/drawingml/2006/main" xmlns:r="http://schemas.openxmlformats.org/officeDocument/2006/relationships" xmlns:p="http://schemas.openxmlformats.org/presentationml/2006/main">
+  <p:cSld>
+    <p:bg>
+      <p:bgPr>
+        <a:solidFill>
+          <a:schemeClr val="bg1"/>
+        </a:solidFill>
+        <a:effectLst/>
+      </p:bgPr>
+    </p:bg>
+    <p:spTree>
+      <p:nvGrpSpPr>
+        <p:cNvPr id="1" name=""/>
+        <p:cNvGrpSpPr/>
+        <p:nvPr/>
+      </p:nvGrpSpPr>
+      <p:grpSpPr>
+        <a:xfrm>
+          <a:off x="0" y="0"/>
+          <a:ext cx="0" cy="0"/>
+          <a:chOff x="0" y="0"/>
+          <a:chExt cx="0" cy="0"/>
+        </a:xfrm>
+      </p:grpSpPr>
+      <p:sp>
+        <p:nvSpPr>
+          <p:cNvPr id="2" name="Title 1">
+            <a:extLst>
+              <a:ext uri="{FF2B5EF4-FFF2-40B4-BE49-F238E27FC236}">
+                <a16:creationId xmlns:a16="http://schemas.microsoft.com/office/drawing/2014/main" id="{8FC5BB2B-B54F-48CC-B983-3C958DF9C262}"/>
+              </a:ext>
+            </a:extLst>
+          </p:cNvPr>
+          <p:cNvSpPr>
+            <a:spLocks noGrp="1"/>
+          </p:cNvSpPr>
+          <p:nvPr>
+            <p:ph type="title"/>
+          </p:nvPr>
+        </p:nvSpPr>
+        <p:spPr/>
+        <p:txBody>
+          <a:bodyPr/>
+          <a:lstStyle/>
+          <a:p>
+            <a:r>
+              <a:rPr lang="de-CH" dirty="0"/>
+              <a:t>Rating Analysis</a:t>
+            </a:r>
+          </a:p>
+        </p:txBody>
+      </p:sp>
+      <p:sp>
+        <p:nvSpPr>
+          <p:cNvPr id="4" name="Date Placeholder 3">
+            <a:extLst>
+              <a:ext uri="{FF2B5EF4-FFF2-40B4-BE49-F238E27FC236}">
+                <a16:creationId xmlns:a16="http://schemas.microsoft.com/office/drawing/2014/main" id="{36DA4982-B382-966E-2411-7FD3D5239CD2}"/>
+              </a:ext>
+            </a:extLst>
+          </p:cNvPr>
+          <p:cNvSpPr>
+            <a:spLocks noGrp="1"/>
+          </p:cNvSpPr>
+          <p:nvPr>
+            <p:ph type="dt" sz="half" idx="10"/>
+          </p:nvPr>
+        </p:nvSpPr>
+        <p:spPr/>
+        <p:txBody>
+          <a:bodyPr/>
+          <a:lstStyle/>
+          <a:p>
+            <a:fld id="{EE15D7BA-2F5F-8E43-91CB-647D382EDB87}" type="datetime4">
+              <a:rPr lang="de-CH" smtClean="0"/>
+              <a:t>15. Juni 2026</a:t>
+            </a:fld>
+            <a:endParaRPr lang="en-CH"/>
+          </a:p>
+        </p:txBody>
+      </p:sp>
+      <p:sp>
+        <p:nvSpPr>
+          <p:cNvPr id="5" name="Footer Placeholder 4">
+            <a:extLst>
+              <a:ext uri="{FF2B5EF4-FFF2-40B4-BE49-F238E27FC236}">
+                <a16:creationId xmlns:a16="http://schemas.microsoft.com/office/drawing/2014/main" id="{35E060DD-2AA0-EC1A-92A4-B30FC70BBD22}"/>
+              </a:ext>
+            </a:extLst>
+          </p:cNvPr>
+          <p:cNvSpPr>
+            <a:spLocks noGrp="1"/>
+          </p:cNvSpPr>
+          <p:nvPr>
+            <p:ph type="ftr" sz="quarter" idx="11"/>
+          </p:nvPr>
+        </p:nvSpPr>
+        <p:spPr/>
+        <p:txBody>
+          <a:bodyPr/>
+          <a:lstStyle/>
+          <a:p>
+            <a:r>
+              <a:rPr lang="en-GB"/>
+              <a:t>Text Analysis- Svetlana Khominich, Ralph Müller, David Beer </a:t>
+            </a:r>
+            <a:endParaRPr lang="en-CH" dirty="0"/>
+          </a:p>
+        </p:txBody>
+      </p:sp>
+      <p:sp>
+        <p:nvSpPr>
+          <p:cNvPr id="6" name="Slide Number Placeholder 5">
+            <a:extLst>
+              <a:ext uri="{FF2B5EF4-FFF2-40B4-BE49-F238E27FC236}">
+                <a16:creationId xmlns:a16="http://schemas.microsoft.com/office/drawing/2014/main" id="{31227558-E73C-C194-530F-9930FCDF8C69}"/>
+              </a:ext>
+            </a:extLst>
+          </p:cNvPr>
+          <p:cNvSpPr>
+            <a:spLocks noGrp="1"/>
+          </p:cNvSpPr>
+          <p:nvPr>
+            <p:ph type="sldNum" sz="quarter" idx="12"/>
+          </p:nvPr>
+        </p:nvSpPr>
+        <p:spPr/>
+        <p:txBody>
+          <a:bodyPr/>
+          <a:lstStyle/>
+          <a:p>
+            <a:fld id="{221FD296-2B0C-4A4B-AFAC-2E3A842869F0}" type="slidenum">
+              <a:rPr lang="en-CH" smtClean="0"/>
+              <a:t>8</a:t>
+            </a:fld>
+            <a:endParaRPr lang="en-CH"/>
+          </a:p>
+        </p:txBody>
+      </p:sp>
+      <p:pic>
+        <p:nvPicPr>
+          <p:cNvPr id="8" name="Content Placeholder 7">
+            <a:extLst>
+              <a:ext uri="{FF2B5EF4-FFF2-40B4-BE49-F238E27FC236}">
+                <a16:creationId xmlns:a16="http://schemas.microsoft.com/office/drawing/2014/main" id="{CB604B5A-0347-BBDB-6D07-3F476741082C}"/>
+              </a:ext>
+            </a:extLst>
+          </p:cNvPr>
+          <p:cNvPicPr>
+            <a:picLocks noGrp="1" noChangeAspect="1"/>
+          </p:cNvPicPr>
+          <p:nvPr>
+            <p:ph idx="1"/>
+          </p:nvPr>
+        </p:nvPicPr>
+        <p:blipFill>
+          <a:blip r:embed="rId2"/>
+          <a:stretch>
+            <a:fillRect/>
+          </a:stretch>
+        </p:blipFill>
+        <p:spPr>
+          <a:xfrm>
+            <a:off x="1650380" y="1333922"/>
+            <a:ext cx="8979255" cy="5387553"/>
+          </a:xfrm>
+          <a:prstGeom prst="rect">
+            <a:avLst/>
+          </a:prstGeom>
+        </p:spPr>
+      </p:pic>
+      <p:sp>
+        <p:nvSpPr>
+          <p:cNvPr id="10" name="Rounded Rectangular Callout 9">
+            <a:extLst>
+              <a:ext uri="{FF2B5EF4-FFF2-40B4-BE49-F238E27FC236}">
+                <a16:creationId xmlns:a16="http://schemas.microsoft.com/office/drawing/2014/main" id="{DF4B14F1-B8F1-5DA7-CA9B-B3D2A4F16A82}"/>
+              </a:ext>
+            </a:extLst>
+          </p:cNvPr>
+          <p:cNvSpPr/>
+          <p:nvPr/>
+        </p:nvSpPr>
+        <p:spPr>
+          <a:xfrm>
+            <a:off x="2776653" y="4282068"/>
+            <a:ext cx="2029522" cy="1605776"/>
+          </a:xfrm>
+          <a:prstGeom prst="wedgeRoundRectCallout">
+            <a:avLst>
+              <a:gd name="adj1" fmla="val 80855"/>
+              <a:gd name="adj2" fmla="val 48867"/>
+              <a:gd name="adj3" fmla="val 16667"/>
+            </a:avLst>
+          </a:prstGeom>
+          <a:solidFill>
+            <a:schemeClr val="accent4">
+              <a:lumMod val="20000"/>
+              <a:lumOff val="80000"/>
+            </a:schemeClr>
+          </a:solidFill>
+        </p:spPr>
+        <p:style>
+          <a:lnRef idx="2">
+            <a:schemeClr val="accent1">
+              <a:shade val="15000"/>
+            </a:schemeClr>
+          </a:lnRef>
+          <a:fillRef idx="1">
+            <a:schemeClr val="accent1"/>
+          </a:fillRef>
+          <a:effectRef idx="0">
+            <a:schemeClr val="accent1"/>
+          </a:effectRef>
+          <a:fontRef idx="minor">
+            <a:schemeClr val="lt1"/>
+          </a:fontRef>
+        </p:style>
+        <p:txBody>
+          <a:bodyPr rtlCol="0" anchor="ctr"/>
+          <a:lstStyle/>
+          <a:p>
+            <a:r>
+              <a:rPr lang="en-CH" dirty="0">
+                <a:solidFill>
+                  <a:schemeClr val="tx1"/>
+                </a:solidFill>
+              </a:rPr>
+              <a:t>1 </a:t>
+            </a:r>
+            <a:r>
+              <a:rPr lang="en-CH" dirty="0">
+                <a:solidFill>
+                  <a:schemeClr val="tx1"/>
+                </a:solidFill>
+                <a:sym typeface="Wingdings" pitchFamily="2" charset="2"/>
+              </a:rPr>
+              <a:t> </a:t>
+            </a:r>
+            <a:r>
+              <a:rPr lang="en-CH" dirty="0">
+                <a:solidFill>
+                  <a:schemeClr val="tx1"/>
+                </a:solidFill>
+              </a:rPr>
+              <a:t>5%</a:t>
+            </a:r>
+          </a:p>
+          <a:p>
+            <a:r>
+              <a:rPr lang="en-CH" dirty="0">
+                <a:solidFill>
+                  <a:schemeClr val="tx1"/>
+                </a:solidFill>
+              </a:rPr>
+              <a:t>2 </a:t>
+            </a:r>
+            <a:r>
+              <a:rPr lang="en-CH" dirty="0">
+                <a:solidFill>
+                  <a:schemeClr val="tx1"/>
+                </a:solidFill>
+                <a:sym typeface="Wingdings" pitchFamily="2" charset="2"/>
+              </a:rPr>
+              <a:t> </a:t>
+            </a:r>
+            <a:r>
+              <a:rPr lang="en-CH" dirty="0">
+                <a:solidFill>
+                  <a:schemeClr val="tx1"/>
+                </a:solidFill>
+              </a:rPr>
+              <a:t>5%</a:t>
+            </a:r>
+          </a:p>
+          <a:p>
+            <a:r>
+              <a:rPr lang="en-CH" dirty="0">
+                <a:solidFill>
+                  <a:schemeClr val="tx1"/>
+                </a:solidFill>
+              </a:rPr>
+              <a:t>3 </a:t>
+            </a:r>
+            <a:r>
+              <a:rPr lang="en-CH" dirty="0">
+                <a:solidFill>
+                  <a:schemeClr val="tx1"/>
+                </a:solidFill>
+                <a:sym typeface="Wingdings" pitchFamily="2" charset="2"/>
+              </a:rPr>
+              <a:t> </a:t>
+            </a:r>
+            <a:r>
+              <a:rPr lang="en-CH" dirty="0">
+                <a:solidFill>
+                  <a:schemeClr val="tx1"/>
+                </a:solidFill>
+              </a:rPr>
+              <a:t>9%</a:t>
+            </a:r>
+          </a:p>
+          <a:p>
+            <a:r>
+              <a:rPr lang="en-CH" dirty="0">
+                <a:solidFill>
+                  <a:schemeClr val="tx1"/>
+                </a:solidFill>
+              </a:rPr>
+              <a:t>4 </a:t>
+            </a:r>
+            <a:r>
+              <a:rPr lang="en-CH" dirty="0">
+                <a:solidFill>
+                  <a:schemeClr val="tx1"/>
+                </a:solidFill>
+                <a:sym typeface="Wingdings" pitchFamily="2" charset="2"/>
+              </a:rPr>
+              <a:t> </a:t>
+            </a:r>
+            <a:r>
+              <a:rPr lang="en-CH" dirty="0">
+                <a:solidFill>
+                  <a:schemeClr val="tx1"/>
+                </a:solidFill>
+              </a:rPr>
+              <a:t>20%</a:t>
+            </a:r>
+          </a:p>
+          <a:p>
+            <a:r>
+              <a:rPr lang="en-CH" dirty="0">
+                <a:solidFill>
+                  <a:schemeClr val="tx1"/>
+                </a:solidFill>
+              </a:rPr>
+              <a:t>5 </a:t>
+            </a:r>
+            <a:r>
+              <a:rPr lang="en-CH" dirty="0">
+                <a:solidFill>
+                  <a:schemeClr val="tx1"/>
+                </a:solidFill>
+                <a:sym typeface="Wingdings" pitchFamily="2" charset="2"/>
+              </a:rPr>
+              <a:t> </a:t>
+            </a:r>
+            <a:r>
+              <a:rPr lang="en-CH" dirty="0">
+                <a:solidFill>
+                  <a:schemeClr val="tx1"/>
+                </a:solidFill>
+              </a:rPr>
+              <a:t>61%</a:t>
+            </a:r>
+          </a:p>
+        </p:txBody>
+      </p:sp>
+    </p:spTree>
+    <p:extLst>
+      <p:ext uri="{BB962C8B-B14F-4D97-AF65-F5344CB8AC3E}">
+        <p14:creationId xmlns:p14="http://schemas.microsoft.com/office/powerpoint/2010/main" val="2464392494"/>
+      </p:ext>
+    </p:extLst>
+  </p:cSld>
+  <p:clrMapOvr>
+    <a:masterClrMapping/>
+  </p:clrMapOvr>
+</p:sld>
+</file>
+
+<file path=ppt/slides/slide9.xml><?xml version="1.0" encoding="utf-8"?>
+<p:sld xmlns:a="http://schemas.openxmlformats.org/drawingml/2006/main" xmlns:r="http://schemas.openxmlformats.org/officeDocument/2006/relationships" xmlns:p="http://schemas.openxmlformats.org/presentationml/2006/main">
+  <p:cSld>
+    <p:spTree>
+      <p:nvGrpSpPr>
+        <p:cNvPr id="1" name=""/>
+        <p:cNvGrpSpPr/>
+        <p:nvPr/>
+      </p:nvGrpSpPr>
+      <p:grpSpPr>
+        <a:xfrm>
+          <a:off x="0" y="0"/>
+          <a:ext cx="0" cy="0"/>
+          <a:chOff x="0" y="0"/>
+          <a:chExt cx="0" cy="0"/>
+        </a:xfrm>
+      </p:grpSpPr>
+      <p:sp>
+        <p:nvSpPr>
+          <p:cNvPr id="2" name="Title 1">
+            <a:extLst>
+              <a:ext uri="{FF2B5EF4-FFF2-40B4-BE49-F238E27FC236}">
+                <a16:creationId xmlns:a16="http://schemas.microsoft.com/office/drawing/2014/main" id="{FB061F95-BE2D-5BB1-0062-0ACCEB18D228}"/>
+              </a:ext>
+            </a:extLst>
+          </p:cNvPr>
+          <p:cNvSpPr>
+            <a:spLocks noGrp="1"/>
+          </p:cNvSpPr>
+          <p:nvPr>
+            <p:ph type="title"/>
+          </p:nvPr>
+        </p:nvSpPr>
+        <p:spPr/>
+        <p:txBody>
+          <a:bodyPr/>
+          <a:lstStyle/>
+          <a:p>
+            <a:r>
+              <a:rPr lang="de-CH" dirty="0"/>
+              <a:t>Errors</a:t>
+            </a:r>
+          </a:p>
+        </p:txBody>
+      </p:sp>
+      <p:sp>
+        <p:nvSpPr>
+          <p:cNvPr id="3" name="Content Placeholder 2">
+            <a:extLst>
+              <a:ext uri="{FF2B5EF4-FFF2-40B4-BE49-F238E27FC236}">
+                <a16:creationId xmlns:a16="http://schemas.microsoft.com/office/drawing/2014/main" id="{5F380E9D-8540-99EA-0665-5F84077C2561}"/>
+              </a:ext>
+            </a:extLst>
+          </p:cNvPr>
+          <p:cNvSpPr>
+            <a:spLocks noGrp="1"/>
+          </p:cNvSpPr>
+          <p:nvPr>
+            <p:ph idx="1"/>
+          </p:nvPr>
+        </p:nvSpPr>
+        <p:spPr/>
+        <p:txBody>
+          <a:bodyPr>
+            <a:normAutofit fontScale="55000" lnSpcReduction="20000"/>
+          </a:bodyPr>
+          <a:lstStyle/>
+          <a:p>
+            <a:r>
+              <a:rPr lang="de-CH" dirty="0"/>
+              <a:t>All </a:t>
+            </a:r>
+            <a:r>
+              <a:rPr lang="de-CH" dirty="0" err="1"/>
+              <a:t>models</a:t>
+            </a:r>
+            <a:r>
+              <a:rPr lang="de-CH" dirty="0"/>
+              <a:t> </a:t>
+            </a:r>
+            <a:r>
+              <a:rPr lang="de-CH" dirty="0" err="1"/>
+              <a:t>wrong</a:t>
+            </a:r>
+            <a:r>
+              <a:rPr lang="de-CH" dirty="0"/>
+              <a:t>: 185</a:t>
+            </a:r>
+          </a:p>
+          <a:p>
+            <a:endParaRPr lang="de-CH" dirty="0"/>
+          </a:p>
+          <a:p>
+            <a:r>
+              <a:rPr lang="de-CH" dirty="0"/>
+              <a:t>Top </a:t>
+            </a:r>
+            <a:r>
+              <a:rPr lang="de-CH" dirty="0" err="1"/>
+              <a:t>categories</a:t>
+            </a:r>
+            <a:r>
+              <a:rPr lang="de-CH" dirty="0"/>
+              <a:t> </a:t>
+            </a:r>
+            <a:r>
+              <a:rPr lang="de-CH" dirty="0" err="1"/>
+              <a:t>among</a:t>
+            </a:r>
+            <a:r>
+              <a:rPr lang="de-CH" dirty="0"/>
+              <a:t> all-fail </a:t>
+            </a:r>
+            <a:r>
+              <a:rPr lang="de-CH" dirty="0" err="1"/>
+              <a:t>cases</a:t>
+            </a:r>
+            <a:r>
+              <a:rPr lang="de-CH" dirty="0"/>
+              <a:t>:</a:t>
+            </a:r>
+          </a:p>
+          <a:p>
+            <a:r>
+              <a:rPr lang="de-CH" dirty="0" err="1"/>
+              <a:t>category</a:t>
+            </a:r>
+            <a:endParaRPr lang="de-CH" dirty="0"/>
+          </a:p>
+          <a:p>
+            <a:r>
+              <a:rPr lang="de-CH" dirty="0"/>
+              <a:t>Toys_and_Games_5                26</a:t>
+            </a:r>
+          </a:p>
+          <a:p>
+            <a:r>
+              <a:rPr lang="de-CH" dirty="0"/>
+              <a:t>Pet_Supplies_5                  22</a:t>
+            </a:r>
+          </a:p>
+          <a:p>
+            <a:r>
+              <a:rPr lang="de-CH" dirty="0"/>
+              <a:t>Sports_and_Outdoors_5           20</a:t>
+            </a:r>
+          </a:p>
+          <a:p>
+            <a:r>
+              <a:rPr lang="de-CH" dirty="0"/>
+              <a:t>Kindle_Store_5                  19</a:t>
+            </a:r>
+          </a:p>
+          <a:p>
+            <a:r>
+              <a:rPr lang="de-CH" dirty="0"/>
+              <a:t>Clothing_Shoes_and_Jewelry_5    19</a:t>
+            </a:r>
+          </a:p>
+          <a:p>
+            <a:r>
+              <a:rPr lang="de-CH" dirty="0"/>
+              <a:t>Movies_and_TV_5                 18</a:t>
+            </a:r>
+          </a:p>
+          <a:p>
+            <a:r>
+              <a:rPr lang="de-CH" dirty="0"/>
+              <a:t>Home_and_Kitchen_5              17</a:t>
+            </a:r>
+          </a:p>
+          <a:p>
+            <a:r>
+              <a:rPr lang="de-CH" dirty="0"/>
+              <a:t>Tools_and_Home_Improvement_5    17</a:t>
+            </a:r>
+          </a:p>
+          <a:p>
+            <a:r>
+              <a:rPr lang="de-CH" dirty="0"/>
+              <a:t>Books_5                         16</a:t>
+            </a:r>
+          </a:p>
+          <a:p>
+            <a:r>
+              <a:rPr lang="de-CH" dirty="0"/>
+              <a:t>Electronics_5                   11</a:t>
+            </a:r>
+          </a:p>
+        </p:txBody>
+      </p:sp>
+      <p:sp>
+        <p:nvSpPr>
+          <p:cNvPr id="4" name="Date Placeholder 3">
+            <a:extLst>
+              <a:ext uri="{FF2B5EF4-FFF2-40B4-BE49-F238E27FC236}">
+                <a16:creationId xmlns:a16="http://schemas.microsoft.com/office/drawing/2014/main" id="{06CB8DBA-0A3A-ECA9-AE5A-B649BE473359}"/>
+              </a:ext>
+            </a:extLst>
+          </p:cNvPr>
+          <p:cNvSpPr>
+            <a:spLocks noGrp="1"/>
+          </p:cNvSpPr>
+          <p:nvPr>
+            <p:ph type="dt" sz="half" idx="10"/>
+          </p:nvPr>
+        </p:nvSpPr>
+        <p:spPr/>
+        <p:txBody>
+          <a:bodyPr/>
+          <a:lstStyle/>
+          <a:p>
+            <a:fld id="{EE15D7BA-2F5F-8E43-91CB-647D382EDB87}" type="datetime4">
+              <a:rPr lang="de-CH" smtClean="0"/>
+              <a:t>15. Juni 2026</a:t>
+            </a:fld>
+            <a:endParaRPr lang="en-CH"/>
+          </a:p>
+        </p:txBody>
+      </p:sp>
+      <p:sp>
+        <p:nvSpPr>
+          <p:cNvPr id="5" name="Footer Placeholder 4">
+            <a:extLst>
+              <a:ext uri="{FF2B5EF4-FFF2-40B4-BE49-F238E27FC236}">
+                <a16:creationId xmlns:a16="http://schemas.microsoft.com/office/drawing/2014/main" id="{7D393578-F263-6F12-A44A-D795E0A33350}"/>
+              </a:ext>
+            </a:extLst>
+          </p:cNvPr>
+          <p:cNvSpPr>
+            <a:spLocks noGrp="1"/>
+          </p:cNvSpPr>
+          <p:nvPr>
+            <p:ph type="ftr" sz="quarter" idx="11"/>
+          </p:nvPr>
+        </p:nvSpPr>
+        <p:spPr/>
+        <p:txBody>
+          <a:bodyPr/>
+          <a:lstStyle/>
+          <a:p>
+            <a:r>
+              <a:rPr lang="en-GB"/>
+              <a:t>Text Analysis- Svetlana Khominich, Ralph Müller, David Beer </a:t>
+            </a:r>
+            <a:endParaRPr lang="en-CH" dirty="0"/>
+          </a:p>
+        </p:txBody>
+      </p:sp>
+      <p:sp>
+        <p:nvSpPr>
+          <p:cNvPr id="6" name="Slide Number Placeholder 5">
+            <a:extLst>
+              <a:ext uri="{FF2B5EF4-FFF2-40B4-BE49-F238E27FC236}">
+                <a16:creationId xmlns:a16="http://schemas.microsoft.com/office/drawing/2014/main" id="{9AB83A49-1ED6-DD8C-D4BF-A07ADD2BAF35}"/>
+              </a:ext>
+            </a:extLst>
+          </p:cNvPr>
+          <p:cNvSpPr>
+            <a:spLocks noGrp="1"/>
+          </p:cNvSpPr>
+          <p:nvPr>
+            <p:ph type="sldNum" sz="quarter" idx="12"/>
+          </p:nvPr>
+        </p:nvSpPr>
+        <p:spPr/>
+        <p:txBody>
+          <a:bodyPr/>
+          <a:lstStyle/>
+          <a:p>
+            <a:fld id="{221FD296-2B0C-4A4B-AFAC-2E3A842869F0}" type="slidenum">
+              <a:rPr lang="en-CH" smtClean="0"/>
+              <a:t>9</a:t>
+            </a:fld>
+            <a:endParaRPr lang="en-CH"/>
+          </a:p>
+        </p:txBody>
+      </p:sp>
+    </p:spTree>
+    <p:extLst>
+      <p:ext uri="{BB962C8B-B14F-4D97-AF65-F5344CB8AC3E}">
+        <p14:creationId xmlns:p14="http://schemas.microsoft.com/office/powerpoint/2010/main" val="3243710348"/>
       </p:ext>
     </p:extLst>
   </p:cSld>

--- a/presentation/ln_text_analysis.pptx
+++ b/presentation/ln_text_analysis.pptx
@@ -5,7 +5,7 @@
     <p:sldMasterId id="2147483648" r:id="rId1"/>
   </p:sldMasterIdLst>
   <p:notesMasterIdLst>
-    <p:notesMasterId r:id="rId24"/>
+    <p:notesMasterId r:id="rId23"/>
   </p:notesMasterIdLst>
   <p:sldIdLst>
     <p:sldId id="281" r:id="rId2"/>
@@ -18,18 +18,17 @@
     <p:sldId id="289" r:id="rId9"/>
     <p:sldId id="290" r:id="rId10"/>
     <p:sldId id="291" r:id="rId11"/>
-    <p:sldId id="292" r:id="rId12"/>
-    <p:sldId id="293" r:id="rId13"/>
-    <p:sldId id="294" r:id="rId14"/>
-    <p:sldId id="295" r:id="rId15"/>
-    <p:sldId id="296" r:id="rId16"/>
-    <p:sldId id="297" r:id="rId17"/>
-    <p:sldId id="300" r:id="rId18"/>
-    <p:sldId id="298" r:id="rId19"/>
-    <p:sldId id="299" r:id="rId20"/>
-    <p:sldId id="275" r:id="rId21"/>
-    <p:sldId id="301" r:id="rId22"/>
-    <p:sldId id="280" r:id="rId23"/>
+    <p:sldId id="293" r:id="rId12"/>
+    <p:sldId id="294" r:id="rId13"/>
+    <p:sldId id="295" r:id="rId14"/>
+    <p:sldId id="296" r:id="rId15"/>
+    <p:sldId id="297" r:id="rId16"/>
+    <p:sldId id="300" r:id="rId17"/>
+    <p:sldId id="298" r:id="rId18"/>
+    <p:sldId id="299" r:id="rId19"/>
+    <p:sldId id="275" r:id="rId20"/>
+    <p:sldId id="301" r:id="rId21"/>
+    <p:sldId id="280" r:id="rId22"/>
   </p:sldIdLst>
   <p:sldSz cx="12192000" cy="6858000"/>
   <p:notesSz cx="6858000" cy="9144000"/>
@@ -39,8 +38,8 @@
         <p:sld r:id="rId2"/>
         <p:sld r:id="rId3"/>
         <p:sld r:id="rId4"/>
-        <p:sld r:id="rId21"/>
-        <p:sld r:id="rId23"/>
+        <p:sld r:id="rId20"/>
+        <p:sld r:id="rId22"/>
       </p:sldLst>
     </p:custShow>
     <p:custShow name="Streaming" id="1">
@@ -731,7 +730,1013 @@
           <a:bodyPr/>
           <a:lstStyle/>
           <a:p>
-            <a:endParaRPr lang="de-CH" dirty="0"/>
+            <a:r>
+              <a:rPr lang="en-GB" sz="1200" b="0" kern="1200" dirty="0">
+                <a:solidFill>
+                  <a:schemeClr val="tx1"/>
+                </a:solidFill>
+                <a:effectLst/>
+                <a:latin typeface="+mn-lt"/>
+                <a:ea typeface="+mn-ea"/>
+                <a:cs typeface="+mn-cs"/>
+              </a:rPr>
+              <a:t>Zum Modell:</a:t>
+            </a:r>
+          </a:p>
+          <a:p>
+            <a:r>
+              <a:rPr lang="en-GB" sz="1200" b="0" kern="1200" dirty="0">
+                <a:solidFill>
+                  <a:schemeClr val="tx1"/>
+                </a:solidFill>
+                <a:effectLst/>
+                <a:latin typeface="+mn-lt"/>
+                <a:ea typeface="+mn-ea"/>
+                <a:cs typeface="+mn-cs"/>
+              </a:rPr>
+              <a:t>•   </a:t>
+            </a:r>
+            <a:r>
+              <a:rPr lang="en-GB" sz="1200" b="0" kern="1200" dirty="0" err="1">
+                <a:solidFill>
+                  <a:schemeClr val="tx1"/>
+                </a:solidFill>
+                <a:effectLst/>
+                <a:latin typeface="+mn-lt"/>
+                <a:ea typeface="+mn-ea"/>
+                <a:cs typeface="+mn-cs"/>
+              </a:rPr>
+              <a:t>Herkunft</a:t>
+            </a:r>
+            <a:r>
+              <a:rPr lang="en-GB" sz="1200" b="0" kern="1200" dirty="0">
+                <a:solidFill>
+                  <a:schemeClr val="tx1"/>
+                </a:solidFill>
+                <a:effectLst/>
+                <a:latin typeface="+mn-lt"/>
+                <a:ea typeface="+mn-ea"/>
+                <a:cs typeface="+mn-cs"/>
+              </a:rPr>
+              <a:t>: BAAI = Beijing Academy of Artificial Intelligence, open source via </a:t>
+            </a:r>
+            <a:r>
+              <a:rPr lang="en-GB" sz="1200" b="0" kern="1200" dirty="0" err="1">
+                <a:solidFill>
+                  <a:schemeClr val="tx1"/>
+                </a:solidFill>
+                <a:effectLst/>
+                <a:latin typeface="+mn-lt"/>
+                <a:ea typeface="+mn-ea"/>
+                <a:cs typeface="+mn-cs"/>
+              </a:rPr>
+              <a:t>HuggingFace</a:t>
+            </a:r>
+            <a:endParaRPr lang="en-GB" sz="1200" b="0" kern="1200" dirty="0">
+              <a:solidFill>
+                <a:schemeClr val="tx1"/>
+              </a:solidFill>
+              <a:effectLst/>
+              <a:latin typeface="+mn-lt"/>
+              <a:ea typeface="+mn-ea"/>
+              <a:cs typeface="+mn-cs"/>
+            </a:endParaRPr>
+          </a:p>
+          <a:p>
+            <a:r>
+              <a:rPr lang="en-GB" sz="1200" b="0" kern="1200" dirty="0">
+                <a:solidFill>
+                  <a:schemeClr val="tx1"/>
+                </a:solidFill>
+                <a:effectLst/>
+                <a:latin typeface="+mn-lt"/>
+                <a:ea typeface="+mn-ea"/>
+                <a:cs typeface="+mn-cs"/>
+              </a:rPr>
+              <a:t>•   110M Parameter, max. </a:t>
+            </a:r>
+            <a:r>
+              <a:rPr lang="en-GB" sz="1200" b="0" kern="1200" dirty="0" err="1">
+                <a:solidFill>
+                  <a:schemeClr val="tx1"/>
+                </a:solidFill>
+                <a:effectLst/>
+                <a:latin typeface="+mn-lt"/>
+                <a:ea typeface="+mn-ea"/>
+                <a:cs typeface="+mn-cs"/>
+              </a:rPr>
+              <a:t>Sequenzlänge</a:t>
+            </a:r>
+            <a:r>
+              <a:rPr lang="en-GB" sz="1200" b="0" kern="1200" dirty="0">
+                <a:solidFill>
+                  <a:schemeClr val="tx1"/>
+                </a:solidFill>
+                <a:effectLst/>
+                <a:latin typeface="+mn-lt"/>
+                <a:ea typeface="+mn-ea"/>
+                <a:cs typeface="+mn-cs"/>
+              </a:rPr>
+              <a:t> 512 Tokens, </a:t>
+            </a:r>
+            <a:r>
+              <a:rPr lang="en-GB" sz="1200" b="0" kern="1200" dirty="0" err="1">
+                <a:solidFill>
+                  <a:schemeClr val="tx1"/>
+                </a:solidFill>
+                <a:effectLst/>
+                <a:latin typeface="+mn-lt"/>
+                <a:ea typeface="+mn-ea"/>
+                <a:cs typeface="+mn-cs"/>
+              </a:rPr>
+              <a:t>trainiert</a:t>
+            </a:r>
+            <a:r>
+              <a:rPr lang="en-GB" sz="1200" b="0" kern="1200" dirty="0">
+                <a:solidFill>
+                  <a:schemeClr val="tx1"/>
+                </a:solidFill>
+                <a:effectLst/>
+                <a:latin typeface="+mn-lt"/>
+                <a:ea typeface="+mn-ea"/>
+                <a:cs typeface="+mn-cs"/>
+              </a:rPr>
+              <a:t> auf </a:t>
+            </a:r>
+            <a:r>
+              <a:rPr lang="en-GB" sz="1200" b="0" kern="1200" dirty="0" err="1">
+                <a:solidFill>
+                  <a:schemeClr val="tx1"/>
+                </a:solidFill>
+                <a:effectLst/>
+                <a:latin typeface="+mn-lt"/>
+                <a:ea typeface="+mn-ea"/>
+                <a:cs typeface="+mn-cs"/>
+              </a:rPr>
+              <a:t>großen</a:t>
+            </a:r>
+            <a:r>
+              <a:rPr lang="en-GB" sz="1200" b="0" kern="1200" dirty="0">
+                <a:solidFill>
+                  <a:schemeClr val="tx1"/>
+                </a:solidFill>
+                <a:effectLst/>
+                <a:latin typeface="+mn-lt"/>
+                <a:ea typeface="+mn-ea"/>
+                <a:cs typeface="+mn-cs"/>
+              </a:rPr>
+              <a:t> </a:t>
+            </a:r>
+            <a:r>
+              <a:rPr lang="en-GB" sz="1200" b="0" kern="1200" dirty="0" err="1">
+                <a:solidFill>
+                  <a:schemeClr val="tx1"/>
+                </a:solidFill>
+                <a:effectLst/>
+                <a:latin typeface="+mn-lt"/>
+                <a:ea typeface="+mn-ea"/>
+                <a:cs typeface="+mn-cs"/>
+              </a:rPr>
+              <a:t>Paardaten</a:t>
+            </a:r>
+            <a:r>
+              <a:rPr lang="en-GB" sz="1200" b="0" kern="1200" dirty="0">
+                <a:solidFill>
+                  <a:schemeClr val="tx1"/>
+                </a:solidFill>
+                <a:effectLst/>
+                <a:latin typeface="+mn-lt"/>
+                <a:ea typeface="+mn-ea"/>
+                <a:cs typeface="+mn-cs"/>
+              </a:rPr>
+              <a:t> </a:t>
+            </a:r>
+            <a:r>
+              <a:rPr lang="en-GB" sz="1200" b="0" kern="1200" dirty="0" err="1">
+                <a:solidFill>
+                  <a:schemeClr val="tx1"/>
+                </a:solidFill>
+                <a:effectLst/>
+                <a:latin typeface="+mn-lt"/>
+                <a:ea typeface="+mn-ea"/>
+                <a:cs typeface="+mn-cs"/>
+              </a:rPr>
+              <a:t>mit</a:t>
+            </a:r>
+            <a:r>
+              <a:rPr lang="en-GB" sz="1200" b="0" kern="1200" dirty="0">
+                <a:solidFill>
+                  <a:schemeClr val="tx1"/>
+                </a:solidFill>
+                <a:effectLst/>
+                <a:latin typeface="+mn-lt"/>
+                <a:ea typeface="+mn-ea"/>
+                <a:cs typeface="+mn-cs"/>
+              </a:rPr>
+              <a:t> Contrastive Learning </a:t>
+            </a:r>
+            <a:r>
+              <a:rPr lang="en-GB" sz="1200" b="0" kern="1200" dirty="0" err="1">
+                <a:solidFill>
+                  <a:schemeClr val="tx1"/>
+                </a:solidFill>
+                <a:effectLst/>
+                <a:latin typeface="+mn-lt"/>
+                <a:ea typeface="+mn-ea"/>
+                <a:cs typeface="+mn-cs"/>
+              </a:rPr>
+              <a:t>arxiv</a:t>
+            </a:r>
+            <a:endParaRPr lang="en-GB" sz="1200" b="0" kern="1200" dirty="0">
+              <a:solidFill>
+                <a:schemeClr val="tx1"/>
+              </a:solidFill>
+              <a:effectLst/>
+              <a:latin typeface="+mn-lt"/>
+              <a:ea typeface="+mn-ea"/>
+              <a:cs typeface="+mn-cs"/>
+            </a:endParaRPr>
+          </a:p>
+          <a:p>
+            <a:r>
+              <a:rPr lang="en-GB" sz="1200" b="0" kern="1200" dirty="0">
+                <a:solidFill>
+                  <a:schemeClr val="tx1"/>
+                </a:solidFill>
+                <a:effectLst/>
+                <a:latin typeface="+mn-lt"/>
+                <a:ea typeface="+mn-ea"/>
+                <a:cs typeface="+mn-cs"/>
+              </a:rPr>
+              <a:t>•   v1.5 </a:t>
+            </a:r>
+            <a:r>
+              <a:rPr lang="en-GB" sz="1200" b="0" kern="1200" dirty="0" err="1">
+                <a:solidFill>
+                  <a:schemeClr val="tx1"/>
+                </a:solidFill>
+                <a:effectLst/>
+                <a:latin typeface="+mn-lt"/>
+                <a:ea typeface="+mn-ea"/>
+                <a:cs typeface="+mn-cs"/>
+              </a:rPr>
+              <a:t>bringt</a:t>
+            </a:r>
+            <a:r>
+              <a:rPr lang="en-GB" sz="1200" b="0" kern="1200" dirty="0">
+                <a:solidFill>
+                  <a:schemeClr val="tx1"/>
+                </a:solidFill>
+                <a:effectLst/>
+                <a:latin typeface="+mn-lt"/>
+                <a:ea typeface="+mn-ea"/>
+                <a:cs typeface="+mn-cs"/>
+              </a:rPr>
+              <a:t> </a:t>
+            </a:r>
+            <a:r>
+              <a:rPr lang="en-GB" sz="1200" b="0" kern="1200" dirty="0" err="1">
+                <a:solidFill>
+                  <a:schemeClr val="tx1"/>
+                </a:solidFill>
+                <a:effectLst/>
+                <a:latin typeface="+mn-lt"/>
+                <a:ea typeface="+mn-ea"/>
+                <a:cs typeface="+mn-cs"/>
+              </a:rPr>
+              <a:t>verbesserte</a:t>
+            </a:r>
+            <a:r>
+              <a:rPr lang="en-GB" sz="1200" b="0" kern="1200" dirty="0">
+                <a:solidFill>
+                  <a:schemeClr val="tx1"/>
+                </a:solidFill>
+                <a:effectLst/>
+                <a:latin typeface="+mn-lt"/>
+                <a:ea typeface="+mn-ea"/>
+                <a:cs typeface="+mn-cs"/>
+              </a:rPr>
+              <a:t> Similarity-Score-</a:t>
+            </a:r>
+            <a:r>
+              <a:rPr lang="en-GB" sz="1200" b="0" kern="1200" dirty="0" err="1">
+                <a:solidFill>
+                  <a:schemeClr val="tx1"/>
+                </a:solidFill>
+                <a:effectLst/>
+                <a:latin typeface="+mn-lt"/>
+                <a:ea typeface="+mn-ea"/>
+                <a:cs typeface="+mn-cs"/>
+              </a:rPr>
+              <a:t>Verteilung</a:t>
+            </a:r>
+            <a:r>
+              <a:rPr lang="en-GB" sz="1200" b="0" kern="1200" dirty="0">
+                <a:solidFill>
+                  <a:schemeClr val="tx1"/>
+                </a:solidFill>
+                <a:effectLst/>
+                <a:latin typeface="+mn-lt"/>
+                <a:ea typeface="+mn-ea"/>
+                <a:cs typeface="+mn-cs"/>
+              </a:rPr>
+              <a:t> und </a:t>
+            </a:r>
+            <a:r>
+              <a:rPr lang="en-GB" sz="1200" b="0" kern="1200" dirty="0" err="1">
+                <a:solidFill>
+                  <a:schemeClr val="tx1"/>
+                </a:solidFill>
+                <a:effectLst/>
+                <a:latin typeface="+mn-lt"/>
+                <a:ea typeface="+mn-ea"/>
+                <a:cs typeface="+mn-cs"/>
+              </a:rPr>
+              <a:t>stärkere</a:t>
+            </a:r>
+            <a:r>
+              <a:rPr lang="en-GB" sz="1200" b="0" kern="1200" dirty="0">
+                <a:solidFill>
+                  <a:schemeClr val="tx1"/>
+                </a:solidFill>
+                <a:effectLst/>
+                <a:latin typeface="+mn-lt"/>
+                <a:ea typeface="+mn-ea"/>
+                <a:cs typeface="+mn-cs"/>
+              </a:rPr>
+              <a:t> Retrieval-Performance </a:t>
+            </a:r>
+            <a:r>
+              <a:rPr lang="en-GB" sz="1200" b="0" kern="1200" dirty="0" err="1">
+                <a:solidFill>
+                  <a:schemeClr val="tx1"/>
+                </a:solidFill>
+                <a:effectLst/>
+                <a:latin typeface="+mn-lt"/>
+                <a:ea typeface="+mn-ea"/>
+                <a:cs typeface="+mn-cs"/>
+              </a:rPr>
+              <a:t>gegenüber</a:t>
+            </a:r>
+            <a:r>
+              <a:rPr lang="en-GB" sz="1200" b="0" kern="1200" dirty="0">
+                <a:solidFill>
+                  <a:schemeClr val="tx1"/>
+                </a:solidFill>
+                <a:effectLst/>
+                <a:latin typeface="+mn-lt"/>
+                <a:ea typeface="+mn-ea"/>
+                <a:cs typeface="+mn-cs"/>
+              </a:rPr>
+              <a:t> </a:t>
+            </a:r>
+            <a:r>
+              <a:rPr lang="en-GB" sz="1200" b="0" kern="1200" dirty="0" err="1">
+                <a:solidFill>
+                  <a:schemeClr val="tx1"/>
+                </a:solidFill>
+                <a:effectLst/>
+                <a:latin typeface="+mn-lt"/>
+                <a:ea typeface="+mn-ea"/>
+                <a:cs typeface="+mn-cs"/>
+              </a:rPr>
+              <a:t>dem</a:t>
+            </a:r>
+            <a:r>
+              <a:rPr lang="en-GB" sz="1200" b="0" kern="1200" dirty="0">
+                <a:solidFill>
+                  <a:schemeClr val="tx1"/>
+                </a:solidFill>
+                <a:effectLst/>
+                <a:latin typeface="+mn-lt"/>
+                <a:ea typeface="+mn-ea"/>
+                <a:cs typeface="+mn-cs"/>
+              </a:rPr>
+              <a:t> </a:t>
+            </a:r>
+            <a:r>
+              <a:rPr lang="en-GB" sz="1200" b="0" kern="1200" dirty="0" err="1">
+                <a:solidFill>
+                  <a:schemeClr val="tx1"/>
+                </a:solidFill>
+                <a:effectLst/>
+                <a:latin typeface="+mn-lt"/>
+                <a:ea typeface="+mn-ea"/>
+                <a:cs typeface="+mn-cs"/>
+              </a:rPr>
+              <a:t>Vorgänger</a:t>
+            </a:r>
+            <a:r>
+              <a:rPr lang="en-GB" sz="1200" b="0" kern="1200" dirty="0">
+                <a:solidFill>
+                  <a:schemeClr val="tx1"/>
+                </a:solidFill>
+                <a:effectLst/>
+                <a:latin typeface="+mn-lt"/>
+                <a:ea typeface="+mn-ea"/>
+                <a:cs typeface="+mn-cs"/>
+              </a:rPr>
+              <a:t> </a:t>
+            </a:r>
+            <a:r>
+              <a:rPr lang="en-GB" sz="1200" b="0" kern="1200" dirty="0" err="1">
+                <a:solidFill>
+                  <a:schemeClr val="tx1"/>
+                </a:solidFill>
+                <a:effectLst/>
+                <a:latin typeface="+mn-lt"/>
+                <a:ea typeface="+mn-ea"/>
+                <a:cs typeface="+mn-cs"/>
+              </a:rPr>
+              <a:t>OpenRouter</a:t>
+            </a:r>
+            <a:endParaRPr lang="en-GB" sz="1200" b="0" kern="1200" dirty="0">
+              <a:solidFill>
+                <a:schemeClr val="tx1"/>
+              </a:solidFill>
+              <a:effectLst/>
+              <a:latin typeface="+mn-lt"/>
+              <a:ea typeface="+mn-ea"/>
+              <a:cs typeface="+mn-cs"/>
+            </a:endParaRPr>
+          </a:p>
+          <a:p>
+            <a:r>
+              <a:rPr lang="en-GB" sz="1200" b="0" kern="1200" dirty="0">
+                <a:solidFill>
+                  <a:schemeClr val="tx1"/>
+                </a:solidFill>
+                <a:effectLst/>
+                <a:latin typeface="+mn-lt"/>
+                <a:ea typeface="+mn-ea"/>
+                <a:cs typeface="+mn-cs"/>
+              </a:rPr>
+              <a:t>•   </a:t>
+            </a:r>
+            <a:r>
+              <a:rPr lang="en-GB" sz="1200" b="0" kern="1200" dirty="0" err="1">
+                <a:solidFill>
+                  <a:schemeClr val="tx1"/>
+                </a:solidFill>
+                <a:effectLst/>
+                <a:latin typeface="+mn-lt"/>
+                <a:ea typeface="+mn-ea"/>
+                <a:cs typeface="+mn-cs"/>
+              </a:rPr>
+              <a:t>Einsatzgebiete</a:t>
+            </a:r>
+            <a:r>
+              <a:rPr lang="en-GB" sz="1200" b="0" kern="1200" dirty="0">
+                <a:solidFill>
+                  <a:schemeClr val="tx1"/>
+                </a:solidFill>
+                <a:effectLst/>
+                <a:latin typeface="+mn-lt"/>
+                <a:ea typeface="+mn-ea"/>
+                <a:cs typeface="+mn-cs"/>
+              </a:rPr>
+              <a:t>: Retrieval, </a:t>
+            </a:r>
+            <a:r>
+              <a:rPr lang="en-GB" sz="1200" b="0" kern="1200" dirty="0" err="1">
+                <a:solidFill>
+                  <a:schemeClr val="tx1"/>
+                </a:solidFill>
+                <a:effectLst/>
+                <a:latin typeface="+mn-lt"/>
+                <a:ea typeface="+mn-ea"/>
+                <a:cs typeface="+mn-cs"/>
+              </a:rPr>
+              <a:t>Klassifikation</a:t>
+            </a:r>
+            <a:r>
+              <a:rPr lang="en-GB" sz="1200" b="0" kern="1200" dirty="0">
+                <a:solidFill>
+                  <a:schemeClr val="tx1"/>
+                </a:solidFill>
+                <a:effectLst/>
+                <a:latin typeface="+mn-lt"/>
+                <a:ea typeface="+mn-ea"/>
+                <a:cs typeface="+mn-cs"/>
+              </a:rPr>
+              <a:t>, Clustering, Semantic Search Together AI</a:t>
+            </a:r>
+          </a:p>
+          <a:p>
+            <a:r>
+              <a:rPr lang="en-GB" sz="1200" b="0" kern="1200" dirty="0">
+                <a:solidFill>
+                  <a:schemeClr val="tx1"/>
+                </a:solidFill>
+                <a:effectLst/>
+                <a:latin typeface="+mn-lt"/>
+                <a:ea typeface="+mn-ea"/>
+                <a:cs typeface="+mn-cs"/>
+              </a:rPr>
+              <a:t>•   War </a:t>
+            </a:r>
+            <a:r>
+              <a:rPr lang="en-GB" sz="1200" b="0" kern="1200" dirty="0" err="1">
+                <a:solidFill>
+                  <a:schemeClr val="tx1"/>
+                </a:solidFill>
+                <a:effectLst/>
+                <a:latin typeface="+mn-lt"/>
+                <a:ea typeface="+mn-ea"/>
+                <a:cs typeface="+mn-cs"/>
+              </a:rPr>
+              <a:t>zeitweise</a:t>
+            </a:r>
+            <a:r>
+              <a:rPr lang="en-GB" sz="1200" b="0" kern="1200" dirty="0">
+                <a:solidFill>
+                  <a:schemeClr val="tx1"/>
+                </a:solidFill>
+                <a:effectLst/>
+                <a:latin typeface="+mn-lt"/>
+                <a:ea typeface="+mn-ea"/>
+                <a:cs typeface="+mn-cs"/>
+              </a:rPr>
+              <a:t> State-of-the-Art auf </a:t>
+            </a:r>
+            <a:r>
+              <a:rPr lang="en-GB" sz="1200" b="0" kern="1200" dirty="0" err="1">
+                <a:solidFill>
+                  <a:schemeClr val="tx1"/>
+                </a:solidFill>
+                <a:effectLst/>
+                <a:latin typeface="+mn-lt"/>
+                <a:ea typeface="+mn-ea"/>
+                <a:cs typeface="+mn-cs"/>
+              </a:rPr>
+              <a:t>dem</a:t>
+            </a:r>
+            <a:r>
+              <a:rPr lang="en-GB" sz="1200" b="0" kern="1200" dirty="0">
+                <a:solidFill>
+                  <a:schemeClr val="tx1"/>
+                </a:solidFill>
+                <a:effectLst/>
+                <a:latin typeface="+mn-lt"/>
+                <a:ea typeface="+mn-ea"/>
+                <a:cs typeface="+mn-cs"/>
+              </a:rPr>
+              <a:t> MTEB Leaderboard (Platz 1, Juli 2024) </a:t>
+            </a:r>
+            <a:r>
+              <a:rPr lang="en-GB" sz="1200" b="0" kern="1200" dirty="0" err="1">
+                <a:solidFill>
+                  <a:schemeClr val="tx1"/>
+                </a:solidFill>
+                <a:effectLst/>
+                <a:latin typeface="+mn-lt"/>
+                <a:ea typeface="+mn-ea"/>
+                <a:cs typeface="+mn-cs"/>
+              </a:rPr>
+              <a:t>arxiv</a:t>
+            </a:r>
+            <a:endParaRPr lang="en-GB" sz="1200" b="0" kern="1200" dirty="0">
+              <a:solidFill>
+                <a:schemeClr val="tx1"/>
+              </a:solidFill>
+              <a:effectLst/>
+              <a:latin typeface="+mn-lt"/>
+              <a:ea typeface="+mn-ea"/>
+              <a:cs typeface="+mn-cs"/>
+            </a:endParaRPr>
+          </a:p>
+          <a:p>
+            <a:endParaRPr lang="en-GB" sz="1200" b="0" kern="1200" dirty="0">
+              <a:solidFill>
+                <a:schemeClr val="tx1"/>
+              </a:solidFill>
+              <a:effectLst/>
+              <a:latin typeface="+mn-lt"/>
+              <a:ea typeface="+mn-ea"/>
+              <a:cs typeface="+mn-cs"/>
+            </a:endParaRPr>
+          </a:p>
+          <a:p>
+            <a:r>
+              <a:rPr lang="en-GB" sz="1200" b="0" kern="1200" dirty="0">
+                <a:solidFill>
+                  <a:schemeClr val="tx1"/>
+                </a:solidFill>
+                <a:effectLst/>
+                <a:latin typeface="+mn-lt"/>
+                <a:ea typeface="+mn-ea"/>
+                <a:cs typeface="+mn-cs"/>
+              </a:rPr>
+              <a:t>Für </a:t>
+            </a:r>
+            <a:r>
+              <a:rPr lang="en-GB" sz="1200" b="0" kern="1200" dirty="0" err="1">
+                <a:solidFill>
+                  <a:schemeClr val="tx1"/>
+                </a:solidFill>
+                <a:effectLst/>
+                <a:latin typeface="+mn-lt"/>
+                <a:ea typeface="+mn-ea"/>
+                <a:cs typeface="+mn-cs"/>
+              </a:rPr>
+              <a:t>diesen</a:t>
+            </a:r>
+            <a:r>
+              <a:rPr lang="en-GB" sz="1200" b="0" kern="1200" dirty="0">
+                <a:solidFill>
+                  <a:schemeClr val="tx1"/>
+                </a:solidFill>
+                <a:effectLst/>
+                <a:latin typeface="+mn-lt"/>
+                <a:ea typeface="+mn-ea"/>
+                <a:cs typeface="+mn-cs"/>
+              </a:rPr>
+              <a:t> Use Case </a:t>
+            </a:r>
+            <a:r>
+              <a:rPr lang="en-GB" sz="1200" b="0" kern="1200" dirty="0" err="1">
+                <a:solidFill>
+                  <a:schemeClr val="tx1"/>
+                </a:solidFill>
+                <a:effectLst/>
+                <a:latin typeface="+mn-lt"/>
+                <a:ea typeface="+mn-ea"/>
+                <a:cs typeface="+mn-cs"/>
+              </a:rPr>
+              <a:t>ist</a:t>
+            </a:r>
+            <a:r>
+              <a:rPr lang="en-GB" sz="1200" b="0" kern="1200" dirty="0">
+                <a:solidFill>
+                  <a:schemeClr val="tx1"/>
+                </a:solidFill>
+                <a:effectLst/>
+                <a:latin typeface="+mn-lt"/>
+                <a:ea typeface="+mn-ea"/>
+                <a:cs typeface="+mn-cs"/>
+              </a:rPr>
+              <a:t> es </a:t>
+            </a:r>
+            <a:r>
+              <a:rPr lang="en-GB" sz="1200" b="0" kern="1200" dirty="0" err="1">
+                <a:solidFill>
+                  <a:schemeClr val="tx1"/>
+                </a:solidFill>
+                <a:effectLst/>
+                <a:latin typeface="+mn-lt"/>
+                <a:ea typeface="+mn-ea"/>
+                <a:cs typeface="+mn-cs"/>
+              </a:rPr>
+              <a:t>eine</a:t>
+            </a:r>
+            <a:r>
+              <a:rPr lang="en-GB" sz="1200" b="0" kern="1200" dirty="0">
+                <a:solidFill>
+                  <a:schemeClr val="tx1"/>
+                </a:solidFill>
+                <a:effectLst/>
+                <a:latin typeface="+mn-lt"/>
+                <a:ea typeface="+mn-ea"/>
+                <a:cs typeface="+mn-cs"/>
+              </a:rPr>
+              <a:t> </a:t>
+            </a:r>
+            <a:r>
+              <a:rPr lang="en-GB" sz="1200" b="0" kern="1200" dirty="0" err="1">
+                <a:solidFill>
+                  <a:schemeClr val="tx1"/>
+                </a:solidFill>
+                <a:effectLst/>
+                <a:latin typeface="+mn-lt"/>
+                <a:ea typeface="+mn-ea"/>
+                <a:cs typeface="+mn-cs"/>
+              </a:rPr>
+              <a:t>solide</a:t>
+            </a:r>
+            <a:r>
+              <a:rPr lang="en-GB" sz="1200" b="0" kern="1200" dirty="0">
+                <a:solidFill>
+                  <a:schemeClr val="tx1"/>
+                </a:solidFill>
+                <a:effectLst/>
+                <a:latin typeface="+mn-lt"/>
+                <a:ea typeface="+mn-ea"/>
+                <a:cs typeface="+mn-cs"/>
+              </a:rPr>
+              <a:t> Wahl: die Embeddings </a:t>
+            </a:r>
+            <a:r>
+              <a:rPr lang="en-GB" sz="1200" b="0" kern="1200" dirty="0" err="1">
+                <a:solidFill>
+                  <a:schemeClr val="tx1"/>
+                </a:solidFill>
+                <a:effectLst/>
+                <a:latin typeface="+mn-lt"/>
+                <a:ea typeface="+mn-ea"/>
+                <a:cs typeface="+mn-cs"/>
+              </a:rPr>
+              <a:t>sind</a:t>
+            </a:r>
+            <a:r>
+              <a:rPr lang="en-GB" sz="1200" b="0" kern="1200" dirty="0">
+                <a:solidFill>
+                  <a:schemeClr val="tx1"/>
+                </a:solidFill>
+                <a:effectLst/>
+                <a:latin typeface="+mn-lt"/>
+                <a:ea typeface="+mn-ea"/>
+                <a:cs typeface="+mn-cs"/>
+              </a:rPr>
+              <a:t> </a:t>
+            </a:r>
+            <a:r>
+              <a:rPr lang="en-GB" sz="1200" b="0" kern="1200" dirty="0" err="1">
+                <a:solidFill>
+                  <a:schemeClr val="tx1"/>
+                </a:solidFill>
+                <a:effectLst/>
+                <a:latin typeface="+mn-lt"/>
+                <a:ea typeface="+mn-ea"/>
+                <a:cs typeface="+mn-cs"/>
+              </a:rPr>
+              <a:t>bereits</a:t>
+            </a:r>
+            <a:r>
+              <a:rPr lang="en-GB" sz="1200" b="0" kern="1200" dirty="0">
+                <a:solidFill>
+                  <a:schemeClr val="tx1"/>
+                </a:solidFill>
+                <a:effectLst/>
+                <a:latin typeface="+mn-lt"/>
+                <a:ea typeface="+mn-ea"/>
+                <a:cs typeface="+mn-cs"/>
+              </a:rPr>
+              <a:t> L2-normalisiert, </a:t>
+            </a:r>
+            <a:r>
+              <a:rPr lang="en-GB" sz="1200" b="0" kern="1200" dirty="0" err="1">
+                <a:solidFill>
+                  <a:schemeClr val="tx1"/>
+                </a:solidFill>
+                <a:effectLst/>
+                <a:latin typeface="+mn-lt"/>
+                <a:ea typeface="+mn-ea"/>
+                <a:cs typeface="+mn-cs"/>
+              </a:rPr>
+              <a:t>daher</a:t>
+            </a:r>
+            <a:r>
+              <a:rPr lang="en-GB" sz="1200" b="0" kern="1200" dirty="0">
+                <a:solidFill>
+                  <a:schemeClr val="tx1"/>
+                </a:solidFill>
+                <a:effectLst/>
+                <a:latin typeface="+mn-lt"/>
+                <a:ea typeface="+mn-ea"/>
+                <a:cs typeface="+mn-cs"/>
+              </a:rPr>
+              <a:t> </a:t>
+            </a:r>
+            <a:r>
+              <a:rPr lang="en-GB" sz="1200" b="0" kern="1200" dirty="0" err="1">
+                <a:solidFill>
+                  <a:schemeClr val="tx1"/>
+                </a:solidFill>
+                <a:effectLst/>
+                <a:latin typeface="+mn-lt"/>
+                <a:ea typeface="+mn-ea"/>
+                <a:cs typeface="+mn-cs"/>
+              </a:rPr>
+              <a:t>kein</a:t>
+            </a:r>
+            <a:r>
+              <a:rPr lang="en-GB" sz="1200" b="0" kern="1200" dirty="0">
+                <a:solidFill>
+                  <a:schemeClr val="tx1"/>
+                </a:solidFill>
+                <a:effectLst/>
+                <a:latin typeface="+mn-lt"/>
+                <a:ea typeface="+mn-ea"/>
+                <a:cs typeface="+mn-cs"/>
+              </a:rPr>
+              <a:t> </a:t>
+            </a:r>
+            <a:r>
+              <a:rPr lang="en-GB" sz="1200" b="0" kern="1200" dirty="0" err="1">
+                <a:solidFill>
+                  <a:schemeClr val="tx1"/>
+                </a:solidFill>
+                <a:effectLst/>
+                <a:latin typeface="+mn-lt"/>
+                <a:ea typeface="+mn-ea"/>
+                <a:cs typeface="+mn-cs"/>
+              </a:rPr>
+              <a:t>StandardScaler</a:t>
+            </a:r>
+            <a:r>
+              <a:rPr lang="en-GB" sz="1200" b="0" kern="1200" dirty="0">
+                <a:solidFill>
+                  <a:schemeClr val="tx1"/>
+                </a:solidFill>
+                <a:effectLst/>
+                <a:latin typeface="+mn-lt"/>
+                <a:ea typeface="+mn-ea"/>
+                <a:cs typeface="+mn-cs"/>
+              </a:rPr>
+              <a:t> </a:t>
+            </a:r>
+            <a:r>
+              <a:rPr lang="en-GB" sz="1200" b="0" kern="1200" dirty="0" err="1">
+                <a:solidFill>
+                  <a:schemeClr val="tx1"/>
+                </a:solidFill>
+                <a:effectLst/>
+                <a:latin typeface="+mn-lt"/>
+                <a:ea typeface="+mn-ea"/>
+                <a:cs typeface="+mn-cs"/>
+              </a:rPr>
+              <a:t>nötig</a:t>
+            </a:r>
+            <a:r>
+              <a:rPr lang="en-GB" sz="1200" b="0" kern="1200" dirty="0">
+                <a:solidFill>
+                  <a:schemeClr val="tx1"/>
+                </a:solidFill>
+                <a:effectLst/>
+                <a:latin typeface="+mn-lt"/>
+                <a:ea typeface="+mn-ea"/>
+                <a:cs typeface="+mn-cs"/>
+              </a:rPr>
+              <a:t> (</a:t>
+            </a:r>
+            <a:r>
+              <a:rPr lang="en-GB" sz="1200" b="0" kern="1200" dirty="0" err="1">
+                <a:solidFill>
+                  <a:schemeClr val="tx1"/>
+                </a:solidFill>
+                <a:effectLst/>
+                <a:latin typeface="+mn-lt"/>
+                <a:ea typeface="+mn-ea"/>
+                <a:cs typeface="+mn-cs"/>
+              </a:rPr>
+              <a:t>wie</a:t>
+            </a:r>
+            <a:r>
+              <a:rPr lang="en-GB" sz="1200" b="0" kern="1200" dirty="0">
+                <a:solidFill>
+                  <a:schemeClr val="tx1"/>
+                </a:solidFill>
+                <a:effectLst/>
+                <a:latin typeface="+mn-lt"/>
+                <a:ea typeface="+mn-ea"/>
+                <a:cs typeface="+mn-cs"/>
+              </a:rPr>
+              <a:t> </a:t>
+            </a:r>
+            <a:r>
+              <a:rPr lang="en-GB" sz="1200" b="0" kern="1200" dirty="0" err="1">
+                <a:solidFill>
+                  <a:schemeClr val="tx1"/>
+                </a:solidFill>
+                <a:effectLst/>
+                <a:latin typeface="+mn-lt"/>
+                <a:ea typeface="+mn-ea"/>
+                <a:cs typeface="+mn-cs"/>
+              </a:rPr>
+              <a:t>im</a:t>
+            </a:r>
+            <a:r>
+              <a:rPr lang="en-GB" sz="1200" b="0" kern="1200" dirty="0">
+                <a:solidFill>
+                  <a:schemeClr val="tx1"/>
+                </a:solidFill>
+                <a:effectLst/>
+                <a:latin typeface="+mn-lt"/>
+                <a:ea typeface="+mn-ea"/>
+                <a:cs typeface="+mn-cs"/>
+              </a:rPr>
+              <a:t> Code </a:t>
+            </a:r>
+            <a:r>
+              <a:rPr lang="en-GB" sz="1200" b="0" kern="1200" dirty="0" err="1">
+                <a:solidFill>
+                  <a:schemeClr val="tx1"/>
+                </a:solidFill>
+                <a:effectLst/>
+                <a:latin typeface="+mn-lt"/>
+                <a:ea typeface="+mn-ea"/>
+                <a:cs typeface="+mn-cs"/>
+              </a:rPr>
+              <a:t>kommentiert</a:t>
+            </a:r>
+            <a:r>
+              <a:rPr lang="en-GB" sz="1200" b="0" kern="1200" dirty="0">
+                <a:solidFill>
+                  <a:schemeClr val="tx1"/>
+                </a:solidFill>
+                <a:effectLst/>
+                <a:latin typeface="+mn-lt"/>
+                <a:ea typeface="+mn-ea"/>
+                <a:cs typeface="+mn-cs"/>
+              </a:rPr>
+              <a:t>), und </a:t>
+            </a:r>
+            <a:r>
+              <a:rPr lang="en-GB" sz="1200" b="0" kern="1200" dirty="0" err="1">
+                <a:solidFill>
+                  <a:schemeClr val="tx1"/>
+                </a:solidFill>
+                <a:effectLst/>
+                <a:latin typeface="+mn-lt"/>
+                <a:ea typeface="+mn-ea"/>
+                <a:cs typeface="+mn-cs"/>
+              </a:rPr>
+              <a:t>gelu-Aktivierung</a:t>
+            </a:r>
+            <a:r>
+              <a:rPr lang="en-GB" sz="1200" b="0" kern="1200" dirty="0">
+                <a:solidFill>
+                  <a:schemeClr val="tx1"/>
+                </a:solidFill>
+                <a:effectLst/>
+                <a:latin typeface="+mn-lt"/>
+                <a:ea typeface="+mn-ea"/>
+                <a:cs typeface="+mn-cs"/>
+              </a:rPr>
+              <a:t> </a:t>
+            </a:r>
+            <a:r>
+              <a:rPr lang="en-GB" sz="1200" b="0" kern="1200" dirty="0" err="1">
+                <a:solidFill>
+                  <a:schemeClr val="tx1"/>
+                </a:solidFill>
+                <a:effectLst/>
+                <a:latin typeface="+mn-lt"/>
+                <a:ea typeface="+mn-ea"/>
+                <a:cs typeface="+mn-cs"/>
+              </a:rPr>
+              <a:t>harmoniert</a:t>
+            </a:r>
+            <a:r>
+              <a:rPr lang="en-GB" sz="1200" b="0" kern="1200" dirty="0">
+                <a:solidFill>
+                  <a:schemeClr val="tx1"/>
+                </a:solidFill>
+                <a:effectLst/>
+                <a:latin typeface="+mn-lt"/>
+                <a:ea typeface="+mn-ea"/>
+                <a:cs typeface="+mn-cs"/>
+              </a:rPr>
+              <a:t> gut </a:t>
+            </a:r>
+            <a:r>
+              <a:rPr lang="en-GB" sz="1200" b="0" kern="1200" dirty="0" err="1">
+                <a:solidFill>
+                  <a:schemeClr val="tx1"/>
+                </a:solidFill>
+                <a:effectLst/>
+                <a:latin typeface="+mn-lt"/>
+                <a:ea typeface="+mn-ea"/>
+                <a:cs typeface="+mn-cs"/>
+              </a:rPr>
+              <a:t>mit</a:t>
+            </a:r>
+            <a:r>
+              <a:rPr lang="en-GB" sz="1200" b="0" kern="1200" dirty="0">
+                <a:solidFill>
+                  <a:schemeClr val="tx1"/>
+                </a:solidFill>
+                <a:effectLst/>
+                <a:latin typeface="+mn-lt"/>
+                <a:ea typeface="+mn-ea"/>
+                <a:cs typeface="+mn-cs"/>
+              </a:rPr>
+              <a:t> SBERT-</a:t>
+            </a:r>
+            <a:r>
+              <a:rPr lang="en-GB" sz="1200" b="0" kern="1200" dirty="0" err="1">
+                <a:solidFill>
+                  <a:schemeClr val="tx1"/>
+                </a:solidFill>
+                <a:effectLst/>
+                <a:latin typeface="+mn-lt"/>
+                <a:ea typeface="+mn-ea"/>
+                <a:cs typeface="+mn-cs"/>
+              </a:rPr>
+              <a:t>artigen</a:t>
+            </a:r>
+            <a:r>
+              <a:rPr lang="en-GB" sz="1200" b="0" kern="1200" dirty="0">
+                <a:solidFill>
+                  <a:schemeClr val="tx1"/>
+                </a:solidFill>
+                <a:effectLst/>
+                <a:latin typeface="+mn-lt"/>
+                <a:ea typeface="+mn-ea"/>
+                <a:cs typeface="+mn-cs"/>
+              </a:rPr>
+              <a:t> Embeddings</a:t>
+            </a:r>
           </a:p>
         </p:txBody>
       </p:sp>
@@ -752,7 +1757,7 @@
           <a:p>
             <a:fld id="{6F406B0D-CDB9-7342-BFE1-3BBA81393C61}" type="slidenum">
               <a:rPr lang="de-CH" smtClean="0"/>
-              <a:t>6</a:t>
+              <a:t>4</a:t>
             </a:fld>
             <a:endParaRPr lang="de-CH"/>
           </a:p>
@@ -761,7 +1766,7 @@
     </p:spTree>
     <p:extLst>
       <p:ext uri="{BB962C8B-B14F-4D97-AF65-F5344CB8AC3E}">
-        <p14:creationId xmlns:p14="http://schemas.microsoft.com/office/powerpoint/2010/main" val="2607970860"/>
+        <p14:creationId xmlns:p14="http://schemas.microsoft.com/office/powerpoint/2010/main" val="849519204"/>
       </p:ext>
     </p:extLst>
   </p:cSld>
@@ -815,143 +1820,6 @@
           <a:bodyPr/>
           <a:lstStyle/>
           <a:p>
-            <a:r>
-              <a:rPr lang="de-CH" dirty="0" err="1"/>
-              <a:t>Xgboost</a:t>
-            </a:r>
-            <a:r>
-              <a:rPr lang="de-CH" dirty="0"/>
-              <a:t> fast überall am besten</a:t>
-            </a:r>
-          </a:p>
-          <a:p>
-            <a:r>
-              <a:rPr lang="de-CH" sz="1200" kern="1200" dirty="0" err="1">
-                <a:solidFill>
-                  <a:schemeClr val="tx1"/>
-                </a:solidFill>
-                <a:latin typeface="+mn-lt"/>
-                <a:ea typeface="+mn-ea"/>
-                <a:cs typeface="+mn-cs"/>
-              </a:rPr>
-              <a:t>Kindle_Store</a:t>
-            </a:r>
-            <a:r>
-              <a:rPr lang="de-CH" sz="1200" kern="1200" dirty="0">
-                <a:solidFill>
-                  <a:schemeClr val="tx1"/>
-                </a:solidFill>
-                <a:latin typeface="+mn-lt"/>
-                <a:ea typeface="+mn-ea"/>
-                <a:cs typeface="+mn-cs"/>
-              </a:rPr>
-              <a:t> für FCNN </a:t>
-            </a:r>
-            <a:r>
-              <a:rPr lang="de-CH" sz="1200" kern="1200" dirty="0" err="1">
-                <a:solidFill>
-                  <a:schemeClr val="tx1"/>
-                </a:solidFill>
-                <a:latin typeface="+mn-lt"/>
-                <a:ea typeface="+mn-ea"/>
-                <a:cs typeface="+mn-cs"/>
-              </a:rPr>
-              <a:t>umgewöhnlich</a:t>
-            </a:r>
-            <a:r>
-              <a:rPr lang="de-CH" sz="1200" kern="1200" dirty="0">
-                <a:solidFill>
-                  <a:schemeClr val="tx1"/>
-                </a:solidFill>
-                <a:latin typeface="+mn-lt"/>
-                <a:ea typeface="+mn-ea"/>
-                <a:cs typeface="+mn-cs"/>
-              </a:rPr>
-              <a:t> einfach</a:t>
-            </a:r>
-          </a:p>
-          <a:p>
-            <a:pPr marL="0" marR="0" lvl="0" indent="0" algn="l" defTabSz="914400" rtl="0" eaLnBrk="1" fontAlgn="auto" latinLnBrk="0" hangingPunct="1">
-              <a:lnSpc>
-                <a:spcPct val="100000"/>
-              </a:lnSpc>
-              <a:spcBef>
-                <a:spcPts val="0"/>
-              </a:spcBef>
-              <a:spcAft>
-                <a:spcPts val="0"/>
-              </a:spcAft>
-              <a:buClrTx/>
-              <a:buSzTx/>
-              <a:buFontTx/>
-              <a:buNone/>
-              <a:tabLst/>
-              <a:defRPr/>
-            </a:pPr>
-            <a:r>
-              <a:rPr lang="en-CH" sz="1200" kern="1200" dirty="0">
-                <a:solidFill>
-                  <a:schemeClr val="tx1"/>
-                </a:solidFill>
-                <a:latin typeface="+mn-lt"/>
-                <a:ea typeface="+mn-ea"/>
-                <a:cs typeface="+mn-cs"/>
-              </a:rPr>
-              <a:t>Sports &amp; Outdoors ist auffällig </a:t>
-            </a:r>
-            <a:r>
-              <a:rPr lang="en-CH" sz="1200" kern="1200" dirty="0">
-                <a:solidFill>
-                  <a:schemeClr val="tx1"/>
-                </a:solidFill>
-                <a:latin typeface="+mn-lt"/>
-                <a:ea typeface="+mn-ea"/>
-                <a:cs typeface="+mn-cs"/>
-                <a:sym typeface="Wingdings" pitchFamily="2" charset="2"/>
-              </a:rPr>
-              <a:t> xgboost 5% besser als FCNN</a:t>
-            </a:r>
-          </a:p>
-          <a:p>
-            <a:pPr marL="0" marR="0" lvl="0" indent="0" algn="l" defTabSz="914400" rtl="0" eaLnBrk="1" fontAlgn="auto" latinLnBrk="0" hangingPunct="1">
-              <a:lnSpc>
-                <a:spcPct val="100000"/>
-              </a:lnSpc>
-              <a:spcBef>
-                <a:spcPts val="0"/>
-              </a:spcBef>
-              <a:spcAft>
-                <a:spcPts val="0"/>
-              </a:spcAft>
-              <a:buClrTx/>
-              <a:buSzTx/>
-              <a:buFontTx/>
-              <a:buNone/>
-              <a:tabLst/>
-              <a:defRPr/>
-            </a:pPr>
-            <a:r>
-              <a:rPr lang="en-CH" sz="1200" kern="1200" dirty="0">
-                <a:solidFill>
-                  <a:schemeClr val="tx1"/>
-                </a:solidFill>
-                <a:latin typeface="+mn-lt"/>
-                <a:ea typeface="+mn-ea"/>
-                <a:cs typeface="+mn-cs"/>
-                <a:sym typeface="Wingdings" pitchFamily="2" charset="2"/>
-              </a:rPr>
-              <a:t>Movies_and_TV für alle schwierig</a:t>
-            </a:r>
-            <a:endParaRPr lang="en-CH" sz="1200" kern="1200" dirty="0">
-              <a:solidFill>
-                <a:schemeClr val="tx1"/>
-              </a:solidFill>
-              <a:latin typeface="+mn-lt"/>
-              <a:ea typeface="+mn-ea"/>
-              <a:cs typeface="+mn-cs"/>
-            </a:endParaRPr>
-          </a:p>
-          <a:p>
             <a:endParaRPr lang="de-CH" dirty="0"/>
           </a:p>
         </p:txBody>
@@ -973,7 +1841,7 @@
           <a:p>
             <a:fld id="{6F406B0D-CDB9-7342-BFE1-3BBA81393C61}" type="slidenum">
               <a:rPr lang="de-CH" smtClean="0"/>
-              <a:t>7</a:t>
+              <a:t>6</a:t>
             </a:fld>
             <a:endParaRPr lang="de-CH"/>
           </a:p>
@@ -982,7 +1850,7 @@
     </p:spTree>
     <p:extLst>
       <p:ext uri="{BB962C8B-B14F-4D97-AF65-F5344CB8AC3E}">
-        <p14:creationId xmlns:p14="http://schemas.microsoft.com/office/powerpoint/2010/main" val="3248071174"/>
+        <p14:creationId xmlns:p14="http://schemas.microsoft.com/office/powerpoint/2010/main" val="2607970860"/>
       </p:ext>
     </p:extLst>
   </p:cSld>
@@ -1036,6 +1904,143 @@
           <a:bodyPr/>
           <a:lstStyle/>
           <a:p>
+            <a:r>
+              <a:rPr lang="de-CH" dirty="0" err="1"/>
+              <a:t>Xgboost</a:t>
+            </a:r>
+            <a:r>
+              <a:rPr lang="de-CH" dirty="0"/>
+              <a:t> fast überall am besten</a:t>
+            </a:r>
+          </a:p>
+          <a:p>
+            <a:r>
+              <a:rPr lang="de-CH" sz="1200" kern="1200" dirty="0" err="1">
+                <a:solidFill>
+                  <a:schemeClr val="tx1"/>
+                </a:solidFill>
+                <a:latin typeface="+mn-lt"/>
+                <a:ea typeface="+mn-ea"/>
+                <a:cs typeface="+mn-cs"/>
+              </a:rPr>
+              <a:t>Kindle_Store</a:t>
+            </a:r>
+            <a:r>
+              <a:rPr lang="de-CH" sz="1200" kern="1200" dirty="0">
+                <a:solidFill>
+                  <a:schemeClr val="tx1"/>
+                </a:solidFill>
+                <a:latin typeface="+mn-lt"/>
+                <a:ea typeface="+mn-ea"/>
+                <a:cs typeface="+mn-cs"/>
+              </a:rPr>
+              <a:t> für FCNN </a:t>
+            </a:r>
+            <a:r>
+              <a:rPr lang="de-CH" sz="1200" kern="1200" dirty="0" err="1">
+                <a:solidFill>
+                  <a:schemeClr val="tx1"/>
+                </a:solidFill>
+                <a:latin typeface="+mn-lt"/>
+                <a:ea typeface="+mn-ea"/>
+                <a:cs typeface="+mn-cs"/>
+              </a:rPr>
+              <a:t>umgewöhnlich</a:t>
+            </a:r>
+            <a:r>
+              <a:rPr lang="de-CH" sz="1200" kern="1200" dirty="0">
+                <a:solidFill>
+                  <a:schemeClr val="tx1"/>
+                </a:solidFill>
+                <a:latin typeface="+mn-lt"/>
+                <a:ea typeface="+mn-ea"/>
+                <a:cs typeface="+mn-cs"/>
+              </a:rPr>
+              <a:t> einfach</a:t>
+            </a:r>
+          </a:p>
+          <a:p>
+            <a:pPr marL="0" marR="0" lvl="0" indent="0" algn="l" defTabSz="914400" rtl="0" eaLnBrk="1" fontAlgn="auto" latinLnBrk="0" hangingPunct="1">
+              <a:lnSpc>
+                <a:spcPct val="100000"/>
+              </a:lnSpc>
+              <a:spcBef>
+                <a:spcPts val="0"/>
+              </a:spcBef>
+              <a:spcAft>
+                <a:spcPts val="0"/>
+              </a:spcAft>
+              <a:buClrTx/>
+              <a:buSzTx/>
+              <a:buFontTx/>
+              <a:buNone/>
+              <a:tabLst/>
+              <a:defRPr/>
+            </a:pPr>
+            <a:r>
+              <a:rPr lang="en-CH" sz="1200" kern="1200" dirty="0">
+                <a:solidFill>
+                  <a:schemeClr val="tx1"/>
+                </a:solidFill>
+                <a:latin typeface="+mn-lt"/>
+                <a:ea typeface="+mn-ea"/>
+                <a:cs typeface="+mn-cs"/>
+              </a:rPr>
+              <a:t>Sports &amp; Outdoors ist auffällig </a:t>
+            </a:r>
+            <a:r>
+              <a:rPr lang="en-CH" sz="1200" kern="1200" dirty="0">
+                <a:solidFill>
+                  <a:schemeClr val="tx1"/>
+                </a:solidFill>
+                <a:latin typeface="+mn-lt"/>
+                <a:ea typeface="+mn-ea"/>
+                <a:cs typeface="+mn-cs"/>
+                <a:sym typeface="Wingdings" pitchFamily="2" charset="2"/>
+              </a:rPr>
+              <a:t> xgboost 5% besser als FCNN</a:t>
+            </a:r>
+          </a:p>
+          <a:p>
+            <a:pPr marL="0" marR="0" lvl="0" indent="0" algn="l" defTabSz="914400" rtl="0" eaLnBrk="1" fontAlgn="auto" latinLnBrk="0" hangingPunct="1">
+              <a:lnSpc>
+                <a:spcPct val="100000"/>
+              </a:lnSpc>
+              <a:spcBef>
+                <a:spcPts val="0"/>
+              </a:spcBef>
+              <a:spcAft>
+                <a:spcPts val="0"/>
+              </a:spcAft>
+              <a:buClrTx/>
+              <a:buSzTx/>
+              <a:buFontTx/>
+              <a:buNone/>
+              <a:tabLst/>
+              <a:defRPr/>
+            </a:pPr>
+            <a:r>
+              <a:rPr lang="en-CH" sz="1200" kern="1200" dirty="0">
+                <a:solidFill>
+                  <a:schemeClr val="tx1"/>
+                </a:solidFill>
+                <a:latin typeface="+mn-lt"/>
+                <a:ea typeface="+mn-ea"/>
+                <a:cs typeface="+mn-cs"/>
+                <a:sym typeface="Wingdings" pitchFamily="2" charset="2"/>
+              </a:rPr>
+              <a:t>Movies_and_TV für alle schwierig</a:t>
+            </a:r>
+            <a:endParaRPr lang="en-CH" sz="1200" kern="1200" dirty="0">
+              <a:solidFill>
+                <a:schemeClr val="tx1"/>
+              </a:solidFill>
+              <a:latin typeface="+mn-lt"/>
+              <a:ea typeface="+mn-ea"/>
+              <a:cs typeface="+mn-cs"/>
+            </a:endParaRPr>
+          </a:p>
+          <a:p>
             <a:endParaRPr lang="de-CH" dirty="0"/>
           </a:p>
         </p:txBody>
@@ -1057,7 +2062,7 @@
           <a:p>
             <a:fld id="{6F406B0D-CDB9-7342-BFE1-3BBA81393C61}" type="slidenum">
               <a:rPr lang="de-CH" smtClean="0"/>
-              <a:t>15</a:t>
+              <a:t>7</a:t>
             </a:fld>
             <a:endParaRPr lang="de-CH"/>
           </a:p>
@@ -1066,7 +2071,7 @@
     </p:spTree>
     <p:extLst>
       <p:ext uri="{BB962C8B-B14F-4D97-AF65-F5344CB8AC3E}">
-        <p14:creationId xmlns:p14="http://schemas.microsoft.com/office/powerpoint/2010/main" val="763480941"/>
+        <p14:creationId xmlns:p14="http://schemas.microsoft.com/office/powerpoint/2010/main" val="3248071174"/>
       </p:ext>
     </p:extLst>
   </p:cSld>
@@ -1141,7 +2146,7 @@
           <a:p>
             <a:fld id="{6F406B0D-CDB9-7342-BFE1-3BBA81393C61}" type="slidenum">
               <a:rPr lang="de-CH" smtClean="0"/>
-              <a:t>16</a:t>
+              <a:t>14</a:t>
             </a:fld>
             <a:endParaRPr lang="de-CH"/>
           </a:p>
@@ -1150,7 +2155,7 @@
     </p:spTree>
     <p:extLst>
       <p:ext uri="{BB962C8B-B14F-4D97-AF65-F5344CB8AC3E}">
-        <p14:creationId xmlns:p14="http://schemas.microsoft.com/office/powerpoint/2010/main" val="4023533460"/>
+        <p14:creationId xmlns:p14="http://schemas.microsoft.com/office/powerpoint/2010/main" val="763480941"/>
       </p:ext>
     </p:extLst>
   </p:cSld>
@@ -1225,7 +2230,91 @@
           <a:p>
             <a:fld id="{6F406B0D-CDB9-7342-BFE1-3BBA81393C61}" type="slidenum">
               <a:rPr lang="de-CH" smtClean="0"/>
-              <a:t>21</a:t>
+              <a:t>15</a:t>
+            </a:fld>
+            <a:endParaRPr lang="de-CH"/>
+          </a:p>
+        </p:txBody>
+      </p:sp>
+    </p:spTree>
+    <p:extLst>
+      <p:ext uri="{BB962C8B-B14F-4D97-AF65-F5344CB8AC3E}">
+        <p14:creationId xmlns:p14="http://schemas.microsoft.com/office/powerpoint/2010/main" val="4023533460"/>
+      </p:ext>
+    </p:extLst>
+  </p:cSld>
+  <p:clrMapOvr>
+    <a:masterClrMapping/>
+  </p:clrMapOvr>
+</p:notes>
+</file>
+
+<file path=ppt/notesSlides/notesSlide8.xml><?xml version="1.0" encoding="utf-8"?>
+<p:notes xmlns:a="http://schemas.openxmlformats.org/drawingml/2006/main" xmlns:r="http://schemas.openxmlformats.org/officeDocument/2006/relationships" xmlns:p="http://schemas.openxmlformats.org/presentationml/2006/main">
+  <p:cSld>
+    <p:spTree>
+      <p:nvGrpSpPr>
+        <p:cNvPr id="1" name=""/>
+        <p:cNvGrpSpPr/>
+        <p:nvPr/>
+      </p:nvGrpSpPr>
+      <p:grpSpPr>
+        <a:xfrm>
+          <a:off x="0" y="0"/>
+          <a:ext cx="0" cy="0"/>
+          <a:chOff x="0" y="0"/>
+          <a:chExt cx="0" cy="0"/>
+        </a:xfrm>
+      </p:grpSpPr>
+      <p:sp>
+        <p:nvSpPr>
+          <p:cNvPr id="2" name="Slide Image Placeholder 1"/>
+          <p:cNvSpPr>
+            <a:spLocks noGrp="1" noRot="1" noChangeAspect="1"/>
+          </p:cNvSpPr>
+          <p:nvPr>
+            <p:ph type="sldImg"/>
+          </p:nvPr>
+        </p:nvSpPr>
+        <p:spPr/>
+      </p:sp>
+      <p:sp>
+        <p:nvSpPr>
+          <p:cNvPr id="3" name="Notes Placeholder 2"/>
+          <p:cNvSpPr>
+            <a:spLocks noGrp="1"/>
+          </p:cNvSpPr>
+          <p:nvPr>
+            <p:ph type="body" idx="1"/>
+          </p:nvPr>
+        </p:nvSpPr>
+        <p:spPr/>
+        <p:txBody>
+          <a:bodyPr/>
+          <a:lstStyle/>
+          <a:p>
+            <a:endParaRPr lang="de-CH" dirty="0"/>
+          </a:p>
+        </p:txBody>
+      </p:sp>
+      <p:sp>
+        <p:nvSpPr>
+          <p:cNvPr id="4" name="Slide Number Placeholder 3"/>
+          <p:cNvSpPr>
+            <a:spLocks noGrp="1"/>
+          </p:cNvSpPr>
+          <p:nvPr>
+            <p:ph type="sldNum" sz="quarter" idx="5"/>
+          </p:nvPr>
+        </p:nvSpPr>
+        <p:spPr/>
+        <p:txBody>
+          <a:bodyPr/>
+          <a:lstStyle/>
+          <a:p>
+            <a:fld id="{6F406B0D-CDB9-7342-BFE1-3BBA81393C61}" type="slidenum">
+              <a:rPr lang="de-CH" smtClean="0"/>
+              <a:t>20</a:t>
             </a:fld>
             <a:endParaRPr lang="de-CH"/>
           </a:p>
@@ -5059,7 +6148,7 @@
           <p:cNvPr id="2" name="Title 1">
             <a:extLst>
               <a:ext uri="{FF2B5EF4-FFF2-40B4-BE49-F238E27FC236}">
-                <a16:creationId xmlns:a16="http://schemas.microsoft.com/office/drawing/2014/main" id="{83C36689-4936-AD12-781B-A7F6AD2693AE}"/>
+                <a16:creationId xmlns:a16="http://schemas.microsoft.com/office/drawing/2014/main" id="{E5343DC8-6B67-956D-A475-15936391A2CD}"/>
               </a:ext>
             </a:extLst>
           </p:cNvPr>
@@ -5077,7 +6166,7 @@
           <a:p>
             <a:r>
               <a:rPr lang="de-CH" dirty="0"/>
-              <a:t>Schwierigkeitsgrad</a:t>
+              <a:t>Features Engineering</a:t>
             </a:r>
           </a:p>
         </p:txBody>
@@ -5087,7 +6176,7 @@
           <p:cNvPr id="3" name="Content Placeholder 2">
             <a:extLst>
               <a:ext uri="{FF2B5EF4-FFF2-40B4-BE49-F238E27FC236}">
-                <a16:creationId xmlns:a16="http://schemas.microsoft.com/office/drawing/2014/main" id="{7AB590AC-F7F1-4B44-467F-4378CC8400E0}"/>
+                <a16:creationId xmlns:a16="http://schemas.microsoft.com/office/drawing/2014/main" id="{112B0117-29F3-C724-365C-BAA89CAAB485}"/>
               </a:ext>
             </a:extLst>
           </p:cNvPr>
@@ -5101,144 +6190,92 @@
         <p:spPr/>
         <p:txBody>
           <a:bodyPr>
-            <a:normAutofit fontScale="25000" lnSpcReduction="20000"/>
+            <a:normAutofit fontScale="92500" lnSpcReduction="20000"/>
           </a:bodyPr>
           <a:lstStyle/>
           <a:p>
             <a:r>
               <a:rPr lang="de-CH" dirty="0"/>
-              <a:t>count    </a:t>
-            </a:r>
-            <a:r>
-              <a:rPr lang="de-CH" dirty="0" err="1"/>
-              <a:t>pct</a:t>
-            </a:r>
+              <a:t>Textlänge</a:t>
+            </a:r>
+          </a:p>
+          <a:p>
+            <a:pPr lvl="1"/>
+            <a:r>
+              <a:rPr lang="en-CH" dirty="0"/>
+              <a:t>char_len → Anzahl Zeichen</a:t>
+            </a:r>
+          </a:p>
+          <a:p>
+            <a:pPr lvl="1"/>
+            <a:r>
+              <a:rPr lang="en-CH" dirty="0"/>
+              <a:t>word_len → Anzahl Wörter</a:t>
+            </a:r>
+          </a:p>
+          <a:p>
+            <a:r>
+              <a:rPr lang="de-CH" dirty="0"/>
+              <a:t>Satzstruktur</a:t>
+            </a:r>
+          </a:p>
+          <a:p>
+            <a:pPr lvl="1"/>
+            <a:r>
+              <a:rPr lang="en-CH" dirty="0"/>
+              <a:t>sentence_count → Anzahl Sätze im Text</a:t>
+            </a:r>
+          </a:p>
+          <a:p>
+            <a:r>
+              <a:rPr lang="de-CH" dirty="0"/>
+              <a:t>Wortstruktur</a:t>
+            </a:r>
+          </a:p>
+          <a:p>
+            <a:pPr lvl="1"/>
+            <a:r>
+              <a:rPr lang="en-CH" dirty="0"/>
+              <a:t>avg_word_len → durchschnittliche Wortlänge</a:t>
+            </a:r>
+          </a:p>
+          <a:p>
+            <a:r>
+              <a:rPr lang="de-CH" dirty="0"/>
+              <a:t>Satzzeichen</a:t>
+            </a:r>
+          </a:p>
+          <a:p>
+            <a:pPr lvl="1"/>
+            <a:r>
+              <a:rPr lang="en-CH" dirty="0"/>
+              <a:t>exclamation_count → Anzahl „!“</a:t>
+            </a:r>
+          </a:p>
+          <a:p>
+            <a:pPr lvl="1"/>
+            <a:r>
+              <a:rPr lang="en-CH" dirty="0"/>
+              <a:t>question_count → Anzahl „?“</a:t>
+            </a:r>
+          </a:p>
+          <a:p>
+            <a:r>
+              <a:rPr lang="de-CH" dirty="0"/>
+              <a:t>Schreibstil</a:t>
+            </a:r>
+          </a:p>
+          <a:p>
+            <a:pPr lvl="1"/>
+            <a:r>
+              <a:rPr lang="en-CH" dirty="0"/>
+              <a:t>uppercase_ratio → Anteil Großbuchstaben im Text</a:t>
+            </a:r>
+          </a:p>
+          <a:p>
+            <a:pPr lvl="1"/>
             <a:endParaRPr lang="de-CH" dirty="0"/>
           </a:p>
-          <a:p>
-            <a:r>
-              <a:rPr lang="de-CH" dirty="0" err="1"/>
-              <a:t>difficulty</a:t>
-            </a:r>
-            <a:r>
-              <a:rPr lang="de-CH" dirty="0"/>
-              <a:t>              </a:t>
-            </a:r>
-          </a:p>
-          <a:p>
-            <a:r>
-              <a:rPr lang="de-CH" dirty="0"/>
-              <a:t>0            6489  80.2%</a:t>
-            </a:r>
-          </a:p>
-          <a:p>
-            <a:r>
-              <a:rPr lang="de-CH" dirty="0"/>
-              <a:t>1             975  12.1%</a:t>
-            </a:r>
-          </a:p>
-          <a:p>
-            <a:r>
-              <a:rPr lang="de-CH" dirty="0"/>
-              <a:t>2             438   5.4%</a:t>
-            </a:r>
-          </a:p>
-          <a:p>
-            <a:r>
-              <a:rPr lang="de-CH" dirty="0"/>
-              <a:t>3             185   2.3%</a:t>
-            </a:r>
-          </a:p>
-          <a:p>
-            <a:r>
-              <a:rPr lang="de-CH" dirty="0"/>
-              <a:t>Durchschnittliche Schwierigkeit pro Kategorie:</a:t>
-            </a:r>
-          </a:p>
-          <a:p>
-            <a:r>
-              <a:rPr lang="de-CH" dirty="0"/>
-              <a:t>in </a:t>
-            </a:r>
-            <a:r>
-              <a:rPr lang="de-CH" dirty="0" err="1"/>
-              <a:t>sovieln</a:t>
-            </a:r>
-            <a:r>
-              <a:rPr lang="de-CH" dirty="0"/>
-              <a:t> Modellen pro 3 Modellen falsch</a:t>
-            </a:r>
-          </a:p>
-          <a:p>
-            <a:endParaRPr lang="de-CH" dirty="0"/>
-          </a:p>
-          <a:p>
-            <a:r>
-              <a:rPr lang="de-CH" dirty="0" err="1"/>
-              <a:t>category</a:t>
-            </a:r>
-            <a:endParaRPr lang="de-CH" dirty="0"/>
-          </a:p>
-          <a:p>
-            <a:r>
-              <a:rPr lang="de-CH" dirty="0"/>
-              <a:t>Movies_and_TV_5                 0.350365</a:t>
-            </a:r>
-          </a:p>
-          <a:p>
-            <a:r>
-              <a:rPr lang="de-CH" dirty="0"/>
-              <a:t>Sports_and_Outdoors_5           0.330346</a:t>
-            </a:r>
-          </a:p>
-          <a:p>
-            <a:r>
-              <a:rPr lang="de-CH" dirty="0"/>
-              <a:t>Pet_Supplies_5                  0.317673</a:t>
-            </a:r>
-          </a:p>
-          <a:p>
-            <a:r>
-              <a:rPr lang="de-CH" dirty="0"/>
-              <a:t>Books_5                         0.313569</a:t>
-            </a:r>
-          </a:p>
-          <a:p>
-            <a:r>
-              <a:rPr lang="de-CH" dirty="0"/>
-              <a:t>Toys_and_Games_5                0.289032</a:t>
-            </a:r>
-          </a:p>
-          <a:p>
-            <a:r>
-              <a:rPr lang="de-CH" dirty="0"/>
-              <a:t>Kindle_Store_5                  0.285282</a:t>
-            </a:r>
-          </a:p>
-          <a:p>
-            <a:r>
-              <a:rPr lang="de-CH" dirty="0"/>
-              <a:t>Electronics_5                   0.285156</a:t>
-            </a:r>
-          </a:p>
-          <a:p>
-            <a:r>
-              <a:rPr lang="de-CH" dirty="0"/>
-              <a:t>Tools_and_Home_Improvement_5    0.283898</a:t>
-            </a:r>
-          </a:p>
-          <a:p>
-            <a:r>
-              <a:rPr lang="de-CH" dirty="0"/>
-              <a:t>Clothing_Shoes_and_Jewelry_5    0.273063</a:t>
-            </a:r>
-          </a:p>
-          <a:p>
-            <a:r>
-              <a:rPr lang="de-CH" dirty="0"/>
-              <a:t>Home_and_Kitchen_5              0.251889</a:t>
-            </a:r>
-          </a:p>
         </p:txBody>
       </p:sp>
       <p:sp>
@@ -5246,7 +6283,7 @@
           <p:cNvPr id="4" name="Date Placeholder 3">
             <a:extLst>
               <a:ext uri="{FF2B5EF4-FFF2-40B4-BE49-F238E27FC236}">
-                <a16:creationId xmlns:a16="http://schemas.microsoft.com/office/drawing/2014/main" id="{DD426F6E-52C7-152E-70B0-68B9D731F7C8}"/>
+                <a16:creationId xmlns:a16="http://schemas.microsoft.com/office/drawing/2014/main" id="{21A5216F-0FB5-D36B-A374-2D85908BEB23}"/>
               </a:ext>
             </a:extLst>
           </p:cNvPr>
@@ -5275,7 +6312,7 @@
           <p:cNvPr id="5" name="Footer Placeholder 4">
             <a:extLst>
               <a:ext uri="{FF2B5EF4-FFF2-40B4-BE49-F238E27FC236}">
-                <a16:creationId xmlns:a16="http://schemas.microsoft.com/office/drawing/2014/main" id="{7417FB27-E333-EC99-B05A-20C975438CC3}"/>
+                <a16:creationId xmlns:a16="http://schemas.microsoft.com/office/drawing/2014/main" id="{94EE23FD-82A7-138C-BB3D-0FF03138E6A2}"/>
               </a:ext>
             </a:extLst>
           </p:cNvPr>
@@ -5304,7 +6341,7 @@
           <p:cNvPr id="6" name="Slide Number Placeholder 5">
             <a:extLst>
               <a:ext uri="{FF2B5EF4-FFF2-40B4-BE49-F238E27FC236}">
-                <a16:creationId xmlns:a16="http://schemas.microsoft.com/office/drawing/2014/main" id="{80D9DB74-E0F1-A817-63A6-DE14C1B4BACD}"/>
+                <a16:creationId xmlns:a16="http://schemas.microsoft.com/office/drawing/2014/main" id="{41E16A25-923F-A463-0205-74591BAF311C}"/>
               </a:ext>
             </a:extLst>
           </p:cNvPr>
@@ -5331,7 +6368,7 @@
     </p:spTree>
     <p:extLst>
       <p:ext uri="{BB962C8B-B14F-4D97-AF65-F5344CB8AC3E}">
-        <p14:creationId xmlns:p14="http://schemas.microsoft.com/office/powerpoint/2010/main" val="4120881710"/>
+        <p14:creationId xmlns:p14="http://schemas.microsoft.com/office/powerpoint/2010/main" val="3326337657"/>
       </p:ext>
     </p:extLst>
   </p:cSld>
@@ -5363,7 +6400,7 @@
           <p:cNvPr id="2" name="Title 1">
             <a:extLst>
               <a:ext uri="{FF2B5EF4-FFF2-40B4-BE49-F238E27FC236}">
-                <a16:creationId xmlns:a16="http://schemas.microsoft.com/office/drawing/2014/main" id="{E5343DC8-6B67-956D-A475-15936391A2CD}"/>
+                <a16:creationId xmlns:a16="http://schemas.microsoft.com/office/drawing/2014/main" id="{7EBD88F3-E0C7-ABCA-B9C9-30DB8AAE601B}"/>
               </a:ext>
             </a:extLst>
           </p:cNvPr>
@@ -5381,7 +6418,7 @@
           <a:p>
             <a:r>
               <a:rPr lang="de-CH" dirty="0"/>
-              <a:t>Neue Features</a:t>
+              <a:t>Korrelation Schwierigkeit / Features</a:t>
             </a:r>
           </a:p>
         </p:txBody>
@@ -5391,7 +6428,7 @@
           <p:cNvPr id="3" name="Content Placeholder 2">
             <a:extLst>
               <a:ext uri="{FF2B5EF4-FFF2-40B4-BE49-F238E27FC236}">
-                <a16:creationId xmlns:a16="http://schemas.microsoft.com/office/drawing/2014/main" id="{112B0117-29F3-C724-365C-BAA89CAAB485}"/>
+                <a16:creationId xmlns:a16="http://schemas.microsoft.com/office/drawing/2014/main" id="{864C35EB-F541-D831-6C85-0304F0C6F6DC}"/>
               </a:ext>
             </a:extLst>
           </p:cNvPr>
@@ -5404,92 +6441,108 @@
         </p:nvSpPr>
         <p:spPr/>
         <p:txBody>
-          <a:bodyPr>
-            <a:normAutofit fontScale="92500" lnSpcReduction="20000"/>
-          </a:bodyPr>
-          <a:lstStyle/>
-          <a:p>
+          <a:bodyPr/>
+          <a:lstStyle/>
+          <a:p>
+            <a:pPr marL="0" indent="0">
+              <a:buNone/>
+            </a:pPr>
             <a:r>
               <a:rPr lang="de-CH" dirty="0"/>
-              <a:t>Textlänge</a:t>
-            </a:r>
-          </a:p>
-          <a:p>
-            <a:pPr lvl="1"/>
-            <a:r>
-              <a:rPr lang="en-CH" dirty="0"/>
-              <a:t>char_len → Anzahl Zeichen</a:t>
-            </a:r>
-          </a:p>
-          <a:p>
-            <a:pPr lvl="1"/>
-            <a:r>
-              <a:rPr lang="en-CH" dirty="0"/>
-              <a:t>word_len → Anzahl Wörter</a:t>
-            </a:r>
-          </a:p>
-          <a:p>
+              <a:t>Feature			</a:t>
+            </a:r>
+            <a:r>
+              <a:rPr lang="de-CH" dirty="0" err="1"/>
+              <a:t>mean</a:t>
+            </a:r>
             <a:r>
               <a:rPr lang="de-CH" dirty="0"/>
-              <a:t>Satzstruktur</a:t>
-            </a:r>
-          </a:p>
-          <a:p>
-            <a:pPr lvl="1"/>
-            <a:r>
-              <a:rPr lang="en-CH" dirty="0"/>
-              <a:t>sentence_count → Anzahl Sätze im Text</a:t>
-            </a:r>
-          </a:p>
-          <a:p>
+              <a:t>  	</a:t>
+            </a:r>
+            <a:r>
+              <a:rPr lang="de-CH" dirty="0" err="1"/>
+              <a:t>corr_with_difficulty</a:t>
+            </a:r>
+            <a:endParaRPr lang="de-CH" dirty="0"/>
+          </a:p>
+          <a:p>
+            <a:pPr marL="0" indent="0">
+              <a:buNone/>
+            </a:pPr>
+            <a:r>
+              <a:rPr lang="de-CH" dirty="0" err="1"/>
+              <a:t>uppercase_ratio</a:t>
+            </a:r>
             <a:r>
               <a:rPr lang="de-CH" dirty="0"/>
-              <a:t>Wortstruktur</a:t>
-            </a:r>
-          </a:p>
-          <a:p>
-            <a:pPr lvl="1"/>
-            <a:r>
-              <a:rPr lang="en-CH" dirty="0"/>
-              <a:t>avg_word_len → durchschnittliche Wortlänge</a:t>
-            </a:r>
-          </a:p>
-          <a:p>
-            <a:r>
+              <a:t>      	0.029            0.061</a:t>
+            </a:r>
+            <a:br>
               <a:rPr lang="de-CH" dirty="0"/>
-              <a:t>Satzzeichen</a:t>
-            </a:r>
-          </a:p>
-          <a:p>
-            <a:pPr lvl="1"/>
-            <a:r>
-              <a:rPr lang="en-CH" dirty="0"/>
-              <a:t>exclamation_count → Anzahl „!“</a:t>
-            </a:r>
-          </a:p>
-          <a:p>
-            <a:pPr lvl="1"/>
-            <a:r>
-              <a:rPr lang="en-CH" dirty="0"/>
-              <a:t>question_count → Anzahl „?“</a:t>
-            </a:r>
-          </a:p>
-          <a:p>
+            </a:br>
+            <a:r>
+              <a:rPr lang="de-CH" dirty="0" err="1"/>
+              <a:t>avg_word_len</a:t>
+            </a:r>
             <a:r>
               <a:rPr lang="de-CH" dirty="0"/>
-              <a:t>Schreibstil</a:t>
-            </a:r>
-          </a:p>
-          <a:p>
-            <a:pPr lvl="1"/>
-            <a:r>
-              <a:rPr lang="en-CH" dirty="0"/>
-              <a:t>uppercase_ratio → Anteil Großbuchstaben im Text</a:t>
-            </a:r>
-          </a:p>
-          <a:p>
-            <a:pPr lvl="1"/>
-            <a:endParaRPr lang="de-CH" dirty="0"/>
+              <a:t>         	4.206            -0.003</a:t>
+            </a:r>
+            <a:br>
+              <a:rPr lang="de-CH" dirty="0"/>
+            </a:br>
+            <a:r>
+              <a:rPr lang="de-CH" dirty="0" err="1"/>
+              <a:t>exclamation_count</a:t>
+            </a:r>
+            <a:r>
+              <a:rPr lang="de-CH" dirty="0"/>
+              <a:t>    	0.407            -0.027</a:t>
+            </a:r>
+            <a:br>
+              <a:rPr lang="de-CH" dirty="0"/>
+            </a:br>
+            <a:r>
+              <a:rPr lang="de-CH" dirty="0" err="1"/>
+              <a:t>question_count</a:t>
+            </a:r>
+            <a:r>
+              <a:rPr lang="de-CH" dirty="0"/>
+              <a:t>       	0.060            -0.047</a:t>
+            </a:r>
+            <a:br>
+              <a:rPr lang="de-CH" dirty="0"/>
+            </a:br>
+            <a:r>
+              <a:rPr lang="de-CH" dirty="0" err="1"/>
+              <a:t>sentence_count</a:t>
+            </a:r>
+            <a:r>
+              <a:rPr lang="de-CH" dirty="0"/>
+              <a:t>       	5.603            -0.191</a:t>
+            </a:r>
+            <a:br>
+              <a:rPr lang="de-CH" dirty="0"/>
+            </a:br>
+            <a:r>
+              <a:rPr lang="de-CH" dirty="0" err="1"/>
+              <a:t>char_len</a:t>
+            </a:r>
+            <a:r>
+              <a:rPr lang="de-CH" dirty="0"/>
+              <a:t>           		354.598        -0.205</a:t>
+            </a:r>
+            <a:br>
+              <a:rPr lang="de-CH" dirty="0"/>
+            </a:br>
+            <a:r>
+              <a:rPr lang="de-CH" dirty="0" err="1"/>
+              <a:t>word_len</a:t>
+            </a:r>
+            <a:r>
+              <a:rPr lang="de-CH" dirty="0"/>
+              <a:t>            		68.066          -0.206</a:t>
+            </a:r>
           </a:p>
         </p:txBody>
       </p:sp>
@@ -5498,7 +6551,7 @@
           <p:cNvPr id="4" name="Date Placeholder 3">
             <a:extLst>
               <a:ext uri="{FF2B5EF4-FFF2-40B4-BE49-F238E27FC236}">
-                <a16:creationId xmlns:a16="http://schemas.microsoft.com/office/drawing/2014/main" id="{21A5216F-0FB5-D36B-A374-2D85908BEB23}"/>
+                <a16:creationId xmlns:a16="http://schemas.microsoft.com/office/drawing/2014/main" id="{C0DEEB3E-7BAE-1A92-A291-7728BDC75E8B}"/>
               </a:ext>
             </a:extLst>
           </p:cNvPr>
@@ -5527,7 +6580,7 @@
           <p:cNvPr id="5" name="Footer Placeholder 4">
             <a:extLst>
               <a:ext uri="{FF2B5EF4-FFF2-40B4-BE49-F238E27FC236}">
-                <a16:creationId xmlns:a16="http://schemas.microsoft.com/office/drawing/2014/main" id="{94EE23FD-82A7-138C-BB3D-0FF03138E6A2}"/>
+                <a16:creationId xmlns:a16="http://schemas.microsoft.com/office/drawing/2014/main" id="{9B1E3E48-9BBA-9F97-FCAE-5AB32DE39E08}"/>
               </a:ext>
             </a:extLst>
           </p:cNvPr>
@@ -5556,7 +6609,7 @@
           <p:cNvPr id="6" name="Slide Number Placeholder 5">
             <a:extLst>
               <a:ext uri="{FF2B5EF4-FFF2-40B4-BE49-F238E27FC236}">
-                <a16:creationId xmlns:a16="http://schemas.microsoft.com/office/drawing/2014/main" id="{41E16A25-923F-A463-0205-74591BAF311C}"/>
+                <a16:creationId xmlns:a16="http://schemas.microsoft.com/office/drawing/2014/main" id="{2DB5A815-DB33-5B9D-9352-651643196563}"/>
               </a:ext>
             </a:extLst>
           </p:cNvPr>
@@ -5575,262 +6628,6 @@
             <a:fld id="{221FD296-2B0C-4A4B-AFAC-2E3A842869F0}" type="slidenum">
               <a:rPr lang="en-CH" smtClean="0"/>
               <a:t>12</a:t>
-            </a:fld>
-            <a:endParaRPr lang="en-CH"/>
-          </a:p>
-        </p:txBody>
-      </p:sp>
-    </p:spTree>
-    <p:extLst>
-      <p:ext uri="{BB962C8B-B14F-4D97-AF65-F5344CB8AC3E}">
-        <p14:creationId xmlns:p14="http://schemas.microsoft.com/office/powerpoint/2010/main" val="3326337657"/>
-      </p:ext>
-    </p:extLst>
-  </p:cSld>
-  <p:clrMapOvr>
-    <a:masterClrMapping/>
-  </p:clrMapOvr>
-</p:sld>
-</file>
-
-<file path=ppt/slides/slide13.xml><?xml version="1.0" encoding="utf-8"?>
-<p:sld xmlns:a="http://schemas.openxmlformats.org/drawingml/2006/main" xmlns:r="http://schemas.openxmlformats.org/officeDocument/2006/relationships" xmlns:p="http://schemas.openxmlformats.org/presentationml/2006/main">
-  <p:cSld>
-    <p:spTree>
-      <p:nvGrpSpPr>
-        <p:cNvPr id="1" name=""/>
-        <p:cNvGrpSpPr/>
-        <p:nvPr/>
-      </p:nvGrpSpPr>
-      <p:grpSpPr>
-        <a:xfrm>
-          <a:off x="0" y="0"/>
-          <a:ext cx="0" cy="0"/>
-          <a:chOff x="0" y="0"/>
-          <a:chExt cx="0" cy="0"/>
-        </a:xfrm>
-      </p:grpSpPr>
-      <p:sp>
-        <p:nvSpPr>
-          <p:cNvPr id="2" name="Title 1">
-            <a:extLst>
-              <a:ext uri="{FF2B5EF4-FFF2-40B4-BE49-F238E27FC236}">
-                <a16:creationId xmlns:a16="http://schemas.microsoft.com/office/drawing/2014/main" id="{7EBD88F3-E0C7-ABCA-B9C9-30DB8AAE601B}"/>
-              </a:ext>
-            </a:extLst>
-          </p:cNvPr>
-          <p:cNvSpPr>
-            <a:spLocks noGrp="1"/>
-          </p:cNvSpPr>
-          <p:nvPr>
-            <p:ph type="title"/>
-          </p:nvPr>
-        </p:nvSpPr>
-        <p:spPr/>
-        <p:txBody>
-          <a:bodyPr/>
-          <a:lstStyle/>
-          <a:p>
-            <a:r>
-              <a:rPr lang="de-CH" dirty="0"/>
-              <a:t>Korrelation Schwierigkeit / Features</a:t>
-            </a:r>
-          </a:p>
-        </p:txBody>
-      </p:sp>
-      <p:sp>
-        <p:nvSpPr>
-          <p:cNvPr id="3" name="Content Placeholder 2">
-            <a:extLst>
-              <a:ext uri="{FF2B5EF4-FFF2-40B4-BE49-F238E27FC236}">
-                <a16:creationId xmlns:a16="http://schemas.microsoft.com/office/drawing/2014/main" id="{864C35EB-F541-D831-6C85-0304F0C6F6DC}"/>
-              </a:ext>
-            </a:extLst>
-          </p:cNvPr>
-          <p:cNvSpPr>
-            <a:spLocks noGrp="1"/>
-          </p:cNvSpPr>
-          <p:nvPr>
-            <p:ph idx="1"/>
-          </p:nvPr>
-        </p:nvSpPr>
-        <p:spPr/>
-        <p:txBody>
-          <a:bodyPr/>
-          <a:lstStyle/>
-          <a:p>
-            <a:r>
-              <a:rPr lang="de-CH" dirty="0"/>
-              <a:t>Feature		</a:t>
-            </a:r>
-            <a:r>
-              <a:rPr lang="de-CH" dirty="0" err="1"/>
-              <a:t>mean</a:t>
-            </a:r>
-            <a:r>
-              <a:rPr lang="de-CH" dirty="0"/>
-              <a:t>  		</a:t>
-            </a:r>
-            <a:r>
-              <a:rPr lang="de-CH" dirty="0" err="1"/>
-              <a:t>corr_with_difficulty</a:t>
-            </a:r>
-            <a:endParaRPr lang="de-CH" dirty="0"/>
-          </a:p>
-          <a:p>
-            <a:r>
-              <a:rPr lang="de-CH" dirty="0" err="1"/>
-              <a:t>uppercase_ratio</a:t>
-            </a:r>
-            <a:r>
-              <a:rPr lang="de-CH" dirty="0"/>
-              <a:t>      0.029              0.061</a:t>
-            </a:r>
-          </a:p>
-          <a:p>
-            <a:r>
-              <a:rPr lang="de-CH" dirty="0" err="1"/>
-              <a:t>avg_word_len</a:t>
-            </a:r>
-            <a:r>
-              <a:rPr lang="de-CH" dirty="0"/>
-              <a:t>         4.206            -0.003</a:t>
-            </a:r>
-          </a:p>
-          <a:p>
-            <a:r>
-              <a:rPr lang="de-CH" dirty="0" err="1"/>
-              <a:t>exclamation_count</a:t>
-            </a:r>
-            <a:r>
-              <a:rPr lang="de-CH" dirty="0"/>
-              <a:t>    0.407             -0.027</a:t>
-            </a:r>
-          </a:p>
-          <a:p>
-            <a:r>
-              <a:rPr lang="de-CH" dirty="0" err="1"/>
-              <a:t>question_count</a:t>
-            </a:r>
-            <a:r>
-              <a:rPr lang="de-CH" dirty="0"/>
-              <a:t>       0.060             -0.047</a:t>
-            </a:r>
-          </a:p>
-          <a:p>
-            <a:r>
-              <a:rPr lang="de-CH" dirty="0" err="1"/>
-              <a:t>sentence_count</a:t>
-            </a:r>
-            <a:r>
-              <a:rPr lang="de-CH" dirty="0"/>
-              <a:t>       5.603             -0.191</a:t>
-            </a:r>
-          </a:p>
-          <a:p>
-            <a:r>
-              <a:rPr lang="de-CH" dirty="0" err="1"/>
-              <a:t>char_len</a:t>
-            </a:r>
-            <a:r>
-              <a:rPr lang="de-CH" dirty="0"/>
-              <a:t>           354.598             -0.205</a:t>
-            </a:r>
-          </a:p>
-          <a:p>
-            <a:r>
-              <a:rPr lang="de-CH" dirty="0" err="1"/>
-              <a:t>word_len</a:t>
-            </a:r>
-            <a:r>
-              <a:rPr lang="de-CH" dirty="0"/>
-              <a:t>            68.066             -0.206</a:t>
-            </a:r>
-          </a:p>
-        </p:txBody>
-      </p:sp>
-      <p:sp>
-        <p:nvSpPr>
-          <p:cNvPr id="4" name="Date Placeholder 3">
-            <a:extLst>
-              <a:ext uri="{FF2B5EF4-FFF2-40B4-BE49-F238E27FC236}">
-                <a16:creationId xmlns:a16="http://schemas.microsoft.com/office/drawing/2014/main" id="{C0DEEB3E-7BAE-1A92-A291-7728BDC75E8B}"/>
-              </a:ext>
-            </a:extLst>
-          </p:cNvPr>
-          <p:cNvSpPr>
-            <a:spLocks noGrp="1"/>
-          </p:cNvSpPr>
-          <p:nvPr>
-            <p:ph type="dt" sz="half" idx="10"/>
-          </p:nvPr>
-        </p:nvSpPr>
-        <p:spPr/>
-        <p:txBody>
-          <a:bodyPr/>
-          <a:lstStyle/>
-          <a:p>
-            <a:fld id="{EE15D7BA-2F5F-8E43-91CB-647D382EDB87}" type="datetime4">
-              <a:rPr lang="de-CH" smtClean="0"/>
-              <a:t>15. Juni 2026</a:t>
-            </a:fld>
-            <a:endParaRPr lang="en-CH"/>
-          </a:p>
-        </p:txBody>
-      </p:sp>
-      <p:sp>
-        <p:nvSpPr>
-          <p:cNvPr id="5" name="Footer Placeholder 4">
-            <a:extLst>
-              <a:ext uri="{FF2B5EF4-FFF2-40B4-BE49-F238E27FC236}">
-                <a16:creationId xmlns:a16="http://schemas.microsoft.com/office/drawing/2014/main" id="{9B1E3E48-9BBA-9F97-FCAE-5AB32DE39E08}"/>
-              </a:ext>
-            </a:extLst>
-          </p:cNvPr>
-          <p:cNvSpPr>
-            <a:spLocks noGrp="1"/>
-          </p:cNvSpPr>
-          <p:nvPr>
-            <p:ph type="ftr" sz="quarter" idx="11"/>
-          </p:nvPr>
-        </p:nvSpPr>
-        <p:spPr/>
-        <p:txBody>
-          <a:bodyPr/>
-          <a:lstStyle/>
-          <a:p>
-            <a:r>
-              <a:rPr lang="en-GB"/>
-              <a:t>Text Analysis- Svetlana Khominich, Ralph Müller, David Beer </a:t>
-            </a:r>
-            <a:endParaRPr lang="en-CH" dirty="0"/>
-          </a:p>
-        </p:txBody>
-      </p:sp>
-      <p:sp>
-        <p:nvSpPr>
-          <p:cNvPr id="6" name="Slide Number Placeholder 5">
-            <a:extLst>
-              <a:ext uri="{FF2B5EF4-FFF2-40B4-BE49-F238E27FC236}">
-                <a16:creationId xmlns:a16="http://schemas.microsoft.com/office/drawing/2014/main" id="{2DB5A815-DB33-5B9D-9352-651643196563}"/>
-              </a:ext>
-            </a:extLst>
-          </p:cNvPr>
-          <p:cNvSpPr>
-            <a:spLocks noGrp="1"/>
-          </p:cNvSpPr>
-          <p:nvPr>
-            <p:ph type="sldNum" sz="quarter" idx="12"/>
-          </p:nvPr>
-        </p:nvSpPr>
-        <p:spPr/>
-        <p:txBody>
-          <a:bodyPr/>
-          <a:lstStyle/>
-          <a:p>
-            <a:fld id="{221FD296-2B0C-4A4B-AFAC-2E3A842869F0}" type="slidenum">
-              <a:rPr lang="en-CH" smtClean="0"/>
-              <a:t>13</a:t>
             </a:fld>
             <a:endParaRPr lang="en-CH"/>
           </a:p>
@@ -5921,7 +6718,7 @@
 </p:sld>
 </file>
 
-<file path=ppt/slides/slide14.xml><?xml version="1.0" encoding="utf-8"?>
+<file path=ppt/slides/slide13.xml><?xml version="1.0" encoding="utf-8"?>
 <p:sld xmlns:a="http://schemas.openxmlformats.org/drawingml/2006/main" xmlns:r="http://schemas.openxmlformats.org/officeDocument/2006/relationships" xmlns:p="http://schemas.openxmlformats.org/presentationml/2006/main">
   <p:cSld>
     <p:spTree>
@@ -6138,7 +6935,7 @@
           <a:p>
             <a:fld id="{221FD296-2B0C-4A4B-AFAC-2E3A842869F0}" type="slidenum">
               <a:rPr lang="en-CH" smtClean="0"/>
-              <a:t>14</a:t>
+              <a:t>13</a:t>
             </a:fld>
             <a:endParaRPr lang="en-CH"/>
           </a:p>
@@ -6219,7 +7016,7 @@
 </p:sld>
 </file>
 
-<file path=ppt/slides/slide15.xml><?xml version="1.0" encoding="utf-8"?>
+<file path=ppt/slides/slide14.xml><?xml version="1.0" encoding="utf-8"?>
 <p:sld xmlns:a="http://schemas.openxmlformats.org/drawingml/2006/main" xmlns:r="http://schemas.openxmlformats.org/officeDocument/2006/relationships" xmlns:p="http://schemas.openxmlformats.org/presentationml/2006/main">
   <p:cSld>
     <p:spTree>
@@ -6433,7 +7230,7 @@
           <a:p>
             <a:fld id="{221FD296-2B0C-4A4B-AFAC-2E3A842869F0}" type="slidenum">
               <a:rPr lang="en-CH" smtClean="0"/>
-              <a:t>15</a:t>
+              <a:t>14</a:t>
             </a:fld>
             <a:endParaRPr lang="en-CH"/>
           </a:p>
@@ -6514,7 +7311,7 @@
 </p:sld>
 </file>
 
-<file path=ppt/slides/slide16.xml><?xml version="1.0" encoding="utf-8"?>
+<file path=ppt/slides/slide15.xml><?xml version="1.0" encoding="utf-8"?>
 <p:sld xmlns:a="http://schemas.openxmlformats.org/drawingml/2006/main" xmlns:r="http://schemas.openxmlformats.org/officeDocument/2006/relationships" xmlns:p="http://schemas.openxmlformats.org/presentationml/2006/main">
   <p:cSld>
     <p:spTree>
@@ -6720,7 +7517,7 @@
           <a:p>
             <a:fld id="{221FD296-2B0C-4A4B-AFAC-2E3A842869F0}" type="slidenum">
               <a:rPr lang="en-CH" smtClean="0"/>
-              <a:t>16</a:t>
+              <a:t>15</a:t>
             </a:fld>
             <a:endParaRPr lang="en-CH"/>
           </a:p>
@@ -6819,7 +7616,7 @@
 </p:sld>
 </file>
 
-<file path=ppt/slides/slide17.xml><?xml version="1.0" encoding="utf-8"?>
+<file path=ppt/slides/slide16.xml><?xml version="1.0" encoding="utf-8"?>
 <p:sld xmlns:a="http://schemas.openxmlformats.org/drawingml/2006/main" xmlns:r="http://schemas.openxmlformats.org/officeDocument/2006/relationships" xmlns:p="http://schemas.openxmlformats.org/presentationml/2006/main">
   <p:cSld>
     <p:spTree>
@@ -7124,7 +7921,7 @@
           <a:p>
             <a:fld id="{221FD296-2B0C-4A4B-AFAC-2E3A842869F0}" type="slidenum">
               <a:rPr lang="en-CH" smtClean="0"/>
-              <a:t>17</a:t>
+              <a:t>16</a:t>
             </a:fld>
             <a:endParaRPr lang="en-CH"/>
           </a:p>
@@ -7242,6 +8039,202 @@
 </p:sld>
 </file>
 
+<file path=ppt/slides/slide17.xml><?xml version="1.0" encoding="utf-8"?>
+<p:sld xmlns:a="http://schemas.openxmlformats.org/drawingml/2006/main" xmlns:r="http://schemas.openxmlformats.org/officeDocument/2006/relationships" xmlns:p="http://schemas.openxmlformats.org/presentationml/2006/main">
+  <p:cSld>
+    <p:spTree>
+      <p:nvGrpSpPr>
+        <p:cNvPr id="1" name=""/>
+        <p:cNvGrpSpPr/>
+        <p:nvPr/>
+      </p:nvGrpSpPr>
+      <p:grpSpPr>
+        <a:xfrm>
+          <a:off x="0" y="0"/>
+          <a:ext cx="0" cy="0"/>
+          <a:chOff x="0" y="0"/>
+          <a:chExt cx="0" cy="0"/>
+        </a:xfrm>
+      </p:grpSpPr>
+      <p:sp>
+        <p:nvSpPr>
+          <p:cNvPr id="2" name="Title 1">
+            <a:extLst>
+              <a:ext uri="{FF2B5EF4-FFF2-40B4-BE49-F238E27FC236}">
+                <a16:creationId xmlns:a16="http://schemas.microsoft.com/office/drawing/2014/main" id="{C920FCBD-11AF-2890-1169-632E0CC0EABB}"/>
+              </a:ext>
+            </a:extLst>
+          </p:cNvPr>
+          <p:cNvSpPr>
+            <a:spLocks noGrp="1"/>
+          </p:cNvSpPr>
+          <p:nvPr>
+            <p:ph type="title"/>
+          </p:nvPr>
+        </p:nvSpPr>
+        <p:spPr/>
+        <p:txBody>
+          <a:bodyPr/>
+          <a:lstStyle/>
+          <a:p>
+            <a:r>
+              <a:rPr lang="de-CH" dirty="0" err="1"/>
+              <a:t>Embeddings</a:t>
+            </a:r>
+            <a:r>
+              <a:rPr lang="de-CH" dirty="0"/>
+              <a:t> PCA, TSNE, UMAP…</a:t>
+            </a:r>
+          </a:p>
+        </p:txBody>
+      </p:sp>
+      <p:sp>
+        <p:nvSpPr>
+          <p:cNvPr id="3" name="Content Placeholder 2">
+            <a:extLst>
+              <a:ext uri="{FF2B5EF4-FFF2-40B4-BE49-F238E27FC236}">
+                <a16:creationId xmlns:a16="http://schemas.microsoft.com/office/drawing/2014/main" id="{EF706B76-DF3F-E4FB-2F4E-64E02221D2B1}"/>
+              </a:ext>
+            </a:extLst>
+          </p:cNvPr>
+          <p:cNvSpPr>
+            <a:spLocks noGrp="1"/>
+          </p:cNvSpPr>
+          <p:nvPr>
+            <p:ph idx="1"/>
+          </p:nvPr>
+        </p:nvSpPr>
+        <p:spPr/>
+        <p:txBody>
+          <a:bodyPr/>
+          <a:lstStyle/>
+          <a:p>
+            <a:r>
+              <a:rPr lang="de-CH" dirty="0"/>
+              <a:t>Transformer: </a:t>
+            </a:r>
+            <a:r>
+              <a:rPr lang="en-CH" dirty="0"/>
+              <a:t>BAAI/bge-base-en-v1.5</a:t>
+            </a:r>
+          </a:p>
+          <a:p>
+            <a:r>
+              <a:rPr lang="de-CH" dirty="0"/>
+              <a:t>Dimensionsreduktion und Darstellung auf Plot</a:t>
+            </a:r>
+          </a:p>
+          <a:p>
+            <a:r>
+              <a:rPr lang="en-CH" dirty="0"/>
+              <a:t>Rot/Blau gemischt → Fehler verteilen sich gleichmässig im Semantikraum. Es hat kein strukturelles Muster</a:t>
+            </a:r>
+          </a:p>
+          <a:p>
+            <a:endParaRPr lang="de-CH" dirty="0"/>
+          </a:p>
+        </p:txBody>
+      </p:sp>
+      <p:sp>
+        <p:nvSpPr>
+          <p:cNvPr id="4" name="Date Placeholder 3">
+            <a:extLst>
+              <a:ext uri="{FF2B5EF4-FFF2-40B4-BE49-F238E27FC236}">
+                <a16:creationId xmlns:a16="http://schemas.microsoft.com/office/drawing/2014/main" id="{7D3BCD11-496E-279C-80E2-9DC9FA51A4A7}"/>
+              </a:ext>
+            </a:extLst>
+          </p:cNvPr>
+          <p:cNvSpPr>
+            <a:spLocks noGrp="1"/>
+          </p:cNvSpPr>
+          <p:nvPr>
+            <p:ph type="dt" sz="half" idx="10"/>
+          </p:nvPr>
+        </p:nvSpPr>
+        <p:spPr/>
+        <p:txBody>
+          <a:bodyPr/>
+          <a:lstStyle/>
+          <a:p>
+            <a:fld id="{EE15D7BA-2F5F-8E43-91CB-647D382EDB87}" type="datetime4">
+              <a:rPr lang="de-CH" smtClean="0"/>
+              <a:t>15. Juni 2026</a:t>
+            </a:fld>
+            <a:endParaRPr lang="en-CH"/>
+          </a:p>
+        </p:txBody>
+      </p:sp>
+      <p:sp>
+        <p:nvSpPr>
+          <p:cNvPr id="5" name="Footer Placeholder 4">
+            <a:extLst>
+              <a:ext uri="{FF2B5EF4-FFF2-40B4-BE49-F238E27FC236}">
+                <a16:creationId xmlns:a16="http://schemas.microsoft.com/office/drawing/2014/main" id="{2C2B0016-9F80-20DE-FA2D-B80DB12CCB4B}"/>
+              </a:ext>
+            </a:extLst>
+          </p:cNvPr>
+          <p:cNvSpPr>
+            <a:spLocks noGrp="1"/>
+          </p:cNvSpPr>
+          <p:nvPr>
+            <p:ph type="ftr" sz="quarter" idx="11"/>
+          </p:nvPr>
+        </p:nvSpPr>
+        <p:spPr/>
+        <p:txBody>
+          <a:bodyPr/>
+          <a:lstStyle/>
+          <a:p>
+            <a:r>
+              <a:rPr lang="en-GB"/>
+              <a:t>Text Analysis- Svetlana Khominich, Ralph Müller, David Beer </a:t>
+            </a:r>
+            <a:endParaRPr lang="en-CH" dirty="0"/>
+          </a:p>
+        </p:txBody>
+      </p:sp>
+      <p:sp>
+        <p:nvSpPr>
+          <p:cNvPr id="6" name="Slide Number Placeholder 5">
+            <a:extLst>
+              <a:ext uri="{FF2B5EF4-FFF2-40B4-BE49-F238E27FC236}">
+                <a16:creationId xmlns:a16="http://schemas.microsoft.com/office/drawing/2014/main" id="{11B82D64-4F04-F2A9-97F9-560FF9B3A04A}"/>
+              </a:ext>
+            </a:extLst>
+          </p:cNvPr>
+          <p:cNvSpPr>
+            <a:spLocks noGrp="1"/>
+          </p:cNvSpPr>
+          <p:nvPr>
+            <p:ph type="sldNum" sz="quarter" idx="12"/>
+          </p:nvPr>
+        </p:nvSpPr>
+        <p:spPr/>
+        <p:txBody>
+          <a:bodyPr/>
+          <a:lstStyle/>
+          <a:p>
+            <a:fld id="{221FD296-2B0C-4A4B-AFAC-2E3A842869F0}" type="slidenum">
+              <a:rPr lang="en-CH" smtClean="0"/>
+              <a:t>17</a:t>
+            </a:fld>
+            <a:endParaRPr lang="en-CH"/>
+          </a:p>
+        </p:txBody>
+      </p:sp>
+    </p:spTree>
+    <p:extLst>
+      <p:ext uri="{BB962C8B-B14F-4D97-AF65-F5344CB8AC3E}">
+        <p14:creationId xmlns:p14="http://schemas.microsoft.com/office/powerpoint/2010/main" val="4097295119"/>
+      </p:ext>
+    </p:extLst>
+  </p:cSld>
+  <p:clrMapOvr>
+    <a:masterClrMapping/>
+  </p:clrMapOvr>
+</p:sld>
+</file>
+
 <file path=ppt/slides/slide18.xml><?xml version="1.0" encoding="utf-8"?>
 <p:sld xmlns:a="http://schemas.openxmlformats.org/drawingml/2006/main" xmlns:r="http://schemas.openxmlformats.org/officeDocument/2006/relationships" xmlns:p="http://schemas.openxmlformats.org/presentationml/2006/main">
   <p:cSld>
@@ -7264,7 +8257,7 @@
           <p:cNvPr id="2" name="Title 1">
             <a:extLst>
               <a:ext uri="{FF2B5EF4-FFF2-40B4-BE49-F238E27FC236}">
-                <a16:creationId xmlns:a16="http://schemas.microsoft.com/office/drawing/2014/main" id="{C920FCBD-11AF-2890-1169-632E0CC0EABB}"/>
+                <a16:creationId xmlns:a16="http://schemas.microsoft.com/office/drawing/2014/main" id="{37CA9EC5-4BB1-B24F-C221-B3E739738DC3}"/>
               </a:ext>
             </a:extLst>
           </p:cNvPr>
@@ -7281,60 +8274,9 @@
           <a:lstStyle/>
           <a:p>
             <a:r>
-              <a:rPr lang="de-CH" dirty="0" err="1"/>
-              <a:t>Embeddings</a:t>
-            </a:r>
-            <a:r>
               <a:rPr lang="de-CH" dirty="0"/>
-              <a:t> PCA, TSNE, UMAP…</a:t>
-            </a:r>
-          </a:p>
-        </p:txBody>
-      </p:sp>
-      <p:sp>
-        <p:nvSpPr>
-          <p:cNvPr id="3" name="Content Placeholder 2">
-            <a:extLst>
-              <a:ext uri="{FF2B5EF4-FFF2-40B4-BE49-F238E27FC236}">
-                <a16:creationId xmlns:a16="http://schemas.microsoft.com/office/drawing/2014/main" id="{EF706B76-DF3F-E4FB-2F4E-64E02221D2B1}"/>
-              </a:ext>
-            </a:extLst>
-          </p:cNvPr>
-          <p:cNvSpPr>
-            <a:spLocks noGrp="1"/>
-          </p:cNvSpPr>
-          <p:nvPr>
-            <p:ph idx="1"/>
-          </p:nvPr>
-        </p:nvSpPr>
-        <p:spPr/>
-        <p:txBody>
-          <a:bodyPr/>
-          <a:lstStyle/>
-          <a:p>
-            <a:r>
-              <a:rPr lang="de-CH" dirty="0"/>
-              <a:t>Transformer: </a:t>
-            </a:r>
-            <a:r>
-              <a:rPr lang="en-CH" dirty="0"/>
-              <a:t>BAAI/bge-base-en-v1.5</a:t>
-            </a:r>
-          </a:p>
-          <a:p>
-            <a:r>
-              <a:rPr lang="de-CH" dirty="0"/>
-              <a:t>Dimensionsreduktion und Darstellung auf Plot</a:t>
-            </a:r>
-          </a:p>
-          <a:p>
-            <a:r>
-              <a:rPr lang="en-CH" dirty="0"/>
-              <a:t>Rot/Blau gemischt → Fehler verteilen sich gleichmässig im Semantikraum. Es hat kein strukturelles Muster</a:t>
-            </a:r>
-          </a:p>
-          <a:p>
-            <a:endParaRPr lang="de-CH" dirty="0"/>
+              <a:t>TSNE</a:t>
+            </a:r>
           </a:p>
         </p:txBody>
       </p:sp>
@@ -7343,7 +8285,7 @@
           <p:cNvPr id="4" name="Date Placeholder 3">
             <a:extLst>
               <a:ext uri="{FF2B5EF4-FFF2-40B4-BE49-F238E27FC236}">
-                <a16:creationId xmlns:a16="http://schemas.microsoft.com/office/drawing/2014/main" id="{7D3BCD11-496E-279C-80E2-9DC9FA51A4A7}"/>
+                <a16:creationId xmlns:a16="http://schemas.microsoft.com/office/drawing/2014/main" id="{E1320F55-DA85-72B3-5C22-F2CD6EF0E2F9}"/>
               </a:ext>
             </a:extLst>
           </p:cNvPr>
@@ -7372,7 +8314,7 @@
           <p:cNvPr id="5" name="Footer Placeholder 4">
             <a:extLst>
               <a:ext uri="{FF2B5EF4-FFF2-40B4-BE49-F238E27FC236}">
-                <a16:creationId xmlns:a16="http://schemas.microsoft.com/office/drawing/2014/main" id="{2C2B0016-9F80-20DE-FA2D-B80DB12CCB4B}"/>
+                <a16:creationId xmlns:a16="http://schemas.microsoft.com/office/drawing/2014/main" id="{A8788377-38C2-071C-EAAF-6E838949B50F}"/>
               </a:ext>
             </a:extLst>
           </p:cNvPr>
@@ -7401,7 +8343,7 @@
           <p:cNvPr id="6" name="Slide Number Placeholder 5">
             <a:extLst>
               <a:ext uri="{FF2B5EF4-FFF2-40B4-BE49-F238E27FC236}">
-                <a16:creationId xmlns:a16="http://schemas.microsoft.com/office/drawing/2014/main" id="{11B82D64-4F04-F2A9-97F9-560FF9B3A04A}"/>
+                <a16:creationId xmlns:a16="http://schemas.microsoft.com/office/drawing/2014/main" id="{53F8EE49-87F4-2B53-678F-BB813BB057A0}"/>
               </a:ext>
             </a:extLst>
           </p:cNvPr>
@@ -7420,151 +8362,6 @@
             <a:fld id="{221FD296-2B0C-4A4B-AFAC-2E3A842869F0}" type="slidenum">
               <a:rPr lang="en-CH" smtClean="0"/>
               <a:t>18</a:t>
-            </a:fld>
-            <a:endParaRPr lang="en-CH"/>
-          </a:p>
-        </p:txBody>
-      </p:sp>
-    </p:spTree>
-    <p:extLst>
-      <p:ext uri="{BB962C8B-B14F-4D97-AF65-F5344CB8AC3E}">
-        <p14:creationId xmlns:p14="http://schemas.microsoft.com/office/powerpoint/2010/main" val="4097295119"/>
-      </p:ext>
-    </p:extLst>
-  </p:cSld>
-  <p:clrMapOvr>
-    <a:masterClrMapping/>
-  </p:clrMapOvr>
-</p:sld>
-</file>
-
-<file path=ppt/slides/slide19.xml><?xml version="1.0" encoding="utf-8"?>
-<p:sld xmlns:a="http://schemas.openxmlformats.org/drawingml/2006/main" xmlns:r="http://schemas.openxmlformats.org/officeDocument/2006/relationships" xmlns:p="http://schemas.openxmlformats.org/presentationml/2006/main">
-  <p:cSld>
-    <p:spTree>
-      <p:nvGrpSpPr>
-        <p:cNvPr id="1" name=""/>
-        <p:cNvGrpSpPr/>
-        <p:nvPr/>
-      </p:nvGrpSpPr>
-      <p:grpSpPr>
-        <a:xfrm>
-          <a:off x="0" y="0"/>
-          <a:ext cx="0" cy="0"/>
-          <a:chOff x="0" y="0"/>
-          <a:chExt cx="0" cy="0"/>
-        </a:xfrm>
-      </p:grpSpPr>
-      <p:sp>
-        <p:nvSpPr>
-          <p:cNvPr id="2" name="Title 1">
-            <a:extLst>
-              <a:ext uri="{FF2B5EF4-FFF2-40B4-BE49-F238E27FC236}">
-                <a16:creationId xmlns:a16="http://schemas.microsoft.com/office/drawing/2014/main" id="{37CA9EC5-4BB1-B24F-C221-B3E739738DC3}"/>
-              </a:ext>
-            </a:extLst>
-          </p:cNvPr>
-          <p:cNvSpPr>
-            <a:spLocks noGrp="1"/>
-          </p:cNvSpPr>
-          <p:nvPr>
-            <p:ph type="title"/>
-          </p:nvPr>
-        </p:nvSpPr>
-        <p:spPr/>
-        <p:txBody>
-          <a:bodyPr/>
-          <a:lstStyle/>
-          <a:p>
-            <a:r>
-              <a:rPr lang="de-CH" dirty="0"/>
-              <a:t>TSNE</a:t>
-            </a:r>
-          </a:p>
-        </p:txBody>
-      </p:sp>
-      <p:sp>
-        <p:nvSpPr>
-          <p:cNvPr id="4" name="Date Placeholder 3">
-            <a:extLst>
-              <a:ext uri="{FF2B5EF4-FFF2-40B4-BE49-F238E27FC236}">
-                <a16:creationId xmlns:a16="http://schemas.microsoft.com/office/drawing/2014/main" id="{E1320F55-DA85-72B3-5C22-F2CD6EF0E2F9}"/>
-              </a:ext>
-            </a:extLst>
-          </p:cNvPr>
-          <p:cNvSpPr>
-            <a:spLocks noGrp="1"/>
-          </p:cNvSpPr>
-          <p:nvPr>
-            <p:ph type="dt" sz="half" idx="10"/>
-          </p:nvPr>
-        </p:nvSpPr>
-        <p:spPr/>
-        <p:txBody>
-          <a:bodyPr/>
-          <a:lstStyle/>
-          <a:p>
-            <a:fld id="{EE15D7BA-2F5F-8E43-91CB-647D382EDB87}" type="datetime4">
-              <a:rPr lang="de-CH" smtClean="0"/>
-              <a:t>15. Juni 2026</a:t>
-            </a:fld>
-            <a:endParaRPr lang="en-CH"/>
-          </a:p>
-        </p:txBody>
-      </p:sp>
-      <p:sp>
-        <p:nvSpPr>
-          <p:cNvPr id="5" name="Footer Placeholder 4">
-            <a:extLst>
-              <a:ext uri="{FF2B5EF4-FFF2-40B4-BE49-F238E27FC236}">
-                <a16:creationId xmlns:a16="http://schemas.microsoft.com/office/drawing/2014/main" id="{A8788377-38C2-071C-EAAF-6E838949B50F}"/>
-              </a:ext>
-            </a:extLst>
-          </p:cNvPr>
-          <p:cNvSpPr>
-            <a:spLocks noGrp="1"/>
-          </p:cNvSpPr>
-          <p:nvPr>
-            <p:ph type="ftr" sz="quarter" idx="11"/>
-          </p:nvPr>
-        </p:nvSpPr>
-        <p:spPr/>
-        <p:txBody>
-          <a:bodyPr/>
-          <a:lstStyle/>
-          <a:p>
-            <a:r>
-              <a:rPr lang="en-GB"/>
-              <a:t>Text Analysis- Svetlana Khominich, Ralph Müller, David Beer </a:t>
-            </a:r>
-            <a:endParaRPr lang="en-CH" dirty="0"/>
-          </a:p>
-        </p:txBody>
-      </p:sp>
-      <p:sp>
-        <p:nvSpPr>
-          <p:cNvPr id="6" name="Slide Number Placeholder 5">
-            <a:extLst>
-              <a:ext uri="{FF2B5EF4-FFF2-40B4-BE49-F238E27FC236}">
-                <a16:creationId xmlns:a16="http://schemas.microsoft.com/office/drawing/2014/main" id="{53F8EE49-87F4-2B53-678F-BB813BB057A0}"/>
-              </a:ext>
-            </a:extLst>
-          </p:cNvPr>
-          <p:cNvSpPr>
-            <a:spLocks noGrp="1"/>
-          </p:cNvSpPr>
-          <p:nvPr>
-            <p:ph type="sldNum" sz="quarter" idx="12"/>
-          </p:nvPr>
-        </p:nvSpPr>
-        <p:spPr/>
-        <p:txBody>
-          <a:bodyPr/>
-          <a:lstStyle/>
-          <a:p>
-            <a:fld id="{221FD296-2B0C-4A4B-AFAC-2E3A842869F0}" type="slidenum">
-              <a:rPr lang="en-CH" smtClean="0"/>
-              <a:t>19</a:t>
             </a:fld>
             <a:endParaRPr lang="en-CH"/>
           </a:p>
@@ -7615,6 +8412,308 @@
 </p:sld>
 </file>
 
+<file path=ppt/slides/slide19.xml><?xml version="1.0" encoding="utf-8"?>
+<p:sld xmlns:a="http://schemas.openxmlformats.org/drawingml/2006/main" xmlns:r="http://schemas.openxmlformats.org/officeDocument/2006/relationships" xmlns:p="http://schemas.openxmlformats.org/presentationml/2006/main">
+  <p:cSld>
+    <p:spTree>
+      <p:nvGrpSpPr>
+        <p:cNvPr id="1" name=""/>
+        <p:cNvGrpSpPr/>
+        <p:nvPr/>
+      </p:nvGrpSpPr>
+      <p:grpSpPr>
+        <a:xfrm>
+          <a:off x="0" y="0"/>
+          <a:ext cx="0" cy="0"/>
+          <a:chOff x="0" y="0"/>
+          <a:chExt cx="0" cy="0"/>
+        </a:xfrm>
+      </p:grpSpPr>
+      <p:sp>
+        <p:nvSpPr>
+          <p:cNvPr id="2" name="Title 1">
+            <a:extLst>
+              <a:ext uri="{FF2B5EF4-FFF2-40B4-BE49-F238E27FC236}">
+                <a16:creationId xmlns:a16="http://schemas.microsoft.com/office/drawing/2014/main" id="{A5D38824-902F-A7CD-96B9-5B0EC43F4800}"/>
+              </a:ext>
+            </a:extLst>
+          </p:cNvPr>
+          <p:cNvSpPr>
+            <a:spLocks noGrp="1"/>
+          </p:cNvSpPr>
+          <p:nvPr>
+            <p:ph type="title"/>
+          </p:nvPr>
+        </p:nvSpPr>
+        <p:spPr/>
+        <p:txBody>
+          <a:bodyPr/>
+          <a:lstStyle/>
+          <a:p>
+            <a:r>
+              <a:rPr lang="de-CH" dirty="0"/>
+              <a:t>UMAP 2D Embedding Space</a:t>
+            </a:r>
+          </a:p>
+        </p:txBody>
+      </p:sp>
+      <p:sp>
+        <p:nvSpPr>
+          <p:cNvPr id="3" name="Content Placeholder 2">
+            <a:extLst>
+              <a:ext uri="{FF2B5EF4-FFF2-40B4-BE49-F238E27FC236}">
+                <a16:creationId xmlns:a16="http://schemas.microsoft.com/office/drawing/2014/main" id="{CFBAFA41-5C8E-4B46-968F-1CD7745333D6}"/>
+              </a:ext>
+            </a:extLst>
+          </p:cNvPr>
+          <p:cNvSpPr>
+            <a:spLocks noGrp="1"/>
+          </p:cNvSpPr>
+          <p:nvPr>
+            <p:ph idx="1"/>
+          </p:nvPr>
+        </p:nvSpPr>
+        <p:spPr/>
+        <p:txBody>
+          <a:bodyPr/>
+          <a:lstStyle/>
+          <a:p>
+            <a:r>
+              <a:rPr lang="de-CH" dirty="0">
+                <a:hlinkClick r:id="rId2"/>
+              </a:rPr>
+              <a:t>13_umap_embedding_space.html</a:t>
+            </a:r>
+            <a:endParaRPr lang="de-CH" dirty="0"/>
+          </a:p>
+          <a:p>
+            <a:endParaRPr lang="de-CH" dirty="0"/>
+          </a:p>
+        </p:txBody>
+      </p:sp>
+      <p:sp>
+        <p:nvSpPr>
+          <p:cNvPr id="4" name="Date Placeholder 3">
+            <a:extLst>
+              <a:ext uri="{FF2B5EF4-FFF2-40B4-BE49-F238E27FC236}">
+                <a16:creationId xmlns:a16="http://schemas.microsoft.com/office/drawing/2014/main" id="{EC60B57C-48FE-2C3C-75B7-23E5374B524C}"/>
+              </a:ext>
+            </a:extLst>
+          </p:cNvPr>
+          <p:cNvSpPr>
+            <a:spLocks noGrp="1"/>
+          </p:cNvSpPr>
+          <p:nvPr>
+            <p:ph type="dt" sz="half" idx="10"/>
+          </p:nvPr>
+        </p:nvSpPr>
+        <p:spPr>
+          <a:xfrm>
+            <a:off x="838200" y="6356350"/>
+            <a:ext cx="2743200" cy="365125"/>
+          </a:xfrm>
+        </p:spPr>
+        <p:txBody>
+          <a:bodyPr/>
+          <a:lstStyle/>
+          <a:p>
+            <a:fld id="{E66B3B6E-7E09-0142-B960-3BF02BFEB55D}" type="datetime4">
+              <a:rPr lang="de-CH" smtClean="0"/>
+              <a:t>15. Juni 2026</a:t>
+            </a:fld>
+            <a:endParaRPr lang="en-CH"/>
+          </a:p>
+        </p:txBody>
+      </p:sp>
+      <p:sp>
+        <p:nvSpPr>
+          <p:cNvPr id="5" name="Footer Placeholder 4">
+            <a:extLst>
+              <a:ext uri="{FF2B5EF4-FFF2-40B4-BE49-F238E27FC236}">
+                <a16:creationId xmlns:a16="http://schemas.microsoft.com/office/drawing/2014/main" id="{598B4F4E-D000-78BE-BBE0-29BBD4F9DD5F}"/>
+              </a:ext>
+            </a:extLst>
+          </p:cNvPr>
+          <p:cNvSpPr>
+            <a:spLocks noGrp="1"/>
+          </p:cNvSpPr>
+          <p:nvPr>
+            <p:ph type="ftr" sz="quarter" idx="11"/>
+          </p:nvPr>
+        </p:nvSpPr>
+        <p:spPr>
+          <a:xfrm>
+            <a:off x="4038600" y="6356350"/>
+            <a:ext cx="4114800" cy="365125"/>
+          </a:xfrm>
+        </p:spPr>
+        <p:txBody>
+          <a:bodyPr/>
+          <a:lstStyle/>
+          <a:p>
+            <a:r>
+              <a:rPr lang="en-GB"/>
+              <a:t>Text Analysis- Svetlana Khominich, Ralph Müller, David Beer </a:t>
+            </a:r>
+            <a:endParaRPr lang="en-CH"/>
+          </a:p>
+        </p:txBody>
+      </p:sp>
+      <p:sp>
+        <p:nvSpPr>
+          <p:cNvPr id="6" name="Slide Number Placeholder 5">
+            <a:extLst>
+              <a:ext uri="{FF2B5EF4-FFF2-40B4-BE49-F238E27FC236}">
+                <a16:creationId xmlns:a16="http://schemas.microsoft.com/office/drawing/2014/main" id="{BBF72F66-EA16-EBB6-D9B1-3C25CCF5EFED}"/>
+              </a:ext>
+            </a:extLst>
+          </p:cNvPr>
+          <p:cNvSpPr>
+            <a:spLocks noGrp="1"/>
+          </p:cNvSpPr>
+          <p:nvPr>
+            <p:ph type="sldNum" sz="quarter" idx="12"/>
+          </p:nvPr>
+        </p:nvSpPr>
+        <p:spPr>
+          <a:xfrm>
+            <a:off x="8610600" y="6356350"/>
+            <a:ext cx="2743200" cy="365125"/>
+          </a:xfrm>
+        </p:spPr>
+        <p:txBody>
+          <a:bodyPr/>
+          <a:lstStyle/>
+          <a:p>
+            <a:fld id="{221FD296-2B0C-4A4B-AFAC-2E3A842869F0}" type="slidenum">
+              <a:rPr lang="en-CH" smtClean="0"/>
+              <a:t>19</a:t>
+            </a:fld>
+            <a:endParaRPr lang="en-CH"/>
+          </a:p>
+        </p:txBody>
+      </p:sp>
+      <p:pic>
+        <p:nvPicPr>
+          <p:cNvPr id="7" name="Content Placeholder 5" descr="Monitor with solid fill">
+            <a:extLst>
+              <a:ext uri="{FF2B5EF4-FFF2-40B4-BE49-F238E27FC236}">
+                <a16:creationId xmlns:a16="http://schemas.microsoft.com/office/drawing/2014/main" id="{8FC53FA5-1E52-97FF-70EB-5F1038E70B4C}"/>
+              </a:ext>
+            </a:extLst>
+          </p:cNvPr>
+          <p:cNvPicPr>
+            <a:picLocks noChangeAspect="1"/>
+          </p:cNvPicPr>
+          <p:nvPr/>
+        </p:nvPicPr>
+        <p:blipFill>
+          <a:blip>
+            <a:extLst>
+              <a:ext uri="{96DAC541-7B7A-43D3-8B79-37D633B846F1}">
+                <asvg:svgBlip xmlns:asvg="http://schemas.microsoft.com/office/drawing/2016/SVG/main" r:embed="rId3"/>
+              </a:ext>
+            </a:extLst>
+          </a:blip>
+          <a:stretch>
+            <a:fillRect/>
+          </a:stretch>
+        </p:blipFill>
+        <p:spPr>
+          <a:xfrm>
+            <a:off x="3635076" y="1930475"/>
+            <a:ext cx="4448220" cy="4448220"/>
+          </a:xfrm>
+          <a:prstGeom prst="rect">
+            <a:avLst/>
+          </a:prstGeom>
+        </p:spPr>
+      </p:pic>
+      <p:pic>
+        <p:nvPicPr>
+          <p:cNvPr id="8" name="Graphic 7" descr="Bar chart with solid fill">
+            <a:extLst>
+              <a:ext uri="{FF2B5EF4-FFF2-40B4-BE49-F238E27FC236}">
+                <a16:creationId xmlns:a16="http://schemas.microsoft.com/office/drawing/2014/main" id="{C195EA94-734A-61CB-F2A0-09F4D8343B9E}"/>
+              </a:ext>
+            </a:extLst>
+          </p:cNvPr>
+          <p:cNvPicPr>
+            <a:picLocks noChangeAspect="1"/>
+          </p:cNvPicPr>
+          <p:nvPr/>
+        </p:nvPicPr>
+        <p:blipFill>
+          <a:blip>
+            <a:extLst>
+              <a:ext uri="{96DAC541-7B7A-43D3-8B79-37D633B846F1}">
+                <asvg:svgBlip xmlns:asvg="http://schemas.microsoft.com/office/drawing/2016/SVG/main" r:embed="rId4"/>
+              </a:ext>
+            </a:extLst>
+          </a:blip>
+          <a:stretch>
+            <a:fillRect/>
+          </a:stretch>
+        </p:blipFill>
+        <p:spPr>
+          <a:xfrm>
+            <a:off x="5859186" y="3210470"/>
+            <a:ext cx="1497994" cy="1462114"/>
+          </a:xfrm>
+          <a:prstGeom prst="rect">
+            <a:avLst/>
+          </a:prstGeom>
+        </p:spPr>
+      </p:pic>
+      <p:pic>
+        <p:nvPicPr>
+          <p:cNvPr id="9" name="Graphic 8" descr="Home with solid fill">
+            <a:extLst>
+              <a:ext uri="{FF2B5EF4-FFF2-40B4-BE49-F238E27FC236}">
+                <a16:creationId xmlns:a16="http://schemas.microsoft.com/office/drawing/2014/main" id="{922C611A-E30F-7252-CCB9-455407456B29}"/>
+              </a:ext>
+            </a:extLst>
+          </p:cNvPr>
+          <p:cNvPicPr>
+            <a:picLocks noChangeAspect="1"/>
+          </p:cNvPicPr>
+          <p:nvPr/>
+        </p:nvPicPr>
+        <p:blipFill>
+          <a:blip>
+            <a:extLst>
+              <a:ext uri="{96DAC541-7B7A-43D3-8B79-37D633B846F1}">
+                <asvg:svgBlip xmlns:asvg="http://schemas.microsoft.com/office/drawing/2016/SVG/main" r:embed="rId5"/>
+              </a:ext>
+            </a:extLst>
+          </a:blip>
+          <a:stretch>
+            <a:fillRect/>
+          </a:stretch>
+        </p:blipFill>
+        <p:spPr>
+          <a:xfrm>
+            <a:off x="4366932" y="2950639"/>
+            <a:ext cx="1732509" cy="1721945"/>
+          </a:xfrm>
+          <a:prstGeom prst="rect">
+            <a:avLst/>
+          </a:prstGeom>
+        </p:spPr>
+      </p:pic>
+    </p:spTree>
+    <p:extLst>
+      <p:ext uri="{BB962C8B-B14F-4D97-AF65-F5344CB8AC3E}">
+        <p14:creationId xmlns:p14="http://schemas.microsoft.com/office/powerpoint/2010/main" val="3068779260"/>
+      </p:ext>
+    </p:extLst>
+  </p:cSld>
+  <p:clrMapOvr>
+    <a:masterClrMapping/>
+  </p:clrMapOvr>
+</p:sld>
+</file>
+
 <file path=ppt/slides/slide2.xml><?xml version="1.0" encoding="utf-8"?>
 <p:sld xmlns:a="http://schemas.openxmlformats.org/drawingml/2006/main" xmlns:r="http://schemas.openxmlformats.org/officeDocument/2006/relationships" xmlns:p="http://schemas.openxmlformats.org/presentationml/2006/main">
   <p:cSld>
@@ -7887,308 +8986,6 @@
           <p:cNvPr id="2" name="Title 1">
             <a:extLst>
               <a:ext uri="{FF2B5EF4-FFF2-40B4-BE49-F238E27FC236}">
-                <a16:creationId xmlns:a16="http://schemas.microsoft.com/office/drawing/2014/main" id="{A5D38824-902F-A7CD-96B9-5B0EC43F4800}"/>
-              </a:ext>
-            </a:extLst>
-          </p:cNvPr>
-          <p:cNvSpPr>
-            <a:spLocks noGrp="1"/>
-          </p:cNvSpPr>
-          <p:nvPr>
-            <p:ph type="title"/>
-          </p:nvPr>
-        </p:nvSpPr>
-        <p:spPr/>
-        <p:txBody>
-          <a:bodyPr/>
-          <a:lstStyle/>
-          <a:p>
-            <a:r>
-              <a:rPr lang="de-CH" dirty="0"/>
-              <a:t>UMAP 2D Embedding Space</a:t>
-            </a:r>
-          </a:p>
-        </p:txBody>
-      </p:sp>
-      <p:sp>
-        <p:nvSpPr>
-          <p:cNvPr id="3" name="Content Placeholder 2">
-            <a:extLst>
-              <a:ext uri="{FF2B5EF4-FFF2-40B4-BE49-F238E27FC236}">
-                <a16:creationId xmlns:a16="http://schemas.microsoft.com/office/drawing/2014/main" id="{CFBAFA41-5C8E-4B46-968F-1CD7745333D6}"/>
-              </a:ext>
-            </a:extLst>
-          </p:cNvPr>
-          <p:cNvSpPr>
-            <a:spLocks noGrp="1"/>
-          </p:cNvSpPr>
-          <p:nvPr>
-            <p:ph idx="1"/>
-          </p:nvPr>
-        </p:nvSpPr>
-        <p:spPr/>
-        <p:txBody>
-          <a:bodyPr/>
-          <a:lstStyle/>
-          <a:p>
-            <a:r>
-              <a:rPr lang="de-CH" dirty="0">
-                <a:hlinkClick r:id="rId2"/>
-              </a:rPr>
-              <a:t>13_umap_embedding_space.html</a:t>
-            </a:r>
-            <a:endParaRPr lang="de-CH" dirty="0"/>
-          </a:p>
-          <a:p>
-            <a:endParaRPr lang="de-CH" dirty="0"/>
-          </a:p>
-        </p:txBody>
-      </p:sp>
-      <p:sp>
-        <p:nvSpPr>
-          <p:cNvPr id="4" name="Date Placeholder 3">
-            <a:extLst>
-              <a:ext uri="{FF2B5EF4-FFF2-40B4-BE49-F238E27FC236}">
-                <a16:creationId xmlns:a16="http://schemas.microsoft.com/office/drawing/2014/main" id="{EC60B57C-48FE-2C3C-75B7-23E5374B524C}"/>
-              </a:ext>
-            </a:extLst>
-          </p:cNvPr>
-          <p:cNvSpPr>
-            <a:spLocks noGrp="1"/>
-          </p:cNvSpPr>
-          <p:nvPr>
-            <p:ph type="dt" sz="half" idx="10"/>
-          </p:nvPr>
-        </p:nvSpPr>
-        <p:spPr>
-          <a:xfrm>
-            <a:off x="838200" y="6356350"/>
-            <a:ext cx="2743200" cy="365125"/>
-          </a:xfrm>
-        </p:spPr>
-        <p:txBody>
-          <a:bodyPr/>
-          <a:lstStyle/>
-          <a:p>
-            <a:fld id="{E66B3B6E-7E09-0142-B960-3BF02BFEB55D}" type="datetime4">
-              <a:rPr lang="de-CH" smtClean="0"/>
-              <a:t>15. Juni 2026</a:t>
-            </a:fld>
-            <a:endParaRPr lang="en-CH"/>
-          </a:p>
-        </p:txBody>
-      </p:sp>
-      <p:sp>
-        <p:nvSpPr>
-          <p:cNvPr id="5" name="Footer Placeholder 4">
-            <a:extLst>
-              <a:ext uri="{FF2B5EF4-FFF2-40B4-BE49-F238E27FC236}">
-                <a16:creationId xmlns:a16="http://schemas.microsoft.com/office/drawing/2014/main" id="{598B4F4E-D000-78BE-BBE0-29BBD4F9DD5F}"/>
-              </a:ext>
-            </a:extLst>
-          </p:cNvPr>
-          <p:cNvSpPr>
-            <a:spLocks noGrp="1"/>
-          </p:cNvSpPr>
-          <p:nvPr>
-            <p:ph type="ftr" sz="quarter" idx="11"/>
-          </p:nvPr>
-        </p:nvSpPr>
-        <p:spPr>
-          <a:xfrm>
-            <a:off x="4038600" y="6356350"/>
-            <a:ext cx="4114800" cy="365125"/>
-          </a:xfrm>
-        </p:spPr>
-        <p:txBody>
-          <a:bodyPr/>
-          <a:lstStyle/>
-          <a:p>
-            <a:r>
-              <a:rPr lang="en-GB"/>
-              <a:t>Text Analysis- Svetlana Khominich, Ralph Müller, David Beer </a:t>
-            </a:r>
-            <a:endParaRPr lang="en-CH"/>
-          </a:p>
-        </p:txBody>
-      </p:sp>
-      <p:sp>
-        <p:nvSpPr>
-          <p:cNvPr id="6" name="Slide Number Placeholder 5">
-            <a:extLst>
-              <a:ext uri="{FF2B5EF4-FFF2-40B4-BE49-F238E27FC236}">
-                <a16:creationId xmlns:a16="http://schemas.microsoft.com/office/drawing/2014/main" id="{BBF72F66-EA16-EBB6-D9B1-3C25CCF5EFED}"/>
-              </a:ext>
-            </a:extLst>
-          </p:cNvPr>
-          <p:cNvSpPr>
-            <a:spLocks noGrp="1"/>
-          </p:cNvSpPr>
-          <p:nvPr>
-            <p:ph type="sldNum" sz="quarter" idx="12"/>
-          </p:nvPr>
-        </p:nvSpPr>
-        <p:spPr>
-          <a:xfrm>
-            <a:off x="8610600" y="6356350"/>
-            <a:ext cx="2743200" cy="365125"/>
-          </a:xfrm>
-        </p:spPr>
-        <p:txBody>
-          <a:bodyPr/>
-          <a:lstStyle/>
-          <a:p>
-            <a:fld id="{221FD296-2B0C-4A4B-AFAC-2E3A842869F0}" type="slidenum">
-              <a:rPr lang="en-CH" smtClean="0"/>
-              <a:t>20</a:t>
-            </a:fld>
-            <a:endParaRPr lang="en-CH"/>
-          </a:p>
-        </p:txBody>
-      </p:sp>
-      <p:pic>
-        <p:nvPicPr>
-          <p:cNvPr id="7" name="Content Placeholder 5" descr="Monitor with solid fill">
-            <a:extLst>
-              <a:ext uri="{FF2B5EF4-FFF2-40B4-BE49-F238E27FC236}">
-                <a16:creationId xmlns:a16="http://schemas.microsoft.com/office/drawing/2014/main" id="{8FC53FA5-1E52-97FF-70EB-5F1038E70B4C}"/>
-              </a:ext>
-            </a:extLst>
-          </p:cNvPr>
-          <p:cNvPicPr>
-            <a:picLocks noChangeAspect="1"/>
-          </p:cNvPicPr>
-          <p:nvPr/>
-        </p:nvPicPr>
-        <p:blipFill>
-          <a:blip>
-            <a:extLst>
-              <a:ext uri="{96DAC541-7B7A-43D3-8B79-37D633B846F1}">
-                <asvg:svgBlip xmlns:asvg="http://schemas.microsoft.com/office/drawing/2016/SVG/main" r:embed="rId3"/>
-              </a:ext>
-            </a:extLst>
-          </a:blip>
-          <a:stretch>
-            <a:fillRect/>
-          </a:stretch>
-        </p:blipFill>
-        <p:spPr>
-          <a:xfrm>
-            <a:off x="3635076" y="1930475"/>
-            <a:ext cx="4448220" cy="4448220"/>
-          </a:xfrm>
-          <a:prstGeom prst="rect">
-            <a:avLst/>
-          </a:prstGeom>
-        </p:spPr>
-      </p:pic>
-      <p:pic>
-        <p:nvPicPr>
-          <p:cNvPr id="8" name="Graphic 7" descr="Bar chart with solid fill">
-            <a:extLst>
-              <a:ext uri="{FF2B5EF4-FFF2-40B4-BE49-F238E27FC236}">
-                <a16:creationId xmlns:a16="http://schemas.microsoft.com/office/drawing/2014/main" id="{C195EA94-734A-61CB-F2A0-09F4D8343B9E}"/>
-              </a:ext>
-            </a:extLst>
-          </p:cNvPr>
-          <p:cNvPicPr>
-            <a:picLocks noChangeAspect="1"/>
-          </p:cNvPicPr>
-          <p:nvPr/>
-        </p:nvPicPr>
-        <p:blipFill>
-          <a:blip>
-            <a:extLst>
-              <a:ext uri="{96DAC541-7B7A-43D3-8B79-37D633B846F1}">
-                <asvg:svgBlip xmlns:asvg="http://schemas.microsoft.com/office/drawing/2016/SVG/main" r:embed="rId4"/>
-              </a:ext>
-            </a:extLst>
-          </a:blip>
-          <a:stretch>
-            <a:fillRect/>
-          </a:stretch>
-        </p:blipFill>
-        <p:spPr>
-          <a:xfrm>
-            <a:off x="5859186" y="3210470"/>
-            <a:ext cx="1497994" cy="1462114"/>
-          </a:xfrm>
-          <a:prstGeom prst="rect">
-            <a:avLst/>
-          </a:prstGeom>
-        </p:spPr>
-      </p:pic>
-      <p:pic>
-        <p:nvPicPr>
-          <p:cNvPr id="9" name="Graphic 8" descr="Home with solid fill">
-            <a:extLst>
-              <a:ext uri="{FF2B5EF4-FFF2-40B4-BE49-F238E27FC236}">
-                <a16:creationId xmlns:a16="http://schemas.microsoft.com/office/drawing/2014/main" id="{922C611A-E30F-7252-CCB9-455407456B29}"/>
-              </a:ext>
-            </a:extLst>
-          </p:cNvPr>
-          <p:cNvPicPr>
-            <a:picLocks noChangeAspect="1"/>
-          </p:cNvPicPr>
-          <p:nvPr/>
-        </p:nvPicPr>
-        <p:blipFill>
-          <a:blip>
-            <a:extLst>
-              <a:ext uri="{96DAC541-7B7A-43D3-8B79-37D633B846F1}">
-                <asvg:svgBlip xmlns:asvg="http://schemas.microsoft.com/office/drawing/2016/SVG/main" r:embed="rId5"/>
-              </a:ext>
-            </a:extLst>
-          </a:blip>
-          <a:stretch>
-            <a:fillRect/>
-          </a:stretch>
-        </p:blipFill>
-        <p:spPr>
-          <a:xfrm>
-            <a:off x="4366932" y="2950639"/>
-            <a:ext cx="1732509" cy="1721945"/>
-          </a:xfrm>
-          <a:prstGeom prst="rect">
-            <a:avLst/>
-          </a:prstGeom>
-        </p:spPr>
-      </p:pic>
-    </p:spTree>
-    <p:extLst>
-      <p:ext uri="{BB962C8B-B14F-4D97-AF65-F5344CB8AC3E}">
-        <p14:creationId xmlns:p14="http://schemas.microsoft.com/office/powerpoint/2010/main" val="3068779260"/>
-      </p:ext>
-    </p:extLst>
-  </p:cSld>
-  <p:clrMapOvr>
-    <a:masterClrMapping/>
-  </p:clrMapOvr>
-</p:sld>
-</file>
-
-<file path=ppt/slides/slide21.xml><?xml version="1.0" encoding="utf-8"?>
-<p:sld xmlns:a="http://schemas.openxmlformats.org/drawingml/2006/main" xmlns:r="http://schemas.openxmlformats.org/officeDocument/2006/relationships" xmlns:p="http://schemas.openxmlformats.org/presentationml/2006/main">
-  <p:cSld>
-    <p:spTree>
-      <p:nvGrpSpPr>
-        <p:cNvPr id="1" name=""/>
-        <p:cNvGrpSpPr/>
-        <p:nvPr/>
-      </p:nvGrpSpPr>
-      <p:grpSpPr>
-        <a:xfrm>
-          <a:off x="0" y="0"/>
-          <a:ext cx="0" cy="0"/>
-          <a:chOff x="0" y="0"/>
-          <a:chExt cx="0" cy="0"/>
-        </a:xfrm>
-      </p:grpSpPr>
-      <p:sp>
-        <p:nvSpPr>
-          <p:cNvPr id="2" name="Title 1">
-            <a:extLst>
-              <a:ext uri="{FF2B5EF4-FFF2-40B4-BE49-F238E27FC236}">
                 <a16:creationId xmlns:a16="http://schemas.microsoft.com/office/drawing/2014/main" id="{6542805F-9EE1-5644-FCD9-ACFCDA3211AD}"/>
               </a:ext>
             </a:extLst>
@@ -8434,7 +9231,7 @@
           <a:p>
             <a:fld id="{221FD296-2B0C-4A4B-AFAC-2E3A842869F0}" type="slidenum">
               <a:rPr lang="en-CH" smtClean="0"/>
-              <a:t>21</a:t>
+              <a:t>20</a:t>
             </a:fld>
             <a:endParaRPr lang="en-CH"/>
           </a:p>
@@ -8515,7 +9312,7 @@
 </p:sld>
 </file>
 
-<file path=ppt/slides/slide22.xml><?xml version="1.0" encoding="utf-8"?>
+<file path=ppt/slides/slide21.xml><?xml version="1.0" encoding="utf-8"?>
 <p:sld xmlns:a="http://schemas.openxmlformats.org/drawingml/2006/main" xmlns:r="http://schemas.openxmlformats.org/officeDocument/2006/relationships" xmlns:p="http://schemas.openxmlformats.org/presentationml/2006/main">
   <p:cSld>
     <p:spTree>
@@ -8667,7 +9464,7 @@
           <a:p>
             <a:fld id="{221FD296-2B0C-4A4B-AFAC-2E3A842869F0}" type="slidenum">
               <a:rPr lang="en-CH" smtClean="0"/>
-              <a:t>22</a:t>
+              <a:t>21</a:t>
             </a:fld>
             <a:endParaRPr lang="en-CH"/>
           </a:p>
@@ -9177,7 +9974,7 @@
           </p:nvPr>
         </p:nvPicPr>
         <p:blipFill>
-          <a:blip r:embed="rId2"/>
+          <a:blip r:embed="rId3"/>
           <a:stretch>
             <a:fillRect/>
           </a:stretch>
@@ -9431,33 +10228,6 @@
           <a:bodyPr/>
           <a:lstStyle/>
           <a:p>
-            <a:endParaRPr lang="de-CH"/>
-          </a:p>
-        </p:txBody>
-      </p:sp>
-      <p:sp>
-        <p:nvSpPr>
-          <p:cNvPr id="3" name="Content Placeholder 2">
-            <a:extLst>
-              <a:ext uri="{FF2B5EF4-FFF2-40B4-BE49-F238E27FC236}">
-                <a16:creationId xmlns:a16="http://schemas.microsoft.com/office/drawing/2014/main" id="{53F6FC48-7807-D021-109A-B7B91C237AB4}"/>
-              </a:ext>
-            </a:extLst>
-          </p:cNvPr>
-          <p:cNvSpPr>
-            <a:spLocks noGrp="1"/>
-          </p:cNvSpPr>
-          <p:nvPr>
-            <p:ph idx="1"/>
-          </p:nvPr>
-        </p:nvSpPr>
-        <p:spPr/>
-        <p:txBody>
-          <a:bodyPr>
-            <a:normAutofit fontScale="92500" lnSpcReduction="10000"/>
-          </a:bodyPr>
-          <a:lstStyle/>
-          <a:p>
             <a:r>
               <a:rPr lang="de-CH" dirty="0"/>
               <a:t>Over all </a:t>
@@ -9468,7 +10238,38 @@
             </a:r>
             <a:endParaRPr lang="de-CH" dirty="0"/>
           </a:p>
-          <a:p>
+        </p:txBody>
+      </p:sp>
+      <p:sp>
+        <p:nvSpPr>
+          <p:cNvPr id="3" name="Content Placeholder 2">
+            <a:extLst>
+              <a:ext uri="{FF2B5EF4-FFF2-40B4-BE49-F238E27FC236}">
+                <a16:creationId xmlns:a16="http://schemas.microsoft.com/office/drawing/2014/main" id="{53F6FC48-7807-D021-109A-B7B91C237AB4}"/>
+              </a:ext>
+            </a:extLst>
+          </p:cNvPr>
+          <p:cNvSpPr>
+            <a:spLocks noGrp="1"/>
+          </p:cNvSpPr>
+          <p:nvPr>
+            <p:ph idx="1"/>
+          </p:nvPr>
+        </p:nvSpPr>
+        <p:spPr/>
+        <p:txBody>
+          <a:bodyPr>
+            <a:normAutofit/>
+          </a:bodyPr>
+          <a:lstStyle/>
+          <a:p>
+            <a:pPr marL="0" indent="0">
+              <a:buNone/>
+            </a:pPr>
+            <a:r>
+              <a:rPr lang="de-CH" dirty="0"/>
+              <a:t>			</a:t>
+            </a:r>
             <a:r>
               <a:rPr lang="de-CH" dirty="0" err="1"/>
               <a:t>accuracy</a:t>
@@ -9476,6 +10277,9 @@
             <a:endParaRPr lang="de-CH" dirty="0"/>
           </a:p>
           <a:p>
+            <a:pPr marL="0" indent="0">
+              <a:buNone/>
+            </a:pPr>
             <a:r>
               <a:rPr lang="de-CH" dirty="0" err="1"/>
               <a:t>xgboost</a:t>
@@ -9486,6 +10290,9 @@
             </a:r>
           </a:p>
           <a:p>
+            <a:pPr marL="0" indent="0">
+              <a:buNone/>
+            </a:pPr>
             <a:r>
               <a:rPr lang="de-CH" dirty="0" err="1"/>
               <a:t>class_fcnn_bge</a:t>
@@ -9496,6 +10303,9 @@
             </a:r>
           </a:p>
           <a:p>
+            <a:pPr marL="0" indent="0">
+              <a:buNone/>
+            </a:pPr>
             <a:r>
               <a:rPr lang="de-CH" dirty="0" err="1"/>
               <a:t>random_forest</a:t>
@@ -9506,39 +10316,18 @@
             </a:r>
           </a:p>
           <a:p>
+            <a:pPr marL="0" indent="0">
+              <a:buNone/>
+            </a:pPr>
             <a:r>
               <a:rPr lang="de-CH" dirty="0" err="1"/>
               <a:t>ensemble</a:t>
             </a:r>
             <a:r>
               <a:rPr lang="de-CH" dirty="0"/>
-              <a:t>		0.92 </a:t>
-            </a:r>
-            <a:r>
-              <a:rPr lang="de-CH" dirty="0">
-                <a:sym typeface="Wingdings" pitchFamily="2" charset="2"/>
-              </a:rPr>
-              <a:t> </a:t>
-            </a:r>
-            <a:r>
-              <a:rPr lang="en-CH" dirty="0"/>
-              <a:t>Fehler sind unterschiedlich verteilt und nicht systematisch gleich</a:t>
-            </a:r>
-          </a:p>
-          <a:p>
-            <a:endParaRPr lang="de-CH" dirty="0"/>
-          </a:p>
-          <a:p>
-            <a:r>
-              <a:rPr lang="de-CH" dirty="0"/>
-              <a:t>Rating Analysis</a:t>
-            </a:r>
-          </a:p>
-          <a:p>
-            <a:r>
-              <a:rPr lang="de-CH" dirty="0"/>
-              <a:t>Model Agreement / Ensemble</a:t>
-            </a:r>
+              <a:t>		0.92</a:t>
+            </a:r>
+            <a:endParaRPr lang="en-CH" dirty="0"/>
           </a:p>
         </p:txBody>
       </p:sp>
@@ -9626,6 +10415,68 @@
               <a:t>6</a:t>
             </a:fld>
             <a:endParaRPr lang="en-CH"/>
+          </a:p>
+        </p:txBody>
+      </p:sp>
+      <p:sp>
+        <p:nvSpPr>
+          <p:cNvPr id="7" name="Rounded Rectangular Callout 6">
+            <a:extLst>
+              <a:ext uri="{FF2B5EF4-FFF2-40B4-BE49-F238E27FC236}">
+                <a16:creationId xmlns:a16="http://schemas.microsoft.com/office/drawing/2014/main" id="{681305E0-C8AA-9610-075A-1971BF1FDF01}"/>
+              </a:ext>
+            </a:extLst>
+          </p:cNvPr>
+          <p:cNvSpPr/>
+          <p:nvPr/>
+        </p:nvSpPr>
+        <p:spPr>
+          <a:xfrm>
+            <a:off x="7693572" y="3429000"/>
+            <a:ext cx="3098950" cy="1605776"/>
+          </a:xfrm>
+          <a:prstGeom prst="wedgeRoundRectCallout">
+            <a:avLst>
+              <a:gd name="adj1" fmla="val -131118"/>
+              <a:gd name="adj2" fmla="val -9386"/>
+              <a:gd name="adj3" fmla="val 16667"/>
+            </a:avLst>
+          </a:prstGeom>
+          <a:solidFill>
+            <a:schemeClr val="accent4">
+              <a:lumMod val="20000"/>
+              <a:lumOff val="80000"/>
+            </a:schemeClr>
+          </a:solidFill>
+        </p:spPr>
+        <p:style>
+          <a:lnRef idx="2">
+            <a:schemeClr val="accent1">
+              <a:shade val="15000"/>
+            </a:schemeClr>
+          </a:lnRef>
+          <a:fillRef idx="1">
+            <a:schemeClr val="accent1"/>
+          </a:fillRef>
+          <a:effectRef idx="0">
+            <a:schemeClr val="accent1"/>
+          </a:effectRef>
+          <a:fontRef idx="minor">
+            <a:schemeClr val="lt1"/>
+          </a:fontRef>
+        </p:style>
+        <p:txBody>
+          <a:bodyPr rtlCol="0" anchor="ctr"/>
+          <a:lstStyle/>
+          <a:p>
+            <a:r>
+              <a:rPr lang="en-CH" dirty="0">
+                <a:solidFill>
+                  <a:schemeClr val="tx1"/>
+                </a:solidFill>
+              </a:rPr>
+              <a:t>Fehler unterschiedlich verteilt und nicht systematisch gleich</a:t>
+            </a:r>
           </a:p>
         </p:txBody>
       </p:sp>
@@ -10235,8 +11086,21 @@
           <a:p>
             <a:r>
               <a:rPr lang="de-CH" dirty="0"/>
-              <a:t>Errors</a:t>
-            </a:r>
+              <a:t>Errors - Cat </a:t>
+            </a:r>
+            <a:r>
+              <a:rPr lang="de-CH" dirty="0" err="1"/>
+              <a:t>among</a:t>
+            </a:r>
+            <a:r>
+              <a:rPr lang="de-CH" dirty="0"/>
+              <a:t> all-fail </a:t>
+            </a:r>
+            <a:r>
+              <a:rPr lang="de-CH" dirty="0" err="1"/>
+              <a:t>cases</a:t>
+            </a:r>
+            <a:endParaRPr lang="de-CH" dirty="0"/>
           </a:p>
         </p:txBody>
       </p:sp>
@@ -10259,7 +11123,7 @@
         <p:spPr/>
         <p:txBody>
           <a:bodyPr>
-            <a:normAutofit fontScale="55000" lnSpcReduction="20000"/>
+            <a:normAutofit fontScale="62500" lnSpcReduction="20000"/>
           </a:bodyPr>
           <a:lstStyle/>
           <a:p>
@@ -10286,36 +11150,6 @@
           </a:p>
           <a:p>
             <a:endParaRPr lang="de-CH" dirty="0"/>
-          </a:p>
-          <a:p>
-            <a:r>
-              <a:rPr lang="de-CH" dirty="0"/>
-              <a:t>Top </a:t>
-            </a:r>
-            <a:r>
-              <a:rPr lang="de-CH" dirty="0" err="1"/>
-              <a:t>categories</a:t>
-            </a:r>
-            <a:r>
-              <a:rPr lang="de-CH" dirty="0"/>
-              <a:t> </a:t>
-            </a:r>
-            <a:r>
-              <a:rPr lang="de-CH" dirty="0" err="1"/>
-              <a:t>among</a:t>
-            </a:r>
-            <a:r>
-              <a:rPr lang="de-CH" dirty="0"/>
-              <a:t> all-fail </a:t>
-            </a:r>
-            <a:r>
-              <a:rPr lang="de-CH" dirty="0" err="1"/>
-              <a:t>cases</a:t>
-            </a:r>
-            <a:r>
-              <a:rPr lang="de-CH" dirty="0"/>
-              <a:t>:</a:t>
-            </a:r>
           </a:p>
           <a:p>
             <a:r>

--- a/presentation/ln_text_analysis.pptx
+++ b/presentation/ln_text_analysis.pptx
@@ -5,30 +5,29 @@
     <p:sldMasterId id="2147483648" r:id="rId1"/>
   </p:sldMasterIdLst>
   <p:notesMasterIdLst>
-    <p:notesMasterId r:id="rId23"/>
+    <p:notesMasterId r:id="rId22"/>
   </p:notesMasterIdLst>
   <p:sldIdLst>
     <p:sldId id="281" r:id="rId2"/>
     <p:sldId id="257" r:id="rId3"/>
     <p:sldId id="282" r:id="rId4"/>
     <p:sldId id="285" r:id="rId5"/>
-    <p:sldId id="286" r:id="rId6"/>
+    <p:sldId id="302" r:id="rId6"/>
     <p:sldId id="287" r:id="rId7"/>
     <p:sldId id="288" r:id="rId8"/>
     <p:sldId id="289" r:id="rId9"/>
     <p:sldId id="290" r:id="rId10"/>
     <p:sldId id="291" r:id="rId11"/>
     <p:sldId id="293" r:id="rId12"/>
-    <p:sldId id="294" r:id="rId13"/>
-    <p:sldId id="295" r:id="rId14"/>
-    <p:sldId id="296" r:id="rId15"/>
-    <p:sldId id="297" r:id="rId16"/>
-    <p:sldId id="300" r:id="rId17"/>
-    <p:sldId id="298" r:id="rId18"/>
-    <p:sldId id="299" r:id="rId19"/>
+    <p:sldId id="301" r:id="rId13"/>
+    <p:sldId id="294" r:id="rId14"/>
+    <p:sldId id="295" r:id="rId15"/>
+    <p:sldId id="296" r:id="rId16"/>
+    <p:sldId id="297" r:id="rId17"/>
+    <p:sldId id="300" r:id="rId18"/>
+    <p:sldId id="298" r:id="rId19"/>
     <p:sldId id="275" r:id="rId20"/>
-    <p:sldId id="301" r:id="rId21"/>
-    <p:sldId id="280" r:id="rId22"/>
+    <p:sldId id="280" r:id="rId21"/>
   </p:sldIdLst>
   <p:sldSz cx="12192000" cy="6858000"/>
   <p:notesSz cx="6858000" cy="9144000"/>
@@ -39,7 +38,7 @@
         <p:sld r:id="rId3"/>
         <p:sld r:id="rId4"/>
         <p:sld r:id="rId20"/>
-        <p:sld r:id="rId22"/>
+        <p:sld r:id="rId21"/>
       </p:sldLst>
     </p:custShow>
     <p:custShow name="Streaming" id="1">
@@ -246,7 +245,7 @@
           <a:p>
             <a:fld id="{E1184886-9C14-F646-94FD-4C50F4C24EDB}" type="datetimeFigureOut">
               <a:rPr lang="de-CH" smtClean="0"/>
-              <a:t>15.06.26</a:t>
+              <a:t>16.06.26</a:t>
             </a:fld>
             <a:endParaRPr lang="de-CH"/>
           </a:p>
@@ -1904,143 +1903,6 @@
           <a:bodyPr/>
           <a:lstStyle/>
           <a:p>
-            <a:r>
-              <a:rPr lang="de-CH" dirty="0" err="1"/>
-              <a:t>Xgboost</a:t>
-            </a:r>
-            <a:r>
-              <a:rPr lang="de-CH" dirty="0"/>
-              <a:t> fast überall am besten</a:t>
-            </a:r>
-          </a:p>
-          <a:p>
-            <a:r>
-              <a:rPr lang="de-CH" sz="1200" kern="1200" dirty="0" err="1">
-                <a:solidFill>
-                  <a:schemeClr val="tx1"/>
-                </a:solidFill>
-                <a:latin typeface="+mn-lt"/>
-                <a:ea typeface="+mn-ea"/>
-                <a:cs typeface="+mn-cs"/>
-              </a:rPr>
-              <a:t>Kindle_Store</a:t>
-            </a:r>
-            <a:r>
-              <a:rPr lang="de-CH" sz="1200" kern="1200" dirty="0">
-                <a:solidFill>
-                  <a:schemeClr val="tx1"/>
-                </a:solidFill>
-                <a:latin typeface="+mn-lt"/>
-                <a:ea typeface="+mn-ea"/>
-                <a:cs typeface="+mn-cs"/>
-              </a:rPr>
-              <a:t> für FCNN </a:t>
-            </a:r>
-            <a:r>
-              <a:rPr lang="de-CH" sz="1200" kern="1200" dirty="0" err="1">
-                <a:solidFill>
-                  <a:schemeClr val="tx1"/>
-                </a:solidFill>
-                <a:latin typeface="+mn-lt"/>
-                <a:ea typeface="+mn-ea"/>
-                <a:cs typeface="+mn-cs"/>
-              </a:rPr>
-              <a:t>umgewöhnlich</a:t>
-            </a:r>
-            <a:r>
-              <a:rPr lang="de-CH" sz="1200" kern="1200" dirty="0">
-                <a:solidFill>
-                  <a:schemeClr val="tx1"/>
-                </a:solidFill>
-                <a:latin typeface="+mn-lt"/>
-                <a:ea typeface="+mn-ea"/>
-                <a:cs typeface="+mn-cs"/>
-              </a:rPr>
-              <a:t> einfach</a:t>
-            </a:r>
-          </a:p>
-          <a:p>
-            <a:pPr marL="0" marR="0" lvl="0" indent="0" algn="l" defTabSz="914400" rtl="0" eaLnBrk="1" fontAlgn="auto" latinLnBrk="0" hangingPunct="1">
-              <a:lnSpc>
-                <a:spcPct val="100000"/>
-              </a:lnSpc>
-              <a:spcBef>
-                <a:spcPts val="0"/>
-              </a:spcBef>
-              <a:spcAft>
-                <a:spcPts val="0"/>
-              </a:spcAft>
-              <a:buClrTx/>
-              <a:buSzTx/>
-              <a:buFontTx/>
-              <a:buNone/>
-              <a:tabLst/>
-              <a:defRPr/>
-            </a:pPr>
-            <a:r>
-              <a:rPr lang="en-CH" sz="1200" kern="1200" dirty="0">
-                <a:solidFill>
-                  <a:schemeClr val="tx1"/>
-                </a:solidFill>
-                <a:latin typeface="+mn-lt"/>
-                <a:ea typeface="+mn-ea"/>
-                <a:cs typeface="+mn-cs"/>
-              </a:rPr>
-              <a:t>Sports &amp; Outdoors ist auffällig </a:t>
-            </a:r>
-            <a:r>
-              <a:rPr lang="en-CH" sz="1200" kern="1200" dirty="0">
-                <a:solidFill>
-                  <a:schemeClr val="tx1"/>
-                </a:solidFill>
-                <a:latin typeface="+mn-lt"/>
-                <a:ea typeface="+mn-ea"/>
-                <a:cs typeface="+mn-cs"/>
-                <a:sym typeface="Wingdings" pitchFamily="2" charset="2"/>
-              </a:rPr>
-              <a:t> xgboost 5% besser als FCNN</a:t>
-            </a:r>
-          </a:p>
-          <a:p>
-            <a:pPr marL="0" marR="0" lvl="0" indent="0" algn="l" defTabSz="914400" rtl="0" eaLnBrk="1" fontAlgn="auto" latinLnBrk="0" hangingPunct="1">
-              <a:lnSpc>
-                <a:spcPct val="100000"/>
-              </a:lnSpc>
-              <a:spcBef>
-                <a:spcPts val="0"/>
-              </a:spcBef>
-              <a:spcAft>
-                <a:spcPts val="0"/>
-              </a:spcAft>
-              <a:buClrTx/>
-              <a:buSzTx/>
-              <a:buFontTx/>
-              <a:buNone/>
-              <a:tabLst/>
-              <a:defRPr/>
-            </a:pPr>
-            <a:r>
-              <a:rPr lang="en-CH" sz="1200" kern="1200" dirty="0">
-                <a:solidFill>
-                  <a:schemeClr val="tx1"/>
-                </a:solidFill>
-                <a:latin typeface="+mn-lt"/>
-                <a:ea typeface="+mn-ea"/>
-                <a:cs typeface="+mn-cs"/>
-                <a:sym typeface="Wingdings" pitchFamily="2" charset="2"/>
-              </a:rPr>
-              <a:t>Movies_and_TV für alle schwierig</a:t>
-            </a:r>
-            <a:endParaRPr lang="en-CH" sz="1200" kern="1200" dirty="0">
-              <a:solidFill>
-                <a:schemeClr val="tx1"/>
-              </a:solidFill>
-              <a:latin typeface="+mn-lt"/>
-              <a:ea typeface="+mn-ea"/>
-              <a:cs typeface="+mn-cs"/>
-            </a:endParaRPr>
-          </a:p>
-          <a:p>
             <a:endParaRPr lang="de-CH" dirty="0"/>
           </a:p>
         </p:txBody>
@@ -2146,7 +2008,7 @@
           <a:p>
             <a:fld id="{6F406B0D-CDB9-7342-BFE1-3BBA81393C61}" type="slidenum">
               <a:rPr lang="de-CH" smtClean="0"/>
-              <a:t>14</a:t>
+              <a:t>12</a:t>
             </a:fld>
             <a:endParaRPr lang="de-CH"/>
           </a:p>
@@ -2155,7 +2017,7 @@
     </p:spTree>
     <p:extLst>
       <p:ext uri="{BB962C8B-B14F-4D97-AF65-F5344CB8AC3E}">
-        <p14:creationId xmlns:p14="http://schemas.microsoft.com/office/powerpoint/2010/main" val="763480941"/>
+        <p14:creationId xmlns:p14="http://schemas.microsoft.com/office/powerpoint/2010/main" val="2801038869"/>
       </p:ext>
     </p:extLst>
   </p:cSld>
@@ -2239,7 +2101,7 @@
     </p:spTree>
     <p:extLst>
       <p:ext uri="{BB962C8B-B14F-4D97-AF65-F5344CB8AC3E}">
-        <p14:creationId xmlns:p14="http://schemas.microsoft.com/office/powerpoint/2010/main" val="4023533460"/>
+        <p14:creationId xmlns:p14="http://schemas.microsoft.com/office/powerpoint/2010/main" val="763480941"/>
       </p:ext>
     </p:extLst>
   </p:cSld>
@@ -2314,7 +2176,7 @@
           <a:p>
             <a:fld id="{6F406B0D-CDB9-7342-BFE1-3BBA81393C61}" type="slidenum">
               <a:rPr lang="de-CH" smtClean="0"/>
-              <a:t>20</a:t>
+              <a:t>16</a:t>
             </a:fld>
             <a:endParaRPr lang="de-CH"/>
           </a:p>
@@ -2323,7 +2185,7 @@
     </p:spTree>
     <p:extLst>
       <p:ext uri="{BB962C8B-B14F-4D97-AF65-F5344CB8AC3E}">
-        <p14:creationId xmlns:p14="http://schemas.microsoft.com/office/powerpoint/2010/main" val="2801038869"/>
+        <p14:creationId xmlns:p14="http://schemas.microsoft.com/office/powerpoint/2010/main" val="4023533460"/>
       </p:ext>
     </p:extLst>
   </p:cSld>
@@ -2482,7 +2344,7 @@
           <a:p>
             <a:fld id="{D01C3EBF-35A5-024B-8337-1FF7CA970669}" type="datetime4">
               <a:rPr lang="de-CH" smtClean="0"/>
-              <a:t>15. Juni 2026</a:t>
+              <a:t>16. Juni 2026</a:t>
             </a:fld>
             <a:endParaRPr lang="en-CH" dirty="0"/>
           </a:p>
@@ -2686,7 +2548,7 @@
           <a:p>
             <a:fld id="{FABC503F-E78F-6642-9C43-7F779DDA9637}" type="datetime4">
               <a:rPr lang="de-CH" smtClean="0"/>
-              <a:t>15. Juni 2026</a:t>
+              <a:t>16. Juni 2026</a:t>
             </a:fld>
             <a:endParaRPr lang="en-CH"/>
           </a:p>
@@ -2900,7 +2762,7 @@
           <a:p>
             <a:fld id="{84D58EFF-D565-754D-8E1D-581A9C2ED513}" type="datetime4">
               <a:rPr lang="de-CH" smtClean="0"/>
-              <a:t>15. Juni 2026</a:t>
+              <a:t>16. Juni 2026</a:t>
             </a:fld>
             <a:endParaRPr lang="en-CH"/>
           </a:p>
@@ -3104,7 +2966,7 @@
           <a:p>
             <a:fld id="{EE15D7BA-2F5F-8E43-91CB-647D382EDB87}" type="datetime4">
               <a:rPr lang="de-CH" smtClean="0"/>
-              <a:t>15. Juni 2026</a:t>
+              <a:t>16. Juni 2026</a:t>
             </a:fld>
             <a:endParaRPr lang="en-CH"/>
           </a:p>
@@ -3384,7 +3246,7 @@
           <a:p>
             <a:fld id="{0AA40E02-4391-BD46-B0E7-635382A657F3}" type="datetime4">
               <a:rPr lang="de-CH" smtClean="0"/>
-              <a:t>15. Juni 2026</a:t>
+              <a:t>16. Juni 2026</a:t>
             </a:fld>
             <a:endParaRPr lang="en-CH"/>
           </a:p>
@@ -3656,7 +3518,7 @@
           <a:p>
             <a:fld id="{CB6715BD-3BCD-B048-A677-0FC99A942057}" type="datetime4">
               <a:rPr lang="de-CH" smtClean="0"/>
-              <a:t>15. Juni 2026</a:t>
+              <a:t>16. Juni 2026</a:t>
             </a:fld>
             <a:endParaRPr lang="en-CH"/>
           </a:p>
@@ -4075,7 +3937,7 @@
           <a:p>
             <a:fld id="{5433D90D-DE43-734C-AE99-F68BD94FD95C}" type="datetime4">
               <a:rPr lang="de-CH" smtClean="0"/>
-              <a:t>15. Juni 2026</a:t>
+              <a:t>16. Juni 2026</a:t>
             </a:fld>
             <a:endParaRPr lang="en-CH"/>
           </a:p>
@@ -4221,7 +4083,7 @@
           <a:p>
             <a:fld id="{8847DC07-8BC2-F84E-8FB1-AB2E6893E256}" type="datetime4">
               <a:rPr lang="de-CH" smtClean="0"/>
-              <a:t>15. Juni 2026</a:t>
+              <a:t>16. Juni 2026</a:t>
             </a:fld>
             <a:endParaRPr lang="en-CH"/>
           </a:p>
@@ -4338,7 +4200,7 @@
           <a:p>
             <a:fld id="{14C5E3DE-4EE6-2348-ACB8-6E5F19BEC610}" type="datetime4">
               <a:rPr lang="de-CH" smtClean="0"/>
-              <a:t>15. Juni 2026</a:t>
+              <a:t>16. Juni 2026</a:t>
             </a:fld>
             <a:endParaRPr lang="en-CH"/>
           </a:p>
@@ -4655,7 +4517,7 @@
           <a:p>
             <a:fld id="{3069C634-6B84-4143-A0D4-F8B2524245DA}" type="datetime4">
               <a:rPr lang="de-CH" smtClean="0"/>
-              <a:t>15. Juni 2026</a:t>
+              <a:t>16. Juni 2026</a:t>
             </a:fld>
             <a:endParaRPr lang="en-CH"/>
           </a:p>
@@ -4948,7 +4810,7 @@
           <a:p>
             <a:fld id="{6A59641C-6DA2-E742-8275-6CFD523E67DF}" type="datetime4">
               <a:rPr lang="de-CH" smtClean="0"/>
-              <a:t>15. Juni 2026</a:t>
+              <a:t>16. Juni 2026</a:t>
             </a:fld>
             <a:endParaRPr lang="en-CH"/>
           </a:p>
@@ -5195,7 +5057,7 @@
           <a:p>
             <a:fld id="{91BF76C2-678E-C049-84B9-885C068ABCCC}" type="datetime4">
               <a:rPr lang="de-CH" smtClean="0"/>
-              <a:t>15. Juni 2026</a:t>
+              <a:t>16. Juni 2026</a:t>
             </a:fld>
             <a:endParaRPr lang="en-CH"/>
           </a:p>
@@ -5947,7 +5809,7 @@
           <a:p>
             <a:fld id="{EE15D7BA-2F5F-8E43-91CB-647D382EDB87}" type="datetime4">
               <a:rPr lang="de-CH" smtClean="0"/>
-              <a:t>15. Juni 2026</a:t>
+              <a:t>16. Juni 2026</a:t>
             </a:fld>
             <a:endParaRPr lang="en-CH"/>
           </a:p>
@@ -6057,13 +5919,13 @@
         </p:nvSpPr>
         <p:spPr>
           <a:xfrm>
-            <a:off x="9465013" y="4564170"/>
+            <a:off x="9639232" y="3429000"/>
             <a:ext cx="2296438" cy="1605776"/>
           </a:xfrm>
           <a:prstGeom prst="wedgeRoundRectCallout">
             <a:avLst>
-              <a:gd name="adj1" fmla="val -95051"/>
-              <a:gd name="adj2" fmla="val -48060"/>
+              <a:gd name="adj1" fmla="val -95683"/>
+              <a:gd name="adj2" fmla="val -29079"/>
               <a:gd name="adj3" fmla="val 16667"/>
             </a:avLst>
           </a:prstGeom>
@@ -6301,7 +6163,7 @@
           <a:p>
             <a:fld id="{EE15D7BA-2F5F-8E43-91CB-647D382EDB87}" type="datetime4">
               <a:rPr lang="de-CH" smtClean="0"/>
-              <a:t>15. Juni 2026</a:t>
+              <a:t>16. Juni 2026</a:t>
             </a:fld>
             <a:endParaRPr lang="en-CH"/>
           </a:p>
@@ -6400,7 +6262,7 @@
           <p:cNvPr id="2" name="Title 1">
             <a:extLst>
               <a:ext uri="{FF2B5EF4-FFF2-40B4-BE49-F238E27FC236}">
-                <a16:creationId xmlns:a16="http://schemas.microsoft.com/office/drawing/2014/main" id="{7EBD88F3-E0C7-ABCA-B9C9-30DB8AAE601B}"/>
+                <a16:creationId xmlns:a16="http://schemas.microsoft.com/office/drawing/2014/main" id="{6542805F-9EE1-5644-FCD9-ACFCDA3211AD}"/>
               </a:ext>
             </a:extLst>
           </p:cNvPr>
@@ -6413,13 +6275,16 @@
         </p:nvSpPr>
         <p:spPr/>
         <p:txBody>
-          <a:bodyPr/>
-          <a:lstStyle/>
-          <a:p>
-            <a:r>
-              <a:rPr lang="de-CH" dirty="0"/>
-              <a:t>Korrelation Schwierigkeit / Features</a:t>
-            </a:r>
+          <a:bodyPr>
+            <a:normAutofit fontScale="90000"/>
+          </a:bodyPr>
+          <a:lstStyle/>
+          <a:p>
+            <a:r>
+              <a:rPr lang="en-CH" dirty="0"/>
+              <a:t>Was macht es schwer, richtig zu Klassifizieren?</a:t>
+            </a:r>
+            <a:endParaRPr lang="de-CH" dirty="0"/>
           </a:p>
         </p:txBody>
       </p:sp>
@@ -6428,7 +6293,7 @@
           <p:cNvPr id="3" name="Content Placeholder 2">
             <a:extLst>
               <a:ext uri="{FF2B5EF4-FFF2-40B4-BE49-F238E27FC236}">
-                <a16:creationId xmlns:a16="http://schemas.microsoft.com/office/drawing/2014/main" id="{864C35EB-F541-D831-6C85-0304F0C6F6DC}"/>
+                <a16:creationId xmlns:a16="http://schemas.microsoft.com/office/drawing/2014/main" id="{DE9F2555-33A2-94BC-ADFE-902207060BBB}"/>
               </a:ext>
             </a:extLst>
           </p:cNvPr>
@@ -6441,108 +6306,174 @@
         </p:nvSpPr>
         <p:spPr/>
         <p:txBody>
-          <a:bodyPr/>
+          <a:bodyPr>
+            <a:normAutofit lnSpcReduction="10000"/>
+          </a:bodyPr>
           <a:lstStyle/>
           <a:p>
             <a:pPr marL="0" indent="0">
               <a:buNone/>
             </a:pPr>
             <a:r>
-              <a:rPr lang="de-CH" dirty="0"/>
-              <a:t>Feature			</a:t>
-            </a:r>
-            <a:r>
-              <a:rPr lang="de-CH" dirty="0" err="1"/>
-              <a:t>mean</a:t>
-            </a:r>
-            <a:r>
-              <a:rPr lang="de-CH" dirty="0"/>
-              <a:t>  	</a:t>
-            </a:r>
-            <a:r>
-              <a:rPr lang="de-CH" dirty="0" err="1"/>
-              <a:t>corr_with_difficulty</a:t>
-            </a:r>
-            <a:endParaRPr lang="de-CH" dirty="0"/>
+              <a:rPr lang="en-CH" dirty="0"/>
+              <a:t>welche Features erklären Vorhersage-Schwierigkeit? (mit RF)</a:t>
+            </a:r>
           </a:p>
           <a:p>
             <a:pPr marL="0" indent="0">
               <a:buNone/>
             </a:pPr>
             <a:r>
-              <a:rPr lang="de-CH" dirty="0" err="1"/>
+              <a:rPr lang="en-GB" dirty="0"/>
+              <a:t>Feature Importance:</a:t>
+            </a:r>
+          </a:p>
+          <a:p>
+            <a:pPr marL="0" indent="0">
+              <a:buNone/>
+            </a:pPr>
+            <a:r>
+              <a:rPr lang="en-GB" dirty="0"/>
+              <a:t>	</a:t>
+            </a:r>
+            <a:r>
+              <a:rPr lang="en-GB" dirty="0" err="1">
+                <a:highlight>
+                  <a:srgbClr val="FFFF00"/>
+                </a:highlight>
+              </a:rPr>
+              <a:t>avg_word_len</a:t>
+            </a:r>
+            <a:r>
+              <a:rPr lang="en-GB" dirty="0">
+                <a:highlight>
+                  <a:srgbClr val="FFFF00"/>
+                </a:highlight>
+              </a:rPr>
+              <a:t>              	28.5%</a:t>
+            </a:r>
+          </a:p>
+          <a:p>
+            <a:pPr marL="0" indent="0">
+              <a:buNone/>
+            </a:pPr>
+            <a:r>
+              <a:rPr lang="en-GB" dirty="0"/>
+              <a:t>	</a:t>
+            </a:r>
+            <a:r>
+              <a:rPr lang="en-GB" dirty="0" err="1">
+                <a:highlight>
+                  <a:srgbClr val="FFFF00"/>
+                </a:highlight>
+              </a:rPr>
               <a:t>uppercase_ratio</a:t>
             </a:r>
             <a:r>
-              <a:rPr lang="de-CH" dirty="0"/>
-              <a:t>      	0.029            0.061</a:t>
-            </a:r>
-            <a:br>
-              <a:rPr lang="de-CH" dirty="0"/>
-            </a:br>
-            <a:r>
-              <a:rPr lang="de-CH" dirty="0" err="1"/>
-              <a:t>avg_word_len</a:t>
-            </a:r>
-            <a:r>
-              <a:rPr lang="de-CH" dirty="0"/>
-              <a:t>         	4.206            -0.003</a:t>
-            </a:r>
-            <a:br>
-              <a:rPr lang="de-CH" dirty="0"/>
-            </a:br>
-            <a:r>
-              <a:rPr lang="de-CH" dirty="0" err="1"/>
+              <a:rPr lang="en-GB" dirty="0">
+                <a:highlight>
+                  <a:srgbClr val="FFFF00"/>
+                </a:highlight>
+              </a:rPr>
+              <a:t>           	25.3%</a:t>
+            </a:r>
+          </a:p>
+          <a:p>
+            <a:pPr marL="0" indent="0">
+              <a:buNone/>
+            </a:pPr>
+            <a:r>
+              <a:rPr lang="en-GB" dirty="0"/>
+              <a:t>	</a:t>
+            </a:r>
+            <a:r>
+              <a:rPr lang="en-GB" dirty="0" err="1">
+                <a:highlight>
+                  <a:srgbClr val="FFFF00"/>
+                </a:highlight>
+              </a:rPr>
+              <a:t>char_len</a:t>
+            </a:r>
+            <a:r>
+              <a:rPr lang="en-GB" dirty="0">
+                <a:highlight>
+                  <a:srgbClr val="FFFF00"/>
+                </a:highlight>
+              </a:rPr>
+              <a:t>                  		25.1%</a:t>
+            </a:r>
+          </a:p>
+          <a:p>
+            <a:pPr marL="0" indent="0">
+              <a:buNone/>
+            </a:pPr>
+            <a:r>
+              <a:rPr lang="en-GB" dirty="0"/>
+              <a:t>	</a:t>
+            </a:r>
+            <a:r>
+              <a:rPr lang="en-GB" dirty="0" err="1"/>
+              <a:t>word_len</a:t>
+            </a:r>
+            <a:r>
+              <a:rPr lang="en-GB" dirty="0"/>
+              <a:t>                  	9.2%</a:t>
+            </a:r>
+          </a:p>
+          <a:p>
+            <a:pPr marL="0" indent="0">
+              <a:buNone/>
+            </a:pPr>
+            <a:r>
+              <a:rPr lang="en-GB" dirty="0"/>
+              <a:t>	</a:t>
+            </a:r>
+            <a:r>
+              <a:rPr lang="en-GB" dirty="0" err="1"/>
+              <a:t>sentence_count</a:t>
+            </a:r>
+            <a:r>
+              <a:rPr lang="en-GB" dirty="0"/>
+              <a:t>            	7.7%</a:t>
+            </a:r>
+          </a:p>
+          <a:p>
+            <a:pPr marL="0" indent="0">
+              <a:buNone/>
+            </a:pPr>
+            <a:r>
+              <a:rPr lang="en-GB" dirty="0"/>
+              <a:t>	</a:t>
+            </a:r>
+            <a:r>
+              <a:rPr lang="en-GB" dirty="0" err="1"/>
               <a:t>exclamation_count</a:t>
             </a:r>
             <a:r>
-              <a:rPr lang="de-CH" dirty="0"/>
-              <a:t>    	0.407            -0.027</a:t>
-            </a:r>
-            <a:br>
-              <a:rPr lang="de-CH" dirty="0"/>
-            </a:br>
-            <a:r>
-              <a:rPr lang="de-CH" dirty="0" err="1"/>
+              <a:rPr lang="en-GB" dirty="0"/>
+              <a:t> 	3.8%</a:t>
+            </a:r>
+          </a:p>
+          <a:p>
+            <a:pPr marL="0" indent="0">
+              <a:buNone/>
+            </a:pPr>
+            <a:r>
+              <a:rPr lang="en-GB" dirty="0"/>
+              <a:t>	</a:t>
+            </a:r>
+            <a:r>
+              <a:rPr lang="en-GB" dirty="0" err="1"/>
               <a:t>question_count</a:t>
             </a:r>
             <a:r>
-              <a:rPr lang="de-CH" dirty="0"/>
-              <a:t>       	0.060            -0.047</a:t>
-            </a:r>
-            <a:br>
-              <a:rPr lang="de-CH" dirty="0"/>
-            </a:br>
-            <a:r>
-              <a:rPr lang="de-CH" dirty="0" err="1"/>
-              <a:t>sentence_count</a:t>
-            </a:r>
-            <a:r>
-              <a:rPr lang="de-CH" dirty="0"/>
-              <a:t>       	5.603            -0.191</a:t>
-            </a:r>
-            <a:br>
-              <a:rPr lang="de-CH" dirty="0"/>
-            </a:br>
-            <a:r>
-              <a:rPr lang="de-CH" dirty="0" err="1"/>
-              <a:t>char_len</a:t>
-            </a:r>
-            <a:r>
-              <a:rPr lang="de-CH" dirty="0"/>
-              <a:t>           		354.598        -0.205</a:t>
-            </a:r>
-            <a:br>
-              <a:rPr lang="de-CH" dirty="0"/>
-            </a:br>
-            <a:r>
-              <a:rPr lang="de-CH" dirty="0" err="1"/>
-              <a:t>word_len</a:t>
-            </a:r>
-            <a:r>
-              <a:rPr lang="de-CH" dirty="0"/>
-              <a:t>            		68.066          -0.206</a:t>
-            </a:r>
+              <a:rPr lang="en-GB" dirty="0"/>
+              <a:t>            	0.4%</a:t>
+            </a:r>
+            <a:endParaRPr lang="en-CH" dirty="0"/>
+          </a:p>
+          <a:p>
+            <a:endParaRPr lang="de-CH" dirty="0"/>
           </a:p>
         </p:txBody>
       </p:sp>
@@ -6551,7 +6482,7 @@
           <p:cNvPr id="4" name="Date Placeholder 3">
             <a:extLst>
               <a:ext uri="{FF2B5EF4-FFF2-40B4-BE49-F238E27FC236}">
-                <a16:creationId xmlns:a16="http://schemas.microsoft.com/office/drawing/2014/main" id="{C0DEEB3E-7BAE-1A92-A291-7728BDC75E8B}"/>
+                <a16:creationId xmlns:a16="http://schemas.microsoft.com/office/drawing/2014/main" id="{AB5E8D05-4B0C-DE8F-957A-D035CF06D329}"/>
               </a:ext>
             </a:extLst>
           </p:cNvPr>
@@ -6569,7 +6500,7 @@
           <a:p>
             <a:fld id="{EE15D7BA-2F5F-8E43-91CB-647D382EDB87}" type="datetime4">
               <a:rPr lang="de-CH" smtClean="0"/>
-              <a:t>15. Juni 2026</a:t>
+              <a:t>16. Juni 2026</a:t>
             </a:fld>
             <a:endParaRPr lang="en-CH"/>
           </a:p>
@@ -6580,7 +6511,7 @@
           <p:cNvPr id="5" name="Footer Placeholder 4">
             <a:extLst>
               <a:ext uri="{FF2B5EF4-FFF2-40B4-BE49-F238E27FC236}">
-                <a16:creationId xmlns:a16="http://schemas.microsoft.com/office/drawing/2014/main" id="{9B1E3E48-9BBA-9F97-FCAE-5AB32DE39E08}"/>
+                <a16:creationId xmlns:a16="http://schemas.microsoft.com/office/drawing/2014/main" id="{0CAB726F-11F4-A734-B7F5-9349EB9326BD}"/>
               </a:ext>
             </a:extLst>
           </p:cNvPr>
@@ -6609,7 +6540,7 @@
           <p:cNvPr id="6" name="Slide Number Placeholder 5">
             <a:extLst>
               <a:ext uri="{FF2B5EF4-FFF2-40B4-BE49-F238E27FC236}">
-                <a16:creationId xmlns:a16="http://schemas.microsoft.com/office/drawing/2014/main" id="{2DB5A815-DB33-5B9D-9352-651643196563}"/>
+                <a16:creationId xmlns:a16="http://schemas.microsoft.com/office/drawing/2014/main" id="{47DE6C6C-E49E-5A08-5EFE-57410C3D712E}"/>
               </a:ext>
             </a:extLst>
           </p:cNvPr>
@@ -6638,7 +6569,7 @@
           <p:cNvPr id="7" name="Rounded Rectangular Callout 6">
             <a:extLst>
               <a:ext uri="{FF2B5EF4-FFF2-40B4-BE49-F238E27FC236}">
-                <a16:creationId xmlns:a16="http://schemas.microsoft.com/office/drawing/2014/main" id="{C597F510-B8C5-CF4F-6950-F26671755087}"/>
+                <a16:creationId xmlns:a16="http://schemas.microsoft.com/office/drawing/2014/main" id="{0F1D92C1-2561-182F-558C-174DBE8C0998}"/>
               </a:ext>
             </a:extLst>
           </p:cNvPr>
@@ -6647,7 +6578,373 @@
         </p:nvSpPr>
         <p:spPr>
           <a:xfrm>
-            <a:off x="8153400" y="4850826"/>
+            <a:off x="7274951" y="3230402"/>
+            <a:ext cx="4476345" cy="1786663"/>
+          </a:xfrm>
+          <a:prstGeom prst="wedgeRoundRectCallout">
+            <a:avLst>
+              <a:gd name="adj1" fmla="val -63468"/>
+              <a:gd name="adj2" fmla="val 5765"/>
+              <a:gd name="adj3" fmla="val 16667"/>
+            </a:avLst>
+          </a:prstGeom>
+          <a:solidFill>
+            <a:schemeClr val="accent4">
+              <a:lumMod val="20000"/>
+              <a:lumOff val="80000"/>
+            </a:schemeClr>
+          </a:solidFill>
+        </p:spPr>
+        <p:style>
+          <a:lnRef idx="2">
+            <a:schemeClr val="accent1">
+              <a:shade val="15000"/>
+            </a:schemeClr>
+          </a:lnRef>
+          <a:fillRef idx="1">
+            <a:schemeClr val="accent1"/>
+          </a:fillRef>
+          <a:effectRef idx="0">
+            <a:schemeClr val="accent1"/>
+          </a:effectRef>
+          <a:fontRef idx="minor">
+            <a:schemeClr val="lt1"/>
+          </a:fontRef>
+        </p:style>
+        <p:txBody>
+          <a:bodyPr rtlCol="0" anchor="ctr"/>
+          <a:lstStyle/>
+          <a:p>
+            <a:r>
+              <a:rPr lang="en-CH" dirty="0">
+                <a:solidFill>
+                  <a:schemeClr val="tx1"/>
+                </a:solidFill>
+              </a:rPr>
+              <a:t>Die Schwierigkeit der Modellvorhersagen wird hauptsächlich durch einfache stilistische Eigenschaften des Textes bestimmt, insbesondere Länge, Wortstruktur und Grossschreibung.</a:t>
+            </a:r>
+          </a:p>
+        </p:txBody>
+      </p:sp>
+    </p:spTree>
+    <p:extLst>
+      <p:ext uri="{BB962C8B-B14F-4D97-AF65-F5344CB8AC3E}">
+        <p14:creationId xmlns:p14="http://schemas.microsoft.com/office/powerpoint/2010/main" val="951959906"/>
+      </p:ext>
+    </p:extLst>
+  </p:cSld>
+  <p:clrMapOvr>
+    <a:masterClrMapping/>
+  </p:clrMapOvr>
+</p:sld>
+</file>
+
+<file path=ppt/slides/slide13.xml><?xml version="1.0" encoding="utf-8"?>
+<p:sld xmlns:a="http://schemas.openxmlformats.org/drawingml/2006/main" xmlns:r="http://schemas.openxmlformats.org/officeDocument/2006/relationships" xmlns:p="http://schemas.openxmlformats.org/presentationml/2006/main" show="0">
+  <p:cSld>
+    <p:spTree>
+      <p:nvGrpSpPr>
+        <p:cNvPr id="1" name=""/>
+        <p:cNvGrpSpPr/>
+        <p:nvPr/>
+      </p:nvGrpSpPr>
+      <p:grpSpPr>
+        <a:xfrm>
+          <a:off x="0" y="0"/>
+          <a:ext cx="0" cy="0"/>
+          <a:chOff x="0" y="0"/>
+          <a:chExt cx="0" cy="0"/>
+        </a:xfrm>
+      </p:grpSpPr>
+      <p:sp>
+        <p:nvSpPr>
+          <p:cNvPr id="2" name="Title 1">
+            <a:extLst>
+              <a:ext uri="{FF2B5EF4-FFF2-40B4-BE49-F238E27FC236}">
+                <a16:creationId xmlns:a16="http://schemas.microsoft.com/office/drawing/2014/main" id="{7EBD88F3-E0C7-ABCA-B9C9-30DB8AAE601B}"/>
+              </a:ext>
+            </a:extLst>
+          </p:cNvPr>
+          <p:cNvSpPr>
+            <a:spLocks noGrp="1"/>
+          </p:cNvSpPr>
+          <p:nvPr>
+            <p:ph type="title"/>
+          </p:nvPr>
+        </p:nvSpPr>
+        <p:spPr/>
+        <p:txBody>
+          <a:bodyPr/>
+          <a:lstStyle/>
+          <a:p>
+            <a:r>
+              <a:rPr lang="de-CH" dirty="0"/>
+              <a:t>Korrelation Schwierigkeit / Features</a:t>
+            </a:r>
+          </a:p>
+        </p:txBody>
+      </p:sp>
+      <p:sp>
+        <p:nvSpPr>
+          <p:cNvPr id="3" name="Content Placeholder 2">
+            <a:extLst>
+              <a:ext uri="{FF2B5EF4-FFF2-40B4-BE49-F238E27FC236}">
+                <a16:creationId xmlns:a16="http://schemas.microsoft.com/office/drawing/2014/main" id="{864C35EB-F541-D831-6C85-0304F0C6F6DC}"/>
+              </a:ext>
+            </a:extLst>
+          </p:cNvPr>
+          <p:cNvSpPr>
+            <a:spLocks noGrp="1"/>
+          </p:cNvSpPr>
+          <p:nvPr>
+            <p:ph idx="1"/>
+          </p:nvPr>
+        </p:nvSpPr>
+        <p:spPr/>
+        <p:txBody>
+          <a:bodyPr/>
+          <a:lstStyle/>
+          <a:p>
+            <a:pPr marL="0" indent="0">
+              <a:buNone/>
+            </a:pPr>
+            <a:r>
+              <a:rPr lang="de-CH" dirty="0"/>
+              <a:t>Feature			</a:t>
+            </a:r>
+            <a:r>
+              <a:rPr lang="de-CH" dirty="0" err="1"/>
+              <a:t>mean</a:t>
+            </a:r>
+            <a:r>
+              <a:rPr lang="de-CH" dirty="0"/>
+              <a:t>  	</a:t>
+            </a:r>
+            <a:r>
+              <a:rPr lang="de-CH" dirty="0" err="1"/>
+              <a:t>corr_with_difficulty</a:t>
+            </a:r>
+            <a:endParaRPr lang="de-CH" dirty="0"/>
+          </a:p>
+          <a:p>
+            <a:pPr marL="0" indent="0">
+              <a:buNone/>
+            </a:pPr>
+            <a:r>
+              <a:rPr lang="de-CH" dirty="0" err="1">
+                <a:highlight>
+                  <a:srgbClr val="FFFF00"/>
+                </a:highlight>
+              </a:rPr>
+              <a:t>uppercase_ratio</a:t>
+            </a:r>
+            <a:r>
+              <a:rPr lang="de-CH" dirty="0"/>
+              <a:t>      	0.029            0.061</a:t>
+            </a:r>
+            <a:br>
+              <a:rPr lang="de-CH" dirty="0"/>
+            </a:br>
+            <a:r>
+              <a:rPr lang="de-CH" dirty="0" err="1">
+                <a:highlight>
+                  <a:srgbClr val="FFFF00"/>
+                </a:highlight>
+              </a:rPr>
+              <a:t>avg_word_len</a:t>
+            </a:r>
+            <a:r>
+              <a:rPr lang="de-CH" dirty="0"/>
+              <a:t>         	4.206            </a:t>
+            </a:r>
+            <a:r>
+              <a:rPr lang="de-CH" dirty="0">
+                <a:highlight>
+                  <a:srgbClr val="FFFF00"/>
+                </a:highlight>
+              </a:rPr>
+              <a:t>-</a:t>
+            </a:r>
+            <a:r>
+              <a:rPr lang="de-CH" dirty="0"/>
+              <a:t>0.003</a:t>
+            </a:r>
+            <a:br>
+              <a:rPr lang="de-CH" dirty="0"/>
+            </a:br>
+            <a:r>
+              <a:rPr lang="de-CH" dirty="0" err="1"/>
+              <a:t>exclamation_count</a:t>
+            </a:r>
+            <a:r>
+              <a:rPr lang="de-CH" dirty="0"/>
+              <a:t>    	0.407            -0.027</a:t>
+            </a:r>
+            <a:br>
+              <a:rPr lang="de-CH" dirty="0"/>
+            </a:br>
+            <a:r>
+              <a:rPr lang="de-CH" dirty="0" err="1"/>
+              <a:t>question_count</a:t>
+            </a:r>
+            <a:r>
+              <a:rPr lang="de-CH" dirty="0"/>
+              <a:t>       	0.060            -0.047</a:t>
+            </a:r>
+            <a:br>
+              <a:rPr lang="de-CH" dirty="0"/>
+            </a:br>
+            <a:r>
+              <a:rPr lang="de-CH" dirty="0" err="1"/>
+              <a:t>sentence_count</a:t>
+            </a:r>
+            <a:r>
+              <a:rPr lang="de-CH" dirty="0"/>
+              <a:t>       	5.603            -0.191</a:t>
+            </a:r>
+            <a:br>
+              <a:rPr lang="de-CH" dirty="0"/>
+            </a:br>
+            <a:r>
+              <a:rPr lang="de-CH" dirty="0" err="1">
+                <a:highlight>
+                  <a:srgbClr val="FFFF00"/>
+                </a:highlight>
+              </a:rPr>
+              <a:t>char_len</a:t>
+            </a:r>
+            <a:r>
+              <a:rPr lang="de-CH" dirty="0"/>
+              <a:t>           		354.598        </a:t>
+            </a:r>
+            <a:r>
+              <a:rPr lang="de-CH" dirty="0">
+                <a:highlight>
+                  <a:srgbClr val="FFFF00"/>
+                </a:highlight>
+              </a:rPr>
+              <a:t>-</a:t>
+            </a:r>
+            <a:r>
+              <a:rPr lang="de-CH" dirty="0"/>
+              <a:t>0.205</a:t>
+            </a:r>
+            <a:br>
+              <a:rPr lang="de-CH" dirty="0"/>
+            </a:br>
+            <a:r>
+              <a:rPr lang="de-CH" dirty="0" err="1"/>
+              <a:t>word_len</a:t>
+            </a:r>
+            <a:r>
+              <a:rPr lang="de-CH" dirty="0"/>
+              <a:t>            		68.066          -0.206</a:t>
+            </a:r>
+          </a:p>
+        </p:txBody>
+      </p:sp>
+      <p:sp>
+        <p:nvSpPr>
+          <p:cNvPr id="4" name="Date Placeholder 3">
+            <a:extLst>
+              <a:ext uri="{FF2B5EF4-FFF2-40B4-BE49-F238E27FC236}">
+                <a16:creationId xmlns:a16="http://schemas.microsoft.com/office/drawing/2014/main" id="{C0DEEB3E-7BAE-1A92-A291-7728BDC75E8B}"/>
+              </a:ext>
+            </a:extLst>
+          </p:cNvPr>
+          <p:cNvSpPr>
+            <a:spLocks noGrp="1"/>
+          </p:cNvSpPr>
+          <p:nvPr>
+            <p:ph type="dt" sz="half" idx="10"/>
+          </p:nvPr>
+        </p:nvSpPr>
+        <p:spPr/>
+        <p:txBody>
+          <a:bodyPr/>
+          <a:lstStyle/>
+          <a:p>
+            <a:fld id="{EE15D7BA-2F5F-8E43-91CB-647D382EDB87}" type="datetime4">
+              <a:rPr lang="de-CH" smtClean="0"/>
+              <a:t>16. Juni 2026</a:t>
+            </a:fld>
+            <a:endParaRPr lang="en-CH"/>
+          </a:p>
+        </p:txBody>
+      </p:sp>
+      <p:sp>
+        <p:nvSpPr>
+          <p:cNvPr id="5" name="Footer Placeholder 4">
+            <a:extLst>
+              <a:ext uri="{FF2B5EF4-FFF2-40B4-BE49-F238E27FC236}">
+                <a16:creationId xmlns:a16="http://schemas.microsoft.com/office/drawing/2014/main" id="{9B1E3E48-9BBA-9F97-FCAE-5AB32DE39E08}"/>
+              </a:ext>
+            </a:extLst>
+          </p:cNvPr>
+          <p:cNvSpPr>
+            <a:spLocks noGrp="1"/>
+          </p:cNvSpPr>
+          <p:nvPr>
+            <p:ph type="ftr" sz="quarter" idx="11"/>
+          </p:nvPr>
+        </p:nvSpPr>
+        <p:spPr/>
+        <p:txBody>
+          <a:bodyPr/>
+          <a:lstStyle/>
+          <a:p>
+            <a:r>
+              <a:rPr lang="en-GB"/>
+              <a:t>Text Analysis- Svetlana Khominich, Ralph Müller, David Beer </a:t>
+            </a:r>
+            <a:endParaRPr lang="en-CH" dirty="0"/>
+          </a:p>
+        </p:txBody>
+      </p:sp>
+      <p:sp>
+        <p:nvSpPr>
+          <p:cNvPr id="6" name="Slide Number Placeholder 5">
+            <a:extLst>
+              <a:ext uri="{FF2B5EF4-FFF2-40B4-BE49-F238E27FC236}">
+                <a16:creationId xmlns:a16="http://schemas.microsoft.com/office/drawing/2014/main" id="{2DB5A815-DB33-5B9D-9352-651643196563}"/>
+              </a:ext>
+            </a:extLst>
+          </p:cNvPr>
+          <p:cNvSpPr>
+            <a:spLocks noGrp="1"/>
+          </p:cNvSpPr>
+          <p:nvPr>
+            <p:ph type="sldNum" sz="quarter" idx="12"/>
+          </p:nvPr>
+        </p:nvSpPr>
+        <p:spPr/>
+        <p:txBody>
+          <a:bodyPr/>
+          <a:lstStyle/>
+          <a:p>
+            <a:fld id="{221FD296-2B0C-4A4B-AFAC-2E3A842869F0}" type="slidenum">
+              <a:rPr lang="en-CH" smtClean="0"/>
+              <a:t>13</a:t>
+            </a:fld>
+            <a:endParaRPr lang="en-CH"/>
+          </a:p>
+        </p:txBody>
+      </p:sp>
+      <p:sp>
+        <p:nvSpPr>
+          <p:cNvPr id="7" name="Rounded Rectangular Callout 6">
+            <a:extLst>
+              <a:ext uri="{FF2B5EF4-FFF2-40B4-BE49-F238E27FC236}">
+                <a16:creationId xmlns:a16="http://schemas.microsoft.com/office/drawing/2014/main" id="{C597F510-B8C5-CF4F-6950-F26671755087}"/>
+              </a:ext>
+            </a:extLst>
+          </p:cNvPr>
+          <p:cNvSpPr/>
+          <p:nvPr/>
+        </p:nvSpPr>
+        <p:spPr>
+          <a:xfrm>
+            <a:off x="7690262" y="4720197"/>
             <a:ext cx="3949430" cy="1326137"/>
           </a:xfrm>
           <a:prstGeom prst="wedgeRoundRectCallout">
@@ -6718,7 +7015,7 @@
 </p:sld>
 </file>
 
-<file path=ppt/slides/slide13.xml><?xml version="1.0" encoding="utf-8"?>
+<file path=ppt/slides/slide14.xml><?xml version="1.0" encoding="utf-8"?>
 <p:sld xmlns:a="http://schemas.openxmlformats.org/drawingml/2006/main" xmlns:r="http://schemas.openxmlformats.org/officeDocument/2006/relationships" xmlns:p="http://schemas.openxmlformats.org/presentationml/2006/main">
   <p:cSld>
     <p:spTree>
@@ -6760,7 +7057,7 @@
           <a:p>
             <a:r>
               <a:rPr lang="en-CH" dirty="0"/>
-              <a:t>Ling. Schwierigkeit - # Named Entities</a:t>
+              <a:t>Linguistic Diffic. # Named Entities</a:t>
             </a:r>
             <a:endParaRPr lang="de-CH" dirty="0"/>
           </a:p>
@@ -6785,29 +7082,58 @@
         <p:spPr/>
         <p:txBody>
           <a:bodyPr>
-            <a:normAutofit fontScale="92500" lnSpcReduction="20000"/>
+            <a:normAutofit fontScale="85000" lnSpcReduction="20000"/>
           </a:bodyPr>
           <a:lstStyle/>
           <a:p>
+            <a:pPr marL="0" indent="0">
+              <a:buNone/>
+            </a:pPr>
             <a:r>
               <a:rPr lang="de-CH" dirty="0" err="1"/>
               <a:t>Spacy</a:t>
             </a:r>
+            <a:r>
+              <a:rPr lang="de-CH" dirty="0"/>
+              <a:t> (SW Modul)</a:t>
+            </a:r>
+          </a:p>
+          <a:p>
+            <a:pPr marL="0" indent="0">
+              <a:buNone/>
+            </a:pPr>
             <a:endParaRPr lang="de-CH" dirty="0"/>
           </a:p>
           <a:p>
+            <a:pPr marL="0" indent="0">
+              <a:buNone/>
+            </a:pPr>
+            <a:r>
+              <a:rPr lang="de-CH" dirty="0"/>
+              <a:t>«</a:t>
+            </a:r>
             <a:r>
               <a:rPr lang="en-CH" dirty="0"/>
               <a:t>I bought an iPhone from Apple for $999 in New York</a:t>
             </a:r>
-          </a:p>
-          <a:p>
+            <a:r>
+              <a:rPr lang="de-CH" dirty="0"/>
+              <a:t>»</a:t>
+            </a:r>
+          </a:p>
+          <a:p>
+            <a:pPr marL="0" indent="0">
+              <a:buNone/>
+            </a:pPr>
             <a:r>
               <a:rPr lang="en-CH" dirty="0"/>
-              <a:t>ents: [iPhone (PRODUCT), Apple (ORG), $999 (MONEY), New York (GPE)]</a:t>
-            </a:r>
-          </a:p>
-          <a:p>
+              <a:t>entities: iPhone (PRODUCT), Apple (ORG), $999 (MONEY), New York (GPE)</a:t>
+            </a:r>
+          </a:p>
+          <a:p>
+            <a:pPr marL="0" indent="0">
+              <a:buNone/>
+            </a:pPr>
             <a:r>
               <a:rPr lang="en-CH" dirty="0"/>
               <a:t>→ entity_count = 4</a:t>
@@ -6817,30 +7143,45 @@
             <a:endParaRPr lang="en-CH" dirty="0"/>
           </a:p>
           <a:p>
+            <a:pPr marL="0" indent="0">
+              <a:buNone/>
+            </a:pPr>
             <a:r>
               <a:rPr lang="en-CH" dirty="0"/>
               <a:t>difficulty 	count_texts 	mean_entities</a:t>
             </a:r>
           </a:p>
           <a:p>
+            <a:pPr marL="0" indent="0">
+              <a:buNone/>
+            </a:pPr>
             <a:r>
               <a:rPr lang="en-CH" dirty="0"/>
               <a:t>0 		6489 		2.29</a:t>
             </a:r>
           </a:p>
           <a:p>
+            <a:pPr marL="0" indent="0">
+              <a:buNone/>
+            </a:pPr>
             <a:r>
               <a:rPr lang="en-CH" dirty="0"/>
               <a:t>1 		975 		1.28</a:t>
             </a:r>
           </a:p>
           <a:p>
+            <a:pPr marL="0" indent="0">
+              <a:buNone/>
+            </a:pPr>
             <a:r>
               <a:rPr lang="en-CH" dirty="0"/>
               <a:t>2 		438 		1.13</a:t>
             </a:r>
           </a:p>
           <a:p>
+            <a:pPr marL="0" indent="0">
+              <a:buNone/>
+            </a:pPr>
             <a:r>
               <a:rPr lang="en-CH" dirty="0"/>
               <a:t>3 		185 		0.76</a:t>
@@ -6877,7 +7218,7 @@
           <a:p>
             <a:fld id="{EE15D7BA-2F5F-8E43-91CB-647D382EDB87}" type="datetime4">
               <a:rPr lang="de-CH" smtClean="0"/>
-              <a:t>15. Juni 2026</a:t>
+              <a:t>16. Juni 2026</a:t>
             </a:fld>
             <a:endParaRPr lang="en-CH"/>
           </a:p>
@@ -6935,7 +7276,7 @@
           <a:p>
             <a:fld id="{221FD296-2B0C-4A4B-AFAC-2E3A842869F0}" type="slidenum">
               <a:rPr lang="en-CH" smtClean="0"/>
-              <a:t>13</a:t>
+              <a:t>14</a:t>
             </a:fld>
             <a:endParaRPr lang="en-CH"/>
           </a:p>
@@ -6955,7 +7296,7 @@
         </p:nvSpPr>
         <p:spPr>
           <a:xfrm>
-            <a:off x="8153400" y="4850826"/>
+            <a:off x="7239000" y="4553943"/>
             <a:ext cx="3949430" cy="1326137"/>
           </a:xfrm>
           <a:prstGeom prst="wedgeRoundRectCallout">
@@ -7016,8 +7357,8 @@
 </p:sld>
 </file>
 
-<file path=ppt/slides/slide14.xml><?xml version="1.0" encoding="utf-8"?>
-<p:sld xmlns:a="http://schemas.openxmlformats.org/drawingml/2006/main" xmlns:r="http://schemas.openxmlformats.org/officeDocument/2006/relationships" xmlns:p="http://schemas.openxmlformats.org/presentationml/2006/main">
+<file path=ppt/slides/slide15.xml><?xml version="1.0" encoding="utf-8"?>
+<p:sld xmlns:a="http://schemas.openxmlformats.org/drawingml/2006/main" xmlns:r="http://schemas.openxmlformats.org/officeDocument/2006/relationships" xmlns:p="http://schemas.openxmlformats.org/presentationml/2006/main" show="0">
   <p:cSld>
     <p:spTree>
       <p:nvGrpSpPr>
@@ -7087,32 +7428,45 @@
           </a:bodyPr>
           <a:lstStyle/>
           <a:p>
+            <a:pPr marL="0" indent="0">
+              <a:buNone/>
+            </a:pPr>
             <a:r>
               <a:rPr lang="en-CH" dirty="0"/>
               <a:t>Nutzung eines Concreteness Lexikons (Brysbaert et al.)</a:t>
             </a:r>
           </a:p>
           <a:p>
+            <a:pPr marL="0" indent="0">
+              <a:buNone/>
+            </a:pPr>
             <a:r>
               <a:rPr lang="en-CH" dirty="0"/>
               <a:t>Jedem Wort ist ein Wert zugeordnet (1-5)</a:t>
             </a:r>
           </a:p>
           <a:p>
-            <a:pPr lvl="1"/>
+            <a:pPr marL="457200" lvl="1" indent="0">
+              <a:buNone/>
+            </a:pPr>
             <a:r>
               <a:rPr lang="en-CH" dirty="0"/>
               <a:t>1 sehr abstrakt (idea, good, quality)</a:t>
             </a:r>
           </a:p>
           <a:p>
-            <a:pPr lvl="1"/>
+            <a:pPr marL="457200" lvl="1" indent="0">
+              <a:buNone/>
+            </a:pPr>
             <a:r>
               <a:rPr lang="en-CH" dirty="0"/>
               <a:t>5 seht konkret (dog, table)</a:t>
             </a:r>
           </a:p>
           <a:p>
+            <a:pPr marL="0" indent="0">
+              <a:buNone/>
+            </a:pPr>
             <a:r>
               <a:rPr lang="en-CH" dirty="0"/>
               <a:t>Für jeden Text:</a:t>
@@ -7126,6 +7480,9 @@
             </a:r>
           </a:p>
           <a:p>
+            <a:pPr marL="0" indent="0">
+              <a:buNone/>
+            </a:pPr>
             <a:r>
               <a:rPr lang="en-CH" dirty="0"/>
               <a:t>Interpretation</a:t>
@@ -7172,7 +7529,7 @@
           <a:p>
             <a:fld id="{EE15D7BA-2F5F-8E43-91CB-647D382EDB87}" type="datetime4">
               <a:rPr lang="de-CH" smtClean="0"/>
-              <a:t>15. Juni 2026</a:t>
+              <a:t>16. Juni 2026</a:t>
             </a:fld>
             <a:endParaRPr lang="en-CH"/>
           </a:p>
@@ -7230,7 +7587,7 @@
           <a:p>
             <a:fld id="{221FD296-2B0C-4A4B-AFAC-2E3A842869F0}" type="slidenum">
               <a:rPr lang="en-CH" smtClean="0"/>
-              <a:t>14</a:t>
+              <a:t>15</a:t>
             </a:fld>
             <a:endParaRPr lang="en-CH"/>
           </a:p>
@@ -7311,7 +7668,7 @@
 </p:sld>
 </file>
 
-<file path=ppt/slides/slide15.xml><?xml version="1.0" encoding="utf-8"?>
+<file path=ppt/slides/slide16.xml><?xml version="1.0" encoding="utf-8"?>
 <p:sld xmlns:a="http://schemas.openxmlformats.org/drawingml/2006/main" xmlns:r="http://schemas.openxmlformats.org/officeDocument/2006/relationships" xmlns:p="http://schemas.openxmlformats.org/presentationml/2006/main">
   <p:cSld>
     <p:spTree>
@@ -7385,50 +7742,65 @@
           <a:bodyPr/>
           <a:lstStyle/>
           <a:p>
-            <a:r>
-              <a:rPr lang="de-CH" dirty="0"/>
-              <a:t>Sentiment mit </a:t>
-            </a:r>
-            <a:r>
-              <a:rPr lang="de-CH" dirty="0" err="1"/>
-              <a:t>TextBlob</a:t>
-            </a:r>
-            <a:r>
-              <a:rPr lang="de-CH" dirty="0"/>
-              <a:t> (&lt; 0 neg. &gt; 0 pos.)</a:t>
-            </a:r>
-          </a:p>
-          <a:p>
             <a:pPr marL="0" indent="0">
               <a:buNone/>
             </a:pPr>
             <a:r>
+              <a:rPr lang="de-CH" dirty="0"/>
+              <a:t>Sentiment mit </a:t>
+            </a:r>
+            <a:r>
+              <a:rPr lang="de-CH" dirty="0" err="1"/>
+              <a:t>TextBlob</a:t>
+            </a:r>
+            <a:r>
+              <a:rPr lang="de-CH" dirty="0"/>
+              <a:t> (&lt; 0 neg. &gt; 0 pos.)</a:t>
+            </a:r>
+          </a:p>
+          <a:p>
+            <a:pPr marL="0" indent="0">
+              <a:buNone/>
+            </a:pPr>
+            <a:r>
               <a:rPr lang="en-CH" dirty="0"/>
-              <a:t>difficulty 	count_texts 	mean 		median</a:t>
-            </a:r>
-          </a:p>
-          <a:p>
+              <a:t>difficulty 	count_texts 		mean 		median</a:t>
+            </a:r>
+          </a:p>
+          <a:p>
+            <a:pPr marL="0" indent="0">
+              <a:buNone/>
+            </a:pPr>
             <a:r>
               <a:rPr lang="en-CH" dirty="0"/>
-              <a:t>0 		6489 		0.260 		0.251</a:t>
-            </a:r>
-          </a:p>
-          <a:p>
+              <a:t>0 		6489 			0.260 		0.251</a:t>
+            </a:r>
+          </a:p>
+          <a:p>
+            <a:pPr marL="0" indent="0">
+              <a:buNone/>
+            </a:pPr>
             <a:r>
               <a:rPr lang="en-CH" dirty="0"/>
-              <a:t>1 		975 		0.267 		0.271</a:t>
-            </a:r>
-          </a:p>
-          <a:p>
+              <a:t>1 		975 			0.267 		0.271</a:t>
+            </a:r>
+          </a:p>
+          <a:p>
+            <a:pPr marL="0" indent="0">
+              <a:buNone/>
+            </a:pPr>
             <a:r>
               <a:rPr lang="en-CH" dirty="0"/>
-              <a:t>2 		438 		0.276 		0.267</a:t>
-            </a:r>
-          </a:p>
-          <a:p>
+              <a:t>2 		438 			0.276 		0.267</a:t>
+            </a:r>
+          </a:p>
+          <a:p>
+            <a:pPr marL="0" indent="0">
+              <a:buNone/>
+            </a:pPr>
             <a:r>
               <a:rPr lang="en-CH" dirty="0"/>
-              <a:t>3 		185 		0.338	 	0.325</a:t>
+              <a:t>3 		185 			0.338	 	0.325</a:t>
             </a:r>
           </a:p>
           <a:p>
@@ -7459,7 +7831,7 @@
           <a:p>
             <a:fld id="{EE15D7BA-2F5F-8E43-91CB-647D382EDB87}" type="datetime4">
               <a:rPr lang="de-CH" smtClean="0"/>
-              <a:t>15. Juni 2026</a:t>
+              <a:t>16. Juni 2026</a:t>
             </a:fld>
             <a:endParaRPr lang="en-CH"/>
           </a:p>
@@ -7517,7 +7889,7 @@
           <a:p>
             <a:fld id="{221FD296-2B0C-4A4B-AFAC-2E3A842869F0}" type="slidenum">
               <a:rPr lang="en-CH" smtClean="0"/>
-              <a:t>15</a:t>
+              <a:t>16</a:t>
             </a:fld>
             <a:endParaRPr lang="en-CH"/>
           </a:p>
@@ -7537,7 +7909,7 @@
         </p:nvSpPr>
         <p:spPr>
           <a:xfrm>
-            <a:off x="6762345" y="5113473"/>
+            <a:off x="6635885" y="5018470"/>
             <a:ext cx="3949430" cy="956587"/>
           </a:xfrm>
           <a:prstGeom prst="wedgeRoundRectCallout">
@@ -7616,8 +7988,8 @@
 </p:sld>
 </file>
 
-<file path=ppt/slides/slide16.xml><?xml version="1.0" encoding="utf-8"?>
-<p:sld xmlns:a="http://schemas.openxmlformats.org/drawingml/2006/main" xmlns:r="http://schemas.openxmlformats.org/officeDocument/2006/relationships" xmlns:p="http://schemas.openxmlformats.org/presentationml/2006/main">
+<file path=ppt/slides/slide17.xml><?xml version="1.0" encoding="utf-8"?>
+<p:sld xmlns:a="http://schemas.openxmlformats.org/drawingml/2006/main" xmlns:r="http://schemas.openxmlformats.org/officeDocument/2006/relationships" xmlns:p="http://schemas.openxmlformats.org/presentationml/2006/main" show="0">
   <p:cSld>
     <p:spTree>
       <p:nvGrpSpPr>
@@ -7683,7 +8055,7 @@
         <p:spPr/>
         <p:txBody>
           <a:bodyPr>
-            <a:normAutofit fontScale="55000" lnSpcReduction="20000"/>
+            <a:normAutofit fontScale="62500" lnSpcReduction="20000"/>
           </a:bodyPr>
           <a:lstStyle/>
           <a:p>
@@ -7701,27 +8073,21 @@
             </a:r>
             <a:r>
               <a:rPr lang="de-CH" dirty="0"/>
-              <a:t>-Words)</a:t>
-            </a:r>
-          </a:p>
-          <a:p>
+              <a:t>-Words), </a:t>
+            </a:r>
             <a:r>
               <a:rPr lang="de-CH" dirty="0" err="1"/>
               <a:t>Stopwords</a:t>
             </a:r>
-            <a:endParaRPr lang="de-CH" dirty="0"/>
-          </a:p>
-          <a:p>
             <a:r>
               <a:rPr lang="de-CH" dirty="0"/>
-              <a:t>Top 50 Wörter</a:t>
-            </a:r>
-          </a:p>
-          <a:p>
-            <a:r>
-              <a:rPr lang="de-CH" dirty="0"/>
-              <a:t> </a:t>
-            </a:r>
+              <a:t>, Top 50 Wörter</a:t>
+            </a:r>
+          </a:p>
+          <a:p>
+            <a:pPr marL="0" indent="0">
+              <a:buNone/>
+            </a:pPr>
             <a:r>
               <a:rPr lang="de-CH" dirty="0" err="1"/>
               <a:t>word</a:t>
@@ -7737,6 +8103,9 @@
             <a:endParaRPr lang="de-CH" dirty="0"/>
           </a:p>
           <a:p>
+            <a:pPr marL="0" indent="0">
+              <a:buNone/>
+            </a:pPr>
             <a:r>
               <a:rPr lang="de-CH" dirty="0" err="1"/>
               <a:t>disc</a:t>
@@ -7747,6 +8116,9 @@
             </a:r>
           </a:p>
           <a:p>
+            <a:pPr marL="0" indent="0">
+              <a:buNone/>
+            </a:pPr>
             <a:r>
               <a:rPr lang="de-CH" dirty="0" err="1"/>
               <a:t>great</a:t>
@@ -7757,6 +8129,9 @@
             </a:r>
           </a:p>
           <a:p>
+            <a:pPr marL="0" indent="0">
+              <a:buNone/>
+            </a:pPr>
             <a:r>
               <a:rPr lang="de-CH" dirty="0" err="1"/>
               <a:t>good</a:t>
@@ -7767,6 +8142,9 @@
             </a:r>
           </a:p>
           <a:p>
+            <a:pPr marL="0" indent="0">
+              <a:buNone/>
+            </a:pPr>
             <a:r>
               <a:rPr lang="de-CH" dirty="0" err="1"/>
               <a:t>love</a:t>
@@ -7777,6 +8155,9 @@
             </a:r>
           </a:p>
           <a:p>
+            <a:pPr marL="0" indent="0">
+              <a:buNone/>
+            </a:pPr>
             <a:r>
               <a:rPr lang="de-CH" dirty="0" err="1"/>
               <a:t>format</a:t>
@@ -7787,6 +8168,9 @@
             </a:r>
           </a:p>
           <a:p>
+            <a:pPr marL="0" indent="0">
+              <a:buNone/>
+            </a:pPr>
             <a:r>
               <a:rPr lang="de-CH" dirty="0" err="1"/>
               <a:t>manual</a:t>
@@ -7797,6 +8181,9 @@
             </a:r>
           </a:p>
           <a:p>
+            <a:pPr marL="0" indent="0">
+              <a:buNone/>
+            </a:pPr>
             <a:r>
               <a:rPr lang="de-CH" dirty="0" err="1"/>
               <a:t>book</a:t>
@@ -7807,12 +8194,18 @@
             </a:r>
           </a:p>
           <a:p>
+            <a:pPr marL="0" indent="0">
+              <a:buNone/>
+            </a:pPr>
             <a:r>
               <a:rPr lang="de-CH" dirty="0"/>
               <a:t>cd    19</a:t>
             </a:r>
           </a:p>
           <a:p>
+            <a:pPr marL="0" indent="0">
+              <a:buNone/>
+            </a:pPr>
             <a:r>
               <a:rPr lang="de-CH" dirty="0" err="1"/>
               <a:t>read</a:t>
@@ -7823,12 +8216,18 @@
             </a:r>
           </a:p>
           <a:p>
+            <a:pPr marL="0" indent="0">
+              <a:buNone/>
+            </a:pPr>
             <a:r>
               <a:rPr lang="de-CH" dirty="0"/>
               <a:t>easy    18</a:t>
             </a:r>
           </a:p>
           <a:p>
+            <a:pPr marL="0" indent="0">
+              <a:buNone/>
+            </a:pPr>
             <a:r>
               <a:rPr lang="de-CH" dirty="0" err="1"/>
               <a:t>dog</a:t>
@@ -7863,7 +8262,7 @@
           <a:p>
             <a:fld id="{EE15D7BA-2F5F-8E43-91CB-647D382EDB87}" type="datetime4">
               <a:rPr lang="de-CH" smtClean="0"/>
-              <a:t>15. Juni 2026</a:t>
+              <a:t>16. Juni 2026</a:t>
             </a:fld>
             <a:endParaRPr lang="en-CH"/>
           </a:p>
@@ -7921,7 +8320,7 @@
           <a:p>
             <a:fld id="{221FD296-2B0C-4A4B-AFAC-2E3A842869F0}" type="slidenum">
               <a:rPr lang="en-CH" smtClean="0"/>
-              <a:t>16</a:t>
+              <a:t>17</a:t>
             </a:fld>
             <a:endParaRPr lang="en-CH"/>
           </a:p>
@@ -8039,202 +8438,6 @@
 </p:sld>
 </file>
 
-<file path=ppt/slides/slide17.xml><?xml version="1.0" encoding="utf-8"?>
-<p:sld xmlns:a="http://schemas.openxmlformats.org/drawingml/2006/main" xmlns:r="http://schemas.openxmlformats.org/officeDocument/2006/relationships" xmlns:p="http://schemas.openxmlformats.org/presentationml/2006/main">
-  <p:cSld>
-    <p:spTree>
-      <p:nvGrpSpPr>
-        <p:cNvPr id="1" name=""/>
-        <p:cNvGrpSpPr/>
-        <p:nvPr/>
-      </p:nvGrpSpPr>
-      <p:grpSpPr>
-        <a:xfrm>
-          <a:off x="0" y="0"/>
-          <a:ext cx="0" cy="0"/>
-          <a:chOff x="0" y="0"/>
-          <a:chExt cx="0" cy="0"/>
-        </a:xfrm>
-      </p:grpSpPr>
-      <p:sp>
-        <p:nvSpPr>
-          <p:cNvPr id="2" name="Title 1">
-            <a:extLst>
-              <a:ext uri="{FF2B5EF4-FFF2-40B4-BE49-F238E27FC236}">
-                <a16:creationId xmlns:a16="http://schemas.microsoft.com/office/drawing/2014/main" id="{C920FCBD-11AF-2890-1169-632E0CC0EABB}"/>
-              </a:ext>
-            </a:extLst>
-          </p:cNvPr>
-          <p:cNvSpPr>
-            <a:spLocks noGrp="1"/>
-          </p:cNvSpPr>
-          <p:nvPr>
-            <p:ph type="title"/>
-          </p:nvPr>
-        </p:nvSpPr>
-        <p:spPr/>
-        <p:txBody>
-          <a:bodyPr/>
-          <a:lstStyle/>
-          <a:p>
-            <a:r>
-              <a:rPr lang="de-CH" dirty="0" err="1"/>
-              <a:t>Embeddings</a:t>
-            </a:r>
-            <a:r>
-              <a:rPr lang="de-CH" dirty="0"/>
-              <a:t> PCA, TSNE, UMAP…</a:t>
-            </a:r>
-          </a:p>
-        </p:txBody>
-      </p:sp>
-      <p:sp>
-        <p:nvSpPr>
-          <p:cNvPr id="3" name="Content Placeholder 2">
-            <a:extLst>
-              <a:ext uri="{FF2B5EF4-FFF2-40B4-BE49-F238E27FC236}">
-                <a16:creationId xmlns:a16="http://schemas.microsoft.com/office/drawing/2014/main" id="{EF706B76-DF3F-E4FB-2F4E-64E02221D2B1}"/>
-              </a:ext>
-            </a:extLst>
-          </p:cNvPr>
-          <p:cNvSpPr>
-            <a:spLocks noGrp="1"/>
-          </p:cNvSpPr>
-          <p:nvPr>
-            <p:ph idx="1"/>
-          </p:nvPr>
-        </p:nvSpPr>
-        <p:spPr/>
-        <p:txBody>
-          <a:bodyPr/>
-          <a:lstStyle/>
-          <a:p>
-            <a:r>
-              <a:rPr lang="de-CH" dirty="0"/>
-              <a:t>Transformer: </a:t>
-            </a:r>
-            <a:r>
-              <a:rPr lang="en-CH" dirty="0"/>
-              <a:t>BAAI/bge-base-en-v1.5</a:t>
-            </a:r>
-          </a:p>
-          <a:p>
-            <a:r>
-              <a:rPr lang="de-CH" dirty="0"/>
-              <a:t>Dimensionsreduktion und Darstellung auf Plot</a:t>
-            </a:r>
-          </a:p>
-          <a:p>
-            <a:r>
-              <a:rPr lang="en-CH" dirty="0"/>
-              <a:t>Rot/Blau gemischt → Fehler verteilen sich gleichmässig im Semantikraum. Es hat kein strukturelles Muster</a:t>
-            </a:r>
-          </a:p>
-          <a:p>
-            <a:endParaRPr lang="de-CH" dirty="0"/>
-          </a:p>
-        </p:txBody>
-      </p:sp>
-      <p:sp>
-        <p:nvSpPr>
-          <p:cNvPr id="4" name="Date Placeholder 3">
-            <a:extLst>
-              <a:ext uri="{FF2B5EF4-FFF2-40B4-BE49-F238E27FC236}">
-                <a16:creationId xmlns:a16="http://schemas.microsoft.com/office/drawing/2014/main" id="{7D3BCD11-496E-279C-80E2-9DC9FA51A4A7}"/>
-              </a:ext>
-            </a:extLst>
-          </p:cNvPr>
-          <p:cNvSpPr>
-            <a:spLocks noGrp="1"/>
-          </p:cNvSpPr>
-          <p:nvPr>
-            <p:ph type="dt" sz="half" idx="10"/>
-          </p:nvPr>
-        </p:nvSpPr>
-        <p:spPr/>
-        <p:txBody>
-          <a:bodyPr/>
-          <a:lstStyle/>
-          <a:p>
-            <a:fld id="{EE15D7BA-2F5F-8E43-91CB-647D382EDB87}" type="datetime4">
-              <a:rPr lang="de-CH" smtClean="0"/>
-              <a:t>15. Juni 2026</a:t>
-            </a:fld>
-            <a:endParaRPr lang="en-CH"/>
-          </a:p>
-        </p:txBody>
-      </p:sp>
-      <p:sp>
-        <p:nvSpPr>
-          <p:cNvPr id="5" name="Footer Placeholder 4">
-            <a:extLst>
-              <a:ext uri="{FF2B5EF4-FFF2-40B4-BE49-F238E27FC236}">
-                <a16:creationId xmlns:a16="http://schemas.microsoft.com/office/drawing/2014/main" id="{2C2B0016-9F80-20DE-FA2D-B80DB12CCB4B}"/>
-              </a:ext>
-            </a:extLst>
-          </p:cNvPr>
-          <p:cNvSpPr>
-            <a:spLocks noGrp="1"/>
-          </p:cNvSpPr>
-          <p:nvPr>
-            <p:ph type="ftr" sz="quarter" idx="11"/>
-          </p:nvPr>
-        </p:nvSpPr>
-        <p:spPr/>
-        <p:txBody>
-          <a:bodyPr/>
-          <a:lstStyle/>
-          <a:p>
-            <a:r>
-              <a:rPr lang="en-GB"/>
-              <a:t>Text Analysis- Svetlana Khominich, Ralph Müller, David Beer </a:t>
-            </a:r>
-            <a:endParaRPr lang="en-CH" dirty="0"/>
-          </a:p>
-        </p:txBody>
-      </p:sp>
-      <p:sp>
-        <p:nvSpPr>
-          <p:cNvPr id="6" name="Slide Number Placeholder 5">
-            <a:extLst>
-              <a:ext uri="{FF2B5EF4-FFF2-40B4-BE49-F238E27FC236}">
-                <a16:creationId xmlns:a16="http://schemas.microsoft.com/office/drawing/2014/main" id="{11B82D64-4F04-F2A9-97F9-560FF9B3A04A}"/>
-              </a:ext>
-            </a:extLst>
-          </p:cNvPr>
-          <p:cNvSpPr>
-            <a:spLocks noGrp="1"/>
-          </p:cNvSpPr>
-          <p:nvPr>
-            <p:ph type="sldNum" sz="quarter" idx="12"/>
-          </p:nvPr>
-        </p:nvSpPr>
-        <p:spPr/>
-        <p:txBody>
-          <a:bodyPr/>
-          <a:lstStyle/>
-          <a:p>
-            <a:fld id="{221FD296-2B0C-4A4B-AFAC-2E3A842869F0}" type="slidenum">
-              <a:rPr lang="en-CH" smtClean="0"/>
-              <a:t>17</a:t>
-            </a:fld>
-            <a:endParaRPr lang="en-CH"/>
-          </a:p>
-        </p:txBody>
-      </p:sp>
-    </p:spTree>
-    <p:extLst>
-      <p:ext uri="{BB962C8B-B14F-4D97-AF65-F5344CB8AC3E}">
-        <p14:creationId xmlns:p14="http://schemas.microsoft.com/office/powerpoint/2010/main" val="4097295119"/>
-      </p:ext>
-    </p:extLst>
-  </p:cSld>
-  <p:clrMapOvr>
-    <a:masterClrMapping/>
-  </p:clrMapOvr>
-</p:sld>
-</file>
-
 <file path=ppt/slides/slide18.xml><?xml version="1.0" encoding="utf-8"?>
 <p:sld xmlns:a="http://schemas.openxmlformats.org/drawingml/2006/main" xmlns:r="http://schemas.openxmlformats.org/officeDocument/2006/relationships" xmlns:p="http://schemas.openxmlformats.org/presentationml/2006/main">
   <p:cSld>
@@ -8257,7 +8460,7 @@
           <p:cNvPr id="2" name="Title 1">
             <a:extLst>
               <a:ext uri="{FF2B5EF4-FFF2-40B4-BE49-F238E27FC236}">
-                <a16:creationId xmlns:a16="http://schemas.microsoft.com/office/drawing/2014/main" id="{37CA9EC5-4BB1-B24F-C221-B3E739738DC3}"/>
+                <a16:creationId xmlns:a16="http://schemas.microsoft.com/office/drawing/2014/main" id="{C920FCBD-11AF-2890-1169-632E0CC0EABB}"/>
               </a:ext>
             </a:extLst>
           </p:cNvPr>
@@ -8274,9 +8477,91 @@
           <a:lstStyle/>
           <a:p>
             <a:r>
+              <a:rPr lang="de-CH" dirty="0" err="1"/>
+              <a:t>Embeddings</a:t>
+            </a:r>
+            <a:r>
               <a:rPr lang="de-CH" dirty="0"/>
-              <a:t>TSNE</a:t>
-            </a:r>
+              <a:t> PCA, TSNE, UMAP…</a:t>
+            </a:r>
+          </a:p>
+        </p:txBody>
+      </p:sp>
+      <p:sp>
+        <p:nvSpPr>
+          <p:cNvPr id="3" name="Content Placeholder 2">
+            <a:extLst>
+              <a:ext uri="{FF2B5EF4-FFF2-40B4-BE49-F238E27FC236}">
+                <a16:creationId xmlns:a16="http://schemas.microsoft.com/office/drawing/2014/main" id="{EF706B76-DF3F-E4FB-2F4E-64E02221D2B1}"/>
+              </a:ext>
+            </a:extLst>
+          </p:cNvPr>
+          <p:cNvSpPr>
+            <a:spLocks noGrp="1"/>
+          </p:cNvSpPr>
+          <p:nvPr>
+            <p:ph idx="1"/>
+          </p:nvPr>
+        </p:nvSpPr>
+        <p:spPr/>
+        <p:txBody>
+          <a:bodyPr/>
+          <a:lstStyle/>
+          <a:p>
+            <a:r>
+              <a:rPr lang="de-CH" dirty="0"/>
+              <a:t>Transformer:</a:t>
+            </a:r>
+            <a:br>
+              <a:rPr lang="de-CH" dirty="0"/>
+            </a:br>
+            <a:r>
+              <a:rPr lang="en-CH" dirty="0"/>
+              <a:t>BAAI/bge-base-en-v1.5</a:t>
+            </a:r>
+          </a:p>
+          <a:p>
+            <a:r>
+              <a:rPr lang="de-CH" dirty="0"/>
+              <a:t>Dimensionsreduktion und </a:t>
+            </a:r>
+            <a:br>
+              <a:rPr lang="de-CH" dirty="0"/>
+            </a:br>
+            <a:r>
+              <a:rPr lang="de-CH" dirty="0"/>
+              <a:t>Darstellung auf Plot</a:t>
+            </a:r>
+          </a:p>
+          <a:p>
+            <a:r>
+              <a:rPr lang="en-CH" dirty="0"/>
+              <a:t>Rot/Blau gemischt</a:t>
+            </a:r>
+            <a:br>
+              <a:rPr lang="en-CH" dirty="0"/>
+            </a:br>
+            <a:r>
+              <a:rPr lang="en-CH" dirty="0"/>
+              <a:t>Fehler verteilen sich</a:t>
+            </a:r>
+            <a:br>
+              <a:rPr lang="en-CH" dirty="0"/>
+            </a:br>
+            <a:r>
+              <a:rPr lang="en-CH" dirty="0"/>
+              <a:t>gleichmässig im </a:t>
+            </a:r>
+            <a:br>
+              <a:rPr lang="en-CH" dirty="0"/>
+            </a:br>
+            <a:r>
+              <a:rPr lang="en-CH" dirty="0"/>
+              <a:t>Semantikraum.</a:t>
+            </a:r>
+          </a:p>
+          <a:p>
+            <a:endParaRPr lang="de-CH" dirty="0"/>
           </a:p>
         </p:txBody>
       </p:sp>
@@ -8285,7 +8570,7 @@
           <p:cNvPr id="4" name="Date Placeholder 3">
             <a:extLst>
               <a:ext uri="{FF2B5EF4-FFF2-40B4-BE49-F238E27FC236}">
-                <a16:creationId xmlns:a16="http://schemas.microsoft.com/office/drawing/2014/main" id="{E1320F55-DA85-72B3-5C22-F2CD6EF0E2F9}"/>
+                <a16:creationId xmlns:a16="http://schemas.microsoft.com/office/drawing/2014/main" id="{7D3BCD11-496E-279C-80E2-9DC9FA51A4A7}"/>
               </a:ext>
             </a:extLst>
           </p:cNvPr>
@@ -8303,7 +8588,7 @@
           <a:p>
             <a:fld id="{EE15D7BA-2F5F-8E43-91CB-647D382EDB87}" type="datetime4">
               <a:rPr lang="de-CH" smtClean="0"/>
-              <a:t>15. Juni 2026</a:t>
+              <a:t>16. Juni 2026</a:t>
             </a:fld>
             <a:endParaRPr lang="en-CH"/>
           </a:p>
@@ -8314,7 +8599,7 @@
           <p:cNvPr id="5" name="Footer Placeholder 4">
             <a:extLst>
               <a:ext uri="{FF2B5EF4-FFF2-40B4-BE49-F238E27FC236}">
-                <a16:creationId xmlns:a16="http://schemas.microsoft.com/office/drawing/2014/main" id="{A8788377-38C2-071C-EAAF-6E838949B50F}"/>
+                <a16:creationId xmlns:a16="http://schemas.microsoft.com/office/drawing/2014/main" id="{2C2B0016-9F80-20DE-FA2D-B80DB12CCB4B}"/>
               </a:ext>
             </a:extLst>
           </p:cNvPr>
@@ -8343,7 +8628,7 @@
           <p:cNvPr id="6" name="Slide Number Placeholder 5">
             <a:extLst>
               <a:ext uri="{FF2B5EF4-FFF2-40B4-BE49-F238E27FC236}">
-                <a16:creationId xmlns:a16="http://schemas.microsoft.com/office/drawing/2014/main" id="{53F8EE49-87F4-2B53-678F-BB813BB057A0}"/>
+                <a16:creationId xmlns:a16="http://schemas.microsoft.com/office/drawing/2014/main" id="{11B82D64-4F04-F2A9-97F9-560FF9B3A04A}"/>
               </a:ext>
             </a:extLst>
           </p:cNvPr>
@@ -8369,19 +8654,17 @@
       </p:sp>
       <p:pic>
         <p:nvPicPr>
-          <p:cNvPr id="8" name="Content Placeholder 7">
-            <a:extLst>
-              <a:ext uri="{FF2B5EF4-FFF2-40B4-BE49-F238E27FC236}">
-                <a16:creationId xmlns:a16="http://schemas.microsoft.com/office/drawing/2014/main" id="{9C11215E-3E17-B6F6-018C-A879E55E8661}"/>
+          <p:cNvPr id="7" name="Content Placeholder 7">
+            <a:extLst>
+              <a:ext uri="{FF2B5EF4-FFF2-40B4-BE49-F238E27FC236}">
+                <a16:creationId xmlns:a16="http://schemas.microsoft.com/office/drawing/2014/main" id="{81AEA709-25D3-E7BE-DF3F-434693A89BF2}"/>
               </a:ext>
             </a:extLst>
           </p:cNvPr>
           <p:cNvPicPr>
-            <a:picLocks noGrp="1" noChangeAspect="1"/>
+            <a:picLocks noChangeAspect="1"/>
           </p:cNvPicPr>
-          <p:nvPr>
-            <p:ph idx="1"/>
-          </p:nvPr>
+          <p:nvPr/>
         </p:nvPicPr>
         <p:blipFill>
           <a:blip r:embed="rId2"/>
@@ -8391,8 +8674,8 @@
         </p:blipFill>
         <p:spPr>
           <a:xfrm>
-            <a:off x="1869332" y="937082"/>
-            <a:ext cx="7894558" cy="5920918"/>
+            <a:off x="5148943" y="1300389"/>
+            <a:ext cx="6923314" cy="5192485"/>
           </a:xfrm>
           <a:prstGeom prst="rect">
             <a:avLst/>
@@ -8402,7 +8685,7 @@
     </p:spTree>
     <p:extLst>
       <p:ext uri="{BB962C8B-B14F-4D97-AF65-F5344CB8AC3E}">
-        <p14:creationId xmlns:p14="http://schemas.microsoft.com/office/powerpoint/2010/main" val="3055462250"/>
+        <p14:creationId xmlns:p14="http://schemas.microsoft.com/office/powerpoint/2010/main" val="4097295119"/>
       </p:ext>
     </p:extLst>
   </p:cSld>
@@ -8519,7 +8802,7 @@
           <a:p>
             <a:fld id="{E66B3B6E-7E09-0142-B960-3BF02BFEB55D}" type="datetime4">
               <a:rPr lang="de-CH" smtClean="0"/>
-              <a:t>15. Juni 2026</a:t>
+              <a:t>16. Juni 2026</a:t>
             </a:fld>
             <a:endParaRPr lang="en-CH"/>
           </a:p>
@@ -8945,7 +9228,7 @@
           <a:p>
             <a:fld id="{161001B4-7ECE-4C45-821A-DC5AE6F4A031}" type="datetime4">
               <a:rPr lang="de-CH" smtClean="0"/>
-              <a:t>15. Juni 2026</a:t>
+              <a:t>16. Juni 2026</a:t>
             </a:fld>
             <a:endParaRPr lang="en-CH"/>
           </a:p>
@@ -8965,354 +9248,6 @@
 </file>
 
 <file path=ppt/slides/slide20.xml><?xml version="1.0" encoding="utf-8"?>
-<p:sld xmlns:a="http://schemas.openxmlformats.org/drawingml/2006/main" xmlns:r="http://schemas.openxmlformats.org/officeDocument/2006/relationships" xmlns:p="http://schemas.openxmlformats.org/presentationml/2006/main">
-  <p:cSld>
-    <p:spTree>
-      <p:nvGrpSpPr>
-        <p:cNvPr id="1" name=""/>
-        <p:cNvGrpSpPr/>
-        <p:nvPr/>
-      </p:nvGrpSpPr>
-      <p:grpSpPr>
-        <a:xfrm>
-          <a:off x="0" y="0"/>
-          <a:ext cx="0" cy="0"/>
-          <a:chOff x="0" y="0"/>
-          <a:chExt cx="0" cy="0"/>
-        </a:xfrm>
-      </p:grpSpPr>
-      <p:sp>
-        <p:nvSpPr>
-          <p:cNvPr id="2" name="Title 1">
-            <a:extLst>
-              <a:ext uri="{FF2B5EF4-FFF2-40B4-BE49-F238E27FC236}">
-                <a16:creationId xmlns:a16="http://schemas.microsoft.com/office/drawing/2014/main" id="{6542805F-9EE1-5644-FCD9-ACFCDA3211AD}"/>
-              </a:ext>
-            </a:extLst>
-          </p:cNvPr>
-          <p:cNvSpPr>
-            <a:spLocks noGrp="1"/>
-          </p:cNvSpPr>
-          <p:nvPr>
-            <p:ph type="title"/>
-          </p:nvPr>
-        </p:nvSpPr>
-        <p:spPr/>
-        <p:txBody>
-          <a:bodyPr>
-            <a:normAutofit fontScale="90000"/>
-          </a:bodyPr>
-          <a:lstStyle/>
-          <a:p>
-            <a:r>
-              <a:rPr lang="en-CH" dirty="0"/>
-              <a:t>Was macht es schwer, richtig zu Klassifizieren?</a:t>
-            </a:r>
-            <a:endParaRPr lang="de-CH" dirty="0"/>
-          </a:p>
-        </p:txBody>
-      </p:sp>
-      <p:sp>
-        <p:nvSpPr>
-          <p:cNvPr id="3" name="Content Placeholder 2">
-            <a:extLst>
-              <a:ext uri="{FF2B5EF4-FFF2-40B4-BE49-F238E27FC236}">
-                <a16:creationId xmlns:a16="http://schemas.microsoft.com/office/drawing/2014/main" id="{DE9F2555-33A2-94BC-ADFE-902207060BBB}"/>
-              </a:ext>
-            </a:extLst>
-          </p:cNvPr>
-          <p:cNvSpPr>
-            <a:spLocks noGrp="1"/>
-          </p:cNvSpPr>
-          <p:nvPr>
-            <p:ph idx="1"/>
-          </p:nvPr>
-        </p:nvSpPr>
-        <p:spPr/>
-        <p:txBody>
-          <a:bodyPr>
-            <a:normAutofit lnSpcReduction="10000"/>
-          </a:bodyPr>
-          <a:lstStyle/>
-          <a:p>
-            <a:r>
-              <a:rPr lang="en-CH" dirty="0"/>
-              <a:t>welche Features erklären Vorhersage-Schwierigkeit? (mit RF)</a:t>
-            </a:r>
-          </a:p>
-          <a:p>
-            <a:r>
-              <a:rPr lang="en-GB" dirty="0"/>
-              <a:t>Feature Importance:</a:t>
-            </a:r>
-          </a:p>
-          <a:p>
-            <a:r>
-              <a:rPr lang="en-GB" dirty="0"/>
-              <a:t>  </a:t>
-            </a:r>
-            <a:r>
-              <a:rPr lang="en-GB" dirty="0" err="1"/>
-              <a:t>avg_word_len</a:t>
-            </a:r>
-            <a:r>
-              <a:rPr lang="en-GB" dirty="0"/>
-              <a:t>              	28.5%</a:t>
-            </a:r>
-          </a:p>
-          <a:p>
-            <a:r>
-              <a:rPr lang="en-GB" dirty="0"/>
-              <a:t>  </a:t>
-            </a:r>
-            <a:r>
-              <a:rPr lang="en-GB" dirty="0" err="1"/>
-              <a:t>uppercase_ratio</a:t>
-            </a:r>
-            <a:r>
-              <a:rPr lang="en-GB" dirty="0"/>
-              <a:t>           	25.3%</a:t>
-            </a:r>
-          </a:p>
-          <a:p>
-            <a:r>
-              <a:rPr lang="en-GB" dirty="0"/>
-              <a:t>  </a:t>
-            </a:r>
-            <a:r>
-              <a:rPr lang="en-GB" dirty="0" err="1"/>
-              <a:t>char_len</a:t>
-            </a:r>
-            <a:r>
-              <a:rPr lang="en-GB" dirty="0"/>
-              <a:t>                  	25.1%</a:t>
-            </a:r>
-          </a:p>
-          <a:p>
-            <a:r>
-              <a:rPr lang="en-GB" dirty="0"/>
-              <a:t>  </a:t>
-            </a:r>
-            <a:r>
-              <a:rPr lang="en-GB" dirty="0" err="1"/>
-              <a:t>word_len</a:t>
-            </a:r>
-            <a:r>
-              <a:rPr lang="en-GB" dirty="0"/>
-              <a:t>                  	9.2%</a:t>
-            </a:r>
-          </a:p>
-          <a:p>
-            <a:r>
-              <a:rPr lang="en-GB" dirty="0"/>
-              <a:t>  </a:t>
-            </a:r>
-            <a:r>
-              <a:rPr lang="en-GB" dirty="0" err="1"/>
-              <a:t>sentence_count</a:t>
-            </a:r>
-            <a:r>
-              <a:rPr lang="en-GB" dirty="0"/>
-              <a:t>            7.7%</a:t>
-            </a:r>
-          </a:p>
-          <a:p>
-            <a:r>
-              <a:rPr lang="en-GB" dirty="0"/>
-              <a:t>  </a:t>
-            </a:r>
-            <a:r>
-              <a:rPr lang="en-GB" dirty="0" err="1"/>
-              <a:t>exclamation_count</a:t>
-            </a:r>
-            <a:r>
-              <a:rPr lang="en-GB" dirty="0"/>
-              <a:t> 	3.8%</a:t>
-            </a:r>
-          </a:p>
-          <a:p>
-            <a:r>
-              <a:rPr lang="en-GB" dirty="0"/>
-              <a:t>  </a:t>
-            </a:r>
-            <a:r>
-              <a:rPr lang="en-GB" dirty="0" err="1"/>
-              <a:t>question_count</a:t>
-            </a:r>
-            <a:r>
-              <a:rPr lang="en-GB" dirty="0"/>
-              <a:t>            0.4%</a:t>
-            </a:r>
-            <a:endParaRPr lang="en-CH" dirty="0"/>
-          </a:p>
-          <a:p>
-            <a:endParaRPr lang="de-CH" dirty="0"/>
-          </a:p>
-        </p:txBody>
-      </p:sp>
-      <p:sp>
-        <p:nvSpPr>
-          <p:cNvPr id="4" name="Date Placeholder 3">
-            <a:extLst>
-              <a:ext uri="{FF2B5EF4-FFF2-40B4-BE49-F238E27FC236}">
-                <a16:creationId xmlns:a16="http://schemas.microsoft.com/office/drawing/2014/main" id="{AB5E8D05-4B0C-DE8F-957A-D035CF06D329}"/>
-              </a:ext>
-            </a:extLst>
-          </p:cNvPr>
-          <p:cNvSpPr>
-            <a:spLocks noGrp="1"/>
-          </p:cNvSpPr>
-          <p:nvPr>
-            <p:ph type="dt" sz="half" idx="10"/>
-          </p:nvPr>
-        </p:nvSpPr>
-        <p:spPr/>
-        <p:txBody>
-          <a:bodyPr/>
-          <a:lstStyle/>
-          <a:p>
-            <a:fld id="{EE15D7BA-2F5F-8E43-91CB-647D382EDB87}" type="datetime4">
-              <a:rPr lang="de-CH" smtClean="0"/>
-              <a:t>15. Juni 2026</a:t>
-            </a:fld>
-            <a:endParaRPr lang="en-CH"/>
-          </a:p>
-        </p:txBody>
-      </p:sp>
-      <p:sp>
-        <p:nvSpPr>
-          <p:cNvPr id="5" name="Footer Placeholder 4">
-            <a:extLst>
-              <a:ext uri="{FF2B5EF4-FFF2-40B4-BE49-F238E27FC236}">
-                <a16:creationId xmlns:a16="http://schemas.microsoft.com/office/drawing/2014/main" id="{0CAB726F-11F4-A734-B7F5-9349EB9326BD}"/>
-              </a:ext>
-            </a:extLst>
-          </p:cNvPr>
-          <p:cNvSpPr>
-            <a:spLocks noGrp="1"/>
-          </p:cNvSpPr>
-          <p:nvPr>
-            <p:ph type="ftr" sz="quarter" idx="11"/>
-          </p:nvPr>
-        </p:nvSpPr>
-        <p:spPr/>
-        <p:txBody>
-          <a:bodyPr/>
-          <a:lstStyle/>
-          <a:p>
-            <a:r>
-              <a:rPr lang="en-GB"/>
-              <a:t>Text Analysis- Svetlana Khominich, Ralph Müller, David Beer </a:t>
-            </a:r>
-            <a:endParaRPr lang="en-CH" dirty="0"/>
-          </a:p>
-        </p:txBody>
-      </p:sp>
-      <p:sp>
-        <p:nvSpPr>
-          <p:cNvPr id="6" name="Slide Number Placeholder 5">
-            <a:extLst>
-              <a:ext uri="{FF2B5EF4-FFF2-40B4-BE49-F238E27FC236}">
-                <a16:creationId xmlns:a16="http://schemas.microsoft.com/office/drawing/2014/main" id="{47DE6C6C-E49E-5A08-5EFE-57410C3D712E}"/>
-              </a:ext>
-            </a:extLst>
-          </p:cNvPr>
-          <p:cNvSpPr>
-            <a:spLocks noGrp="1"/>
-          </p:cNvSpPr>
-          <p:nvPr>
-            <p:ph type="sldNum" sz="quarter" idx="12"/>
-          </p:nvPr>
-        </p:nvSpPr>
-        <p:spPr/>
-        <p:txBody>
-          <a:bodyPr/>
-          <a:lstStyle/>
-          <a:p>
-            <a:fld id="{221FD296-2B0C-4A4B-AFAC-2E3A842869F0}" type="slidenum">
-              <a:rPr lang="en-CH" smtClean="0"/>
-              <a:t>20</a:t>
-            </a:fld>
-            <a:endParaRPr lang="en-CH"/>
-          </a:p>
-        </p:txBody>
-      </p:sp>
-      <p:sp>
-        <p:nvSpPr>
-          <p:cNvPr id="7" name="Rounded Rectangular Callout 6">
-            <a:extLst>
-              <a:ext uri="{FF2B5EF4-FFF2-40B4-BE49-F238E27FC236}">
-                <a16:creationId xmlns:a16="http://schemas.microsoft.com/office/drawing/2014/main" id="{0F1D92C1-2561-182F-558C-174DBE8C0998}"/>
-              </a:ext>
-            </a:extLst>
-          </p:cNvPr>
-          <p:cNvSpPr/>
-          <p:nvPr/>
-        </p:nvSpPr>
-        <p:spPr>
-          <a:xfrm>
-            <a:off x="6372427" y="3239311"/>
-            <a:ext cx="4476345" cy="1786663"/>
-          </a:xfrm>
-          <a:prstGeom prst="wedgeRoundRectCallout">
-            <a:avLst>
-              <a:gd name="adj1" fmla="val -63468"/>
-              <a:gd name="adj2" fmla="val 5765"/>
-              <a:gd name="adj3" fmla="val 16667"/>
-            </a:avLst>
-          </a:prstGeom>
-          <a:solidFill>
-            <a:schemeClr val="accent4">
-              <a:lumMod val="20000"/>
-              <a:lumOff val="80000"/>
-            </a:schemeClr>
-          </a:solidFill>
-        </p:spPr>
-        <p:style>
-          <a:lnRef idx="2">
-            <a:schemeClr val="accent1">
-              <a:shade val="15000"/>
-            </a:schemeClr>
-          </a:lnRef>
-          <a:fillRef idx="1">
-            <a:schemeClr val="accent1"/>
-          </a:fillRef>
-          <a:effectRef idx="0">
-            <a:schemeClr val="accent1"/>
-          </a:effectRef>
-          <a:fontRef idx="minor">
-            <a:schemeClr val="lt1"/>
-          </a:fontRef>
-        </p:style>
-        <p:txBody>
-          <a:bodyPr rtlCol="0" anchor="ctr"/>
-          <a:lstStyle/>
-          <a:p>
-            <a:r>
-              <a:rPr lang="en-CH" dirty="0">
-                <a:solidFill>
-                  <a:schemeClr val="tx1"/>
-                </a:solidFill>
-              </a:rPr>
-              <a:t>Die Schwierigkeit der Modellvorhersagen wird hauptsächlich durch einfache stilistische Eigenschaften des Textes bestimmt, insbesondere Länge, Wortstruktur und Grossschreibung.</a:t>
-            </a:r>
-          </a:p>
-        </p:txBody>
-      </p:sp>
-    </p:spTree>
-    <p:extLst>
-      <p:ext uri="{BB962C8B-B14F-4D97-AF65-F5344CB8AC3E}">
-        <p14:creationId xmlns:p14="http://schemas.microsoft.com/office/powerpoint/2010/main" val="951959906"/>
-      </p:ext>
-    </p:extLst>
-  </p:cSld>
-  <p:clrMapOvr>
-    <a:masterClrMapping/>
-  </p:clrMapOvr>
-</p:sld>
-</file>
-
-<file path=ppt/slides/slide21.xml><?xml version="1.0" encoding="utf-8"?>
 <p:sld xmlns:a="http://schemas.openxmlformats.org/drawingml/2006/main" xmlns:r="http://schemas.openxmlformats.org/officeDocument/2006/relationships" xmlns:p="http://schemas.openxmlformats.org/presentationml/2006/main">
   <p:cSld>
     <p:spTree>
@@ -9397,8 +9332,71 @@
           <a:p>
             <a:r>
               <a:rPr lang="de-CH" dirty="0"/>
-              <a:t>xxx</a:t>
-            </a:r>
+              <a:t>«klassische» Modelle trennen die Klassen zu ca. 90% richtig</a:t>
+            </a:r>
+          </a:p>
+          <a:p>
+            <a:pPr lvl="1"/>
+            <a:r>
+              <a:rPr lang="de-CH" dirty="0"/>
+              <a:t>kürzere Texte sind schwieriger zu klassifizieren</a:t>
+            </a:r>
+          </a:p>
+          <a:p>
+            <a:pPr lvl="1"/>
+            <a:r>
+              <a:rPr lang="de-CH" dirty="0"/>
+              <a:t>Bessere Ratings sind schwieriger vorherzusagen</a:t>
+            </a:r>
+          </a:p>
+          <a:p>
+            <a:pPr lvl="1"/>
+            <a:r>
+              <a:rPr lang="de-CH" dirty="0"/>
+              <a:t>Der Datensatz scheint nicht besonders gute Fakes zu enthalten</a:t>
+            </a:r>
+          </a:p>
+          <a:p>
+            <a:pPr marL="457200" lvl="1" indent="0">
+              <a:buNone/>
+            </a:pPr>
+            <a:endParaRPr lang="de-CH" dirty="0"/>
+          </a:p>
+          <a:p>
+            <a:r>
+              <a:rPr lang="de-CH" dirty="0"/>
+              <a:t>LLM </a:t>
+            </a:r>
+            <a:r>
+              <a:rPr lang="de-CH" dirty="0">
+                <a:sym typeface="Wingdings" pitchFamily="2" charset="2"/>
+              </a:rPr>
+              <a:t></a:t>
+            </a:r>
+          </a:p>
+          <a:p>
+            <a:pPr lvl="1"/>
+            <a:r>
+              <a:rPr lang="de-CH" dirty="0">
+                <a:sym typeface="Wingdings" pitchFamily="2" charset="2"/>
+              </a:rPr>
+              <a:t>Pro / </a:t>
+            </a:r>
+            <a:r>
+              <a:rPr lang="de-CH" dirty="0" err="1">
+                <a:sym typeface="Wingdings" pitchFamily="2" charset="2"/>
+              </a:rPr>
+              <a:t>Cons</a:t>
+            </a:r>
+            <a:endParaRPr lang="de-CH" dirty="0"/>
+          </a:p>
+          <a:p>
+            <a:pPr lvl="1"/>
+            <a:endParaRPr lang="de-CH" dirty="0"/>
+          </a:p>
+          <a:p>
+            <a:pPr lvl="1"/>
+            <a:endParaRPr lang="de-CH" dirty="0"/>
           </a:p>
         </p:txBody>
       </p:sp>
@@ -9464,7 +9462,7 @@
           <a:p>
             <a:fld id="{221FD296-2B0C-4A4B-AFAC-2E3A842869F0}" type="slidenum">
               <a:rPr lang="en-CH" smtClean="0"/>
-              <a:t>21</a:t>
+              <a:t>20</a:t>
             </a:fld>
             <a:endParaRPr lang="en-CH"/>
           </a:p>
@@ -9498,7 +9496,7 @@
           <a:p>
             <a:fld id="{DD2E1766-9633-E747-BBED-E122B4E61F73}" type="datetime4">
               <a:rPr lang="de-CH" smtClean="0"/>
-              <a:t>15. Juni 2026</a:t>
+              <a:t>16. Juni 2026</a:t>
             </a:fld>
             <a:endParaRPr lang="en-CH"/>
           </a:p>
@@ -9682,13 +9680,6 @@
               <a:rPr lang="en-CH" dirty="0"/>
               <a:t>CG wahrscheinlich mit GPT-2 von 2021 generiert</a:t>
             </a:r>
-          </a:p>
-          <a:p>
-            <a:pPr lvl="1">
-              <a:lnSpc>
-                <a:spcPct val="70000"/>
-              </a:lnSpc>
-            </a:pPr>
             <a:endParaRPr lang="en-US" dirty="0">
               <a:ea typeface="+mn-lt"/>
               <a:cs typeface="+mn-lt"/>
@@ -9795,7 +9786,7 @@
           <a:p>
             <a:fld id="{5B6B9814-5720-3C42-99A0-04A4812F75FC}" type="datetime4">
               <a:rPr lang="de-CH" smtClean="0"/>
-              <a:t>15. Juni 2026</a:t>
+              <a:t>16. Juni 2026</a:t>
             </a:fld>
             <a:endParaRPr lang="en-CH"/>
           </a:p>
@@ -9893,7 +9884,7 @@
           <a:p>
             <a:fld id="{EE15D7BA-2F5F-8E43-91CB-647D382EDB87}" type="datetime4">
               <a:rPr lang="de-CH" smtClean="0"/>
-              <a:t>15. Juni 2026</a:t>
+              <a:t>16. Juni 2026</a:t>
             </a:fld>
             <a:endParaRPr lang="en-CH"/>
           </a:p>
@@ -9959,10 +9950,10 @@
       </p:sp>
       <p:pic>
         <p:nvPicPr>
-          <p:cNvPr id="20" name="Content Placeholder 19">
-            <a:extLst>
-              <a:ext uri="{FF2B5EF4-FFF2-40B4-BE49-F238E27FC236}">
-                <a16:creationId xmlns:a16="http://schemas.microsoft.com/office/drawing/2014/main" id="{79CA1111-CE3E-2048-48EC-70EDC3BAA35C}"/>
+          <p:cNvPr id="10" name="Content Placeholder 9">
+            <a:extLst>
+              <a:ext uri="{FF2B5EF4-FFF2-40B4-BE49-F238E27FC236}">
+                <a16:creationId xmlns:a16="http://schemas.microsoft.com/office/drawing/2014/main" id="{4FDFB20B-CBE1-E201-5227-C91C5DBA0F9C}"/>
               </a:ext>
             </a:extLst>
           </p:cNvPr>
@@ -9981,8 +9972,8 @@
         </p:blipFill>
         <p:spPr>
           <a:xfrm>
-            <a:off x="933751" y="1421995"/>
-            <a:ext cx="10324498" cy="5436005"/>
+            <a:off x="838199" y="1232983"/>
+            <a:ext cx="10424187" cy="5488492"/>
           </a:xfrm>
           <a:prstGeom prst="rect">
             <a:avLst/>
@@ -10024,7 +10015,7 @@
           <p:cNvPr id="2" name="Title 1">
             <a:extLst>
               <a:ext uri="{FF2B5EF4-FFF2-40B4-BE49-F238E27FC236}">
-                <a16:creationId xmlns:a16="http://schemas.microsoft.com/office/drawing/2014/main" id="{C41148E2-DCF5-2EAA-4C23-C5D366640940}"/>
+                <a16:creationId xmlns:a16="http://schemas.microsoft.com/office/drawing/2014/main" id="{CA6191B1-3D5A-3A9E-F068-70CC42326062}"/>
               </a:ext>
             </a:extLst>
           </p:cNvPr>
@@ -10042,7 +10033,7 @@
           <a:p>
             <a:r>
               <a:rPr lang="de-CH" dirty="0"/>
-              <a:t>Output bei allen…</a:t>
+              <a:t>LLM</a:t>
             </a:r>
           </a:p>
         </p:txBody>
@@ -10052,7 +10043,7 @@
           <p:cNvPr id="3" name="Content Placeholder 2">
             <a:extLst>
               <a:ext uri="{FF2B5EF4-FFF2-40B4-BE49-F238E27FC236}">
-                <a16:creationId xmlns:a16="http://schemas.microsoft.com/office/drawing/2014/main" id="{CDA8E83C-D92D-2BE8-9B4A-395F74B8FDE3}"/>
+                <a16:creationId xmlns:a16="http://schemas.microsoft.com/office/drawing/2014/main" id="{99041E2B-DC04-EE9F-7A0E-C076F7B24D86}"/>
               </a:ext>
             </a:extLst>
           </p:cNvPr>
@@ -10068,24 +10059,6 @@
           <a:bodyPr/>
           <a:lstStyle/>
           <a:p>
-            <a:r>
-              <a:rPr lang="en-CH" dirty="0"/>
-              <a:t>Learning Curves, Train und Val</a:t>
-            </a:r>
-          </a:p>
-          <a:p>
-            <a:r>
-              <a:rPr lang="en-CH" dirty="0"/>
-              <a:t>Konfusionsmatrix</a:t>
-            </a:r>
-          </a:p>
-          <a:p>
-            <a:r>
-              <a:rPr lang="en-CH" dirty="0"/>
-              <a:t>Classification Report, korrekte/falsche Predictions</a:t>
-            </a:r>
-          </a:p>
-          <a:p>
             <a:endParaRPr lang="de-CH" dirty="0"/>
           </a:p>
         </p:txBody>
@@ -10095,7 +10068,7 @@
           <p:cNvPr id="4" name="Date Placeholder 3">
             <a:extLst>
               <a:ext uri="{FF2B5EF4-FFF2-40B4-BE49-F238E27FC236}">
-                <a16:creationId xmlns:a16="http://schemas.microsoft.com/office/drawing/2014/main" id="{3E96AA63-75C2-A3DC-7738-AA93BBA3DC88}"/>
+                <a16:creationId xmlns:a16="http://schemas.microsoft.com/office/drawing/2014/main" id="{C50629A9-4F7E-3839-DC35-841DA44F106E}"/>
               </a:ext>
             </a:extLst>
           </p:cNvPr>
@@ -10113,7 +10086,7 @@
           <a:p>
             <a:fld id="{EE15D7BA-2F5F-8E43-91CB-647D382EDB87}" type="datetime4">
               <a:rPr lang="de-CH" smtClean="0"/>
-              <a:t>15. Juni 2026</a:t>
+              <a:t>16. Juni 2026</a:t>
             </a:fld>
             <a:endParaRPr lang="en-CH"/>
           </a:p>
@@ -10124,7 +10097,7 @@
           <p:cNvPr id="5" name="Footer Placeholder 4">
             <a:extLst>
               <a:ext uri="{FF2B5EF4-FFF2-40B4-BE49-F238E27FC236}">
-                <a16:creationId xmlns:a16="http://schemas.microsoft.com/office/drawing/2014/main" id="{D8A6EFEE-7C9C-7F4D-3333-9861F0F9A4C8}"/>
+                <a16:creationId xmlns:a16="http://schemas.microsoft.com/office/drawing/2014/main" id="{60FE8A32-50BC-298C-EA36-A7E45DAC04C2}"/>
               </a:ext>
             </a:extLst>
           </p:cNvPr>
@@ -10153,7 +10126,7 @@
           <p:cNvPr id="6" name="Slide Number Placeholder 5">
             <a:extLst>
               <a:ext uri="{FF2B5EF4-FFF2-40B4-BE49-F238E27FC236}">
-                <a16:creationId xmlns:a16="http://schemas.microsoft.com/office/drawing/2014/main" id="{0FDD79F4-ED4C-2FEC-0050-140D09BDD0D0}"/>
+                <a16:creationId xmlns:a16="http://schemas.microsoft.com/office/drawing/2014/main" id="{7E18BD8A-3690-7005-ED93-9C8C8FDB66E5}"/>
               </a:ext>
             </a:extLst>
           </p:cNvPr>
@@ -10180,7 +10153,7 @@
     </p:spTree>
     <p:extLst>
       <p:ext uri="{BB962C8B-B14F-4D97-AF65-F5344CB8AC3E}">
-        <p14:creationId xmlns:p14="http://schemas.microsoft.com/office/powerpoint/2010/main" val="3922701098"/>
+        <p14:creationId xmlns:p14="http://schemas.microsoft.com/office/powerpoint/2010/main" val="3260311980"/>
       </p:ext>
     </p:extLst>
   </p:cSld>
@@ -10354,7 +10327,7 @@
           <a:p>
             <a:fld id="{EE15D7BA-2F5F-8E43-91CB-647D382EDB87}" type="datetime4">
               <a:rPr lang="de-CH" smtClean="0"/>
-              <a:t>15. Juni 2026</a:t>
+              <a:t>16. Juni 2026</a:t>
             </a:fld>
             <a:endParaRPr lang="en-CH"/>
           </a:p>
@@ -10432,12 +10405,12 @@
         </p:nvSpPr>
         <p:spPr>
           <a:xfrm>
-            <a:off x="7693572" y="3429000"/>
+            <a:off x="6007276" y="3429000"/>
             <a:ext cx="3098950" cy="1605776"/>
           </a:xfrm>
           <a:prstGeom prst="wedgeRoundRectCallout">
             <a:avLst>
-              <a:gd name="adj1" fmla="val -131118"/>
+              <a:gd name="adj1" fmla="val -91265"/>
               <a:gd name="adj2" fmla="val -9386"/>
               <a:gd name="adj3" fmla="val 16667"/>
             </a:avLst>
@@ -10565,7 +10538,7 @@
           <a:p>
             <a:fld id="{EE15D7BA-2F5F-8E43-91CB-647D382EDB87}" type="datetime4">
               <a:rPr lang="de-CH" smtClean="0"/>
-              <a:t>15. Juni 2026</a:t>
+              <a:t>16. Juni 2026</a:t>
             </a:fld>
             <a:endParaRPr lang="en-CH"/>
           </a:p>
@@ -10661,6 +10634,142 @@
           </a:prstGeom>
         </p:spPr>
       </p:pic>
+      <p:sp>
+        <p:nvSpPr>
+          <p:cNvPr id="3" name="Rounded Rectangular Callout 2">
+            <a:extLst>
+              <a:ext uri="{FF2B5EF4-FFF2-40B4-BE49-F238E27FC236}">
+                <a16:creationId xmlns:a16="http://schemas.microsoft.com/office/drawing/2014/main" id="{0269E1FC-4924-E0B9-A473-5425BB3476C1}"/>
+              </a:ext>
+            </a:extLst>
+          </p:cNvPr>
+          <p:cNvSpPr/>
+          <p:nvPr/>
+        </p:nvSpPr>
+        <p:spPr>
+          <a:xfrm>
+            <a:off x="8349342" y="2549224"/>
+            <a:ext cx="3842658" cy="2319061"/>
+          </a:xfrm>
+          <a:prstGeom prst="wedgeRoundRectCallout">
+            <a:avLst>
+              <a:gd name="adj1" fmla="val -31704"/>
+              <a:gd name="adj2" fmla="val 63262"/>
+              <a:gd name="adj3" fmla="val 16667"/>
+            </a:avLst>
+          </a:prstGeom>
+          <a:solidFill>
+            <a:schemeClr val="accent4">
+              <a:lumMod val="20000"/>
+              <a:lumOff val="80000"/>
+            </a:schemeClr>
+          </a:solidFill>
+        </p:spPr>
+        <p:style>
+          <a:lnRef idx="2">
+            <a:schemeClr val="accent1">
+              <a:shade val="15000"/>
+            </a:schemeClr>
+          </a:lnRef>
+          <a:fillRef idx="1">
+            <a:schemeClr val="accent1"/>
+          </a:fillRef>
+          <a:effectRef idx="0">
+            <a:schemeClr val="accent1"/>
+          </a:effectRef>
+          <a:fontRef idx="minor">
+            <a:schemeClr val="lt1"/>
+          </a:fontRef>
+        </p:style>
+        <p:txBody>
+          <a:bodyPr rtlCol="0" anchor="ctr"/>
+          <a:lstStyle/>
+          <a:p>
+            <a:r>
+              <a:rPr lang="de-CH" dirty="0" err="1">
+                <a:solidFill>
+                  <a:schemeClr val="tx1"/>
+                </a:solidFill>
+              </a:rPr>
+              <a:t>Xgboost</a:t>
+            </a:r>
+            <a:r>
+              <a:rPr lang="de-CH" dirty="0">
+                <a:solidFill>
+                  <a:schemeClr val="tx1"/>
+                </a:solidFill>
+              </a:rPr>
+              <a:t> fast überall am besten</a:t>
+            </a:r>
+          </a:p>
+          <a:p>
+            <a:r>
+              <a:rPr lang="de-CH" dirty="0" err="1">
+                <a:solidFill>
+                  <a:schemeClr val="tx1"/>
+                </a:solidFill>
+              </a:rPr>
+              <a:t>Kindle_Store</a:t>
+            </a:r>
+            <a:r>
+              <a:rPr lang="de-CH" dirty="0">
+                <a:solidFill>
+                  <a:schemeClr val="tx1"/>
+                </a:solidFill>
+              </a:rPr>
+              <a:t> für FCNN ungewöhnlich einfach</a:t>
+            </a:r>
+          </a:p>
+          <a:p>
+            <a:pPr lvl="0">
+              <a:defRPr/>
+            </a:pPr>
+            <a:r>
+              <a:rPr lang="en-CH" dirty="0">
+                <a:solidFill>
+                  <a:schemeClr val="tx1"/>
+                </a:solidFill>
+              </a:rPr>
+              <a:t>Sports &amp; Outdoors ist auffällig. </a:t>
+            </a:r>
+            <a:r>
+              <a:rPr lang="en-CH" dirty="0">
+                <a:solidFill>
+                  <a:schemeClr val="tx1"/>
+                </a:solidFill>
+                <a:sym typeface="Wingdings" pitchFamily="2" charset="2"/>
+              </a:rPr>
+              <a:t>xgboost 5% besser als FCNN</a:t>
+            </a:r>
+          </a:p>
+          <a:p>
+            <a:pPr lvl="0">
+              <a:defRPr/>
+            </a:pPr>
+            <a:r>
+              <a:rPr lang="en-CH" dirty="0">
+                <a:solidFill>
+                  <a:schemeClr val="tx1"/>
+                </a:solidFill>
+                <a:sym typeface="Wingdings" pitchFamily="2" charset="2"/>
+              </a:rPr>
+              <a:t>Movies_and_TV für alle schwierig</a:t>
+            </a:r>
+            <a:endParaRPr lang="en-CH" dirty="0">
+              <a:solidFill>
+                <a:schemeClr val="tx1"/>
+              </a:solidFill>
+            </a:endParaRPr>
+          </a:p>
+          <a:p>
+            <a:endParaRPr lang="en-CH" dirty="0">
+              <a:solidFill>
+                <a:schemeClr val="tx1"/>
+              </a:solidFill>
+            </a:endParaRPr>
+          </a:p>
+        </p:txBody>
+      </p:sp>
     </p:spTree>
     <p:extLst>
       <p:ext uri="{BB962C8B-B14F-4D97-AF65-F5344CB8AC3E}">
@@ -10750,7 +10859,7 @@
           <a:p>
             <a:fld id="{EE15D7BA-2F5F-8E43-91CB-647D382EDB87}" type="datetime4">
               <a:rPr lang="de-CH" smtClean="0"/>
-              <a:t>15. Juni 2026</a:t>
+              <a:t>16. Juni 2026</a:t>
             </a:fld>
             <a:endParaRPr lang="en-CH"/>
           </a:p>
@@ -10838,7 +10947,7 @@
         </p:blipFill>
         <p:spPr>
           <a:xfrm>
-            <a:off x="1650380" y="1333922"/>
+            <a:off x="345909" y="1470447"/>
             <a:ext cx="8979255" cy="5387553"/>
           </a:xfrm>
           <a:prstGeom prst="rect">
@@ -10846,193 +10955,555 @@
           </a:prstGeom>
         </p:spPr>
       </p:pic>
-      <p:sp>
-        <p:nvSpPr>
-          <p:cNvPr id="10" name="Rounded Rectangular Callout 9">
-            <a:extLst>
-              <a:ext uri="{FF2B5EF4-FFF2-40B4-BE49-F238E27FC236}">
-                <a16:creationId xmlns:a16="http://schemas.microsoft.com/office/drawing/2014/main" id="{DF4B14F1-B8F1-5DA7-CA9B-B3D2A4F16A82}"/>
-              </a:ext>
-            </a:extLst>
-          </p:cNvPr>
-          <p:cNvSpPr/>
-          <p:nvPr/>
-        </p:nvSpPr>
-        <p:spPr>
-          <a:xfrm>
-            <a:off x="2776653" y="4282068"/>
-            <a:ext cx="2029522" cy="1605776"/>
-          </a:xfrm>
-          <a:prstGeom prst="wedgeRoundRectCallout">
-            <a:avLst>
-              <a:gd name="adj1" fmla="val 80855"/>
-              <a:gd name="adj2" fmla="val 48867"/>
-              <a:gd name="adj3" fmla="val 16667"/>
-            </a:avLst>
-          </a:prstGeom>
-          <a:solidFill>
-            <a:schemeClr val="accent4">
-              <a:lumMod val="20000"/>
-              <a:lumOff val="80000"/>
-            </a:schemeClr>
-          </a:solidFill>
-        </p:spPr>
-        <p:style>
-          <a:lnRef idx="2">
-            <a:schemeClr val="accent1">
-              <a:shade val="15000"/>
-            </a:schemeClr>
-          </a:lnRef>
-          <a:fillRef idx="1">
-            <a:schemeClr val="accent1"/>
-          </a:fillRef>
-          <a:effectRef idx="0">
-            <a:schemeClr val="accent1"/>
-          </a:effectRef>
-          <a:fontRef idx="minor">
-            <a:schemeClr val="lt1"/>
-          </a:fontRef>
-        </p:style>
-        <p:txBody>
-          <a:bodyPr rtlCol="0" anchor="ctr"/>
-          <a:lstStyle/>
-          <a:p>
-            <a:r>
-              <a:rPr lang="en-CH" dirty="0">
-                <a:solidFill>
-                  <a:schemeClr val="tx1"/>
-                </a:solidFill>
-              </a:rPr>
-              <a:t>1 </a:t>
-            </a:r>
-            <a:r>
-              <a:rPr lang="en-CH" dirty="0">
-                <a:solidFill>
-                  <a:schemeClr val="tx1"/>
-                </a:solidFill>
-                <a:sym typeface="Wingdings" pitchFamily="2" charset="2"/>
-              </a:rPr>
-              <a:t> </a:t>
-            </a:r>
-            <a:r>
-              <a:rPr lang="en-CH" dirty="0">
-                <a:solidFill>
-                  <a:schemeClr val="tx1"/>
-                </a:solidFill>
-              </a:rPr>
-              <a:t>5%</a:t>
-            </a:r>
-          </a:p>
-          <a:p>
-            <a:r>
-              <a:rPr lang="en-CH" dirty="0">
-                <a:solidFill>
-                  <a:schemeClr val="tx1"/>
-                </a:solidFill>
-              </a:rPr>
-              <a:t>2 </a:t>
-            </a:r>
-            <a:r>
-              <a:rPr lang="en-CH" dirty="0">
-                <a:solidFill>
-                  <a:schemeClr val="tx1"/>
-                </a:solidFill>
-                <a:sym typeface="Wingdings" pitchFamily="2" charset="2"/>
-              </a:rPr>
-              <a:t> </a:t>
-            </a:r>
-            <a:r>
-              <a:rPr lang="en-CH" dirty="0">
-                <a:solidFill>
-                  <a:schemeClr val="tx1"/>
-                </a:solidFill>
-              </a:rPr>
-              <a:t>5%</a:t>
-            </a:r>
-          </a:p>
-          <a:p>
-            <a:r>
-              <a:rPr lang="en-CH" dirty="0">
-                <a:solidFill>
-                  <a:schemeClr val="tx1"/>
-                </a:solidFill>
-              </a:rPr>
-              <a:t>3 </a:t>
-            </a:r>
-            <a:r>
-              <a:rPr lang="en-CH" dirty="0">
-                <a:solidFill>
-                  <a:schemeClr val="tx1"/>
-                </a:solidFill>
-                <a:sym typeface="Wingdings" pitchFamily="2" charset="2"/>
-              </a:rPr>
-              <a:t> </a:t>
-            </a:r>
-            <a:r>
-              <a:rPr lang="en-CH" dirty="0">
-                <a:solidFill>
-                  <a:schemeClr val="tx1"/>
-                </a:solidFill>
-              </a:rPr>
-              <a:t>9%</a:t>
-            </a:r>
-          </a:p>
-          <a:p>
-            <a:r>
-              <a:rPr lang="en-CH" dirty="0">
-                <a:solidFill>
-                  <a:schemeClr val="tx1"/>
-                </a:solidFill>
-              </a:rPr>
-              <a:t>4 </a:t>
-            </a:r>
-            <a:r>
-              <a:rPr lang="en-CH" dirty="0">
-                <a:solidFill>
-                  <a:schemeClr val="tx1"/>
-                </a:solidFill>
-                <a:sym typeface="Wingdings" pitchFamily="2" charset="2"/>
-              </a:rPr>
-              <a:t> </a:t>
-            </a:r>
-            <a:r>
-              <a:rPr lang="en-CH" dirty="0">
-                <a:solidFill>
-                  <a:schemeClr val="tx1"/>
-                </a:solidFill>
-              </a:rPr>
-              <a:t>20%</a:t>
-            </a:r>
-          </a:p>
-          <a:p>
-            <a:r>
-              <a:rPr lang="en-CH" dirty="0">
-                <a:solidFill>
-                  <a:schemeClr val="tx1"/>
-                </a:solidFill>
-              </a:rPr>
-              <a:t>5 </a:t>
-            </a:r>
-            <a:r>
-              <a:rPr lang="en-CH" dirty="0">
-                <a:solidFill>
-                  <a:schemeClr val="tx1"/>
-                </a:solidFill>
-                <a:sym typeface="Wingdings" pitchFamily="2" charset="2"/>
-              </a:rPr>
-              <a:t> </a:t>
-            </a:r>
-            <a:r>
-              <a:rPr lang="en-CH" dirty="0">
-                <a:solidFill>
-                  <a:schemeClr val="tx1"/>
-                </a:solidFill>
-              </a:rPr>
-              <a:t>61%</a:t>
-            </a:r>
-          </a:p>
-        </p:txBody>
-      </p:sp>
+      <p:graphicFrame>
+        <p:nvGraphicFramePr>
+          <p:cNvPr id="3" name="Table 2">
+            <a:extLst>
+              <a:ext uri="{FF2B5EF4-FFF2-40B4-BE49-F238E27FC236}">
+                <a16:creationId xmlns:a16="http://schemas.microsoft.com/office/drawing/2014/main" id="{F77CAE02-A21C-96F7-7932-3BD3B617EF60}"/>
+              </a:ext>
+            </a:extLst>
+          </p:cNvPr>
+          <p:cNvGraphicFramePr>
+            <a:graphicFrameLocks noGrp="1"/>
+          </p:cNvGraphicFramePr>
+          <p:nvPr>
+            <p:extLst>
+              <p:ext uri="{D42A27DB-BD31-4B8C-83A1-F6EECF244321}">
+                <p14:modId xmlns:p14="http://schemas.microsoft.com/office/powerpoint/2010/main" val="3040032892"/>
+              </p:ext>
+            </p:extLst>
+          </p:nvPr>
+        </p:nvGraphicFramePr>
+        <p:xfrm>
+          <a:off x="9637486" y="2728686"/>
+          <a:ext cx="2208605" cy="1643844"/>
+        </p:xfrm>
+        <a:graphic>
+          <a:graphicData uri="http://schemas.openxmlformats.org/drawingml/2006/table">
+            <a:tbl>
+              <a:tblPr>
+                <a:tableStyleId>{5C22544A-7EE6-4342-B048-85BDC9FD1C3A}</a:tableStyleId>
+              </a:tblPr>
+              <a:tblGrid>
+                <a:gridCol w="711864">
+                  <a:extLst>
+                    <a:ext uri="{9D8B030D-6E8A-4147-A177-3AD203B41FA5}">
+                      <a16:colId xmlns:a16="http://schemas.microsoft.com/office/drawing/2014/main" val="577673286"/>
+                    </a:ext>
+                  </a:extLst>
+                </a:gridCol>
+                <a:gridCol w="839635">
+                  <a:extLst>
+                    <a:ext uri="{9D8B030D-6E8A-4147-A177-3AD203B41FA5}">
+                      <a16:colId xmlns:a16="http://schemas.microsoft.com/office/drawing/2014/main" val="2897223581"/>
+                    </a:ext>
+                  </a:extLst>
+                </a:gridCol>
+                <a:gridCol w="657106">
+                  <a:extLst>
+                    <a:ext uri="{9D8B030D-6E8A-4147-A177-3AD203B41FA5}">
+                      <a16:colId xmlns:a16="http://schemas.microsoft.com/office/drawing/2014/main" val="194268055"/>
+                    </a:ext>
+                  </a:extLst>
+                </a:gridCol>
+              </a:tblGrid>
+              <a:tr h="273974">
+                <a:tc>
+                  <a:txBody>
+                    <a:bodyPr/>
+                    <a:lstStyle/>
+                    <a:p>
+                      <a:pPr algn="l" fontAlgn="b">
+                        <a:buNone/>
+                      </a:pPr>
+                      <a:r>
+                        <a:rPr lang="en-CH" sz="1200" u="none" strike="noStrike" dirty="0">
+                          <a:effectLst/>
+                        </a:rPr>
+                        <a:t>Rating</a:t>
+                      </a:r>
+                      <a:endParaRPr lang="en-CH" sz="1200" b="0" i="0" u="none" strike="noStrike" dirty="0">
+                        <a:solidFill>
+                          <a:srgbClr val="000000"/>
+                        </a:solidFill>
+                        <a:effectLst/>
+                        <a:latin typeface="Calibri" panose="020F0502020204030204" pitchFamily="34" charset="0"/>
+                      </a:endParaRPr>
+                    </a:p>
+                  </a:txBody>
+                  <a:tcPr marL="9525" marR="9525" marT="9525" marB="0" anchor="b"/>
+                </a:tc>
+                <a:tc>
+                  <a:txBody>
+                    <a:bodyPr/>
+                    <a:lstStyle/>
+                    <a:p>
+                      <a:pPr algn="l" fontAlgn="b">
+                        <a:buNone/>
+                      </a:pPr>
+                      <a:r>
+                        <a:rPr lang="en-CH" sz="1200" u="none" strike="noStrike">
+                          <a:effectLst/>
+                        </a:rPr>
+                        <a:t>Records</a:t>
+                      </a:r>
+                      <a:endParaRPr lang="en-CH" sz="1200" b="0" i="0" u="none" strike="noStrike">
+                        <a:solidFill>
+                          <a:srgbClr val="000000"/>
+                        </a:solidFill>
+                        <a:effectLst/>
+                        <a:latin typeface="Calibri" panose="020F0502020204030204" pitchFamily="34" charset="0"/>
+                      </a:endParaRPr>
+                    </a:p>
+                  </a:txBody>
+                  <a:tcPr marL="9525" marR="9525" marT="9525" marB="0" anchor="b"/>
+                </a:tc>
+                <a:tc>
+                  <a:txBody>
+                    <a:bodyPr/>
+                    <a:lstStyle/>
+                    <a:p>
+                      <a:pPr algn="l" fontAlgn="b">
+                        <a:buNone/>
+                      </a:pPr>
+                      <a:r>
+                        <a:rPr lang="en-CH" sz="1200" u="none" strike="noStrike">
+                          <a:effectLst/>
+                        </a:rPr>
+                        <a:t>Anteil</a:t>
+                      </a:r>
+                      <a:endParaRPr lang="en-CH" sz="1200" b="0" i="0" u="none" strike="noStrike">
+                        <a:solidFill>
+                          <a:srgbClr val="000000"/>
+                        </a:solidFill>
+                        <a:effectLst/>
+                        <a:latin typeface="Calibri" panose="020F0502020204030204" pitchFamily="34" charset="0"/>
+                      </a:endParaRPr>
+                    </a:p>
+                  </a:txBody>
+                  <a:tcPr marL="9525" marR="9525" marT="9525" marB="0" anchor="b"/>
+                </a:tc>
+                <a:extLst>
+                  <a:ext uri="{0D108BD9-81ED-4DB2-BD59-A6C34878D82A}">
+                    <a16:rowId xmlns:a16="http://schemas.microsoft.com/office/drawing/2014/main" val="3948829924"/>
+                  </a:ext>
+                </a:extLst>
+              </a:tr>
+              <a:tr h="273974">
+                <a:tc>
+                  <a:txBody>
+                    <a:bodyPr/>
+                    <a:lstStyle/>
+                    <a:p>
+                      <a:pPr algn="r" fontAlgn="b">
+                        <a:buNone/>
+                      </a:pPr>
+                      <a:r>
+                        <a:rPr lang="en-CH" sz="1200" u="none" strike="noStrike">
+                          <a:effectLst/>
+                        </a:rPr>
+                        <a:t>1</a:t>
+                      </a:r>
+                      <a:endParaRPr lang="en-CH" sz="1200" b="0" i="0" u="none" strike="noStrike">
+                        <a:solidFill>
+                          <a:srgbClr val="000000"/>
+                        </a:solidFill>
+                        <a:effectLst/>
+                        <a:latin typeface="Calibri" panose="020F0502020204030204" pitchFamily="34" charset="0"/>
+                      </a:endParaRPr>
+                    </a:p>
+                  </a:txBody>
+                  <a:tcPr marL="9525" marR="9525" marT="9525" marB="0" anchor="b"/>
+                </a:tc>
+                <a:tc>
+                  <a:txBody>
+                    <a:bodyPr/>
+                    <a:lstStyle/>
+                    <a:p>
+                      <a:pPr algn="r" fontAlgn="b">
+                        <a:buNone/>
+                      </a:pPr>
+                      <a:r>
+                        <a:rPr lang="en-CH" sz="1200" u="none" strike="noStrike">
+                          <a:effectLst/>
+                        </a:rPr>
+                        <a:t>2155</a:t>
+                      </a:r>
+                      <a:endParaRPr lang="en-CH" sz="1200" b="0" i="0" u="none" strike="noStrike">
+                        <a:solidFill>
+                          <a:srgbClr val="000000"/>
+                        </a:solidFill>
+                        <a:effectLst/>
+                        <a:latin typeface="Calibri" panose="020F0502020204030204" pitchFamily="34" charset="0"/>
+                      </a:endParaRPr>
+                    </a:p>
+                  </a:txBody>
+                  <a:tcPr marL="9525" marR="9525" marT="9525" marB="0" anchor="b"/>
+                </a:tc>
+                <a:tc>
+                  <a:txBody>
+                    <a:bodyPr/>
+                    <a:lstStyle/>
+                    <a:p>
+                      <a:pPr algn="r" fontAlgn="b">
+                        <a:buNone/>
+                      </a:pPr>
+                      <a:r>
+                        <a:rPr lang="en-CH" sz="1200" u="none" strike="noStrike">
+                          <a:effectLst/>
+                        </a:rPr>
+                        <a:t>5%</a:t>
+                      </a:r>
+                      <a:endParaRPr lang="en-CH" sz="1200" b="0" i="0" u="none" strike="noStrike">
+                        <a:solidFill>
+                          <a:srgbClr val="000000"/>
+                        </a:solidFill>
+                        <a:effectLst/>
+                        <a:latin typeface="Calibri" panose="020F0502020204030204" pitchFamily="34" charset="0"/>
+                      </a:endParaRPr>
+                    </a:p>
+                  </a:txBody>
+                  <a:tcPr marL="9525" marR="9525" marT="9525" marB="0" anchor="b"/>
+                </a:tc>
+                <a:extLst>
+                  <a:ext uri="{0D108BD9-81ED-4DB2-BD59-A6C34878D82A}">
+                    <a16:rowId xmlns:a16="http://schemas.microsoft.com/office/drawing/2014/main" val="3984432608"/>
+                  </a:ext>
+                </a:extLst>
+              </a:tr>
+              <a:tr h="273974">
+                <a:tc>
+                  <a:txBody>
+                    <a:bodyPr/>
+                    <a:lstStyle/>
+                    <a:p>
+                      <a:pPr algn="r" fontAlgn="b">
+                        <a:buNone/>
+                      </a:pPr>
+                      <a:r>
+                        <a:rPr lang="en-CH" sz="1200" u="none" strike="noStrike">
+                          <a:effectLst/>
+                        </a:rPr>
+                        <a:t>2</a:t>
+                      </a:r>
+                      <a:endParaRPr lang="en-CH" sz="1200" b="0" i="0" u="none" strike="noStrike">
+                        <a:solidFill>
+                          <a:srgbClr val="000000"/>
+                        </a:solidFill>
+                        <a:effectLst/>
+                        <a:latin typeface="Calibri" panose="020F0502020204030204" pitchFamily="34" charset="0"/>
+                      </a:endParaRPr>
+                    </a:p>
+                  </a:txBody>
+                  <a:tcPr marL="9525" marR="9525" marT="9525" marB="0" anchor="b"/>
+                </a:tc>
+                <a:tc>
+                  <a:txBody>
+                    <a:bodyPr/>
+                    <a:lstStyle/>
+                    <a:p>
+                      <a:pPr algn="r" fontAlgn="b">
+                        <a:buNone/>
+                      </a:pPr>
+                      <a:r>
+                        <a:rPr lang="en-CH" sz="1200" u="none" strike="noStrike">
+                          <a:effectLst/>
+                        </a:rPr>
+                        <a:t>1967</a:t>
+                      </a:r>
+                      <a:endParaRPr lang="en-CH" sz="1200" b="0" i="0" u="none" strike="noStrike">
+                        <a:solidFill>
+                          <a:srgbClr val="000000"/>
+                        </a:solidFill>
+                        <a:effectLst/>
+                        <a:latin typeface="Calibri" panose="020F0502020204030204" pitchFamily="34" charset="0"/>
+                      </a:endParaRPr>
+                    </a:p>
+                  </a:txBody>
+                  <a:tcPr marL="9525" marR="9525" marT="9525" marB="0" anchor="b"/>
+                </a:tc>
+                <a:tc>
+                  <a:txBody>
+                    <a:bodyPr/>
+                    <a:lstStyle/>
+                    <a:p>
+                      <a:pPr algn="r" fontAlgn="b">
+                        <a:buNone/>
+                      </a:pPr>
+                      <a:r>
+                        <a:rPr lang="en-CH" sz="1200" u="none" strike="noStrike">
+                          <a:effectLst/>
+                        </a:rPr>
+                        <a:t>5%</a:t>
+                      </a:r>
+                      <a:endParaRPr lang="en-CH" sz="1200" b="0" i="0" u="none" strike="noStrike">
+                        <a:solidFill>
+                          <a:srgbClr val="000000"/>
+                        </a:solidFill>
+                        <a:effectLst/>
+                        <a:latin typeface="Calibri" panose="020F0502020204030204" pitchFamily="34" charset="0"/>
+                      </a:endParaRPr>
+                    </a:p>
+                  </a:txBody>
+                  <a:tcPr marL="9525" marR="9525" marT="9525" marB="0" anchor="b"/>
+                </a:tc>
+                <a:extLst>
+                  <a:ext uri="{0D108BD9-81ED-4DB2-BD59-A6C34878D82A}">
+                    <a16:rowId xmlns:a16="http://schemas.microsoft.com/office/drawing/2014/main" val="52252218"/>
+                  </a:ext>
+                </a:extLst>
+              </a:tr>
+              <a:tr h="273974">
+                <a:tc>
+                  <a:txBody>
+                    <a:bodyPr/>
+                    <a:lstStyle/>
+                    <a:p>
+                      <a:pPr algn="r" fontAlgn="b">
+                        <a:buNone/>
+                      </a:pPr>
+                      <a:r>
+                        <a:rPr lang="en-CH" sz="1200" u="none" strike="noStrike">
+                          <a:effectLst/>
+                        </a:rPr>
+                        <a:t>3</a:t>
+                      </a:r>
+                      <a:endParaRPr lang="en-CH" sz="1200" b="0" i="0" u="none" strike="noStrike">
+                        <a:solidFill>
+                          <a:srgbClr val="000000"/>
+                        </a:solidFill>
+                        <a:effectLst/>
+                        <a:latin typeface="Calibri" panose="020F0502020204030204" pitchFamily="34" charset="0"/>
+                      </a:endParaRPr>
+                    </a:p>
+                  </a:txBody>
+                  <a:tcPr marL="9525" marR="9525" marT="9525" marB="0" anchor="b"/>
+                </a:tc>
+                <a:tc>
+                  <a:txBody>
+                    <a:bodyPr/>
+                    <a:lstStyle/>
+                    <a:p>
+                      <a:pPr algn="r" fontAlgn="b">
+                        <a:buNone/>
+                      </a:pPr>
+                      <a:r>
+                        <a:rPr lang="en-CH" sz="1200" u="none" strike="noStrike">
+                          <a:effectLst/>
+                        </a:rPr>
+                        <a:t>3786</a:t>
+                      </a:r>
+                      <a:endParaRPr lang="en-CH" sz="1200" b="0" i="0" u="none" strike="noStrike">
+                        <a:solidFill>
+                          <a:srgbClr val="000000"/>
+                        </a:solidFill>
+                        <a:effectLst/>
+                        <a:latin typeface="Calibri" panose="020F0502020204030204" pitchFamily="34" charset="0"/>
+                      </a:endParaRPr>
+                    </a:p>
+                  </a:txBody>
+                  <a:tcPr marL="9525" marR="9525" marT="9525" marB="0" anchor="b"/>
+                </a:tc>
+                <a:tc>
+                  <a:txBody>
+                    <a:bodyPr/>
+                    <a:lstStyle/>
+                    <a:p>
+                      <a:pPr algn="r" fontAlgn="b">
+                        <a:buNone/>
+                      </a:pPr>
+                      <a:r>
+                        <a:rPr lang="en-CH" sz="1200" u="none" strike="noStrike">
+                          <a:effectLst/>
+                        </a:rPr>
+                        <a:t>9%</a:t>
+                      </a:r>
+                      <a:endParaRPr lang="en-CH" sz="1200" b="0" i="0" u="none" strike="noStrike">
+                        <a:solidFill>
+                          <a:srgbClr val="000000"/>
+                        </a:solidFill>
+                        <a:effectLst/>
+                        <a:latin typeface="Calibri" panose="020F0502020204030204" pitchFamily="34" charset="0"/>
+                      </a:endParaRPr>
+                    </a:p>
+                  </a:txBody>
+                  <a:tcPr marL="9525" marR="9525" marT="9525" marB="0" anchor="b"/>
+                </a:tc>
+                <a:extLst>
+                  <a:ext uri="{0D108BD9-81ED-4DB2-BD59-A6C34878D82A}">
+                    <a16:rowId xmlns:a16="http://schemas.microsoft.com/office/drawing/2014/main" val="1583668228"/>
+                  </a:ext>
+                </a:extLst>
+              </a:tr>
+              <a:tr h="273974">
+                <a:tc>
+                  <a:txBody>
+                    <a:bodyPr/>
+                    <a:lstStyle/>
+                    <a:p>
+                      <a:pPr algn="r" fontAlgn="b">
+                        <a:buNone/>
+                      </a:pPr>
+                      <a:r>
+                        <a:rPr lang="en-CH" sz="1200" u="none" strike="noStrike">
+                          <a:effectLst/>
+                        </a:rPr>
+                        <a:t>4</a:t>
+                      </a:r>
+                      <a:endParaRPr lang="en-CH" sz="1200" b="0" i="0" u="none" strike="noStrike">
+                        <a:solidFill>
+                          <a:srgbClr val="000000"/>
+                        </a:solidFill>
+                        <a:effectLst/>
+                        <a:latin typeface="Calibri" panose="020F0502020204030204" pitchFamily="34" charset="0"/>
+                      </a:endParaRPr>
+                    </a:p>
+                  </a:txBody>
+                  <a:tcPr marL="9525" marR="9525" marT="9525" marB="0" anchor="b"/>
+                </a:tc>
+                <a:tc>
+                  <a:txBody>
+                    <a:bodyPr/>
+                    <a:lstStyle/>
+                    <a:p>
+                      <a:pPr algn="r" fontAlgn="b">
+                        <a:buNone/>
+                      </a:pPr>
+                      <a:r>
+                        <a:rPr lang="en-CH" sz="1200" u="none" strike="noStrike">
+                          <a:effectLst/>
+                        </a:rPr>
+                        <a:t>7965</a:t>
+                      </a:r>
+                      <a:endParaRPr lang="en-CH" sz="1200" b="0" i="0" u="none" strike="noStrike">
+                        <a:solidFill>
+                          <a:srgbClr val="000000"/>
+                        </a:solidFill>
+                        <a:effectLst/>
+                        <a:latin typeface="Calibri" panose="020F0502020204030204" pitchFamily="34" charset="0"/>
+                      </a:endParaRPr>
+                    </a:p>
+                  </a:txBody>
+                  <a:tcPr marL="9525" marR="9525" marT="9525" marB="0" anchor="b"/>
+                </a:tc>
+                <a:tc>
+                  <a:txBody>
+                    <a:bodyPr/>
+                    <a:lstStyle/>
+                    <a:p>
+                      <a:pPr algn="r" fontAlgn="b">
+                        <a:buNone/>
+                      </a:pPr>
+                      <a:r>
+                        <a:rPr lang="en-CH" sz="1200" u="none" strike="noStrike">
+                          <a:effectLst/>
+                        </a:rPr>
+                        <a:t>20%</a:t>
+                      </a:r>
+                      <a:endParaRPr lang="en-CH" sz="1200" b="0" i="0" u="none" strike="noStrike">
+                        <a:solidFill>
+                          <a:srgbClr val="000000"/>
+                        </a:solidFill>
+                        <a:effectLst/>
+                        <a:latin typeface="Calibri" panose="020F0502020204030204" pitchFamily="34" charset="0"/>
+                      </a:endParaRPr>
+                    </a:p>
+                  </a:txBody>
+                  <a:tcPr marL="9525" marR="9525" marT="9525" marB="0" anchor="b"/>
+                </a:tc>
+                <a:extLst>
+                  <a:ext uri="{0D108BD9-81ED-4DB2-BD59-A6C34878D82A}">
+                    <a16:rowId xmlns:a16="http://schemas.microsoft.com/office/drawing/2014/main" val="1985188170"/>
+                  </a:ext>
+                </a:extLst>
+              </a:tr>
+              <a:tr h="273974">
+                <a:tc>
+                  <a:txBody>
+                    <a:bodyPr/>
+                    <a:lstStyle/>
+                    <a:p>
+                      <a:pPr algn="r" fontAlgn="b">
+                        <a:buNone/>
+                      </a:pPr>
+                      <a:r>
+                        <a:rPr lang="en-CH" sz="1200" u="none" strike="noStrike">
+                          <a:effectLst/>
+                        </a:rPr>
+                        <a:t>5</a:t>
+                      </a:r>
+                      <a:endParaRPr lang="en-CH" sz="1200" b="0" i="0" u="none" strike="noStrike">
+                        <a:solidFill>
+                          <a:srgbClr val="000000"/>
+                        </a:solidFill>
+                        <a:effectLst/>
+                        <a:latin typeface="Calibri" panose="020F0502020204030204" pitchFamily="34" charset="0"/>
+                      </a:endParaRPr>
+                    </a:p>
+                  </a:txBody>
+                  <a:tcPr marL="9525" marR="9525" marT="9525" marB="0" anchor="b"/>
+                </a:tc>
+                <a:tc>
+                  <a:txBody>
+                    <a:bodyPr/>
+                    <a:lstStyle/>
+                    <a:p>
+                      <a:pPr algn="r" fontAlgn="b">
+                        <a:buNone/>
+                      </a:pPr>
+                      <a:r>
+                        <a:rPr lang="en-CH" sz="1200" u="none" strike="noStrike">
+                          <a:effectLst/>
+                        </a:rPr>
+                        <a:t>24559</a:t>
+                      </a:r>
+                      <a:endParaRPr lang="en-CH" sz="1200" b="0" i="0" u="none" strike="noStrike">
+                        <a:solidFill>
+                          <a:srgbClr val="000000"/>
+                        </a:solidFill>
+                        <a:effectLst/>
+                        <a:latin typeface="Calibri" panose="020F0502020204030204" pitchFamily="34" charset="0"/>
+                      </a:endParaRPr>
+                    </a:p>
+                  </a:txBody>
+                  <a:tcPr marL="9525" marR="9525" marT="9525" marB="0" anchor="b"/>
+                </a:tc>
+                <a:tc>
+                  <a:txBody>
+                    <a:bodyPr/>
+                    <a:lstStyle/>
+                    <a:p>
+                      <a:pPr algn="r" fontAlgn="b">
+                        <a:buNone/>
+                      </a:pPr>
+                      <a:r>
+                        <a:rPr lang="en-CH" sz="1200" u="none" strike="noStrike" dirty="0">
+                          <a:effectLst/>
+                        </a:rPr>
+                        <a:t>61%</a:t>
+                      </a:r>
+                      <a:endParaRPr lang="en-CH" sz="1200" b="0" i="0" u="none" strike="noStrike" dirty="0">
+                        <a:solidFill>
+                          <a:srgbClr val="000000"/>
+                        </a:solidFill>
+                        <a:effectLst/>
+                        <a:latin typeface="Calibri" panose="020F0502020204030204" pitchFamily="34" charset="0"/>
+                      </a:endParaRPr>
+                    </a:p>
+                  </a:txBody>
+                  <a:tcPr marL="9525" marR="9525" marT="9525" marB="0" anchor="b"/>
+                </a:tc>
+                <a:extLst>
+                  <a:ext uri="{0D108BD9-81ED-4DB2-BD59-A6C34878D82A}">
+                    <a16:rowId xmlns:a16="http://schemas.microsoft.com/office/drawing/2014/main" val="566336149"/>
+                  </a:ext>
+                </a:extLst>
+              </a:tr>
+            </a:tbl>
+          </a:graphicData>
+        </a:graphic>
+      </p:graphicFrame>
     </p:spTree>
     <p:extLst>
       <p:ext uri="{BB962C8B-B14F-4D97-AF65-F5344CB8AC3E}">
@@ -11047,7 +11518,7 @@
 </file>
 
 <file path=ppt/slides/slide9.xml><?xml version="1.0" encoding="utf-8"?>
-<p:sld xmlns:a="http://schemas.openxmlformats.org/drawingml/2006/main" xmlns:r="http://schemas.openxmlformats.org/officeDocument/2006/relationships" xmlns:p="http://schemas.openxmlformats.org/presentationml/2006/main">
+<p:sld xmlns:a="http://schemas.openxmlformats.org/drawingml/2006/main" xmlns:r="http://schemas.openxmlformats.org/officeDocument/2006/relationships" xmlns:p="http://schemas.openxmlformats.org/presentationml/2006/main" show="0">
   <p:cSld>
     <p:spTree>
       <p:nvGrpSpPr>
@@ -11243,7 +11714,7 @@
           <a:p>
             <a:fld id="{EE15D7BA-2F5F-8E43-91CB-647D382EDB87}" type="datetime4">
               <a:rPr lang="de-CH" smtClean="0"/>
-              <a:t>15. Juni 2026</a:t>
+              <a:t>16. Juni 2026</a:t>
             </a:fld>
             <a:endParaRPr lang="en-CH"/>
           </a:p>

--- a/presentation/ln_text_analysis.pptx
+++ b/presentation/ln_text_analysis.pptx
@@ -5,7 +5,7 @@
     <p:sldMasterId id="2147483648" r:id="rId1"/>
   </p:sldMasterIdLst>
   <p:notesMasterIdLst>
-    <p:notesMasterId r:id="rId22"/>
+    <p:notesMasterId r:id="rId23"/>
   </p:notesMasterIdLst>
   <p:sldIdLst>
     <p:sldId id="281" r:id="rId2"/>
@@ -24,10 +24,11 @@
     <p:sldId id="295" r:id="rId15"/>
     <p:sldId id="296" r:id="rId16"/>
     <p:sldId id="297" r:id="rId17"/>
-    <p:sldId id="300" r:id="rId18"/>
-    <p:sldId id="298" r:id="rId19"/>
-    <p:sldId id="275" r:id="rId20"/>
-    <p:sldId id="280" r:id="rId21"/>
+    <p:sldId id="298" r:id="rId18"/>
+    <p:sldId id="275" r:id="rId19"/>
+    <p:sldId id="303" r:id="rId20"/>
+    <p:sldId id="304" r:id="rId21"/>
+    <p:sldId id="280" r:id="rId22"/>
   </p:sldIdLst>
   <p:sldSz cx="12192000" cy="6858000"/>
   <p:notesSz cx="6858000" cy="9144000"/>
@@ -37,8 +38,8 @@
         <p:sld r:id="rId2"/>
         <p:sld r:id="rId3"/>
         <p:sld r:id="rId4"/>
-        <p:sld r:id="rId20"/>
-        <p:sld r:id="rId21"/>
+        <p:sld r:id="rId19"/>
+        <p:sld r:id="rId22"/>
       </p:sldLst>
     </p:custShow>
     <p:custShow name="Streaming" id="1">
@@ -245,7 +246,7 @@
           <a:p>
             <a:fld id="{E1184886-9C14-F646-94FD-4C50F4C24EDB}" type="datetimeFigureOut">
               <a:rPr lang="de-CH" smtClean="0"/>
-              <a:t>16.06.26</a:t>
+              <a:t>17.06.26</a:t>
             </a:fld>
             <a:endParaRPr lang="de-CH"/>
           </a:p>
@@ -2195,6 +2196,90 @@
 </p:notes>
 </file>
 
+<file path=ppt/notesSlides/notesSlide9.xml><?xml version="1.0" encoding="utf-8"?>
+<p:notes xmlns:a="http://schemas.openxmlformats.org/drawingml/2006/main" xmlns:r="http://schemas.openxmlformats.org/officeDocument/2006/relationships" xmlns:p="http://schemas.openxmlformats.org/presentationml/2006/main">
+  <p:cSld>
+    <p:spTree>
+      <p:nvGrpSpPr>
+        <p:cNvPr id="1" name=""/>
+        <p:cNvGrpSpPr/>
+        <p:nvPr/>
+      </p:nvGrpSpPr>
+      <p:grpSpPr>
+        <a:xfrm>
+          <a:off x="0" y="0"/>
+          <a:ext cx="0" cy="0"/>
+          <a:chOff x="0" y="0"/>
+          <a:chExt cx="0" cy="0"/>
+        </a:xfrm>
+      </p:grpSpPr>
+      <p:sp>
+        <p:nvSpPr>
+          <p:cNvPr id="2" name="Slide Image Placeholder 1"/>
+          <p:cNvSpPr>
+            <a:spLocks noGrp="1" noRot="1" noChangeAspect="1"/>
+          </p:cNvSpPr>
+          <p:nvPr>
+            <p:ph type="sldImg"/>
+          </p:nvPr>
+        </p:nvSpPr>
+        <p:spPr/>
+      </p:sp>
+      <p:sp>
+        <p:nvSpPr>
+          <p:cNvPr id="3" name="Notes Placeholder 2"/>
+          <p:cNvSpPr>
+            <a:spLocks noGrp="1"/>
+          </p:cNvSpPr>
+          <p:nvPr>
+            <p:ph type="body" idx="1"/>
+          </p:nvPr>
+        </p:nvSpPr>
+        <p:spPr/>
+        <p:txBody>
+          <a:bodyPr/>
+          <a:lstStyle/>
+          <a:p>
+            <a:endParaRPr lang="de-CH" dirty="0"/>
+          </a:p>
+        </p:txBody>
+      </p:sp>
+      <p:sp>
+        <p:nvSpPr>
+          <p:cNvPr id="4" name="Slide Number Placeholder 3"/>
+          <p:cNvSpPr>
+            <a:spLocks noGrp="1"/>
+          </p:cNvSpPr>
+          <p:nvPr>
+            <p:ph type="sldNum" sz="quarter" idx="5"/>
+          </p:nvPr>
+        </p:nvSpPr>
+        <p:spPr/>
+        <p:txBody>
+          <a:bodyPr/>
+          <a:lstStyle/>
+          <a:p>
+            <a:fld id="{6F406B0D-CDB9-7342-BFE1-3BBA81393C61}" type="slidenum">
+              <a:rPr lang="de-CH" smtClean="0"/>
+              <a:t>19</a:t>
+            </a:fld>
+            <a:endParaRPr lang="de-CH"/>
+          </a:p>
+        </p:txBody>
+      </p:sp>
+    </p:spTree>
+    <p:extLst>
+      <p:ext uri="{BB962C8B-B14F-4D97-AF65-F5344CB8AC3E}">
+        <p14:creationId xmlns:p14="http://schemas.microsoft.com/office/powerpoint/2010/main" val="1415251043"/>
+      </p:ext>
+    </p:extLst>
+  </p:cSld>
+  <p:clrMapOvr>
+    <a:masterClrMapping/>
+  </p:clrMapOvr>
+</p:notes>
+</file>
+
 <file path=ppt/slideLayouts/slideLayout1.xml><?xml version="1.0" encoding="utf-8"?>
 <p:sldLayout xmlns:a="http://schemas.openxmlformats.org/drawingml/2006/main" xmlns:r="http://schemas.openxmlformats.org/officeDocument/2006/relationships" xmlns:p="http://schemas.openxmlformats.org/presentationml/2006/main" type="title" preserve="1">
   <p:cSld name="Title Slide">
@@ -2344,7 +2429,7 @@
           <a:p>
             <a:fld id="{D01C3EBF-35A5-024B-8337-1FF7CA970669}" type="datetime4">
               <a:rPr lang="de-CH" smtClean="0"/>
-              <a:t>16. Juni 2026</a:t>
+              <a:t>17. Juni 2026</a:t>
             </a:fld>
             <a:endParaRPr lang="en-CH" dirty="0"/>
           </a:p>
@@ -2548,7 +2633,7 @@
           <a:p>
             <a:fld id="{FABC503F-E78F-6642-9C43-7F779DDA9637}" type="datetime4">
               <a:rPr lang="de-CH" smtClean="0"/>
-              <a:t>16. Juni 2026</a:t>
+              <a:t>17. Juni 2026</a:t>
             </a:fld>
             <a:endParaRPr lang="en-CH"/>
           </a:p>
@@ -2762,7 +2847,7 @@
           <a:p>
             <a:fld id="{84D58EFF-D565-754D-8E1D-581A9C2ED513}" type="datetime4">
               <a:rPr lang="de-CH" smtClean="0"/>
-              <a:t>16. Juni 2026</a:t>
+              <a:t>17. Juni 2026</a:t>
             </a:fld>
             <a:endParaRPr lang="en-CH"/>
           </a:p>
@@ -2966,7 +3051,7 @@
           <a:p>
             <a:fld id="{EE15D7BA-2F5F-8E43-91CB-647D382EDB87}" type="datetime4">
               <a:rPr lang="de-CH" smtClean="0"/>
-              <a:t>16. Juni 2026</a:t>
+              <a:t>17. Juni 2026</a:t>
             </a:fld>
             <a:endParaRPr lang="en-CH"/>
           </a:p>
@@ -3246,7 +3331,7 @@
           <a:p>
             <a:fld id="{0AA40E02-4391-BD46-B0E7-635382A657F3}" type="datetime4">
               <a:rPr lang="de-CH" smtClean="0"/>
-              <a:t>16. Juni 2026</a:t>
+              <a:t>17. Juni 2026</a:t>
             </a:fld>
             <a:endParaRPr lang="en-CH"/>
           </a:p>
@@ -3518,7 +3603,7 @@
           <a:p>
             <a:fld id="{CB6715BD-3BCD-B048-A677-0FC99A942057}" type="datetime4">
               <a:rPr lang="de-CH" smtClean="0"/>
-              <a:t>16. Juni 2026</a:t>
+              <a:t>17. Juni 2026</a:t>
             </a:fld>
             <a:endParaRPr lang="en-CH"/>
           </a:p>
@@ -3937,7 +4022,7 @@
           <a:p>
             <a:fld id="{5433D90D-DE43-734C-AE99-F68BD94FD95C}" type="datetime4">
               <a:rPr lang="de-CH" smtClean="0"/>
-              <a:t>16. Juni 2026</a:t>
+              <a:t>17. Juni 2026</a:t>
             </a:fld>
             <a:endParaRPr lang="en-CH"/>
           </a:p>
@@ -4083,7 +4168,7 @@
           <a:p>
             <a:fld id="{8847DC07-8BC2-F84E-8FB1-AB2E6893E256}" type="datetime4">
               <a:rPr lang="de-CH" smtClean="0"/>
-              <a:t>16. Juni 2026</a:t>
+              <a:t>17. Juni 2026</a:t>
             </a:fld>
             <a:endParaRPr lang="en-CH"/>
           </a:p>
@@ -4200,7 +4285,7 @@
           <a:p>
             <a:fld id="{14C5E3DE-4EE6-2348-ACB8-6E5F19BEC610}" type="datetime4">
               <a:rPr lang="de-CH" smtClean="0"/>
-              <a:t>16. Juni 2026</a:t>
+              <a:t>17. Juni 2026</a:t>
             </a:fld>
             <a:endParaRPr lang="en-CH"/>
           </a:p>
@@ -4517,7 +4602,7 @@
           <a:p>
             <a:fld id="{3069C634-6B84-4143-A0D4-F8B2524245DA}" type="datetime4">
               <a:rPr lang="de-CH" smtClean="0"/>
-              <a:t>16. Juni 2026</a:t>
+              <a:t>17. Juni 2026</a:t>
             </a:fld>
             <a:endParaRPr lang="en-CH"/>
           </a:p>
@@ -4810,7 +4895,7 @@
           <a:p>
             <a:fld id="{6A59641C-6DA2-E742-8275-6CFD523E67DF}" type="datetime4">
               <a:rPr lang="de-CH" smtClean="0"/>
-              <a:t>16. Juni 2026</a:t>
+              <a:t>17. Juni 2026</a:t>
             </a:fld>
             <a:endParaRPr lang="en-CH"/>
           </a:p>
@@ -5057,7 +5142,7 @@
           <a:p>
             <a:fld id="{91BF76C2-678E-C049-84B9-885C068ABCCC}" type="datetime4">
               <a:rPr lang="de-CH" smtClean="0"/>
-              <a:t>16. Juni 2026</a:t>
+              <a:t>17. Juni 2026</a:t>
             </a:fld>
             <a:endParaRPr lang="en-CH"/>
           </a:p>
@@ -5809,7 +5894,7 @@
           <a:p>
             <a:fld id="{EE15D7BA-2F5F-8E43-91CB-647D382EDB87}" type="datetime4">
               <a:rPr lang="de-CH" smtClean="0"/>
-              <a:t>16. Juni 2026</a:t>
+              <a:t>17. Juni 2026</a:t>
             </a:fld>
             <a:endParaRPr lang="en-CH"/>
           </a:p>
@@ -6163,7 +6248,7 @@
           <a:p>
             <a:fld id="{EE15D7BA-2F5F-8E43-91CB-647D382EDB87}" type="datetime4">
               <a:rPr lang="de-CH" smtClean="0"/>
-              <a:t>16. Juni 2026</a:t>
+              <a:t>17. Juni 2026</a:t>
             </a:fld>
             <a:endParaRPr lang="en-CH"/>
           </a:p>
@@ -6500,7 +6585,7 @@
           <a:p>
             <a:fld id="{EE15D7BA-2F5F-8E43-91CB-647D382EDB87}" type="datetime4">
               <a:rPr lang="de-CH" smtClean="0"/>
-              <a:t>16. Juni 2026</a:t>
+              <a:t>17. Juni 2026</a:t>
             </a:fld>
             <a:endParaRPr lang="en-CH"/>
           </a:p>
@@ -6866,7 +6951,7 @@
           <a:p>
             <a:fld id="{EE15D7BA-2F5F-8E43-91CB-647D382EDB87}" type="datetime4">
               <a:rPr lang="de-CH" smtClean="0"/>
-              <a:t>16. Juni 2026</a:t>
+              <a:t>17. Juni 2026</a:t>
             </a:fld>
             <a:endParaRPr lang="en-CH"/>
           </a:p>
@@ -7218,7 +7303,7 @@
           <a:p>
             <a:fld id="{EE15D7BA-2F5F-8E43-91CB-647D382EDB87}" type="datetime4">
               <a:rPr lang="de-CH" smtClean="0"/>
-              <a:t>16. Juni 2026</a:t>
+              <a:t>17. Juni 2026</a:t>
             </a:fld>
             <a:endParaRPr lang="en-CH"/>
           </a:p>
@@ -7529,7 +7614,7 @@
           <a:p>
             <a:fld id="{EE15D7BA-2F5F-8E43-91CB-647D382EDB87}" type="datetime4">
               <a:rPr lang="de-CH" smtClean="0"/>
-              <a:t>16. Juni 2026</a:t>
+              <a:t>17. Juni 2026</a:t>
             </a:fld>
             <a:endParaRPr lang="en-CH"/>
           </a:p>
@@ -7831,7 +7916,7 @@
           <a:p>
             <a:fld id="{EE15D7BA-2F5F-8E43-91CB-647D382EDB87}" type="datetime4">
               <a:rPr lang="de-CH" smtClean="0"/>
-              <a:t>16. Juni 2026</a:t>
+              <a:t>17. Juni 2026</a:t>
             </a:fld>
             <a:endParaRPr lang="en-CH"/>
           </a:p>
@@ -7989,456 +8074,6 @@
 </file>
 
 <file path=ppt/slides/slide17.xml><?xml version="1.0" encoding="utf-8"?>
-<p:sld xmlns:a="http://schemas.openxmlformats.org/drawingml/2006/main" xmlns:r="http://schemas.openxmlformats.org/officeDocument/2006/relationships" xmlns:p="http://schemas.openxmlformats.org/presentationml/2006/main" show="0">
-  <p:cSld>
-    <p:spTree>
-      <p:nvGrpSpPr>
-        <p:cNvPr id="1" name=""/>
-        <p:cNvGrpSpPr/>
-        <p:nvPr/>
-      </p:nvGrpSpPr>
-      <p:grpSpPr>
-        <a:xfrm>
-          <a:off x="0" y="0"/>
-          <a:ext cx="0" cy="0"/>
-          <a:chOff x="0" y="0"/>
-          <a:chExt cx="0" cy="0"/>
-        </a:xfrm>
-      </p:grpSpPr>
-      <p:sp>
-        <p:nvSpPr>
-          <p:cNvPr id="2" name="Title 1">
-            <a:extLst>
-              <a:ext uri="{FF2B5EF4-FFF2-40B4-BE49-F238E27FC236}">
-                <a16:creationId xmlns:a16="http://schemas.microsoft.com/office/drawing/2014/main" id="{39C00302-ED21-2393-6CCB-7349AE9122E0}"/>
-              </a:ext>
-            </a:extLst>
-          </p:cNvPr>
-          <p:cNvSpPr>
-            <a:spLocks noGrp="1"/>
-          </p:cNvSpPr>
-          <p:nvPr>
-            <p:ph type="title"/>
-          </p:nvPr>
-        </p:nvSpPr>
-        <p:spPr/>
-        <p:txBody>
-          <a:bodyPr>
-            <a:normAutofit/>
-          </a:bodyPr>
-          <a:lstStyle/>
-          <a:p>
-            <a:r>
-              <a:rPr lang="en-CH" dirty="0"/>
-              <a:t>Wortfrequenz bad Predictions</a:t>
-            </a:r>
-            <a:endParaRPr lang="de-CH" dirty="0"/>
-          </a:p>
-        </p:txBody>
-      </p:sp>
-      <p:sp>
-        <p:nvSpPr>
-          <p:cNvPr id="3" name="Content Placeholder 2">
-            <a:extLst>
-              <a:ext uri="{FF2B5EF4-FFF2-40B4-BE49-F238E27FC236}">
-                <a16:creationId xmlns:a16="http://schemas.microsoft.com/office/drawing/2014/main" id="{CA84C977-5AEC-A87D-1D24-43BF540DD948}"/>
-              </a:ext>
-            </a:extLst>
-          </p:cNvPr>
-          <p:cNvSpPr>
-            <a:spLocks noGrp="1"/>
-          </p:cNvSpPr>
-          <p:nvPr>
-            <p:ph idx="1"/>
-          </p:nvPr>
-        </p:nvSpPr>
-        <p:spPr/>
-        <p:txBody>
-          <a:bodyPr>
-            <a:normAutofit fontScale="62500" lnSpcReduction="20000"/>
-          </a:bodyPr>
-          <a:lstStyle/>
-          <a:p>
-            <a:r>
-              <a:rPr lang="de-CH" dirty="0" err="1"/>
-              <a:t>CountVectorizer</a:t>
-            </a:r>
-            <a:r>
-              <a:rPr lang="de-CH" dirty="0"/>
-              <a:t> (Bag-</a:t>
-            </a:r>
-            <a:r>
-              <a:rPr lang="de-CH" dirty="0" err="1"/>
-              <a:t>of</a:t>
-            </a:r>
-            <a:r>
-              <a:rPr lang="de-CH" dirty="0"/>
-              <a:t>-Words), </a:t>
-            </a:r>
-            <a:r>
-              <a:rPr lang="de-CH" dirty="0" err="1"/>
-              <a:t>Stopwords</a:t>
-            </a:r>
-            <a:r>
-              <a:rPr lang="de-CH" dirty="0"/>
-              <a:t>, Top 50 Wörter</a:t>
-            </a:r>
-          </a:p>
-          <a:p>
-            <a:pPr marL="0" indent="0">
-              <a:buNone/>
-            </a:pPr>
-            <a:r>
-              <a:rPr lang="de-CH" dirty="0" err="1"/>
-              <a:t>word</a:t>
-            </a:r>
-            <a:r>
-              <a:rPr lang="de-CH" dirty="0"/>
-              <a:t>  </a:t>
-            </a:r>
-            <a:r>
-              <a:rPr lang="de-CH" dirty="0" err="1"/>
-              <a:t>freq</a:t>
-            </a:r>
-            <a:endParaRPr lang="de-CH" dirty="0"/>
-          </a:p>
-          <a:p>
-            <a:pPr marL="0" indent="0">
-              <a:buNone/>
-            </a:pPr>
-            <a:r>
-              <a:rPr lang="de-CH" dirty="0" err="1"/>
-              <a:t>disc</a:t>
-            </a:r>
-            <a:r>
-              <a:rPr lang="de-CH" dirty="0"/>
-              <a:t>    84</a:t>
-            </a:r>
-          </a:p>
-          <a:p>
-            <a:pPr marL="0" indent="0">
-              <a:buNone/>
-            </a:pPr>
-            <a:r>
-              <a:rPr lang="de-CH" dirty="0" err="1"/>
-              <a:t>great</a:t>
-            </a:r>
-            <a:r>
-              <a:rPr lang="de-CH" dirty="0"/>
-              <a:t>    41</a:t>
-            </a:r>
-          </a:p>
-          <a:p>
-            <a:pPr marL="0" indent="0">
-              <a:buNone/>
-            </a:pPr>
-            <a:r>
-              <a:rPr lang="de-CH" dirty="0" err="1"/>
-              <a:t>good</a:t>
-            </a:r>
-            <a:r>
-              <a:rPr lang="de-CH" dirty="0"/>
-              <a:t>    37</a:t>
-            </a:r>
-          </a:p>
-          <a:p>
-            <a:pPr marL="0" indent="0">
-              <a:buNone/>
-            </a:pPr>
-            <a:r>
-              <a:rPr lang="de-CH" dirty="0" err="1"/>
-              <a:t>love</a:t>
-            </a:r>
-            <a:r>
-              <a:rPr lang="de-CH" dirty="0"/>
-              <a:t>    31</a:t>
-            </a:r>
-          </a:p>
-          <a:p>
-            <a:pPr marL="0" indent="0">
-              <a:buNone/>
-            </a:pPr>
-            <a:r>
-              <a:rPr lang="de-CH" dirty="0" err="1"/>
-              <a:t>format</a:t>
-            </a:r>
-            <a:r>
-              <a:rPr lang="de-CH" dirty="0"/>
-              <a:t>    26</a:t>
-            </a:r>
-          </a:p>
-          <a:p>
-            <a:pPr marL="0" indent="0">
-              <a:buNone/>
-            </a:pPr>
-            <a:r>
-              <a:rPr lang="de-CH" dirty="0" err="1"/>
-              <a:t>manual</a:t>
-            </a:r>
-            <a:r>
-              <a:rPr lang="de-CH" dirty="0"/>
-              <a:t>    23</a:t>
-            </a:r>
-          </a:p>
-          <a:p>
-            <a:pPr marL="0" indent="0">
-              <a:buNone/>
-            </a:pPr>
-            <a:r>
-              <a:rPr lang="de-CH" dirty="0" err="1"/>
-              <a:t>book</a:t>
-            </a:r>
-            <a:r>
-              <a:rPr lang="de-CH" dirty="0"/>
-              <a:t>    20</a:t>
-            </a:r>
-          </a:p>
-          <a:p>
-            <a:pPr marL="0" indent="0">
-              <a:buNone/>
-            </a:pPr>
-            <a:r>
-              <a:rPr lang="de-CH" dirty="0"/>
-              <a:t>cd    19</a:t>
-            </a:r>
-          </a:p>
-          <a:p>
-            <a:pPr marL="0" indent="0">
-              <a:buNone/>
-            </a:pPr>
-            <a:r>
-              <a:rPr lang="de-CH" dirty="0" err="1"/>
-              <a:t>read</a:t>
-            </a:r>
-            <a:r>
-              <a:rPr lang="de-CH" dirty="0"/>
-              <a:t>    19</a:t>
-            </a:r>
-          </a:p>
-          <a:p>
-            <a:pPr marL="0" indent="0">
-              <a:buNone/>
-            </a:pPr>
-            <a:r>
-              <a:rPr lang="de-CH" dirty="0"/>
-              <a:t>easy    18</a:t>
-            </a:r>
-          </a:p>
-          <a:p>
-            <a:pPr marL="0" indent="0">
-              <a:buNone/>
-            </a:pPr>
-            <a:r>
-              <a:rPr lang="de-CH" dirty="0" err="1"/>
-              <a:t>dog</a:t>
-            </a:r>
-            <a:r>
-              <a:rPr lang="de-CH" dirty="0"/>
-              <a:t>    16</a:t>
-            </a:r>
-          </a:p>
-        </p:txBody>
-      </p:sp>
-      <p:sp>
-        <p:nvSpPr>
-          <p:cNvPr id="4" name="Date Placeholder 3">
-            <a:extLst>
-              <a:ext uri="{FF2B5EF4-FFF2-40B4-BE49-F238E27FC236}">
-                <a16:creationId xmlns:a16="http://schemas.microsoft.com/office/drawing/2014/main" id="{228D2D2A-E1E7-AF08-3F74-3EAA6F4BC62C}"/>
-              </a:ext>
-            </a:extLst>
-          </p:cNvPr>
-          <p:cNvSpPr>
-            <a:spLocks noGrp="1"/>
-          </p:cNvSpPr>
-          <p:nvPr>
-            <p:ph type="dt" sz="half" idx="10"/>
-          </p:nvPr>
-        </p:nvSpPr>
-        <p:spPr/>
-        <p:txBody>
-          <a:bodyPr/>
-          <a:lstStyle/>
-          <a:p>
-            <a:fld id="{EE15D7BA-2F5F-8E43-91CB-647D382EDB87}" type="datetime4">
-              <a:rPr lang="de-CH" smtClean="0"/>
-              <a:t>16. Juni 2026</a:t>
-            </a:fld>
-            <a:endParaRPr lang="en-CH"/>
-          </a:p>
-        </p:txBody>
-      </p:sp>
-      <p:sp>
-        <p:nvSpPr>
-          <p:cNvPr id="5" name="Footer Placeholder 4">
-            <a:extLst>
-              <a:ext uri="{FF2B5EF4-FFF2-40B4-BE49-F238E27FC236}">
-                <a16:creationId xmlns:a16="http://schemas.microsoft.com/office/drawing/2014/main" id="{DE1DF519-D397-9206-3978-667B2E85EE27}"/>
-              </a:ext>
-            </a:extLst>
-          </p:cNvPr>
-          <p:cNvSpPr>
-            <a:spLocks noGrp="1"/>
-          </p:cNvSpPr>
-          <p:nvPr>
-            <p:ph type="ftr" sz="quarter" idx="11"/>
-          </p:nvPr>
-        </p:nvSpPr>
-        <p:spPr/>
-        <p:txBody>
-          <a:bodyPr/>
-          <a:lstStyle/>
-          <a:p>
-            <a:r>
-              <a:rPr lang="en-GB"/>
-              <a:t>Text Analysis- Svetlana Khominich, Ralph Müller, David Beer </a:t>
-            </a:r>
-            <a:endParaRPr lang="en-CH" dirty="0"/>
-          </a:p>
-        </p:txBody>
-      </p:sp>
-      <p:sp>
-        <p:nvSpPr>
-          <p:cNvPr id="6" name="Slide Number Placeholder 5">
-            <a:extLst>
-              <a:ext uri="{FF2B5EF4-FFF2-40B4-BE49-F238E27FC236}">
-                <a16:creationId xmlns:a16="http://schemas.microsoft.com/office/drawing/2014/main" id="{693A3DE6-BC6E-1016-C513-1D4CCA0D707D}"/>
-              </a:ext>
-            </a:extLst>
-          </p:cNvPr>
-          <p:cNvSpPr>
-            <a:spLocks noGrp="1"/>
-          </p:cNvSpPr>
-          <p:nvPr>
-            <p:ph type="sldNum" sz="quarter" idx="12"/>
-          </p:nvPr>
-        </p:nvSpPr>
-        <p:spPr/>
-        <p:txBody>
-          <a:bodyPr/>
-          <a:lstStyle/>
-          <a:p>
-            <a:fld id="{221FD296-2B0C-4A4B-AFAC-2E3A842869F0}" type="slidenum">
-              <a:rPr lang="en-CH" smtClean="0"/>
-              <a:t>17</a:t>
-            </a:fld>
-            <a:endParaRPr lang="en-CH"/>
-          </a:p>
-        </p:txBody>
-      </p:sp>
-      <p:sp>
-        <p:nvSpPr>
-          <p:cNvPr id="7" name="Rounded Rectangular Callout 6">
-            <a:extLst>
-              <a:ext uri="{FF2B5EF4-FFF2-40B4-BE49-F238E27FC236}">
-                <a16:creationId xmlns:a16="http://schemas.microsoft.com/office/drawing/2014/main" id="{12B5939C-00FB-2DB7-7C8A-BDC713898811}"/>
-              </a:ext>
-            </a:extLst>
-          </p:cNvPr>
-          <p:cNvSpPr/>
-          <p:nvPr/>
-        </p:nvSpPr>
-        <p:spPr>
-          <a:xfrm>
-            <a:off x="4855724" y="3245764"/>
-            <a:ext cx="2683212" cy="684212"/>
-          </a:xfrm>
-          <a:prstGeom prst="wedgeRoundRectCallout">
-            <a:avLst>
-              <a:gd name="adj1" fmla="val -63468"/>
-              <a:gd name="adj2" fmla="val 5765"/>
-              <a:gd name="adj3" fmla="val 16667"/>
-            </a:avLst>
-          </a:prstGeom>
-          <a:solidFill>
-            <a:schemeClr val="accent4">
-              <a:lumMod val="20000"/>
-              <a:lumOff val="80000"/>
-            </a:schemeClr>
-          </a:solidFill>
-        </p:spPr>
-        <p:style>
-          <a:lnRef idx="2">
-            <a:schemeClr val="accent1">
-              <a:shade val="15000"/>
-            </a:schemeClr>
-          </a:lnRef>
-          <a:fillRef idx="1">
-            <a:schemeClr val="accent1"/>
-          </a:fillRef>
-          <a:effectRef idx="0">
-            <a:schemeClr val="accent1"/>
-          </a:effectRef>
-          <a:fontRef idx="minor">
-            <a:schemeClr val="lt1"/>
-          </a:fontRef>
-        </p:style>
-        <p:txBody>
-          <a:bodyPr rtlCol="0" anchor="ctr"/>
-          <a:lstStyle/>
-          <a:p>
-            <a:r>
-              <a:rPr lang="de-CH" dirty="0">
-                <a:solidFill>
-                  <a:schemeClr val="tx1"/>
-                </a:solidFill>
-              </a:rPr>
-              <a:t>Great, </a:t>
-            </a:r>
-            <a:r>
-              <a:rPr lang="de-CH" dirty="0" err="1">
-                <a:solidFill>
-                  <a:schemeClr val="tx1"/>
-                </a:solidFill>
-              </a:rPr>
-              <a:t>good</a:t>
-            </a:r>
-            <a:r>
-              <a:rPr lang="de-CH" dirty="0">
-                <a:solidFill>
-                  <a:schemeClr val="tx1"/>
-                </a:solidFill>
-              </a:rPr>
-              <a:t>, </a:t>
-            </a:r>
-            <a:r>
-              <a:rPr lang="de-CH" dirty="0" err="1">
-                <a:solidFill>
-                  <a:schemeClr val="tx1"/>
-                </a:solidFill>
-              </a:rPr>
-              <a:t>love</a:t>
-            </a:r>
-            <a:r>
-              <a:rPr lang="de-CH" dirty="0">
-                <a:solidFill>
-                  <a:schemeClr val="tx1"/>
-                </a:solidFill>
-              </a:rPr>
-              <a:t> 👎🏻</a:t>
-            </a:r>
-            <a:endParaRPr lang="en-CH" dirty="0">
-              <a:solidFill>
-                <a:schemeClr val="tx1"/>
-              </a:solidFill>
-            </a:endParaRPr>
-          </a:p>
-        </p:txBody>
-      </p:sp>
-    </p:spTree>
-    <p:extLst>
-      <p:ext uri="{BB962C8B-B14F-4D97-AF65-F5344CB8AC3E}">
-        <p14:creationId xmlns:p14="http://schemas.microsoft.com/office/powerpoint/2010/main" val="3890322213"/>
-      </p:ext>
-    </p:extLst>
-  </p:cSld>
-  <p:clrMapOvr>
-    <a:masterClrMapping/>
-  </p:clrMapOvr>
-</p:sld>
-</file>
-
-<file path=ppt/slides/slide18.xml><?xml version="1.0" encoding="utf-8"?>
 <p:sld xmlns:a="http://schemas.openxmlformats.org/drawingml/2006/main" xmlns:r="http://schemas.openxmlformats.org/officeDocument/2006/relationships" xmlns:p="http://schemas.openxmlformats.org/presentationml/2006/main">
   <p:cSld>
     <p:spTree>
@@ -8588,7 +8223,7 @@
           <a:p>
             <a:fld id="{EE15D7BA-2F5F-8E43-91CB-647D382EDB87}" type="datetime4">
               <a:rPr lang="de-CH" smtClean="0"/>
-              <a:t>16. Juni 2026</a:t>
+              <a:t>17. Juni 2026</a:t>
             </a:fld>
             <a:endParaRPr lang="en-CH"/>
           </a:p>
@@ -8646,7 +8281,7 @@
           <a:p>
             <a:fld id="{221FD296-2B0C-4A4B-AFAC-2E3A842869F0}" type="slidenum">
               <a:rPr lang="en-CH" smtClean="0"/>
-              <a:t>18</a:t>
+              <a:t>17</a:t>
             </a:fld>
             <a:endParaRPr lang="en-CH"/>
           </a:p>
@@ -8695,7 +8330,7 @@
 </p:sld>
 </file>
 
-<file path=ppt/slides/slide19.xml><?xml version="1.0" encoding="utf-8"?>
+<file path=ppt/slides/slide18.xml><?xml version="1.0" encoding="utf-8"?>
 <p:sld xmlns:a="http://schemas.openxmlformats.org/drawingml/2006/main" xmlns:r="http://schemas.openxmlformats.org/officeDocument/2006/relationships" xmlns:p="http://schemas.openxmlformats.org/presentationml/2006/main">
   <p:cSld>
     <p:spTree>
@@ -8802,7 +8437,7 @@
           <a:p>
             <a:fld id="{E66B3B6E-7E09-0142-B960-3BF02BFEB55D}" type="datetime4">
               <a:rPr lang="de-CH" smtClean="0"/>
-              <a:t>16. Juni 2026</a:t>
+              <a:t>17. Juni 2026</a:t>
             </a:fld>
             <a:endParaRPr lang="en-CH"/>
           </a:p>
@@ -8870,7 +8505,7 @@
           <a:p>
             <a:fld id="{221FD296-2B0C-4A4B-AFAC-2E3A842869F0}" type="slidenum">
               <a:rPr lang="en-CH" smtClean="0"/>
-              <a:t>19</a:t>
+              <a:t>18</a:t>
             </a:fld>
             <a:endParaRPr lang="en-CH"/>
           </a:p>
@@ -8997,6 +8632,774 @@
 </p:sld>
 </file>
 
+<file path=ppt/slides/slide19.xml><?xml version="1.0" encoding="utf-8"?>
+<p:sld xmlns:a="http://schemas.openxmlformats.org/drawingml/2006/main" xmlns:r="http://schemas.openxmlformats.org/officeDocument/2006/relationships" xmlns:p="http://schemas.openxmlformats.org/presentationml/2006/main">
+  <p:cSld>
+    <p:spTree>
+      <p:nvGrpSpPr>
+        <p:cNvPr id="1" name=""/>
+        <p:cNvGrpSpPr/>
+        <p:nvPr/>
+      </p:nvGrpSpPr>
+      <p:grpSpPr>
+        <a:xfrm>
+          <a:off x="0" y="0"/>
+          <a:ext cx="0" cy="0"/>
+          <a:chOff x="0" y="0"/>
+          <a:chExt cx="0" cy="0"/>
+        </a:xfrm>
+      </p:grpSpPr>
+      <p:sp>
+        <p:nvSpPr>
+          <p:cNvPr id="2" name="Title 1">
+            <a:extLst>
+              <a:ext uri="{FF2B5EF4-FFF2-40B4-BE49-F238E27FC236}">
+                <a16:creationId xmlns:a16="http://schemas.microsoft.com/office/drawing/2014/main" id="{DCD26D70-64F2-2CBB-9408-A1AAE4BD4C63}"/>
+              </a:ext>
+            </a:extLst>
+          </p:cNvPr>
+          <p:cNvSpPr>
+            <a:spLocks noGrp="1"/>
+          </p:cNvSpPr>
+          <p:nvPr>
+            <p:ph type="title"/>
+          </p:nvPr>
+        </p:nvSpPr>
+        <p:spPr/>
+        <p:txBody>
+          <a:bodyPr/>
+          <a:lstStyle/>
+          <a:p>
+            <a:r>
+              <a:rPr lang="de-CH" dirty="0"/>
+              <a:t>Fake </a:t>
+            </a:r>
+            <a:r>
+              <a:rPr lang="de-CH" dirty="0" err="1"/>
+              <a:t>Escaped</a:t>
+            </a:r>
+            <a:endParaRPr lang="de-CH" dirty="0"/>
+          </a:p>
+        </p:txBody>
+      </p:sp>
+      <p:sp>
+        <p:nvSpPr>
+          <p:cNvPr id="3" name="Content Placeholder 2">
+            <a:extLst>
+              <a:ext uri="{FF2B5EF4-FFF2-40B4-BE49-F238E27FC236}">
+                <a16:creationId xmlns:a16="http://schemas.microsoft.com/office/drawing/2014/main" id="{8424FE7E-4A83-61AF-CB5B-91FD6EAFBABD}"/>
+              </a:ext>
+            </a:extLst>
+          </p:cNvPr>
+          <p:cNvSpPr>
+            <a:spLocks noGrp="1"/>
+          </p:cNvSpPr>
+          <p:nvPr>
+            <p:ph idx="1"/>
+          </p:nvPr>
+        </p:nvSpPr>
+        <p:spPr/>
+        <p:txBody>
+          <a:bodyPr>
+            <a:normAutofit/>
+          </a:bodyPr>
+          <a:lstStyle/>
+          <a:p>
+            <a:pPr marL="0" indent="0">
+              <a:buNone/>
+            </a:pPr>
+            <a:r>
+              <a:rPr lang="de-CH" dirty="0"/>
+              <a:t> </a:t>
+            </a:r>
+          </a:p>
+          <a:p>
+            <a:pPr marL="0" indent="0">
+              <a:buNone/>
+            </a:pPr>
+            <a:endParaRPr lang="de-CH" dirty="0"/>
+          </a:p>
+          <a:p>
+            <a:pPr marL="0" indent="0">
+              <a:buNone/>
+            </a:pPr>
+            <a:endParaRPr lang="de-CH" dirty="0"/>
+          </a:p>
+          <a:p>
+            <a:pPr marL="0" indent="0">
+              <a:buNone/>
+            </a:pPr>
+            <a:endParaRPr lang="de-CH" dirty="0"/>
+          </a:p>
+          <a:p>
+            <a:pPr marL="0" indent="0">
+              <a:buNone/>
+            </a:pPr>
+            <a:endParaRPr lang="de-CH" dirty="0"/>
+          </a:p>
+          <a:p>
+            <a:pPr marL="0" indent="0">
+              <a:buNone/>
+            </a:pPr>
+            <a:endParaRPr lang="de-CH" dirty="0"/>
+          </a:p>
+          <a:p>
+            <a:pPr marL="0" indent="0">
+              <a:buNone/>
+            </a:pPr>
+            <a:endParaRPr lang="de-CH" dirty="0"/>
+          </a:p>
+          <a:p>
+            <a:pPr marL="0" indent="0">
+              <a:buNone/>
+            </a:pPr>
+            <a:r>
+              <a:rPr lang="de-CH" sz="2000" dirty="0"/>
+              <a:t>* </a:t>
+            </a:r>
+            <a:r>
+              <a:rPr lang="en-CH" sz="2000" dirty="0"/>
+              <a:t>Anzahl verschiedener Wörter / Gesamtanzahl Wörter</a:t>
+            </a:r>
+            <a:endParaRPr lang="de-CH" sz="2000" dirty="0"/>
+          </a:p>
+        </p:txBody>
+      </p:sp>
+      <p:sp>
+        <p:nvSpPr>
+          <p:cNvPr id="4" name="Date Placeholder 3">
+            <a:extLst>
+              <a:ext uri="{FF2B5EF4-FFF2-40B4-BE49-F238E27FC236}">
+                <a16:creationId xmlns:a16="http://schemas.microsoft.com/office/drawing/2014/main" id="{9981C101-F90E-6C42-DA68-44ED9406D4B9}"/>
+              </a:ext>
+            </a:extLst>
+          </p:cNvPr>
+          <p:cNvSpPr>
+            <a:spLocks noGrp="1"/>
+          </p:cNvSpPr>
+          <p:nvPr>
+            <p:ph type="dt" sz="half" idx="10"/>
+          </p:nvPr>
+        </p:nvSpPr>
+        <p:spPr/>
+        <p:txBody>
+          <a:bodyPr/>
+          <a:lstStyle/>
+          <a:p>
+            <a:fld id="{EE15D7BA-2F5F-8E43-91CB-647D382EDB87}" type="datetime4">
+              <a:rPr lang="de-CH" smtClean="0"/>
+              <a:t>17. Juni 2026</a:t>
+            </a:fld>
+            <a:endParaRPr lang="en-CH"/>
+          </a:p>
+        </p:txBody>
+      </p:sp>
+      <p:sp>
+        <p:nvSpPr>
+          <p:cNvPr id="5" name="Footer Placeholder 4">
+            <a:extLst>
+              <a:ext uri="{FF2B5EF4-FFF2-40B4-BE49-F238E27FC236}">
+                <a16:creationId xmlns:a16="http://schemas.microsoft.com/office/drawing/2014/main" id="{5CD9BB55-3D3E-FA78-89D1-7705DCE86423}"/>
+              </a:ext>
+            </a:extLst>
+          </p:cNvPr>
+          <p:cNvSpPr>
+            <a:spLocks noGrp="1"/>
+          </p:cNvSpPr>
+          <p:nvPr>
+            <p:ph type="ftr" sz="quarter" idx="11"/>
+          </p:nvPr>
+        </p:nvSpPr>
+        <p:spPr/>
+        <p:txBody>
+          <a:bodyPr/>
+          <a:lstStyle/>
+          <a:p>
+            <a:r>
+              <a:rPr lang="en-GB"/>
+              <a:t>Text Analysis- Svetlana Khominich, Ralph Müller, David Beer </a:t>
+            </a:r>
+            <a:endParaRPr lang="en-CH" dirty="0"/>
+          </a:p>
+        </p:txBody>
+      </p:sp>
+      <p:sp>
+        <p:nvSpPr>
+          <p:cNvPr id="6" name="Slide Number Placeholder 5">
+            <a:extLst>
+              <a:ext uri="{FF2B5EF4-FFF2-40B4-BE49-F238E27FC236}">
+                <a16:creationId xmlns:a16="http://schemas.microsoft.com/office/drawing/2014/main" id="{FE816C2A-4B52-16DD-7677-CBE8D692A995}"/>
+              </a:ext>
+            </a:extLst>
+          </p:cNvPr>
+          <p:cNvSpPr>
+            <a:spLocks noGrp="1"/>
+          </p:cNvSpPr>
+          <p:nvPr>
+            <p:ph type="sldNum" sz="quarter" idx="12"/>
+          </p:nvPr>
+        </p:nvSpPr>
+        <p:spPr/>
+        <p:txBody>
+          <a:bodyPr/>
+          <a:lstStyle/>
+          <a:p>
+            <a:fld id="{221FD296-2B0C-4A4B-AFAC-2E3A842869F0}" type="slidenum">
+              <a:rPr lang="en-CH" smtClean="0"/>
+              <a:t>19</a:t>
+            </a:fld>
+            <a:endParaRPr lang="en-CH"/>
+          </a:p>
+        </p:txBody>
+      </p:sp>
+      <p:graphicFrame>
+        <p:nvGraphicFramePr>
+          <p:cNvPr id="7" name="Table 6">
+            <a:extLst>
+              <a:ext uri="{FF2B5EF4-FFF2-40B4-BE49-F238E27FC236}">
+                <a16:creationId xmlns:a16="http://schemas.microsoft.com/office/drawing/2014/main" id="{884C2DC1-4D95-EB37-1200-A277C34763AD}"/>
+              </a:ext>
+            </a:extLst>
+          </p:cNvPr>
+          <p:cNvGraphicFramePr>
+            <a:graphicFrameLocks noGrp="1"/>
+          </p:cNvGraphicFramePr>
+          <p:nvPr>
+            <p:extLst>
+              <p:ext uri="{D42A27DB-BD31-4B8C-83A1-F6EECF244321}">
+                <p14:modId xmlns:p14="http://schemas.microsoft.com/office/powerpoint/2010/main" val="3524473918"/>
+              </p:ext>
+            </p:extLst>
+          </p:nvPr>
+        </p:nvGraphicFramePr>
+        <p:xfrm>
+          <a:off x="838200" y="1825625"/>
+          <a:ext cx="10396331" cy="3027680"/>
+        </p:xfrm>
+        <a:graphic>
+          <a:graphicData uri="http://schemas.openxmlformats.org/drawingml/2006/table">
+            <a:tbl>
+              <a:tblPr firstRow="1" bandRow="1">
+                <a:tableStyleId>{5C22544A-7EE6-4342-B048-85BDC9FD1C3A}</a:tableStyleId>
+              </a:tblPr>
+              <a:tblGrid>
+                <a:gridCol w="2219108">
+                  <a:extLst>
+                    <a:ext uri="{9D8B030D-6E8A-4147-A177-3AD203B41FA5}">
+                      <a16:colId xmlns:a16="http://schemas.microsoft.com/office/drawing/2014/main" val="3486785280"/>
+                    </a:ext>
+                  </a:extLst>
+                </a:gridCol>
+                <a:gridCol w="853178">
+                  <a:extLst>
+                    <a:ext uri="{9D8B030D-6E8A-4147-A177-3AD203B41FA5}">
+                      <a16:colId xmlns:a16="http://schemas.microsoft.com/office/drawing/2014/main" val="376518378"/>
+                    </a:ext>
+                  </a:extLst>
+                </a:gridCol>
+                <a:gridCol w="1868797">
+                  <a:extLst>
+                    <a:ext uri="{9D8B030D-6E8A-4147-A177-3AD203B41FA5}">
+                      <a16:colId xmlns:a16="http://schemas.microsoft.com/office/drawing/2014/main" val="469667482"/>
+                    </a:ext>
+                  </a:extLst>
+                </a:gridCol>
+                <a:gridCol w="1645248">
+                  <a:extLst>
+                    <a:ext uri="{9D8B030D-6E8A-4147-A177-3AD203B41FA5}">
+                      <a16:colId xmlns:a16="http://schemas.microsoft.com/office/drawing/2014/main" val="789048287"/>
+                    </a:ext>
+                  </a:extLst>
+                </a:gridCol>
+                <a:gridCol w="3810000">
+                  <a:extLst>
+                    <a:ext uri="{9D8B030D-6E8A-4147-A177-3AD203B41FA5}">
+                      <a16:colId xmlns:a16="http://schemas.microsoft.com/office/drawing/2014/main" val="3020578800"/>
+                    </a:ext>
+                  </a:extLst>
+                </a:gridCol>
+              </a:tblGrid>
+              <a:tr h="347449">
+                <a:tc>
+                  <a:txBody>
+                    <a:bodyPr/>
+                    <a:lstStyle/>
+                    <a:p>
+                      <a:endParaRPr lang="de-CH"/>
+                    </a:p>
+                  </a:txBody>
+                  <a:tcPr/>
+                </a:tc>
+                <a:tc>
+                  <a:txBody>
+                    <a:bodyPr/>
+                    <a:lstStyle/>
+                    <a:p>
+                      <a:r>
+                        <a:rPr lang="de-CH" dirty="0"/>
+                        <a:t>Echt</a:t>
+                      </a:r>
+                    </a:p>
+                  </a:txBody>
+                  <a:tcPr/>
+                </a:tc>
+                <a:tc>
+                  <a:txBody>
+                    <a:bodyPr/>
+                    <a:lstStyle/>
+                    <a:p>
+                      <a:r>
+                        <a:rPr lang="de-CH" dirty="0"/>
+                        <a:t>Fake erkannt</a:t>
+                      </a:r>
+                    </a:p>
+                  </a:txBody>
+                  <a:tcPr/>
+                </a:tc>
+                <a:tc>
+                  <a:txBody>
+                    <a:bodyPr/>
+                    <a:lstStyle/>
+                    <a:p>
+                      <a:r>
+                        <a:rPr lang="de-CH" dirty="0"/>
+                        <a:t>Fake </a:t>
+                      </a:r>
+                      <a:r>
+                        <a:rPr lang="de-CH" dirty="0" err="1"/>
+                        <a:t>escaped</a:t>
+                      </a:r>
+                      <a:endParaRPr lang="de-CH" dirty="0"/>
+                    </a:p>
+                  </a:txBody>
+                  <a:tcPr/>
+                </a:tc>
+                <a:tc>
+                  <a:txBody>
+                    <a:bodyPr/>
+                    <a:lstStyle/>
+                    <a:p>
+                      <a:r>
+                        <a:rPr lang="de-CH" dirty="0"/>
+                        <a:t>Deutung</a:t>
+                      </a:r>
+                    </a:p>
+                  </a:txBody>
+                  <a:tcPr/>
+                </a:tc>
+                <a:extLst>
+                  <a:ext uri="{0D108BD9-81ED-4DB2-BD59-A6C34878D82A}">
+                    <a16:rowId xmlns:a16="http://schemas.microsoft.com/office/drawing/2014/main" val="1797291819"/>
+                  </a:ext>
+                </a:extLst>
+              </a:tr>
+              <a:tr h="370840">
+                <a:tc>
+                  <a:txBody>
+                    <a:bodyPr/>
+                    <a:lstStyle/>
+                    <a:p>
+                      <a:r>
+                        <a:rPr lang="de-CH" dirty="0" err="1"/>
+                        <a:t>word_len</a:t>
+                      </a:r>
+                      <a:endParaRPr lang="de-CH" dirty="0"/>
+                    </a:p>
+                  </a:txBody>
+                  <a:tcPr/>
+                </a:tc>
+                <a:tc>
+                  <a:txBody>
+                    <a:bodyPr/>
+                    <a:lstStyle/>
+                    <a:p>
+                      <a:r>
+                        <a:rPr lang="de-CH" dirty="0"/>
+                        <a:t>74.4</a:t>
+                      </a:r>
+                    </a:p>
+                  </a:txBody>
+                  <a:tcPr/>
+                </a:tc>
+                <a:tc>
+                  <a:txBody>
+                    <a:bodyPr/>
+                    <a:lstStyle/>
+                    <a:p>
+                      <a:r>
+                        <a:rPr lang="de-CH" dirty="0"/>
+                        <a:t>65.5</a:t>
+                      </a:r>
+                    </a:p>
+                  </a:txBody>
+                  <a:tcPr/>
+                </a:tc>
+                <a:tc>
+                  <a:txBody>
+                    <a:bodyPr/>
+                    <a:lstStyle/>
+                    <a:p>
+                      <a:r>
+                        <a:rPr lang="de-CH" dirty="0"/>
+                        <a:t>32.6</a:t>
+                      </a:r>
+                    </a:p>
+                  </a:txBody>
+                  <a:tcPr/>
+                </a:tc>
+                <a:tc>
+                  <a:txBody>
+                    <a:bodyPr/>
+                    <a:lstStyle/>
+                    <a:p>
+                      <a:r>
+                        <a:rPr lang="de-CH" dirty="0" err="1"/>
+                        <a:t>escaped</a:t>
+                      </a:r>
+                      <a:r>
+                        <a:rPr lang="de-CH" dirty="0"/>
+                        <a:t> halb so lang wie </a:t>
+                      </a:r>
+                      <a:r>
+                        <a:rPr lang="de-CH" dirty="0" err="1"/>
+                        <a:t>catched</a:t>
+                      </a:r>
+                      <a:endParaRPr lang="de-CH" dirty="0"/>
+                    </a:p>
+                  </a:txBody>
+                  <a:tcPr/>
+                </a:tc>
+                <a:extLst>
+                  <a:ext uri="{0D108BD9-81ED-4DB2-BD59-A6C34878D82A}">
+                    <a16:rowId xmlns:a16="http://schemas.microsoft.com/office/drawing/2014/main" val="4232467644"/>
+                  </a:ext>
+                </a:extLst>
+              </a:tr>
+              <a:tr h="370840">
+                <a:tc>
+                  <a:txBody>
+                    <a:bodyPr/>
+                    <a:lstStyle/>
+                    <a:p>
+                      <a:r>
+                        <a:rPr lang="de-CH" dirty="0" err="1"/>
+                        <a:t>sentence_count</a:t>
+                      </a:r>
+                      <a:endParaRPr lang="de-CH" dirty="0"/>
+                    </a:p>
+                  </a:txBody>
+                  <a:tcPr/>
+                </a:tc>
+                <a:tc>
+                  <a:txBody>
+                    <a:bodyPr/>
+                    <a:lstStyle/>
+                    <a:p>
+                      <a:r>
+                        <a:rPr lang="de-CH" dirty="0"/>
+                        <a:t>5.2</a:t>
+                      </a:r>
+                    </a:p>
+                  </a:txBody>
+                  <a:tcPr/>
+                </a:tc>
+                <a:tc>
+                  <a:txBody>
+                    <a:bodyPr/>
+                    <a:lstStyle/>
+                    <a:p>
+                      <a:r>
+                        <a:rPr lang="de-CH" dirty="0"/>
+                        <a:t>6.3</a:t>
+                      </a:r>
+                    </a:p>
+                  </a:txBody>
+                  <a:tcPr/>
+                </a:tc>
+                <a:tc>
+                  <a:txBody>
+                    <a:bodyPr/>
+                    <a:lstStyle/>
+                    <a:p>
+                      <a:r>
+                        <a:rPr lang="de-CH" dirty="0"/>
+                        <a:t>2.9</a:t>
+                      </a:r>
+                    </a:p>
+                  </a:txBody>
+                  <a:tcPr/>
+                </a:tc>
+                <a:tc>
+                  <a:txBody>
+                    <a:bodyPr/>
+                    <a:lstStyle/>
+                    <a:p>
+                      <a:r>
+                        <a:rPr lang="de-CH" dirty="0"/>
+                        <a:t>dito</a:t>
+                      </a:r>
+                    </a:p>
+                  </a:txBody>
+                  <a:tcPr/>
+                </a:tc>
+                <a:extLst>
+                  <a:ext uri="{0D108BD9-81ED-4DB2-BD59-A6C34878D82A}">
+                    <a16:rowId xmlns:a16="http://schemas.microsoft.com/office/drawing/2014/main" val="3263087040"/>
+                  </a:ext>
+                </a:extLst>
+              </a:tr>
+              <a:tr h="370840">
+                <a:tc>
+                  <a:txBody>
+                    <a:bodyPr/>
+                    <a:lstStyle/>
+                    <a:p>
+                      <a:r>
+                        <a:rPr lang="de-CH" dirty="0"/>
+                        <a:t>Typ </a:t>
+                      </a:r>
+                      <a:r>
+                        <a:rPr lang="de-CH" dirty="0" err="1"/>
+                        <a:t>token</a:t>
+                      </a:r>
+                      <a:r>
+                        <a:rPr lang="de-CH" dirty="0"/>
+                        <a:t> </a:t>
+                      </a:r>
+                      <a:r>
+                        <a:rPr lang="de-CH" dirty="0" err="1"/>
+                        <a:t>ratio</a:t>
+                      </a:r>
+                      <a:r>
+                        <a:rPr lang="de-CH" dirty="0"/>
+                        <a:t>*</a:t>
+                      </a:r>
+                    </a:p>
+                  </a:txBody>
+                  <a:tcPr/>
+                </a:tc>
+                <a:tc>
+                  <a:txBody>
+                    <a:bodyPr/>
+                    <a:lstStyle/>
+                    <a:p>
+                      <a:r>
+                        <a:rPr lang="de-CH" dirty="0"/>
+                        <a:t>0.8</a:t>
+                      </a:r>
+                    </a:p>
+                  </a:txBody>
+                  <a:tcPr/>
+                </a:tc>
+                <a:tc>
+                  <a:txBody>
+                    <a:bodyPr/>
+                    <a:lstStyle/>
+                    <a:p>
+                      <a:r>
+                        <a:rPr lang="de-CH" dirty="0"/>
+                        <a:t>0.71</a:t>
+                      </a:r>
+                    </a:p>
+                  </a:txBody>
+                  <a:tcPr/>
+                </a:tc>
+                <a:tc>
+                  <a:txBody>
+                    <a:bodyPr/>
+                    <a:lstStyle/>
+                    <a:p>
+                      <a:r>
+                        <a:rPr lang="de-CH" dirty="0"/>
+                        <a:t>0.82</a:t>
+                      </a:r>
+                    </a:p>
+                  </a:txBody>
+                  <a:tcPr/>
+                </a:tc>
+                <a:tc>
+                  <a:txBody>
+                    <a:bodyPr/>
+                    <a:lstStyle/>
+                    <a:p>
+                      <a:r>
+                        <a:rPr lang="de-CH" dirty="0"/>
+                        <a:t>Fakes haben eine höhere lexikarische Diversität als erkannte</a:t>
+                      </a:r>
+                    </a:p>
+                  </a:txBody>
+                  <a:tcPr/>
+                </a:tc>
+                <a:extLst>
+                  <a:ext uri="{0D108BD9-81ED-4DB2-BD59-A6C34878D82A}">
+                    <a16:rowId xmlns:a16="http://schemas.microsoft.com/office/drawing/2014/main" val="1549450583"/>
+                  </a:ext>
+                </a:extLst>
+              </a:tr>
+              <a:tr h="370840">
+                <a:tc>
+                  <a:txBody>
+                    <a:bodyPr/>
+                    <a:lstStyle/>
+                    <a:p>
+                      <a:r>
+                        <a:rPr lang="de-CH" dirty="0" err="1"/>
+                        <a:t>entity_count</a:t>
+                      </a:r>
+                      <a:endParaRPr lang="de-CH" dirty="0"/>
+                    </a:p>
+                  </a:txBody>
+                  <a:tcPr/>
+                </a:tc>
+                <a:tc>
+                  <a:txBody>
+                    <a:bodyPr/>
+                    <a:lstStyle/>
+                    <a:p>
+                      <a:r>
+                        <a:rPr lang="de-CH" dirty="0"/>
+                        <a:t>2.8</a:t>
+                      </a:r>
+                    </a:p>
+                  </a:txBody>
+                  <a:tcPr/>
+                </a:tc>
+                <a:tc>
+                  <a:txBody>
+                    <a:bodyPr/>
+                    <a:lstStyle/>
+                    <a:p>
+                      <a:r>
+                        <a:rPr lang="de-CH" dirty="0"/>
+                        <a:t>1.38</a:t>
+                      </a:r>
+                    </a:p>
+                  </a:txBody>
+                  <a:tcPr/>
+                </a:tc>
+                <a:tc>
+                  <a:txBody>
+                    <a:bodyPr/>
+                    <a:lstStyle/>
+                    <a:p>
+                      <a:r>
+                        <a:rPr lang="de-CH" dirty="0"/>
+                        <a:t>1.05</a:t>
+                      </a:r>
+                    </a:p>
+                  </a:txBody>
+                  <a:tcPr/>
+                </a:tc>
+                <a:tc>
+                  <a:txBody>
+                    <a:bodyPr/>
+                    <a:lstStyle/>
+                    <a:p>
+                      <a:r>
+                        <a:rPr lang="en-CH" dirty="0"/>
+                        <a:t>weniger konkrete Namen, Orte, Produktreferenzen als echte Reviews</a:t>
+                      </a:r>
+                      <a:endParaRPr lang="de-CH" dirty="0"/>
+                    </a:p>
+                  </a:txBody>
+                  <a:tcPr/>
+                </a:tc>
+                <a:extLst>
+                  <a:ext uri="{0D108BD9-81ED-4DB2-BD59-A6C34878D82A}">
+                    <a16:rowId xmlns:a16="http://schemas.microsoft.com/office/drawing/2014/main" val="522161846"/>
+                  </a:ext>
+                </a:extLst>
+              </a:tr>
+              <a:tr h="370840">
+                <a:tc>
+                  <a:txBody>
+                    <a:bodyPr/>
+                    <a:lstStyle/>
+                    <a:p>
+                      <a:r>
+                        <a:rPr lang="de-CH" dirty="0" err="1"/>
+                        <a:t>adj_noun_ratio</a:t>
+                      </a:r>
+                      <a:endParaRPr lang="de-CH" dirty="0"/>
+                    </a:p>
+                  </a:txBody>
+                  <a:tcPr/>
+                </a:tc>
+                <a:tc>
+                  <a:txBody>
+                    <a:bodyPr/>
+                    <a:lstStyle/>
+                    <a:p>
+                      <a:r>
+                        <a:rPr lang="de-CH" dirty="0"/>
+                        <a:t>0.61</a:t>
+                      </a:r>
+                    </a:p>
+                  </a:txBody>
+                  <a:tcPr/>
+                </a:tc>
+                <a:tc>
+                  <a:txBody>
+                    <a:bodyPr/>
+                    <a:lstStyle/>
+                    <a:p>
+                      <a:r>
+                        <a:rPr lang="de-CH" dirty="0"/>
+                        <a:t>0.73</a:t>
+                      </a:r>
+                    </a:p>
+                  </a:txBody>
+                  <a:tcPr/>
+                </a:tc>
+                <a:tc>
+                  <a:txBody>
+                    <a:bodyPr/>
+                    <a:lstStyle/>
+                    <a:p>
+                      <a:r>
+                        <a:rPr lang="de-CH" dirty="0"/>
+                        <a:t>0.75</a:t>
+                      </a:r>
+                    </a:p>
+                  </a:txBody>
+                  <a:tcPr/>
+                </a:tc>
+                <a:tc>
+                  <a:txBody>
+                    <a:bodyPr/>
+                    <a:lstStyle/>
+                    <a:p>
+                      <a:r>
+                        <a:rPr lang="de-CH" dirty="0"/>
+                        <a:t>Fakes haben mehr Adjektive relativ zu Nomen</a:t>
+                      </a:r>
+                    </a:p>
+                  </a:txBody>
+                  <a:tcPr/>
+                </a:tc>
+                <a:extLst>
+                  <a:ext uri="{0D108BD9-81ED-4DB2-BD59-A6C34878D82A}">
+                    <a16:rowId xmlns:a16="http://schemas.microsoft.com/office/drawing/2014/main" val="600163928"/>
+                  </a:ext>
+                </a:extLst>
+              </a:tr>
+            </a:tbl>
+          </a:graphicData>
+        </a:graphic>
+      </p:graphicFrame>
+    </p:spTree>
+    <p:extLst>
+      <p:ext uri="{BB962C8B-B14F-4D97-AF65-F5344CB8AC3E}">
+        <p14:creationId xmlns:p14="http://schemas.microsoft.com/office/powerpoint/2010/main" val="1895220825"/>
+      </p:ext>
+    </p:extLst>
+  </p:cSld>
+  <p:clrMapOvr>
+    <a:masterClrMapping/>
+  </p:clrMapOvr>
+</p:sld>
+</file>
+
 <file path=ppt/slides/slide2.xml><?xml version="1.0" encoding="utf-8"?>
 <p:sld xmlns:a="http://schemas.openxmlformats.org/drawingml/2006/main" xmlns:r="http://schemas.openxmlformats.org/officeDocument/2006/relationships" xmlns:p="http://schemas.openxmlformats.org/presentationml/2006/main">
   <p:cSld>
@@ -9228,7 +9631,7 @@
           <a:p>
             <a:fld id="{161001B4-7ECE-4C45-821A-DC5AE6F4A031}" type="datetime4">
               <a:rPr lang="de-CH" smtClean="0"/>
-              <a:t>16. Juni 2026</a:t>
+              <a:t>17. Juni 2026</a:t>
             </a:fld>
             <a:endParaRPr lang="en-CH"/>
           </a:p>
@@ -9248,6 +9651,203 @@
 </file>
 
 <file path=ppt/slides/slide20.xml><?xml version="1.0" encoding="utf-8"?>
+<p:sld xmlns:a="http://schemas.openxmlformats.org/drawingml/2006/main" xmlns:r="http://schemas.openxmlformats.org/officeDocument/2006/relationships" xmlns:p="http://schemas.openxmlformats.org/presentationml/2006/main">
+  <p:cSld>
+    <p:spTree>
+      <p:nvGrpSpPr>
+        <p:cNvPr id="1" name=""/>
+        <p:cNvGrpSpPr/>
+        <p:nvPr/>
+      </p:nvGrpSpPr>
+      <p:grpSpPr>
+        <a:xfrm>
+          <a:off x="0" y="0"/>
+          <a:ext cx="0" cy="0"/>
+          <a:chOff x="0" y="0"/>
+          <a:chExt cx="0" cy="0"/>
+        </a:xfrm>
+      </p:grpSpPr>
+      <p:sp>
+        <p:nvSpPr>
+          <p:cNvPr id="2" name="Title 1">
+            <a:extLst>
+              <a:ext uri="{FF2B5EF4-FFF2-40B4-BE49-F238E27FC236}">
+                <a16:creationId xmlns:a16="http://schemas.microsoft.com/office/drawing/2014/main" id="{EEE5A39A-B9C7-52B8-0C76-B73B31FF22E8}"/>
+              </a:ext>
+            </a:extLst>
+          </p:cNvPr>
+          <p:cNvSpPr>
+            <a:spLocks noGrp="1"/>
+          </p:cNvSpPr>
+          <p:nvPr>
+            <p:ph type="title"/>
+          </p:nvPr>
+        </p:nvSpPr>
+        <p:spPr/>
+        <p:txBody>
+          <a:bodyPr/>
+          <a:lstStyle/>
+          <a:p>
+            <a:r>
+              <a:rPr lang="de-CH" dirty="0"/>
+              <a:t>Fakes </a:t>
+            </a:r>
+            <a:r>
+              <a:rPr lang="de-CH" dirty="0" err="1"/>
+              <a:t>escaped</a:t>
+            </a:r>
+            <a:endParaRPr lang="de-CH" dirty="0"/>
+          </a:p>
+        </p:txBody>
+      </p:sp>
+      <p:sp>
+        <p:nvSpPr>
+          <p:cNvPr id="3" name="Content Placeholder 2">
+            <a:extLst>
+              <a:ext uri="{FF2B5EF4-FFF2-40B4-BE49-F238E27FC236}">
+                <a16:creationId xmlns:a16="http://schemas.microsoft.com/office/drawing/2014/main" id="{4E95F708-D335-EA27-E186-CD37D377AC96}"/>
+              </a:ext>
+            </a:extLst>
+          </p:cNvPr>
+          <p:cNvSpPr>
+            <a:spLocks noGrp="1"/>
+          </p:cNvSpPr>
+          <p:nvPr>
+            <p:ph idx="1"/>
+          </p:nvPr>
+        </p:nvSpPr>
+        <p:spPr/>
+        <p:txBody>
+          <a:bodyPr/>
+          <a:lstStyle/>
+          <a:p>
+            <a:r>
+              <a:rPr lang="en-CH" dirty="0"/>
+              <a:t>Die entkommenen Fakes sind kurz, strukturlos und inhaltsleer aber sprachlich nicht arm. Sie klingen wie ein echter Mensch, der wenig sagt. </a:t>
+            </a:r>
+            <a:r>
+              <a:rPr lang="en-CH" dirty="0">
+                <a:sym typeface="Wingdings" pitchFamily="2" charset="2"/>
+              </a:rPr>
+              <a:t></a:t>
+            </a:r>
+            <a:r>
+              <a:rPr lang="en-CH" dirty="0"/>
+              <a:t> das macht sie schwer erkennbar: sie imitieren echte kurze Reviews.</a:t>
+            </a:r>
+          </a:p>
+          <a:p>
+            <a:r>
+              <a:rPr lang="en-CH" dirty="0"/>
+              <a:t>Ein weiteres Modell könnte gezielt bei Reviews unter 40 Wörtern mit wenig Entities ansetzen. Dort liegt der blinde Fleck.</a:t>
+            </a:r>
+          </a:p>
+          <a:p>
+            <a:endParaRPr lang="de-CH" dirty="0"/>
+          </a:p>
+        </p:txBody>
+      </p:sp>
+      <p:sp>
+        <p:nvSpPr>
+          <p:cNvPr id="4" name="Date Placeholder 3">
+            <a:extLst>
+              <a:ext uri="{FF2B5EF4-FFF2-40B4-BE49-F238E27FC236}">
+                <a16:creationId xmlns:a16="http://schemas.microsoft.com/office/drawing/2014/main" id="{9E4A52CD-DE9E-7F21-8A52-E94B178769A1}"/>
+              </a:ext>
+            </a:extLst>
+          </p:cNvPr>
+          <p:cNvSpPr>
+            <a:spLocks noGrp="1"/>
+          </p:cNvSpPr>
+          <p:nvPr>
+            <p:ph type="dt" sz="half" idx="10"/>
+          </p:nvPr>
+        </p:nvSpPr>
+        <p:spPr/>
+        <p:txBody>
+          <a:bodyPr/>
+          <a:lstStyle/>
+          <a:p>
+            <a:fld id="{EE15D7BA-2F5F-8E43-91CB-647D382EDB87}" type="datetime4">
+              <a:rPr lang="de-CH" smtClean="0"/>
+              <a:t>17. Juni 2026</a:t>
+            </a:fld>
+            <a:endParaRPr lang="en-CH"/>
+          </a:p>
+        </p:txBody>
+      </p:sp>
+      <p:sp>
+        <p:nvSpPr>
+          <p:cNvPr id="5" name="Footer Placeholder 4">
+            <a:extLst>
+              <a:ext uri="{FF2B5EF4-FFF2-40B4-BE49-F238E27FC236}">
+                <a16:creationId xmlns:a16="http://schemas.microsoft.com/office/drawing/2014/main" id="{403BF818-976F-B6E2-9262-D66B94DA7A44}"/>
+              </a:ext>
+            </a:extLst>
+          </p:cNvPr>
+          <p:cNvSpPr>
+            <a:spLocks noGrp="1"/>
+          </p:cNvSpPr>
+          <p:nvPr>
+            <p:ph type="ftr" sz="quarter" idx="11"/>
+          </p:nvPr>
+        </p:nvSpPr>
+        <p:spPr/>
+        <p:txBody>
+          <a:bodyPr/>
+          <a:lstStyle/>
+          <a:p>
+            <a:r>
+              <a:rPr lang="en-GB"/>
+              <a:t>Text Analysis- Svetlana Khominich, Ralph Müller, David Beer </a:t>
+            </a:r>
+            <a:endParaRPr lang="en-CH" dirty="0"/>
+          </a:p>
+        </p:txBody>
+      </p:sp>
+      <p:sp>
+        <p:nvSpPr>
+          <p:cNvPr id="6" name="Slide Number Placeholder 5">
+            <a:extLst>
+              <a:ext uri="{FF2B5EF4-FFF2-40B4-BE49-F238E27FC236}">
+                <a16:creationId xmlns:a16="http://schemas.microsoft.com/office/drawing/2014/main" id="{C29A5BC2-8A89-A19B-F2B9-3B13B38F7B84}"/>
+              </a:ext>
+            </a:extLst>
+          </p:cNvPr>
+          <p:cNvSpPr>
+            <a:spLocks noGrp="1"/>
+          </p:cNvSpPr>
+          <p:nvPr>
+            <p:ph type="sldNum" sz="quarter" idx="12"/>
+          </p:nvPr>
+        </p:nvSpPr>
+        <p:spPr/>
+        <p:txBody>
+          <a:bodyPr/>
+          <a:lstStyle/>
+          <a:p>
+            <a:fld id="{221FD296-2B0C-4A4B-AFAC-2E3A842869F0}" type="slidenum">
+              <a:rPr lang="en-CH" smtClean="0"/>
+              <a:t>20</a:t>
+            </a:fld>
+            <a:endParaRPr lang="en-CH"/>
+          </a:p>
+        </p:txBody>
+      </p:sp>
+    </p:spTree>
+    <p:extLst>
+      <p:ext uri="{BB962C8B-B14F-4D97-AF65-F5344CB8AC3E}">
+        <p14:creationId xmlns:p14="http://schemas.microsoft.com/office/powerpoint/2010/main" val="1261313343"/>
+      </p:ext>
+    </p:extLst>
+  </p:cSld>
+  <p:clrMapOvr>
+    <a:masterClrMapping/>
+  </p:clrMapOvr>
+</p:sld>
+</file>
+
+<file path=ppt/slides/slide21.xml><?xml version="1.0" encoding="utf-8"?>
 <p:sld xmlns:a="http://schemas.openxmlformats.org/drawingml/2006/main" xmlns:r="http://schemas.openxmlformats.org/officeDocument/2006/relationships" xmlns:p="http://schemas.openxmlformats.org/presentationml/2006/main">
   <p:cSld>
     <p:spTree>
@@ -9462,7 +10062,7 @@
           <a:p>
             <a:fld id="{221FD296-2B0C-4A4B-AFAC-2E3A842869F0}" type="slidenum">
               <a:rPr lang="en-CH" smtClean="0"/>
-              <a:t>20</a:t>
+              <a:t>21</a:t>
             </a:fld>
             <a:endParaRPr lang="en-CH"/>
           </a:p>
@@ -9496,7 +10096,7 @@
           <a:p>
             <a:fld id="{DD2E1766-9633-E747-BBED-E122B4E61F73}" type="datetime4">
               <a:rPr lang="de-CH" smtClean="0"/>
-              <a:t>16. Juni 2026</a:t>
+              <a:t>17. Juni 2026</a:t>
             </a:fld>
             <a:endParaRPr lang="en-CH"/>
           </a:p>
@@ -9786,7 +10386,7 @@
           <a:p>
             <a:fld id="{5B6B9814-5720-3C42-99A0-04A4812F75FC}" type="datetime4">
               <a:rPr lang="de-CH" smtClean="0"/>
-              <a:t>16. Juni 2026</a:t>
+              <a:t>17. Juni 2026</a:t>
             </a:fld>
             <a:endParaRPr lang="en-CH"/>
           </a:p>
@@ -9884,7 +10484,7 @@
           <a:p>
             <a:fld id="{EE15D7BA-2F5F-8E43-91CB-647D382EDB87}" type="datetime4">
               <a:rPr lang="de-CH" smtClean="0"/>
-              <a:t>16. Juni 2026</a:t>
+              <a:t>17. Juni 2026</a:t>
             </a:fld>
             <a:endParaRPr lang="en-CH"/>
           </a:p>
@@ -10086,7 +10686,7 @@
           <a:p>
             <a:fld id="{EE15D7BA-2F5F-8E43-91CB-647D382EDB87}" type="datetime4">
               <a:rPr lang="de-CH" smtClean="0"/>
-              <a:t>16. Juni 2026</a:t>
+              <a:t>17. Juni 2026</a:t>
             </a:fld>
             <a:endParaRPr lang="en-CH"/>
           </a:p>
@@ -10327,7 +10927,7 @@
           <a:p>
             <a:fld id="{EE15D7BA-2F5F-8E43-91CB-647D382EDB87}" type="datetime4">
               <a:rPr lang="de-CH" smtClean="0"/>
-              <a:t>16. Juni 2026</a:t>
+              <a:t>17. Juni 2026</a:t>
             </a:fld>
             <a:endParaRPr lang="en-CH"/>
           </a:p>
@@ -10538,7 +11138,7 @@
           <a:p>
             <a:fld id="{EE15D7BA-2F5F-8E43-91CB-647D382EDB87}" type="datetime4">
               <a:rPr lang="de-CH" smtClean="0"/>
-              <a:t>16. Juni 2026</a:t>
+              <a:t>17. Juni 2026</a:t>
             </a:fld>
             <a:endParaRPr lang="en-CH"/>
           </a:p>
@@ -10859,7 +11459,7 @@
           <a:p>
             <a:fld id="{EE15D7BA-2F5F-8E43-91CB-647D382EDB87}" type="datetime4">
               <a:rPr lang="de-CH" smtClean="0"/>
-              <a:t>16. Juni 2026</a:t>
+              <a:t>17. Juni 2026</a:t>
             </a:fld>
             <a:endParaRPr lang="en-CH"/>
           </a:p>
@@ -11714,7 +12314,7 @@
           <a:p>
             <a:fld id="{EE15D7BA-2F5F-8E43-91CB-647D382EDB87}" type="datetime4">
               <a:rPr lang="de-CH" smtClean="0"/>
-              <a:t>16. Juni 2026</a:t>
+              <a:t>17. Juni 2026</a:t>
             </a:fld>
             <a:endParaRPr lang="en-CH"/>
           </a:p>

--- a/presentation/ln_text_analysis.pptx
+++ b/presentation/ln_text_analysis.pptx
@@ -2857,7 +2857,7 @@
           </a:ln>
           <a:extLst>
             <a:ext uri="{C572A759-6A51-4108-AA02-DFA0A04FC94B}">
-              <ma14:wrappingTextBoxFlag xmlns="" xmlns:m="http://schemas.openxmlformats.org/officeDocument/2006/math" xmlns:a14="http://schemas.microsoft.com/office/drawing/2010/main" xmlns:ma14="http://schemas.microsoft.com/office/mac/drawingml/2011/main" val="1"/>
+              <ma14:wrappingTextBoxFlag xmlns:ma14="http://schemas.microsoft.com/office/mac/drawingml/2011/main" xmlns:a14="http://schemas.microsoft.com/office/drawing/2010/main" xmlns:m="http://schemas.openxmlformats.org/officeDocument/2006/math" xmlns="" val="1"/>
             </a:ext>
           </a:extLst>
         </p:spPr>
@@ -2896,7 +2896,7 @@
           </a:ln>
           <a:extLst>
             <a:ext uri="{C572A759-6A51-4108-AA02-DFA0A04FC94B}">
-              <ma14:wrappingTextBoxFlag xmlns="" xmlns:m="http://schemas.openxmlformats.org/officeDocument/2006/math" xmlns:a14="http://schemas.microsoft.com/office/drawing/2010/main" xmlns:ma14="http://schemas.microsoft.com/office/mac/drawingml/2011/main" val="1"/>
+              <ma14:wrappingTextBoxFlag xmlns:ma14="http://schemas.microsoft.com/office/mac/drawingml/2011/main" xmlns:a14="http://schemas.microsoft.com/office/drawing/2010/main" xmlns:m="http://schemas.openxmlformats.org/officeDocument/2006/math" xmlns="" val="1"/>
             </a:ext>
           </a:extLst>
         </p:spPr>
@@ -3914,7 +3914,7 @@
           </a:ln>
           <a:extLst>
             <a:ext uri="{C572A759-6A51-4108-AA02-DFA0A04FC94B}">
-              <ma14:wrappingTextBoxFlag xmlns="" xmlns:m="http://schemas.openxmlformats.org/officeDocument/2006/math" xmlns:a14="http://schemas.microsoft.com/office/drawing/2010/main" xmlns:ma14="http://schemas.microsoft.com/office/mac/drawingml/2011/main" val="1"/>
+              <ma14:wrappingTextBoxFlag xmlns:ma14="http://schemas.microsoft.com/office/mac/drawingml/2011/main" xmlns:a14="http://schemas.microsoft.com/office/drawing/2010/main" xmlns:m="http://schemas.openxmlformats.org/officeDocument/2006/math" xmlns="" val="1"/>
             </a:ext>
           </a:extLst>
         </p:spPr>
@@ -4210,7 +4210,7 @@
           </a:ln>
           <a:extLst>
             <a:ext uri="{C572A759-6A51-4108-AA02-DFA0A04FC94B}">
-              <ma14:wrappingTextBoxFlag xmlns="" xmlns:m="http://schemas.openxmlformats.org/officeDocument/2006/math" xmlns:a14="http://schemas.microsoft.com/office/drawing/2010/main" xmlns:ma14="http://schemas.microsoft.com/office/mac/drawingml/2011/main" val="1"/>
+              <ma14:wrappingTextBoxFlag xmlns:ma14="http://schemas.microsoft.com/office/mac/drawingml/2011/main" xmlns:a14="http://schemas.microsoft.com/office/drawing/2010/main" xmlns:m="http://schemas.openxmlformats.org/officeDocument/2006/math" xmlns="" val="1"/>
             </a:ext>
           </a:extLst>
         </p:spPr>
@@ -4254,7 +4254,7 @@
           </a:prstGeom>
           <a:extLst>
             <a:ext uri="{C572A759-6A51-4108-AA02-DFA0A04FC94B}">
-              <ma14:wrappingTextBoxFlag xmlns="" xmlns:m="http://schemas.openxmlformats.org/officeDocument/2006/math" xmlns:a14="http://schemas.microsoft.com/office/drawing/2010/main" xmlns:ma14="http://schemas.microsoft.com/office/mac/drawingml/2011/main" val="1"/>
+              <ma14:wrappingTextBoxFlag xmlns:ma14="http://schemas.microsoft.com/office/mac/drawingml/2011/main" xmlns:a14="http://schemas.microsoft.com/office/drawing/2010/main" xmlns:m="http://schemas.openxmlformats.org/officeDocument/2006/math" xmlns="" val="1"/>
             </a:ext>
           </a:extLst>
         </p:spPr>
@@ -4270,168 +4270,132 @@
           </a:p>
         </p:txBody>
       </p:sp>
-      <p:grpSp>
-        <p:nvGrpSpPr>
-          <p:cNvPr id="394" name="Rounded Rectangular Callout 6"/>
-          <p:cNvGrpSpPr/>
-          <p:nvPr/>
-        </p:nvGrpSpPr>
-        <p:grpSpPr>
-          <a:xfrm>
-            <a:off x="6707090" y="4553942"/>
-            <a:ext cx="4481340" cy="1326138"/>
-            <a:chOff x="0" y="0"/>
-            <a:chExt cx="4481338" cy="1326136"/>
-          </a:xfrm>
-        </p:grpSpPr>
-        <p:sp>
-          <p:nvSpPr>
-            <p:cNvPr id="392" name="Shape"/>
-            <p:cNvSpPr/>
-            <p:nvPr/>
-          </p:nvSpPr>
-          <p:spPr>
-            <a:xfrm>
-              <a:off x="0" y="0"/>
-              <a:ext cx="4481339" cy="1326138"/>
-            </a:xfrm>
-            <a:custGeom>
-              <a:avLst/>
-              <a:gdLst/>
-              <a:ahLst/>
-              <a:cxnLst>
-                <a:cxn ang="0">
-                  <a:pos x="wd2" y="hd2"/>
-                </a:cxn>
-                <a:cxn ang="5400000">
-                  <a:pos x="wd2" y="hd2"/>
-                </a:cxn>
-                <a:cxn ang="10800000">
-                  <a:pos x="wd2" y="hd2"/>
-                </a:cxn>
-                <a:cxn ang="16200000">
-                  <a:pos x="wd2" y="hd2"/>
-                </a:cxn>
-              </a:cxnLst>
-              <a:rect l="0" t="0" r="r" b="b"/>
-              <a:pathLst>
-                <a:path w="21600" h="21600" extrusionOk="0">
-                  <a:moveTo>
-                    <a:pt x="2564" y="3600"/>
-                  </a:moveTo>
-                  <a:cubicBezTo>
-                    <a:pt x="2564" y="1612"/>
-                    <a:pt x="3041" y="0"/>
-                    <a:pt x="3629" y="0"/>
-                  </a:cubicBezTo>
-                  <a:lnTo>
-                    <a:pt x="5736" y="0"/>
-                  </a:lnTo>
-                  <a:lnTo>
-                    <a:pt x="20535" y="0"/>
-                  </a:lnTo>
-                  <a:cubicBezTo>
-                    <a:pt x="21123" y="0"/>
-                    <a:pt x="21600" y="1612"/>
-                    <a:pt x="21600" y="3600"/>
-                  </a:cubicBezTo>
-                  <a:lnTo>
-                    <a:pt x="21600" y="18000"/>
-                  </a:lnTo>
-                  <a:cubicBezTo>
-                    <a:pt x="21600" y="19988"/>
-                    <a:pt x="21123" y="21600"/>
-                    <a:pt x="20535" y="21600"/>
-                  </a:cubicBezTo>
-                  <a:lnTo>
-                    <a:pt x="3629" y="21600"/>
-                  </a:lnTo>
-                  <a:cubicBezTo>
-                    <a:pt x="3041" y="21600"/>
-                    <a:pt x="2564" y="19988"/>
-                    <a:pt x="2564" y="18000"/>
-                  </a:cubicBezTo>
-                  <a:lnTo>
-                    <a:pt x="2564" y="18000"/>
-                  </a:lnTo>
-                  <a:lnTo>
-                    <a:pt x="0" y="12045"/>
-                  </a:lnTo>
-                  <a:lnTo>
-                    <a:pt x="2564" y="12600"/>
-                  </a:lnTo>
-                  <a:close/>
-                </a:path>
-              </a:pathLst>
-            </a:custGeom>
-            <a:solidFill>
-              <a:srgbClr val="FFF2CC"/>
-            </a:solidFill>
-            <a:ln w="12700" cap="flat">
-              <a:solidFill>
-                <a:srgbClr val="1D3053"/>
-              </a:solidFill>
-              <a:prstDash val="solid"/>
-              <a:miter lim="800000"/>
-            </a:ln>
-            <a:effectLst/>
-          </p:spPr>
-          <p:txBody>
-            <a:bodyPr wrap="square" lIns="45719" tIns="45719" rIns="45719" bIns="45719" numCol="1" anchor="ctr">
-              <a:noAutofit/>
-            </a:bodyPr>
-            <a:lstStyle/>
-            <a:p>
-              <a:pPr>
-                <a:defRPr>
-                  <a:solidFill>
-                    <a:srgbClr val="FFFFFF"/>
-                  </a:solidFill>
-                </a:defRPr>
-              </a:pPr>
-              <a:endParaRPr/>
-            </a:p>
-          </p:txBody>
-        </p:sp>
-        <p:sp>
-          <p:nvSpPr>
-            <p:cNvPr id="393" name="Texte die schwieriger sind haben weniger Named Entities"/>
-            <p:cNvSpPr txBox="1"/>
-            <p:nvPr/>
-          </p:nvSpPr>
-          <p:spPr>
-            <a:xfrm>
-              <a:off x="648715" y="350474"/>
-              <a:ext cx="3715817" cy="625189"/>
-            </a:xfrm>
-            <a:prstGeom prst="rect">
-              <a:avLst/>
-            </a:prstGeom>
-            <a:noFill/>
-            <a:ln w="12700" cap="flat">
-              <a:noFill/>
-              <a:miter lim="400000"/>
-            </a:ln>
-            <a:effectLst/>
+      <p:sp>
+        <p:nvSpPr>
+          <p:cNvPr id="2" name="Rounded Rectangular Callout 1">
             <a:extLst>
-              <a:ext uri="{C572A759-6A51-4108-AA02-DFA0A04FC94B}">
-                <ma14:wrappingTextBoxFlag xmlns="" xmlns:m="http://schemas.openxmlformats.org/officeDocument/2006/math" xmlns:a14="http://schemas.microsoft.com/office/drawing/2010/main" xmlns:ma14="http://schemas.microsoft.com/office/mac/drawingml/2011/main" val="1"/>
+              <a:ext uri="{FF2B5EF4-FFF2-40B4-BE49-F238E27FC236}">
+                <a16:creationId xmlns:a16="http://schemas.microsoft.com/office/drawing/2014/main" id="{C44D66BE-DBA1-D0F4-222A-66D13A15739A}"/>
               </a:ext>
             </a:extLst>
-          </p:spPr>
-          <p:txBody>
-            <a:bodyPr wrap="square" lIns="45719" tIns="45719" rIns="45719" bIns="45719" numCol="1" anchor="ctr">
-              <a:spAutoFit/>
-            </a:bodyPr>
-            <a:lstStyle/>
-            <a:p>
-              <a:r>
-                <a:t>Texte die schwieriger sind haben weniger Named Entities</a:t>
-              </a:r>
-            </a:p>
-          </p:txBody>
-        </p:sp>
-      </p:grpSp>
+          </p:cNvPr>
+          <p:cNvSpPr/>
+          <p:nvPr/>
+        </p:nvSpPr>
+        <p:spPr>
+          <a:xfrm>
+            <a:off x="7219291" y="4412976"/>
+            <a:ext cx="4476345" cy="946204"/>
+          </a:xfrm>
+          <a:prstGeom prst="wedgeRoundRectCallout">
+            <a:avLst>
+              <a:gd name="adj1" fmla="val -73770"/>
+              <a:gd name="adj2" fmla="val 18226"/>
+              <a:gd name="adj3" fmla="val 16667"/>
+            </a:avLst>
+          </a:prstGeom>
+          <a:solidFill>
+            <a:schemeClr val="accent4">
+              <a:lumMod val="20000"/>
+              <a:lumOff val="80000"/>
+            </a:schemeClr>
+          </a:solidFill>
+        </p:spPr>
+        <p:style>
+          <a:lnRef idx="2">
+            <a:schemeClr val="accent1">
+              <a:shade val="15000"/>
+            </a:schemeClr>
+          </a:lnRef>
+          <a:fillRef idx="1">
+            <a:schemeClr val="accent1"/>
+          </a:fillRef>
+          <a:effectRef idx="0">
+            <a:schemeClr val="accent1"/>
+          </a:effectRef>
+          <a:fontRef idx="minor">
+            <a:schemeClr val="lt1"/>
+          </a:fontRef>
+        </p:style>
+        <p:txBody>
+          <a:bodyPr rtlCol="0" anchor="ctr"/>
+          <a:lstStyle/>
+          <a:p>
+            <a:r>
+              <a:rPr lang="en-GB" dirty="0">
+                <a:solidFill>
+                  <a:schemeClr val="tx1"/>
+                </a:solidFill>
+              </a:rPr>
+              <a:t>Texte die </a:t>
+            </a:r>
+            <a:r>
+              <a:rPr lang="en-GB" dirty="0" err="1">
+                <a:solidFill>
+                  <a:schemeClr val="tx1"/>
+                </a:solidFill>
+              </a:rPr>
+              <a:t>schwieriger</a:t>
+            </a:r>
+            <a:r>
+              <a:rPr lang="en-GB" dirty="0">
+                <a:solidFill>
+                  <a:schemeClr val="tx1"/>
+                </a:solidFill>
+              </a:rPr>
+              <a:t> </a:t>
+            </a:r>
+            <a:r>
+              <a:rPr lang="en-GB" dirty="0" err="1">
+                <a:solidFill>
+                  <a:schemeClr val="tx1"/>
+                </a:solidFill>
+              </a:rPr>
+              <a:t>sind</a:t>
+            </a:r>
+            <a:r>
+              <a:rPr lang="en-GB" dirty="0">
+                <a:solidFill>
+                  <a:schemeClr val="tx1"/>
+                </a:solidFill>
+              </a:rPr>
+              <a:t> </a:t>
+            </a:r>
+            <a:r>
+              <a:rPr lang="en-GB" dirty="0" err="1">
+                <a:solidFill>
+                  <a:schemeClr val="tx1"/>
+                </a:solidFill>
+              </a:rPr>
+              <a:t>haben</a:t>
+            </a:r>
+            <a:r>
+              <a:rPr lang="en-GB" dirty="0">
+                <a:solidFill>
+                  <a:schemeClr val="tx1"/>
+                </a:solidFill>
+              </a:rPr>
+              <a:t> </a:t>
+            </a:r>
+            <a:r>
+              <a:rPr lang="en-GB" dirty="0" err="1">
+                <a:solidFill>
+                  <a:schemeClr val="tx1"/>
+                </a:solidFill>
+              </a:rPr>
+              <a:t>weniger</a:t>
+            </a:r>
+            <a:r>
+              <a:rPr lang="en-GB" dirty="0">
+                <a:solidFill>
+                  <a:schemeClr val="tx1"/>
+                </a:solidFill>
+              </a:rPr>
+              <a:t> Named Entities</a:t>
+            </a:r>
+          </a:p>
+        </p:txBody>
+      </p:sp>
     </p:spTree>
   </p:cSld>
   <p:clrMapOvr>
@@ -4477,7 +4441,7 @@
           </a:ln>
           <a:extLst>
             <a:ext uri="{C572A759-6A51-4108-AA02-DFA0A04FC94B}">
-              <ma14:wrappingTextBoxFlag xmlns="" xmlns:m="http://schemas.openxmlformats.org/officeDocument/2006/math" xmlns:a14="http://schemas.microsoft.com/office/drawing/2010/main" xmlns:ma14="http://schemas.microsoft.com/office/mac/drawingml/2011/main" val="1"/>
+              <ma14:wrappingTextBoxFlag xmlns:ma14="http://schemas.microsoft.com/office/mac/drawingml/2011/main" xmlns:a14="http://schemas.microsoft.com/office/drawing/2010/main" xmlns:m="http://schemas.openxmlformats.org/officeDocument/2006/math" xmlns="" val="1"/>
             </a:ext>
           </a:extLst>
         </p:spPr>
@@ -4560,55 +4524,56 @@
               <a:rPr dirty="0"/>
               <a:t>Transformer:</a:t>
             </a:r>
+            <a:r>
+              <a:rPr lang="de-CH" dirty="0"/>
+              <a:t> </a:t>
+            </a:r>
+            <a:r>
+              <a:rPr dirty="0"/>
+              <a:t>BAAI/bge-base-en-v1.5</a:t>
+            </a:r>
+          </a:p>
+          <a:p>
+            <a:pPr>
+              <a:defRPr sz="2400"/>
+            </a:pPr>
+            <a:r>
+              <a:rPr dirty="0" err="1"/>
+              <a:t>Dimensionsreduktion</a:t>
+            </a:r>
+            <a:r>
+              <a:rPr dirty="0"/>
+              <a:t> und </a:t>
+            </a:r>
+            <a:br>
+              <a:rPr lang="en-CH" dirty="0"/>
+            </a:br>
+            <a:r>
+              <a:rPr dirty="0" err="1"/>
+              <a:t>Darstellung</a:t>
+            </a:r>
+            <a:r>
+              <a:rPr dirty="0"/>
+              <a:t> auf Plot</a:t>
+            </a:r>
+          </a:p>
+          <a:p>
+            <a:pPr>
+              <a:defRPr sz="2400"/>
+            </a:pPr>
+            <a:r>
+              <a:rPr dirty="0"/>
+              <a:t>Rot/Blau </a:t>
+            </a:r>
+            <a:r>
+              <a:rPr dirty="0" err="1"/>
+              <a:t>gemischt</a:t>
+            </a:r>
             <a:br>
               <a:rPr dirty="0"/>
             </a:br>
             <a:r>
               <a:rPr dirty="0"/>
-              <a:t>BAAI/bge-base-en-v1.5</a:t>
-            </a:r>
-          </a:p>
-          <a:p>
-            <a:pPr>
-              <a:defRPr sz="2400"/>
-            </a:pPr>
-            <a:r>
-              <a:rPr dirty="0" err="1"/>
-              <a:t>Dimensionsreduktion</a:t>
-            </a:r>
-            <a:r>
-              <a:rPr dirty="0"/>
-              <a:t> und </a:t>
-            </a:r>
-            <a:br>
-              <a:rPr dirty="0"/>
-            </a:br>
-            <a:r>
-              <a:rPr dirty="0" err="1"/>
-              <a:t>Darstellung</a:t>
-            </a:r>
-            <a:r>
-              <a:rPr dirty="0"/>
-              <a:t> auf Plot</a:t>
-            </a:r>
-          </a:p>
-          <a:p>
-            <a:pPr>
-              <a:defRPr sz="2400"/>
-            </a:pPr>
-            <a:r>
-              <a:rPr dirty="0"/>
-              <a:t>Rot/Blau </a:t>
-            </a:r>
-            <a:r>
-              <a:rPr dirty="0" err="1"/>
-              <a:t>gemischt</a:t>
-            </a:r>
-            <a:br>
-              <a:rPr dirty="0"/>
-            </a:br>
-            <a:r>
-              <a:rPr dirty="0"/>
               <a:t>Fehler </a:t>
             </a:r>
             <a:r>
@@ -4623,9 +4588,10 @@
               <a:rPr dirty="0" err="1"/>
               <a:t>sich</a:t>
             </a:r>
-            <a:br>
-              <a:rPr dirty="0"/>
-            </a:br>
+            <a:r>
+              <a:rPr lang="de-CH" dirty="0"/>
+              <a:t> </a:t>
+            </a:r>
             <a:r>
               <a:rPr dirty="0" err="1"/>
               <a:t>gleichmässig</a:t>
@@ -4634,25 +4600,22 @@
               <a:rPr dirty="0"/>
               <a:t> </a:t>
             </a:r>
+            <a:br>
+              <a:rPr lang="de-CH" dirty="0"/>
+            </a:br>
             <a:r>
               <a:rPr dirty="0" err="1"/>
               <a:t>im</a:t>
             </a:r>
             <a:r>
-              <a:rPr dirty="0"/>
+              <a:rPr lang="de-CH" dirty="0"/>
               <a:t> </a:t>
             </a:r>
-            <a:br>
-              <a:rPr dirty="0"/>
-            </a:br>
             <a:r>
               <a:rPr dirty="0" err="1"/>
               <a:t>Semantikraum</a:t>
             </a:r>
-            <a:r>
-              <a:rPr dirty="0"/>
-              <a:t>.</a:t>
-            </a:r>
+            <a:endParaRPr dirty="0"/>
           </a:p>
         </p:txBody>
       </p:sp>
@@ -4675,7 +4638,7 @@
           </a:ln>
           <a:extLst>
             <a:ext uri="{C572A759-6A51-4108-AA02-DFA0A04FC94B}">
-              <ma14:wrappingTextBoxFlag xmlns="" xmlns:m="http://schemas.openxmlformats.org/officeDocument/2006/math" xmlns:a14="http://schemas.microsoft.com/office/drawing/2010/main" xmlns:ma14="http://schemas.microsoft.com/office/mac/drawingml/2011/main" val="1"/>
+              <ma14:wrappingTextBoxFlag xmlns:ma14="http://schemas.microsoft.com/office/mac/drawingml/2011/main" xmlns:a14="http://schemas.microsoft.com/office/drawing/2010/main" xmlns:m="http://schemas.openxmlformats.org/officeDocument/2006/math" xmlns="" val="1"/>
             </a:ext>
           </a:extLst>
         </p:spPr>
@@ -4719,7 +4682,7 @@
           </a:prstGeom>
           <a:extLst>
             <a:ext uri="{C572A759-6A51-4108-AA02-DFA0A04FC94B}">
-              <ma14:wrappingTextBoxFlag xmlns="" xmlns:m="http://schemas.openxmlformats.org/officeDocument/2006/math" xmlns:a14="http://schemas.microsoft.com/office/drawing/2010/main" xmlns:ma14="http://schemas.microsoft.com/office/mac/drawingml/2011/main" val="1"/>
+              <ma14:wrappingTextBoxFlag xmlns:ma14="http://schemas.microsoft.com/office/mac/drawingml/2011/main" xmlns:a14="http://schemas.microsoft.com/office/drawing/2010/main" xmlns:m="http://schemas.openxmlformats.org/officeDocument/2006/math" xmlns="" val="1"/>
             </a:ext>
           </a:extLst>
         </p:spPr>
@@ -4781,7 +4744,7 @@
           </a:ln>
           <a:extLst>
             <a:ext uri="{C572A759-6A51-4108-AA02-DFA0A04FC94B}">
-              <ma14:wrappingTextBoxFlag xmlns="" xmlns:m="http://schemas.openxmlformats.org/officeDocument/2006/math" xmlns:a14="http://schemas.microsoft.com/office/drawing/2010/main" xmlns:ma14="http://schemas.microsoft.com/office/mac/drawingml/2011/main" val="1"/>
+              <ma14:wrappingTextBoxFlag xmlns:ma14="http://schemas.microsoft.com/office/mac/drawingml/2011/main" xmlns:a14="http://schemas.microsoft.com/office/drawing/2010/main" xmlns:m="http://schemas.openxmlformats.org/officeDocument/2006/math" xmlns="" val="1"/>
             </a:ext>
           </a:extLst>
         </p:spPr>
@@ -4986,7 +4949,15 @@
             </a:r>
             <a:r>
               <a:rPr lang="en-CH" dirty="0"/>
-              <a:t> aber sprachlich nicht arm</a:t>
+              <a:t> aber sprachlich </a:t>
+            </a:r>
+            <a:r>
+              <a:rPr lang="en-CH" b="1" dirty="0"/>
+              <a:t>nicht</a:t>
+            </a:r>
+            <a:r>
+              <a:rPr lang="en-CH" dirty="0"/>
+              <a:t> arm</a:t>
             </a:r>
           </a:p>
           <a:p>
@@ -4998,17 +4969,7 @@
             </a:br>
             <a:r>
               <a:rPr lang="en-CH" dirty="0"/>
-              <a:t>Sie klingen wie ein echter Mensch, der wenig sagt. </a:t>
-            </a:r>
-            <a:r>
-              <a:rPr lang="en-CH" dirty="0">
-                <a:sym typeface="Wingdings" pitchFamily="2" charset="2"/>
-              </a:rPr>
-              <a:t></a:t>
-            </a:r>
-            <a:r>
-              <a:rPr lang="en-CH" dirty="0"/>
-              <a:t> das macht sie schwer erkennbar</a:t>
+              <a:t>Sie klingen wie ein echter Mensch, der wenig sagt</a:t>
             </a:r>
           </a:p>
           <a:p>
@@ -5161,7 +5122,7 @@
             <a:fld id="{EE15D7BA-2F5F-8E43-91CB-647D382EDB87}" type="datetime4">
               <a:rPr lang="de-CH" smtClean="0"/>
               <a:pPr/>
-              <a:t>18. Juni 2026</a:t>
+              <a:t>19. Juni 2026</a:t>
             </a:fld>
             <a:endParaRPr lang="en-CH"/>
           </a:p>
@@ -6013,7 +5974,7 @@
           </a:ln>
           <a:extLst>
             <a:ext uri="{C572A759-6A51-4108-AA02-DFA0A04FC94B}">
-              <ma14:wrappingTextBoxFlag xmlns="" xmlns:m="http://schemas.openxmlformats.org/officeDocument/2006/math" xmlns:a14="http://schemas.microsoft.com/office/drawing/2010/main" xmlns:ma14="http://schemas.microsoft.com/office/mac/drawingml/2011/main" val="1"/>
+              <ma14:wrappingTextBoxFlag xmlns:ma14="http://schemas.microsoft.com/office/mac/drawingml/2011/main" xmlns:a14="http://schemas.microsoft.com/office/drawing/2010/main" xmlns:m="http://schemas.openxmlformats.org/officeDocument/2006/math" xmlns="" val="1"/>
             </a:ext>
           </a:extLst>
         </p:spPr>
@@ -6086,7 +6047,7 @@
           </a:prstGeom>
           <a:extLst>
             <a:ext uri="{C572A759-6A51-4108-AA02-DFA0A04FC94B}">
-              <ma14:wrappingTextBoxFlag xmlns="" xmlns:m="http://schemas.openxmlformats.org/officeDocument/2006/math" xmlns:a14="http://schemas.microsoft.com/office/drawing/2010/main" xmlns:ma14="http://schemas.microsoft.com/office/mac/drawingml/2011/main" val="1"/>
+              <ma14:wrappingTextBoxFlag xmlns:ma14="http://schemas.microsoft.com/office/mac/drawingml/2011/main" xmlns:a14="http://schemas.microsoft.com/office/drawing/2010/main" xmlns:m="http://schemas.openxmlformats.org/officeDocument/2006/math" xmlns="" val="1"/>
             </a:ext>
           </a:extLst>
         </p:spPr>
@@ -6121,7 +6082,7 @@
           </a:ln>
           <a:extLst>
             <a:ext uri="{C572A759-6A51-4108-AA02-DFA0A04FC94B}">
-              <ma14:wrappingTextBoxFlag xmlns="" xmlns:m="http://schemas.openxmlformats.org/officeDocument/2006/math" xmlns:a14="http://schemas.microsoft.com/office/drawing/2010/main" xmlns:ma14="http://schemas.microsoft.com/office/mac/drawingml/2011/main" val="1"/>
+              <ma14:wrappingTextBoxFlag xmlns:ma14="http://schemas.microsoft.com/office/mac/drawingml/2011/main" xmlns:a14="http://schemas.microsoft.com/office/drawing/2010/main" xmlns:m="http://schemas.openxmlformats.org/officeDocument/2006/math" xmlns="" val="1"/>
             </a:ext>
           </a:extLst>
         </p:spPr>
@@ -6206,7 +6167,7 @@
           </a:ln>
           <a:extLst>
             <a:ext uri="{C572A759-6A51-4108-AA02-DFA0A04FC94B}">
-              <ma14:wrappingTextBoxFlag xmlns="" xmlns:m="http://schemas.openxmlformats.org/officeDocument/2006/math" xmlns:a14="http://schemas.microsoft.com/office/drawing/2010/main" xmlns:ma14="http://schemas.microsoft.com/office/mac/drawingml/2011/main" val="1"/>
+              <ma14:wrappingTextBoxFlag xmlns:ma14="http://schemas.microsoft.com/office/mac/drawingml/2011/main" xmlns:a14="http://schemas.microsoft.com/office/drawing/2010/main" xmlns:m="http://schemas.openxmlformats.org/officeDocument/2006/math" xmlns="" val="1"/>
             </a:ext>
           </a:extLst>
         </p:spPr>
@@ -6318,7 +6279,7 @@
             <a:effectLst/>
             <a:extLst>
               <a:ext uri="{C572A759-6A51-4108-AA02-DFA0A04FC94B}">
-                <ma14:wrappingTextBoxFlag xmlns="" xmlns:m="http://schemas.openxmlformats.org/officeDocument/2006/math" xmlns:a14="http://schemas.microsoft.com/office/drawing/2010/main" xmlns:ma14="http://schemas.microsoft.com/office/mac/drawingml/2011/main" val="1"/>
+                <ma14:wrappingTextBoxFlag xmlns:ma14="http://schemas.microsoft.com/office/mac/drawingml/2011/main" xmlns:a14="http://schemas.microsoft.com/office/drawing/2010/main" xmlns:m="http://schemas.openxmlformats.org/officeDocument/2006/math" xmlns="" val="1"/>
               </a:ext>
             </a:extLst>
           </p:spPr>
@@ -6479,7 +6440,7 @@
             <a:effectLst/>
             <a:extLst>
               <a:ext uri="{C572A759-6A51-4108-AA02-DFA0A04FC94B}">
-                <ma14:wrappingTextBoxFlag xmlns="" xmlns:m="http://schemas.openxmlformats.org/officeDocument/2006/math" xmlns:a14="http://schemas.microsoft.com/office/drawing/2010/main" xmlns:ma14="http://schemas.microsoft.com/office/mac/drawingml/2011/main" val="1"/>
+                <ma14:wrappingTextBoxFlag xmlns:ma14="http://schemas.microsoft.com/office/mac/drawingml/2011/main" xmlns:a14="http://schemas.microsoft.com/office/drawing/2010/main" xmlns:m="http://schemas.openxmlformats.org/officeDocument/2006/math" xmlns="" val="1"/>
               </a:ext>
             </a:extLst>
           </p:spPr>
@@ -6570,7 +6531,7 @@
           </a:ln>
           <a:extLst>
             <a:ext uri="{C572A759-6A51-4108-AA02-DFA0A04FC94B}">
-              <ma14:wrappingTextBoxFlag xmlns="" xmlns:m="http://schemas.openxmlformats.org/officeDocument/2006/math" xmlns:a14="http://schemas.microsoft.com/office/drawing/2010/main" xmlns:ma14="http://schemas.microsoft.com/office/mac/drawingml/2011/main" val="1"/>
+              <ma14:wrappingTextBoxFlag xmlns:ma14="http://schemas.microsoft.com/office/mac/drawingml/2011/main" xmlns:a14="http://schemas.microsoft.com/office/drawing/2010/main" xmlns:m="http://schemas.openxmlformats.org/officeDocument/2006/math" xmlns="" val="1"/>
             </a:ext>
           </a:extLst>
         </p:spPr>
@@ -6682,7 +6643,7 @@
             <a:effectLst/>
             <a:extLst>
               <a:ext uri="{C572A759-6A51-4108-AA02-DFA0A04FC94B}">
-                <ma14:wrappingTextBoxFlag xmlns="" xmlns:m="http://schemas.openxmlformats.org/officeDocument/2006/math" xmlns:a14="http://schemas.microsoft.com/office/drawing/2010/main" xmlns:ma14="http://schemas.microsoft.com/office/mac/drawingml/2011/main" val="1"/>
+                <ma14:wrappingTextBoxFlag xmlns:ma14="http://schemas.microsoft.com/office/mac/drawingml/2011/main" xmlns:a14="http://schemas.microsoft.com/office/drawing/2010/main" xmlns:m="http://schemas.openxmlformats.org/officeDocument/2006/math" xmlns="" val="1"/>
               </a:ext>
             </a:extLst>
           </p:spPr>
@@ -6796,7 +6757,7 @@
             <a:effectLst/>
             <a:extLst>
               <a:ext uri="{C572A759-6A51-4108-AA02-DFA0A04FC94B}">
-                <ma14:wrappingTextBoxFlag xmlns="" xmlns:m="http://schemas.openxmlformats.org/officeDocument/2006/math" xmlns:a14="http://schemas.microsoft.com/office/drawing/2010/main" xmlns:ma14="http://schemas.microsoft.com/office/mac/drawingml/2011/main" val="1"/>
+                <ma14:wrappingTextBoxFlag xmlns:ma14="http://schemas.microsoft.com/office/mac/drawingml/2011/main" xmlns:a14="http://schemas.microsoft.com/office/drawing/2010/main" xmlns:m="http://schemas.openxmlformats.org/officeDocument/2006/math" xmlns="" val="1"/>
               </a:ext>
             </a:extLst>
           </p:spPr>
@@ -6887,7 +6848,7 @@
           </a:ln>
           <a:extLst>
             <a:ext uri="{C572A759-6A51-4108-AA02-DFA0A04FC94B}">
-              <ma14:wrappingTextBoxFlag xmlns="" xmlns:m="http://schemas.openxmlformats.org/officeDocument/2006/math" xmlns:a14="http://schemas.microsoft.com/office/drawing/2010/main" xmlns:ma14="http://schemas.microsoft.com/office/mac/drawingml/2011/main" val="1"/>
+              <ma14:wrappingTextBoxFlag xmlns:ma14="http://schemas.microsoft.com/office/mac/drawingml/2011/main" xmlns:a14="http://schemas.microsoft.com/office/drawing/2010/main" xmlns:m="http://schemas.openxmlformats.org/officeDocument/2006/math" xmlns="" val="1"/>
             </a:ext>
           </a:extLst>
         </p:spPr>
@@ -7015,7 +6976,7 @@
             <a:effectLst/>
             <a:extLst>
               <a:ext uri="{C572A759-6A51-4108-AA02-DFA0A04FC94B}">
-                <ma14:wrappingTextBoxFlag xmlns="" xmlns:m="http://schemas.openxmlformats.org/officeDocument/2006/math" xmlns:a14="http://schemas.microsoft.com/office/drawing/2010/main" xmlns:ma14="http://schemas.microsoft.com/office/mac/drawingml/2011/main" val="1"/>
+                <ma14:wrappingTextBoxFlag xmlns:ma14="http://schemas.microsoft.com/office/mac/drawingml/2011/main" xmlns:a14="http://schemas.microsoft.com/office/drawing/2010/main" xmlns:m="http://schemas.openxmlformats.org/officeDocument/2006/math" xmlns="" val="1"/>
               </a:ext>
             </a:extLst>
           </p:spPr>
@@ -7106,7 +7067,7 @@
           </a:ln>
           <a:extLst>
             <a:ext uri="{C572A759-6A51-4108-AA02-DFA0A04FC94B}">
-              <ma14:wrappingTextBoxFlag xmlns="" xmlns:m="http://schemas.openxmlformats.org/officeDocument/2006/math" xmlns:a14="http://schemas.microsoft.com/office/drawing/2010/main" xmlns:ma14="http://schemas.microsoft.com/office/mac/drawingml/2011/main" val="1"/>
+              <ma14:wrappingTextBoxFlag xmlns:ma14="http://schemas.microsoft.com/office/mac/drawingml/2011/main" xmlns:a14="http://schemas.microsoft.com/office/drawing/2010/main" xmlns:m="http://schemas.openxmlformats.org/officeDocument/2006/math" xmlns="" val="1"/>
             </a:ext>
           </a:extLst>
         </p:spPr>
@@ -7254,7 +7215,7 @@
             <a:effectLst/>
             <a:extLst>
               <a:ext uri="{C572A759-6A51-4108-AA02-DFA0A04FC94B}">
-                <ma14:wrappingTextBoxFlag xmlns="" xmlns:m="http://schemas.openxmlformats.org/officeDocument/2006/math" xmlns:a14="http://schemas.microsoft.com/office/drawing/2010/main" xmlns:ma14="http://schemas.microsoft.com/office/mac/drawingml/2011/main" val="1"/>
+                <ma14:wrappingTextBoxFlag xmlns:ma14="http://schemas.microsoft.com/office/mac/drawingml/2011/main" xmlns:a14="http://schemas.microsoft.com/office/drawing/2010/main" xmlns:m="http://schemas.openxmlformats.org/officeDocument/2006/math" xmlns="" val="1"/>
               </a:ext>
             </a:extLst>
           </p:spPr>
@@ -7345,7 +7306,7 @@
           </a:ln>
           <a:extLst>
             <a:ext uri="{C572A759-6A51-4108-AA02-DFA0A04FC94B}">
-              <ma14:wrappingTextBoxFlag xmlns="" xmlns:m="http://schemas.openxmlformats.org/officeDocument/2006/math" xmlns:a14="http://schemas.microsoft.com/office/drawing/2010/main" xmlns:ma14="http://schemas.microsoft.com/office/mac/drawingml/2011/main" val="1"/>
+              <ma14:wrappingTextBoxFlag xmlns:ma14="http://schemas.microsoft.com/office/mac/drawingml/2011/main" xmlns:a14="http://schemas.microsoft.com/office/drawing/2010/main" xmlns:m="http://schemas.openxmlformats.org/officeDocument/2006/math" xmlns="" val="1"/>
             </a:ext>
           </a:extLst>
         </p:spPr>
@@ -7550,7 +7511,7 @@
             <a:effectLst/>
             <a:extLst>
               <a:ext uri="{C572A759-6A51-4108-AA02-DFA0A04FC94B}">
-                <ma14:wrappingTextBoxFlag xmlns="" xmlns:m="http://schemas.openxmlformats.org/officeDocument/2006/math" xmlns:a14="http://schemas.microsoft.com/office/drawing/2010/main" xmlns:ma14="http://schemas.microsoft.com/office/mac/drawingml/2011/main" val="1"/>
+                <ma14:wrappingTextBoxFlag xmlns:ma14="http://schemas.microsoft.com/office/mac/drawingml/2011/main" xmlns:a14="http://schemas.microsoft.com/office/drawing/2010/main" xmlns:m="http://schemas.openxmlformats.org/officeDocument/2006/math" xmlns="" val="1"/>
               </a:ext>
             </a:extLst>
           </p:spPr>
@@ -7645,7 +7606,7 @@
           </a:ln>
           <a:extLst>
             <a:ext uri="{C572A759-6A51-4108-AA02-DFA0A04FC94B}">
-              <ma14:wrappingTextBoxFlag xmlns="" xmlns:m="http://schemas.openxmlformats.org/officeDocument/2006/math" xmlns:a14="http://schemas.microsoft.com/office/drawing/2010/main" xmlns:ma14="http://schemas.microsoft.com/office/mac/drawingml/2011/main" val="1"/>
+              <ma14:wrappingTextBoxFlag xmlns:ma14="http://schemas.microsoft.com/office/mac/drawingml/2011/main" xmlns:a14="http://schemas.microsoft.com/office/drawing/2010/main" xmlns:m="http://schemas.openxmlformats.org/officeDocument/2006/math" xmlns="" val="1"/>
             </a:ext>
           </a:extLst>
         </p:spPr>
@@ -7735,7 +7696,7 @@
           </a:ln>
           <a:extLst>
             <a:ext uri="{C572A759-6A51-4108-AA02-DFA0A04FC94B}">
-              <ma14:wrappingTextBoxFlag xmlns="" xmlns:m="http://schemas.openxmlformats.org/officeDocument/2006/math" xmlns:a14="http://schemas.microsoft.com/office/drawing/2010/main" xmlns:ma14="http://schemas.microsoft.com/office/mac/drawingml/2011/main" val="1"/>
+              <ma14:wrappingTextBoxFlag xmlns:ma14="http://schemas.microsoft.com/office/mac/drawingml/2011/main" xmlns:a14="http://schemas.microsoft.com/office/drawing/2010/main" xmlns:m="http://schemas.openxmlformats.org/officeDocument/2006/math" xmlns="" val="1"/>
             </a:ext>
           </a:extLst>
         </p:spPr>
@@ -7825,7 +7786,7 @@
           </a:ln>
           <a:extLst>
             <a:ext uri="{C572A759-6A51-4108-AA02-DFA0A04FC94B}">
-              <ma14:wrappingTextBoxFlag xmlns="" xmlns:m="http://schemas.openxmlformats.org/officeDocument/2006/math" xmlns:a14="http://schemas.microsoft.com/office/drawing/2010/main" xmlns:ma14="http://schemas.microsoft.com/office/mac/drawingml/2011/main" val="1"/>
+              <ma14:wrappingTextBoxFlag xmlns:ma14="http://schemas.microsoft.com/office/mac/drawingml/2011/main" xmlns:a14="http://schemas.microsoft.com/office/drawing/2010/main" xmlns:m="http://schemas.openxmlformats.org/officeDocument/2006/math" xmlns="" val="1"/>
             </a:ext>
           </a:extLst>
         </p:spPr>
@@ -7970,7 +7931,7 @@
           </a:ln>
           <a:extLst>
             <a:ext uri="{C572A759-6A51-4108-AA02-DFA0A04FC94B}">
-              <ma14:wrappingTextBoxFlag xmlns="" xmlns:m="http://schemas.openxmlformats.org/officeDocument/2006/math" xmlns:a14="http://schemas.microsoft.com/office/drawing/2010/main" xmlns:ma14="http://schemas.microsoft.com/office/mac/drawingml/2011/main" val="1"/>
+              <ma14:wrappingTextBoxFlag xmlns:ma14="http://schemas.microsoft.com/office/mac/drawingml/2011/main" xmlns:a14="http://schemas.microsoft.com/office/drawing/2010/main" xmlns:m="http://schemas.openxmlformats.org/officeDocument/2006/math" xmlns="" val="1"/>
             </a:ext>
           </a:extLst>
         </p:spPr>
@@ -8060,7 +8021,7 @@
           </a:ln>
           <a:extLst>
             <a:ext uri="{C572A759-6A51-4108-AA02-DFA0A04FC94B}">
-              <ma14:wrappingTextBoxFlag xmlns="" xmlns:m="http://schemas.openxmlformats.org/officeDocument/2006/math" xmlns:a14="http://schemas.microsoft.com/office/drawing/2010/main" xmlns:ma14="http://schemas.microsoft.com/office/mac/drawingml/2011/main" val="1"/>
+              <ma14:wrappingTextBoxFlag xmlns:ma14="http://schemas.microsoft.com/office/mac/drawingml/2011/main" xmlns:a14="http://schemas.microsoft.com/office/drawing/2010/main" xmlns:m="http://schemas.openxmlformats.org/officeDocument/2006/math" xmlns="" val="1"/>
             </a:ext>
           </a:extLst>
         </p:spPr>
@@ -8183,7 +8144,7 @@
           </a:ln>
           <a:extLst>
             <a:ext uri="{C572A759-6A51-4108-AA02-DFA0A04FC94B}">
-              <ma14:wrappingTextBoxFlag xmlns="" xmlns:m="http://schemas.openxmlformats.org/officeDocument/2006/math" xmlns:a14="http://schemas.microsoft.com/office/drawing/2010/main" xmlns:ma14="http://schemas.microsoft.com/office/mac/drawingml/2011/main" val="1"/>
+              <ma14:wrappingTextBoxFlag xmlns:ma14="http://schemas.microsoft.com/office/mac/drawingml/2011/main" xmlns:a14="http://schemas.microsoft.com/office/drawing/2010/main" xmlns:m="http://schemas.openxmlformats.org/officeDocument/2006/math" xmlns="" val="1"/>
             </a:ext>
           </a:extLst>
         </p:spPr>
@@ -8364,7 +8325,7 @@
             <a:effectLst/>
             <a:extLst>
               <a:ext uri="{C572A759-6A51-4108-AA02-DFA0A04FC94B}">
-                <ma14:wrappingTextBoxFlag xmlns="" xmlns:m="http://schemas.openxmlformats.org/officeDocument/2006/math" xmlns:a14="http://schemas.microsoft.com/office/drawing/2010/main" xmlns:ma14="http://schemas.microsoft.com/office/mac/drawingml/2011/main" val="1"/>
+                <ma14:wrappingTextBoxFlag xmlns:ma14="http://schemas.microsoft.com/office/mac/drawingml/2011/main" xmlns:a14="http://schemas.microsoft.com/office/drawing/2010/main" xmlns:m="http://schemas.openxmlformats.org/officeDocument/2006/math" xmlns="" val="1"/>
               </a:ext>
             </a:extLst>
           </p:spPr>
@@ -8477,7 +8438,7 @@
             <a:effectLst/>
             <a:extLst>
               <a:ext uri="{C572A759-6A51-4108-AA02-DFA0A04FC94B}">
-                <ma14:wrappingTextBoxFlag xmlns="" xmlns:m="http://schemas.openxmlformats.org/officeDocument/2006/math" xmlns:a14="http://schemas.microsoft.com/office/drawing/2010/main" xmlns:ma14="http://schemas.microsoft.com/office/mac/drawingml/2011/main" val="1"/>
+                <ma14:wrappingTextBoxFlag xmlns:ma14="http://schemas.microsoft.com/office/mac/drawingml/2011/main" xmlns:a14="http://schemas.microsoft.com/office/drawing/2010/main" xmlns:m="http://schemas.openxmlformats.org/officeDocument/2006/math" xmlns="" val="1"/>
               </a:ext>
             </a:extLst>
           </p:spPr>
@@ -8551,7 +8512,7 @@
           </a:ln>
           <a:extLst>
             <a:ext uri="{C572A759-6A51-4108-AA02-DFA0A04FC94B}">
-              <ma14:wrappingTextBoxFlag xmlns="" xmlns:m="http://schemas.openxmlformats.org/officeDocument/2006/math" xmlns:a14="http://schemas.microsoft.com/office/drawing/2010/main" xmlns:ma14="http://schemas.microsoft.com/office/mac/drawingml/2011/main" val="1"/>
+              <ma14:wrappingTextBoxFlag xmlns:ma14="http://schemas.microsoft.com/office/mac/drawingml/2011/main" xmlns:a14="http://schemas.microsoft.com/office/drawing/2010/main" xmlns:m="http://schemas.openxmlformats.org/officeDocument/2006/math" xmlns="" val="1"/>
             </a:ext>
           </a:extLst>
         </p:spPr>
@@ -8736,7 +8697,7 @@
           </a:ln>
           <a:extLst>
             <a:ext uri="{C572A759-6A51-4108-AA02-DFA0A04FC94B}">
-              <ma14:wrappingTextBoxFlag xmlns="" xmlns:m="http://schemas.openxmlformats.org/officeDocument/2006/math" xmlns:a14="http://schemas.microsoft.com/office/drawing/2010/main" xmlns:ma14="http://schemas.microsoft.com/office/mac/drawingml/2011/main" val="1"/>
+              <ma14:wrappingTextBoxFlag xmlns:ma14="http://schemas.microsoft.com/office/mac/drawingml/2011/main" xmlns:a14="http://schemas.microsoft.com/office/drawing/2010/main" xmlns:m="http://schemas.openxmlformats.org/officeDocument/2006/math" xmlns="" val="1"/>
             </a:ext>
           </a:extLst>
         </p:spPr>
@@ -8780,7 +8741,7 @@
           </a:prstGeom>
           <a:extLst>
             <a:ext uri="{C572A759-6A51-4108-AA02-DFA0A04FC94B}">
-              <ma14:wrappingTextBoxFlag xmlns="" xmlns:m="http://schemas.openxmlformats.org/officeDocument/2006/math" xmlns:a14="http://schemas.microsoft.com/office/drawing/2010/main" xmlns:ma14="http://schemas.microsoft.com/office/mac/drawingml/2011/main" val="1"/>
+              <ma14:wrappingTextBoxFlag xmlns:ma14="http://schemas.microsoft.com/office/mac/drawingml/2011/main" xmlns:a14="http://schemas.microsoft.com/office/drawing/2010/main" xmlns:m="http://schemas.openxmlformats.org/officeDocument/2006/math" xmlns="" val="1"/>
             </a:ext>
           </a:extLst>
         </p:spPr>
@@ -8941,7 +8902,7 @@
             <a:effectLst/>
             <a:extLst>
               <a:ext uri="{C572A759-6A51-4108-AA02-DFA0A04FC94B}">
-                <ma14:wrappingTextBoxFlag xmlns="" xmlns:m="http://schemas.openxmlformats.org/officeDocument/2006/math" xmlns:a14="http://schemas.microsoft.com/office/drawing/2010/main" xmlns:ma14="http://schemas.microsoft.com/office/mac/drawingml/2011/main" val="1"/>
+                <ma14:wrappingTextBoxFlag xmlns:ma14="http://schemas.microsoft.com/office/mac/drawingml/2011/main" xmlns:a14="http://schemas.microsoft.com/office/drawing/2010/main" xmlns:m="http://schemas.openxmlformats.org/officeDocument/2006/math" xmlns="" val="1"/>
               </a:ext>
             </a:extLst>
           </p:spPr>
@@ -9003,7 +8964,7 @@
           </a:ln>
           <a:extLst>
             <a:ext uri="{C572A759-6A51-4108-AA02-DFA0A04FC94B}">
-              <ma14:wrappingTextBoxFlag xmlns="" xmlns:m="http://schemas.openxmlformats.org/officeDocument/2006/math" xmlns:a14="http://schemas.microsoft.com/office/drawing/2010/main" xmlns:ma14="http://schemas.microsoft.com/office/mac/drawingml/2011/main" val="1"/>
+              <ma14:wrappingTextBoxFlag xmlns:ma14="http://schemas.microsoft.com/office/mac/drawingml/2011/main" xmlns:a14="http://schemas.microsoft.com/office/drawing/2010/main" xmlns:m="http://schemas.openxmlformats.org/officeDocument/2006/math" xmlns="" val="1"/>
             </a:ext>
           </a:extLst>
         </p:spPr>
@@ -9103,7 +9064,7 @@
           </a:prstGeom>
           <a:extLst>
             <a:ext uri="{C572A759-6A51-4108-AA02-DFA0A04FC94B}">
-              <ma14:wrappingTextBoxFlag xmlns="" xmlns:m="http://schemas.openxmlformats.org/officeDocument/2006/math" xmlns:a14="http://schemas.microsoft.com/office/drawing/2010/main" xmlns:ma14="http://schemas.microsoft.com/office/mac/drawingml/2011/main" val="1"/>
+              <ma14:wrappingTextBoxFlag xmlns:ma14="http://schemas.microsoft.com/office/mac/drawingml/2011/main" xmlns:a14="http://schemas.microsoft.com/office/drawing/2010/main" xmlns:m="http://schemas.openxmlformats.org/officeDocument/2006/math" xmlns="" val="1"/>
             </a:ext>
           </a:extLst>
         </p:spPr>
@@ -9138,7 +9099,7 @@
           </a:ln>
           <a:extLst>
             <a:ext uri="{C572A759-6A51-4108-AA02-DFA0A04FC94B}">
-              <ma14:wrappingTextBoxFlag xmlns="" xmlns:m="http://schemas.openxmlformats.org/officeDocument/2006/math" xmlns:a14="http://schemas.microsoft.com/office/drawing/2010/main" xmlns:ma14="http://schemas.microsoft.com/office/mac/drawingml/2011/main" val="1"/>
+              <ma14:wrappingTextBoxFlag xmlns:ma14="http://schemas.microsoft.com/office/mac/drawingml/2011/main" xmlns:a14="http://schemas.microsoft.com/office/drawing/2010/main" xmlns:m="http://schemas.openxmlformats.org/officeDocument/2006/math" xmlns="" val="1"/>
             </a:ext>
           </a:extLst>
         </p:spPr>
@@ -9181,7 +9142,7 @@
           </a:ln>
           <a:extLst>
             <a:ext uri="{C572A759-6A51-4108-AA02-DFA0A04FC94B}">
-              <ma14:wrappingTextBoxFlag xmlns="" xmlns:m="http://schemas.openxmlformats.org/officeDocument/2006/math" xmlns:a14="http://schemas.microsoft.com/office/drawing/2010/main" xmlns:ma14="http://schemas.microsoft.com/office/mac/drawingml/2011/main" val="1"/>
+              <ma14:wrappingTextBoxFlag xmlns:ma14="http://schemas.microsoft.com/office/mac/drawingml/2011/main" xmlns:a14="http://schemas.microsoft.com/office/drawing/2010/main" xmlns:m="http://schemas.openxmlformats.org/officeDocument/2006/math" xmlns="" val="1"/>
             </a:ext>
           </a:extLst>
         </p:spPr>
@@ -9307,7 +9268,7 @@
           </a:ln>
           <a:extLst>
             <a:ext uri="{C572A759-6A51-4108-AA02-DFA0A04FC94B}">
-              <ma14:wrappingTextBoxFlag xmlns="" xmlns:m="http://schemas.openxmlformats.org/officeDocument/2006/math" xmlns:a14="http://schemas.microsoft.com/office/drawing/2010/main" xmlns:ma14="http://schemas.microsoft.com/office/mac/drawingml/2011/main" val="1"/>
+              <ma14:wrappingTextBoxFlag xmlns:ma14="http://schemas.microsoft.com/office/mac/drawingml/2011/main" xmlns:a14="http://schemas.microsoft.com/office/drawing/2010/main" xmlns:m="http://schemas.openxmlformats.org/officeDocument/2006/math" xmlns="" val="1"/>
             </a:ext>
           </a:extLst>
         </p:spPr>
@@ -9397,7 +9358,7 @@
           </a:ln>
           <a:extLst>
             <a:ext uri="{C572A759-6A51-4108-AA02-DFA0A04FC94B}">
-              <ma14:wrappingTextBoxFlag xmlns="" xmlns:m="http://schemas.openxmlformats.org/officeDocument/2006/math" xmlns:a14="http://schemas.microsoft.com/office/drawing/2010/main" xmlns:ma14="http://schemas.microsoft.com/office/mac/drawingml/2011/main" val="1"/>
+              <ma14:wrappingTextBoxFlag xmlns:ma14="http://schemas.microsoft.com/office/mac/drawingml/2011/main" xmlns:a14="http://schemas.microsoft.com/office/drawing/2010/main" xmlns:m="http://schemas.openxmlformats.org/officeDocument/2006/math" xmlns="" val="1"/>
             </a:ext>
           </a:extLst>
         </p:spPr>
@@ -9483,7 +9444,7 @@
           </a:ln>
           <a:extLst>
             <a:ext uri="{C572A759-6A51-4108-AA02-DFA0A04FC94B}">
-              <ma14:wrappingTextBoxFlag xmlns="" xmlns:m="http://schemas.openxmlformats.org/officeDocument/2006/math" xmlns:a14="http://schemas.microsoft.com/office/drawing/2010/main" xmlns:ma14="http://schemas.microsoft.com/office/mac/drawingml/2011/main" val="1"/>
+              <ma14:wrappingTextBoxFlag xmlns:ma14="http://schemas.microsoft.com/office/mac/drawingml/2011/main" xmlns:a14="http://schemas.microsoft.com/office/drawing/2010/main" xmlns:m="http://schemas.openxmlformats.org/officeDocument/2006/math" xmlns="" val="1"/>
             </a:ext>
           </a:extLst>
         </p:spPr>
@@ -9530,7 +9491,7 @@
           </a:ln>
           <a:extLst>
             <a:ext uri="{C572A759-6A51-4108-AA02-DFA0A04FC94B}">
-              <ma14:wrappingTextBoxFlag xmlns="" xmlns:m="http://schemas.openxmlformats.org/officeDocument/2006/math" xmlns:a14="http://schemas.microsoft.com/office/drawing/2010/main" xmlns:ma14="http://schemas.microsoft.com/office/mac/drawingml/2011/main" val="1"/>
+              <ma14:wrappingTextBoxFlag xmlns:ma14="http://schemas.microsoft.com/office/mac/drawingml/2011/main" xmlns:a14="http://schemas.microsoft.com/office/drawing/2010/main" xmlns:m="http://schemas.openxmlformats.org/officeDocument/2006/math" xmlns="" val="1"/>
             </a:ext>
           </a:extLst>
         </p:spPr>
@@ -9616,7 +9577,7 @@
           </a:ln>
           <a:extLst>
             <a:ext uri="{C572A759-6A51-4108-AA02-DFA0A04FC94B}">
-              <ma14:wrappingTextBoxFlag xmlns="" xmlns:m="http://schemas.openxmlformats.org/officeDocument/2006/math" xmlns:a14="http://schemas.microsoft.com/office/drawing/2010/main" xmlns:ma14="http://schemas.microsoft.com/office/mac/drawingml/2011/main" val="1"/>
+              <ma14:wrappingTextBoxFlag xmlns:ma14="http://schemas.microsoft.com/office/mac/drawingml/2011/main" xmlns:a14="http://schemas.microsoft.com/office/drawing/2010/main" xmlns:m="http://schemas.openxmlformats.org/officeDocument/2006/math" xmlns="" val="1"/>
             </a:ext>
           </a:extLst>
         </p:spPr>
@@ -9663,7 +9624,7 @@
           </a:ln>
           <a:extLst>
             <a:ext uri="{C572A759-6A51-4108-AA02-DFA0A04FC94B}">
-              <ma14:wrappingTextBoxFlag xmlns="" xmlns:m="http://schemas.openxmlformats.org/officeDocument/2006/math" xmlns:a14="http://schemas.microsoft.com/office/drawing/2010/main" xmlns:ma14="http://schemas.microsoft.com/office/mac/drawingml/2011/main" val="1"/>
+              <ma14:wrappingTextBoxFlag xmlns:ma14="http://schemas.microsoft.com/office/mac/drawingml/2011/main" xmlns:a14="http://schemas.microsoft.com/office/drawing/2010/main" xmlns:m="http://schemas.openxmlformats.org/officeDocument/2006/math" xmlns="" val="1"/>
             </a:ext>
           </a:extLst>
         </p:spPr>
@@ -9775,7 +9736,7 @@
           </a:ln>
           <a:extLst>
             <a:ext uri="{C572A759-6A51-4108-AA02-DFA0A04FC94B}">
-              <ma14:wrappingTextBoxFlag xmlns="" xmlns:m="http://schemas.openxmlformats.org/officeDocument/2006/math" xmlns:a14="http://schemas.microsoft.com/office/drawing/2010/main" xmlns:ma14="http://schemas.microsoft.com/office/mac/drawingml/2011/main" val="1"/>
+              <ma14:wrappingTextBoxFlag xmlns:ma14="http://schemas.microsoft.com/office/mac/drawingml/2011/main" xmlns:a14="http://schemas.microsoft.com/office/drawing/2010/main" xmlns:m="http://schemas.openxmlformats.org/officeDocument/2006/math" xmlns="" val="1"/>
             </a:ext>
           </a:extLst>
         </p:spPr>
@@ -9822,7 +9783,7 @@
           </a:ln>
           <a:extLst>
             <a:ext uri="{C572A759-6A51-4108-AA02-DFA0A04FC94B}">
-              <ma14:wrappingTextBoxFlag xmlns="" xmlns:m="http://schemas.openxmlformats.org/officeDocument/2006/math" xmlns:a14="http://schemas.microsoft.com/office/drawing/2010/main" xmlns:ma14="http://schemas.microsoft.com/office/mac/drawingml/2011/main" val="1"/>
+              <ma14:wrappingTextBoxFlag xmlns:ma14="http://schemas.microsoft.com/office/mac/drawingml/2011/main" xmlns:a14="http://schemas.microsoft.com/office/drawing/2010/main" xmlns:m="http://schemas.openxmlformats.org/officeDocument/2006/math" xmlns="" val="1"/>
             </a:ext>
           </a:extLst>
         </p:spPr>
@@ -9915,7 +9876,7 @@
           </a:ln>
           <a:extLst>
             <a:ext uri="{C572A759-6A51-4108-AA02-DFA0A04FC94B}">
-              <ma14:wrappingTextBoxFlag xmlns="" xmlns:m="http://schemas.openxmlformats.org/officeDocument/2006/math" xmlns:a14="http://schemas.microsoft.com/office/drawing/2010/main" xmlns:ma14="http://schemas.microsoft.com/office/mac/drawingml/2011/main" val="1"/>
+              <ma14:wrappingTextBoxFlag xmlns:ma14="http://schemas.microsoft.com/office/mac/drawingml/2011/main" xmlns:a14="http://schemas.microsoft.com/office/drawing/2010/main" xmlns:m="http://schemas.openxmlformats.org/officeDocument/2006/math" xmlns="" val="1"/>
             </a:ext>
           </a:extLst>
         </p:spPr>
@@ -10031,7 +9992,7 @@
           </a:ln>
           <a:extLst>
             <a:ext uri="{C572A759-6A51-4108-AA02-DFA0A04FC94B}">
-              <ma14:wrappingTextBoxFlag xmlns="" xmlns:m="http://schemas.openxmlformats.org/officeDocument/2006/math" xmlns:a14="http://schemas.microsoft.com/office/drawing/2010/main" xmlns:ma14="http://schemas.microsoft.com/office/mac/drawingml/2011/main" val="1"/>
+              <ma14:wrappingTextBoxFlag xmlns:ma14="http://schemas.microsoft.com/office/mac/drawingml/2011/main" xmlns:a14="http://schemas.microsoft.com/office/drawing/2010/main" xmlns:m="http://schemas.openxmlformats.org/officeDocument/2006/math" xmlns="" val="1"/>
             </a:ext>
           </a:extLst>
         </p:spPr>
@@ -10121,7 +10082,7 @@
           </a:ln>
           <a:extLst>
             <a:ext uri="{C572A759-6A51-4108-AA02-DFA0A04FC94B}">
-              <ma14:wrappingTextBoxFlag xmlns="" xmlns:m="http://schemas.openxmlformats.org/officeDocument/2006/math" xmlns:a14="http://schemas.microsoft.com/office/drawing/2010/main" xmlns:ma14="http://schemas.microsoft.com/office/mac/drawingml/2011/main" val="1"/>
+              <ma14:wrappingTextBoxFlag xmlns:ma14="http://schemas.microsoft.com/office/mac/drawingml/2011/main" xmlns:a14="http://schemas.microsoft.com/office/drawing/2010/main" xmlns:m="http://schemas.openxmlformats.org/officeDocument/2006/math" xmlns="" val="1"/>
             </a:ext>
           </a:extLst>
         </p:spPr>
@@ -10169,7 +10130,7 @@
           </a:ln>
           <a:extLst>
             <a:ext uri="{C572A759-6A51-4108-AA02-DFA0A04FC94B}">
-              <ma14:wrappingTextBoxFlag xmlns="" xmlns:m="http://schemas.openxmlformats.org/officeDocument/2006/math" xmlns:a14="http://schemas.microsoft.com/office/drawing/2010/main" xmlns:ma14="http://schemas.microsoft.com/office/mac/drawingml/2011/main" val="1"/>
+              <ma14:wrappingTextBoxFlag xmlns:ma14="http://schemas.microsoft.com/office/mac/drawingml/2011/main" xmlns:a14="http://schemas.microsoft.com/office/drawing/2010/main" xmlns:m="http://schemas.openxmlformats.org/officeDocument/2006/math" xmlns="" val="1"/>
             </a:ext>
           </a:extLst>
         </p:spPr>
@@ -10216,7 +10177,7 @@
           </a:ln>
           <a:extLst>
             <a:ext uri="{C572A759-6A51-4108-AA02-DFA0A04FC94B}">
-              <ma14:wrappingTextBoxFlag xmlns="" xmlns:m="http://schemas.openxmlformats.org/officeDocument/2006/math" xmlns:a14="http://schemas.microsoft.com/office/drawing/2010/main" xmlns:ma14="http://schemas.microsoft.com/office/mac/drawingml/2011/main" val="1"/>
+              <ma14:wrappingTextBoxFlag xmlns:ma14="http://schemas.microsoft.com/office/mac/drawingml/2011/main" xmlns:a14="http://schemas.microsoft.com/office/drawing/2010/main" xmlns:m="http://schemas.openxmlformats.org/officeDocument/2006/math" xmlns="" val="1"/>
             </a:ext>
           </a:extLst>
         </p:spPr>
@@ -10263,7 +10224,7 @@
           </a:ln>
           <a:extLst>
             <a:ext uri="{C572A759-6A51-4108-AA02-DFA0A04FC94B}">
-              <ma14:wrappingTextBoxFlag xmlns="" xmlns:m="http://schemas.openxmlformats.org/officeDocument/2006/math" xmlns:a14="http://schemas.microsoft.com/office/drawing/2010/main" xmlns:ma14="http://schemas.microsoft.com/office/mac/drawingml/2011/main" val="1"/>
+              <ma14:wrappingTextBoxFlag xmlns:ma14="http://schemas.microsoft.com/office/mac/drawingml/2011/main" xmlns:a14="http://schemas.microsoft.com/office/drawing/2010/main" xmlns:m="http://schemas.openxmlformats.org/officeDocument/2006/math" xmlns="" val="1"/>
             </a:ext>
           </a:extLst>
         </p:spPr>
@@ -10339,7 +10300,7 @@
           </a:ln>
           <a:extLst>
             <a:ext uri="{C572A759-6A51-4108-AA02-DFA0A04FC94B}">
-              <ma14:wrappingTextBoxFlag xmlns="" xmlns:m="http://schemas.openxmlformats.org/officeDocument/2006/math" xmlns:a14="http://schemas.microsoft.com/office/drawing/2010/main" xmlns:ma14="http://schemas.microsoft.com/office/mac/drawingml/2011/main" val="1"/>
+              <ma14:wrappingTextBoxFlag xmlns:ma14="http://schemas.microsoft.com/office/mac/drawingml/2011/main" xmlns:a14="http://schemas.microsoft.com/office/drawing/2010/main" xmlns:m="http://schemas.openxmlformats.org/officeDocument/2006/math" xmlns="" val="1"/>
             </a:ext>
           </a:extLst>
         </p:spPr>
@@ -10386,7 +10347,7 @@
           </a:ln>
           <a:extLst>
             <a:ext uri="{C572A759-6A51-4108-AA02-DFA0A04FC94B}">
-              <ma14:wrappingTextBoxFlag xmlns="" xmlns:m="http://schemas.openxmlformats.org/officeDocument/2006/math" xmlns:a14="http://schemas.microsoft.com/office/drawing/2010/main" xmlns:ma14="http://schemas.microsoft.com/office/mac/drawingml/2011/main" val="1"/>
+              <ma14:wrappingTextBoxFlag xmlns:ma14="http://schemas.microsoft.com/office/mac/drawingml/2011/main" xmlns:a14="http://schemas.microsoft.com/office/drawing/2010/main" xmlns:m="http://schemas.openxmlformats.org/officeDocument/2006/math" xmlns="" val="1"/>
             </a:ext>
           </a:extLst>
         </p:spPr>
@@ -10475,7 +10436,7 @@
           </a:ln>
           <a:extLst>
             <a:ext uri="{C572A759-6A51-4108-AA02-DFA0A04FC94B}">
-              <ma14:wrappingTextBoxFlag xmlns="" xmlns:m="http://schemas.openxmlformats.org/officeDocument/2006/math" xmlns:a14="http://schemas.microsoft.com/office/drawing/2010/main" xmlns:ma14="http://schemas.microsoft.com/office/mac/drawingml/2011/main" val="1"/>
+              <ma14:wrappingTextBoxFlag xmlns:ma14="http://schemas.microsoft.com/office/mac/drawingml/2011/main" xmlns:a14="http://schemas.microsoft.com/office/drawing/2010/main" xmlns:m="http://schemas.openxmlformats.org/officeDocument/2006/math" xmlns="" val="1"/>
             </a:ext>
           </a:extLst>
         </p:spPr>
@@ -10558,7 +10519,7 @@
           </a:ln>
           <a:extLst>
             <a:ext uri="{C572A759-6A51-4108-AA02-DFA0A04FC94B}">
-              <ma14:wrappingTextBoxFlag xmlns="" xmlns:m="http://schemas.openxmlformats.org/officeDocument/2006/math" xmlns:a14="http://schemas.microsoft.com/office/drawing/2010/main" xmlns:ma14="http://schemas.microsoft.com/office/mac/drawingml/2011/main" val="1"/>
+              <ma14:wrappingTextBoxFlag xmlns:ma14="http://schemas.microsoft.com/office/mac/drawingml/2011/main" xmlns:a14="http://schemas.microsoft.com/office/drawing/2010/main" xmlns:m="http://schemas.openxmlformats.org/officeDocument/2006/math" xmlns="" val="1"/>
             </a:ext>
           </a:extLst>
         </p:spPr>
@@ -10626,7 +10587,7 @@
           </a:ln>
           <a:extLst>
             <a:ext uri="{C572A759-6A51-4108-AA02-DFA0A04FC94B}">
-              <ma14:wrappingTextBoxFlag xmlns="" xmlns:m="http://schemas.openxmlformats.org/officeDocument/2006/math" xmlns:a14="http://schemas.microsoft.com/office/drawing/2010/main" xmlns:ma14="http://schemas.microsoft.com/office/mac/drawingml/2011/main" val="1"/>
+              <ma14:wrappingTextBoxFlag xmlns:ma14="http://schemas.microsoft.com/office/mac/drawingml/2011/main" xmlns:a14="http://schemas.microsoft.com/office/drawing/2010/main" xmlns:m="http://schemas.openxmlformats.org/officeDocument/2006/math" xmlns="" val="1"/>
             </a:ext>
           </a:extLst>
         </p:spPr>
@@ -10673,7 +10634,7 @@
           </a:ln>
           <a:extLst>
             <a:ext uri="{C572A759-6A51-4108-AA02-DFA0A04FC94B}">
-              <ma14:wrappingTextBoxFlag xmlns="" xmlns:m="http://schemas.openxmlformats.org/officeDocument/2006/math" xmlns:a14="http://schemas.microsoft.com/office/drawing/2010/main" xmlns:ma14="http://schemas.microsoft.com/office/mac/drawingml/2011/main" val="1"/>
+              <ma14:wrappingTextBoxFlag xmlns:ma14="http://schemas.microsoft.com/office/mac/drawingml/2011/main" xmlns:a14="http://schemas.microsoft.com/office/drawing/2010/main" xmlns:m="http://schemas.openxmlformats.org/officeDocument/2006/math" xmlns="" val="1"/>
             </a:ext>
           </a:extLst>
         </p:spPr>
@@ -10746,7 +10707,7 @@
           </a:ln>
           <a:extLst>
             <a:ext uri="{C572A759-6A51-4108-AA02-DFA0A04FC94B}">
-              <ma14:wrappingTextBoxFlag xmlns="" xmlns:m="http://schemas.openxmlformats.org/officeDocument/2006/math" xmlns:a14="http://schemas.microsoft.com/office/drawing/2010/main" xmlns:ma14="http://schemas.microsoft.com/office/mac/drawingml/2011/main" val="1"/>
+              <ma14:wrappingTextBoxFlag xmlns:ma14="http://schemas.microsoft.com/office/mac/drawingml/2011/main" xmlns:a14="http://schemas.microsoft.com/office/drawing/2010/main" xmlns:m="http://schemas.openxmlformats.org/officeDocument/2006/math" xmlns="" val="1"/>
             </a:ext>
           </a:extLst>
         </p:spPr>
@@ -10818,7 +10779,7 @@
           </a:ln>
           <a:extLst>
             <a:ext uri="{C572A759-6A51-4108-AA02-DFA0A04FC94B}">
-              <ma14:wrappingTextBoxFlag xmlns="" xmlns:m="http://schemas.openxmlformats.org/officeDocument/2006/math" xmlns:a14="http://schemas.microsoft.com/office/drawing/2010/main" xmlns:ma14="http://schemas.microsoft.com/office/mac/drawingml/2011/main" val="1"/>
+              <ma14:wrappingTextBoxFlag xmlns:ma14="http://schemas.microsoft.com/office/mac/drawingml/2011/main" xmlns:a14="http://schemas.microsoft.com/office/drawing/2010/main" xmlns:m="http://schemas.openxmlformats.org/officeDocument/2006/math" xmlns="" val="1"/>
             </a:ext>
           </a:extLst>
         </p:spPr>
@@ -10862,7 +10823,7 @@
           </a:prstGeom>
           <a:extLst>
             <a:ext uri="{C572A759-6A51-4108-AA02-DFA0A04FC94B}">
-              <ma14:wrappingTextBoxFlag xmlns="" xmlns:m="http://schemas.openxmlformats.org/officeDocument/2006/math" xmlns:a14="http://schemas.microsoft.com/office/drawing/2010/main" xmlns:ma14="http://schemas.microsoft.com/office/mac/drawingml/2011/main" val="1"/>
+              <ma14:wrappingTextBoxFlag xmlns:ma14="http://schemas.microsoft.com/office/mac/drawingml/2011/main" xmlns:a14="http://schemas.microsoft.com/office/drawing/2010/main" xmlns:m="http://schemas.openxmlformats.org/officeDocument/2006/math" xmlns="" val="1"/>
             </a:ext>
           </a:extLst>
         </p:spPr>
@@ -10950,7 +10911,7 @@
           </a:ln>
           <a:extLst>
             <a:ext uri="{C572A759-6A51-4108-AA02-DFA0A04FC94B}">
-              <ma14:wrappingTextBoxFlag xmlns="" xmlns:m="http://schemas.openxmlformats.org/officeDocument/2006/math" xmlns:a14="http://schemas.microsoft.com/office/drawing/2010/main" xmlns:ma14="http://schemas.microsoft.com/office/mac/drawingml/2011/main" val="1"/>
+              <ma14:wrappingTextBoxFlag xmlns:ma14="http://schemas.microsoft.com/office/mac/drawingml/2011/main" xmlns:a14="http://schemas.microsoft.com/office/drawing/2010/main" xmlns:m="http://schemas.openxmlformats.org/officeDocument/2006/math" xmlns="" val="1"/>
             </a:ext>
           </a:extLst>
         </p:spPr>
@@ -11022,7 +10983,7 @@
           </a:ln>
           <a:extLst>
             <a:ext uri="{C572A759-6A51-4108-AA02-DFA0A04FC94B}">
-              <ma14:wrappingTextBoxFlag xmlns="" xmlns:m="http://schemas.openxmlformats.org/officeDocument/2006/math" xmlns:a14="http://schemas.microsoft.com/office/drawing/2010/main" xmlns:ma14="http://schemas.microsoft.com/office/mac/drawingml/2011/main" val="1"/>
+              <ma14:wrappingTextBoxFlag xmlns:ma14="http://schemas.microsoft.com/office/mac/drawingml/2011/main" xmlns:a14="http://schemas.microsoft.com/office/drawing/2010/main" xmlns:m="http://schemas.openxmlformats.org/officeDocument/2006/math" xmlns="" val="1"/>
             </a:ext>
           </a:extLst>
         </p:spPr>
@@ -11066,7 +11027,7 @@
           </a:prstGeom>
           <a:extLst>
             <a:ext uri="{C572A759-6A51-4108-AA02-DFA0A04FC94B}">
-              <ma14:wrappingTextBoxFlag xmlns="" xmlns:m="http://schemas.openxmlformats.org/officeDocument/2006/math" xmlns:a14="http://schemas.microsoft.com/office/drawing/2010/main" xmlns:ma14="http://schemas.microsoft.com/office/mac/drawingml/2011/main" val="1"/>
+              <ma14:wrappingTextBoxFlag xmlns:ma14="http://schemas.microsoft.com/office/mac/drawingml/2011/main" xmlns:a14="http://schemas.microsoft.com/office/drawing/2010/main" xmlns:m="http://schemas.openxmlformats.org/officeDocument/2006/math" xmlns="" val="1"/>
             </a:ext>
           </a:extLst>
         </p:spPr>
@@ -11143,7 +11104,7 @@
           </a:ln>
           <a:extLst>
             <a:ext uri="{C572A759-6A51-4108-AA02-DFA0A04FC94B}">
-              <ma14:wrappingTextBoxFlag xmlns="" xmlns:m="http://schemas.openxmlformats.org/officeDocument/2006/math" xmlns:a14="http://schemas.microsoft.com/office/drawing/2010/main" xmlns:ma14="http://schemas.microsoft.com/office/mac/drawingml/2011/main" val="1"/>
+              <ma14:wrappingTextBoxFlag xmlns:ma14="http://schemas.microsoft.com/office/mac/drawingml/2011/main" xmlns:a14="http://schemas.microsoft.com/office/drawing/2010/main" xmlns:m="http://schemas.openxmlformats.org/officeDocument/2006/math" xmlns="" val="1"/>
             </a:ext>
           </a:extLst>
         </p:spPr>
@@ -11233,7 +11194,7 @@
           </a:ln>
           <a:extLst>
             <a:ext uri="{C572A759-6A51-4108-AA02-DFA0A04FC94B}">
-              <ma14:wrappingTextBoxFlag xmlns="" xmlns:m="http://schemas.openxmlformats.org/officeDocument/2006/math" xmlns:a14="http://schemas.microsoft.com/office/drawing/2010/main" xmlns:ma14="http://schemas.microsoft.com/office/mac/drawingml/2011/main" val="1"/>
+              <ma14:wrappingTextBoxFlag xmlns:ma14="http://schemas.microsoft.com/office/mac/drawingml/2011/main" xmlns:a14="http://schemas.microsoft.com/office/drawing/2010/main" xmlns:m="http://schemas.openxmlformats.org/officeDocument/2006/math" xmlns="" val="1"/>
             </a:ext>
           </a:extLst>
         </p:spPr>
@@ -11280,7 +11241,7 @@
           </a:ln>
           <a:extLst>
             <a:ext uri="{C572A759-6A51-4108-AA02-DFA0A04FC94B}">
-              <ma14:wrappingTextBoxFlag xmlns="" xmlns:m="http://schemas.openxmlformats.org/officeDocument/2006/math" xmlns:a14="http://schemas.microsoft.com/office/drawing/2010/main" xmlns:ma14="http://schemas.microsoft.com/office/mac/drawingml/2011/main" val="1"/>
+              <ma14:wrappingTextBoxFlag xmlns:ma14="http://schemas.microsoft.com/office/mac/drawingml/2011/main" xmlns:a14="http://schemas.microsoft.com/office/drawing/2010/main" xmlns:m="http://schemas.openxmlformats.org/officeDocument/2006/math" xmlns="" val="1"/>
             </a:ext>
           </a:extLst>
         </p:spPr>
@@ -11327,7 +11288,7 @@
           </a:ln>
           <a:extLst>
             <a:ext uri="{C572A759-6A51-4108-AA02-DFA0A04FC94B}">
-              <ma14:wrappingTextBoxFlag xmlns="" xmlns:m="http://schemas.openxmlformats.org/officeDocument/2006/math" xmlns:a14="http://schemas.microsoft.com/office/drawing/2010/main" xmlns:ma14="http://schemas.microsoft.com/office/mac/drawingml/2011/main" val="1"/>
+              <ma14:wrappingTextBoxFlag xmlns:ma14="http://schemas.microsoft.com/office/mac/drawingml/2011/main" xmlns:a14="http://schemas.microsoft.com/office/drawing/2010/main" xmlns:m="http://schemas.openxmlformats.org/officeDocument/2006/math" xmlns="" val="1"/>
             </a:ext>
           </a:extLst>
         </p:spPr>
@@ -11474,7 +11435,7 @@
           </a:ln>
           <a:extLst>
             <a:ext uri="{C572A759-6A51-4108-AA02-DFA0A04FC94B}">
-              <ma14:wrappingTextBoxFlag xmlns="" xmlns:m="http://schemas.openxmlformats.org/officeDocument/2006/math" xmlns:a14="http://schemas.microsoft.com/office/drawing/2010/main" xmlns:ma14="http://schemas.microsoft.com/office/mac/drawingml/2011/main" val="1"/>
+              <ma14:wrappingTextBoxFlag xmlns:ma14="http://schemas.microsoft.com/office/mac/drawingml/2011/main" xmlns:a14="http://schemas.microsoft.com/office/drawing/2010/main" xmlns:m="http://schemas.openxmlformats.org/officeDocument/2006/math" xmlns="" val="1"/>
             </a:ext>
           </a:extLst>
         </p:spPr>
@@ -11521,7 +11482,7 @@
           </a:ln>
           <a:extLst>
             <a:ext uri="{C572A759-6A51-4108-AA02-DFA0A04FC94B}">
-              <ma14:wrappingTextBoxFlag xmlns="" xmlns:m="http://schemas.openxmlformats.org/officeDocument/2006/math" xmlns:a14="http://schemas.microsoft.com/office/drawing/2010/main" xmlns:ma14="http://schemas.microsoft.com/office/mac/drawingml/2011/main" val="1"/>
+              <ma14:wrappingTextBoxFlag xmlns:ma14="http://schemas.microsoft.com/office/mac/drawingml/2011/main" xmlns:a14="http://schemas.microsoft.com/office/drawing/2010/main" xmlns:m="http://schemas.openxmlformats.org/officeDocument/2006/math" xmlns="" val="1"/>
             </a:ext>
           </a:extLst>
         </p:spPr>
@@ -11568,7 +11529,7 @@
           </a:ln>
           <a:extLst>
             <a:ext uri="{C572A759-6A51-4108-AA02-DFA0A04FC94B}">
-              <ma14:wrappingTextBoxFlag xmlns="" xmlns:m="http://schemas.openxmlformats.org/officeDocument/2006/math" xmlns:a14="http://schemas.microsoft.com/office/drawing/2010/main" xmlns:ma14="http://schemas.microsoft.com/office/mac/drawingml/2011/main" val="1"/>
+              <ma14:wrappingTextBoxFlag xmlns:ma14="http://schemas.microsoft.com/office/mac/drawingml/2011/main" xmlns:a14="http://schemas.microsoft.com/office/drawing/2010/main" xmlns:m="http://schemas.openxmlformats.org/officeDocument/2006/math" xmlns="" val="1"/>
             </a:ext>
           </a:extLst>
         </p:spPr>
@@ -11715,7 +11676,7 @@
           </a:ln>
           <a:extLst>
             <a:ext uri="{C572A759-6A51-4108-AA02-DFA0A04FC94B}">
-              <ma14:wrappingTextBoxFlag xmlns="" xmlns:m="http://schemas.openxmlformats.org/officeDocument/2006/math" xmlns:a14="http://schemas.microsoft.com/office/drawing/2010/main" xmlns:ma14="http://schemas.microsoft.com/office/mac/drawingml/2011/main" val="1"/>
+              <ma14:wrappingTextBoxFlag xmlns:ma14="http://schemas.microsoft.com/office/mac/drawingml/2011/main" xmlns:a14="http://schemas.microsoft.com/office/drawing/2010/main" xmlns:m="http://schemas.openxmlformats.org/officeDocument/2006/math" xmlns="" val="1"/>
             </a:ext>
           </a:extLst>
         </p:spPr>
@@ -11762,7 +11723,7 @@
           </a:ln>
           <a:extLst>
             <a:ext uri="{C572A759-6A51-4108-AA02-DFA0A04FC94B}">
-              <ma14:wrappingTextBoxFlag xmlns="" xmlns:m="http://schemas.openxmlformats.org/officeDocument/2006/math" xmlns:a14="http://schemas.microsoft.com/office/drawing/2010/main" xmlns:ma14="http://schemas.microsoft.com/office/mac/drawingml/2011/main" val="1"/>
+              <ma14:wrappingTextBoxFlag xmlns:ma14="http://schemas.microsoft.com/office/mac/drawingml/2011/main" xmlns:a14="http://schemas.microsoft.com/office/drawing/2010/main" xmlns:m="http://schemas.openxmlformats.org/officeDocument/2006/math" xmlns="" val="1"/>
             </a:ext>
           </a:extLst>
         </p:spPr>
@@ -11809,7 +11770,7 @@
           </a:ln>
           <a:extLst>
             <a:ext uri="{C572A759-6A51-4108-AA02-DFA0A04FC94B}">
-              <ma14:wrappingTextBoxFlag xmlns="" xmlns:m="http://schemas.openxmlformats.org/officeDocument/2006/math" xmlns:a14="http://schemas.microsoft.com/office/drawing/2010/main" xmlns:ma14="http://schemas.microsoft.com/office/mac/drawingml/2011/main" val="1"/>
+              <ma14:wrappingTextBoxFlag xmlns:ma14="http://schemas.microsoft.com/office/mac/drawingml/2011/main" xmlns:a14="http://schemas.microsoft.com/office/drawing/2010/main" xmlns:m="http://schemas.openxmlformats.org/officeDocument/2006/math" xmlns="" val="1"/>
             </a:ext>
           </a:extLst>
         </p:spPr>
@@ -11956,7 +11917,7 @@
           </a:ln>
           <a:extLst>
             <a:ext uri="{C572A759-6A51-4108-AA02-DFA0A04FC94B}">
-              <ma14:wrappingTextBoxFlag xmlns="" xmlns:m="http://schemas.openxmlformats.org/officeDocument/2006/math" xmlns:a14="http://schemas.microsoft.com/office/drawing/2010/main" xmlns:ma14="http://schemas.microsoft.com/office/mac/drawingml/2011/main" val="1"/>
+              <ma14:wrappingTextBoxFlag xmlns:ma14="http://schemas.microsoft.com/office/mac/drawingml/2011/main" xmlns:a14="http://schemas.microsoft.com/office/drawing/2010/main" xmlns:m="http://schemas.openxmlformats.org/officeDocument/2006/math" xmlns="" val="1"/>
             </a:ext>
           </a:extLst>
         </p:spPr>
@@ -12003,7 +11964,7 @@
           </a:ln>
           <a:extLst>
             <a:ext uri="{C572A759-6A51-4108-AA02-DFA0A04FC94B}">
-              <ma14:wrappingTextBoxFlag xmlns="" xmlns:m="http://schemas.openxmlformats.org/officeDocument/2006/math" xmlns:a14="http://schemas.microsoft.com/office/drawing/2010/main" xmlns:ma14="http://schemas.microsoft.com/office/mac/drawingml/2011/main" val="1"/>
+              <ma14:wrappingTextBoxFlag xmlns:ma14="http://schemas.microsoft.com/office/mac/drawingml/2011/main" xmlns:a14="http://schemas.microsoft.com/office/drawing/2010/main" xmlns:m="http://schemas.openxmlformats.org/officeDocument/2006/math" xmlns="" val="1"/>
             </a:ext>
           </a:extLst>
         </p:spPr>
@@ -12050,7 +12011,7 @@
           </a:ln>
           <a:extLst>
             <a:ext uri="{C572A759-6A51-4108-AA02-DFA0A04FC94B}">
-              <ma14:wrappingTextBoxFlag xmlns="" xmlns:m="http://schemas.openxmlformats.org/officeDocument/2006/math" xmlns:a14="http://schemas.microsoft.com/office/drawing/2010/main" xmlns:ma14="http://schemas.microsoft.com/office/mac/drawingml/2011/main" val="1"/>
+              <ma14:wrappingTextBoxFlag xmlns:ma14="http://schemas.microsoft.com/office/mac/drawingml/2011/main" xmlns:a14="http://schemas.microsoft.com/office/drawing/2010/main" xmlns:m="http://schemas.openxmlformats.org/officeDocument/2006/math" xmlns="" val="1"/>
             </a:ext>
           </a:extLst>
         </p:spPr>
@@ -12118,7 +12079,7 @@
           </a:ln>
           <a:extLst>
             <a:ext uri="{C572A759-6A51-4108-AA02-DFA0A04FC94B}">
-              <ma14:wrappingTextBoxFlag xmlns="" xmlns:m="http://schemas.openxmlformats.org/officeDocument/2006/math" xmlns:a14="http://schemas.microsoft.com/office/drawing/2010/main" xmlns:ma14="http://schemas.microsoft.com/office/mac/drawingml/2011/main" val="1"/>
+              <ma14:wrappingTextBoxFlag xmlns:ma14="http://schemas.microsoft.com/office/mac/drawingml/2011/main" xmlns:a14="http://schemas.microsoft.com/office/drawing/2010/main" xmlns:m="http://schemas.openxmlformats.org/officeDocument/2006/math" xmlns="" val="1"/>
             </a:ext>
           </a:extLst>
         </p:spPr>
@@ -12165,7 +12126,7 @@
           </a:ln>
           <a:extLst>
             <a:ext uri="{C572A759-6A51-4108-AA02-DFA0A04FC94B}">
-              <ma14:wrappingTextBoxFlag xmlns="" xmlns:m="http://schemas.openxmlformats.org/officeDocument/2006/math" xmlns:a14="http://schemas.microsoft.com/office/drawing/2010/main" xmlns:ma14="http://schemas.microsoft.com/office/mac/drawingml/2011/main" val="1"/>
+              <ma14:wrappingTextBoxFlag xmlns:ma14="http://schemas.microsoft.com/office/mac/drawingml/2011/main" xmlns:a14="http://schemas.microsoft.com/office/drawing/2010/main" xmlns:m="http://schemas.openxmlformats.org/officeDocument/2006/math" xmlns="" val="1"/>
             </a:ext>
           </a:extLst>
         </p:spPr>
@@ -12302,7 +12263,7 @@
           </a:ln>
           <a:extLst>
             <a:ext uri="{C572A759-6A51-4108-AA02-DFA0A04FC94B}">
-              <ma14:wrappingTextBoxFlag xmlns="" xmlns:m="http://schemas.openxmlformats.org/officeDocument/2006/math" xmlns:a14="http://schemas.microsoft.com/office/drawing/2010/main" xmlns:ma14="http://schemas.microsoft.com/office/mac/drawingml/2011/main" val="1"/>
+              <ma14:wrappingTextBoxFlag xmlns:ma14="http://schemas.microsoft.com/office/mac/drawingml/2011/main" xmlns:a14="http://schemas.microsoft.com/office/drawing/2010/main" xmlns:m="http://schemas.openxmlformats.org/officeDocument/2006/math" xmlns="" val="1"/>
             </a:ext>
           </a:extLst>
         </p:spPr>
@@ -12349,7 +12310,7 @@
           </a:ln>
           <a:extLst>
             <a:ext uri="{C572A759-6A51-4108-AA02-DFA0A04FC94B}">
-              <ma14:wrappingTextBoxFlag xmlns="" xmlns:m="http://schemas.openxmlformats.org/officeDocument/2006/math" xmlns:a14="http://schemas.microsoft.com/office/drawing/2010/main" xmlns:ma14="http://schemas.microsoft.com/office/mac/drawingml/2011/main" val="1"/>
+              <ma14:wrappingTextBoxFlag xmlns:ma14="http://schemas.microsoft.com/office/mac/drawingml/2011/main" xmlns:a14="http://schemas.microsoft.com/office/drawing/2010/main" xmlns:m="http://schemas.openxmlformats.org/officeDocument/2006/math" xmlns="" val="1"/>
             </a:ext>
           </a:extLst>
         </p:spPr>
@@ -12396,7 +12357,7 @@
           </a:ln>
           <a:extLst>
             <a:ext uri="{C572A759-6A51-4108-AA02-DFA0A04FC94B}">
-              <ma14:wrappingTextBoxFlag xmlns="" xmlns:m="http://schemas.openxmlformats.org/officeDocument/2006/math" xmlns:a14="http://schemas.microsoft.com/office/drawing/2010/main" xmlns:ma14="http://schemas.microsoft.com/office/mac/drawingml/2011/main" val="1"/>
+              <ma14:wrappingTextBoxFlag xmlns:ma14="http://schemas.microsoft.com/office/mac/drawingml/2011/main" xmlns:a14="http://schemas.microsoft.com/office/drawing/2010/main" xmlns:m="http://schemas.openxmlformats.org/officeDocument/2006/math" xmlns="" val="1"/>
             </a:ext>
           </a:extLst>
         </p:spPr>
@@ -12443,7 +12404,7 @@
           </a:ln>
           <a:extLst>
             <a:ext uri="{C572A759-6A51-4108-AA02-DFA0A04FC94B}">
-              <ma14:wrappingTextBoxFlag xmlns="" xmlns:m="http://schemas.openxmlformats.org/officeDocument/2006/math" xmlns:a14="http://schemas.microsoft.com/office/drawing/2010/main" xmlns:ma14="http://schemas.microsoft.com/office/mac/drawingml/2011/main" val="1"/>
+              <ma14:wrappingTextBoxFlag xmlns:ma14="http://schemas.microsoft.com/office/mac/drawingml/2011/main" xmlns:a14="http://schemas.microsoft.com/office/drawing/2010/main" xmlns:m="http://schemas.openxmlformats.org/officeDocument/2006/math" xmlns="" val="1"/>
             </a:ext>
           </a:extLst>
         </p:spPr>
@@ -12490,7 +12451,7 @@
           </a:ln>
           <a:extLst>
             <a:ext uri="{C572A759-6A51-4108-AA02-DFA0A04FC94B}">
-              <ma14:wrappingTextBoxFlag xmlns="" xmlns:m="http://schemas.openxmlformats.org/officeDocument/2006/math" xmlns:a14="http://schemas.microsoft.com/office/drawing/2010/main" xmlns:ma14="http://schemas.microsoft.com/office/mac/drawingml/2011/main" val="1"/>
+              <ma14:wrappingTextBoxFlag xmlns:ma14="http://schemas.microsoft.com/office/mac/drawingml/2011/main" xmlns:a14="http://schemas.microsoft.com/office/drawing/2010/main" xmlns:m="http://schemas.openxmlformats.org/officeDocument/2006/math" xmlns="" val="1"/>
             </a:ext>
           </a:extLst>
         </p:spPr>
@@ -12673,7 +12634,7 @@
           </a:ln>
           <a:extLst>
             <a:ext uri="{C572A759-6A51-4108-AA02-DFA0A04FC94B}">
-              <ma14:wrappingTextBoxFlag xmlns="" xmlns:m="http://schemas.openxmlformats.org/officeDocument/2006/math" xmlns:a14="http://schemas.microsoft.com/office/drawing/2010/main" xmlns:ma14="http://schemas.microsoft.com/office/mac/drawingml/2011/main" val="1"/>
+              <ma14:wrappingTextBoxFlag xmlns:ma14="http://schemas.microsoft.com/office/mac/drawingml/2011/main" xmlns:a14="http://schemas.microsoft.com/office/drawing/2010/main" xmlns:m="http://schemas.openxmlformats.org/officeDocument/2006/math" xmlns="" val="1"/>
             </a:ext>
           </a:extLst>
         </p:spPr>
@@ -12720,7 +12681,7 @@
           </a:ln>
           <a:extLst>
             <a:ext uri="{C572A759-6A51-4108-AA02-DFA0A04FC94B}">
-              <ma14:wrappingTextBoxFlag xmlns="" xmlns:m="http://schemas.openxmlformats.org/officeDocument/2006/math" xmlns:a14="http://schemas.microsoft.com/office/drawing/2010/main" xmlns:ma14="http://schemas.microsoft.com/office/mac/drawingml/2011/main" val="1"/>
+              <ma14:wrappingTextBoxFlag xmlns:ma14="http://schemas.microsoft.com/office/mac/drawingml/2011/main" xmlns:a14="http://schemas.microsoft.com/office/drawing/2010/main" xmlns:m="http://schemas.openxmlformats.org/officeDocument/2006/math" xmlns="" val="1"/>
             </a:ext>
           </a:extLst>
         </p:spPr>
@@ -12767,7 +12728,7 @@
           </a:ln>
           <a:extLst>
             <a:ext uri="{C572A759-6A51-4108-AA02-DFA0A04FC94B}">
-              <ma14:wrappingTextBoxFlag xmlns="" xmlns:m="http://schemas.openxmlformats.org/officeDocument/2006/math" xmlns:a14="http://schemas.microsoft.com/office/drawing/2010/main" xmlns:ma14="http://schemas.microsoft.com/office/mac/drawingml/2011/main" val="1"/>
+              <ma14:wrappingTextBoxFlag xmlns:ma14="http://schemas.microsoft.com/office/mac/drawingml/2011/main" xmlns:a14="http://schemas.microsoft.com/office/drawing/2010/main" xmlns:m="http://schemas.openxmlformats.org/officeDocument/2006/math" xmlns="" val="1"/>
             </a:ext>
           </a:extLst>
         </p:spPr>
@@ -12814,7 +12775,7 @@
           </a:ln>
           <a:extLst>
             <a:ext uri="{C572A759-6A51-4108-AA02-DFA0A04FC94B}">
-              <ma14:wrappingTextBoxFlag xmlns="" xmlns:m="http://schemas.openxmlformats.org/officeDocument/2006/math" xmlns:a14="http://schemas.microsoft.com/office/drawing/2010/main" xmlns:ma14="http://schemas.microsoft.com/office/mac/drawingml/2011/main" val="1"/>
+              <ma14:wrappingTextBoxFlag xmlns:ma14="http://schemas.microsoft.com/office/mac/drawingml/2011/main" xmlns:a14="http://schemas.microsoft.com/office/drawing/2010/main" xmlns:m="http://schemas.openxmlformats.org/officeDocument/2006/math" xmlns="" val="1"/>
             </a:ext>
           </a:extLst>
         </p:spPr>
@@ -12861,7 +12822,7 @@
           </a:ln>
           <a:extLst>
             <a:ext uri="{C572A759-6A51-4108-AA02-DFA0A04FC94B}">
-              <ma14:wrappingTextBoxFlag xmlns="" xmlns:m="http://schemas.openxmlformats.org/officeDocument/2006/math" xmlns:a14="http://schemas.microsoft.com/office/drawing/2010/main" xmlns:ma14="http://schemas.microsoft.com/office/mac/drawingml/2011/main" val="1"/>
+              <ma14:wrappingTextBoxFlag xmlns:ma14="http://schemas.microsoft.com/office/mac/drawingml/2011/main" xmlns:a14="http://schemas.microsoft.com/office/drawing/2010/main" xmlns:m="http://schemas.openxmlformats.org/officeDocument/2006/math" xmlns="" val="1"/>
             </a:ext>
           </a:extLst>
         </p:spPr>
@@ -13044,7 +13005,7 @@
           </a:ln>
           <a:extLst>
             <a:ext uri="{C572A759-6A51-4108-AA02-DFA0A04FC94B}">
-              <ma14:wrappingTextBoxFlag xmlns="" xmlns:m="http://schemas.openxmlformats.org/officeDocument/2006/math" xmlns:a14="http://schemas.microsoft.com/office/drawing/2010/main" xmlns:ma14="http://schemas.microsoft.com/office/mac/drawingml/2011/main" val="1"/>
+              <ma14:wrappingTextBoxFlag xmlns:ma14="http://schemas.microsoft.com/office/mac/drawingml/2011/main" xmlns:a14="http://schemas.microsoft.com/office/drawing/2010/main" xmlns:m="http://schemas.openxmlformats.org/officeDocument/2006/math" xmlns="" val="1"/>
             </a:ext>
           </a:extLst>
         </p:spPr>
@@ -13091,7 +13052,7 @@
           </a:ln>
           <a:extLst>
             <a:ext uri="{C572A759-6A51-4108-AA02-DFA0A04FC94B}">
-              <ma14:wrappingTextBoxFlag xmlns="" xmlns:m="http://schemas.openxmlformats.org/officeDocument/2006/math" xmlns:a14="http://schemas.microsoft.com/office/drawing/2010/main" xmlns:ma14="http://schemas.microsoft.com/office/mac/drawingml/2011/main" val="1"/>
+              <ma14:wrappingTextBoxFlag xmlns:ma14="http://schemas.microsoft.com/office/mac/drawingml/2011/main" xmlns:a14="http://schemas.microsoft.com/office/drawing/2010/main" xmlns:m="http://schemas.openxmlformats.org/officeDocument/2006/math" xmlns="" val="1"/>
             </a:ext>
           </a:extLst>
         </p:spPr>
@@ -13138,7 +13099,7 @@
           </a:ln>
           <a:extLst>
             <a:ext uri="{C572A759-6A51-4108-AA02-DFA0A04FC94B}">
-              <ma14:wrappingTextBoxFlag xmlns="" xmlns:m="http://schemas.openxmlformats.org/officeDocument/2006/math" xmlns:a14="http://schemas.microsoft.com/office/drawing/2010/main" xmlns:ma14="http://schemas.microsoft.com/office/mac/drawingml/2011/main" val="1"/>
+              <ma14:wrappingTextBoxFlag xmlns:ma14="http://schemas.microsoft.com/office/mac/drawingml/2011/main" xmlns:a14="http://schemas.microsoft.com/office/drawing/2010/main" xmlns:m="http://schemas.openxmlformats.org/officeDocument/2006/math" xmlns="" val="1"/>
             </a:ext>
           </a:extLst>
         </p:spPr>
@@ -13185,7 +13146,7 @@
           </a:ln>
           <a:extLst>
             <a:ext uri="{C572A759-6A51-4108-AA02-DFA0A04FC94B}">
-              <ma14:wrappingTextBoxFlag xmlns="" xmlns:m="http://schemas.openxmlformats.org/officeDocument/2006/math" xmlns:a14="http://schemas.microsoft.com/office/drawing/2010/main" xmlns:ma14="http://schemas.microsoft.com/office/mac/drawingml/2011/main" val="1"/>
+              <ma14:wrappingTextBoxFlag xmlns:ma14="http://schemas.microsoft.com/office/mac/drawingml/2011/main" xmlns:a14="http://schemas.microsoft.com/office/drawing/2010/main" xmlns:m="http://schemas.openxmlformats.org/officeDocument/2006/math" xmlns="" val="1"/>
             </a:ext>
           </a:extLst>
         </p:spPr>
@@ -13232,7 +13193,7 @@
           </a:ln>
           <a:extLst>
             <a:ext uri="{C572A759-6A51-4108-AA02-DFA0A04FC94B}">
-              <ma14:wrappingTextBoxFlag xmlns="" xmlns:m="http://schemas.openxmlformats.org/officeDocument/2006/math" xmlns:a14="http://schemas.microsoft.com/office/drawing/2010/main" xmlns:ma14="http://schemas.microsoft.com/office/mac/drawingml/2011/main" val="1"/>
+              <ma14:wrappingTextBoxFlag xmlns:ma14="http://schemas.microsoft.com/office/mac/drawingml/2011/main" xmlns:a14="http://schemas.microsoft.com/office/drawing/2010/main" xmlns:m="http://schemas.openxmlformats.org/officeDocument/2006/math" xmlns="" val="1"/>
             </a:ext>
           </a:extLst>
         </p:spPr>
@@ -13279,7 +13240,7 @@
           </a:ln>
           <a:extLst>
             <a:ext uri="{C572A759-6A51-4108-AA02-DFA0A04FC94B}">
-              <ma14:wrappingTextBoxFlag xmlns="" xmlns:m="http://schemas.openxmlformats.org/officeDocument/2006/math" xmlns:a14="http://schemas.microsoft.com/office/drawing/2010/main" xmlns:ma14="http://schemas.microsoft.com/office/mac/drawingml/2011/main" val="1"/>
+              <ma14:wrappingTextBoxFlag xmlns:ma14="http://schemas.microsoft.com/office/mac/drawingml/2011/main" xmlns:a14="http://schemas.microsoft.com/office/drawing/2010/main" xmlns:m="http://schemas.openxmlformats.org/officeDocument/2006/math" xmlns="" val="1"/>
             </a:ext>
           </a:extLst>
         </p:spPr>
@@ -13405,7 +13366,7 @@
           </a:ln>
           <a:extLst>
             <a:ext uri="{C572A759-6A51-4108-AA02-DFA0A04FC94B}">
-              <ma14:wrappingTextBoxFlag xmlns="" xmlns:m="http://schemas.openxmlformats.org/officeDocument/2006/math" xmlns:a14="http://schemas.microsoft.com/office/drawing/2010/main" xmlns:ma14="http://schemas.microsoft.com/office/mac/drawingml/2011/main" val="1"/>
+              <ma14:wrappingTextBoxFlag xmlns:ma14="http://schemas.microsoft.com/office/mac/drawingml/2011/main" xmlns:a14="http://schemas.microsoft.com/office/drawing/2010/main" xmlns:m="http://schemas.openxmlformats.org/officeDocument/2006/math" xmlns="" val="1"/>
             </a:ext>
           </a:extLst>
         </p:spPr>
@@ -13452,7 +13413,7 @@
           </a:ln>
           <a:extLst>
             <a:ext uri="{C572A759-6A51-4108-AA02-DFA0A04FC94B}">
-              <ma14:wrappingTextBoxFlag xmlns="" xmlns:m="http://schemas.openxmlformats.org/officeDocument/2006/math" xmlns:a14="http://schemas.microsoft.com/office/drawing/2010/main" xmlns:ma14="http://schemas.microsoft.com/office/mac/drawingml/2011/main" val="1"/>
+              <ma14:wrappingTextBoxFlag xmlns:ma14="http://schemas.microsoft.com/office/mac/drawingml/2011/main" xmlns:a14="http://schemas.microsoft.com/office/drawing/2010/main" xmlns:m="http://schemas.openxmlformats.org/officeDocument/2006/math" xmlns="" val="1"/>
             </a:ext>
           </a:extLst>
         </p:spPr>
@@ -13542,7 +13503,7 @@
           </a:ln>
           <a:extLst>
             <a:ext uri="{C572A759-6A51-4108-AA02-DFA0A04FC94B}">
-              <ma14:wrappingTextBoxFlag xmlns="" xmlns:m="http://schemas.openxmlformats.org/officeDocument/2006/math" xmlns:a14="http://schemas.microsoft.com/office/drawing/2010/main" xmlns:ma14="http://schemas.microsoft.com/office/mac/drawingml/2011/main" val="1"/>
+              <ma14:wrappingTextBoxFlag xmlns:ma14="http://schemas.microsoft.com/office/mac/drawingml/2011/main" xmlns:a14="http://schemas.microsoft.com/office/drawing/2010/main" xmlns:m="http://schemas.openxmlformats.org/officeDocument/2006/math" xmlns="" val="1"/>
             </a:ext>
           </a:extLst>
         </p:spPr>
@@ -13589,7 +13550,7 @@
           </a:ln>
           <a:extLst>
             <a:ext uri="{C572A759-6A51-4108-AA02-DFA0A04FC94B}">
-              <ma14:wrappingTextBoxFlag xmlns="" xmlns:m="http://schemas.openxmlformats.org/officeDocument/2006/math" xmlns:a14="http://schemas.microsoft.com/office/drawing/2010/main" xmlns:ma14="http://schemas.microsoft.com/office/mac/drawingml/2011/main" val="1"/>
+              <ma14:wrappingTextBoxFlag xmlns:ma14="http://schemas.microsoft.com/office/mac/drawingml/2011/main" xmlns:a14="http://schemas.microsoft.com/office/drawing/2010/main" xmlns:m="http://schemas.openxmlformats.org/officeDocument/2006/math" xmlns="" val="1"/>
             </a:ext>
           </a:extLst>
         </p:spPr>
@@ -13679,7 +13640,7 @@
           </a:ln>
           <a:extLst>
             <a:ext uri="{C572A759-6A51-4108-AA02-DFA0A04FC94B}">
-              <ma14:wrappingTextBoxFlag xmlns="" xmlns:m="http://schemas.openxmlformats.org/officeDocument/2006/math" xmlns:a14="http://schemas.microsoft.com/office/drawing/2010/main" xmlns:ma14="http://schemas.microsoft.com/office/mac/drawingml/2011/main" val="1"/>
+              <ma14:wrappingTextBoxFlag xmlns:ma14="http://schemas.microsoft.com/office/mac/drawingml/2011/main" xmlns:a14="http://schemas.microsoft.com/office/drawing/2010/main" xmlns:m="http://schemas.openxmlformats.org/officeDocument/2006/math" xmlns="" val="1"/>
             </a:ext>
           </a:extLst>
         </p:spPr>
@@ -13726,7 +13687,7 @@
           </a:ln>
           <a:extLst>
             <a:ext uri="{C572A759-6A51-4108-AA02-DFA0A04FC94B}">
-              <ma14:wrappingTextBoxFlag xmlns="" xmlns:m="http://schemas.openxmlformats.org/officeDocument/2006/math" xmlns:a14="http://schemas.microsoft.com/office/drawing/2010/main" xmlns:ma14="http://schemas.microsoft.com/office/mac/drawingml/2011/main" val="1"/>
+              <ma14:wrappingTextBoxFlag xmlns:ma14="http://schemas.microsoft.com/office/mac/drawingml/2011/main" xmlns:a14="http://schemas.microsoft.com/office/drawing/2010/main" xmlns:m="http://schemas.openxmlformats.org/officeDocument/2006/math" xmlns="" val="1"/>
             </a:ext>
           </a:extLst>
         </p:spPr>
@@ -13845,7 +13806,7 @@
           </a:ln>
           <a:extLst>
             <a:ext uri="{C572A759-6A51-4108-AA02-DFA0A04FC94B}">
-              <ma14:wrappingTextBoxFlag xmlns="" xmlns:m="http://schemas.openxmlformats.org/officeDocument/2006/math" xmlns:a14="http://schemas.microsoft.com/office/drawing/2010/main" xmlns:ma14="http://schemas.microsoft.com/office/mac/drawingml/2011/main" val="1"/>
+              <ma14:wrappingTextBoxFlag xmlns:ma14="http://schemas.microsoft.com/office/mac/drawingml/2011/main" xmlns:a14="http://schemas.microsoft.com/office/drawing/2010/main" xmlns:m="http://schemas.openxmlformats.org/officeDocument/2006/math" xmlns="" val="1"/>
             </a:ext>
           </a:extLst>
         </p:spPr>
@@ -13935,7 +13896,7 @@
           </a:ln>
           <a:extLst>
             <a:ext uri="{C572A759-6A51-4108-AA02-DFA0A04FC94B}">
-              <ma14:wrappingTextBoxFlag xmlns="" xmlns:m="http://schemas.openxmlformats.org/officeDocument/2006/math" xmlns:a14="http://schemas.microsoft.com/office/drawing/2010/main" xmlns:ma14="http://schemas.microsoft.com/office/mac/drawingml/2011/main" val="1"/>
+              <ma14:wrappingTextBoxFlag xmlns:ma14="http://schemas.microsoft.com/office/mac/drawingml/2011/main" xmlns:a14="http://schemas.microsoft.com/office/drawing/2010/main" xmlns:m="http://schemas.openxmlformats.org/officeDocument/2006/math" xmlns="" val="1"/>
             </a:ext>
           </a:extLst>
         </p:spPr>
@@ -14025,7 +13986,7 @@
           </a:ln>
           <a:extLst>
             <a:ext uri="{C572A759-6A51-4108-AA02-DFA0A04FC94B}">
-              <ma14:wrappingTextBoxFlag xmlns="" xmlns:m="http://schemas.openxmlformats.org/officeDocument/2006/math" xmlns:a14="http://schemas.microsoft.com/office/drawing/2010/main" xmlns:ma14="http://schemas.microsoft.com/office/mac/drawingml/2011/main" val="1"/>
+              <ma14:wrappingTextBoxFlag xmlns:ma14="http://schemas.microsoft.com/office/mac/drawingml/2011/main" xmlns:a14="http://schemas.microsoft.com/office/drawing/2010/main" xmlns:m="http://schemas.openxmlformats.org/officeDocument/2006/math" xmlns="" val="1"/>
             </a:ext>
           </a:extLst>
         </p:spPr>
@@ -14115,7 +14076,7 @@
           </a:ln>
           <a:extLst>
             <a:ext uri="{C572A759-6A51-4108-AA02-DFA0A04FC94B}">
-              <ma14:wrappingTextBoxFlag xmlns="" xmlns:m="http://schemas.openxmlformats.org/officeDocument/2006/math" xmlns:a14="http://schemas.microsoft.com/office/drawing/2010/main" xmlns:ma14="http://schemas.microsoft.com/office/mac/drawingml/2011/main" val="1"/>
+              <ma14:wrappingTextBoxFlag xmlns:ma14="http://schemas.microsoft.com/office/mac/drawingml/2011/main" xmlns:a14="http://schemas.microsoft.com/office/drawing/2010/main" xmlns:m="http://schemas.openxmlformats.org/officeDocument/2006/math" xmlns="" val="1"/>
             </a:ext>
           </a:extLst>
         </p:spPr>
@@ -14205,7 +14166,7 @@
           </a:ln>
           <a:extLst>
             <a:ext uri="{C572A759-6A51-4108-AA02-DFA0A04FC94B}">
-              <ma14:wrappingTextBoxFlag xmlns="" xmlns:m="http://schemas.openxmlformats.org/officeDocument/2006/math" xmlns:a14="http://schemas.microsoft.com/office/drawing/2010/main" xmlns:ma14="http://schemas.microsoft.com/office/mac/drawingml/2011/main" val="1"/>
+              <ma14:wrappingTextBoxFlag xmlns:ma14="http://schemas.microsoft.com/office/mac/drawingml/2011/main" xmlns:a14="http://schemas.microsoft.com/office/drawing/2010/main" xmlns:m="http://schemas.openxmlformats.org/officeDocument/2006/math" xmlns="" val="1"/>
             </a:ext>
           </a:extLst>
         </p:spPr>
@@ -14295,7 +14256,7 @@
           </a:ln>
           <a:extLst>
             <a:ext uri="{C572A759-6A51-4108-AA02-DFA0A04FC94B}">
-              <ma14:wrappingTextBoxFlag xmlns="" xmlns:m="http://schemas.openxmlformats.org/officeDocument/2006/math" xmlns:a14="http://schemas.microsoft.com/office/drawing/2010/main" xmlns:ma14="http://schemas.microsoft.com/office/mac/drawingml/2011/main" val="1"/>
+              <ma14:wrappingTextBoxFlag xmlns:ma14="http://schemas.microsoft.com/office/mac/drawingml/2011/main" xmlns:a14="http://schemas.microsoft.com/office/drawing/2010/main" xmlns:m="http://schemas.openxmlformats.org/officeDocument/2006/math" xmlns="" val="1"/>
             </a:ext>
           </a:extLst>
         </p:spPr>
@@ -14385,7 +14346,7 @@
           </a:ln>
           <a:extLst>
             <a:ext uri="{C572A759-6A51-4108-AA02-DFA0A04FC94B}">
-              <ma14:wrappingTextBoxFlag xmlns="" xmlns:m="http://schemas.openxmlformats.org/officeDocument/2006/math" xmlns:a14="http://schemas.microsoft.com/office/drawing/2010/main" xmlns:ma14="http://schemas.microsoft.com/office/mac/drawingml/2011/main" val="1"/>
+              <ma14:wrappingTextBoxFlag xmlns:ma14="http://schemas.microsoft.com/office/mac/drawingml/2011/main" xmlns:a14="http://schemas.microsoft.com/office/drawing/2010/main" xmlns:m="http://schemas.openxmlformats.org/officeDocument/2006/math" xmlns="" val="1"/>
             </a:ext>
           </a:extLst>
         </p:spPr>
@@ -14475,7 +14436,7 @@
           </a:ln>
           <a:extLst>
             <a:ext uri="{C572A759-6A51-4108-AA02-DFA0A04FC94B}">
-              <ma14:wrappingTextBoxFlag xmlns="" xmlns:m="http://schemas.openxmlformats.org/officeDocument/2006/math" xmlns:a14="http://schemas.microsoft.com/office/drawing/2010/main" xmlns:ma14="http://schemas.microsoft.com/office/mac/drawingml/2011/main" val="1"/>
+              <ma14:wrappingTextBoxFlag xmlns:ma14="http://schemas.microsoft.com/office/mac/drawingml/2011/main" xmlns:a14="http://schemas.microsoft.com/office/drawing/2010/main" xmlns:m="http://schemas.openxmlformats.org/officeDocument/2006/math" xmlns="" val="1"/>
             </a:ext>
           </a:extLst>
         </p:spPr>
@@ -14565,7 +14526,7 @@
           </a:ln>
           <a:extLst>
             <a:ext uri="{C572A759-6A51-4108-AA02-DFA0A04FC94B}">
-              <ma14:wrappingTextBoxFlag xmlns="" xmlns:m="http://schemas.openxmlformats.org/officeDocument/2006/math" xmlns:a14="http://schemas.microsoft.com/office/drawing/2010/main" xmlns:ma14="http://schemas.microsoft.com/office/mac/drawingml/2011/main" val="1"/>
+              <ma14:wrappingTextBoxFlag xmlns:ma14="http://schemas.microsoft.com/office/mac/drawingml/2011/main" xmlns:a14="http://schemas.microsoft.com/office/drawing/2010/main" xmlns:m="http://schemas.openxmlformats.org/officeDocument/2006/math" xmlns="" val="1"/>
             </a:ext>
           </a:extLst>
         </p:spPr>
@@ -14612,7 +14573,7 @@
           </a:ln>
           <a:extLst>
             <a:ext uri="{C572A759-6A51-4108-AA02-DFA0A04FC94B}">
-              <ma14:wrappingTextBoxFlag xmlns="" xmlns:m="http://schemas.openxmlformats.org/officeDocument/2006/math" xmlns:a14="http://schemas.microsoft.com/office/drawing/2010/main" xmlns:ma14="http://schemas.microsoft.com/office/mac/drawingml/2011/main" val="1"/>
+              <ma14:wrappingTextBoxFlag xmlns:ma14="http://schemas.microsoft.com/office/mac/drawingml/2011/main" xmlns:a14="http://schemas.microsoft.com/office/drawing/2010/main" xmlns:m="http://schemas.openxmlformats.org/officeDocument/2006/math" xmlns="" val="1"/>
             </a:ext>
           </a:extLst>
         </p:spPr>
@@ -14706,7 +14667,7 @@
           </a:ln>
           <a:extLst>
             <a:ext uri="{C572A759-6A51-4108-AA02-DFA0A04FC94B}">
-              <ma14:wrappingTextBoxFlag xmlns="" xmlns:m="http://schemas.openxmlformats.org/officeDocument/2006/math" xmlns:a14="http://schemas.microsoft.com/office/drawing/2010/main" xmlns:ma14="http://schemas.microsoft.com/office/mac/drawingml/2011/main" val="1"/>
+              <ma14:wrappingTextBoxFlag xmlns:ma14="http://schemas.microsoft.com/office/mac/drawingml/2011/main" xmlns:a14="http://schemas.microsoft.com/office/drawing/2010/main" xmlns:m="http://schemas.openxmlformats.org/officeDocument/2006/math" xmlns="" val="1"/>
             </a:ext>
           </a:extLst>
         </p:spPr>
@@ -14798,7 +14759,7 @@
           </a:ln>
           <a:extLst>
             <a:ext uri="{C572A759-6A51-4108-AA02-DFA0A04FC94B}">
-              <ma14:wrappingTextBoxFlag xmlns="" xmlns:m="http://schemas.openxmlformats.org/officeDocument/2006/math" xmlns:a14="http://schemas.microsoft.com/office/drawing/2010/main" xmlns:ma14="http://schemas.microsoft.com/office/mac/drawingml/2011/main" val="1"/>
+              <ma14:wrappingTextBoxFlag xmlns:ma14="http://schemas.microsoft.com/office/mac/drawingml/2011/main" xmlns:a14="http://schemas.microsoft.com/office/drawing/2010/main" xmlns:m="http://schemas.openxmlformats.org/officeDocument/2006/math" xmlns="" val="1"/>
             </a:ext>
           </a:extLst>
         </p:spPr>
@@ -14941,7 +14902,7 @@
           </a:ln>
           <a:extLst>
             <a:ext uri="{C572A759-6A51-4108-AA02-DFA0A04FC94B}">
-              <ma14:wrappingTextBoxFlag xmlns="" xmlns:m="http://schemas.openxmlformats.org/officeDocument/2006/math" xmlns:a14="http://schemas.microsoft.com/office/drawing/2010/main" xmlns:ma14="http://schemas.microsoft.com/office/mac/drawingml/2011/main" val="1"/>
+              <ma14:wrappingTextBoxFlag xmlns:ma14="http://schemas.microsoft.com/office/mac/drawingml/2011/main" xmlns:a14="http://schemas.microsoft.com/office/drawing/2010/main" xmlns:m="http://schemas.openxmlformats.org/officeDocument/2006/math" xmlns="" val="1"/>
             </a:ext>
           </a:extLst>
         </p:spPr>
@@ -14988,7 +14949,7 @@
           </a:ln>
           <a:extLst>
             <a:ext uri="{C572A759-6A51-4108-AA02-DFA0A04FC94B}">
-              <ma14:wrappingTextBoxFlag xmlns="" xmlns:m="http://schemas.openxmlformats.org/officeDocument/2006/math" xmlns:a14="http://schemas.microsoft.com/office/drawing/2010/main" xmlns:ma14="http://schemas.microsoft.com/office/mac/drawingml/2011/main" val="1"/>
+              <ma14:wrappingTextBoxFlag xmlns:ma14="http://schemas.microsoft.com/office/mac/drawingml/2011/main" xmlns:a14="http://schemas.microsoft.com/office/drawing/2010/main" xmlns:m="http://schemas.openxmlformats.org/officeDocument/2006/math" xmlns="" val="1"/>
             </a:ext>
           </a:extLst>
         </p:spPr>
@@ -15110,7 +15071,7 @@
           </a:ln>
           <a:extLst>
             <a:ext uri="{C572A759-6A51-4108-AA02-DFA0A04FC94B}">
-              <ma14:wrappingTextBoxFlag xmlns="" xmlns:m="http://schemas.openxmlformats.org/officeDocument/2006/math" xmlns:a14="http://schemas.microsoft.com/office/drawing/2010/main" xmlns:ma14="http://schemas.microsoft.com/office/mac/drawingml/2011/main" val="1"/>
+              <ma14:wrappingTextBoxFlag xmlns:ma14="http://schemas.microsoft.com/office/mac/drawingml/2011/main" xmlns:a14="http://schemas.microsoft.com/office/drawing/2010/main" xmlns:m="http://schemas.openxmlformats.org/officeDocument/2006/math" xmlns="" val="1"/>
             </a:ext>
           </a:extLst>
         </p:spPr>
@@ -15157,7 +15118,7 @@
           </a:ln>
           <a:extLst>
             <a:ext uri="{C572A759-6A51-4108-AA02-DFA0A04FC94B}">
-              <ma14:wrappingTextBoxFlag xmlns="" xmlns:m="http://schemas.openxmlformats.org/officeDocument/2006/math" xmlns:a14="http://schemas.microsoft.com/office/drawing/2010/main" xmlns:ma14="http://schemas.microsoft.com/office/mac/drawingml/2011/main" val="1"/>
+              <ma14:wrappingTextBoxFlag xmlns:ma14="http://schemas.microsoft.com/office/mac/drawingml/2011/main" xmlns:a14="http://schemas.microsoft.com/office/drawing/2010/main" xmlns:m="http://schemas.openxmlformats.org/officeDocument/2006/math" xmlns="" val="1"/>
             </a:ext>
           </a:extLst>
         </p:spPr>
@@ -15245,7 +15206,7 @@
           </a:ln>
           <a:extLst>
             <a:ext uri="{C572A759-6A51-4108-AA02-DFA0A04FC94B}">
-              <ma14:wrappingTextBoxFlag xmlns="" xmlns:m="http://schemas.openxmlformats.org/officeDocument/2006/math" xmlns:a14="http://schemas.microsoft.com/office/drawing/2010/main" xmlns:ma14="http://schemas.microsoft.com/office/mac/drawingml/2011/main" val="1"/>
+              <ma14:wrappingTextBoxFlag xmlns:ma14="http://schemas.microsoft.com/office/mac/drawingml/2011/main" xmlns:a14="http://schemas.microsoft.com/office/drawing/2010/main" xmlns:m="http://schemas.openxmlformats.org/officeDocument/2006/math" xmlns="" val="1"/>
             </a:ext>
           </a:extLst>
         </p:spPr>
@@ -15331,7 +15292,7 @@
           </a:ln>
           <a:extLst>
             <a:ext uri="{C572A759-6A51-4108-AA02-DFA0A04FC94B}">
-              <ma14:wrappingTextBoxFlag xmlns="" xmlns:m="http://schemas.openxmlformats.org/officeDocument/2006/math" xmlns:a14="http://schemas.microsoft.com/office/drawing/2010/main" xmlns:ma14="http://schemas.microsoft.com/office/mac/drawingml/2011/main" val="1"/>
+              <ma14:wrappingTextBoxFlag xmlns:ma14="http://schemas.microsoft.com/office/mac/drawingml/2011/main" xmlns:a14="http://schemas.microsoft.com/office/drawing/2010/main" xmlns:m="http://schemas.openxmlformats.org/officeDocument/2006/math" xmlns="" val="1"/>
             </a:ext>
           </a:extLst>
         </p:spPr>
@@ -15378,7 +15339,7 @@
           </a:ln>
           <a:extLst>
             <a:ext uri="{C572A759-6A51-4108-AA02-DFA0A04FC94B}">
-              <ma14:wrappingTextBoxFlag xmlns="" xmlns:m="http://schemas.openxmlformats.org/officeDocument/2006/math" xmlns:a14="http://schemas.microsoft.com/office/drawing/2010/main" xmlns:ma14="http://schemas.microsoft.com/office/mac/drawingml/2011/main" val="1"/>
+              <ma14:wrappingTextBoxFlag xmlns:ma14="http://schemas.microsoft.com/office/mac/drawingml/2011/main" xmlns:a14="http://schemas.microsoft.com/office/drawing/2010/main" xmlns:m="http://schemas.openxmlformats.org/officeDocument/2006/math" xmlns="" val="1"/>
             </a:ext>
           </a:extLst>
         </p:spPr>
@@ -15466,7 +15427,7 @@
           </a:ln>
           <a:extLst>
             <a:ext uri="{C572A759-6A51-4108-AA02-DFA0A04FC94B}">
-              <ma14:wrappingTextBoxFlag xmlns="" xmlns:m="http://schemas.openxmlformats.org/officeDocument/2006/math" xmlns:a14="http://schemas.microsoft.com/office/drawing/2010/main" xmlns:ma14="http://schemas.microsoft.com/office/mac/drawingml/2011/main" val="1"/>
+              <ma14:wrappingTextBoxFlag xmlns:ma14="http://schemas.microsoft.com/office/mac/drawingml/2011/main" xmlns:a14="http://schemas.microsoft.com/office/drawing/2010/main" xmlns:m="http://schemas.openxmlformats.org/officeDocument/2006/math" xmlns="" val="1"/>
             </a:ext>
           </a:extLst>
         </p:spPr>
@@ -15552,7 +15513,7 @@
           </a:ln>
           <a:extLst>
             <a:ext uri="{C572A759-6A51-4108-AA02-DFA0A04FC94B}">
-              <ma14:wrappingTextBoxFlag xmlns="" xmlns:m="http://schemas.openxmlformats.org/officeDocument/2006/math" xmlns:a14="http://schemas.microsoft.com/office/drawing/2010/main" xmlns:ma14="http://schemas.microsoft.com/office/mac/drawingml/2011/main" val="1"/>
+              <ma14:wrappingTextBoxFlag xmlns:ma14="http://schemas.microsoft.com/office/mac/drawingml/2011/main" xmlns:a14="http://schemas.microsoft.com/office/drawing/2010/main" xmlns:m="http://schemas.openxmlformats.org/officeDocument/2006/math" xmlns="" val="1"/>
             </a:ext>
           </a:extLst>
         </p:spPr>
@@ -15599,7 +15560,7 @@
           </a:ln>
           <a:extLst>
             <a:ext uri="{C572A759-6A51-4108-AA02-DFA0A04FC94B}">
-              <ma14:wrappingTextBoxFlag xmlns="" xmlns:m="http://schemas.openxmlformats.org/officeDocument/2006/math" xmlns:a14="http://schemas.microsoft.com/office/drawing/2010/main" xmlns:ma14="http://schemas.microsoft.com/office/mac/drawingml/2011/main" val="1"/>
+              <ma14:wrappingTextBoxFlag xmlns:ma14="http://schemas.microsoft.com/office/mac/drawingml/2011/main" xmlns:a14="http://schemas.microsoft.com/office/drawing/2010/main" xmlns:m="http://schemas.openxmlformats.org/officeDocument/2006/math" xmlns="" val="1"/>
             </a:ext>
           </a:extLst>
         </p:spPr>
@@ -15687,7 +15648,7 @@
           </a:ln>
           <a:extLst>
             <a:ext uri="{C572A759-6A51-4108-AA02-DFA0A04FC94B}">
-              <ma14:wrappingTextBoxFlag xmlns="" xmlns:m="http://schemas.openxmlformats.org/officeDocument/2006/math" xmlns:a14="http://schemas.microsoft.com/office/drawing/2010/main" xmlns:ma14="http://schemas.microsoft.com/office/mac/drawingml/2011/main" val="1"/>
+              <ma14:wrappingTextBoxFlag xmlns:ma14="http://schemas.microsoft.com/office/mac/drawingml/2011/main" xmlns:a14="http://schemas.microsoft.com/office/drawing/2010/main" xmlns:m="http://schemas.openxmlformats.org/officeDocument/2006/math" xmlns="" val="1"/>
             </a:ext>
           </a:extLst>
         </p:spPr>
@@ -15773,7 +15734,7 @@
           </a:ln>
           <a:extLst>
             <a:ext uri="{C572A759-6A51-4108-AA02-DFA0A04FC94B}">
-              <ma14:wrappingTextBoxFlag xmlns="" xmlns:m="http://schemas.openxmlformats.org/officeDocument/2006/math" xmlns:a14="http://schemas.microsoft.com/office/drawing/2010/main" xmlns:ma14="http://schemas.microsoft.com/office/mac/drawingml/2011/main" val="1"/>
+              <ma14:wrappingTextBoxFlag xmlns:ma14="http://schemas.microsoft.com/office/mac/drawingml/2011/main" xmlns:a14="http://schemas.microsoft.com/office/drawing/2010/main" xmlns:m="http://schemas.openxmlformats.org/officeDocument/2006/math" xmlns="" val="1"/>
             </a:ext>
           </a:extLst>
         </p:spPr>
@@ -15820,7 +15781,7 @@
           </a:ln>
           <a:extLst>
             <a:ext uri="{C572A759-6A51-4108-AA02-DFA0A04FC94B}">
-              <ma14:wrappingTextBoxFlag xmlns="" xmlns:m="http://schemas.openxmlformats.org/officeDocument/2006/math" xmlns:a14="http://schemas.microsoft.com/office/drawing/2010/main" xmlns:ma14="http://schemas.microsoft.com/office/mac/drawingml/2011/main" val="1"/>
+              <ma14:wrappingTextBoxFlag xmlns:ma14="http://schemas.microsoft.com/office/mac/drawingml/2011/main" xmlns:a14="http://schemas.microsoft.com/office/drawing/2010/main" xmlns:m="http://schemas.openxmlformats.org/officeDocument/2006/math" xmlns="" val="1"/>
             </a:ext>
           </a:extLst>
         </p:spPr>
@@ -15908,7 +15869,7 @@
           </a:ln>
           <a:extLst>
             <a:ext uri="{C572A759-6A51-4108-AA02-DFA0A04FC94B}">
-              <ma14:wrappingTextBoxFlag xmlns="" xmlns:m="http://schemas.openxmlformats.org/officeDocument/2006/math" xmlns:a14="http://schemas.microsoft.com/office/drawing/2010/main" xmlns:ma14="http://schemas.microsoft.com/office/mac/drawingml/2011/main" val="1"/>
+              <ma14:wrappingTextBoxFlag xmlns:ma14="http://schemas.microsoft.com/office/mac/drawingml/2011/main" xmlns:a14="http://schemas.microsoft.com/office/drawing/2010/main" xmlns:m="http://schemas.openxmlformats.org/officeDocument/2006/math" xmlns="" val="1"/>
             </a:ext>
           </a:extLst>
         </p:spPr>
@@ -15994,7 +15955,7 @@
           </a:ln>
           <a:extLst>
             <a:ext uri="{C572A759-6A51-4108-AA02-DFA0A04FC94B}">
-              <ma14:wrappingTextBoxFlag xmlns="" xmlns:m="http://schemas.openxmlformats.org/officeDocument/2006/math" xmlns:a14="http://schemas.microsoft.com/office/drawing/2010/main" xmlns:ma14="http://schemas.microsoft.com/office/mac/drawingml/2011/main" val="1"/>
+              <ma14:wrappingTextBoxFlag xmlns:ma14="http://schemas.microsoft.com/office/mac/drawingml/2011/main" xmlns:a14="http://schemas.microsoft.com/office/drawing/2010/main" xmlns:m="http://schemas.openxmlformats.org/officeDocument/2006/math" xmlns="" val="1"/>
             </a:ext>
           </a:extLst>
         </p:spPr>
@@ -16041,7 +16002,7 @@
           </a:ln>
           <a:extLst>
             <a:ext uri="{C572A759-6A51-4108-AA02-DFA0A04FC94B}">
-              <ma14:wrappingTextBoxFlag xmlns="" xmlns:m="http://schemas.openxmlformats.org/officeDocument/2006/math" xmlns:a14="http://schemas.microsoft.com/office/drawing/2010/main" xmlns:ma14="http://schemas.microsoft.com/office/mac/drawingml/2011/main" val="1"/>
+              <ma14:wrappingTextBoxFlag xmlns:ma14="http://schemas.microsoft.com/office/mac/drawingml/2011/main" xmlns:a14="http://schemas.microsoft.com/office/drawing/2010/main" xmlns:m="http://schemas.openxmlformats.org/officeDocument/2006/math" xmlns="" val="1"/>
             </a:ext>
           </a:extLst>
         </p:spPr>
@@ -16129,7 +16090,7 @@
           </a:ln>
           <a:extLst>
             <a:ext uri="{C572A759-6A51-4108-AA02-DFA0A04FC94B}">
-              <ma14:wrappingTextBoxFlag xmlns="" xmlns:m="http://schemas.openxmlformats.org/officeDocument/2006/math" xmlns:a14="http://schemas.microsoft.com/office/drawing/2010/main" xmlns:ma14="http://schemas.microsoft.com/office/mac/drawingml/2011/main" val="1"/>
+              <ma14:wrappingTextBoxFlag xmlns:ma14="http://schemas.microsoft.com/office/mac/drawingml/2011/main" xmlns:a14="http://schemas.microsoft.com/office/drawing/2010/main" xmlns:m="http://schemas.openxmlformats.org/officeDocument/2006/math" xmlns="" val="1"/>
             </a:ext>
           </a:extLst>
         </p:spPr>
@@ -16157,217 +16118,131 @@
           </a:p>
         </p:txBody>
       </p:sp>
-      <p:grpSp>
-        <p:nvGrpSpPr>
-          <p:cNvPr id="2" name="Rounded Rectangular Callout 2">
+      <p:sp>
+        <p:nvSpPr>
+          <p:cNvPr id="7" name="Rounded Rectangular Callout 6">
             <a:extLst>
               <a:ext uri="{FF2B5EF4-FFF2-40B4-BE49-F238E27FC236}">
-                <a16:creationId xmlns:a16="http://schemas.microsoft.com/office/drawing/2014/main" id="{782BF49A-61E0-5C84-03FE-BB71BFB7A7AF}"/>
+                <a16:creationId xmlns:a16="http://schemas.microsoft.com/office/drawing/2014/main" id="{4378BD3E-6499-BB09-078D-241B2BDA06F3}"/>
               </a:ext>
             </a:extLst>
           </p:cNvPr>
-          <p:cNvGrpSpPr/>
-          <p:nvPr/>
-        </p:nvGrpSpPr>
-        <p:grpSpPr>
-          <a:xfrm>
-            <a:off x="8733972" y="2257299"/>
-            <a:ext cx="3264216" cy="1930907"/>
-            <a:chOff x="0" y="1"/>
-            <a:chExt cx="3842659" cy="2626617"/>
-          </a:xfrm>
-        </p:grpSpPr>
-        <p:sp>
-          <p:nvSpPr>
-            <p:cNvPr id="3" name="Shape">
-              <a:extLst>
-                <a:ext uri="{FF2B5EF4-FFF2-40B4-BE49-F238E27FC236}">
-                  <a16:creationId xmlns:a16="http://schemas.microsoft.com/office/drawing/2014/main" id="{0A52A9AD-2B6E-D248-0BA4-451EC362BB35}"/>
-                </a:ext>
-              </a:extLst>
-            </p:cNvPr>
-            <p:cNvSpPr/>
-            <p:nvPr/>
-          </p:nvSpPr>
-          <p:spPr>
-            <a:xfrm>
-              <a:off x="0" y="1"/>
-              <a:ext cx="3842659" cy="2626617"/>
-            </a:xfrm>
-            <a:custGeom>
-              <a:avLst/>
-              <a:gdLst/>
-              <a:ahLst/>
-              <a:cxnLst>
-                <a:cxn ang="0">
-                  <a:pos x="wd2" y="hd2"/>
-                </a:cxn>
-                <a:cxn ang="5400000">
-                  <a:pos x="wd2" y="hd2"/>
-                </a:cxn>
-                <a:cxn ang="10800000">
-                  <a:pos x="wd2" y="hd2"/>
-                </a:cxn>
-                <a:cxn ang="16200000">
-                  <a:pos x="wd2" y="hd2"/>
-                </a:cxn>
-              </a:cxnLst>
-              <a:rect l="0" t="0" r="r" b="b"/>
-              <a:pathLst>
-                <a:path w="21600" h="21600" extrusionOk="0">
-                  <a:moveTo>
-                    <a:pt x="0" y="3179"/>
-                  </a:moveTo>
-                  <a:cubicBezTo>
-                    <a:pt x="0" y="1423"/>
-                    <a:pt x="973" y="0"/>
-                    <a:pt x="2173" y="0"/>
-                  </a:cubicBezTo>
-                  <a:lnTo>
-                    <a:pt x="3600" y="0"/>
-                  </a:lnTo>
-                  <a:lnTo>
-                    <a:pt x="19427" y="0"/>
-                  </a:lnTo>
-                  <a:cubicBezTo>
-                    <a:pt x="20627" y="0"/>
-                    <a:pt x="21600" y="1423"/>
-                    <a:pt x="21600" y="3179"/>
-                  </a:cubicBezTo>
-                  <a:lnTo>
-                    <a:pt x="21600" y="15892"/>
-                  </a:lnTo>
-                  <a:cubicBezTo>
-                    <a:pt x="21600" y="17648"/>
-                    <a:pt x="20627" y="19071"/>
-                    <a:pt x="19427" y="19071"/>
-                  </a:cubicBezTo>
-                  <a:lnTo>
-                    <a:pt x="9000" y="19071"/>
-                  </a:lnTo>
-                  <a:lnTo>
-                    <a:pt x="3952" y="21600"/>
-                  </a:lnTo>
-                  <a:lnTo>
-                    <a:pt x="3600" y="19071"/>
-                  </a:lnTo>
-                  <a:lnTo>
-                    <a:pt x="2173" y="19071"/>
-                  </a:lnTo>
-                  <a:cubicBezTo>
-                    <a:pt x="973" y="19071"/>
-                    <a:pt x="0" y="17648"/>
-                    <a:pt x="0" y="15892"/>
-                  </a:cubicBezTo>
-                  <a:lnTo>
-                    <a:pt x="0" y="15892"/>
-                  </a:lnTo>
-                  <a:lnTo>
-                    <a:pt x="0" y="11125"/>
-                  </a:lnTo>
-                  <a:close/>
-                </a:path>
-              </a:pathLst>
-            </a:custGeom>
-            <a:solidFill>
-              <a:srgbClr val="FFF2CC"/>
-            </a:solidFill>
-            <a:ln w="12700" cap="flat">
+          <p:cNvSpPr/>
+          <p:nvPr/>
+        </p:nvSpPr>
+        <p:spPr>
+          <a:xfrm>
+            <a:off x="7231924" y="5586474"/>
+            <a:ext cx="4476345" cy="852046"/>
+          </a:xfrm>
+          <a:prstGeom prst="wedgeRoundRectCallout">
+            <a:avLst>
+              <a:gd name="adj1" fmla="val -78033"/>
+              <a:gd name="adj2" fmla="val -44928"/>
+              <a:gd name="adj3" fmla="val 16667"/>
+            </a:avLst>
+          </a:prstGeom>
+          <a:solidFill>
+            <a:schemeClr val="accent4">
+              <a:lumMod val="20000"/>
+              <a:lumOff val="80000"/>
+            </a:schemeClr>
+          </a:solidFill>
+        </p:spPr>
+        <p:style>
+          <a:lnRef idx="2">
+            <a:schemeClr val="accent1">
+              <a:shade val="15000"/>
+            </a:schemeClr>
+          </a:lnRef>
+          <a:fillRef idx="1">
+            <a:schemeClr val="accent1"/>
+          </a:fillRef>
+          <a:effectRef idx="0">
+            <a:schemeClr val="accent1"/>
+          </a:effectRef>
+          <a:fontRef idx="minor">
+            <a:schemeClr val="lt1"/>
+          </a:fontRef>
+        </p:style>
+        <p:txBody>
+          <a:bodyPr rtlCol="0" anchor="ctr"/>
+          <a:lstStyle/>
+          <a:p>
+            <a:r>
+              <a:rPr lang="en-GB" dirty="0">
+                <a:solidFill>
+                  <a:schemeClr val="tx1"/>
+                </a:solidFill>
+              </a:rPr>
+              <a:t>Fehler </a:t>
+            </a:r>
+            <a:r>
+              <a:rPr lang="en-GB" dirty="0" err="1">
+                <a:solidFill>
+                  <a:schemeClr val="tx1"/>
+                </a:solidFill>
+              </a:rPr>
+              <a:t>unterschiedlich</a:t>
+            </a:r>
+            <a:r>
+              <a:rPr lang="en-GB" dirty="0">
+                <a:solidFill>
+                  <a:schemeClr val="tx1"/>
+                </a:solidFill>
+              </a:rPr>
+              <a:t> </a:t>
+            </a:r>
+          </a:p>
+          <a:p>
+            <a:r>
+              <a:rPr lang="en-GB" dirty="0" err="1">
+                <a:solidFill>
+                  <a:schemeClr val="tx1"/>
+                </a:solidFill>
+              </a:rPr>
+              <a:t>Verteilt</a:t>
+            </a:r>
+            <a:r>
+              <a:rPr lang="en-GB" dirty="0">
+                <a:solidFill>
+                  <a:schemeClr val="tx1"/>
+                </a:solidFill>
+              </a:rPr>
+              <a:t>, nicht </a:t>
+            </a:r>
+            <a:r>
+              <a:rPr lang="en-GB" dirty="0" err="1">
+                <a:solidFill>
+                  <a:schemeClr val="tx1"/>
+                </a:solidFill>
+              </a:rPr>
+              <a:t>systematisch</a:t>
+            </a:r>
+            <a:r>
+              <a:rPr lang="en-GB" dirty="0">
+                <a:solidFill>
+                  <a:schemeClr val="tx1"/>
+                </a:solidFill>
+              </a:rPr>
+              <a:t> </a:t>
+            </a:r>
+            <a:r>
+              <a:rPr lang="en-GB" dirty="0" err="1">
+                <a:solidFill>
+                  <a:schemeClr val="tx1"/>
+                </a:solidFill>
+              </a:rPr>
+              <a:t>gleich</a:t>
+            </a:r>
+            <a:endParaRPr lang="en-GB" dirty="0">
               <a:solidFill>
-                <a:srgbClr val="1D3053"/>
+                <a:schemeClr val="tx1"/>
               </a:solidFill>
-              <a:prstDash val="solid"/>
-              <a:miter lim="800000"/>
-            </a:ln>
-            <a:effectLst/>
-          </p:spPr>
-          <p:txBody>
-            <a:bodyPr wrap="square" lIns="45719" tIns="45719" rIns="45719" bIns="45719" numCol="1" anchor="ctr">
-              <a:noAutofit/>
-            </a:bodyPr>
-            <a:lstStyle/>
-            <a:p>
-              <a:endParaRPr dirty="0"/>
-            </a:p>
-          </p:txBody>
-        </p:sp>
-        <p:sp>
-          <p:nvSpPr>
-            <p:cNvPr id="4" name="Xgboost fast überall am besten…">
-              <a:extLst>
-                <a:ext uri="{FF2B5EF4-FFF2-40B4-BE49-F238E27FC236}">
-                  <a16:creationId xmlns:a16="http://schemas.microsoft.com/office/drawing/2014/main" id="{0E297A7E-C994-3372-EE13-C42989729AF4}"/>
-                </a:ext>
-              </a:extLst>
-            </p:cNvPr>
-            <p:cNvSpPr txBox="1"/>
-            <p:nvPr/>
-          </p:nvSpPr>
-          <p:spPr>
-            <a:xfrm>
-              <a:off x="165278" y="531528"/>
-              <a:ext cx="3512105" cy="1256005"/>
-            </a:xfrm>
-            <a:prstGeom prst="rect">
-              <a:avLst/>
-            </a:prstGeom>
-            <a:noFill/>
-            <a:ln w="12700" cap="flat">
-              <a:noFill/>
-              <a:miter lim="400000"/>
-            </a:ln>
-            <a:effectLst/>
-            <a:extLst>
-              <a:ext uri="{C572A759-6A51-4108-AA02-DFA0A04FC94B}">
-                <ma14:wrappingTextBoxFlag xmlns="" xmlns:m="http://schemas.openxmlformats.org/officeDocument/2006/math" xmlns:a14="http://schemas.microsoft.com/office/drawing/2010/main" xmlns:ma14="http://schemas.microsoft.com/office/mac/drawingml/2011/main" val="1"/>
-              </a:ext>
-            </a:extLst>
-          </p:spPr>
-          <p:txBody>
-            <a:bodyPr wrap="square" lIns="45719" tIns="45719" rIns="45719" bIns="45719" numCol="1" anchor="ctr">
-              <a:spAutoFit/>
-            </a:bodyPr>
-            <a:lstStyle/>
-            <a:p>
-              <a:r>
-                <a:rPr lang="en-GB" dirty="0"/>
-                <a:t>Fehler </a:t>
-              </a:r>
-              <a:r>
-                <a:rPr lang="en-GB" dirty="0" err="1"/>
-                <a:t>unterschiedlich</a:t>
-              </a:r>
-              <a:r>
-                <a:rPr lang="en-GB" dirty="0"/>
-                <a:t> </a:t>
-              </a:r>
-            </a:p>
-            <a:p>
-              <a:r>
-                <a:rPr lang="en-GB" dirty="0" err="1"/>
-                <a:t>verteilt</a:t>
-              </a:r>
-              <a:r>
-                <a:rPr lang="en-GB" dirty="0"/>
-                <a:t> nicht </a:t>
-              </a:r>
-              <a:r>
-                <a:rPr lang="en-GB" dirty="0" err="1"/>
-                <a:t>systematisch</a:t>
-              </a:r>
-              <a:r>
-                <a:rPr lang="en-GB" dirty="0"/>
-                <a:t> </a:t>
-              </a:r>
-              <a:r>
-                <a:rPr lang="en-GB" dirty="0" err="1"/>
-                <a:t>gleich</a:t>
-              </a:r>
-              <a:endParaRPr dirty="0"/>
-            </a:p>
-          </p:txBody>
-        </p:sp>
-      </p:grpSp>
+            </a:endParaRPr>
+          </a:p>
+        </p:txBody>
+      </p:sp>
     </p:spTree>
   </p:cSld>
   <p:clrMapOvr>
@@ -16413,7 +16288,7 @@
           </a:ln>
           <a:extLst>
             <a:ext uri="{C572A759-6A51-4108-AA02-DFA0A04FC94B}">
-              <ma14:wrappingTextBoxFlag xmlns="" xmlns:m="http://schemas.openxmlformats.org/officeDocument/2006/math" xmlns:a14="http://schemas.microsoft.com/office/drawing/2010/main" xmlns:ma14="http://schemas.microsoft.com/office/mac/drawingml/2011/main" val="1"/>
+              <ma14:wrappingTextBoxFlag xmlns:ma14="http://schemas.microsoft.com/office/mac/drawingml/2011/main" xmlns:a14="http://schemas.microsoft.com/office/drawing/2010/main" xmlns:m="http://schemas.openxmlformats.org/officeDocument/2006/math" xmlns="" val="1"/>
             </a:ext>
           </a:extLst>
         </p:spPr>
@@ -16485,7 +16360,7 @@
           </a:ln>
           <a:extLst>
             <a:ext uri="{C572A759-6A51-4108-AA02-DFA0A04FC94B}">
-              <ma14:wrappingTextBoxFlag xmlns="" xmlns:m="http://schemas.openxmlformats.org/officeDocument/2006/math" xmlns:a14="http://schemas.microsoft.com/office/drawing/2010/main" xmlns:ma14="http://schemas.microsoft.com/office/mac/drawingml/2011/main" val="1"/>
+              <ma14:wrappingTextBoxFlag xmlns:ma14="http://schemas.microsoft.com/office/mac/drawingml/2011/main" xmlns:a14="http://schemas.microsoft.com/office/drawing/2010/main" xmlns:m="http://schemas.openxmlformats.org/officeDocument/2006/math" xmlns="" val="1"/>
             </a:ext>
           </a:extLst>
         </p:spPr>
@@ -16529,7 +16404,7 @@
           </a:prstGeom>
           <a:extLst>
             <a:ext uri="{C572A759-6A51-4108-AA02-DFA0A04FC94B}">
-              <ma14:wrappingTextBoxFlag xmlns="" xmlns:m="http://schemas.openxmlformats.org/officeDocument/2006/math" xmlns:a14="http://schemas.microsoft.com/office/drawing/2010/main" xmlns:ma14="http://schemas.microsoft.com/office/mac/drawingml/2011/main" val="1"/>
+              <ma14:wrappingTextBoxFlag xmlns:ma14="http://schemas.microsoft.com/office/mac/drawingml/2011/main" xmlns:a14="http://schemas.microsoft.com/office/drawing/2010/main" xmlns:m="http://schemas.openxmlformats.org/officeDocument/2006/math" xmlns="" val="1"/>
             </a:ext>
           </a:extLst>
         </p:spPr>
@@ -16572,197 +16447,285 @@
           </a:ln>
         </p:spPr>
       </p:pic>
-      <p:grpSp>
-        <p:nvGrpSpPr>
-          <p:cNvPr id="290" name="Rounded Rectangular Callout 2"/>
-          <p:cNvGrpSpPr/>
-          <p:nvPr/>
-        </p:nvGrpSpPr>
-        <p:grpSpPr>
-          <a:xfrm>
-            <a:off x="7777842" y="2115692"/>
-            <a:ext cx="3842659" cy="2626616"/>
-            <a:chOff x="0" y="0"/>
-            <a:chExt cx="3842658" cy="2626615"/>
-          </a:xfrm>
-        </p:grpSpPr>
-        <p:sp>
-          <p:nvSpPr>
-            <p:cNvPr id="288" name="Shape"/>
-            <p:cNvSpPr/>
-            <p:nvPr/>
-          </p:nvSpPr>
-          <p:spPr>
-            <a:xfrm>
-              <a:off x="0" y="0"/>
-              <a:ext cx="3842659" cy="2626616"/>
-            </a:xfrm>
-            <a:custGeom>
-              <a:avLst/>
-              <a:gdLst/>
-              <a:ahLst/>
-              <a:cxnLst>
-                <a:cxn ang="0">
-                  <a:pos x="wd2" y="hd2"/>
-                </a:cxn>
-                <a:cxn ang="5400000">
-                  <a:pos x="wd2" y="hd2"/>
-                </a:cxn>
-                <a:cxn ang="10800000">
-                  <a:pos x="wd2" y="hd2"/>
-                </a:cxn>
-                <a:cxn ang="16200000">
-                  <a:pos x="wd2" y="hd2"/>
-                </a:cxn>
-              </a:cxnLst>
-              <a:rect l="0" t="0" r="r" b="b"/>
-              <a:pathLst>
-                <a:path w="21600" h="21600" extrusionOk="0">
-                  <a:moveTo>
-                    <a:pt x="0" y="3179"/>
-                  </a:moveTo>
-                  <a:cubicBezTo>
-                    <a:pt x="0" y="1423"/>
-                    <a:pt x="973" y="0"/>
-                    <a:pt x="2173" y="0"/>
-                  </a:cubicBezTo>
-                  <a:lnTo>
-                    <a:pt x="3600" y="0"/>
-                  </a:lnTo>
-                  <a:lnTo>
-                    <a:pt x="19427" y="0"/>
-                  </a:lnTo>
-                  <a:cubicBezTo>
-                    <a:pt x="20627" y="0"/>
-                    <a:pt x="21600" y="1423"/>
-                    <a:pt x="21600" y="3179"/>
-                  </a:cubicBezTo>
-                  <a:lnTo>
-                    <a:pt x="21600" y="15892"/>
-                  </a:lnTo>
-                  <a:cubicBezTo>
-                    <a:pt x="21600" y="17648"/>
-                    <a:pt x="20627" y="19071"/>
-                    <a:pt x="19427" y="19071"/>
-                  </a:cubicBezTo>
-                  <a:lnTo>
-                    <a:pt x="9000" y="19071"/>
-                  </a:lnTo>
-                  <a:lnTo>
-                    <a:pt x="3952" y="21600"/>
-                  </a:lnTo>
-                  <a:lnTo>
-                    <a:pt x="3600" y="19071"/>
-                  </a:lnTo>
-                  <a:lnTo>
-                    <a:pt x="2173" y="19071"/>
-                  </a:lnTo>
-                  <a:cubicBezTo>
-                    <a:pt x="973" y="19071"/>
-                    <a:pt x="0" y="17648"/>
-                    <a:pt x="0" y="15892"/>
-                  </a:cubicBezTo>
-                  <a:lnTo>
-                    <a:pt x="0" y="15892"/>
-                  </a:lnTo>
-                  <a:lnTo>
-                    <a:pt x="0" y="11125"/>
-                  </a:lnTo>
-                  <a:close/>
-                </a:path>
-              </a:pathLst>
-            </a:custGeom>
-            <a:solidFill>
-              <a:srgbClr val="FFF2CC"/>
-            </a:solidFill>
-            <a:ln w="12700" cap="flat">
-              <a:solidFill>
-                <a:srgbClr val="1D3053"/>
-              </a:solidFill>
-              <a:prstDash val="solid"/>
-              <a:miter lim="800000"/>
-            </a:ln>
-            <a:effectLst/>
-          </p:spPr>
-          <p:txBody>
-            <a:bodyPr wrap="square" lIns="45719" tIns="45719" rIns="45719" bIns="45719" numCol="1" anchor="ctr">
-              <a:noAutofit/>
-            </a:bodyPr>
-            <a:lstStyle/>
-            <a:p>
-              <a:endParaRPr/>
-            </a:p>
-          </p:txBody>
-        </p:sp>
-        <p:sp>
-          <p:nvSpPr>
-            <p:cNvPr id="289" name="Xgboost fast überall am besten…"/>
-            <p:cNvSpPr txBox="1"/>
-            <p:nvPr/>
-          </p:nvSpPr>
-          <p:spPr>
-            <a:xfrm>
-              <a:off x="165277" y="116686"/>
-              <a:ext cx="3512105" cy="2085689"/>
-            </a:xfrm>
-            <a:prstGeom prst="rect">
-              <a:avLst/>
-            </a:prstGeom>
-            <a:noFill/>
-            <a:ln w="12700" cap="flat">
-              <a:noFill/>
-              <a:miter lim="400000"/>
-            </a:ln>
-            <a:effectLst/>
+      <p:sp>
+        <p:nvSpPr>
+          <p:cNvPr id="2" name="Rounded Rectangular Callout 1">
             <a:extLst>
-              <a:ext uri="{C572A759-6A51-4108-AA02-DFA0A04FC94B}">
-                <ma14:wrappingTextBoxFlag xmlns="" xmlns:m="http://schemas.openxmlformats.org/officeDocument/2006/math" xmlns:a14="http://schemas.microsoft.com/office/drawing/2010/main" xmlns:ma14="http://schemas.microsoft.com/office/mac/drawingml/2011/main" val="1"/>
+              <a:ext uri="{FF2B5EF4-FFF2-40B4-BE49-F238E27FC236}">
+                <a16:creationId xmlns:a16="http://schemas.microsoft.com/office/drawing/2014/main" id="{6732CB16-955D-BF50-2C89-6A6C6CBD00C3}"/>
               </a:ext>
             </a:extLst>
-          </p:spPr>
-          <p:txBody>
-            <a:bodyPr wrap="square" lIns="45719" tIns="45719" rIns="45719" bIns="45719" numCol="1" anchor="ctr">
-              <a:spAutoFit/>
-            </a:bodyPr>
-            <a:lstStyle/>
-            <a:p>
-              <a:r>
-                <a:t>Xgboost fast überall am besten</a:t>
-              </a:r>
-              <a:endParaRPr>
-                <a:solidFill>
-                  <a:srgbClr val="FFFFFF"/>
-                </a:solidFill>
-              </a:endParaRPr>
-            </a:p>
-            <a:p>
-              <a:r>
-                <a:t>Kindle_Store für FCNN ungewöhnlich einfach</a:t>
-              </a:r>
-              <a:endParaRPr>
-                <a:solidFill>
-                  <a:srgbClr val="FFFFFF"/>
-                </a:solidFill>
-              </a:endParaRPr>
-            </a:p>
-            <a:p>
-              <a:r>
-                <a:t>Sports &amp; Outdoors ist auffällig. xgboost 5% besser als FCNN</a:t>
-              </a:r>
-              <a:endParaRPr>
-                <a:solidFill>
-                  <a:srgbClr val="FFFFFF"/>
-                </a:solidFill>
-              </a:endParaRPr>
-            </a:p>
-            <a:p>
-              <a:r>
-                <a:t>Movies_and_TV für alle schwierig</a:t>
-              </a:r>
-            </a:p>
-          </p:txBody>
-        </p:sp>
-      </p:grpSp>
+          </p:cNvPr>
+          <p:cNvSpPr/>
+          <p:nvPr/>
+        </p:nvSpPr>
+        <p:spPr>
+          <a:xfrm>
+            <a:off x="7560578" y="3429001"/>
+            <a:ext cx="4493599" cy="2168718"/>
+          </a:xfrm>
+          <a:prstGeom prst="wedgeRoundRectCallout">
+            <a:avLst>
+              <a:gd name="adj1" fmla="val -65844"/>
+              <a:gd name="adj2" fmla="val -36356"/>
+              <a:gd name="adj3" fmla="val 16667"/>
+            </a:avLst>
+          </a:prstGeom>
+          <a:solidFill>
+            <a:schemeClr val="accent4">
+              <a:lumMod val="20000"/>
+              <a:lumOff val="80000"/>
+            </a:schemeClr>
+          </a:solidFill>
+        </p:spPr>
+        <p:style>
+          <a:lnRef idx="2">
+            <a:schemeClr val="accent1">
+              <a:shade val="15000"/>
+            </a:schemeClr>
+          </a:lnRef>
+          <a:fillRef idx="1">
+            <a:schemeClr val="accent1"/>
+          </a:fillRef>
+          <a:effectRef idx="0">
+            <a:schemeClr val="accent1"/>
+          </a:effectRef>
+          <a:fontRef idx="minor">
+            <a:schemeClr val="lt1"/>
+          </a:fontRef>
+        </p:style>
+        <p:txBody>
+          <a:bodyPr rtlCol="0" anchor="ctr"/>
+          <a:lstStyle/>
+          <a:p>
+            <a:r>
+              <a:rPr lang="en-GB" sz="1600" dirty="0" err="1">
+                <a:solidFill>
+                  <a:schemeClr val="tx1"/>
+                </a:solidFill>
+              </a:rPr>
+              <a:t>Xgboost</a:t>
+            </a:r>
+            <a:r>
+              <a:rPr lang="en-GB" sz="1600" dirty="0">
+                <a:solidFill>
+                  <a:schemeClr val="tx1"/>
+                </a:solidFill>
+              </a:rPr>
+              <a:t> fast </a:t>
+            </a:r>
+            <a:r>
+              <a:rPr lang="en-GB" sz="1600" dirty="0" err="1">
+                <a:solidFill>
+                  <a:schemeClr val="tx1"/>
+                </a:solidFill>
+              </a:rPr>
+              <a:t>überall</a:t>
+            </a:r>
+            <a:r>
+              <a:rPr lang="en-GB" sz="1600" dirty="0">
+                <a:solidFill>
+                  <a:schemeClr val="tx1"/>
+                </a:solidFill>
+              </a:rPr>
+              <a:t> am </a:t>
+            </a:r>
+            <a:r>
+              <a:rPr lang="en-GB" sz="1600" dirty="0" err="1">
+                <a:solidFill>
+                  <a:schemeClr val="tx1"/>
+                </a:solidFill>
+              </a:rPr>
+              <a:t>besten</a:t>
+            </a:r>
+            <a:endParaRPr lang="en-GB" sz="1600" dirty="0">
+              <a:solidFill>
+                <a:schemeClr val="tx1"/>
+              </a:solidFill>
+            </a:endParaRPr>
+          </a:p>
+          <a:p>
+            <a:endParaRPr lang="en-GB" sz="1600" dirty="0">
+              <a:solidFill>
+                <a:schemeClr val="tx1"/>
+              </a:solidFill>
+            </a:endParaRPr>
+          </a:p>
+          <a:p>
+            <a:r>
+              <a:rPr lang="en-GB" sz="1600" dirty="0" err="1">
+                <a:solidFill>
+                  <a:schemeClr val="tx1"/>
+                </a:solidFill>
+              </a:rPr>
+              <a:t>Kindle_Store</a:t>
+            </a:r>
+            <a:r>
+              <a:rPr lang="en-GB" sz="1600" dirty="0">
+                <a:solidFill>
+                  <a:schemeClr val="tx1"/>
+                </a:solidFill>
+              </a:rPr>
+              <a:t> für FCNN </a:t>
+            </a:r>
+            <a:r>
+              <a:rPr lang="en-GB" sz="1600" dirty="0" err="1">
+                <a:solidFill>
+                  <a:schemeClr val="tx1"/>
+                </a:solidFill>
+              </a:rPr>
+              <a:t>einfach</a:t>
+            </a:r>
+            <a:endParaRPr lang="en-GB" sz="1600" dirty="0">
+              <a:solidFill>
+                <a:schemeClr val="tx1"/>
+              </a:solidFill>
+            </a:endParaRPr>
+          </a:p>
+          <a:p>
+            <a:endParaRPr lang="en-GB" sz="1600" dirty="0">
+              <a:solidFill>
+                <a:schemeClr val="tx1"/>
+              </a:solidFill>
+            </a:endParaRPr>
+          </a:p>
+          <a:p>
+            <a:r>
+              <a:rPr lang="en-GB" sz="1600" dirty="0">
+                <a:solidFill>
+                  <a:schemeClr val="tx1"/>
+                </a:solidFill>
+              </a:rPr>
+              <a:t>Sports &amp; Outdoors </a:t>
+            </a:r>
+            <a:r>
+              <a:rPr lang="en-GB" sz="1600" dirty="0" err="1">
+                <a:solidFill>
+                  <a:schemeClr val="tx1"/>
+                </a:solidFill>
+              </a:rPr>
+              <a:t>ist</a:t>
+            </a:r>
+            <a:r>
+              <a:rPr lang="en-GB" sz="1600" dirty="0">
+                <a:solidFill>
+                  <a:schemeClr val="tx1"/>
+                </a:solidFill>
+              </a:rPr>
+              <a:t> </a:t>
+            </a:r>
+            <a:r>
+              <a:rPr lang="en-GB" sz="1600" dirty="0" err="1">
+                <a:solidFill>
+                  <a:schemeClr val="tx1"/>
+                </a:solidFill>
+              </a:rPr>
+              <a:t>auffällig</a:t>
+            </a:r>
+            <a:r>
+              <a:rPr lang="en-GB" sz="1600" dirty="0">
+                <a:solidFill>
+                  <a:schemeClr val="tx1"/>
+                </a:solidFill>
+              </a:rPr>
+              <a:t>:</a:t>
+            </a:r>
+            <a:br>
+              <a:rPr lang="en-GB" sz="1600" dirty="0">
+                <a:solidFill>
+                  <a:schemeClr val="tx1"/>
+                </a:solidFill>
+              </a:rPr>
+            </a:br>
+            <a:r>
+              <a:rPr lang="en-GB" sz="1600" dirty="0" err="1">
+                <a:solidFill>
+                  <a:schemeClr val="tx1"/>
+                </a:solidFill>
+              </a:rPr>
+              <a:t>xgboost</a:t>
+            </a:r>
+            <a:r>
+              <a:rPr lang="en-GB" sz="1600" dirty="0">
+                <a:solidFill>
+                  <a:schemeClr val="tx1"/>
+                </a:solidFill>
+              </a:rPr>
+              <a:t> 5% </a:t>
+            </a:r>
+            <a:r>
+              <a:rPr lang="en-GB" sz="1600" dirty="0" err="1">
+                <a:solidFill>
+                  <a:schemeClr val="tx1"/>
+                </a:solidFill>
+              </a:rPr>
+              <a:t>besser</a:t>
+            </a:r>
+            <a:r>
+              <a:rPr lang="en-GB" sz="1600" dirty="0">
+                <a:solidFill>
+                  <a:schemeClr val="tx1"/>
+                </a:solidFill>
+              </a:rPr>
+              <a:t> </a:t>
+            </a:r>
+            <a:r>
+              <a:rPr lang="en-GB" sz="1600" dirty="0" err="1">
+                <a:solidFill>
+                  <a:schemeClr val="tx1"/>
+                </a:solidFill>
+              </a:rPr>
+              <a:t>als</a:t>
+            </a:r>
+            <a:r>
+              <a:rPr lang="en-GB" sz="1600" dirty="0">
+                <a:solidFill>
+                  <a:schemeClr val="tx1"/>
+                </a:solidFill>
+              </a:rPr>
+              <a:t> FCNN</a:t>
+            </a:r>
+          </a:p>
+          <a:p>
+            <a:endParaRPr lang="en-GB" sz="1600" dirty="0">
+              <a:solidFill>
+                <a:schemeClr val="tx1"/>
+              </a:solidFill>
+            </a:endParaRPr>
+          </a:p>
+          <a:p>
+            <a:r>
+              <a:rPr lang="en-GB" sz="1600" dirty="0" err="1">
+                <a:solidFill>
+                  <a:schemeClr val="tx1"/>
+                </a:solidFill>
+              </a:rPr>
+              <a:t>Movies_and_TV</a:t>
+            </a:r>
+            <a:r>
+              <a:rPr lang="en-GB" sz="1600" dirty="0">
+                <a:solidFill>
+                  <a:schemeClr val="tx1"/>
+                </a:solidFill>
+              </a:rPr>
+              <a:t> für alle </a:t>
+            </a:r>
+            <a:r>
+              <a:rPr lang="en-GB" sz="1600" dirty="0" err="1">
+                <a:solidFill>
+                  <a:schemeClr val="tx1"/>
+                </a:solidFill>
+              </a:rPr>
+              <a:t>schwierig</a:t>
+            </a:r>
+            <a:endParaRPr lang="en-GB" sz="1600" dirty="0">
+              <a:solidFill>
+                <a:schemeClr val="tx1"/>
+              </a:solidFill>
+            </a:endParaRPr>
+          </a:p>
+        </p:txBody>
+      </p:sp>
     </p:spTree>
   </p:cSld>
   <p:clrMapOvr>
@@ -16808,7 +16771,7 @@
           </a:ln>
           <a:extLst>
             <a:ext uri="{C572A759-6A51-4108-AA02-DFA0A04FC94B}">
-              <ma14:wrappingTextBoxFlag xmlns="" xmlns:m="http://schemas.openxmlformats.org/officeDocument/2006/math" xmlns:a14="http://schemas.microsoft.com/office/drawing/2010/main" xmlns:ma14="http://schemas.microsoft.com/office/mac/drawingml/2011/main" val="1"/>
+              <ma14:wrappingTextBoxFlag xmlns:ma14="http://schemas.microsoft.com/office/mac/drawingml/2011/main" xmlns:a14="http://schemas.microsoft.com/office/drawing/2010/main" xmlns:m="http://schemas.openxmlformats.org/officeDocument/2006/math" xmlns="" val="1"/>
             </a:ext>
           </a:extLst>
         </p:spPr>
@@ -16880,7 +16843,7 @@
           </a:ln>
           <a:extLst>
             <a:ext uri="{C572A759-6A51-4108-AA02-DFA0A04FC94B}">
-              <ma14:wrappingTextBoxFlag xmlns="" xmlns:m="http://schemas.openxmlformats.org/officeDocument/2006/math" xmlns:a14="http://schemas.microsoft.com/office/drawing/2010/main" xmlns:ma14="http://schemas.microsoft.com/office/mac/drawingml/2011/main" val="1"/>
+              <ma14:wrappingTextBoxFlag xmlns:ma14="http://schemas.microsoft.com/office/mac/drawingml/2011/main" xmlns:a14="http://schemas.microsoft.com/office/drawing/2010/main" xmlns:m="http://schemas.openxmlformats.org/officeDocument/2006/math" xmlns="" val="1"/>
             </a:ext>
           </a:extLst>
         </p:spPr>
@@ -16924,7 +16887,7 @@
           </a:prstGeom>
           <a:extLst>
             <a:ext uri="{C572A759-6A51-4108-AA02-DFA0A04FC94B}">
-              <ma14:wrappingTextBoxFlag xmlns="" xmlns:m="http://schemas.openxmlformats.org/officeDocument/2006/math" xmlns:a14="http://schemas.microsoft.com/office/drawing/2010/main" xmlns:ma14="http://schemas.microsoft.com/office/mac/drawingml/2011/main" val="1"/>
+              <ma14:wrappingTextBoxFlag xmlns:ma14="http://schemas.microsoft.com/office/mac/drawingml/2011/main" xmlns:a14="http://schemas.microsoft.com/office/drawing/2010/main" xmlns:m="http://schemas.openxmlformats.org/officeDocument/2006/math" xmlns="" val="1"/>
             </a:ext>
           </a:extLst>
         </p:spPr>
@@ -17457,7 +17420,7 @@
           </a:ln>
           <a:extLst>
             <a:ext uri="{C572A759-6A51-4108-AA02-DFA0A04FC94B}">
-              <ma14:wrappingTextBoxFlag xmlns="" xmlns:m="http://schemas.openxmlformats.org/officeDocument/2006/math" xmlns:a14="http://schemas.microsoft.com/office/drawing/2010/main" xmlns:ma14="http://schemas.microsoft.com/office/mac/drawingml/2011/main" val="1"/>
+              <ma14:wrappingTextBoxFlag xmlns:ma14="http://schemas.microsoft.com/office/mac/drawingml/2011/main" xmlns:a14="http://schemas.microsoft.com/office/drawing/2010/main" xmlns:m="http://schemas.openxmlformats.org/officeDocument/2006/math" xmlns="" val="1"/>
             </a:ext>
           </a:extLst>
         </p:spPr>
@@ -17529,7 +17492,7 @@
           </a:ln>
           <a:extLst>
             <a:ext uri="{C572A759-6A51-4108-AA02-DFA0A04FC94B}">
-              <ma14:wrappingTextBoxFlag xmlns="" xmlns:m="http://schemas.openxmlformats.org/officeDocument/2006/math" xmlns:a14="http://schemas.microsoft.com/office/drawing/2010/main" xmlns:ma14="http://schemas.microsoft.com/office/mac/drawingml/2011/main" val="1"/>
+              <ma14:wrappingTextBoxFlag xmlns:ma14="http://schemas.microsoft.com/office/mac/drawingml/2011/main" xmlns:a14="http://schemas.microsoft.com/office/drawing/2010/main" xmlns:m="http://schemas.openxmlformats.org/officeDocument/2006/math" xmlns="" val="1"/>
             </a:ext>
           </a:extLst>
         </p:spPr>
@@ -17573,7 +17536,7 @@
           </a:prstGeom>
           <a:extLst>
             <a:ext uri="{C572A759-6A51-4108-AA02-DFA0A04FC94B}">
-              <ma14:wrappingTextBoxFlag xmlns="" xmlns:m="http://schemas.openxmlformats.org/officeDocument/2006/math" xmlns:a14="http://schemas.microsoft.com/office/drawing/2010/main" xmlns:ma14="http://schemas.microsoft.com/office/mac/drawingml/2011/main" val="1"/>
+              <ma14:wrappingTextBoxFlag xmlns:ma14="http://schemas.microsoft.com/office/mac/drawingml/2011/main" xmlns:a14="http://schemas.microsoft.com/office/drawing/2010/main" xmlns:m="http://schemas.openxmlformats.org/officeDocument/2006/math" xmlns="" val="1"/>
             </a:ext>
           </a:extLst>
         </p:spPr>
@@ -17616,204 +17579,129 @@
           </a:ln>
         </p:spPr>
       </p:pic>
-      <p:grpSp>
-        <p:nvGrpSpPr>
-          <p:cNvPr id="312" name="Rounded Rectangular Callout 8"/>
-          <p:cNvGrpSpPr/>
-          <p:nvPr/>
-        </p:nvGrpSpPr>
-        <p:grpSpPr>
-          <a:xfrm>
-            <a:off x="8590149" y="3428999"/>
-            <a:ext cx="3345521" cy="1605778"/>
-            <a:chOff x="0" y="0"/>
-            <a:chExt cx="3345520" cy="1605776"/>
-          </a:xfrm>
-        </p:grpSpPr>
-        <p:sp>
-          <p:nvSpPr>
-            <p:cNvPr id="310" name="Shape"/>
-            <p:cNvSpPr/>
-            <p:nvPr/>
-          </p:nvSpPr>
-          <p:spPr>
-            <a:xfrm>
-              <a:off x="0" y="0"/>
-              <a:ext cx="3345521" cy="1605777"/>
-            </a:xfrm>
-            <a:custGeom>
-              <a:avLst/>
-              <a:gdLst/>
-              <a:ahLst/>
-              <a:cxnLst>
-                <a:cxn ang="0">
-                  <a:pos x="wd2" y="hd2"/>
-                </a:cxn>
-                <a:cxn ang="5400000">
-                  <a:pos x="wd2" y="hd2"/>
-                </a:cxn>
-                <a:cxn ang="10800000">
-                  <a:pos x="wd2" y="hd2"/>
-                </a:cxn>
-                <a:cxn ang="16200000">
-                  <a:pos x="wd2" y="hd2"/>
-                </a:cxn>
-              </a:cxnLst>
-              <a:rect l="0" t="0" r="r" b="b"/>
-              <a:pathLst>
-                <a:path w="21600" h="21600" extrusionOk="0">
-                  <a:moveTo>
-                    <a:pt x="6773" y="3600"/>
-                  </a:moveTo>
-                  <a:cubicBezTo>
-                    <a:pt x="6773" y="1612"/>
-                    <a:pt x="7547" y="0"/>
-                    <a:pt x="8501" y="0"/>
-                  </a:cubicBezTo>
-                  <a:lnTo>
-                    <a:pt x="9244" y="0"/>
-                  </a:lnTo>
-                  <a:lnTo>
-                    <a:pt x="19872" y="0"/>
-                  </a:lnTo>
-                  <a:cubicBezTo>
-                    <a:pt x="20826" y="0"/>
-                    <a:pt x="21600" y="1612"/>
-                    <a:pt x="21600" y="3600"/>
-                  </a:cubicBezTo>
-                  <a:lnTo>
-                    <a:pt x="21600" y="3600"/>
-                  </a:lnTo>
-                  <a:lnTo>
-                    <a:pt x="21600" y="18000"/>
-                  </a:lnTo>
-                  <a:cubicBezTo>
-                    <a:pt x="21600" y="19988"/>
-                    <a:pt x="20826" y="21600"/>
-                    <a:pt x="19872" y="21600"/>
-                  </a:cubicBezTo>
-                  <a:lnTo>
-                    <a:pt x="8501" y="21600"/>
-                  </a:lnTo>
-                  <a:cubicBezTo>
-                    <a:pt x="7547" y="21600"/>
-                    <a:pt x="6773" y="19988"/>
-                    <a:pt x="6773" y="18000"/>
-                  </a:cubicBezTo>
-                  <a:lnTo>
-                    <a:pt x="6773" y="9000"/>
-                  </a:lnTo>
-                  <a:lnTo>
-                    <a:pt x="0" y="4519"/>
-                  </a:lnTo>
-                  <a:lnTo>
-                    <a:pt x="6773" y="3600"/>
-                  </a:lnTo>
-                  <a:close/>
-                </a:path>
-              </a:pathLst>
-            </a:custGeom>
-            <a:solidFill>
-              <a:srgbClr val="FFF2CC"/>
-            </a:solidFill>
-            <a:ln w="12700" cap="flat">
-              <a:solidFill>
-                <a:srgbClr val="1D3053"/>
-              </a:solidFill>
-              <a:prstDash val="solid"/>
-              <a:miter lim="800000"/>
-            </a:ln>
-            <a:effectLst/>
-          </p:spPr>
-          <p:txBody>
-            <a:bodyPr wrap="square" lIns="45719" tIns="45719" rIns="45719" bIns="45719" numCol="1" anchor="ctr">
-              <a:noAutofit/>
-            </a:bodyPr>
-            <a:lstStyle/>
-            <a:p>
-              <a:pPr>
-                <a:defRPr>
-                  <a:solidFill>
-                    <a:srgbClr val="FFFFFF"/>
-                  </a:solidFill>
-                </a:defRPr>
-              </a:pPr>
-              <a:endParaRPr/>
-            </a:p>
-          </p:txBody>
-        </p:sp>
-        <p:sp>
-          <p:nvSpPr>
-            <p:cNvPr id="311" name="Je länger der Text, desto besser die Klassifikation…"/>
-            <p:cNvSpPr txBox="1"/>
-            <p:nvPr/>
-          </p:nvSpPr>
-          <p:spPr>
-            <a:xfrm>
-              <a:off x="1179540" y="344244"/>
-              <a:ext cx="2035523" cy="917288"/>
-            </a:xfrm>
-            <a:prstGeom prst="rect">
-              <a:avLst/>
-            </a:prstGeom>
-            <a:noFill/>
-            <a:ln w="12700" cap="flat">
-              <a:noFill/>
-              <a:miter lim="400000"/>
-            </a:ln>
-            <a:effectLst/>
+      <p:sp>
+        <p:nvSpPr>
+          <p:cNvPr id="2" name="Rounded Rectangular Callout 1">
             <a:extLst>
-              <a:ext uri="{C572A759-6A51-4108-AA02-DFA0A04FC94B}">
-                <ma14:wrappingTextBoxFlag xmlns="" xmlns:m="http://schemas.openxmlformats.org/officeDocument/2006/math" xmlns:a14="http://schemas.microsoft.com/office/drawing/2010/main" xmlns:ma14="http://schemas.microsoft.com/office/mac/drawingml/2011/main" val="1"/>
+              <a:ext uri="{FF2B5EF4-FFF2-40B4-BE49-F238E27FC236}">
+                <a16:creationId xmlns:a16="http://schemas.microsoft.com/office/drawing/2014/main" id="{547EB877-8CA9-9DAE-A982-5E27B83A5324}"/>
               </a:ext>
             </a:extLst>
-          </p:spPr>
-          <p:txBody>
-            <a:bodyPr wrap="square" lIns="45719" tIns="45719" rIns="45719" bIns="45719" numCol="1" anchor="ctr">
-              <a:spAutoFit/>
-            </a:bodyPr>
-            <a:lstStyle/>
-            <a:p>
-              <a:r>
-                <a:rPr dirty="0"/>
-                <a:t>Je </a:t>
-              </a:r>
-              <a:r>
-                <a:rPr dirty="0" err="1"/>
-                <a:t>länger</a:t>
-              </a:r>
-              <a:r>
-                <a:rPr dirty="0"/>
-                <a:t> der Text, </a:t>
-              </a:r>
-              <a:r>
-                <a:rPr dirty="0" err="1"/>
-                <a:t>desto</a:t>
-              </a:r>
-              <a:r>
-                <a:rPr dirty="0"/>
-                <a:t> </a:t>
-              </a:r>
-              <a:r>
-                <a:rPr dirty="0" err="1"/>
-                <a:t>besser</a:t>
-              </a:r>
-              <a:r>
-                <a:rPr dirty="0"/>
-                <a:t> die </a:t>
-              </a:r>
-              <a:r>
-                <a:rPr dirty="0" err="1"/>
-                <a:t>Klassifikation</a:t>
-              </a:r>
-              <a:r>
-                <a:rPr dirty="0"/>
-                <a:t>…</a:t>
-              </a:r>
-            </a:p>
-          </p:txBody>
-        </p:sp>
-      </p:grpSp>
+          </p:cNvPr>
+          <p:cNvSpPr/>
+          <p:nvPr/>
+        </p:nvSpPr>
+        <p:spPr>
+          <a:xfrm>
+            <a:off x="7494317" y="3369592"/>
+            <a:ext cx="4476345" cy="852047"/>
+          </a:xfrm>
+          <a:prstGeom prst="wedgeRoundRectCallout">
+            <a:avLst>
+              <a:gd name="adj1" fmla="val -73592"/>
+              <a:gd name="adj2" fmla="val 53058"/>
+              <a:gd name="adj3" fmla="val 16667"/>
+            </a:avLst>
+          </a:prstGeom>
+          <a:solidFill>
+            <a:schemeClr val="accent4">
+              <a:lumMod val="20000"/>
+              <a:lumOff val="80000"/>
+            </a:schemeClr>
+          </a:solidFill>
+        </p:spPr>
+        <p:style>
+          <a:lnRef idx="2">
+            <a:schemeClr val="accent1">
+              <a:shade val="15000"/>
+            </a:schemeClr>
+          </a:lnRef>
+          <a:fillRef idx="1">
+            <a:schemeClr val="accent1"/>
+          </a:fillRef>
+          <a:effectRef idx="0">
+            <a:schemeClr val="accent1"/>
+          </a:effectRef>
+          <a:fontRef idx="minor">
+            <a:schemeClr val="lt1"/>
+          </a:fontRef>
+        </p:style>
+        <p:txBody>
+          <a:bodyPr rtlCol="0" anchor="ctr"/>
+          <a:lstStyle/>
+          <a:p>
+            <a:r>
+              <a:rPr lang="en-GB" dirty="0">
+                <a:solidFill>
+                  <a:schemeClr val="tx1"/>
+                </a:solidFill>
+              </a:rPr>
+              <a:t>Je </a:t>
+            </a:r>
+            <a:r>
+              <a:rPr lang="en-GB" dirty="0" err="1">
+                <a:solidFill>
+                  <a:schemeClr val="tx1"/>
+                </a:solidFill>
+              </a:rPr>
+              <a:t>länger</a:t>
+            </a:r>
+            <a:r>
+              <a:rPr lang="en-GB" dirty="0">
+                <a:solidFill>
+                  <a:schemeClr val="tx1"/>
+                </a:solidFill>
+              </a:rPr>
+              <a:t> der Text, </a:t>
+            </a:r>
+            <a:r>
+              <a:rPr lang="en-GB" dirty="0" err="1">
+                <a:solidFill>
+                  <a:schemeClr val="tx1"/>
+                </a:solidFill>
+              </a:rPr>
+              <a:t>desto</a:t>
+            </a:r>
+            <a:r>
+              <a:rPr lang="en-GB" dirty="0">
+                <a:solidFill>
+                  <a:schemeClr val="tx1"/>
+                </a:solidFill>
+              </a:rPr>
+              <a:t> </a:t>
+            </a:r>
+            <a:r>
+              <a:rPr lang="en-GB" dirty="0" err="1">
+                <a:solidFill>
+                  <a:schemeClr val="tx1"/>
+                </a:solidFill>
+              </a:rPr>
+              <a:t>besser</a:t>
+            </a:r>
+            <a:r>
+              <a:rPr lang="en-GB" dirty="0">
+                <a:solidFill>
+                  <a:schemeClr val="tx1"/>
+                </a:solidFill>
+              </a:rPr>
+              <a:t> die </a:t>
+            </a:r>
+            <a:r>
+              <a:rPr lang="en-GB" dirty="0" err="1">
+                <a:solidFill>
+                  <a:schemeClr val="tx1"/>
+                </a:solidFill>
+              </a:rPr>
+              <a:t>Klassifikation</a:t>
+            </a:r>
+            <a:endParaRPr lang="en-GB" dirty="0">
+              <a:solidFill>
+                <a:schemeClr val="tx1"/>
+              </a:solidFill>
+            </a:endParaRPr>
+          </a:p>
+        </p:txBody>
+      </p:sp>
     </p:spTree>
   </p:cSld>
   <p:clrMapOvr>
@@ -17859,7 +17747,7 @@
           </a:ln>
           <a:extLst>
             <a:ext uri="{C572A759-6A51-4108-AA02-DFA0A04FC94B}">
-              <ma14:wrappingTextBoxFlag xmlns="" xmlns:m="http://schemas.openxmlformats.org/officeDocument/2006/math" xmlns:a14="http://schemas.microsoft.com/office/drawing/2010/main" xmlns:ma14="http://schemas.microsoft.com/office/mac/drawingml/2011/main" val="1"/>
+              <ma14:wrappingTextBoxFlag xmlns:ma14="http://schemas.microsoft.com/office/mac/drawingml/2011/main" xmlns:a14="http://schemas.microsoft.com/office/drawing/2010/main" xmlns:m="http://schemas.openxmlformats.org/officeDocument/2006/math" xmlns="" val="1"/>
             </a:ext>
           </a:extLst>
         </p:spPr>
@@ -17911,6 +17799,7 @@
           </a:lstStyle>
           <a:p>
             <a:r>
+              <a:rPr dirty="0"/>
               <a:t>Feature Engineering</a:t>
             </a:r>
           </a:p>
@@ -17935,7 +17824,7 @@
           </a:ln>
           <a:extLst>
             <a:ext uri="{C572A759-6A51-4108-AA02-DFA0A04FC94B}">
-              <ma14:wrappingTextBoxFlag xmlns="" xmlns:m="http://schemas.openxmlformats.org/officeDocument/2006/math" xmlns:a14="http://schemas.microsoft.com/office/drawing/2010/main" xmlns:ma14="http://schemas.microsoft.com/office/mac/drawingml/2011/main" val="1"/>
+              <ma14:wrappingTextBoxFlag xmlns:ma14="http://schemas.microsoft.com/office/mac/drawingml/2011/main" xmlns:a14="http://schemas.microsoft.com/office/drawing/2010/main" xmlns:m="http://schemas.openxmlformats.org/officeDocument/2006/math" xmlns="" val="1"/>
             </a:ext>
           </a:extLst>
         </p:spPr>
@@ -17979,7 +17868,7 @@
           </a:prstGeom>
           <a:extLst>
             <a:ext uri="{C572A759-6A51-4108-AA02-DFA0A04FC94B}">
-              <ma14:wrappingTextBoxFlag xmlns="" xmlns:m="http://schemas.openxmlformats.org/officeDocument/2006/math" xmlns:a14="http://schemas.microsoft.com/office/drawing/2010/main" xmlns:ma14="http://schemas.microsoft.com/office/mac/drawingml/2011/main" val="1"/>
+              <ma14:wrappingTextBoxFlag xmlns:ma14="http://schemas.microsoft.com/office/mac/drawingml/2011/main" xmlns:a14="http://schemas.microsoft.com/office/drawing/2010/main" xmlns:m="http://schemas.openxmlformats.org/officeDocument/2006/math" xmlns="" val="1"/>
             </a:ext>
           </a:extLst>
         </p:spPr>
@@ -18014,7 +17903,7 @@
           </a:ln>
           <a:extLst>
             <a:ext uri="{C572A759-6A51-4108-AA02-DFA0A04FC94B}">
-              <ma14:wrappingTextBoxFlag xmlns="" xmlns:m="http://schemas.openxmlformats.org/officeDocument/2006/math" xmlns:a14="http://schemas.microsoft.com/office/drawing/2010/main" xmlns:ma14="http://schemas.microsoft.com/office/mac/drawingml/2011/main" val="1"/>
+              <ma14:wrappingTextBoxFlag xmlns:ma14="http://schemas.microsoft.com/office/mac/drawingml/2011/main" xmlns:a14="http://schemas.microsoft.com/office/drawing/2010/main" xmlns:m="http://schemas.openxmlformats.org/officeDocument/2006/math" xmlns="" val="1"/>
             </a:ext>
           </a:extLst>
         </p:spPr>
@@ -18108,7 +17997,7 @@
           </a:ln>
           <a:extLst>
             <a:ext uri="{C572A759-6A51-4108-AA02-DFA0A04FC94B}">
-              <ma14:wrappingTextBoxFlag xmlns="" xmlns:m="http://schemas.openxmlformats.org/officeDocument/2006/math" xmlns:a14="http://schemas.microsoft.com/office/drawing/2010/main" xmlns:ma14="http://schemas.microsoft.com/office/mac/drawingml/2011/main" val="1"/>
+              <ma14:wrappingTextBoxFlag xmlns:ma14="http://schemas.microsoft.com/office/mac/drawingml/2011/main" xmlns:a14="http://schemas.microsoft.com/office/drawing/2010/main" xmlns:m="http://schemas.openxmlformats.org/officeDocument/2006/math" xmlns="" val="1"/>
             </a:ext>
           </a:extLst>
         </p:spPr>
@@ -18223,7 +18112,7 @@
             <a:effectLst/>
             <a:extLst>
               <a:ext uri="{C572A759-6A51-4108-AA02-DFA0A04FC94B}">
-                <ma14:wrappingTextBoxFlag xmlns="" xmlns:m="http://schemas.openxmlformats.org/officeDocument/2006/math" xmlns:a14="http://schemas.microsoft.com/office/drawing/2010/main" xmlns:ma14="http://schemas.microsoft.com/office/mac/drawingml/2011/main" val="1"/>
+                <ma14:wrappingTextBoxFlag xmlns:ma14="http://schemas.microsoft.com/office/mac/drawingml/2011/main" xmlns:a14="http://schemas.microsoft.com/office/drawing/2010/main" xmlns:m="http://schemas.openxmlformats.org/officeDocument/2006/math" xmlns="" val="1"/>
               </a:ext>
             </a:extLst>
           </p:spPr>
@@ -18271,7 +18160,7 @@
           </a:ln>
           <a:extLst>
             <a:ext uri="{C572A759-6A51-4108-AA02-DFA0A04FC94B}">
-              <ma14:wrappingTextBoxFlag xmlns="" xmlns:m="http://schemas.openxmlformats.org/officeDocument/2006/math" xmlns:a14="http://schemas.microsoft.com/office/drawing/2010/main" xmlns:ma14="http://schemas.microsoft.com/office/mac/drawingml/2011/main" val="1"/>
+              <ma14:wrappingTextBoxFlag xmlns:ma14="http://schemas.microsoft.com/office/mac/drawingml/2011/main" xmlns:a14="http://schemas.microsoft.com/office/drawing/2010/main" xmlns:m="http://schemas.openxmlformats.org/officeDocument/2006/math" xmlns="" val="1"/>
             </a:ext>
           </a:extLst>
         </p:spPr>
@@ -18425,7 +18314,7 @@
             <a:effectLst/>
             <a:extLst>
               <a:ext uri="{C572A759-6A51-4108-AA02-DFA0A04FC94B}">
-                <ma14:wrappingTextBoxFlag xmlns="" xmlns:m="http://schemas.openxmlformats.org/officeDocument/2006/math" xmlns:a14="http://schemas.microsoft.com/office/drawing/2010/main" xmlns:ma14="http://schemas.microsoft.com/office/mac/drawingml/2011/main" val="1"/>
+                <ma14:wrappingTextBoxFlag xmlns:ma14="http://schemas.microsoft.com/office/mac/drawingml/2011/main" xmlns:a14="http://schemas.microsoft.com/office/drawing/2010/main" xmlns:m="http://schemas.openxmlformats.org/officeDocument/2006/math" xmlns="" val="1"/>
               </a:ext>
             </a:extLst>
           </p:spPr>
@@ -18473,7 +18362,7 @@
           </a:ln>
           <a:extLst>
             <a:ext uri="{C572A759-6A51-4108-AA02-DFA0A04FC94B}">
-              <ma14:wrappingTextBoxFlag xmlns="" xmlns:m="http://schemas.openxmlformats.org/officeDocument/2006/math" xmlns:a14="http://schemas.microsoft.com/office/drawing/2010/main" xmlns:ma14="http://schemas.microsoft.com/office/mac/drawingml/2011/main" val="1"/>
+              <ma14:wrappingTextBoxFlag xmlns:ma14="http://schemas.microsoft.com/office/mac/drawingml/2011/main" xmlns:a14="http://schemas.microsoft.com/office/drawing/2010/main" xmlns:m="http://schemas.openxmlformats.org/officeDocument/2006/math" xmlns="" val="1"/>
             </a:ext>
           </a:extLst>
         </p:spPr>
@@ -18599,7 +18488,7 @@
             <a:effectLst/>
             <a:extLst>
               <a:ext uri="{C572A759-6A51-4108-AA02-DFA0A04FC94B}">
-                <ma14:wrappingTextBoxFlag xmlns="" xmlns:m="http://schemas.openxmlformats.org/officeDocument/2006/math" xmlns:a14="http://schemas.microsoft.com/office/drawing/2010/main" xmlns:ma14="http://schemas.microsoft.com/office/mac/drawingml/2011/main" val="1"/>
+                <ma14:wrappingTextBoxFlag xmlns:ma14="http://schemas.microsoft.com/office/mac/drawingml/2011/main" xmlns:a14="http://schemas.microsoft.com/office/drawing/2010/main" xmlns:m="http://schemas.openxmlformats.org/officeDocument/2006/math" xmlns="" val="1"/>
               </a:ext>
             </a:extLst>
           </p:spPr>
@@ -18647,7 +18536,7 @@
           </a:ln>
           <a:extLst>
             <a:ext uri="{C572A759-6A51-4108-AA02-DFA0A04FC94B}">
-              <ma14:wrappingTextBoxFlag xmlns="" xmlns:m="http://schemas.openxmlformats.org/officeDocument/2006/math" xmlns:a14="http://schemas.microsoft.com/office/drawing/2010/main" xmlns:ma14="http://schemas.microsoft.com/office/mac/drawingml/2011/main" val="1"/>
+              <ma14:wrappingTextBoxFlag xmlns:ma14="http://schemas.microsoft.com/office/mac/drawingml/2011/main" xmlns:a14="http://schemas.microsoft.com/office/drawing/2010/main" xmlns:m="http://schemas.openxmlformats.org/officeDocument/2006/math" xmlns="" val="1"/>
             </a:ext>
           </a:extLst>
         </p:spPr>
@@ -18773,7 +18662,7 @@
             <a:effectLst/>
             <a:extLst>
               <a:ext uri="{C572A759-6A51-4108-AA02-DFA0A04FC94B}">
-                <ma14:wrappingTextBoxFlag xmlns="" xmlns:m="http://schemas.openxmlformats.org/officeDocument/2006/math" xmlns:a14="http://schemas.microsoft.com/office/drawing/2010/main" xmlns:ma14="http://schemas.microsoft.com/office/mac/drawingml/2011/main" val="1"/>
+                <ma14:wrappingTextBoxFlag xmlns:ma14="http://schemas.microsoft.com/office/mac/drawingml/2011/main" xmlns:a14="http://schemas.microsoft.com/office/drawing/2010/main" xmlns:m="http://schemas.openxmlformats.org/officeDocument/2006/math" xmlns="" val="1"/>
               </a:ext>
             </a:extLst>
           </p:spPr>
@@ -18821,7 +18710,7 @@
           </a:ln>
           <a:extLst>
             <a:ext uri="{C572A759-6A51-4108-AA02-DFA0A04FC94B}">
-              <ma14:wrappingTextBoxFlag xmlns="" xmlns:m="http://schemas.openxmlformats.org/officeDocument/2006/math" xmlns:a14="http://schemas.microsoft.com/office/drawing/2010/main" xmlns:ma14="http://schemas.microsoft.com/office/mac/drawingml/2011/main" val="1"/>
+              <ma14:wrappingTextBoxFlag xmlns:ma14="http://schemas.microsoft.com/office/mac/drawingml/2011/main" xmlns:a14="http://schemas.microsoft.com/office/drawing/2010/main" xmlns:m="http://schemas.openxmlformats.org/officeDocument/2006/math" xmlns="" val="1"/>
             </a:ext>
           </a:extLst>
         </p:spPr>
@@ -18975,7 +18864,7 @@
             <a:effectLst/>
             <a:extLst>
               <a:ext uri="{C572A759-6A51-4108-AA02-DFA0A04FC94B}">
-                <ma14:wrappingTextBoxFlag xmlns="" xmlns:m="http://schemas.openxmlformats.org/officeDocument/2006/math" xmlns:a14="http://schemas.microsoft.com/office/drawing/2010/main" xmlns:ma14="http://schemas.microsoft.com/office/mac/drawingml/2011/main" val="1"/>
+                <ma14:wrappingTextBoxFlag xmlns:ma14="http://schemas.microsoft.com/office/mac/drawingml/2011/main" xmlns:a14="http://schemas.microsoft.com/office/drawing/2010/main" xmlns:m="http://schemas.openxmlformats.org/officeDocument/2006/math" xmlns="" val="1"/>
               </a:ext>
             </a:extLst>
           </p:spPr>
@@ -19023,7 +18912,7 @@
           </a:ln>
           <a:extLst>
             <a:ext uri="{C572A759-6A51-4108-AA02-DFA0A04FC94B}">
-              <ma14:wrappingTextBoxFlag xmlns="" xmlns:m="http://schemas.openxmlformats.org/officeDocument/2006/math" xmlns:a14="http://schemas.microsoft.com/office/drawing/2010/main" xmlns:ma14="http://schemas.microsoft.com/office/mac/drawingml/2011/main" val="1"/>
+              <ma14:wrappingTextBoxFlag xmlns:ma14="http://schemas.microsoft.com/office/mac/drawingml/2011/main" xmlns:a14="http://schemas.microsoft.com/office/drawing/2010/main" xmlns:m="http://schemas.openxmlformats.org/officeDocument/2006/math" xmlns="" val="1"/>
             </a:ext>
           </a:extLst>
         </p:spPr>
@@ -19128,7 +19017,7 @@
           </a:ln>
           <a:extLst>
             <a:ext uri="{C572A759-6A51-4108-AA02-DFA0A04FC94B}">
-              <ma14:wrappingTextBoxFlag xmlns="" xmlns:m="http://schemas.openxmlformats.org/officeDocument/2006/math" xmlns:a14="http://schemas.microsoft.com/office/drawing/2010/main" xmlns:ma14="http://schemas.microsoft.com/office/mac/drawingml/2011/main" val="1"/>
+              <ma14:wrappingTextBoxFlag xmlns:ma14="http://schemas.microsoft.com/office/mac/drawingml/2011/main" xmlns:a14="http://schemas.microsoft.com/office/drawing/2010/main" xmlns:m="http://schemas.openxmlformats.org/officeDocument/2006/math" xmlns="" val="1"/>
             </a:ext>
           </a:extLst>
         </p:spPr>
@@ -19261,7 +19150,7 @@
             <a:effectLst/>
             <a:extLst>
               <a:ext uri="{C572A759-6A51-4108-AA02-DFA0A04FC94B}">
-                <ma14:wrappingTextBoxFlag xmlns="" xmlns:m="http://schemas.openxmlformats.org/officeDocument/2006/math" xmlns:a14="http://schemas.microsoft.com/office/drawing/2010/main" xmlns:ma14="http://schemas.microsoft.com/office/mac/drawingml/2011/main" val="1"/>
+                <ma14:wrappingTextBoxFlag xmlns:ma14="http://schemas.microsoft.com/office/mac/drawingml/2011/main" xmlns:a14="http://schemas.microsoft.com/office/drawing/2010/main" xmlns:m="http://schemas.openxmlformats.org/officeDocument/2006/math" xmlns="" val="1"/>
               </a:ext>
             </a:extLst>
           </p:spPr>
@@ -19309,7 +19198,7 @@
           </a:ln>
           <a:extLst>
             <a:ext uri="{C572A759-6A51-4108-AA02-DFA0A04FC94B}">
-              <ma14:wrappingTextBoxFlag xmlns="" xmlns:m="http://schemas.openxmlformats.org/officeDocument/2006/math" xmlns:a14="http://schemas.microsoft.com/office/drawing/2010/main" xmlns:ma14="http://schemas.microsoft.com/office/mac/drawingml/2011/main" val="1"/>
+              <ma14:wrappingTextBoxFlag xmlns:ma14="http://schemas.microsoft.com/office/mac/drawingml/2011/main" xmlns:a14="http://schemas.microsoft.com/office/drawing/2010/main" xmlns:m="http://schemas.openxmlformats.org/officeDocument/2006/math" xmlns="" val="1"/>
             </a:ext>
           </a:extLst>
         </p:spPr>
@@ -19450,7 +19339,7 @@
           </a:ln>
           <a:extLst>
             <a:ext uri="{C572A759-6A51-4108-AA02-DFA0A04FC94B}">
-              <ma14:wrappingTextBoxFlag xmlns="" xmlns:m="http://schemas.openxmlformats.org/officeDocument/2006/math" xmlns:a14="http://schemas.microsoft.com/office/drawing/2010/main" xmlns:ma14="http://schemas.microsoft.com/office/mac/drawingml/2011/main" val="1"/>
+              <ma14:wrappingTextBoxFlag xmlns:ma14="http://schemas.microsoft.com/office/mac/drawingml/2011/main" xmlns:a14="http://schemas.microsoft.com/office/drawing/2010/main" xmlns:m="http://schemas.openxmlformats.org/officeDocument/2006/math" xmlns="" val="1"/>
             </a:ext>
           </a:extLst>
         </p:spPr>
@@ -19497,7 +19386,7 @@
           </a:ln>
           <a:extLst>
             <a:ext uri="{C572A759-6A51-4108-AA02-DFA0A04FC94B}">
-              <ma14:wrappingTextBoxFlag xmlns="" xmlns:m="http://schemas.openxmlformats.org/officeDocument/2006/math" xmlns:a14="http://schemas.microsoft.com/office/drawing/2010/main" xmlns:ma14="http://schemas.microsoft.com/office/mac/drawingml/2011/main" val="1"/>
+              <ma14:wrappingTextBoxFlag xmlns:ma14="http://schemas.microsoft.com/office/mac/drawingml/2011/main" xmlns:a14="http://schemas.microsoft.com/office/drawing/2010/main" xmlns:m="http://schemas.openxmlformats.org/officeDocument/2006/math" xmlns="" val="1"/>
             </a:ext>
           </a:extLst>
         </p:spPr>
@@ -19638,7 +19527,7 @@
           </a:ln>
           <a:extLst>
             <a:ext uri="{C572A759-6A51-4108-AA02-DFA0A04FC94B}">
-              <ma14:wrappingTextBoxFlag xmlns="" xmlns:m="http://schemas.openxmlformats.org/officeDocument/2006/math" xmlns:a14="http://schemas.microsoft.com/office/drawing/2010/main" xmlns:ma14="http://schemas.microsoft.com/office/mac/drawingml/2011/main" val="1"/>
+              <ma14:wrappingTextBoxFlag xmlns:ma14="http://schemas.microsoft.com/office/mac/drawingml/2011/main" xmlns:a14="http://schemas.microsoft.com/office/drawing/2010/main" xmlns:m="http://schemas.openxmlformats.org/officeDocument/2006/math" xmlns="" val="1"/>
             </a:ext>
           </a:extLst>
         </p:spPr>
@@ -19685,7 +19574,7 @@
           </a:ln>
           <a:extLst>
             <a:ext uri="{C572A759-6A51-4108-AA02-DFA0A04FC94B}">
-              <ma14:wrappingTextBoxFlag xmlns="" xmlns:m="http://schemas.openxmlformats.org/officeDocument/2006/math" xmlns:a14="http://schemas.microsoft.com/office/drawing/2010/main" xmlns:ma14="http://schemas.microsoft.com/office/mac/drawingml/2011/main" val="1"/>
+              <ma14:wrappingTextBoxFlag xmlns:ma14="http://schemas.microsoft.com/office/mac/drawingml/2011/main" xmlns:a14="http://schemas.microsoft.com/office/drawing/2010/main" xmlns:m="http://schemas.openxmlformats.org/officeDocument/2006/math" xmlns="" val="1"/>
             </a:ext>
           </a:extLst>
         </p:spPr>
@@ -19826,7 +19715,7 @@
           </a:ln>
           <a:extLst>
             <a:ext uri="{C572A759-6A51-4108-AA02-DFA0A04FC94B}">
-              <ma14:wrappingTextBoxFlag xmlns="" xmlns:m="http://schemas.openxmlformats.org/officeDocument/2006/math" xmlns:a14="http://schemas.microsoft.com/office/drawing/2010/main" xmlns:ma14="http://schemas.microsoft.com/office/mac/drawingml/2011/main" val="1"/>
+              <ma14:wrappingTextBoxFlag xmlns:ma14="http://schemas.microsoft.com/office/mac/drawingml/2011/main" xmlns:a14="http://schemas.microsoft.com/office/drawing/2010/main" xmlns:m="http://schemas.openxmlformats.org/officeDocument/2006/math" xmlns="" val="1"/>
             </a:ext>
           </a:extLst>
         </p:spPr>
@@ -19873,7 +19762,7 @@
           </a:ln>
           <a:extLst>
             <a:ext uri="{C572A759-6A51-4108-AA02-DFA0A04FC94B}">
-              <ma14:wrappingTextBoxFlag xmlns="" xmlns:m="http://schemas.openxmlformats.org/officeDocument/2006/math" xmlns:a14="http://schemas.microsoft.com/office/drawing/2010/main" xmlns:ma14="http://schemas.microsoft.com/office/mac/drawingml/2011/main" val="1"/>
+              <ma14:wrappingTextBoxFlag xmlns:ma14="http://schemas.microsoft.com/office/mac/drawingml/2011/main" xmlns:a14="http://schemas.microsoft.com/office/drawing/2010/main" xmlns:m="http://schemas.openxmlformats.org/officeDocument/2006/math" xmlns="" val="1"/>
             </a:ext>
           </a:extLst>
         </p:spPr>
@@ -20014,7 +19903,7 @@
           </a:ln>
           <a:extLst>
             <a:ext uri="{C572A759-6A51-4108-AA02-DFA0A04FC94B}">
-              <ma14:wrappingTextBoxFlag xmlns="" xmlns:m="http://schemas.openxmlformats.org/officeDocument/2006/math" xmlns:a14="http://schemas.microsoft.com/office/drawing/2010/main" xmlns:ma14="http://schemas.microsoft.com/office/mac/drawingml/2011/main" val="1"/>
+              <ma14:wrappingTextBoxFlag xmlns:ma14="http://schemas.microsoft.com/office/mac/drawingml/2011/main" xmlns:a14="http://schemas.microsoft.com/office/drawing/2010/main" xmlns:m="http://schemas.openxmlformats.org/officeDocument/2006/math" xmlns="" val="1"/>
             </a:ext>
           </a:extLst>
         </p:spPr>
@@ -20061,7 +19950,7 @@
           </a:ln>
           <a:extLst>
             <a:ext uri="{C572A759-6A51-4108-AA02-DFA0A04FC94B}">
-              <ma14:wrappingTextBoxFlag xmlns="" xmlns:m="http://schemas.openxmlformats.org/officeDocument/2006/math" xmlns:a14="http://schemas.microsoft.com/office/drawing/2010/main" xmlns:ma14="http://schemas.microsoft.com/office/mac/drawingml/2011/main" val="1"/>
+              <ma14:wrappingTextBoxFlag xmlns:ma14="http://schemas.microsoft.com/office/mac/drawingml/2011/main" xmlns:a14="http://schemas.microsoft.com/office/drawing/2010/main" xmlns:m="http://schemas.openxmlformats.org/officeDocument/2006/math" xmlns="" val="1"/>
             </a:ext>
           </a:extLst>
         </p:spPr>
@@ -20202,7 +20091,7 @@
           </a:ln>
           <a:extLst>
             <a:ext uri="{C572A759-6A51-4108-AA02-DFA0A04FC94B}">
-              <ma14:wrappingTextBoxFlag xmlns="" xmlns:m="http://schemas.openxmlformats.org/officeDocument/2006/math" xmlns:a14="http://schemas.microsoft.com/office/drawing/2010/main" xmlns:ma14="http://schemas.microsoft.com/office/mac/drawingml/2011/main" val="1"/>
+              <ma14:wrappingTextBoxFlag xmlns:ma14="http://schemas.microsoft.com/office/mac/drawingml/2011/main" xmlns:a14="http://schemas.microsoft.com/office/drawing/2010/main" xmlns:m="http://schemas.openxmlformats.org/officeDocument/2006/math" xmlns="" val="1"/>
             </a:ext>
           </a:extLst>
         </p:spPr>
@@ -20249,7 +20138,7 @@
           </a:ln>
           <a:extLst>
             <a:ext uri="{C572A759-6A51-4108-AA02-DFA0A04FC94B}">
-              <ma14:wrappingTextBoxFlag xmlns="" xmlns:m="http://schemas.openxmlformats.org/officeDocument/2006/math" xmlns:a14="http://schemas.microsoft.com/office/drawing/2010/main" xmlns:ma14="http://schemas.microsoft.com/office/mac/drawingml/2011/main" val="1"/>
+              <ma14:wrappingTextBoxFlag xmlns:ma14="http://schemas.microsoft.com/office/mac/drawingml/2011/main" xmlns:a14="http://schemas.microsoft.com/office/drawing/2010/main" xmlns:m="http://schemas.openxmlformats.org/officeDocument/2006/math" xmlns="" val="1"/>
             </a:ext>
           </a:extLst>
         </p:spPr>
@@ -20390,7 +20279,7 @@
           </a:ln>
           <a:extLst>
             <a:ext uri="{C572A759-6A51-4108-AA02-DFA0A04FC94B}">
-              <ma14:wrappingTextBoxFlag xmlns="" xmlns:m="http://schemas.openxmlformats.org/officeDocument/2006/math" xmlns:a14="http://schemas.microsoft.com/office/drawing/2010/main" xmlns:ma14="http://schemas.microsoft.com/office/mac/drawingml/2011/main" val="1"/>
+              <ma14:wrappingTextBoxFlag xmlns:ma14="http://schemas.microsoft.com/office/mac/drawingml/2011/main" xmlns:a14="http://schemas.microsoft.com/office/drawing/2010/main" xmlns:m="http://schemas.openxmlformats.org/officeDocument/2006/math" xmlns="" val="1"/>
             </a:ext>
           </a:extLst>
         </p:spPr>
@@ -20437,7 +20326,7 @@
           </a:ln>
           <a:extLst>
             <a:ext uri="{C572A759-6A51-4108-AA02-DFA0A04FC94B}">
-              <ma14:wrappingTextBoxFlag xmlns="" xmlns:m="http://schemas.openxmlformats.org/officeDocument/2006/math" xmlns:a14="http://schemas.microsoft.com/office/drawing/2010/main" xmlns:ma14="http://schemas.microsoft.com/office/mac/drawingml/2011/main" val="1"/>
+              <ma14:wrappingTextBoxFlag xmlns:ma14="http://schemas.microsoft.com/office/mac/drawingml/2011/main" xmlns:a14="http://schemas.microsoft.com/office/drawing/2010/main" xmlns:m="http://schemas.openxmlformats.org/officeDocument/2006/math" xmlns="" val="1"/>
             </a:ext>
           </a:extLst>
         </p:spPr>
@@ -20578,7 +20467,7 @@
           </a:ln>
           <a:extLst>
             <a:ext uri="{C572A759-6A51-4108-AA02-DFA0A04FC94B}">
-              <ma14:wrappingTextBoxFlag xmlns="" xmlns:m="http://schemas.openxmlformats.org/officeDocument/2006/math" xmlns:a14="http://schemas.microsoft.com/office/drawing/2010/main" xmlns:ma14="http://schemas.microsoft.com/office/mac/drawingml/2011/main" val="1"/>
+              <ma14:wrappingTextBoxFlag xmlns:ma14="http://schemas.microsoft.com/office/mac/drawingml/2011/main" xmlns:a14="http://schemas.microsoft.com/office/drawing/2010/main" xmlns:m="http://schemas.openxmlformats.org/officeDocument/2006/math" xmlns="" val="1"/>
             </a:ext>
           </a:extLst>
         </p:spPr>
@@ -20615,9 +20504,9 @@
         <p:grpSpPr>
           <a:xfrm>
             <a:off x="655319" y="6197651"/>
-            <a:ext cx="10881361" cy="420625"/>
+            <a:ext cx="10881362" cy="420626"/>
             <a:chOff x="0" y="0"/>
-            <a:chExt cx="10881359" cy="420623"/>
+            <a:chExt cx="10881360" cy="420624"/>
           </a:xfrm>
         </p:grpSpPr>
         <p:sp>
@@ -20679,8 +20568,8 @@
           </p:nvSpPr>
           <p:spPr>
             <a:xfrm>
-              <a:off x="71015" y="75691"/>
-              <a:ext cx="10739330" cy="269241"/>
+              <a:off x="71015" y="71814"/>
+              <a:ext cx="10739330" cy="276996"/>
             </a:xfrm>
             <a:prstGeom prst="rect">
               <a:avLst/>
@@ -20693,7 +20582,7 @@
             <a:effectLst/>
             <a:extLst>
               <a:ext uri="{C572A759-6A51-4108-AA02-DFA0A04FC94B}">
-                <ma14:wrappingTextBoxFlag xmlns="" xmlns:m="http://schemas.openxmlformats.org/officeDocument/2006/math" xmlns:a14="http://schemas.microsoft.com/office/drawing/2010/main" xmlns:ma14="http://schemas.microsoft.com/office/mac/drawingml/2011/main" val="1"/>
+                <ma14:wrappingTextBoxFlag xmlns:ma14="http://schemas.microsoft.com/office/mac/drawingml/2011/main" xmlns:a14="http://schemas.microsoft.com/office/drawing/2010/main" xmlns:m="http://schemas.openxmlformats.org/officeDocument/2006/math" xmlns="" val="1"/>
               </a:ext>
             </a:extLst>
           </p:spPr>
@@ -20715,20 +20604,283 @@
                 </a:defRPr>
               </a:pPr>
               <a:r>
+                <a:rPr dirty="0"/>
                 <a:t>Interpretation:</a:t>
               </a:r>
               <a:r>
-                <a:rPr b="0">
+                <a:rPr b="0" dirty="0">
                   <a:solidFill>
                     <a:srgbClr val="212B36"/>
                   </a:solidFill>
                 </a:rPr>
-                <a:t> Wortlänge, Großbuchstaben und Textlänge sind die wichtigsten Hinweise darauf, ob eine Review schwer einzuordnen ist.</a:t>
+                <a:t> </a:t>
+              </a:r>
+              <a:r>
+                <a:rPr b="0" dirty="0" err="1">
+                  <a:solidFill>
+                    <a:srgbClr val="212B36"/>
+                  </a:solidFill>
+                </a:rPr>
+                <a:t>Wortlänge</a:t>
+              </a:r>
+              <a:r>
+                <a:rPr b="0" dirty="0">
+                  <a:solidFill>
+                    <a:srgbClr val="212B36"/>
+                  </a:solidFill>
+                </a:rPr>
+                <a:t>, Gro</a:t>
+              </a:r>
+              <a:r>
+                <a:rPr lang="de-CH" b="0" dirty="0" err="1">
+                  <a:solidFill>
+                    <a:srgbClr val="212B36"/>
+                  </a:solidFill>
+                </a:rPr>
+                <a:t>ss</a:t>
+              </a:r>
+              <a:r>
+                <a:rPr b="0" dirty="0" err="1">
+                  <a:solidFill>
+                    <a:srgbClr val="212B36"/>
+                  </a:solidFill>
+                </a:rPr>
+                <a:t>buchstaben</a:t>
+              </a:r>
+              <a:r>
+                <a:rPr b="0" dirty="0">
+                  <a:solidFill>
+                    <a:srgbClr val="212B36"/>
+                  </a:solidFill>
+                </a:rPr>
+                <a:t> und </a:t>
+              </a:r>
+              <a:r>
+                <a:rPr b="0" dirty="0" err="1">
+                  <a:solidFill>
+                    <a:srgbClr val="212B36"/>
+                  </a:solidFill>
+                </a:rPr>
+                <a:t>Textlänge</a:t>
+              </a:r>
+              <a:r>
+                <a:rPr b="0" dirty="0">
+                  <a:solidFill>
+                    <a:srgbClr val="212B36"/>
+                  </a:solidFill>
+                </a:rPr>
+                <a:t> </a:t>
+              </a:r>
+              <a:r>
+                <a:rPr b="0" dirty="0" err="1">
+                  <a:solidFill>
+                    <a:srgbClr val="212B36"/>
+                  </a:solidFill>
+                </a:rPr>
+                <a:t>sind</a:t>
+              </a:r>
+              <a:r>
+                <a:rPr b="0" dirty="0">
+                  <a:solidFill>
+                    <a:srgbClr val="212B36"/>
+                  </a:solidFill>
+                </a:rPr>
+                <a:t> die </a:t>
+              </a:r>
+              <a:r>
+                <a:rPr b="0" dirty="0" err="1">
+                  <a:solidFill>
+                    <a:srgbClr val="212B36"/>
+                  </a:solidFill>
+                </a:rPr>
+                <a:t>wichtigsten</a:t>
+              </a:r>
+              <a:r>
+                <a:rPr b="0" dirty="0">
+                  <a:solidFill>
+                    <a:srgbClr val="212B36"/>
+                  </a:solidFill>
+                </a:rPr>
+                <a:t> </a:t>
+              </a:r>
+              <a:r>
+                <a:rPr b="0" dirty="0" err="1">
+                  <a:solidFill>
+                    <a:srgbClr val="212B36"/>
+                  </a:solidFill>
+                </a:rPr>
+                <a:t>Hinweise</a:t>
+              </a:r>
+              <a:r>
+                <a:rPr b="0" dirty="0">
+                  <a:solidFill>
+                    <a:srgbClr val="212B36"/>
+                  </a:solidFill>
+                </a:rPr>
+                <a:t> </a:t>
+              </a:r>
+              <a:r>
+                <a:rPr b="0" dirty="0" err="1">
+                  <a:solidFill>
+                    <a:srgbClr val="212B36"/>
+                  </a:solidFill>
+                </a:rPr>
+                <a:t>darauf</a:t>
+              </a:r>
+              <a:r>
+                <a:rPr b="0" dirty="0">
+                  <a:solidFill>
+                    <a:srgbClr val="212B36"/>
+                  </a:solidFill>
+                </a:rPr>
+                <a:t>, </a:t>
+              </a:r>
+              <a:r>
+                <a:rPr b="0" dirty="0" err="1">
+                  <a:solidFill>
+                    <a:srgbClr val="212B36"/>
+                  </a:solidFill>
+                </a:rPr>
+                <a:t>ob</a:t>
+              </a:r>
+              <a:r>
+                <a:rPr b="0" dirty="0">
+                  <a:solidFill>
+                    <a:srgbClr val="212B36"/>
+                  </a:solidFill>
+                </a:rPr>
+                <a:t> </a:t>
+              </a:r>
+              <a:r>
+                <a:rPr b="0" dirty="0" err="1">
+                  <a:solidFill>
+                    <a:srgbClr val="212B36"/>
+                  </a:solidFill>
+                </a:rPr>
+                <a:t>eine</a:t>
+              </a:r>
+              <a:r>
+                <a:rPr b="0" dirty="0">
+                  <a:solidFill>
+                    <a:srgbClr val="212B36"/>
+                  </a:solidFill>
+                </a:rPr>
+                <a:t> Review </a:t>
+              </a:r>
+              <a:r>
+                <a:rPr b="0" dirty="0" err="1">
+                  <a:solidFill>
+                    <a:srgbClr val="212B36"/>
+                  </a:solidFill>
+                </a:rPr>
+                <a:t>schwer</a:t>
+              </a:r>
+              <a:r>
+                <a:rPr b="0" dirty="0">
+                  <a:solidFill>
+                    <a:srgbClr val="212B36"/>
+                  </a:solidFill>
+                </a:rPr>
+                <a:t> </a:t>
+              </a:r>
+              <a:r>
+                <a:rPr b="0" dirty="0" err="1">
+                  <a:solidFill>
+                    <a:srgbClr val="212B36"/>
+                  </a:solidFill>
+                </a:rPr>
+                <a:t>einzuordnen</a:t>
+              </a:r>
+              <a:r>
+                <a:rPr b="0" dirty="0">
+                  <a:solidFill>
+                    <a:srgbClr val="212B36"/>
+                  </a:solidFill>
+                </a:rPr>
+                <a:t> </a:t>
+              </a:r>
+              <a:r>
+                <a:rPr b="0" dirty="0" err="1">
+                  <a:solidFill>
+                    <a:srgbClr val="212B36"/>
+                  </a:solidFill>
+                </a:rPr>
+                <a:t>ist</a:t>
+              </a:r>
+              <a:r>
+                <a:rPr b="0" dirty="0">
+                  <a:solidFill>
+                    <a:srgbClr val="212B36"/>
+                  </a:solidFill>
+                </a:rPr>
+                <a:t>.</a:t>
               </a:r>
             </a:p>
           </p:txBody>
         </p:sp>
       </p:grpSp>
+      <p:sp>
+        <p:nvSpPr>
+          <p:cNvPr id="2" name="Rounded Rectangular Callout 1">
+            <a:extLst>
+              <a:ext uri="{FF2B5EF4-FFF2-40B4-BE49-F238E27FC236}">
+                <a16:creationId xmlns:a16="http://schemas.microsoft.com/office/drawing/2014/main" id="{600675E3-AC13-B3F1-DCFD-D4FB69893438}"/>
+              </a:ext>
+            </a:extLst>
+          </p:cNvPr>
+          <p:cNvSpPr/>
+          <p:nvPr/>
+        </p:nvSpPr>
+        <p:spPr>
+          <a:xfrm>
+            <a:off x="8395155" y="956268"/>
+            <a:ext cx="3165474" cy="611790"/>
+          </a:xfrm>
+          <a:prstGeom prst="wedgeRoundRectCallout">
+            <a:avLst>
+              <a:gd name="adj1" fmla="val -49150"/>
+              <a:gd name="adj2" fmla="val 73348"/>
+              <a:gd name="adj3" fmla="val 16667"/>
+            </a:avLst>
+          </a:prstGeom>
+          <a:solidFill>
+            <a:schemeClr val="accent4">
+              <a:lumMod val="20000"/>
+              <a:lumOff val="80000"/>
+            </a:schemeClr>
+          </a:solidFill>
+        </p:spPr>
+        <p:style>
+          <a:lnRef idx="2">
+            <a:schemeClr val="accent1">
+              <a:shade val="15000"/>
+            </a:schemeClr>
+          </a:lnRef>
+          <a:fillRef idx="1">
+            <a:schemeClr val="accent1"/>
+          </a:fillRef>
+          <a:effectRef idx="0">
+            <a:schemeClr val="accent1"/>
+          </a:effectRef>
+          <a:fontRef idx="minor">
+            <a:schemeClr val="lt1"/>
+          </a:fontRef>
+        </p:style>
+        <p:txBody>
+          <a:bodyPr rtlCol="0" anchor="ctr"/>
+          <a:lstStyle/>
+          <a:p>
+            <a:r>
+              <a:rPr lang="en-CH" dirty="0">
+                <a:solidFill>
+                  <a:schemeClr val="tx1"/>
+                </a:solidFill>
+              </a:rPr>
+              <a:t>Feature Importance aus RF</a:t>
+            </a:r>
+          </a:p>
+        </p:txBody>
+      </p:sp>
     </p:spTree>
   </p:cSld>
   <p:clrMapOvr>

--- a/presentation/ln_text_analysis.pptx
+++ b/presentation/ln_text_analysis.pptx
@@ -331,6 +331,14 @@
 </p:presentation>
 </file>
 
+<file path=ppt/revisionInfo.xml><?xml version="1.0" encoding="utf-8"?>
+<p1510:revInfo xmlns:a="http://schemas.openxmlformats.org/drawingml/2006/main" xmlns:r="http://schemas.openxmlformats.org/officeDocument/2006/relationships" xmlns:p1510="http://schemas.microsoft.com/office/powerpoint/2015/10/main">
+  <p1510:revLst>
+    <p1510:client id="{B50A7DF1-DD94-B14B-7AAB-8D11BF813F39}" v="6" dt="2026-06-22T07:28:09.254"/>
+  </p1510:revLst>
+</p1510:revInfo>
+</file>
+
 <file path=ppt/notesMasters/notesMaster1.xml><?xml version="1.0" encoding="utf-8"?>
 <p:notesMaster xmlns:a="http://schemas.openxmlformats.org/drawingml/2006/main" xmlns:r="http://schemas.openxmlformats.org/officeDocument/2006/relationships" xmlns:p="http://schemas.openxmlformats.org/presentationml/2006/main">
   <p:cSld>
@@ -2857,7 +2865,7 @@
           </a:ln>
           <a:extLst>
             <a:ext uri="{C572A759-6A51-4108-AA02-DFA0A04FC94B}">
-              <ma14:wrappingTextBoxFlag xmlns:ma14="http://schemas.microsoft.com/office/mac/drawingml/2011/main" xmlns:a14="http://schemas.microsoft.com/office/drawing/2010/main" xmlns:m="http://schemas.openxmlformats.org/officeDocument/2006/math" xmlns="" val="1"/>
+              <ma14:wrappingTextBoxFlag xmlns="" xmlns:m="http://schemas.openxmlformats.org/officeDocument/2006/math" xmlns:a14="http://schemas.microsoft.com/office/drawing/2010/main" xmlns:ma14="http://schemas.microsoft.com/office/mac/drawingml/2011/main" val="1"/>
             </a:ext>
           </a:extLst>
         </p:spPr>
@@ -2896,7 +2904,7 @@
           </a:ln>
           <a:extLst>
             <a:ext uri="{C572A759-6A51-4108-AA02-DFA0A04FC94B}">
-              <ma14:wrappingTextBoxFlag xmlns:ma14="http://schemas.microsoft.com/office/mac/drawingml/2011/main" xmlns:a14="http://schemas.microsoft.com/office/drawing/2010/main" xmlns:m="http://schemas.openxmlformats.org/officeDocument/2006/math" xmlns="" val="1"/>
+              <ma14:wrappingTextBoxFlag xmlns="" xmlns:m="http://schemas.openxmlformats.org/officeDocument/2006/math" xmlns:a14="http://schemas.microsoft.com/office/drawing/2010/main" xmlns:ma14="http://schemas.microsoft.com/office/mac/drawingml/2011/main" val="1"/>
             </a:ext>
           </a:extLst>
         </p:spPr>
@@ -3914,7 +3922,7 @@
           </a:ln>
           <a:extLst>
             <a:ext uri="{C572A759-6A51-4108-AA02-DFA0A04FC94B}">
-              <ma14:wrappingTextBoxFlag xmlns:ma14="http://schemas.microsoft.com/office/mac/drawingml/2011/main" xmlns:a14="http://schemas.microsoft.com/office/drawing/2010/main" xmlns:m="http://schemas.openxmlformats.org/officeDocument/2006/math" xmlns="" val="1"/>
+              <ma14:wrappingTextBoxFlag xmlns="" xmlns:m="http://schemas.openxmlformats.org/officeDocument/2006/math" xmlns:a14="http://schemas.microsoft.com/office/drawing/2010/main" xmlns:ma14="http://schemas.microsoft.com/office/mac/drawingml/2011/main" val="1"/>
             </a:ext>
           </a:extLst>
         </p:spPr>
@@ -4210,7 +4218,7 @@
           </a:ln>
           <a:extLst>
             <a:ext uri="{C572A759-6A51-4108-AA02-DFA0A04FC94B}">
-              <ma14:wrappingTextBoxFlag xmlns:ma14="http://schemas.microsoft.com/office/mac/drawingml/2011/main" xmlns:a14="http://schemas.microsoft.com/office/drawing/2010/main" xmlns:m="http://schemas.openxmlformats.org/officeDocument/2006/math" xmlns="" val="1"/>
+              <ma14:wrappingTextBoxFlag xmlns="" xmlns:m="http://schemas.openxmlformats.org/officeDocument/2006/math" xmlns:a14="http://schemas.microsoft.com/office/drawing/2010/main" xmlns:ma14="http://schemas.microsoft.com/office/mac/drawingml/2011/main" val="1"/>
             </a:ext>
           </a:extLst>
         </p:spPr>
@@ -4254,7 +4262,7 @@
           </a:prstGeom>
           <a:extLst>
             <a:ext uri="{C572A759-6A51-4108-AA02-DFA0A04FC94B}">
-              <ma14:wrappingTextBoxFlag xmlns:ma14="http://schemas.microsoft.com/office/mac/drawingml/2011/main" xmlns:a14="http://schemas.microsoft.com/office/drawing/2010/main" xmlns:m="http://schemas.openxmlformats.org/officeDocument/2006/math" xmlns="" val="1"/>
+              <ma14:wrappingTextBoxFlag xmlns="" xmlns:m="http://schemas.openxmlformats.org/officeDocument/2006/math" xmlns:a14="http://schemas.microsoft.com/office/drawing/2010/main" xmlns:ma14="http://schemas.microsoft.com/office/mac/drawingml/2011/main" val="1"/>
             </a:ext>
           </a:extLst>
         </p:spPr>
@@ -4441,7 +4449,7 @@
           </a:ln>
           <a:extLst>
             <a:ext uri="{C572A759-6A51-4108-AA02-DFA0A04FC94B}">
-              <ma14:wrappingTextBoxFlag xmlns:ma14="http://schemas.microsoft.com/office/mac/drawingml/2011/main" xmlns:a14="http://schemas.microsoft.com/office/drawing/2010/main" xmlns:m="http://schemas.openxmlformats.org/officeDocument/2006/math" xmlns="" val="1"/>
+              <ma14:wrappingTextBoxFlag xmlns="" xmlns:m="http://schemas.openxmlformats.org/officeDocument/2006/math" xmlns:a14="http://schemas.microsoft.com/office/drawing/2010/main" xmlns:ma14="http://schemas.microsoft.com/office/mac/drawingml/2011/main" val="1"/>
             </a:ext>
           </a:extLst>
         </p:spPr>
@@ -4638,7 +4646,7 @@
           </a:ln>
           <a:extLst>
             <a:ext uri="{C572A759-6A51-4108-AA02-DFA0A04FC94B}">
-              <ma14:wrappingTextBoxFlag xmlns:ma14="http://schemas.microsoft.com/office/mac/drawingml/2011/main" xmlns:a14="http://schemas.microsoft.com/office/drawing/2010/main" xmlns:m="http://schemas.openxmlformats.org/officeDocument/2006/math" xmlns="" val="1"/>
+              <ma14:wrappingTextBoxFlag xmlns="" xmlns:m="http://schemas.openxmlformats.org/officeDocument/2006/math" xmlns:a14="http://schemas.microsoft.com/office/drawing/2010/main" xmlns:ma14="http://schemas.microsoft.com/office/mac/drawingml/2011/main" val="1"/>
             </a:ext>
           </a:extLst>
         </p:spPr>
@@ -4682,7 +4690,7 @@
           </a:prstGeom>
           <a:extLst>
             <a:ext uri="{C572A759-6A51-4108-AA02-DFA0A04FC94B}">
-              <ma14:wrappingTextBoxFlag xmlns:ma14="http://schemas.microsoft.com/office/mac/drawingml/2011/main" xmlns:a14="http://schemas.microsoft.com/office/drawing/2010/main" xmlns:m="http://schemas.openxmlformats.org/officeDocument/2006/math" xmlns="" val="1"/>
+              <ma14:wrappingTextBoxFlag xmlns="" xmlns:m="http://schemas.openxmlformats.org/officeDocument/2006/math" xmlns:a14="http://schemas.microsoft.com/office/drawing/2010/main" xmlns:ma14="http://schemas.microsoft.com/office/mac/drawingml/2011/main" val="1"/>
             </a:ext>
           </a:extLst>
         </p:spPr>
@@ -4744,7 +4752,7 @@
           </a:ln>
           <a:extLst>
             <a:ext uri="{C572A759-6A51-4108-AA02-DFA0A04FC94B}">
-              <ma14:wrappingTextBoxFlag xmlns:ma14="http://schemas.microsoft.com/office/mac/drawingml/2011/main" xmlns:a14="http://schemas.microsoft.com/office/drawing/2010/main" xmlns:m="http://schemas.openxmlformats.org/officeDocument/2006/math" xmlns="" val="1"/>
+              <ma14:wrappingTextBoxFlag xmlns="" xmlns:m="http://schemas.openxmlformats.org/officeDocument/2006/math" xmlns:a14="http://schemas.microsoft.com/office/drawing/2010/main" xmlns:ma14="http://schemas.microsoft.com/office/mac/drawingml/2011/main" val="1"/>
             </a:ext>
           </a:extLst>
         </p:spPr>
@@ -5122,7 +5130,7 @@
             <a:fld id="{EE15D7BA-2F5F-8E43-91CB-647D382EDB87}" type="datetime4">
               <a:rPr lang="de-CH" smtClean="0"/>
               <a:pPr/>
-              <a:t>19. Juni 2026</a:t>
+              <a:t>22. Juni 2026</a:t>
             </a:fld>
             <a:endParaRPr lang="en-CH"/>
           </a:p>
@@ -5974,7 +5982,7 @@
           </a:ln>
           <a:extLst>
             <a:ext uri="{C572A759-6A51-4108-AA02-DFA0A04FC94B}">
-              <ma14:wrappingTextBoxFlag xmlns:ma14="http://schemas.microsoft.com/office/mac/drawingml/2011/main" xmlns:a14="http://schemas.microsoft.com/office/drawing/2010/main" xmlns:m="http://schemas.openxmlformats.org/officeDocument/2006/math" xmlns="" val="1"/>
+              <ma14:wrappingTextBoxFlag xmlns="" xmlns:m="http://schemas.openxmlformats.org/officeDocument/2006/math" xmlns:a14="http://schemas.microsoft.com/office/drawing/2010/main" xmlns:ma14="http://schemas.microsoft.com/office/mac/drawingml/2011/main" val="1"/>
             </a:ext>
           </a:extLst>
         </p:spPr>
@@ -6047,7 +6055,7 @@
           </a:prstGeom>
           <a:extLst>
             <a:ext uri="{C572A759-6A51-4108-AA02-DFA0A04FC94B}">
-              <ma14:wrappingTextBoxFlag xmlns:ma14="http://schemas.microsoft.com/office/mac/drawingml/2011/main" xmlns:a14="http://schemas.microsoft.com/office/drawing/2010/main" xmlns:m="http://schemas.openxmlformats.org/officeDocument/2006/math" xmlns="" val="1"/>
+              <ma14:wrappingTextBoxFlag xmlns="" xmlns:m="http://schemas.openxmlformats.org/officeDocument/2006/math" xmlns:a14="http://schemas.microsoft.com/office/drawing/2010/main" xmlns:ma14="http://schemas.microsoft.com/office/mac/drawingml/2011/main" val="1"/>
             </a:ext>
           </a:extLst>
         </p:spPr>
@@ -6082,7 +6090,7 @@
           </a:ln>
           <a:extLst>
             <a:ext uri="{C572A759-6A51-4108-AA02-DFA0A04FC94B}">
-              <ma14:wrappingTextBoxFlag xmlns:ma14="http://schemas.microsoft.com/office/mac/drawingml/2011/main" xmlns:a14="http://schemas.microsoft.com/office/drawing/2010/main" xmlns:m="http://schemas.openxmlformats.org/officeDocument/2006/math" xmlns="" val="1"/>
+              <ma14:wrappingTextBoxFlag xmlns="" xmlns:m="http://schemas.openxmlformats.org/officeDocument/2006/math" xmlns:a14="http://schemas.microsoft.com/office/drawing/2010/main" xmlns:ma14="http://schemas.microsoft.com/office/mac/drawingml/2011/main" val="1"/>
             </a:ext>
           </a:extLst>
         </p:spPr>
@@ -6167,7 +6175,7 @@
           </a:ln>
           <a:extLst>
             <a:ext uri="{C572A759-6A51-4108-AA02-DFA0A04FC94B}">
-              <ma14:wrappingTextBoxFlag xmlns:ma14="http://schemas.microsoft.com/office/mac/drawingml/2011/main" xmlns:a14="http://schemas.microsoft.com/office/drawing/2010/main" xmlns:m="http://schemas.openxmlformats.org/officeDocument/2006/math" xmlns="" val="1"/>
+              <ma14:wrappingTextBoxFlag xmlns="" xmlns:m="http://schemas.openxmlformats.org/officeDocument/2006/math" xmlns:a14="http://schemas.microsoft.com/office/drawing/2010/main" xmlns:ma14="http://schemas.microsoft.com/office/mac/drawingml/2011/main" val="1"/>
             </a:ext>
           </a:extLst>
         </p:spPr>
@@ -6279,7 +6287,7 @@
             <a:effectLst/>
             <a:extLst>
               <a:ext uri="{C572A759-6A51-4108-AA02-DFA0A04FC94B}">
-                <ma14:wrappingTextBoxFlag xmlns:ma14="http://schemas.microsoft.com/office/mac/drawingml/2011/main" xmlns:a14="http://schemas.microsoft.com/office/drawing/2010/main" xmlns:m="http://schemas.openxmlformats.org/officeDocument/2006/math" xmlns="" val="1"/>
+                <ma14:wrappingTextBoxFlag xmlns="" xmlns:m="http://schemas.openxmlformats.org/officeDocument/2006/math" xmlns:a14="http://schemas.microsoft.com/office/drawing/2010/main" xmlns:ma14="http://schemas.microsoft.com/office/mac/drawingml/2011/main" val="1"/>
               </a:ext>
             </a:extLst>
           </p:spPr>
@@ -6440,7 +6448,7 @@
             <a:effectLst/>
             <a:extLst>
               <a:ext uri="{C572A759-6A51-4108-AA02-DFA0A04FC94B}">
-                <ma14:wrappingTextBoxFlag xmlns:ma14="http://schemas.microsoft.com/office/mac/drawingml/2011/main" xmlns:a14="http://schemas.microsoft.com/office/drawing/2010/main" xmlns:m="http://schemas.openxmlformats.org/officeDocument/2006/math" xmlns="" val="1"/>
+                <ma14:wrappingTextBoxFlag xmlns="" xmlns:m="http://schemas.openxmlformats.org/officeDocument/2006/math" xmlns:a14="http://schemas.microsoft.com/office/drawing/2010/main" xmlns:ma14="http://schemas.microsoft.com/office/mac/drawingml/2011/main" val="1"/>
               </a:ext>
             </a:extLst>
           </p:spPr>
@@ -6531,7 +6539,7 @@
           </a:ln>
           <a:extLst>
             <a:ext uri="{C572A759-6A51-4108-AA02-DFA0A04FC94B}">
-              <ma14:wrappingTextBoxFlag xmlns:ma14="http://schemas.microsoft.com/office/mac/drawingml/2011/main" xmlns:a14="http://schemas.microsoft.com/office/drawing/2010/main" xmlns:m="http://schemas.openxmlformats.org/officeDocument/2006/math" xmlns="" val="1"/>
+              <ma14:wrappingTextBoxFlag xmlns="" xmlns:m="http://schemas.openxmlformats.org/officeDocument/2006/math" xmlns:a14="http://schemas.microsoft.com/office/drawing/2010/main" xmlns:ma14="http://schemas.microsoft.com/office/mac/drawingml/2011/main" val="1"/>
             </a:ext>
           </a:extLst>
         </p:spPr>
@@ -6643,7 +6651,7 @@
             <a:effectLst/>
             <a:extLst>
               <a:ext uri="{C572A759-6A51-4108-AA02-DFA0A04FC94B}">
-                <ma14:wrappingTextBoxFlag xmlns:ma14="http://schemas.microsoft.com/office/mac/drawingml/2011/main" xmlns:a14="http://schemas.microsoft.com/office/drawing/2010/main" xmlns:m="http://schemas.openxmlformats.org/officeDocument/2006/math" xmlns="" val="1"/>
+                <ma14:wrappingTextBoxFlag xmlns="" xmlns:m="http://schemas.openxmlformats.org/officeDocument/2006/math" xmlns:a14="http://schemas.microsoft.com/office/drawing/2010/main" xmlns:ma14="http://schemas.microsoft.com/office/mac/drawingml/2011/main" val="1"/>
               </a:ext>
             </a:extLst>
           </p:spPr>
@@ -6757,7 +6765,7 @@
             <a:effectLst/>
             <a:extLst>
               <a:ext uri="{C572A759-6A51-4108-AA02-DFA0A04FC94B}">
-                <ma14:wrappingTextBoxFlag xmlns:ma14="http://schemas.microsoft.com/office/mac/drawingml/2011/main" xmlns:a14="http://schemas.microsoft.com/office/drawing/2010/main" xmlns:m="http://schemas.openxmlformats.org/officeDocument/2006/math" xmlns="" val="1"/>
+                <ma14:wrappingTextBoxFlag xmlns="" xmlns:m="http://schemas.openxmlformats.org/officeDocument/2006/math" xmlns:a14="http://schemas.microsoft.com/office/drawing/2010/main" xmlns:ma14="http://schemas.microsoft.com/office/mac/drawingml/2011/main" val="1"/>
               </a:ext>
             </a:extLst>
           </p:spPr>
@@ -6848,7 +6856,7 @@
           </a:ln>
           <a:extLst>
             <a:ext uri="{C572A759-6A51-4108-AA02-DFA0A04FC94B}">
-              <ma14:wrappingTextBoxFlag xmlns:ma14="http://schemas.microsoft.com/office/mac/drawingml/2011/main" xmlns:a14="http://schemas.microsoft.com/office/drawing/2010/main" xmlns:m="http://schemas.openxmlformats.org/officeDocument/2006/math" xmlns="" val="1"/>
+              <ma14:wrappingTextBoxFlag xmlns="" xmlns:m="http://schemas.openxmlformats.org/officeDocument/2006/math" xmlns:a14="http://schemas.microsoft.com/office/drawing/2010/main" xmlns:ma14="http://schemas.microsoft.com/office/mac/drawingml/2011/main" val="1"/>
             </a:ext>
           </a:extLst>
         </p:spPr>
@@ -6976,7 +6984,7 @@
             <a:effectLst/>
             <a:extLst>
               <a:ext uri="{C572A759-6A51-4108-AA02-DFA0A04FC94B}">
-                <ma14:wrappingTextBoxFlag xmlns:ma14="http://schemas.microsoft.com/office/mac/drawingml/2011/main" xmlns:a14="http://schemas.microsoft.com/office/drawing/2010/main" xmlns:m="http://schemas.openxmlformats.org/officeDocument/2006/math" xmlns="" val="1"/>
+                <ma14:wrappingTextBoxFlag xmlns="" xmlns:m="http://schemas.openxmlformats.org/officeDocument/2006/math" xmlns:a14="http://schemas.microsoft.com/office/drawing/2010/main" xmlns:ma14="http://schemas.microsoft.com/office/mac/drawingml/2011/main" val="1"/>
               </a:ext>
             </a:extLst>
           </p:spPr>
@@ -7067,7 +7075,7 @@
           </a:ln>
           <a:extLst>
             <a:ext uri="{C572A759-6A51-4108-AA02-DFA0A04FC94B}">
-              <ma14:wrappingTextBoxFlag xmlns:ma14="http://schemas.microsoft.com/office/mac/drawingml/2011/main" xmlns:a14="http://schemas.microsoft.com/office/drawing/2010/main" xmlns:m="http://schemas.openxmlformats.org/officeDocument/2006/math" xmlns="" val="1"/>
+              <ma14:wrappingTextBoxFlag xmlns="" xmlns:m="http://schemas.openxmlformats.org/officeDocument/2006/math" xmlns:a14="http://schemas.microsoft.com/office/drawing/2010/main" xmlns:ma14="http://schemas.microsoft.com/office/mac/drawingml/2011/main" val="1"/>
             </a:ext>
           </a:extLst>
         </p:spPr>
@@ -7215,7 +7223,7 @@
             <a:effectLst/>
             <a:extLst>
               <a:ext uri="{C572A759-6A51-4108-AA02-DFA0A04FC94B}">
-                <ma14:wrappingTextBoxFlag xmlns:ma14="http://schemas.microsoft.com/office/mac/drawingml/2011/main" xmlns:a14="http://schemas.microsoft.com/office/drawing/2010/main" xmlns:m="http://schemas.openxmlformats.org/officeDocument/2006/math" xmlns="" val="1"/>
+                <ma14:wrappingTextBoxFlag xmlns="" xmlns:m="http://schemas.openxmlformats.org/officeDocument/2006/math" xmlns:a14="http://schemas.microsoft.com/office/drawing/2010/main" xmlns:ma14="http://schemas.microsoft.com/office/mac/drawingml/2011/main" val="1"/>
               </a:ext>
             </a:extLst>
           </p:spPr>
@@ -7306,7 +7314,7 @@
           </a:ln>
           <a:extLst>
             <a:ext uri="{C572A759-6A51-4108-AA02-DFA0A04FC94B}">
-              <ma14:wrappingTextBoxFlag xmlns:ma14="http://schemas.microsoft.com/office/mac/drawingml/2011/main" xmlns:a14="http://schemas.microsoft.com/office/drawing/2010/main" xmlns:m="http://schemas.openxmlformats.org/officeDocument/2006/math" xmlns="" val="1"/>
+              <ma14:wrappingTextBoxFlag xmlns="" xmlns:m="http://schemas.openxmlformats.org/officeDocument/2006/math" xmlns:a14="http://schemas.microsoft.com/office/drawing/2010/main" xmlns:ma14="http://schemas.microsoft.com/office/mac/drawingml/2011/main" val="1"/>
             </a:ext>
           </a:extLst>
         </p:spPr>
@@ -7511,7 +7519,7 @@
             <a:effectLst/>
             <a:extLst>
               <a:ext uri="{C572A759-6A51-4108-AA02-DFA0A04FC94B}">
-                <ma14:wrappingTextBoxFlag xmlns:ma14="http://schemas.microsoft.com/office/mac/drawingml/2011/main" xmlns:a14="http://schemas.microsoft.com/office/drawing/2010/main" xmlns:m="http://schemas.openxmlformats.org/officeDocument/2006/math" xmlns="" val="1"/>
+                <ma14:wrappingTextBoxFlag xmlns="" xmlns:m="http://schemas.openxmlformats.org/officeDocument/2006/math" xmlns:a14="http://schemas.microsoft.com/office/drawing/2010/main" xmlns:ma14="http://schemas.microsoft.com/office/mac/drawingml/2011/main" val="1"/>
               </a:ext>
             </a:extLst>
           </p:spPr>
@@ -7606,7 +7614,7 @@
           </a:ln>
           <a:extLst>
             <a:ext uri="{C572A759-6A51-4108-AA02-DFA0A04FC94B}">
-              <ma14:wrappingTextBoxFlag xmlns:ma14="http://schemas.microsoft.com/office/mac/drawingml/2011/main" xmlns:a14="http://schemas.microsoft.com/office/drawing/2010/main" xmlns:m="http://schemas.openxmlformats.org/officeDocument/2006/math" xmlns="" val="1"/>
+              <ma14:wrappingTextBoxFlag xmlns="" xmlns:m="http://schemas.openxmlformats.org/officeDocument/2006/math" xmlns:a14="http://schemas.microsoft.com/office/drawing/2010/main" xmlns:ma14="http://schemas.microsoft.com/office/mac/drawingml/2011/main" val="1"/>
             </a:ext>
           </a:extLst>
         </p:spPr>
@@ -7696,7 +7704,7 @@
           </a:ln>
           <a:extLst>
             <a:ext uri="{C572A759-6A51-4108-AA02-DFA0A04FC94B}">
-              <ma14:wrappingTextBoxFlag xmlns:ma14="http://schemas.microsoft.com/office/mac/drawingml/2011/main" xmlns:a14="http://schemas.microsoft.com/office/drawing/2010/main" xmlns:m="http://schemas.openxmlformats.org/officeDocument/2006/math" xmlns="" val="1"/>
+              <ma14:wrappingTextBoxFlag xmlns="" xmlns:m="http://schemas.openxmlformats.org/officeDocument/2006/math" xmlns:a14="http://schemas.microsoft.com/office/drawing/2010/main" xmlns:ma14="http://schemas.microsoft.com/office/mac/drawingml/2011/main" val="1"/>
             </a:ext>
           </a:extLst>
         </p:spPr>
@@ -7786,7 +7794,7 @@
           </a:ln>
           <a:extLst>
             <a:ext uri="{C572A759-6A51-4108-AA02-DFA0A04FC94B}">
-              <ma14:wrappingTextBoxFlag xmlns:ma14="http://schemas.microsoft.com/office/mac/drawingml/2011/main" xmlns:a14="http://schemas.microsoft.com/office/drawing/2010/main" xmlns:m="http://schemas.openxmlformats.org/officeDocument/2006/math" xmlns="" val="1"/>
+              <ma14:wrappingTextBoxFlag xmlns="" xmlns:m="http://schemas.openxmlformats.org/officeDocument/2006/math" xmlns:a14="http://schemas.microsoft.com/office/drawing/2010/main" xmlns:ma14="http://schemas.microsoft.com/office/mac/drawingml/2011/main" val="1"/>
             </a:ext>
           </a:extLst>
         </p:spPr>
@@ -7931,7 +7939,7 @@
           </a:ln>
           <a:extLst>
             <a:ext uri="{C572A759-6A51-4108-AA02-DFA0A04FC94B}">
-              <ma14:wrappingTextBoxFlag xmlns:ma14="http://schemas.microsoft.com/office/mac/drawingml/2011/main" xmlns:a14="http://schemas.microsoft.com/office/drawing/2010/main" xmlns:m="http://schemas.openxmlformats.org/officeDocument/2006/math" xmlns="" val="1"/>
+              <ma14:wrappingTextBoxFlag xmlns="" xmlns:m="http://schemas.openxmlformats.org/officeDocument/2006/math" xmlns:a14="http://schemas.microsoft.com/office/drawing/2010/main" xmlns:ma14="http://schemas.microsoft.com/office/mac/drawingml/2011/main" val="1"/>
             </a:ext>
           </a:extLst>
         </p:spPr>
@@ -8021,7 +8029,7 @@
           </a:ln>
           <a:extLst>
             <a:ext uri="{C572A759-6A51-4108-AA02-DFA0A04FC94B}">
-              <ma14:wrappingTextBoxFlag xmlns:ma14="http://schemas.microsoft.com/office/mac/drawingml/2011/main" xmlns:a14="http://schemas.microsoft.com/office/drawing/2010/main" xmlns:m="http://schemas.openxmlformats.org/officeDocument/2006/math" xmlns="" val="1"/>
+              <ma14:wrappingTextBoxFlag xmlns="" xmlns:m="http://schemas.openxmlformats.org/officeDocument/2006/math" xmlns:a14="http://schemas.microsoft.com/office/drawing/2010/main" xmlns:ma14="http://schemas.microsoft.com/office/mac/drawingml/2011/main" val="1"/>
             </a:ext>
           </a:extLst>
         </p:spPr>
@@ -8144,7 +8152,7 @@
           </a:ln>
           <a:extLst>
             <a:ext uri="{C572A759-6A51-4108-AA02-DFA0A04FC94B}">
-              <ma14:wrappingTextBoxFlag xmlns:ma14="http://schemas.microsoft.com/office/mac/drawingml/2011/main" xmlns:a14="http://schemas.microsoft.com/office/drawing/2010/main" xmlns:m="http://schemas.openxmlformats.org/officeDocument/2006/math" xmlns="" val="1"/>
+              <ma14:wrappingTextBoxFlag xmlns="" xmlns:m="http://schemas.openxmlformats.org/officeDocument/2006/math" xmlns:a14="http://schemas.microsoft.com/office/drawing/2010/main" xmlns:ma14="http://schemas.microsoft.com/office/mac/drawingml/2011/main" val="1"/>
             </a:ext>
           </a:extLst>
         </p:spPr>
@@ -8325,7 +8333,7 @@
             <a:effectLst/>
             <a:extLst>
               <a:ext uri="{C572A759-6A51-4108-AA02-DFA0A04FC94B}">
-                <ma14:wrappingTextBoxFlag xmlns:ma14="http://schemas.microsoft.com/office/mac/drawingml/2011/main" xmlns:a14="http://schemas.microsoft.com/office/drawing/2010/main" xmlns:m="http://schemas.openxmlformats.org/officeDocument/2006/math" xmlns="" val="1"/>
+                <ma14:wrappingTextBoxFlag xmlns="" xmlns:m="http://schemas.openxmlformats.org/officeDocument/2006/math" xmlns:a14="http://schemas.microsoft.com/office/drawing/2010/main" xmlns:ma14="http://schemas.microsoft.com/office/mac/drawingml/2011/main" val="1"/>
               </a:ext>
             </a:extLst>
           </p:spPr>
@@ -8438,7 +8446,7 @@
             <a:effectLst/>
             <a:extLst>
               <a:ext uri="{C572A759-6A51-4108-AA02-DFA0A04FC94B}">
-                <ma14:wrappingTextBoxFlag xmlns:ma14="http://schemas.microsoft.com/office/mac/drawingml/2011/main" xmlns:a14="http://schemas.microsoft.com/office/drawing/2010/main" xmlns:m="http://schemas.openxmlformats.org/officeDocument/2006/math" xmlns="" val="1"/>
+                <ma14:wrappingTextBoxFlag xmlns="" xmlns:m="http://schemas.openxmlformats.org/officeDocument/2006/math" xmlns:a14="http://schemas.microsoft.com/office/drawing/2010/main" xmlns:ma14="http://schemas.microsoft.com/office/mac/drawingml/2011/main" val="1"/>
               </a:ext>
             </a:extLst>
           </p:spPr>
@@ -8512,7 +8520,7 @@
           </a:ln>
           <a:extLst>
             <a:ext uri="{C572A759-6A51-4108-AA02-DFA0A04FC94B}">
-              <ma14:wrappingTextBoxFlag xmlns:ma14="http://schemas.microsoft.com/office/mac/drawingml/2011/main" xmlns:a14="http://schemas.microsoft.com/office/drawing/2010/main" xmlns:m="http://schemas.openxmlformats.org/officeDocument/2006/math" xmlns="" val="1"/>
+              <ma14:wrappingTextBoxFlag xmlns="" xmlns:m="http://schemas.openxmlformats.org/officeDocument/2006/math" xmlns:a14="http://schemas.microsoft.com/office/drawing/2010/main" xmlns:ma14="http://schemas.microsoft.com/office/mac/drawingml/2011/main" val="1"/>
             </a:ext>
           </a:extLst>
         </p:spPr>
@@ -8697,7 +8705,7 @@
           </a:ln>
           <a:extLst>
             <a:ext uri="{C572A759-6A51-4108-AA02-DFA0A04FC94B}">
-              <ma14:wrappingTextBoxFlag xmlns:ma14="http://schemas.microsoft.com/office/mac/drawingml/2011/main" xmlns:a14="http://schemas.microsoft.com/office/drawing/2010/main" xmlns:m="http://schemas.openxmlformats.org/officeDocument/2006/math" xmlns="" val="1"/>
+              <ma14:wrappingTextBoxFlag xmlns="" xmlns:m="http://schemas.openxmlformats.org/officeDocument/2006/math" xmlns:a14="http://schemas.microsoft.com/office/drawing/2010/main" xmlns:ma14="http://schemas.microsoft.com/office/mac/drawingml/2011/main" val="1"/>
             </a:ext>
           </a:extLst>
         </p:spPr>
@@ -8741,7 +8749,7 @@
           </a:prstGeom>
           <a:extLst>
             <a:ext uri="{C572A759-6A51-4108-AA02-DFA0A04FC94B}">
-              <ma14:wrappingTextBoxFlag xmlns:ma14="http://schemas.microsoft.com/office/mac/drawingml/2011/main" xmlns:a14="http://schemas.microsoft.com/office/drawing/2010/main" xmlns:m="http://schemas.openxmlformats.org/officeDocument/2006/math" xmlns="" val="1"/>
+              <ma14:wrappingTextBoxFlag xmlns="" xmlns:m="http://schemas.openxmlformats.org/officeDocument/2006/math" xmlns:a14="http://schemas.microsoft.com/office/drawing/2010/main" xmlns:ma14="http://schemas.microsoft.com/office/mac/drawingml/2011/main" val="1"/>
             </a:ext>
           </a:extLst>
         </p:spPr>
@@ -8902,7 +8910,7 @@
             <a:effectLst/>
             <a:extLst>
               <a:ext uri="{C572A759-6A51-4108-AA02-DFA0A04FC94B}">
-                <ma14:wrappingTextBoxFlag xmlns:ma14="http://schemas.microsoft.com/office/mac/drawingml/2011/main" xmlns:a14="http://schemas.microsoft.com/office/drawing/2010/main" xmlns:m="http://schemas.openxmlformats.org/officeDocument/2006/math" xmlns="" val="1"/>
+                <ma14:wrappingTextBoxFlag xmlns="" xmlns:m="http://schemas.openxmlformats.org/officeDocument/2006/math" xmlns:a14="http://schemas.microsoft.com/office/drawing/2010/main" xmlns:ma14="http://schemas.microsoft.com/office/mac/drawingml/2011/main" val="1"/>
               </a:ext>
             </a:extLst>
           </p:spPr>
@@ -8964,7 +8972,7 @@
           </a:ln>
           <a:extLst>
             <a:ext uri="{C572A759-6A51-4108-AA02-DFA0A04FC94B}">
-              <ma14:wrappingTextBoxFlag xmlns:ma14="http://schemas.microsoft.com/office/mac/drawingml/2011/main" xmlns:a14="http://schemas.microsoft.com/office/drawing/2010/main" xmlns:m="http://schemas.openxmlformats.org/officeDocument/2006/math" xmlns="" val="1"/>
+              <ma14:wrappingTextBoxFlag xmlns="" xmlns:m="http://schemas.openxmlformats.org/officeDocument/2006/math" xmlns:a14="http://schemas.microsoft.com/office/drawing/2010/main" xmlns:ma14="http://schemas.microsoft.com/office/mac/drawingml/2011/main" val="1"/>
             </a:ext>
           </a:extLst>
         </p:spPr>
@@ -9064,7 +9072,7 @@
           </a:prstGeom>
           <a:extLst>
             <a:ext uri="{C572A759-6A51-4108-AA02-DFA0A04FC94B}">
-              <ma14:wrappingTextBoxFlag xmlns:ma14="http://schemas.microsoft.com/office/mac/drawingml/2011/main" xmlns:a14="http://schemas.microsoft.com/office/drawing/2010/main" xmlns:m="http://schemas.openxmlformats.org/officeDocument/2006/math" xmlns="" val="1"/>
+              <ma14:wrappingTextBoxFlag xmlns="" xmlns:m="http://schemas.openxmlformats.org/officeDocument/2006/math" xmlns:a14="http://schemas.microsoft.com/office/drawing/2010/main" xmlns:ma14="http://schemas.microsoft.com/office/mac/drawingml/2011/main" val="1"/>
             </a:ext>
           </a:extLst>
         </p:spPr>
@@ -9099,7 +9107,7 @@
           </a:ln>
           <a:extLst>
             <a:ext uri="{C572A759-6A51-4108-AA02-DFA0A04FC94B}">
-              <ma14:wrappingTextBoxFlag xmlns:ma14="http://schemas.microsoft.com/office/mac/drawingml/2011/main" xmlns:a14="http://schemas.microsoft.com/office/drawing/2010/main" xmlns:m="http://schemas.openxmlformats.org/officeDocument/2006/math" xmlns="" val="1"/>
+              <ma14:wrappingTextBoxFlag xmlns="" xmlns:m="http://schemas.openxmlformats.org/officeDocument/2006/math" xmlns:a14="http://schemas.microsoft.com/office/drawing/2010/main" xmlns:ma14="http://schemas.microsoft.com/office/mac/drawingml/2011/main" val="1"/>
             </a:ext>
           </a:extLst>
         </p:spPr>
@@ -9142,7 +9150,7 @@
           </a:ln>
           <a:extLst>
             <a:ext uri="{C572A759-6A51-4108-AA02-DFA0A04FC94B}">
-              <ma14:wrappingTextBoxFlag xmlns:ma14="http://schemas.microsoft.com/office/mac/drawingml/2011/main" xmlns:a14="http://schemas.microsoft.com/office/drawing/2010/main" xmlns:m="http://schemas.openxmlformats.org/officeDocument/2006/math" xmlns="" val="1"/>
+              <ma14:wrappingTextBoxFlag xmlns="" xmlns:m="http://schemas.openxmlformats.org/officeDocument/2006/math" xmlns:a14="http://schemas.microsoft.com/office/drawing/2010/main" xmlns:ma14="http://schemas.microsoft.com/office/mac/drawingml/2011/main" val="1"/>
             </a:ext>
           </a:extLst>
         </p:spPr>
@@ -9268,7 +9276,7 @@
           </a:ln>
           <a:extLst>
             <a:ext uri="{C572A759-6A51-4108-AA02-DFA0A04FC94B}">
-              <ma14:wrappingTextBoxFlag xmlns:ma14="http://schemas.microsoft.com/office/mac/drawingml/2011/main" xmlns:a14="http://schemas.microsoft.com/office/drawing/2010/main" xmlns:m="http://schemas.openxmlformats.org/officeDocument/2006/math" xmlns="" val="1"/>
+              <ma14:wrappingTextBoxFlag xmlns="" xmlns:m="http://schemas.openxmlformats.org/officeDocument/2006/math" xmlns:a14="http://schemas.microsoft.com/office/drawing/2010/main" xmlns:ma14="http://schemas.microsoft.com/office/mac/drawingml/2011/main" val="1"/>
             </a:ext>
           </a:extLst>
         </p:spPr>
@@ -9358,7 +9366,7 @@
           </a:ln>
           <a:extLst>
             <a:ext uri="{C572A759-6A51-4108-AA02-DFA0A04FC94B}">
-              <ma14:wrappingTextBoxFlag xmlns:ma14="http://schemas.microsoft.com/office/mac/drawingml/2011/main" xmlns:a14="http://schemas.microsoft.com/office/drawing/2010/main" xmlns:m="http://schemas.openxmlformats.org/officeDocument/2006/math" xmlns="" val="1"/>
+              <ma14:wrappingTextBoxFlag xmlns="" xmlns:m="http://schemas.openxmlformats.org/officeDocument/2006/math" xmlns:a14="http://schemas.microsoft.com/office/drawing/2010/main" xmlns:ma14="http://schemas.microsoft.com/office/mac/drawingml/2011/main" val="1"/>
             </a:ext>
           </a:extLst>
         </p:spPr>
@@ -9444,7 +9452,7 @@
           </a:ln>
           <a:extLst>
             <a:ext uri="{C572A759-6A51-4108-AA02-DFA0A04FC94B}">
-              <ma14:wrappingTextBoxFlag xmlns:ma14="http://schemas.microsoft.com/office/mac/drawingml/2011/main" xmlns:a14="http://schemas.microsoft.com/office/drawing/2010/main" xmlns:m="http://schemas.openxmlformats.org/officeDocument/2006/math" xmlns="" val="1"/>
+              <ma14:wrappingTextBoxFlag xmlns="" xmlns:m="http://schemas.openxmlformats.org/officeDocument/2006/math" xmlns:a14="http://schemas.microsoft.com/office/drawing/2010/main" xmlns:ma14="http://schemas.microsoft.com/office/mac/drawingml/2011/main" val="1"/>
             </a:ext>
           </a:extLst>
         </p:spPr>
@@ -9491,7 +9499,7 @@
           </a:ln>
           <a:extLst>
             <a:ext uri="{C572A759-6A51-4108-AA02-DFA0A04FC94B}">
-              <ma14:wrappingTextBoxFlag xmlns:ma14="http://schemas.microsoft.com/office/mac/drawingml/2011/main" xmlns:a14="http://schemas.microsoft.com/office/drawing/2010/main" xmlns:m="http://schemas.openxmlformats.org/officeDocument/2006/math" xmlns="" val="1"/>
+              <ma14:wrappingTextBoxFlag xmlns="" xmlns:m="http://schemas.openxmlformats.org/officeDocument/2006/math" xmlns:a14="http://schemas.microsoft.com/office/drawing/2010/main" xmlns:ma14="http://schemas.microsoft.com/office/mac/drawingml/2011/main" val="1"/>
             </a:ext>
           </a:extLst>
         </p:spPr>
@@ -9577,7 +9585,7 @@
           </a:ln>
           <a:extLst>
             <a:ext uri="{C572A759-6A51-4108-AA02-DFA0A04FC94B}">
-              <ma14:wrappingTextBoxFlag xmlns:ma14="http://schemas.microsoft.com/office/mac/drawingml/2011/main" xmlns:a14="http://schemas.microsoft.com/office/drawing/2010/main" xmlns:m="http://schemas.openxmlformats.org/officeDocument/2006/math" xmlns="" val="1"/>
+              <ma14:wrappingTextBoxFlag xmlns="" xmlns:m="http://schemas.openxmlformats.org/officeDocument/2006/math" xmlns:a14="http://schemas.microsoft.com/office/drawing/2010/main" xmlns:ma14="http://schemas.microsoft.com/office/mac/drawingml/2011/main" val="1"/>
             </a:ext>
           </a:extLst>
         </p:spPr>
@@ -9624,7 +9632,7 @@
           </a:ln>
           <a:extLst>
             <a:ext uri="{C572A759-6A51-4108-AA02-DFA0A04FC94B}">
-              <ma14:wrappingTextBoxFlag xmlns:ma14="http://schemas.microsoft.com/office/mac/drawingml/2011/main" xmlns:a14="http://schemas.microsoft.com/office/drawing/2010/main" xmlns:m="http://schemas.openxmlformats.org/officeDocument/2006/math" xmlns="" val="1"/>
+              <ma14:wrappingTextBoxFlag xmlns="" xmlns:m="http://schemas.openxmlformats.org/officeDocument/2006/math" xmlns:a14="http://schemas.microsoft.com/office/drawing/2010/main" xmlns:ma14="http://schemas.microsoft.com/office/mac/drawingml/2011/main" val="1"/>
             </a:ext>
           </a:extLst>
         </p:spPr>
@@ -9736,7 +9744,7 @@
           </a:ln>
           <a:extLst>
             <a:ext uri="{C572A759-6A51-4108-AA02-DFA0A04FC94B}">
-              <ma14:wrappingTextBoxFlag xmlns:ma14="http://schemas.microsoft.com/office/mac/drawingml/2011/main" xmlns:a14="http://schemas.microsoft.com/office/drawing/2010/main" xmlns:m="http://schemas.openxmlformats.org/officeDocument/2006/math" xmlns="" val="1"/>
+              <ma14:wrappingTextBoxFlag xmlns="" xmlns:m="http://schemas.openxmlformats.org/officeDocument/2006/math" xmlns:a14="http://schemas.microsoft.com/office/drawing/2010/main" xmlns:ma14="http://schemas.microsoft.com/office/mac/drawingml/2011/main" val="1"/>
             </a:ext>
           </a:extLst>
         </p:spPr>
@@ -9783,7 +9791,7 @@
           </a:ln>
           <a:extLst>
             <a:ext uri="{C572A759-6A51-4108-AA02-DFA0A04FC94B}">
-              <ma14:wrappingTextBoxFlag xmlns:ma14="http://schemas.microsoft.com/office/mac/drawingml/2011/main" xmlns:a14="http://schemas.microsoft.com/office/drawing/2010/main" xmlns:m="http://schemas.openxmlformats.org/officeDocument/2006/math" xmlns="" val="1"/>
+              <ma14:wrappingTextBoxFlag xmlns="" xmlns:m="http://schemas.openxmlformats.org/officeDocument/2006/math" xmlns:a14="http://schemas.microsoft.com/office/drawing/2010/main" xmlns:ma14="http://schemas.microsoft.com/office/mac/drawingml/2011/main" val="1"/>
             </a:ext>
           </a:extLst>
         </p:spPr>
@@ -9876,7 +9884,7 @@
           </a:ln>
           <a:extLst>
             <a:ext uri="{C572A759-6A51-4108-AA02-DFA0A04FC94B}">
-              <ma14:wrappingTextBoxFlag xmlns:ma14="http://schemas.microsoft.com/office/mac/drawingml/2011/main" xmlns:a14="http://schemas.microsoft.com/office/drawing/2010/main" xmlns:m="http://schemas.openxmlformats.org/officeDocument/2006/math" xmlns="" val="1"/>
+              <ma14:wrappingTextBoxFlag xmlns="" xmlns:m="http://schemas.openxmlformats.org/officeDocument/2006/math" xmlns:a14="http://schemas.microsoft.com/office/drawing/2010/main" xmlns:ma14="http://schemas.microsoft.com/office/mac/drawingml/2011/main" val="1"/>
             </a:ext>
           </a:extLst>
         </p:spPr>
@@ -9992,7 +10000,7 @@
           </a:ln>
           <a:extLst>
             <a:ext uri="{C572A759-6A51-4108-AA02-DFA0A04FC94B}">
-              <ma14:wrappingTextBoxFlag xmlns:ma14="http://schemas.microsoft.com/office/mac/drawingml/2011/main" xmlns:a14="http://schemas.microsoft.com/office/drawing/2010/main" xmlns:m="http://schemas.openxmlformats.org/officeDocument/2006/math" xmlns="" val="1"/>
+              <ma14:wrappingTextBoxFlag xmlns="" xmlns:m="http://schemas.openxmlformats.org/officeDocument/2006/math" xmlns:a14="http://schemas.microsoft.com/office/drawing/2010/main" xmlns:ma14="http://schemas.microsoft.com/office/mac/drawingml/2011/main" val="1"/>
             </a:ext>
           </a:extLst>
         </p:spPr>
@@ -10082,7 +10090,7 @@
           </a:ln>
           <a:extLst>
             <a:ext uri="{C572A759-6A51-4108-AA02-DFA0A04FC94B}">
-              <ma14:wrappingTextBoxFlag xmlns:ma14="http://schemas.microsoft.com/office/mac/drawingml/2011/main" xmlns:a14="http://schemas.microsoft.com/office/drawing/2010/main" xmlns:m="http://schemas.openxmlformats.org/officeDocument/2006/math" xmlns="" val="1"/>
+              <ma14:wrappingTextBoxFlag xmlns="" xmlns:m="http://schemas.openxmlformats.org/officeDocument/2006/math" xmlns:a14="http://schemas.microsoft.com/office/drawing/2010/main" xmlns:ma14="http://schemas.microsoft.com/office/mac/drawingml/2011/main" val="1"/>
             </a:ext>
           </a:extLst>
         </p:spPr>
@@ -10130,7 +10138,7 @@
           </a:ln>
           <a:extLst>
             <a:ext uri="{C572A759-6A51-4108-AA02-DFA0A04FC94B}">
-              <ma14:wrappingTextBoxFlag xmlns:ma14="http://schemas.microsoft.com/office/mac/drawingml/2011/main" xmlns:a14="http://schemas.microsoft.com/office/drawing/2010/main" xmlns:m="http://schemas.openxmlformats.org/officeDocument/2006/math" xmlns="" val="1"/>
+              <ma14:wrappingTextBoxFlag xmlns="" xmlns:m="http://schemas.openxmlformats.org/officeDocument/2006/math" xmlns:a14="http://schemas.microsoft.com/office/drawing/2010/main" xmlns:ma14="http://schemas.microsoft.com/office/mac/drawingml/2011/main" val="1"/>
             </a:ext>
           </a:extLst>
         </p:spPr>
@@ -10177,7 +10185,7 @@
           </a:ln>
           <a:extLst>
             <a:ext uri="{C572A759-6A51-4108-AA02-DFA0A04FC94B}">
-              <ma14:wrappingTextBoxFlag xmlns:ma14="http://schemas.microsoft.com/office/mac/drawingml/2011/main" xmlns:a14="http://schemas.microsoft.com/office/drawing/2010/main" xmlns:m="http://schemas.openxmlformats.org/officeDocument/2006/math" xmlns="" val="1"/>
+              <ma14:wrappingTextBoxFlag xmlns="" xmlns:m="http://schemas.openxmlformats.org/officeDocument/2006/math" xmlns:a14="http://schemas.microsoft.com/office/drawing/2010/main" xmlns:ma14="http://schemas.microsoft.com/office/mac/drawingml/2011/main" val="1"/>
             </a:ext>
           </a:extLst>
         </p:spPr>
@@ -10224,7 +10232,7 @@
           </a:ln>
           <a:extLst>
             <a:ext uri="{C572A759-6A51-4108-AA02-DFA0A04FC94B}">
-              <ma14:wrappingTextBoxFlag xmlns:ma14="http://schemas.microsoft.com/office/mac/drawingml/2011/main" xmlns:a14="http://schemas.microsoft.com/office/drawing/2010/main" xmlns:m="http://schemas.openxmlformats.org/officeDocument/2006/math" xmlns="" val="1"/>
+              <ma14:wrappingTextBoxFlag xmlns="" xmlns:m="http://schemas.openxmlformats.org/officeDocument/2006/math" xmlns:a14="http://schemas.microsoft.com/office/drawing/2010/main" xmlns:ma14="http://schemas.microsoft.com/office/mac/drawingml/2011/main" val="1"/>
             </a:ext>
           </a:extLst>
         </p:spPr>
@@ -10300,7 +10308,7 @@
           </a:ln>
           <a:extLst>
             <a:ext uri="{C572A759-6A51-4108-AA02-DFA0A04FC94B}">
-              <ma14:wrappingTextBoxFlag xmlns:ma14="http://schemas.microsoft.com/office/mac/drawingml/2011/main" xmlns:a14="http://schemas.microsoft.com/office/drawing/2010/main" xmlns:m="http://schemas.openxmlformats.org/officeDocument/2006/math" xmlns="" val="1"/>
+              <ma14:wrappingTextBoxFlag xmlns="" xmlns:m="http://schemas.openxmlformats.org/officeDocument/2006/math" xmlns:a14="http://schemas.microsoft.com/office/drawing/2010/main" xmlns:ma14="http://schemas.microsoft.com/office/mac/drawingml/2011/main" val="1"/>
             </a:ext>
           </a:extLst>
         </p:spPr>
@@ -10347,7 +10355,7 @@
           </a:ln>
           <a:extLst>
             <a:ext uri="{C572A759-6A51-4108-AA02-DFA0A04FC94B}">
-              <ma14:wrappingTextBoxFlag xmlns:ma14="http://schemas.microsoft.com/office/mac/drawingml/2011/main" xmlns:a14="http://schemas.microsoft.com/office/drawing/2010/main" xmlns:m="http://schemas.openxmlformats.org/officeDocument/2006/math" xmlns="" val="1"/>
+              <ma14:wrappingTextBoxFlag xmlns="" xmlns:m="http://schemas.openxmlformats.org/officeDocument/2006/math" xmlns:a14="http://schemas.microsoft.com/office/drawing/2010/main" xmlns:ma14="http://schemas.microsoft.com/office/mac/drawingml/2011/main" val="1"/>
             </a:ext>
           </a:extLst>
         </p:spPr>
@@ -10436,7 +10444,7 @@
           </a:ln>
           <a:extLst>
             <a:ext uri="{C572A759-6A51-4108-AA02-DFA0A04FC94B}">
-              <ma14:wrappingTextBoxFlag xmlns:ma14="http://schemas.microsoft.com/office/mac/drawingml/2011/main" xmlns:a14="http://schemas.microsoft.com/office/drawing/2010/main" xmlns:m="http://schemas.openxmlformats.org/officeDocument/2006/math" xmlns="" val="1"/>
+              <ma14:wrappingTextBoxFlag xmlns="" xmlns:m="http://schemas.openxmlformats.org/officeDocument/2006/math" xmlns:a14="http://schemas.microsoft.com/office/drawing/2010/main" xmlns:ma14="http://schemas.microsoft.com/office/mac/drawingml/2011/main" val="1"/>
             </a:ext>
           </a:extLst>
         </p:spPr>
@@ -10508,7 +10516,7 @@
         </p:nvSpPr>
         <p:spPr>
           <a:xfrm>
-            <a:off x="892219" y="5327396"/>
+            <a:off x="826367" y="5327396"/>
             <a:ext cx="4343401" cy="164593"/>
           </a:xfrm>
           <a:prstGeom prst="rect">
@@ -10519,13 +10527,13 @@
           </a:ln>
           <a:extLst>
             <a:ext uri="{C572A759-6A51-4108-AA02-DFA0A04FC94B}">
-              <ma14:wrappingTextBoxFlag xmlns:ma14="http://schemas.microsoft.com/office/mac/drawingml/2011/main" xmlns:a14="http://schemas.microsoft.com/office/drawing/2010/main" xmlns:m="http://schemas.openxmlformats.org/officeDocument/2006/math" xmlns="" val="1"/>
+              <ma14:wrappingTextBoxFlag xmlns="" xmlns:m="http://schemas.openxmlformats.org/officeDocument/2006/math" xmlns:a14="http://schemas.microsoft.com/office/drawing/2010/main" xmlns:ma14="http://schemas.microsoft.com/office/mac/drawingml/2011/main" val="1"/>
             </a:ext>
           </a:extLst>
         </p:spPr>
         <p:txBody>
-          <a:bodyPr lIns="0" tIns="0" rIns="0" bIns="0">
-            <a:normAutofit lnSpcReduction="10000"/>
+          <a:bodyPr lIns="0" tIns="0" rIns="0" bIns="0" anchor="t">
+            <a:normAutofit/>
           </a:bodyPr>
           <a:lstStyle>
             <a:lvl1pPr defTabSz="832104">
@@ -10542,28 +10550,16 @@
           </a:lstStyle>
           <a:p>
             <a:r>
-              <a:rPr dirty="0" err="1"/>
+              <a:rPr sz="1050" dirty="0" err="1"/>
               <a:t>Projektverzeichnis</a:t>
             </a:r>
             <a:r>
-              <a:rPr dirty="0"/>
+              <a:rPr sz="1050" dirty="0"/>
               <a:t>: </a:t>
             </a:r>
             <a:r>
-              <a:rPr dirty="0" err="1"/>
-              <a:t>github.zhaw.ch</a:t>
-            </a:r>
-            <a:r>
-              <a:rPr dirty="0"/>
-              <a:t>/</a:t>
-            </a:r>
-            <a:r>
-              <a:rPr dirty="0" err="1"/>
-              <a:t>muellral</a:t>
-            </a:r>
-            <a:r>
-              <a:rPr dirty="0"/>
-              <a:t>/</a:t>
+              <a:rPr lang="en-US" sz="1050" dirty="0"/>
+              <a:t>https://github.com/muellR/text_analysis</a:t>
             </a:r>
           </a:p>
         </p:txBody>
@@ -10587,7 +10583,7 @@
           </a:ln>
           <a:extLst>
             <a:ext uri="{C572A759-6A51-4108-AA02-DFA0A04FC94B}">
-              <ma14:wrappingTextBoxFlag xmlns:ma14="http://schemas.microsoft.com/office/mac/drawingml/2011/main" xmlns:a14="http://schemas.microsoft.com/office/drawing/2010/main" xmlns:m="http://schemas.openxmlformats.org/officeDocument/2006/math" xmlns="" val="1"/>
+              <ma14:wrappingTextBoxFlag xmlns="" xmlns:m="http://schemas.openxmlformats.org/officeDocument/2006/math" xmlns:a14="http://schemas.microsoft.com/office/drawing/2010/main" xmlns:ma14="http://schemas.microsoft.com/office/mac/drawingml/2011/main" val="1"/>
             </a:ext>
           </a:extLst>
         </p:spPr>
@@ -10634,7 +10630,7 @@
           </a:ln>
           <a:extLst>
             <a:ext uri="{C572A759-6A51-4108-AA02-DFA0A04FC94B}">
-              <ma14:wrappingTextBoxFlag xmlns:ma14="http://schemas.microsoft.com/office/mac/drawingml/2011/main" xmlns:a14="http://schemas.microsoft.com/office/drawing/2010/main" xmlns:m="http://schemas.openxmlformats.org/officeDocument/2006/math" xmlns="" val="1"/>
+              <ma14:wrappingTextBoxFlag xmlns="" xmlns:m="http://schemas.openxmlformats.org/officeDocument/2006/math" xmlns:a14="http://schemas.microsoft.com/office/drawing/2010/main" xmlns:ma14="http://schemas.microsoft.com/office/mac/drawingml/2011/main" val="1"/>
             </a:ext>
           </a:extLst>
         </p:spPr>
@@ -10707,7 +10703,7 @@
           </a:ln>
           <a:extLst>
             <a:ext uri="{C572A759-6A51-4108-AA02-DFA0A04FC94B}">
-              <ma14:wrappingTextBoxFlag xmlns:ma14="http://schemas.microsoft.com/office/mac/drawingml/2011/main" xmlns:a14="http://schemas.microsoft.com/office/drawing/2010/main" xmlns:m="http://schemas.openxmlformats.org/officeDocument/2006/math" xmlns="" val="1"/>
+              <ma14:wrappingTextBoxFlag xmlns="" xmlns:m="http://schemas.openxmlformats.org/officeDocument/2006/math" xmlns:a14="http://schemas.microsoft.com/office/drawing/2010/main" xmlns:ma14="http://schemas.microsoft.com/office/mac/drawingml/2011/main" val="1"/>
             </a:ext>
           </a:extLst>
         </p:spPr>
@@ -10779,7 +10775,7 @@
           </a:ln>
           <a:extLst>
             <a:ext uri="{C572A759-6A51-4108-AA02-DFA0A04FC94B}">
-              <ma14:wrappingTextBoxFlag xmlns:ma14="http://schemas.microsoft.com/office/mac/drawingml/2011/main" xmlns:a14="http://schemas.microsoft.com/office/drawing/2010/main" xmlns:m="http://schemas.openxmlformats.org/officeDocument/2006/math" xmlns="" val="1"/>
+              <ma14:wrappingTextBoxFlag xmlns="" xmlns:m="http://schemas.openxmlformats.org/officeDocument/2006/math" xmlns:a14="http://schemas.microsoft.com/office/drawing/2010/main" xmlns:ma14="http://schemas.microsoft.com/office/mac/drawingml/2011/main" val="1"/>
             </a:ext>
           </a:extLst>
         </p:spPr>
@@ -10823,7 +10819,7 @@
           </a:prstGeom>
           <a:extLst>
             <a:ext uri="{C572A759-6A51-4108-AA02-DFA0A04FC94B}">
-              <ma14:wrappingTextBoxFlag xmlns:ma14="http://schemas.microsoft.com/office/mac/drawingml/2011/main" xmlns:a14="http://schemas.microsoft.com/office/drawing/2010/main" xmlns:m="http://schemas.openxmlformats.org/officeDocument/2006/math" xmlns="" val="1"/>
+              <ma14:wrappingTextBoxFlag xmlns="" xmlns:m="http://schemas.openxmlformats.org/officeDocument/2006/math" xmlns:a14="http://schemas.microsoft.com/office/drawing/2010/main" xmlns:ma14="http://schemas.microsoft.com/office/mac/drawingml/2011/main" val="1"/>
             </a:ext>
           </a:extLst>
         </p:spPr>
@@ -10911,7 +10907,7 @@
           </a:ln>
           <a:extLst>
             <a:ext uri="{C572A759-6A51-4108-AA02-DFA0A04FC94B}">
-              <ma14:wrappingTextBoxFlag xmlns:ma14="http://schemas.microsoft.com/office/mac/drawingml/2011/main" xmlns:a14="http://schemas.microsoft.com/office/drawing/2010/main" xmlns:m="http://schemas.openxmlformats.org/officeDocument/2006/math" xmlns="" val="1"/>
+              <ma14:wrappingTextBoxFlag xmlns="" xmlns:m="http://schemas.openxmlformats.org/officeDocument/2006/math" xmlns:a14="http://schemas.microsoft.com/office/drawing/2010/main" xmlns:ma14="http://schemas.microsoft.com/office/mac/drawingml/2011/main" val="1"/>
             </a:ext>
           </a:extLst>
         </p:spPr>
@@ -10983,7 +10979,7 @@
           </a:ln>
           <a:extLst>
             <a:ext uri="{C572A759-6A51-4108-AA02-DFA0A04FC94B}">
-              <ma14:wrappingTextBoxFlag xmlns:ma14="http://schemas.microsoft.com/office/mac/drawingml/2011/main" xmlns:a14="http://schemas.microsoft.com/office/drawing/2010/main" xmlns:m="http://schemas.openxmlformats.org/officeDocument/2006/math" xmlns="" val="1"/>
+              <ma14:wrappingTextBoxFlag xmlns="" xmlns:m="http://schemas.openxmlformats.org/officeDocument/2006/math" xmlns:a14="http://schemas.microsoft.com/office/drawing/2010/main" xmlns:ma14="http://schemas.microsoft.com/office/mac/drawingml/2011/main" val="1"/>
             </a:ext>
           </a:extLst>
         </p:spPr>
@@ -11027,7 +11023,7 @@
           </a:prstGeom>
           <a:extLst>
             <a:ext uri="{C572A759-6A51-4108-AA02-DFA0A04FC94B}">
-              <ma14:wrappingTextBoxFlag xmlns:ma14="http://schemas.microsoft.com/office/mac/drawingml/2011/main" xmlns:a14="http://schemas.microsoft.com/office/drawing/2010/main" xmlns:m="http://schemas.openxmlformats.org/officeDocument/2006/math" xmlns="" val="1"/>
+              <ma14:wrappingTextBoxFlag xmlns="" xmlns:m="http://schemas.openxmlformats.org/officeDocument/2006/math" xmlns:a14="http://schemas.microsoft.com/office/drawing/2010/main" xmlns:ma14="http://schemas.microsoft.com/office/mac/drawingml/2011/main" val="1"/>
             </a:ext>
           </a:extLst>
         </p:spPr>
@@ -11104,7 +11100,7 @@
           </a:ln>
           <a:extLst>
             <a:ext uri="{C572A759-6A51-4108-AA02-DFA0A04FC94B}">
-              <ma14:wrappingTextBoxFlag xmlns:ma14="http://schemas.microsoft.com/office/mac/drawingml/2011/main" xmlns:a14="http://schemas.microsoft.com/office/drawing/2010/main" xmlns:m="http://schemas.openxmlformats.org/officeDocument/2006/math" xmlns="" val="1"/>
+              <ma14:wrappingTextBoxFlag xmlns="" xmlns:m="http://schemas.openxmlformats.org/officeDocument/2006/math" xmlns:a14="http://schemas.microsoft.com/office/drawing/2010/main" xmlns:ma14="http://schemas.microsoft.com/office/mac/drawingml/2011/main" val="1"/>
             </a:ext>
           </a:extLst>
         </p:spPr>
@@ -11194,7 +11190,7 @@
           </a:ln>
           <a:extLst>
             <a:ext uri="{C572A759-6A51-4108-AA02-DFA0A04FC94B}">
-              <ma14:wrappingTextBoxFlag xmlns:ma14="http://schemas.microsoft.com/office/mac/drawingml/2011/main" xmlns:a14="http://schemas.microsoft.com/office/drawing/2010/main" xmlns:m="http://schemas.openxmlformats.org/officeDocument/2006/math" xmlns="" val="1"/>
+              <ma14:wrappingTextBoxFlag xmlns="" xmlns:m="http://schemas.openxmlformats.org/officeDocument/2006/math" xmlns:a14="http://schemas.microsoft.com/office/drawing/2010/main" xmlns:ma14="http://schemas.microsoft.com/office/mac/drawingml/2011/main" val="1"/>
             </a:ext>
           </a:extLst>
         </p:spPr>
@@ -11241,7 +11237,7 @@
           </a:ln>
           <a:extLst>
             <a:ext uri="{C572A759-6A51-4108-AA02-DFA0A04FC94B}">
-              <ma14:wrappingTextBoxFlag xmlns:ma14="http://schemas.microsoft.com/office/mac/drawingml/2011/main" xmlns:a14="http://schemas.microsoft.com/office/drawing/2010/main" xmlns:m="http://schemas.openxmlformats.org/officeDocument/2006/math" xmlns="" val="1"/>
+              <ma14:wrappingTextBoxFlag xmlns="" xmlns:m="http://schemas.openxmlformats.org/officeDocument/2006/math" xmlns:a14="http://schemas.microsoft.com/office/drawing/2010/main" xmlns:ma14="http://schemas.microsoft.com/office/mac/drawingml/2011/main" val="1"/>
             </a:ext>
           </a:extLst>
         </p:spPr>
@@ -11288,7 +11284,7 @@
           </a:ln>
           <a:extLst>
             <a:ext uri="{C572A759-6A51-4108-AA02-DFA0A04FC94B}">
-              <ma14:wrappingTextBoxFlag xmlns:ma14="http://schemas.microsoft.com/office/mac/drawingml/2011/main" xmlns:a14="http://schemas.microsoft.com/office/drawing/2010/main" xmlns:m="http://schemas.openxmlformats.org/officeDocument/2006/math" xmlns="" val="1"/>
+              <ma14:wrappingTextBoxFlag xmlns="" xmlns:m="http://schemas.openxmlformats.org/officeDocument/2006/math" xmlns:a14="http://schemas.microsoft.com/office/drawing/2010/main" xmlns:ma14="http://schemas.microsoft.com/office/mac/drawingml/2011/main" val="1"/>
             </a:ext>
           </a:extLst>
         </p:spPr>
@@ -11435,7 +11431,7 @@
           </a:ln>
           <a:extLst>
             <a:ext uri="{C572A759-6A51-4108-AA02-DFA0A04FC94B}">
-              <ma14:wrappingTextBoxFlag xmlns:ma14="http://schemas.microsoft.com/office/mac/drawingml/2011/main" xmlns:a14="http://schemas.microsoft.com/office/drawing/2010/main" xmlns:m="http://schemas.openxmlformats.org/officeDocument/2006/math" xmlns="" val="1"/>
+              <ma14:wrappingTextBoxFlag xmlns="" xmlns:m="http://schemas.openxmlformats.org/officeDocument/2006/math" xmlns:a14="http://schemas.microsoft.com/office/drawing/2010/main" xmlns:ma14="http://schemas.microsoft.com/office/mac/drawingml/2011/main" val="1"/>
             </a:ext>
           </a:extLst>
         </p:spPr>
@@ -11482,7 +11478,7 @@
           </a:ln>
           <a:extLst>
             <a:ext uri="{C572A759-6A51-4108-AA02-DFA0A04FC94B}">
-              <ma14:wrappingTextBoxFlag xmlns:ma14="http://schemas.microsoft.com/office/mac/drawingml/2011/main" xmlns:a14="http://schemas.microsoft.com/office/drawing/2010/main" xmlns:m="http://schemas.openxmlformats.org/officeDocument/2006/math" xmlns="" val="1"/>
+              <ma14:wrappingTextBoxFlag xmlns="" xmlns:m="http://schemas.openxmlformats.org/officeDocument/2006/math" xmlns:a14="http://schemas.microsoft.com/office/drawing/2010/main" xmlns:ma14="http://schemas.microsoft.com/office/mac/drawingml/2011/main" val="1"/>
             </a:ext>
           </a:extLst>
         </p:spPr>
@@ -11529,7 +11525,7 @@
           </a:ln>
           <a:extLst>
             <a:ext uri="{C572A759-6A51-4108-AA02-DFA0A04FC94B}">
-              <ma14:wrappingTextBoxFlag xmlns:ma14="http://schemas.microsoft.com/office/mac/drawingml/2011/main" xmlns:a14="http://schemas.microsoft.com/office/drawing/2010/main" xmlns:m="http://schemas.openxmlformats.org/officeDocument/2006/math" xmlns="" val="1"/>
+              <ma14:wrappingTextBoxFlag xmlns="" xmlns:m="http://schemas.openxmlformats.org/officeDocument/2006/math" xmlns:a14="http://schemas.microsoft.com/office/drawing/2010/main" xmlns:ma14="http://schemas.microsoft.com/office/mac/drawingml/2011/main" val="1"/>
             </a:ext>
           </a:extLst>
         </p:spPr>
@@ -11676,7 +11672,7 @@
           </a:ln>
           <a:extLst>
             <a:ext uri="{C572A759-6A51-4108-AA02-DFA0A04FC94B}">
-              <ma14:wrappingTextBoxFlag xmlns:ma14="http://schemas.microsoft.com/office/mac/drawingml/2011/main" xmlns:a14="http://schemas.microsoft.com/office/drawing/2010/main" xmlns:m="http://schemas.openxmlformats.org/officeDocument/2006/math" xmlns="" val="1"/>
+              <ma14:wrappingTextBoxFlag xmlns="" xmlns:m="http://schemas.openxmlformats.org/officeDocument/2006/math" xmlns:a14="http://schemas.microsoft.com/office/drawing/2010/main" xmlns:ma14="http://schemas.microsoft.com/office/mac/drawingml/2011/main" val="1"/>
             </a:ext>
           </a:extLst>
         </p:spPr>
@@ -11723,7 +11719,7 @@
           </a:ln>
           <a:extLst>
             <a:ext uri="{C572A759-6A51-4108-AA02-DFA0A04FC94B}">
-              <ma14:wrappingTextBoxFlag xmlns:ma14="http://schemas.microsoft.com/office/mac/drawingml/2011/main" xmlns:a14="http://schemas.microsoft.com/office/drawing/2010/main" xmlns:m="http://schemas.openxmlformats.org/officeDocument/2006/math" xmlns="" val="1"/>
+              <ma14:wrappingTextBoxFlag xmlns="" xmlns:m="http://schemas.openxmlformats.org/officeDocument/2006/math" xmlns:a14="http://schemas.microsoft.com/office/drawing/2010/main" xmlns:ma14="http://schemas.microsoft.com/office/mac/drawingml/2011/main" val="1"/>
             </a:ext>
           </a:extLst>
         </p:spPr>
@@ -11770,7 +11766,7 @@
           </a:ln>
           <a:extLst>
             <a:ext uri="{C572A759-6A51-4108-AA02-DFA0A04FC94B}">
-              <ma14:wrappingTextBoxFlag xmlns:ma14="http://schemas.microsoft.com/office/mac/drawingml/2011/main" xmlns:a14="http://schemas.microsoft.com/office/drawing/2010/main" xmlns:m="http://schemas.openxmlformats.org/officeDocument/2006/math" xmlns="" val="1"/>
+              <ma14:wrappingTextBoxFlag xmlns="" xmlns:m="http://schemas.openxmlformats.org/officeDocument/2006/math" xmlns:a14="http://schemas.microsoft.com/office/drawing/2010/main" xmlns:ma14="http://schemas.microsoft.com/office/mac/drawingml/2011/main" val="1"/>
             </a:ext>
           </a:extLst>
         </p:spPr>
@@ -11917,7 +11913,7 @@
           </a:ln>
           <a:extLst>
             <a:ext uri="{C572A759-6A51-4108-AA02-DFA0A04FC94B}">
-              <ma14:wrappingTextBoxFlag xmlns:ma14="http://schemas.microsoft.com/office/mac/drawingml/2011/main" xmlns:a14="http://schemas.microsoft.com/office/drawing/2010/main" xmlns:m="http://schemas.openxmlformats.org/officeDocument/2006/math" xmlns="" val="1"/>
+              <ma14:wrappingTextBoxFlag xmlns="" xmlns:m="http://schemas.openxmlformats.org/officeDocument/2006/math" xmlns:a14="http://schemas.microsoft.com/office/drawing/2010/main" xmlns:ma14="http://schemas.microsoft.com/office/mac/drawingml/2011/main" val="1"/>
             </a:ext>
           </a:extLst>
         </p:spPr>
@@ -11964,7 +11960,7 @@
           </a:ln>
           <a:extLst>
             <a:ext uri="{C572A759-6A51-4108-AA02-DFA0A04FC94B}">
-              <ma14:wrappingTextBoxFlag xmlns:ma14="http://schemas.microsoft.com/office/mac/drawingml/2011/main" xmlns:a14="http://schemas.microsoft.com/office/drawing/2010/main" xmlns:m="http://schemas.openxmlformats.org/officeDocument/2006/math" xmlns="" val="1"/>
+              <ma14:wrappingTextBoxFlag xmlns="" xmlns:m="http://schemas.openxmlformats.org/officeDocument/2006/math" xmlns:a14="http://schemas.microsoft.com/office/drawing/2010/main" xmlns:ma14="http://schemas.microsoft.com/office/mac/drawingml/2011/main" val="1"/>
             </a:ext>
           </a:extLst>
         </p:spPr>
@@ -12011,7 +12007,7 @@
           </a:ln>
           <a:extLst>
             <a:ext uri="{C572A759-6A51-4108-AA02-DFA0A04FC94B}">
-              <ma14:wrappingTextBoxFlag xmlns:ma14="http://schemas.microsoft.com/office/mac/drawingml/2011/main" xmlns:a14="http://schemas.microsoft.com/office/drawing/2010/main" xmlns:m="http://schemas.openxmlformats.org/officeDocument/2006/math" xmlns="" val="1"/>
+              <ma14:wrappingTextBoxFlag xmlns="" xmlns:m="http://schemas.openxmlformats.org/officeDocument/2006/math" xmlns:a14="http://schemas.microsoft.com/office/drawing/2010/main" xmlns:ma14="http://schemas.microsoft.com/office/mac/drawingml/2011/main" val="1"/>
             </a:ext>
           </a:extLst>
         </p:spPr>
@@ -12079,7 +12075,7 @@
           </a:ln>
           <a:extLst>
             <a:ext uri="{C572A759-6A51-4108-AA02-DFA0A04FC94B}">
-              <ma14:wrappingTextBoxFlag xmlns:ma14="http://schemas.microsoft.com/office/mac/drawingml/2011/main" xmlns:a14="http://schemas.microsoft.com/office/drawing/2010/main" xmlns:m="http://schemas.openxmlformats.org/officeDocument/2006/math" xmlns="" val="1"/>
+              <ma14:wrappingTextBoxFlag xmlns="" xmlns:m="http://schemas.openxmlformats.org/officeDocument/2006/math" xmlns:a14="http://schemas.microsoft.com/office/drawing/2010/main" xmlns:ma14="http://schemas.microsoft.com/office/mac/drawingml/2011/main" val="1"/>
             </a:ext>
           </a:extLst>
         </p:spPr>
@@ -12126,7 +12122,7 @@
           </a:ln>
           <a:extLst>
             <a:ext uri="{C572A759-6A51-4108-AA02-DFA0A04FC94B}">
-              <ma14:wrappingTextBoxFlag xmlns:ma14="http://schemas.microsoft.com/office/mac/drawingml/2011/main" xmlns:a14="http://schemas.microsoft.com/office/drawing/2010/main" xmlns:m="http://schemas.openxmlformats.org/officeDocument/2006/math" xmlns="" val="1"/>
+              <ma14:wrappingTextBoxFlag xmlns="" xmlns:m="http://schemas.openxmlformats.org/officeDocument/2006/math" xmlns:a14="http://schemas.microsoft.com/office/drawing/2010/main" xmlns:ma14="http://schemas.microsoft.com/office/mac/drawingml/2011/main" val="1"/>
             </a:ext>
           </a:extLst>
         </p:spPr>
@@ -12263,7 +12259,7 @@
           </a:ln>
           <a:extLst>
             <a:ext uri="{C572A759-6A51-4108-AA02-DFA0A04FC94B}">
-              <ma14:wrappingTextBoxFlag xmlns:ma14="http://schemas.microsoft.com/office/mac/drawingml/2011/main" xmlns:a14="http://schemas.microsoft.com/office/drawing/2010/main" xmlns:m="http://schemas.openxmlformats.org/officeDocument/2006/math" xmlns="" val="1"/>
+              <ma14:wrappingTextBoxFlag xmlns="" xmlns:m="http://schemas.openxmlformats.org/officeDocument/2006/math" xmlns:a14="http://schemas.microsoft.com/office/drawing/2010/main" xmlns:ma14="http://schemas.microsoft.com/office/mac/drawingml/2011/main" val="1"/>
             </a:ext>
           </a:extLst>
         </p:spPr>
@@ -12310,7 +12306,7 @@
           </a:ln>
           <a:extLst>
             <a:ext uri="{C572A759-6A51-4108-AA02-DFA0A04FC94B}">
-              <ma14:wrappingTextBoxFlag xmlns:ma14="http://schemas.microsoft.com/office/mac/drawingml/2011/main" xmlns:a14="http://schemas.microsoft.com/office/drawing/2010/main" xmlns:m="http://schemas.openxmlformats.org/officeDocument/2006/math" xmlns="" val="1"/>
+              <ma14:wrappingTextBoxFlag xmlns="" xmlns:m="http://schemas.openxmlformats.org/officeDocument/2006/math" xmlns:a14="http://schemas.microsoft.com/office/drawing/2010/main" xmlns:ma14="http://schemas.microsoft.com/office/mac/drawingml/2011/main" val="1"/>
             </a:ext>
           </a:extLst>
         </p:spPr>
@@ -12357,7 +12353,7 @@
           </a:ln>
           <a:extLst>
             <a:ext uri="{C572A759-6A51-4108-AA02-DFA0A04FC94B}">
-              <ma14:wrappingTextBoxFlag xmlns:ma14="http://schemas.microsoft.com/office/mac/drawingml/2011/main" xmlns:a14="http://schemas.microsoft.com/office/drawing/2010/main" xmlns:m="http://schemas.openxmlformats.org/officeDocument/2006/math" xmlns="" val="1"/>
+              <ma14:wrappingTextBoxFlag xmlns="" xmlns:m="http://schemas.openxmlformats.org/officeDocument/2006/math" xmlns:a14="http://schemas.microsoft.com/office/drawing/2010/main" xmlns:ma14="http://schemas.microsoft.com/office/mac/drawingml/2011/main" val="1"/>
             </a:ext>
           </a:extLst>
         </p:spPr>
@@ -12404,7 +12400,7 @@
           </a:ln>
           <a:extLst>
             <a:ext uri="{C572A759-6A51-4108-AA02-DFA0A04FC94B}">
-              <ma14:wrappingTextBoxFlag xmlns:ma14="http://schemas.microsoft.com/office/mac/drawingml/2011/main" xmlns:a14="http://schemas.microsoft.com/office/drawing/2010/main" xmlns:m="http://schemas.openxmlformats.org/officeDocument/2006/math" xmlns="" val="1"/>
+              <ma14:wrappingTextBoxFlag xmlns="" xmlns:m="http://schemas.openxmlformats.org/officeDocument/2006/math" xmlns:a14="http://schemas.microsoft.com/office/drawing/2010/main" xmlns:ma14="http://schemas.microsoft.com/office/mac/drawingml/2011/main" val="1"/>
             </a:ext>
           </a:extLst>
         </p:spPr>
@@ -12451,7 +12447,7 @@
           </a:ln>
           <a:extLst>
             <a:ext uri="{C572A759-6A51-4108-AA02-DFA0A04FC94B}">
-              <ma14:wrappingTextBoxFlag xmlns:ma14="http://schemas.microsoft.com/office/mac/drawingml/2011/main" xmlns:a14="http://schemas.microsoft.com/office/drawing/2010/main" xmlns:m="http://schemas.openxmlformats.org/officeDocument/2006/math" xmlns="" val="1"/>
+              <ma14:wrappingTextBoxFlag xmlns="" xmlns:m="http://schemas.openxmlformats.org/officeDocument/2006/math" xmlns:a14="http://schemas.microsoft.com/office/drawing/2010/main" xmlns:ma14="http://schemas.microsoft.com/office/mac/drawingml/2011/main" val="1"/>
             </a:ext>
           </a:extLst>
         </p:spPr>
@@ -12634,7 +12630,7 @@
           </a:ln>
           <a:extLst>
             <a:ext uri="{C572A759-6A51-4108-AA02-DFA0A04FC94B}">
-              <ma14:wrappingTextBoxFlag xmlns:ma14="http://schemas.microsoft.com/office/mac/drawingml/2011/main" xmlns:a14="http://schemas.microsoft.com/office/drawing/2010/main" xmlns:m="http://schemas.openxmlformats.org/officeDocument/2006/math" xmlns="" val="1"/>
+              <ma14:wrappingTextBoxFlag xmlns="" xmlns:m="http://schemas.openxmlformats.org/officeDocument/2006/math" xmlns:a14="http://schemas.microsoft.com/office/drawing/2010/main" xmlns:ma14="http://schemas.microsoft.com/office/mac/drawingml/2011/main" val="1"/>
             </a:ext>
           </a:extLst>
         </p:spPr>
@@ -12681,7 +12677,7 @@
           </a:ln>
           <a:extLst>
             <a:ext uri="{C572A759-6A51-4108-AA02-DFA0A04FC94B}">
-              <ma14:wrappingTextBoxFlag xmlns:ma14="http://schemas.microsoft.com/office/mac/drawingml/2011/main" xmlns:a14="http://schemas.microsoft.com/office/drawing/2010/main" xmlns:m="http://schemas.openxmlformats.org/officeDocument/2006/math" xmlns="" val="1"/>
+              <ma14:wrappingTextBoxFlag xmlns="" xmlns:m="http://schemas.openxmlformats.org/officeDocument/2006/math" xmlns:a14="http://schemas.microsoft.com/office/drawing/2010/main" xmlns:ma14="http://schemas.microsoft.com/office/mac/drawingml/2011/main" val="1"/>
             </a:ext>
           </a:extLst>
         </p:spPr>
@@ -12728,7 +12724,7 @@
           </a:ln>
           <a:extLst>
             <a:ext uri="{C572A759-6A51-4108-AA02-DFA0A04FC94B}">
-              <ma14:wrappingTextBoxFlag xmlns:ma14="http://schemas.microsoft.com/office/mac/drawingml/2011/main" xmlns:a14="http://schemas.microsoft.com/office/drawing/2010/main" xmlns:m="http://schemas.openxmlformats.org/officeDocument/2006/math" xmlns="" val="1"/>
+              <ma14:wrappingTextBoxFlag xmlns="" xmlns:m="http://schemas.openxmlformats.org/officeDocument/2006/math" xmlns:a14="http://schemas.microsoft.com/office/drawing/2010/main" xmlns:ma14="http://schemas.microsoft.com/office/mac/drawingml/2011/main" val="1"/>
             </a:ext>
           </a:extLst>
         </p:spPr>
@@ -12775,7 +12771,7 @@
           </a:ln>
           <a:extLst>
             <a:ext uri="{C572A759-6A51-4108-AA02-DFA0A04FC94B}">
-              <ma14:wrappingTextBoxFlag xmlns:ma14="http://schemas.microsoft.com/office/mac/drawingml/2011/main" xmlns:a14="http://schemas.microsoft.com/office/drawing/2010/main" xmlns:m="http://schemas.openxmlformats.org/officeDocument/2006/math" xmlns="" val="1"/>
+              <ma14:wrappingTextBoxFlag xmlns="" xmlns:m="http://schemas.openxmlformats.org/officeDocument/2006/math" xmlns:a14="http://schemas.microsoft.com/office/drawing/2010/main" xmlns:ma14="http://schemas.microsoft.com/office/mac/drawingml/2011/main" val="1"/>
             </a:ext>
           </a:extLst>
         </p:spPr>
@@ -12822,7 +12818,7 @@
           </a:ln>
           <a:extLst>
             <a:ext uri="{C572A759-6A51-4108-AA02-DFA0A04FC94B}">
-              <ma14:wrappingTextBoxFlag xmlns:ma14="http://schemas.microsoft.com/office/mac/drawingml/2011/main" xmlns:a14="http://schemas.microsoft.com/office/drawing/2010/main" xmlns:m="http://schemas.openxmlformats.org/officeDocument/2006/math" xmlns="" val="1"/>
+              <ma14:wrappingTextBoxFlag xmlns="" xmlns:m="http://schemas.openxmlformats.org/officeDocument/2006/math" xmlns:a14="http://schemas.microsoft.com/office/drawing/2010/main" xmlns:ma14="http://schemas.microsoft.com/office/mac/drawingml/2011/main" val="1"/>
             </a:ext>
           </a:extLst>
         </p:spPr>
@@ -13005,7 +13001,7 @@
           </a:ln>
           <a:extLst>
             <a:ext uri="{C572A759-6A51-4108-AA02-DFA0A04FC94B}">
-              <ma14:wrappingTextBoxFlag xmlns:ma14="http://schemas.microsoft.com/office/mac/drawingml/2011/main" xmlns:a14="http://schemas.microsoft.com/office/drawing/2010/main" xmlns:m="http://schemas.openxmlformats.org/officeDocument/2006/math" xmlns="" val="1"/>
+              <ma14:wrappingTextBoxFlag xmlns="" xmlns:m="http://schemas.openxmlformats.org/officeDocument/2006/math" xmlns:a14="http://schemas.microsoft.com/office/drawing/2010/main" xmlns:ma14="http://schemas.microsoft.com/office/mac/drawingml/2011/main" val="1"/>
             </a:ext>
           </a:extLst>
         </p:spPr>
@@ -13052,7 +13048,7 @@
           </a:ln>
           <a:extLst>
             <a:ext uri="{C572A759-6A51-4108-AA02-DFA0A04FC94B}">
-              <ma14:wrappingTextBoxFlag xmlns:ma14="http://schemas.microsoft.com/office/mac/drawingml/2011/main" xmlns:a14="http://schemas.microsoft.com/office/drawing/2010/main" xmlns:m="http://schemas.openxmlformats.org/officeDocument/2006/math" xmlns="" val="1"/>
+              <ma14:wrappingTextBoxFlag xmlns="" xmlns:m="http://schemas.openxmlformats.org/officeDocument/2006/math" xmlns:a14="http://schemas.microsoft.com/office/drawing/2010/main" xmlns:ma14="http://schemas.microsoft.com/office/mac/drawingml/2011/main" val="1"/>
             </a:ext>
           </a:extLst>
         </p:spPr>
@@ -13099,7 +13095,7 @@
           </a:ln>
           <a:extLst>
             <a:ext uri="{C572A759-6A51-4108-AA02-DFA0A04FC94B}">
-              <ma14:wrappingTextBoxFlag xmlns:ma14="http://schemas.microsoft.com/office/mac/drawingml/2011/main" xmlns:a14="http://schemas.microsoft.com/office/drawing/2010/main" xmlns:m="http://schemas.openxmlformats.org/officeDocument/2006/math" xmlns="" val="1"/>
+              <ma14:wrappingTextBoxFlag xmlns="" xmlns:m="http://schemas.openxmlformats.org/officeDocument/2006/math" xmlns:a14="http://schemas.microsoft.com/office/drawing/2010/main" xmlns:ma14="http://schemas.microsoft.com/office/mac/drawingml/2011/main" val="1"/>
             </a:ext>
           </a:extLst>
         </p:spPr>
@@ -13146,7 +13142,7 @@
           </a:ln>
           <a:extLst>
             <a:ext uri="{C572A759-6A51-4108-AA02-DFA0A04FC94B}">
-              <ma14:wrappingTextBoxFlag xmlns:ma14="http://schemas.microsoft.com/office/mac/drawingml/2011/main" xmlns:a14="http://schemas.microsoft.com/office/drawing/2010/main" xmlns:m="http://schemas.openxmlformats.org/officeDocument/2006/math" xmlns="" val="1"/>
+              <ma14:wrappingTextBoxFlag xmlns="" xmlns:m="http://schemas.openxmlformats.org/officeDocument/2006/math" xmlns:a14="http://schemas.microsoft.com/office/drawing/2010/main" xmlns:ma14="http://schemas.microsoft.com/office/mac/drawingml/2011/main" val="1"/>
             </a:ext>
           </a:extLst>
         </p:spPr>
@@ -13193,7 +13189,7 @@
           </a:ln>
           <a:extLst>
             <a:ext uri="{C572A759-6A51-4108-AA02-DFA0A04FC94B}">
-              <ma14:wrappingTextBoxFlag xmlns:ma14="http://schemas.microsoft.com/office/mac/drawingml/2011/main" xmlns:a14="http://schemas.microsoft.com/office/drawing/2010/main" xmlns:m="http://schemas.openxmlformats.org/officeDocument/2006/math" xmlns="" val="1"/>
+              <ma14:wrappingTextBoxFlag xmlns="" xmlns:m="http://schemas.openxmlformats.org/officeDocument/2006/math" xmlns:a14="http://schemas.microsoft.com/office/drawing/2010/main" xmlns:ma14="http://schemas.microsoft.com/office/mac/drawingml/2011/main" val="1"/>
             </a:ext>
           </a:extLst>
         </p:spPr>
@@ -13240,7 +13236,7 @@
           </a:ln>
           <a:extLst>
             <a:ext uri="{C572A759-6A51-4108-AA02-DFA0A04FC94B}">
-              <ma14:wrappingTextBoxFlag xmlns:ma14="http://schemas.microsoft.com/office/mac/drawingml/2011/main" xmlns:a14="http://schemas.microsoft.com/office/drawing/2010/main" xmlns:m="http://schemas.openxmlformats.org/officeDocument/2006/math" xmlns="" val="1"/>
+              <ma14:wrappingTextBoxFlag xmlns="" xmlns:m="http://schemas.openxmlformats.org/officeDocument/2006/math" xmlns:a14="http://schemas.microsoft.com/office/drawing/2010/main" xmlns:ma14="http://schemas.microsoft.com/office/mac/drawingml/2011/main" val="1"/>
             </a:ext>
           </a:extLst>
         </p:spPr>
@@ -13366,7 +13362,7 @@
           </a:ln>
           <a:extLst>
             <a:ext uri="{C572A759-6A51-4108-AA02-DFA0A04FC94B}">
-              <ma14:wrappingTextBoxFlag xmlns:ma14="http://schemas.microsoft.com/office/mac/drawingml/2011/main" xmlns:a14="http://schemas.microsoft.com/office/drawing/2010/main" xmlns:m="http://schemas.openxmlformats.org/officeDocument/2006/math" xmlns="" val="1"/>
+              <ma14:wrappingTextBoxFlag xmlns="" xmlns:m="http://schemas.openxmlformats.org/officeDocument/2006/math" xmlns:a14="http://schemas.microsoft.com/office/drawing/2010/main" xmlns:ma14="http://schemas.microsoft.com/office/mac/drawingml/2011/main" val="1"/>
             </a:ext>
           </a:extLst>
         </p:spPr>
@@ -13413,7 +13409,7 @@
           </a:ln>
           <a:extLst>
             <a:ext uri="{C572A759-6A51-4108-AA02-DFA0A04FC94B}">
-              <ma14:wrappingTextBoxFlag xmlns:ma14="http://schemas.microsoft.com/office/mac/drawingml/2011/main" xmlns:a14="http://schemas.microsoft.com/office/drawing/2010/main" xmlns:m="http://schemas.openxmlformats.org/officeDocument/2006/math" xmlns="" val="1"/>
+              <ma14:wrappingTextBoxFlag xmlns="" xmlns:m="http://schemas.openxmlformats.org/officeDocument/2006/math" xmlns:a14="http://schemas.microsoft.com/office/drawing/2010/main" xmlns:ma14="http://schemas.microsoft.com/office/mac/drawingml/2011/main" val="1"/>
             </a:ext>
           </a:extLst>
         </p:spPr>
@@ -13503,7 +13499,7 @@
           </a:ln>
           <a:extLst>
             <a:ext uri="{C572A759-6A51-4108-AA02-DFA0A04FC94B}">
-              <ma14:wrappingTextBoxFlag xmlns:ma14="http://schemas.microsoft.com/office/mac/drawingml/2011/main" xmlns:a14="http://schemas.microsoft.com/office/drawing/2010/main" xmlns:m="http://schemas.openxmlformats.org/officeDocument/2006/math" xmlns="" val="1"/>
+              <ma14:wrappingTextBoxFlag xmlns="" xmlns:m="http://schemas.openxmlformats.org/officeDocument/2006/math" xmlns:a14="http://schemas.microsoft.com/office/drawing/2010/main" xmlns:ma14="http://schemas.microsoft.com/office/mac/drawingml/2011/main" val="1"/>
             </a:ext>
           </a:extLst>
         </p:spPr>
@@ -13550,7 +13546,7 @@
           </a:ln>
           <a:extLst>
             <a:ext uri="{C572A759-6A51-4108-AA02-DFA0A04FC94B}">
-              <ma14:wrappingTextBoxFlag xmlns:ma14="http://schemas.microsoft.com/office/mac/drawingml/2011/main" xmlns:a14="http://schemas.microsoft.com/office/drawing/2010/main" xmlns:m="http://schemas.openxmlformats.org/officeDocument/2006/math" xmlns="" val="1"/>
+              <ma14:wrappingTextBoxFlag xmlns="" xmlns:m="http://schemas.openxmlformats.org/officeDocument/2006/math" xmlns:a14="http://schemas.microsoft.com/office/drawing/2010/main" xmlns:ma14="http://schemas.microsoft.com/office/mac/drawingml/2011/main" val="1"/>
             </a:ext>
           </a:extLst>
         </p:spPr>
@@ -13640,7 +13636,7 @@
           </a:ln>
           <a:extLst>
             <a:ext uri="{C572A759-6A51-4108-AA02-DFA0A04FC94B}">
-              <ma14:wrappingTextBoxFlag xmlns:ma14="http://schemas.microsoft.com/office/mac/drawingml/2011/main" xmlns:a14="http://schemas.microsoft.com/office/drawing/2010/main" xmlns:m="http://schemas.openxmlformats.org/officeDocument/2006/math" xmlns="" val="1"/>
+              <ma14:wrappingTextBoxFlag xmlns="" xmlns:m="http://schemas.openxmlformats.org/officeDocument/2006/math" xmlns:a14="http://schemas.microsoft.com/office/drawing/2010/main" xmlns:ma14="http://schemas.microsoft.com/office/mac/drawingml/2011/main" val="1"/>
             </a:ext>
           </a:extLst>
         </p:spPr>
@@ -13687,7 +13683,7 @@
           </a:ln>
           <a:extLst>
             <a:ext uri="{C572A759-6A51-4108-AA02-DFA0A04FC94B}">
-              <ma14:wrappingTextBoxFlag xmlns:ma14="http://schemas.microsoft.com/office/mac/drawingml/2011/main" xmlns:a14="http://schemas.microsoft.com/office/drawing/2010/main" xmlns:m="http://schemas.openxmlformats.org/officeDocument/2006/math" xmlns="" val="1"/>
+              <ma14:wrappingTextBoxFlag xmlns="" xmlns:m="http://schemas.openxmlformats.org/officeDocument/2006/math" xmlns:a14="http://schemas.microsoft.com/office/drawing/2010/main" xmlns:ma14="http://schemas.microsoft.com/office/mac/drawingml/2011/main" val="1"/>
             </a:ext>
           </a:extLst>
         </p:spPr>
@@ -13806,7 +13802,7 @@
           </a:ln>
           <a:extLst>
             <a:ext uri="{C572A759-6A51-4108-AA02-DFA0A04FC94B}">
-              <ma14:wrappingTextBoxFlag xmlns:ma14="http://schemas.microsoft.com/office/mac/drawingml/2011/main" xmlns:a14="http://schemas.microsoft.com/office/drawing/2010/main" xmlns:m="http://schemas.openxmlformats.org/officeDocument/2006/math" xmlns="" val="1"/>
+              <ma14:wrappingTextBoxFlag xmlns="" xmlns:m="http://schemas.openxmlformats.org/officeDocument/2006/math" xmlns:a14="http://schemas.microsoft.com/office/drawing/2010/main" xmlns:ma14="http://schemas.microsoft.com/office/mac/drawingml/2011/main" val="1"/>
             </a:ext>
           </a:extLst>
         </p:spPr>
@@ -13896,7 +13892,7 @@
           </a:ln>
           <a:extLst>
             <a:ext uri="{C572A759-6A51-4108-AA02-DFA0A04FC94B}">
-              <ma14:wrappingTextBoxFlag xmlns:ma14="http://schemas.microsoft.com/office/mac/drawingml/2011/main" xmlns:a14="http://schemas.microsoft.com/office/drawing/2010/main" xmlns:m="http://schemas.openxmlformats.org/officeDocument/2006/math" xmlns="" val="1"/>
+              <ma14:wrappingTextBoxFlag xmlns="" xmlns:m="http://schemas.openxmlformats.org/officeDocument/2006/math" xmlns:a14="http://schemas.microsoft.com/office/drawing/2010/main" xmlns:ma14="http://schemas.microsoft.com/office/mac/drawingml/2011/main" val="1"/>
             </a:ext>
           </a:extLst>
         </p:spPr>
@@ -13986,7 +13982,7 @@
           </a:ln>
           <a:extLst>
             <a:ext uri="{C572A759-6A51-4108-AA02-DFA0A04FC94B}">
-              <ma14:wrappingTextBoxFlag xmlns:ma14="http://schemas.microsoft.com/office/mac/drawingml/2011/main" xmlns:a14="http://schemas.microsoft.com/office/drawing/2010/main" xmlns:m="http://schemas.openxmlformats.org/officeDocument/2006/math" xmlns="" val="1"/>
+              <ma14:wrappingTextBoxFlag xmlns="" xmlns:m="http://schemas.openxmlformats.org/officeDocument/2006/math" xmlns:a14="http://schemas.microsoft.com/office/drawing/2010/main" xmlns:ma14="http://schemas.microsoft.com/office/mac/drawingml/2011/main" val="1"/>
             </a:ext>
           </a:extLst>
         </p:spPr>
@@ -14076,7 +14072,7 @@
           </a:ln>
           <a:extLst>
             <a:ext uri="{C572A759-6A51-4108-AA02-DFA0A04FC94B}">
-              <ma14:wrappingTextBoxFlag xmlns:ma14="http://schemas.microsoft.com/office/mac/drawingml/2011/main" xmlns:a14="http://schemas.microsoft.com/office/drawing/2010/main" xmlns:m="http://schemas.openxmlformats.org/officeDocument/2006/math" xmlns="" val="1"/>
+              <ma14:wrappingTextBoxFlag xmlns="" xmlns:m="http://schemas.openxmlformats.org/officeDocument/2006/math" xmlns:a14="http://schemas.microsoft.com/office/drawing/2010/main" xmlns:ma14="http://schemas.microsoft.com/office/mac/drawingml/2011/main" val="1"/>
             </a:ext>
           </a:extLst>
         </p:spPr>
@@ -14166,7 +14162,7 @@
           </a:ln>
           <a:extLst>
             <a:ext uri="{C572A759-6A51-4108-AA02-DFA0A04FC94B}">
-              <ma14:wrappingTextBoxFlag xmlns:ma14="http://schemas.microsoft.com/office/mac/drawingml/2011/main" xmlns:a14="http://schemas.microsoft.com/office/drawing/2010/main" xmlns:m="http://schemas.openxmlformats.org/officeDocument/2006/math" xmlns="" val="1"/>
+              <ma14:wrappingTextBoxFlag xmlns="" xmlns:m="http://schemas.openxmlformats.org/officeDocument/2006/math" xmlns:a14="http://schemas.microsoft.com/office/drawing/2010/main" xmlns:ma14="http://schemas.microsoft.com/office/mac/drawingml/2011/main" val="1"/>
             </a:ext>
           </a:extLst>
         </p:spPr>
@@ -14256,7 +14252,7 @@
           </a:ln>
           <a:extLst>
             <a:ext uri="{C572A759-6A51-4108-AA02-DFA0A04FC94B}">
-              <ma14:wrappingTextBoxFlag xmlns:ma14="http://schemas.microsoft.com/office/mac/drawingml/2011/main" xmlns:a14="http://schemas.microsoft.com/office/drawing/2010/main" xmlns:m="http://schemas.openxmlformats.org/officeDocument/2006/math" xmlns="" val="1"/>
+              <ma14:wrappingTextBoxFlag xmlns="" xmlns:m="http://schemas.openxmlformats.org/officeDocument/2006/math" xmlns:a14="http://schemas.microsoft.com/office/drawing/2010/main" xmlns:ma14="http://schemas.microsoft.com/office/mac/drawingml/2011/main" val="1"/>
             </a:ext>
           </a:extLst>
         </p:spPr>
@@ -14346,7 +14342,7 @@
           </a:ln>
           <a:extLst>
             <a:ext uri="{C572A759-6A51-4108-AA02-DFA0A04FC94B}">
-              <ma14:wrappingTextBoxFlag xmlns:ma14="http://schemas.microsoft.com/office/mac/drawingml/2011/main" xmlns:a14="http://schemas.microsoft.com/office/drawing/2010/main" xmlns:m="http://schemas.openxmlformats.org/officeDocument/2006/math" xmlns="" val="1"/>
+              <ma14:wrappingTextBoxFlag xmlns="" xmlns:m="http://schemas.openxmlformats.org/officeDocument/2006/math" xmlns:a14="http://schemas.microsoft.com/office/drawing/2010/main" xmlns:ma14="http://schemas.microsoft.com/office/mac/drawingml/2011/main" val="1"/>
             </a:ext>
           </a:extLst>
         </p:spPr>
@@ -14436,7 +14432,7 @@
           </a:ln>
           <a:extLst>
             <a:ext uri="{C572A759-6A51-4108-AA02-DFA0A04FC94B}">
-              <ma14:wrappingTextBoxFlag xmlns:ma14="http://schemas.microsoft.com/office/mac/drawingml/2011/main" xmlns:a14="http://schemas.microsoft.com/office/drawing/2010/main" xmlns:m="http://schemas.openxmlformats.org/officeDocument/2006/math" xmlns="" val="1"/>
+              <ma14:wrappingTextBoxFlag xmlns="" xmlns:m="http://schemas.openxmlformats.org/officeDocument/2006/math" xmlns:a14="http://schemas.microsoft.com/office/drawing/2010/main" xmlns:ma14="http://schemas.microsoft.com/office/mac/drawingml/2011/main" val="1"/>
             </a:ext>
           </a:extLst>
         </p:spPr>
@@ -14526,7 +14522,7 @@
           </a:ln>
           <a:extLst>
             <a:ext uri="{C572A759-6A51-4108-AA02-DFA0A04FC94B}">
-              <ma14:wrappingTextBoxFlag xmlns:ma14="http://schemas.microsoft.com/office/mac/drawingml/2011/main" xmlns:a14="http://schemas.microsoft.com/office/drawing/2010/main" xmlns:m="http://schemas.openxmlformats.org/officeDocument/2006/math" xmlns="" val="1"/>
+              <ma14:wrappingTextBoxFlag xmlns="" xmlns:m="http://schemas.openxmlformats.org/officeDocument/2006/math" xmlns:a14="http://schemas.microsoft.com/office/drawing/2010/main" xmlns:ma14="http://schemas.microsoft.com/office/mac/drawingml/2011/main" val="1"/>
             </a:ext>
           </a:extLst>
         </p:spPr>
@@ -14573,7 +14569,7 @@
           </a:ln>
           <a:extLst>
             <a:ext uri="{C572A759-6A51-4108-AA02-DFA0A04FC94B}">
-              <ma14:wrappingTextBoxFlag xmlns:ma14="http://schemas.microsoft.com/office/mac/drawingml/2011/main" xmlns:a14="http://schemas.microsoft.com/office/drawing/2010/main" xmlns:m="http://schemas.openxmlformats.org/officeDocument/2006/math" xmlns="" val="1"/>
+              <ma14:wrappingTextBoxFlag xmlns="" xmlns:m="http://schemas.openxmlformats.org/officeDocument/2006/math" xmlns:a14="http://schemas.microsoft.com/office/drawing/2010/main" xmlns:ma14="http://schemas.microsoft.com/office/mac/drawingml/2011/main" val="1"/>
             </a:ext>
           </a:extLst>
         </p:spPr>
@@ -14667,7 +14663,7 @@
           </a:ln>
           <a:extLst>
             <a:ext uri="{C572A759-6A51-4108-AA02-DFA0A04FC94B}">
-              <ma14:wrappingTextBoxFlag xmlns:ma14="http://schemas.microsoft.com/office/mac/drawingml/2011/main" xmlns:a14="http://schemas.microsoft.com/office/drawing/2010/main" xmlns:m="http://schemas.openxmlformats.org/officeDocument/2006/math" xmlns="" val="1"/>
+              <ma14:wrappingTextBoxFlag xmlns="" xmlns:m="http://schemas.openxmlformats.org/officeDocument/2006/math" xmlns:a14="http://schemas.microsoft.com/office/drawing/2010/main" xmlns:ma14="http://schemas.microsoft.com/office/mac/drawingml/2011/main" val="1"/>
             </a:ext>
           </a:extLst>
         </p:spPr>
@@ -14759,7 +14755,7 @@
           </a:ln>
           <a:extLst>
             <a:ext uri="{C572A759-6A51-4108-AA02-DFA0A04FC94B}">
-              <ma14:wrappingTextBoxFlag xmlns:ma14="http://schemas.microsoft.com/office/mac/drawingml/2011/main" xmlns:a14="http://schemas.microsoft.com/office/drawing/2010/main" xmlns:m="http://schemas.openxmlformats.org/officeDocument/2006/math" xmlns="" val="1"/>
+              <ma14:wrappingTextBoxFlag xmlns="" xmlns:m="http://schemas.openxmlformats.org/officeDocument/2006/math" xmlns:a14="http://schemas.microsoft.com/office/drawing/2010/main" xmlns:ma14="http://schemas.microsoft.com/office/mac/drawingml/2011/main" val="1"/>
             </a:ext>
           </a:extLst>
         </p:spPr>
@@ -14902,7 +14898,7 @@
           </a:ln>
           <a:extLst>
             <a:ext uri="{C572A759-6A51-4108-AA02-DFA0A04FC94B}">
-              <ma14:wrappingTextBoxFlag xmlns:ma14="http://schemas.microsoft.com/office/mac/drawingml/2011/main" xmlns:a14="http://schemas.microsoft.com/office/drawing/2010/main" xmlns:m="http://schemas.openxmlformats.org/officeDocument/2006/math" xmlns="" val="1"/>
+              <ma14:wrappingTextBoxFlag xmlns="" xmlns:m="http://schemas.openxmlformats.org/officeDocument/2006/math" xmlns:a14="http://schemas.microsoft.com/office/drawing/2010/main" xmlns:ma14="http://schemas.microsoft.com/office/mac/drawingml/2011/main" val="1"/>
             </a:ext>
           </a:extLst>
         </p:spPr>
@@ -14949,7 +14945,7 @@
           </a:ln>
           <a:extLst>
             <a:ext uri="{C572A759-6A51-4108-AA02-DFA0A04FC94B}">
-              <ma14:wrappingTextBoxFlag xmlns:ma14="http://schemas.microsoft.com/office/mac/drawingml/2011/main" xmlns:a14="http://schemas.microsoft.com/office/drawing/2010/main" xmlns:m="http://schemas.openxmlformats.org/officeDocument/2006/math" xmlns="" val="1"/>
+              <ma14:wrappingTextBoxFlag xmlns="" xmlns:m="http://schemas.openxmlformats.org/officeDocument/2006/math" xmlns:a14="http://schemas.microsoft.com/office/drawing/2010/main" xmlns:ma14="http://schemas.microsoft.com/office/mac/drawingml/2011/main" val="1"/>
             </a:ext>
           </a:extLst>
         </p:spPr>
@@ -15071,7 +15067,7 @@
           </a:ln>
           <a:extLst>
             <a:ext uri="{C572A759-6A51-4108-AA02-DFA0A04FC94B}">
-              <ma14:wrappingTextBoxFlag xmlns:ma14="http://schemas.microsoft.com/office/mac/drawingml/2011/main" xmlns:a14="http://schemas.microsoft.com/office/drawing/2010/main" xmlns:m="http://schemas.openxmlformats.org/officeDocument/2006/math" xmlns="" val="1"/>
+              <ma14:wrappingTextBoxFlag xmlns="" xmlns:m="http://schemas.openxmlformats.org/officeDocument/2006/math" xmlns:a14="http://schemas.microsoft.com/office/drawing/2010/main" xmlns:ma14="http://schemas.microsoft.com/office/mac/drawingml/2011/main" val="1"/>
             </a:ext>
           </a:extLst>
         </p:spPr>
@@ -15118,7 +15114,7 @@
           </a:ln>
           <a:extLst>
             <a:ext uri="{C572A759-6A51-4108-AA02-DFA0A04FC94B}">
-              <ma14:wrappingTextBoxFlag xmlns:ma14="http://schemas.microsoft.com/office/mac/drawingml/2011/main" xmlns:a14="http://schemas.microsoft.com/office/drawing/2010/main" xmlns:m="http://schemas.openxmlformats.org/officeDocument/2006/math" xmlns="" val="1"/>
+              <ma14:wrappingTextBoxFlag xmlns="" xmlns:m="http://schemas.openxmlformats.org/officeDocument/2006/math" xmlns:a14="http://schemas.microsoft.com/office/drawing/2010/main" xmlns:ma14="http://schemas.microsoft.com/office/mac/drawingml/2011/main" val="1"/>
             </a:ext>
           </a:extLst>
         </p:spPr>
@@ -15206,7 +15202,7 @@
           </a:ln>
           <a:extLst>
             <a:ext uri="{C572A759-6A51-4108-AA02-DFA0A04FC94B}">
-              <ma14:wrappingTextBoxFlag xmlns:ma14="http://schemas.microsoft.com/office/mac/drawingml/2011/main" xmlns:a14="http://schemas.microsoft.com/office/drawing/2010/main" xmlns:m="http://schemas.openxmlformats.org/officeDocument/2006/math" xmlns="" val="1"/>
+              <ma14:wrappingTextBoxFlag xmlns="" xmlns:m="http://schemas.openxmlformats.org/officeDocument/2006/math" xmlns:a14="http://schemas.microsoft.com/office/drawing/2010/main" xmlns:ma14="http://schemas.microsoft.com/office/mac/drawingml/2011/main" val="1"/>
             </a:ext>
           </a:extLst>
         </p:spPr>
@@ -15292,7 +15288,7 @@
           </a:ln>
           <a:extLst>
             <a:ext uri="{C572A759-6A51-4108-AA02-DFA0A04FC94B}">
-              <ma14:wrappingTextBoxFlag xmlns:ma14="http://schemas.microsoft.com/office/mac/drawingml/2011/main" xmlns:a14="http://schemas.microsoft.com/office/drawing/2010/main" xmlns:m="http://schemas.openxmlformats.org/officeDocument/2006/math" xmlns="" val="1"/>
+              <ma14:wrappingTextBoxFlag xmlns="" xmlns:m="http://schemas.openxmlformats.org/officeDocument/2006/math" xmlns:a14="http://schemas.microsoft.com/office/drawing/2010/main" xmlns:ma14="http://schemas.microsoft.com/office/mac/drawingml/2011/main" val="1"/>
             </a:ext>
           </a:extLst>
         </p:spPr>
@@ -15339,7 +15335,7 @@
           </a:ln>
           <a:extLst>
             <a:ext uri="{C572A759-6A51-4108-AA02-DFA0A04FC94B}">
-              <ma14:wrappingTextBoxFlag xmlns:ma14="http://schemas.microsoft.com/office/mac/drawingml/2011/main" xmlns:a14="http://schemas.microsoft.com/office/drawing/2010/main" xmlns:m="http://schemas.openxmlformats.org/officeDocument/2006/math" xmlns="" val="1"/>
+              <ma14:wrappingTextBoxFlag xmlns="" xmlns:m="http://schemas.openxmlformats.org/officeDocument/2006/math" xmlns:a14="http://schemas.microsoft.com/office/drawing/2010/main" xmlns:ma14="http://schemas.microsoft.com/office/mac/drawingml/2011/main" val="1"/>
             </a:ext>
           </a:extLst>
         </p:spPr>
@@ -15427,7 +15423,7 @@
           </a:ln>
           <a:extLst>
             <a:ext uri="{C572A759-6A51-4108-AA02-DFA0A04FC94B}">
-              <ma14:wrappingTextBoxFlag xmlns:ma14="http://schemas.microsoft.com/office/mac/drawingml/2011/main" xmlns:a14="http://schemas.microsoft.com/office/drawing/2010/main" xmlns:m="http://schemas.openxmlformats.org/officeDocument/2006/math" xmlns="" val="1"/>
+              <ma14:wrappingTextBoxFlag xmlns="" xmlns:m="http://schemas.openxmlformats.org/officeDocument/2006/math" xmlns:a14="http://schemas.microsoft.com/office/drawing/2010/main" xmlns:ma14="http://schemas.microsoft.com/office/mac/drawingml/2011/main" val="1"/>
             </a:ext>
           </a:extLst>
         </p:spPr>
@@ -15513,7 +15509,7 @@
           </a:ln>
           <a:extLst>
             <a:ext uri="{C572A759-6A51-4108-AA02-DFA0A04FC94B}">
-              <ma14:wrappingTextBoxFlag xmlns:ma14="http://schemas.microsoft.com/office/mac/drawingml/2011/main" xmlns:a14="http://schemas.microsoft.com/office/drawing/2010/main" xmlns:m="http://schemas.openxmlformats.org/officeDocument/2006/math" xmlns="" val="1"/>
+              <ma14:wrappingTextBoxFlag xmlns="" xmlns:m="http://schemas.openxmlformats.org/officeDocument/2006/math" xmlns:a14="http://schemas.microsoft.com/office/drawing/2010/main" xmlns:ma14="http://schemas.microsoft.com/office/mac/drawingml/2011/main" val="1"/>
             </a:ext>
           </a:extLst>
         </p:spPr>
@@ -15560,7 +15556,7 @@
           </a:ln>
           <a:extLst>
             <a:ext uri="{C572A759-6A51-4108-AA02-DFA0A04FC94B}">
-              <ma14:wrappingTextBoxFlag xmlns:ma14="http://schemas.microsoft.com/office/mac/drawingml/2011/main" xmlns:a14="http://schemas.microsoft.com/office/drawing/2010/main" xmlns:m="http://schemas.openxmlformats.org/officeDocument/2006/math" xmlns="" val="1"/>
+              <ma14:wrappingTextBoxFlag xmlns="" xmlns:m="http://schemas.openxmlformats.org/officeDocument/2006/math" xmlns:a14="http://schemas.microsoft.com/office/drawing/2010/main" xmlns:ma14="http://schemas.microsoft.com/office/mac/drawingml/2011/main" val="1"/>
             </a:ext>
           </a:extLst>
         </p:spPr>
@@ -15648,7 +15644,7 @@
           </a:ln>
           <a:extLst>
             <a:ext uri="{C572A759-6A51-4108-AA02-DFA0A04FC94B}">
-              <ma14:wrappingTextBoxFlag xmlns:ma14="http://schemas.microsoft.com/office/mac/drawingml/2011/main" xmlns:a14="http://schemas.microsoft.com/office/drawing/2010/main" xmlns:m="http://schemas.openxmlformats.org/officeDocument/2006/math" xmlns="" val="1"/>
+              <ma14:wrappingTextBoxFlag xmlns="" xmlns:m="http://schemas.openxmlformats.org/officeDocument/2006/math" xmlns:a14="http://schemas.microsoft.com/office/drawing/2010/main" xmlns:ma14="http://schemas.microsoft.com/office/mac/drawingml/2011/main" val="1"/>
             </a:ext>
           </a:extLst>
         </p:spPr>
@@ -15734,7 +15730,7 @@
           </a:ln>
           <a:extLst>
             <a:ext uri="{C572A759-6A51-4108-AA02-DFA0A04FC94B}">
-              <ma14:wrappingTextBoxFlag xmlns:ma14="http://schemas.microsoft.com/office/mac/drawingml/2011/main" xmlns:a14="http://schemas.microsoft.com/office/drawing/2010/main" xmlns:m="http://schemas.openxmlformats.org/officeDocument/2006/math" xmlns="" val="1"/>
+              <ma14:wrappingTextBoxFlag xmlns="" xmlns:m="http://schemas.openxmlformats.org/officeDocument/2006/math" xmlns:a14="http://schemas.microsoft.com/office/drawing/2010/main" xmlns:ma14="http://schemas.microsoft.com/office/mac/drawingml/2011/main" val="1"/>
             </a:ext>
           </a:extLst>
         </p:spPr>
@@ -15781,7 +15777,7 @@
           </a:ln>
           <a:extLst>
             <a:ext uri="{C572A759-6A51-4108-AA02-DFA0A04FC94B}">
-              <ma14:wrappingTextBoxFlag xmlns:ma14="http://schemas.microsoft.com/office/mac/drawingml/2011/main" xmlns:a14="http://schemas.microsoft.com/office/drawing/2010/main" xmlns:m="http://schemas.openxmlformats.org/officeDocument/2006/math" xmlns="" val="1"/>
+              <ma14:wrappingTextBoxFlag xmlns="" xmlns:m="http://schemas.openxmlformats.org/officeDocument/2006/math" xmlns:a14="http://schemas.microsoft.com/office/drawing/2010/main" xmlns:ma14="http://schemas.microsoft.com/office/mac/drawingml/2011/main" val="1"/>
             </a:ext>
           </a:extLst>
         </p:spPr>
@@ -15869,7 +15865,7 @@
           </a:ln>
           <a:extLst>
             <a:ext uri="{C572A759-6A51-4108-AA02-DFA0A04FC94B}">
-              <ma14:wrappingTextBoxFlag xmlns:ma14="http://schemas.microsoft.com/office/mac/drawingml/2011/main" xmlns:a14="http://schemas.microsoft.com/office/drawing/2010/main" xmlns:m="http://schemas.openxmlformats.org/officeDocument/2006/math" xmlns="" val="1"/>
+              <ma14:wrappingTextBoxFlag xmlns="" xmlns:m="http://schemas.openxmlformats.org/officeDocument/2006/math" xmlns:a14="http://schemas.microsoft.com/office/drawing/2010/main" xmlns:ma14="http://schemas.microsoft.com/office/mac/drawingml/2011/main" val="1"/>
             </a:ext>
           </a:extLst>
         </p:spPr>
@@ -15955,7 +15951,7 @@
           </a:ln>
           <a:extLst>
             <a:ext uri="{C572A759-6A51-4108-AA02-DFA0A04FC94B}">
-              <ma14:wrappingTextBoxFlag xmlns:ma14="http://schemas.microsoft.com/office/mac/drawingml/2011/main" xmlns:a14="http://schemas.microsoft.com/office/drawing/2010/main" xmlns:m="http://schemas.openxmlformats.org/officeDocument/2006/math" xmlns="" val="1"/>
+              <ma14:wrappingTextBoxFlag xmlns="" xmlns:m="http://schemas.openxmlformats.org/officeDocument/2006/math" xmlns:a14="http://schemas.microsoft.com/office/drawing/2010/main" xmlns:ma14="http://schemas.microsoft.com/office/mac/drawingml/2011/main" val="1"/>
             </a:ext>
           </a:extLst>
         </p:spPr>
@@ -16002,7 +15998,7 @@
           </a:ln>
           <a:extLst>
             <a:ext uri="{C572A759-6A51-4108-AA02-DFA0A04FC94B}">
-              <ma14:wrappingTextBoxFlag xmlns:ma14="http://schemas.microsoft.com/office/mac/drawingml/2011/main" xmlns:a14="http://schemas.microsoft.com/office/drawing/2010/main" xmlns:m="http://schemas.openxmlformats.org/officeDocument/2006/math" xmlns="" val="1"/>
+              <ma14:wrappingTextBoxFlag xmlns="" xmlns:m="http://schemas.openxmlformats.org/officeDocument/2006/math" xmlns:a14="http://schemas.microsoft.com/office/drawing/2010/main" xmlns:ma14="http://schemas.microsoft.com/office/mac/drawingml/2011/main" val="1"/>
             </a:ext>
           </a:extLst>
         </p:spPr>
@@ -16090,7 +16086,7 @@
           </a:ln>
           <a:extLst>
             <a:ext uri="{C572A759-6A51-4108-AA02-DFA0A04FC94B}">
-              <ma14:wrappingTextBoxFlag xmlns:ma14="http://schemas.microsoft.com/office/mac/drawingml/2011/main" xmlns:a14="http://schemas.microsoft.com/office/drawing/2010/main" xmlns:m="http://schemas.openxmlformats.org/officeDocument/2006/math" xmlns="" val="1"/>
+              <ma14:wrappingTextBoxFlag xmlns="" xmlns:m="http://schemas.openxmlformats.org/officeDocument/2006/math" xmlns:a14="http://schemas.microsoft.com/office/drawing/2010/main" xmlns:ma14="http://schemas.microsoft.com/office/mac/drawingml/2011/main" val="1"/>
             </a:ext>
           </a:extLst>
         </p:spPr>
@@ -16288,7 +16284,7 @@
           </a:ln>
           <a:extLst>
             <a:ext uri="{C572A759-6A51-4108-AA02-DFA0A04FC94B}">
-              <ma14:wrappingTextBoxFlag xmlns:ma14="http://schemas.microsoft.com/office/mac/drawingml/2011/main" xmlns:a14="http://schemas.microsoft.com/office/drawing/2010/main" xmlns:m="http://schemas.openxmlformats.org/officeDocument/2006/math" xmlns="" val="1"/>
+              <ma14:wrappingTextBoxFlag xmlns="" xmlns:m="http://schemas.openxmlformats.org/officeDocument/2006/math" xmlns:a14="http://schemas.microsoft.com/office/drawing/2010/main" xmlns:ma14="http://schemas.microsoft.com/office/mac/drawingml/2011/main" val="1"/>
             </a:ext>
           </a:extLst>
         </p:spPr>
@@ -16360,7 +16356,7 @@
           </a:ln>
           <a:extLst>
             <a:ext uri="{C572A759-6A51-4108-AA02-DFA0A04FC94B}">
-              <ma14:wrappingTextBoxFlag xmlns:ma14="http://schemas.microsoft.com/office/mac/drawingml/2011/main" xmlns:a14="http://schemas.microsoft.com/office/drawing/2010/main" xmlns:m="http://schemas.openxmlformats.org/officeDocument/2006/math" xmlns="" val="1"/>
+              <ma14:wrappingTextBoxFlag xmlns="" xmlns:m="http://schemas.openxmlformats.org/officeDocument/2006/math" xmlns:a14="http://schemas.microsoft.com/office/drawing/2010/main" xmlns:ma14="http://schemas.microsoft.com/office/mac/drawingml/2011/main" val="1"/>
             </a:ext>
           </a:extLst>
         </p:spPr>
@@ -16404,7 +16400,7 @@
           </a:prstGeom>
           <a:extLst>
             <a:ext uri="{C572A759-6A51-4108-AA02-DFA0A04FC94B}">
-              <ma14:wrappingTextBoxFlag xmlns:ma14="http://schemas.microsoft.com/office/mac/drawingml/2011/main" xmlns:a14="http://schemas.microsoft.com/office/drawing/2010/main" xmlns:m="http://schemas.openxmlformats.org/officeDocument/2006/math" xmlns="" val="1"/>
+              <ma14:wrappingTextBoxFlag xmlns="" xmlns:m="http://schemas.openxmlformats.org/officeDocument/2006/math" xmlns:a14="http://schemas.microsoft.com/office/drawing/2010/main" xmlns:ma14="http://schemas.microsoft.com/office/mac/drawingml/2011/main" val="1"/>
             </a:ext>
           </a:extLst>
         </p:spPr>
@@ -16771,7 +16767,7 @@
           </a:ln>
           <a:extLst>
             <a:ext uri="{C572A759-6A51-4108-AA02-DFA0A04FC94B}">
-              <ma14:wrappingTextBoxFlag xmlns:ma14="http://schemas.microsoft.com/office/mac/drawingml/2011/main" xmlns:a14="http://schemas.microsoft.com/office/drawing/2010/main" xmlns:m="http://schemas.openxmlformats.org/officeDocument/2006/math" xmlns="" val="1"/>
+              <ma14:wrappingTextBoxFlag xmlns="" xmlns:m="http://schemas.openxmlformats.org/officeDocument/2006/math" xmlns:a14="http://schemas.microsoft.com/office/drawing/2010/main" xmlns:ma14="http://schemas.microsoft.com/office/mac/drawingml/2011/main" val="1"/>
             </a:ext>
           </a:extLst>
         </p:spPr>
@@ -16843,7 +16839,7 @@
           </a:ln>
           <a:extLst>
             <a:ext uri="{C572A759-6A51-4108-AA02-DFA0A04FC94B}">
-              <ma14:wrappingTextBoxFlag xmlns:ma14="http://schemas.microsoft.com/office/mac/drawingml/2011/main" xmlns:a14="http://schemas.microsoft.com/office/drawing/2010/main" xmlns:m="http://schemas.openxmlformats.org/officeDocument/2006/math" xmlns="" val="1"/>
+              <ma14:wrappingTextBoxFlag xmlns="" xmlns:m="http://schemas.openxmlformats.org/officeDocument/2006/math" xmlns:a14="http://schemas.microsoft.com/office/drawing/2010/main" xmlns:ma14="http://schemas.microsoft.com/office/mac/drawingml/2011/main" val="1"/>
             </a:ext>
           </a:extLst>
         </p:spPr>
@@ -16887,7 +16883,7 @@
           </a:prstGeom>
           <a:extLst>
             <a:ext uri="{C572A759-6A51-4108-AA02-DFA0A04FC94B}">
-              <ma14:wrappingTextBoxFlag xmlns:ma14="http://schemas.microsoft.com/office/mac/drawingml/2011/main" xmlns:a14="http://schemas.microsoft.com/office/drawing/2010/main" xmlns:m="http://schemas.openxmlformats.org/officeDocument/2006/math" xmlns="" val="1"/>
+              <ma14:wrappingTextBoxFlag xmlns="" xmlns:m="http://schemas.openxmlformats.org/officeDocument/2006/math" xmlns:a14="http://schemas.microsoft.com/office/drawing/2010/main" xmlns:ma14="http://schemas.microsoft.com/office/mac/drawingml/2011/main" val="1"/>
             </a:ext>
           </a:extLst>
         </p:spPr>
@@ -17420,7 +17416,7 @@
           </a:ln>
           <a:extLst>
             <a:ext uri="{C572A759-6A51-4108-AA02-DFA0A04FC94B}">
-              <ma14:wrappingTextBoxFlag xmlns:ma14="http://schemas.microsoft.com/office/mac/drawingml/2011/main" xmlns:a14="http://schemas.microsoft.com/office/drawing/2010/main" xmlns:m="http://schemas.openxmlformats.org/officeDocument/2006/math" xmlns="" val="1"/>
+              <ma14:wrappingTextBoxFlag xmlns="" xmlns:m="http://schemas.openxmlformats.org/officeDocument/2006/math" xmlns:a14="http://schemas.microsoft.com/office/drawing/2010/main" xmlns:ma14="http://schemas.microsoft.com/office/mac/drawingml/2011/main" val="1"/>
             </a:ext>
           </a:extLst>
         </p:spPr>
@@ -17492,7 +17488,7 @@
           </a:ln>
           <a:extLst>
             <a:ext uri="{C572A759-6A51-4108-AA02-DFA0A04FC94B}">
-              <ma14:wrappingTextBoxFlag xmlns:ma14="http://schemas.microsoft.com/office/mac/drawingml/2011/main" xmlns:a14="http://schemas.microsoft.com/office/drawing/2010/main" xmlns:m="http://schemas.openxmlformats.org/officeDocument/2006/math" xmlns="" val="1"/>
+              <ma14:wrappingTextBoxFlag xmlns="" xmlns:m="http://schemas.openxmlformats.org/officeDocument/2006/math" xmlns:a14="http://schemas.microsoft.com/office/drawing/2010/main" xmlns:ma14="http://schemas.microsoft.com/office/mac/drawingml/2011/main" val="1"/>
             </a:ext>
           </a:extLst>
         </p:spPr>
@@ -17536,7 +17532,7 @@
           </a:prstGeom>
           <a:extLst>
             <a:ext uri="{C572A759-6A51-4108-AA02-DFA0A04FC94B}">
-              <ma14:wrappingTextBoxFlag xmlns:ma14="http://schemas.microsoft.com/office/mac/drawingml/2011/main" xmlns:a14="http://schemas.microsoft.com/office/drawing/2010/main" xmlns:m="http://schemas.openxmlformats.org/officeDocument/2006/math" xmlns="" val="1"/>
+              <ma14:wrappingTextBoxFlag xmlns="" xmlns:m="http://schemas.openxmlformats.org/officeDocument/2006/math" xmlns:a14="http://schemas.microsoft.com/office/drawing/2010/main" xmlns:ma14="http://schemas.microsoft.com/office/mac/drawingml/2011/main" val="1"/>
             </a:ext>
           </a:extLst>
         </p:spPr>
@@ -17747,7 +17743,7 @@
           </a:ln>
           <a:extLst>
             <a:ext uri="{C572A759-6A51-4108-AA02-DFA0A04FC94B}">
-              <ma14:wrappingTextBoxFlag xmlns:ma14="http://schemas.microsoft.com/office/mac/drawingml/2011/main" xmlns:a14="http://schemas.microsoft.com/office/drawing/2010/main" xmlns:m="http://schemas.openxmlformats.org/officeDocument/2006/math" xmlns="" val="1"/>
+              <ma14:wrappingTextBoxFlag xmlns="" xmlns:m="http://schemas.openxmlformats.org/officeDocument/2006/math" xmlns:a14="http://schemas.microsoft.com/office/drawing/2010/main" xmlns:ma14="http://schemas.microsoft.com/office/mac/drawingml/2011/main" val="1"/>
             </a:ext>
           </a:extLst>
         </p:spPr>
@@ -17824,7 +17820,7 @@
           </a:ln>
           <a:extLst>
             <a:ext uri="{C572A759-6A51-4108-AA02-DFA0A04FC94B}">
-              <ma14:wrappingTextBoxFlag xmlns:ma14="http://schemas.microsoft.com/office/mac/drawingml/2011/main" xmlns:a14="http://schemas.microsoft.com/office/drawing/2010/main" xmlns:m="http://schemas.openxmlformats.org/officeDocument/2006/math" xmlns="" val="1"/>
+              <ma14:wrappingTextBoxFlag xmlns="" xmlns:m="http://schemas.openxmlformats.org/officeDocument/2006/math" xmlns:a14="http://schemas.microsoft.com/office/drawing/2010/main" xmlns:ma14="http://schemas.microsoft.com/office/mac/drawingml/2011/main" val="1"/>
             </a:ext>
           </a:extLst>
         </p:spPr>
@@ -17868,7 +17864,7 @@
           </a:prstGeom>
           <a:extLst>
             <a:ext uri="{C572A759-6A51-4108-AA02-DFA0A04FC94B}">
-              <ma14:wrappingTextBoxFlag xmlns:ma14="http://schemas.microsoft.com/office/mac/drawingml/2011/main" xmlns:a14="http://schemas.microsoft.com/office/drawing/2010/main" xmlns:m="http://schemas.openxmlformats.org/officeDocument/2006/math" xmlns="" val="1"/>
+              <ma14:wrappingTextBoxFlag xmlns="" xmlns:m="http://schemas.openxmlformats.org/officeDocument/2006/math" xmlns:a14="http://schemas.microsoft.com/office/drawing/2010/main" xmlns:ma14="http://schemas.microsoft.com/office/mac/drawingml/2011/main" val="1"/>
             </a:ext>
           </a:extLst>
         </p:spPr>
@@ -17903,7 +17899,7 @@
           </a:ln>
           <a:extLst>
             <a:ext uri="{C572A759-6A51-4108-AA02-DFA0A04FC94B}">
-              <ma14:wrappingTextBoxFlag xmlns:ma14="http://schemas.microsoft.com/office/mac/drawingml/2011/main" xmlns:a14="http://schemas.microsoft.com/office/drawing/2010/main" xmlns:m="http://schemas.openxmlformats.org/officeDocument/2006/math" xmlns="" val="1"/>
+              <ma14:wrappingTextBoxFlag xmlns="" xmlns:m="http://schemas.openxmlformats.org/officeDocument/2006/math" xmlns:a14="http://schemas.microsoft.com/office/drawing/2010/main" xmlns:ma14="http://schemas.microsoft.com/office/mac/drawingml/2011/main" val="1"/>
             </a:ext>
           </a:extLst>
         </p:spPr>
@@ -17997,7 +17993,7 @@
           </a:ln>
           <a:extLst>
             <a:ext uri="{C572A759-6A51-4108-AA02-DFA0A04FC94B}">
-              <ma14:wrappingTextBoxFlag xmlns:ma14="http://schemas.microsoft.com/office/mac/drawingml/2011/main" xmlns:a14="http://schemas.microsoft.com/office/drawing/2010/main" xmlns:m="http://schemas.openxmlformats.org/officeDocument/2006/math" xmlns="" val="1"/>
+              <ma14:wrappingTextBoxFlag xmlns="" xmlns:m="http://schemas.openxmlformats.org/officeDocument/2006/math" xmlns:a14="http://schemas.microsoft.com/office/drawing/2010/main" xmlns:ma14="http://schemas.microsoft.com/office/mac/drawingml/2011/main" val="1"/>
             </a:ext>
           </a:extLst>
         </p:spPr>
@@ -18112,7 +18108,7 @@
             <a:effectLst/>
             <a:extLst>
               <a:ext uri="{C572A759-6A51-4108-AA02-DFA0A04FC94B}">
-                <ma14:wrappingTextBoxFlag xmlns:ma14="http://schemas.microsoft.com/office/mac/drawingml/2011/main" xmlns:a14="http://schemas.microsoft.com/office/drawing/2010/main" xmlns:m="http://schemas.openxmlformats.org/officeDocument/2006/math" xmlns="" val="1"/>
+                <ma14:wrappingTextBoxFlag xmlns="" xmlns:m="http://schemas.openxmlformats.org/officeDocument/2006/math" xmlns:a14="http://schemas.microsoft.com/office/drawing/2010/main" xmlns:ma14="http://schemas.microsoft.com/office/mac/drawingml/2011/main" val="1"/>
               </a:ext>
             </a:extLst>
           </p:spPr>
@@ -18160,7 +18156,7 @@
           </a:ln>
           <a:extLst>
             <a:ext uri="{C572A759-6A51-4108-AA02-DFA0A04FC94B}">
-              <ma14:wrappingTextBoxFlag xmlns:ma14="http://schemas.microsoft.com/office/mac/drawingml/2011/main" xmlns:a14="http://schemas.microsoft.com/office/drawing/2010/main" xmlns:m="http://schemas.openxmlformats.org/officeDocument/2006/math" xmlns="" val="1"/>
+              <ma14:wrappingTextBoxFlag xmlns="" xmlns:m="http://schemas.openxmlformats.org/officeDocument/2006/math" xmlns:a14="http://schemas.microsoft.com/office/drawing/2010/main" xmlns:ma14="http://schemas.microsoft.com/office/mac/drawingml/2011/main" val="1"/>
             </a:ext>
           </a:extLst>
         </p:spPr>
@@ -18314,7 +18310,7 @@
             <a:effectLst/>
             <a:extLst>
               <a:ext uri="{C572A759-6A51-4108-AA02-DFA0A04FC94B}">
-                <ma14:wrappingTextBoxFlag xmlns:ma14="http://schemas.microsoft.com/office/mac/drawingml/2011/main" xmlns:a14="http://schemas.microsoft.com/office/drawing/2010/main" xmlns:m="http://schemas.openxmlformats.org/officeDocument/2006/math" xmlns="" val="1"/>
+                <ma14:wrappingTextBoxFlag xmlns="" xmlns:m="http://schemas.openxmlformats.org/officeDocument/2006/math" xmlns:a14="http://schemas.microsoft.com/office/drawing/2010/main" xmlns:ma14="http://schemas.microsoft.com/office/mac/drawingml/2011/main" val="1"/>
               </a:ext>
             </a:extLst>
           </p:spPr>
@@ -18362,7 +18358,7 @@
           </a:ln>
           <a:extLst>
             <a:ext uri="{C572A759-6A51-4108-AA02-DFA0A04FC94B}">
-              <ma14:wrappingTextBoxFlag xmlns:ma14="http://schemas.microsoft.com/office/mac/drawingml/2011/main" xmlns:a14="http://schemas.microsoft.com/office/drawing/2010/main" xmlns:m="http://schemas.openxmlformats.org/officeDocument/2006/math" xmlns="" val="1"/>
+              <ma14:wrappingTextBoxFlag xmlns="" xmlns:m="http://schemas.openxmlformats.org/officeDocument/2006/math" xmlns:a14="http://schemas.microsoft.com/office/drawing/2010/main" xmlns:ma14="http://schemas.microsoft.com/office/mac/drawingml/2011/main" val="1"/>
             </a:ext>
           </a:extLst>
         </p:spPr>
@@ -18488,7 +18484,7 @@
             <a:effectLst/>
             <a:extLst>
               <a:ext uri="{C572A759-6A51-4108-AA02-DFA0A04FC94B}">
-                <ma14:wrappingTextBoxFlag xmlns:ma14="http://schemas.microsoft.com/office/mac/drawingml/2011/main" xmlns:a14="http://schemas.microsoft.com/office/drawing/2010/main" xmlns:m="http://schemas.openxmlformats.org/officeDocument/2006/math" xmlns="" val="1"/>
+                <ma14:wrappingTextBoxFlag xmlns="" xmlns:m="http://schemas.openxmlformats.org/officeDocument/2006/math" xmlns:a14="http://schemas.microsoft.com/office/drawing/2010/main" xmlns:ma14="http://schemas.microsoft.com/office/mac/drawingml/2011/main" val="1"/>
               </a:ext>
             </a:extLst>
           </p:spPr>
@@ -18536,7 +18532,7 @@
           </a:ln>
           <a:extLst>
             <a:ext uri="{C572A759-6A51-4108-AA02-DFA0A04FC94B}">
-              <ma14:wrappingTextBoxFlag xmlns:ma14="http://schemas.microsoft.com/office/mac/drawingml/2011/main" xmlns:a14="http://schemas.microsoft.com/office/drawing/2010/main" xmlns:m="http://schemas.openxmlformats.org/officeDocument/2006/math" xmlns="" val="1"/>
+              <ma14:wrappingTextBoxFlag xmlns="" xmlns:m="http://schemas.openxmlformats.org/officeDocument/2006/math" xmlns:a14="http://schemas.microsoft.com/office/drawing/2010/main" xmlns:ma14="http://schemas.microsoft.com/office/mac/drawingml/2011/main" val="1"/>
             </a:ext>
           </a:extLst>
         </p:spPr>
@@ -18662,7 +18658,7 @@
             <a:effectLst/>
             <a:extLst>
               <a:ext uri="{C572A759-6A51-4108-AA02-DFA0A04FC94B}">
-                <ma14:wrappingTextBoxFlag xmlns:ma14="http://schemas.microsoft.com/office/mac/drawingml/2011/main" xmlns:a14="http://schemas.microsoft.com/office/drawing/2010/main" xmlns:m="http://schemas.openxmlformats.org/officeDocument/2006/math" xmlns="" val="1"/>
+                <ma14:wrappingTextBoxFlag xmlns="" xmlns:m="http://schemas.openxmlformats.org/officeDocument/2006/math" xmlns:a14="http://schemas.microsoft.com/office/drawing/2010/main" xmlns:ma14="http://schemas.microsoft.com/office/mac/drawingml/2011/main" val="1"/>
               </a:ext>
             </a:extLst>
           </p:spPr>
@@ -18710,7 +18706,7 @@
           </a:ln>
           <a:extLst>
             <a:ext uri="{C572A759-6A51-4108-AA02-DFA0A04FC94B}">
-              <ma14:wrappingTextBoxFlag xmlns:ma14="http://schemas.microsoft.com/office/mac/drawingml/2011/main" xmlns:a14="http://schemas.microsoft.com/office/drawing/2010/main" xmlns:m="http://schemas.openxmlformats.org/officeDocument/2006/math" xmlns="" val="1"/>
+              <ma14:wrappingTextBoxFlag xmlns="" xmlns:m="http://schemas.openxmlformats.org/officeDocument/2006/math" xmlns:a14="http://schemas.microsoft.com/office/drawing/2010/main" xmlns:ma14="http://schemas.microsoft.com/office/mac/drawingml/2011/main" val="1"/>
             </a:ext>
           </a:extLst>
         </p:spPr>
@@ -18864,7 +18860,7 @@
             <a:effectLst/>
             <a:extLst>
               <a:ext uri="{C572A759-6A51-4108-AA02-DFA0A04FC94B}">
-                <ma14:wrappingTextBoxFlag xmlns:ma14="http://schemas.microsoft.com/office/mac/drawingml/2011/main" xmlns:a14="http://schemas.microsoft.com/office/drawing/2010/main" xmlns:m="http://schemas.openxmlformats.org/officeDocument/2006/math" xmlns="" val="1"/>
+                <ma14:wrappingTextBoxFlag xmlns="" xmlns:m="http://schemas.openxmlformats.org/officeDocument/2006/math" xmlns:a14="http://schemas.microsoft.com/office/drawing/2010/main" xmlns:ma14="http://schemas.microsoft.com/office/mac/drawingml/2011/main" val="1"/>
               </a:ext>
             </a:extLst>
           </p:spPr>
@@ -18912,7 +18908,7 @@
           </a:ln>
           <a:extLst>
             <a:ext uri="{C572A759-6A51-4108-AA02-DFA0A04FC94B}">
-              <ma14:wrappingTextBoxFlag xmlns:ma14="http://schemas.microsoft.com/office/mac/drawingml/2011/main" xmlns:a14="http://schemas.microsoft.com/office/drawing/2010/main" xmlns:m="http://schemas.openxmlformats.org/officeDocument/2006/math" xmlns="" val="1"/>
+              <ma14:wrappingTextBoxFlag xmlns="" xmlns:m="http://schemas.openxmlformats.org/officeDocument/2006/math" xmlns:a14="http://schemas.microsoft.com/office/drawing/2010/main" xmlns:ma14="http://schemas.microsoft.com/office/mac/drawingml/2011/main" val="1"/>
             </a:ext>
           </a:extLst>
         </p:spPr>
@@ -19017,7 +19013,7 @@
           </a:ln>
           <a:extLst>
             <a:ext uri="{C572A759-6A51-4108-AA02-DFA0A04FC94B}">
-              <ma14:wrappingTextBoxFlag xmlns:ma14="http://schemas.microsoft.com/office/mac/drawingml/2011/main" xmlns:a14="http://schemas.microsoft.com/office/drawing/2010/main" xmlns:m="http://schemas.openxmlformats.org/officeDocument/2006/math" xmlns="" val="1"/>
+              <ma14:wrappingTextBoxFlag xmlns="" xmlns:m="http://schemas.openxmlformats.org/officeDocument/2006/math" xmlns:a14="http://schemas.microsoft.com/office/drawing/2010/main" xmlns:ma14="http://schemas.microsoft.com/office/mac/drawingml/2011/main" val="1"/>
             </a:ext>
           </a:extLst>
         </p:spPr>
@@ -19150,7 +19146,7 @@
             <a:effectLst/>
             <a:extLst>
               <a:ext uri="{C572A759-6A51-4108-AA02-DFA0A04FC94B}">
-                <ma14:wrappingTextBoxFlag xmlns:ma14="http://schemas.microsoft.com/office/mac/drawingml/2011/main" xmlns:a14="http://schemas.microsoft.com/office/drawing/2010/main" xmlns:m="http://schemas.openxmlformats.org/officeDocument/2006/math" xmlns="" val="1"/>
+                <ma14:wrappingTextBoxFlag xmlns="" xmlns:m="http://schemas.openxmlformats.org/officeDocument/2006/math" xmlns:a14="http://schemas.microsoft.com/office/drawing/2010/main" xmlns:ma14="http://schemas.microsoft.com/office/mac/drawingml/2011/main" val="1"/>
               </a:ext>
             </a:extLst>
           </p:spPr>
@@ -19198,7 +19194,7 @@
           </a:ln>
           <a:extLst>
             <a:ext uri="{C572A759-6A51-4108-AA02-DFA0A04FC94B}">
-              <ma14:wrappingTextBoxFlag xmlns:ma14="http://schemas.microsoft.com/office/mac/drawingml/2011/main" xmlns:a14="http://schemas.microsoft.com/office/drawing/2010/main" xmlns:m="http://schemas.openxmlformats.org/officeDocument/2006/math" xmlns="" val="1"/>
+              <ma14:wrappingTextBoxFlag xmlns="" xmlns:m="http://schemas.openxmlformats.org/officeDocument/2006/math" xmlns:a14="http://schemas.microsoft.com/office/drawing/2010/main" xmlns:ma14="http://schemas.microsoft.com/office/mac/drawingml/2011/main" val="1"/>
             </a:ext>
           </a:extLst>
         </p:spPr>
@@ -19339,7 +19335,7 @@
           </a:ln>
           <a:extLst>
             <a:ext uri="{C572A759-6A51-4108-AA02-DFA0A04FC94B}">
-              <ma14:wrappingTextBoxFlag xmlns:ma14="http://schemas.microsoft.com/office/mac/drawingml/2011/main" xmlns:a14="http://schemas.microsoft.com/office/drawing/2010/main" xmlns:m="http://schemas.openxmlformats.org/officeDocument/2006/math" xmlns="" val="1"/>
+              <ma14:wrappingTextBoxFlag xmlns="" xmlns:m="http://schemas.openxmlformats.org/officeDocument/2006/math" xmlns:a14="http://schemas.microsoft.com/office/drawing/2010/main" xmlns:ma14="http://schemas.microsoft.com/office/mac/drawingml/2011/main" val="1"/>
             </a:ext>
           </a:extLst>
         </p:spPr>
@@ -19386,7 +19382,7 @@
           </a:ln>
           <a:extLst>
             <a:ext uri="{C572A759-6A51-4108-AA02-DFA0A04FC94B}">
-              <ma14:wrappingTextBoxFlag xmlns:ma14="http://schemas.microsoft.com/office/mac/drawingml/2011/main" xmlns:a14="http://schemas.microsoft.com/office/drawing/2010/main" xmlns:m="http://schemas.openxmlformats.org/officeDocument/2006/math" xmlns="" val="1"/>
+              <ma14:wrappingTextBoxFlag xmlns="" xmlns:m="http://schemas.openxmlformats.org/officeDocument/2006/math" xmlns:a14="http://schemas.microsoft.com/office/drawing/2010/main" xmlns:ma14="http://schemas.microsoft.com/office/mac/drawingml/2011/main" val="1"/>
             </a:ext>
           </a:extLst>
         </p:spPr>
@@ -19527,7 +19523,7 @@
           </a:ln>
           <a:extLst>
             <a:ext uri="{C572A759-6A51-4108-AA02-DFA0A04FC94B}">
-              <ma14:wrappingTextBoxFlag xmlns:ma14="http://schemas.microsoft.com/office/mac/drawingml/2011/main" xmlns:a14="http://schemas.microsoft.com/office/drawing/2010/main" xmlns:m="http://schemas.openxmlformats.org/officeDocument/2006/math" xmlns="" val="1"/>
+              <ma14:wrappingTextBoxFlag xmlns="" xmlns:m="http://schemas.openxmlformats.org/officeDocument/2006/math" xmlns:a14="http://schemas.microsoft.com/office/drawing/2010/main" xmlns:ma14="http://schemas.microsoft.com/office/mac/drawingml/2011/main" val="1"/>
             </a:ext>
           </a:extLst>
         </p:spPr>
@@ -19574,7 +19570,7 @@
           </a:ln>
           <a:extLst>
             <a:ext uri="{C572A759-6A51-4108-AA02-DFA0A04FC94B}">
-              <ma14:wrappingTextBoxFlag xmlns:ma14="http://schemas.microsoft.com/office/mac/drawingml/2011/main" xmlns:a14="http://schemas.microsoft.com/office/drawing/2010/main" xmlns:m="http://schemas.openxmlformats.org/officeDocument/2006/math" xmlns="" val="1"/>
+              <ma14:wrappingTextBoxFlag xmlns="" xmlns:m="http://schemas.openxmlformats.org/officeDocument/2006/math" xmlns:a14="http://schemas.microsoft.com/office/drawing/2010/main" xmlns:ma14="http://schemas.microsoft.com/office/mac/drawingml/2011/main" val="1"/>
             </a:ext>
           </a:extLst>
         </p:spPr>
@@ -19715,7 +19711,7 @@
           </a:ln>
           <a:extLst>
             <a:ext uri="{C572A759-6A51-4108-AA02-DFA0A04FC94B}">
-              <ma14:wrappingTextBoxFlag xmlns:ma14="http://schemas.microsoft.com/office/mac/drawingml/2011/main" xmlns:a14="http://schemas.microsoft.com/office/drawing/2010/main" xmlns:m="http://schemas.openxmlformats.org/officeDocument/2006/math" xmlns="" val="1"/>
+              <ma14:wrappingTextBoxFlag xmlns="" xmlns:m="http://schemas.openxmlformats.org/officeDocument/2006/math" xmlns:a14="http://schemas.microsoft.com/office/drawing/2010/main" xmlns:ma14="http://schemas.microsoft.com/office/mac/drawingml/2011/main" val="1"/>
             </a:ext>
           </a:extLst>
         </p:spPr>
@@ -19762,7 +19758,7 @@
           </a:ln>
           <a:extLst>
             <a:ext uri="{C572A759-6A51-4108-AA02-DFA0A04FC94B}">
-              <ma14:wrappingTextBoxFlag xmlns:ma14="http://schemas.microsoft.com/office/mac/drawingml/2011/main" xmlns:a14="http://schemas.microsoft.com/office/drawing/2010/main" xmlns:m="http://schemas.openxmlformats.org/officeDocument/2006/math" xmlns="" val="1"/>
+              <ma14:wrappingTextBoxFlag xmlns="" xmlns:m="http://schemas.openxmlformats.org/officeDocument/2006/math" xmlns:a14="http://schemas.microsoft.com/office/drawing/2010/main" xmlns:ma14="http://schemas.microsoft.com/office/mac/drawingml/2011/main" val="1"/>
             </a:ext>
           </a:extLst>
         </p:spPr>
@@ -19903,7 +19899,7 @@
           </a:ln>
           <a:extLst>
             <a:ext uri="{C572A759-6A51-4108-AA02-DFA0A04FC94B}">
-              <ma14:wrappingTextBoxFlag xmlns:ma14="http://schemas.microsoft.com/office/mac/drawingml/2011/main" xmlns:a14="http://schemas.microsoft.com/office/drawing/2010/main" xmlns:m="http://schemas.openxmlformats.org/officeDocument/2006/math" xmlns="" val="1"/>
+              <ma14:wrappingTextBoxFlag xmlns="" xmlns:m="http://schemas.openxmlformats.org/officeDocument/2006/math" xmlns:a14="http://schemas.microsoft.com/office/drawing/2010/main" xmlns:ma14="http://schemas.microsoft.com/office/mac/drawingml/2011/main" val="1"/>
             </a:ext>
           </a:extLst>
         </p:spPr>
@@ -19950,7 +19946,7 @@
           </a:ln>
           <a:extLst>
             <a:ext uri="{C572A759-6A51-4108-AA02-DFA0A04FC94B}">
-              <ma14:wrappingTextBoxFlag xmlns:ma14="http://schemas.microsoft.com/office/mac/drawingml/2011/main" xmlns:a14="http://schemas.microsoft.com/office/drawing/2010/main" xmlns:m="http://schemas.openxmlformats.org/officeDocument/2006/math" xmlns="" val="1"/>
+              <ma14:wrappingTextBoxFlag xmlns="" xmlns:m="http://schemas.openxmlformats.org/officeDocument/2006/math" xmlns:a14="http://schemas.microsoft.com/office/drawing/2010/main" xmlns:ma14="http://schemas.microsoft.com/office/mac/drawingml/2011/main" val="1"/>
             </a:ext>
           </a:extLst>
         </p:spPr>
@@ -20091,7 +20087,7 @@
           </a:ln>
           <a:extLst>
             <a:ext uri="{C572A759-6A51-4108-AA02-DFA0A04FC94B}">
-              <ma14:wrappingTextBoxFlag xmlns:ma14="http://schemas.microsoft.com/office/mac/drawingml/2011/main" xmlns:a14="http://schemas.microsoft.com/office/drawing/2010/main" xmlns:m="http://schemas.openxmlformats.org/officeDocument/2006/math" xmlns="" val="1"/>
+              <ma14:wrappingTextBoxFlag xmlns="" xmlns:m="http://schemas.openxmlformats.org/officeDocument/2006/math" xmlns:a14="http://schemas.microsoft.com/office/drawing/2010/main" xmlns:ma14="http://schemas.microsoft.com/office/mac/drawingml/2011/main" val="1"/>
             </a:ext>
           </a:extLst>
         </p:spPr>
@@ -20138,7 +20134,7 @@
           </a:ln>
           <a:extLst>
             <a:ext uri="{C572A759-6A51-4108-AA02-DFA0A04FC94B}">
-              <ma14:wrappingTextBoxFlag xmlns:ma14="http://schemas.microsoft.com/office/mac/drawingml/2011/main" xmlns:a14="http://schemas.microsoft.com/office/drawing/2010/main" xmlns:m="http://schemas.openxmlformats.org/officeDocument/2006/math" xmlns="" val="1"/>
+              <ma14:wrappingTextBoxFlag xmlns="" xmlns:m="http://schemas.openxmlformats.org/officeDocument/2006/math" xmlns:a14="http://schemas.microsoft.com/office/drawing/2010/main" xmlns:ma14="http://schemas.microsoft.com/office/mac/drawingml/2011/main" val="1"/>
             </a:ext>
           </a:extLst>
         </p:spPr>
@@ -20279,7 +20275,7 @@
           </a:ln>
           <a:extLst>
             <a:ext uri="{C572A759-6A51-4108-AA02-DFA0A04FC94B}">
-              <ma14:wrappingTextBoxFlag xmlns:ma14="http://schemas.microsoft.com/office/mac/drawingml/2011/main" xmlns:a14="http://schemas.microsoft.com/office/drawing/2010/main" xmlns:m="http://schemas.openxmlformats.org/officeDocument/2006/math" xmlns="" val="1"/>
+              <ma14:wrappingTextBoxFlag xmlns="" xmlns:m="http://schemas.openxmlformats.org/officeDocument/2006/math" xmlns:a14="http://schemas.microsoft.com/office/drawing/2010/main" xmlns:ma14="http://schemas.microsoft.com/office/mac/drawingml/2011/main" val="1"/>
             </a:ext>
           </a:extLst>
         </p:spPr>
@@ -20326,7 +20322,7 @@
           </a:ln>
           <a:extLst>
             <a:ext uri="{C572A759-6A51-4108-AA02-DFA0A04FC94B}">
-              <ma14:wrappingTextBoxFlag xmlns:ma14="http://schemas.microsoft.com/office/mac/drawingml/2011/main" xmlns:a14="http://schemas.microsoft.com/office/drawing/2010/main" xmlns:m="http://schemas.openxmlformats.org/officeDocument/2006/math" xmlns="" val="1"/>
+              <ma14:wrappingTextBoxFlag xmlns="" xmlns:m="http://schemas.openxmlformats.org/officeDocument/2006/math" xmlns:a14="http://schemas.microsoft.com/office/drawing/2010/main" xmlns:ma14="http://schemas.microsoft.com/office/mac/drawingml/2011/main" val="1"/>
             </a:ext>
           </a:extLst>
         </p:spPr>
@@ -20467,7 +20463,7 @@
           </a:ln>
           <a:extLst>
             <a:ext uri="{C572A759-6A51-4108-AA02-DFA0A04FC94B}">
-              <ma14:wrappingTextBoxFlag xmlns:ma14="http://schemas.microsoft.com/office/mac/drawingml/2011/main" xmlns:a14="http://schemas.microsoft.com/office/drawing/2010/main" xmlns:m="http://schemas.openxmlformats.org/officeDocument/2006/math" xmlns="" val="1"/>
+              <ma14:wrappingTextBoxFlag xmlns="" xmlns:m="http://schemas.openxmlformats.org/officeDocument/2006/math" xmlns:a14="http://schemas.microsoft.com/office/drawing/2010/main" xmlns:ma14="http://schemas.microsoft.com/office/mac/drawingml/2011/main" val="1"/>
             </a:ext>
           </a:extLst>
         </p:spPr>
@@ -20582,7 +20578,7 @@
             <a:effectLst/>
             <a:extLst>
               <a:ext uri="{C572A759-6A51-4108-AA02-DFA0A04FC94B}">
-                <ma14:wrappingTextBoxFlag xmlns:ma14="http://schemas.microsoft.com/office/mac/drawingml/2011/main" xmlns:a14="http://schemas.microsoft.com/office/drawing/2010/main" xmlns:m="http://schemas.openxmlformats.org/officeDocument/2006/math" xmlns="" val="1"/>
+                <ma14:wrappingTextBoxFlag xmlns="" xmlns:m="http://schemas.openxmlformats.org/officeDocument/2006/math" xmlns:a14="http://schemas.microsoft.com/office/drawing/2010/main" xmlns:ma14="http://schemas.microsoft.com/office/mac/drawingml/2011/main" val="1"/>
               </a:ext>
             </a:extLst>
           </p:spPr>

--- a/presentation/ln_text_analysis.pptx
+++ b/presentation/ln_text_analysis.pptx
@@ -2865,7 +2865,7 @@
           </a:ln>
           <a:extLst>
             <a:ext uri="{C572A759-6A51-4108-AA02-DFA0A04FC94B}">
-              <ma14:wrappingTextBoxFlag xmlns="" xmlns:m="http://schemas.openxmlformats.org/officeDocument/2006/math" xmlns:a14="http://schemas.microsoft.com/office/drawing/2010/main" xmlns:ma14="http://schemas.microsoft.com/office/mac/drawingml/2011/main" val="1"/>
+              <ma14:wrappingTextBoxFlag xmlns:ma14="http://schemas.microsoft.com/office/mac/drawingml/2011/main" xmlns:a14="http://schemas.microsoft.com/office/drawing/2010/main" xmlns:m="http://schemas.openxmlformats.org/officeDocument/2006/math" xmlns="" val="1"/>
             </a:ext>
           </a:extLst>
         </p:spPr>
@@ -2904,7 +2904,7 @@
           </a:ln>
           <a:extLst>
             <a:ext uri="{C572A759-6A51-4108-AA02-DFA0A04FC94B}">
-              <ma14:wrappingTextBoxFlag xmlns="" xmlns:m="http://schemas.openxmlformats.org/officeDocument/2006/math" xmlns:a14="http://schemas.microsoft.com/office/drawing/2010/main" xmlns:ma14="http://schemas.microsoft.com/office/mac/drawingml/2011/main" val="1"/>
+              <ma14:wrappingTextBoxFlag xmlns:ma14="http://schemas.microsoft.com/office/mac/drawingml/2011/main" xmlns:a14="http://schemas.microsoft.com/office/drawing/2010/main" xmlns:m="http://schemas.openxmlformats.org/officeDocument/2006/math" xmlns="" val="1"/>
             </a:ext>
           </a:extLst>
         </p:spPr>
@@ -3922,7 +3922,7 @@
           </a:ln>
           <a:extLst>
             <a:ext uri="{C572A759-6A51-4108-AA02-DFA0A04FC94B}">
-              <ma14:wrappingTextBoxFlag xmlns="" xmlns:m="http://schemas.openxmlformats.org/officeDocument/2006/math" xmlns:a14="http://schemas.microsoft.com/office/drawing/2010/main" xmlns:ma14="http://schemas.microsoft.com/office/mac/drawingml/2011/main" val="1"/>
+              <ma14:wrappingTextBoxFlag xmlns:ma14="http://schemas.microsoft.com/office/mac/drawingml/2011/main" xmlns:a14="http://schemas.microsoft.com/office/drawing/2010/main" xmlns:m="http://schemas.openxmlformats.org/officeDocument/2006/math" xmlns="" val="1"/>
             </a:ext>
           </a:extLst>
         </p:spPr>
@@ -4218,7 +4218,7 @@
           </a:ln>
           <a:extLst>
             <a:ext uri="{C572A759-6A51-4108-AA02-DFA0A04FC94B}">
-              <ma14:wrappingTextBoxFlag xmlns="" xmlns:m="http://schemas.openxmlformats.org/officeDocument/2006/math" xmlns:a14="http://schemas.microsoft.com/office/drawing/2010/main" xmlns:ma14="http://schemas.microsoft.com/office/mac/drawingml/2011/main" val="1"/>
+              <ma14:wrappingTextBoxFlag xmlns:ma14="http://schemas.microsoft.com/office/mac/drawingml/2011/main" xmlns:a14="http://schemas.microsoft.com/office/drawing/2010/main" xmlns:m="http://schemas.openxmlformats.org/officeDocument/2006/math" xmlns="" val="1"/>
             </a:ext>
           </a:extLst>
         </p:spPr>
@@ -4262,7 +4262,7 @@
           </a:prstGeom>
           <a:extLst>
             <a:ext uri="{C572A759-6A51-4108-AA02-DFA0A04FC94B}">
-              <ma14:wrappingTextBoxFlag xmlns="" xmlns:m="http://schemas.openxmlformats.org/officeDocument/2006/math" xmlns:a14="http://schemas.microsoft.com/office/drawing/2010/main" xmlns:ma14="http://schemas.microsoft.com/office/mac/drawingml/2011/main" val="1"/>
+              <ma14:wrappingTextBoxFlag xmlns:ma14="http://schemas.microsoft.com/office/mac/drawingml/2011/main" xmlns:a14="http://schemas.microsoft.com/office/drawing/2010/main" xmlns:m="http://schemas.openxmlformats.org/officeDocument/2006/math" xmlns="" val="1"/>
             </a:ext>
           </a:extLst>
         </p:spPr>
@@ -4449,7 +4449,7 @@
           </a:ln>
           <a:extLst>
             <a:ext uri="{C572A759-6A51-4108-AA02-DFA0A04FC94B}">
-              <ma14:wrappingTextBoxFlag xmlns="" xmlns:m="http://schemas.openxmlformats.org/officeDocument/2006/math" xmlns:a14="http://schemas.microsoft.com/office/drawing/2010/main" xmlns:ma14="http://schemas.microsoft.com/office/mac/drawingml/2011/main" val="1"/>
+              <ma14:wrappingTextBoxFlag xmlns:ma14="http://schemas.microsoft.com/office/mac/drawingml/2011/main" xmlns:a14="http://schemas.microsoft.com/office/drawing/2010/main" xmlns:m="http://schemas.openxmlformats.org/officeDocument/2006/math" xmlns="" val="1"/>
             </a:ext>
           </a:extLst>
         </p:spPr>
@@ -4646,7 +4646,7 @@
           </a:ln>
           <a:extLst>
             <a:ext uri="{C572A759-6A51-4108-AA02-DFA0A04FC94B}">
-              <ma14:wrappingTextBoxFlag xmlns="" xmlns:m="http://schemas.openxmlformats.org/officeDocument/2006/math" xmlns:a14="http://schemas.microsoft.com/office/drawing/2010/main" xmlns:ma14="http://schemas.microsoft.com/office/mac/drawingml/2011/main" val="1"/>
+              <ma14:wrappingTextBoxFlag xmlns:ma14="http://schemas.microsoft.com/office/mac/drawingml/2011/main" xmlns:a14="http://schemas.microsoft.com/office/drawing/2010/main" xmlns:m="http://schemas.openxmlformats.org/officeDocument/2006/math" xmlns="" val="1"/>
             </a:ext>
           </a:extLst>
         </p:spPr>
@@ -4690,7 +4690,7 @@
           </a:prstGeom>
           <a:extLst>
             <a:ext uri="{C572A759-6A51-4108-AA02-DFA0A04FC94B}">
-              <ma14:wrappingTextBoxFlag xmlns="" xmlns:m="http://schemas.openxmlformats.org/officeDocument/2006/math" xmlns:a14="http://schemas.microsoft.com/office/drawing/2010/main" xmlns:ma14="http://schemas.microsoft.com/office/mac/drawingml/2011/main" val="1"/>
+              <ma14:wrappingTextBoxFlag xmlns:ma14="http://schemas.microsoft.com/office/mac/drawingml/2011/main" xmlns:a14="http://schemas.microsoft.com/office/drawing/2010/main" xmlns:m="http://schemas.openxmlformats.org/officeDocument/2006/math" xmlns="" val="1"/>
             </a:ext>
           </a:extLst>
         </p:spPr>
@@ -4752,7 +4752,7 @@
           </a:ln>
           <a:extLst>
             <a:ext uri="{C572A759-6A51-4108-AA02-DFA0A04FC94B}">
-              <ma14:wrappingTextBoxFlag xmlns="" xmlns:m="http://schemas.openxmlformats.org/officeDocument/2006/math" xmlns:a14="http://schemas.microsoft.com/office/drawing/2010/main" xmlns:ma14="http://schemas.microsoft.com/office/mac/drawingml/2011/main" val="1"/>
+              <ma14:wrappingTextBoxFlag xmlns:ma14="http://schemas.microsoft.com/office/mac/drawingml/2011/main" xmlns:a14="http://schemas.microsoft.com/office/drawing/2010/main" xmlns:m="http://schemas.openxmlformats.org/officeDocument/2006/math" xmlns="" val="1"/>
             </a:ext>
           </a:extLst>
         </p:spPr>
@@ -5982,7 +5982,7 @@
           </a:ln>
           <a:extLst>
             <a:ext uri="{C572A759-6A51-4108-AA02-DFA0A04FC94B}">
-              <ma14:wrappingTextBoxFlag xmlns="" xmlns:m="http://schemas.openxmlformats.org/officeDocument/2006/math" xmlns:a14="http://schemas.microsoft.com/office/drawing/2010/main" xmlns:ma14="http://schemas.microsoft.com/office/mac/drawingml/2011/main" val="1"/>
+              <ma14:wrappingTextBoxFlag xmlns:ma14="http://schemas.microsoft.com/office/mac/drawingml/2011/main" xmlns:a14="http://schemas.microsoft.com/office/drawing/2010/main" xmlns:m="http://schemas.openxmlformats.org/officeDocument/2006/math" xmlns="" val="1"/>
             </a:ext>
           </a:extLst>
         </p:spPr>
@@ -6055,7 +6055,7 @@
           </a:prstGeom>
           <a:extLst>
             <a:ext uri="{C572A759-6A51-4108-AA02-DFA0A04FC94B}">
-              <ma14:wrappingTextBoxFlag xmlns="" xmlns:m="http://schemas.openxmlformats.org/officeDocument/2006/math" xmlns:a14="http://schemas.microsoft.com/office/drawing/2010/main" xmlns:ma14="http://schemas.microsoft.com/office/mac/drawingml/2011/main" val="1"/>
+              <ma14:wrappingTextBoxFlag xmlns:ma14="http://schemas.microsoft.com/office/mac/drawingml/2011/main" xmlns:a14="http://schemas.microsoft.com/office/drawing/2010/main" xmlns:m="http://schemas.openxmlformats.org/officeDocument/2006/math" xmlns="" val="1"/>
             </a:ext>
           </a:extLst>
         </p:spPr>
@@ -6090,7 +6090,7 @@
           </a:ln>
           <a:extLst>
             <a:ext uri="{C572A759-6A51-4108-AA02-DFA0A04FC94B}">
-              <ma14:wrappingTextBoxFlag xmlns="" xmlns:m="http://schemas.openxmlformats.org/officeDocument/2006/math" xmlns:a14="http://schemas.microsoft.com/office/drawing/2010/main" xmlns:ma14="http://schemas.microsoft.com/office/mac/drawingml/2011/main" val="1"/>
+              <ma14:wrappingTextBoxFlag xmlns:ma14="http://schemas.microsoft.com/office/mac/drawingml/2011/main" xmlns:a14="http://schemas.microsoft.com/office/drawing/2010/main" xmlns:m="http://schemas.openxmlformats.org/officeDocument/2006/math" xmlns="" val="1"/>
             </a:ext>
           </a:extLst>
         </p:spPr>
@@ -6175,7 +6175,7 @@
           </a:ln>
           <a:extLst>
             <a:ext uri="{C572A759-6A51-4108-AA02-DFA0A04FC94B}">
-              <ma14:wrappingTextBoxFlag xmlns="" xmlns:m="http://schemas.openxmlformats.org/officeDocument/2006/math" xmlns:a14="http://schemas.microsoft.com/office/drawing/2010/main" xmlns:ma14="http://schemas.microsoft.com/office/mac/drawingml/2011/main" val="1"/>
+              <ma14:wrappingTextBoxFlag xmlns:ma14="http://schemas.microsoft.com/office/mac/drawingml/2011/main" xmlns:a14="http://schemas.microsoft.com/office/drawing/2010/main" xmlns:m="http://schemas.openxmlformats.org/officeDocument/2006/math" xmlns="" val="1"/>
             </a:ext>
           </a:extLst>
         </p:spPr>
@@ -6287,7 +6287,7 @@
             <a:effectLst/>
             <a:extLst>
               <a:ext uri="{C572A759-6A51-4108-AA02-DFA0A04FC94B}">
-                <ma14:wrappingTextBoxFlag xmlns="" xmlns:m="http://schemas.openxmlformats.org/officeDocument/2006/math" xmlns:a14="http://schemas.microsoft.com/office/drawing/2010/main" xmlns:ma14="http://schemas.microsoft.com/office/mac/drawingml/2011/main" val="1"/>
+                <ma14:wrappingTextBoxFlag xmlns:ma14="http://schemas.microsoft.com/office/mac/drawingml/2011/main" xmlns:a14="http://schemas.microsoft.com/office/drawing/2010/main" xmlns:m="http://schemas.openxmlformats.org/officeDocument/2006/math" xmlns="" val="1"/>
               </a:ext>
             </a:extLst>
           </p:spPr>
@@ -6448,7 +6448,7 @@
             <a:effectLst/>
             <a:extLst>
               <a:ext uri="{C572A759-6A51-4108-AA02-DFA0A04FC94B}">
-                <ma14:wrappingTextBoxFlag xmlns="" xmlns:m="http://schemas.openxmlformats.org/officeDocument/2006/math" xmlns:a14="http://schemas.microsoft.com/office/drawing/2010/main" xmlns:ma14="http://schemas.microsoft.com/office/mac/drawingml/2011/main" val="1"/>
+                <ma14:wrappingTextBoxFlag xmlns:ma14="http://schemas.microsoft.com/office/mac/drawingml/2011/main" xmlns:a14="http://schemas.microsoft.com/office/drawing/2010/main" xmlns:m="http://schemas.openxmlformats.org/officeDocument/2006/math" xmlns="" val="1"/>
               </a:ext>
             </a:extLst>
           </p:spPr>
@@ -6539,7 +6539,7 @@
           </a:ln>
           <a:extLst>
             <a:ext uri="{C572A759-6A51-4108-AA02-DFA0A04FC94B}">
-              <ma14:wrappingTextBoxFlag xmlns="" xmlns:m="http://schemas.openxmlformats.org/officeDocument/2006/math" xmlns:a14="http://schemas.microsoft.com/office/drawing/2010/main" xmlns:ma14="http://schemas.microsoft.com/office/mac/drawingml/2011/main" val="1"/>
+              <ma14:wrappingTextBoxFlag xmlns:ma14="http://schemas.microsoft.com/office/mac/drawingml/2011/main" xmlns:a14="http://schemas.microsoft.com/office/drawing/2010/main" xmlns:m="http://schemas.openxmlformats.org/officeDocument/2006/math" xmlns="" val="1"/>
             </a:ext>
           </a:extLst>
         </p:spPr>
@@ -6651,7 +6651,7 @@
             <a:effectLst/>
             <a:extLst>
               <a:ext uri="{C572A759-6A51-4108-AA02-DFA0A04FC94B}">
-                <ma14:wrappingTextBoxFlag xmlns="" xmlns:m="http://schemas.openxmlformats.org/officeDocument/2006/math" xmlns:a14="http://schemas.microsoft.com/office/drawing/2010/main" xmlns:ma14="http://schemas.microsoft.com/office/mac/drawingml/2011/main" val="1"/>
+                <ma14:wrappingTextBoxFlag xmlns:ma14="http://schemas.microsoft.com/office/mac/drawingml/2011/main" xmlns:a14="http://schemas.microsoft.com/office/drawing/2010/main" xmlns:m="http://schemas.openxmlformats.org/officeDocument/2006/math" xmlns="" val="1"/>
               </a:ext>
             </a:extLst>
           </p:spPr>
@@ -6765,7 +6765,7 @@
             <a:effectLst/>
             <a:extLst>
               <a:ext uri="{C572A759-6A51-4108-AA02-DFA0A04FC94B}">
-                <ma14:wrappingTextBoxFlag xmlns="" xmlns:m="http://schemas.openxmlformats.org/officeDocument/2006/math" xmlns:a14="http://schemas.microsoft.com/office/drawing/2010/main" xmlns:ma14="http://schemas.microsoft.com/office/mac/drawingml/2011/main" val="1"/>
+                <ma14:wrappingTextBoxFlag xmlns:ma14="http://schemas.microsoft.com/office/mac/drawingml/2011/main" xmlns:a14="http://schemas.microsoft.com/office/drawing/2010/main" xmlns:m="http://schemas.openxmlformats.org/officeDocument/2006/math" xmlns="" val="1"/>
               </a:ext>
             </a:extLst>
           </p:spPr>
@@ -6856,7 +6856,7 @@
           </a:ln>
           <a:extLst>
             <a:ext uri="{C572A759-6A51-4108-AA02-DFA0A04FC94B}">
-              <ma14:wrappingTextBoxFlag xmlns="" xmlns:m="http://schemas.openxmlformats.org/officeDocument/2006/math" xmlns:a14="http://schemas.microsoft.com/office/drawing/2010/main" xmlns:ma14="http://schemas.microsoft.com/office/mac/drawingml/2011/main" val="1"/>
+              <ma14:wrappingTextBoxFlag xmlns:ma14="http://schemas.microsoft.com/office/mac/drawingml/2011/main" xmlns:a14="http://schemas.microsoft.com/office/drawing/2010/main" xmlns:m="http://schemas.openxmlformats.org/officeDocument/2006/math" xmlns="" val="1"/>
             </a:ext>
           </a:extLst>
         </p:spPr>
@@ -6984,7 +6984,7 @@
             <a:effectLst/>
             <a:extLst>
               <a:ext uri="{C572A759-6A51-4108-AA02-DFA0A04FC94B}">
-                <ma14:wrappingTextBoxFlag xmlns="" xmlns:m="http://schemas.openxmlformats.org/officeDocument/2006/math" xmlns:a14="http://schemas.microsoft.com/office/drawing/2010/main" xmlns:ma14="http://schemas.microsoft.com/office/mac/drawingml/2011/main" val="1"/>
+                <ma14:wrappingTextBoxFlag xmlns:ma14="http://schemas.microsoft.com/office/mac/drawingml/2011/main" xmlns:a14="http://schemas.microsoft.com/office/drawing/2010/main" xmlns:m="http://schemas.openxmlformats.org/officeDocument/2006/math" xmlns="" val="1"/>
               </a:ext>
             </a:extLst>
           </p:spPr>
@@ -7075,7 +7075,7 @@
           </a:ln>
           <a:extLst>
             <a:ext uri="{C572A759-6A51-4108-AA02-DFA0A04FC94B}">
-              <ma14:wrappingTextBoxFlag xmlns="" xmlns:m="http://schemas.openxmlformats.org/officeDocument/2006/math" xmlns:a14="http://schemas.microsoft.com/office/drawing/2010/main" xmlns:ma14="http://schemas.microsoft.com/office/mac/drawingml/2011/main" val="1"/>
+              <ma14:wrappingTextBoxFlag xmlns:ma14="http://schemas.microsoft.com/office/mac/drawingml/2011/main" xmlns:a14="http://schemas.microsoft.com/office/drawing/2010/main" xmlns:m="http://schemas.openxmlformats.org/officeDocument/2006/math" xmlns="" val="1"/>
             </a:ext>
           </a:extLst>
         </p:spPr>
@@ -7223,7 +7223,7 @@
             <a:effectLst/>
             <a:extLst>
               <a:ext uri="{C572A759-6A51-4108-AA02-DFA0A04FC94B}">
-                <ma14:wrappingTextBoxFlag xmlns="" xmlns:m="http://schemas.openxmlformats.org/officeDocument/2006/math" xmlns:a14="http://schemas.microsoft.com/office/drawing/2010/main" xmlns:ma14="http://schemas.microsoft.com/office/mac/drawingml/2011/main" val="1"/>
+                <ma14:wrappingTextBoxFlag xmlns:ma14="http://schemas.microsoft.com/office/mac/drawingml/2011/main" xmlns:a14="http://schemas.microsoft.com/office/drawing/2010/main" xmlns:m="http://schemas.openxmlformats.org/officeDocument/2006/math" xmlns="" val="1"/>
               </a:ext>
             </a:extLst>
           </p:spPr>
@@ -7314,7 +7314,7 @@
           </a:ln>
           <a:extLst>
             <a:ext uri="{C572A759-6A51-4108-AA02-DFA0A04FC94B}">
-              <ma14:wrappingTextBoxFlag xmlns="" xmlns:m="http://schemas.openxmlformats.org/officeDocument/2006/math" xmlns:a14="http://schemas.microsoft.com/office/drawing/2010/main" xmlns:ma14="http://schemas.microsoft.com/office/mac/drawingml/2011/main" val="1"/>
+              <ma14:wrappingTextBoxFlag xmlns:ma14="http://schemas.microsoft.com/office/mac/drawingml/2011/main" xmlns:a14="http://schemas.microsoft.com/office/drawing/2010/main" xmlns:m="http://schemas.openxmlformats.org/officeDocument/2006/math" xmlns="" val="1"/>
             </a:ext>
           </a:extLst>
         </p:spPr>
@@ -7519,7 +7519,7 @@
             <a:effectLst/>
             <a:extLst>
               <a:ext uri="{C572A759-6A51-4108-AA02-DFA0A04FC94B}">
-                <ma14:wrappingTextBoxFlag xmlns="" xmlns:m="http://schemas.openxmlformats.org/officeDocument/2006/math" xmlns:a14="http://schemas.microsoft.com/office/drawing/2010/main" xmlns:ma14="http://schemas.microsoft.com/office/mac/drawingml/2011/main" val="1"/>
+                <ma14:wrappingTextBoxFlag xmlns:ma14="http://schemas.microsoft.com/office/mac/drawingml/2011/main" xmlns:a14="http://schemas.microsoft.com/office/drawing/2010/main" xmlns:m="http://schemas.openxmlformats.org/officeDocument/2006/math" xmlns="" val="1"/>
               </a:ext>
             </a:extLst>
           </p:spPr>
@@ -7614,7 +7614,7 @@
           </a:ln>
           <a:extLst>
             <a:ext uri="{C572A759-6A51-4108-AA02-DFA0A04FC94B}">
-              <ma14:wrappingTextBoxFlag xmlns="" xmlns:m="http://schemas.openxmlformats.org/officeDocument/2006/math" xmlns:a14="http://schemas.microsoft.com/office/drawing/2010/main" xmlns:ma14="http://schemas.microsoft.com/office/mac/drawingml/2011/main" val="1"/>
+              <ma14:wrappingTextBoxFlag xmlns:ma14="http://schemas.microsoft.com/office/mac/drawingml/2011/main" xmlns:a14="http://schemas.microsoft.com/office/drawing/2010/main" xmlns:m="http://schemas.openxmlformats.org/officeDocument/2006/math" xmlns="" val="1"/>
             </a:ext>
           </a:extLst>
         </p:spPr>
@@ -7704,7 +7704,7 @@
           </a:ln>
           <a:extLst>
             <a:ext uri="{C572A759-6A51-4108-AA02-DFA0A04FC94B}">
-              <ma14:wrappingTextBoxFlag xmlns="" xmlns:m="http://schemas.openxmlformats.org/officeDocument/2006/math" xmlns:a14="http://schemas.microsoft.com/office/drawing/2010/main" xmlns:ma14="http://schemas.microsoft.com/office/mac/drawingml/2011/main" val="1"/>
+              <ma14:wrappingTextBoxFlag xmlns:ma14="http://schemas.microsoft.com/office/mac/drawingml/2011/main" xmlns:a14="http://schemas.microsoft.com/office/drawing/2010/main" xmlns:m="http://schemas.openxmlformats.org/officeDocument/2006/math" xmlns="" val="1"/>
             </a:ext>
           </a:extLst>
         </p:spPr>
@@ -7794,7 +7794,7 @@
           </a:ln>
           <a:extLst>
             <a:ext uri="{C572A759-6A51-4108-AA02-DFA0A04FC94B}">
-              <ma14:wrappingTextBoxFlag xmlns="" xmlns:m="http://schemas.openxmlformats.org/officeDocument/2006/math" xmlns:a14="http://schemas.microsoft.com/office/drawing/2010/main" xmlns:ma14="http://schemas.microsoft.com/office/mac/drawingml/2011/main" val="1"/>
+              <ma14:wrappingTextBoxFlag xmlns:ma14="http://schemas.microsoft.com/office/mac/drawingml/2011/main" xmlns:a14="http://schemas.microsoft.com/office/drawing/2010/main" xmlns:m="http://schemas.openxmlformats.org/officeDocument/2006/math" xmlns="" val="1"/>
             </a:ext>
           </a:extLst>
         </p:spPr>
@@ -7939,7 +7939,7 @@
           </a:ln>
           <a:extLst>
             <a:ext uri="{C572A759-6A51-4108-AA02-DFA0A04FC94B}">
-              <ma14:wrappingTextBoxFlag xmlns="" xmlns:m="http://schemas.openxmlformats.org/officeDocument/2006/math" xmlns:a14="http://schemas.microsoft.com/office/drawing/2010/main" xmlns:ma14="http://schemas.microsoft.com/office/mac/drawingml/2011/main" val="1"/>
+              <ma14:wrappingTextBoxFlag xmlns:ma14="http://schemas.microsoft.com/office/mac/drawingml/2011/main" xmlns:a14="http://schemas.microsoft.com/office/drawing/2010/main" xmlns:m="http://schemas.openxmlformats.org/officeDocument/2006/math" xmlns="" val="1"/>
             </a:ext>
           </a:extLst>
         </p:spPr>
@@ -8029,7 +8029,7 @@
           </a:ln>
           <a:extLst>
             <a:ext uri="{C572A759-6A51-4108-AA02-DFA0A04FC94B}">
-              <ma14:wrappingTextBoxFlag xmlns="" xmlns:m="http://schemas.openxmlformats.org/officeDocument/2006/math" xmlns:a14="http://schemas.microsoft.com/office/drawing/2010/main" xmlns:ma14="http://schemas.microsoft.com/office/mac/drawingml/2011/main" val="1"/>
+              <ma14:wrappingTextBoxFlag xmlns:ma14="http://schemas.microsoft.com/office/mac/drawingml/2011/main" xmlns:a14="http://schemas.microsoft.com/office/drawing/2010/main" xmlns:m="http://schemas.openxmlformats.org/officeDocument/2006/math" xmlns="" val="1"/>
             </a:ext>
           </a:extLst>
         </p:spPr>
@@ -8152,7 +8152,7 @@
           </a:ln>
           <a:extLst>
             <a:ext uri="{C572A759-6A51-4108-AA02-DFA0A04FC94B}">
-              <ma14:wrappingTextBoxFlag xmlns="" xmlns:m="http://schemas.openxmlformats.org/officeDocument/2006/math" xmlns:a14="http://schemas.microsoft.com/office/drawing/2010/main" xmlns:ma14="http://schemas.microsoft.com/office/mac/drawingml/2011/main" val="1"/>
+              <ma14:wrappingTextBoxFlag xmlns:ma14="http://schemas.microsoft.com/office/mac/drawingml/2011/main" xmlns:a14="http://schemas.microsoft.com/office/drawing/2010/main" xmlns:m="http://schemas.openxmlformats.org/officeDocument/2006/math" xmlns="" val="1"/>
             </a:ext>
           </a:extLst>
         </p:spPr>
@@ -8333,7 +8333,7 @@
             <a:effectLst/>
             <a:extLst>
               <a:ext uri="{C572A759-6A51-4108-AA02-DFA0A04FC94B}">
-                <ma14:wrappingTextBoxFlag xmlns="" xmlns:m="http://schemas.openxmlformats.org/officeDocument/2006/math" xmlns:a14="http://schemas.microsoft.com/office/drawing/2010/main" xmlns:ma14="http://schemas.microsoft.com/office/mac/drawingml/2011/main" val="1"/>
+                <ma14:wrappingTextBoxFlag xmlns:ma14="http://schemas.microsoft.com/office/mac/drawingml/2011/main" xmlns:a14="http://schemas.microsoft.com/office/drawing/2010/main" xmlns:m="http://schemas.openxmlformats.org/officeDocument/2006/math" xmlns="" val="1"/>
               </a:ext>
             </a:extLst>
           </p:spPr>
@@ -8446,7 +8446,7 @@
             <a:effectLst/>
             <a:extLst>
               <a:ext uri="{C572A759-6A51-4108-AA02-DFA0A04FC94B}">
-                <ma14:wrappingTextBoxFlag xmlns="" xmlns:m="http://schemas.openxmlformats.org/officeDocument/2006/math" xmlns:a14="http://schemas.microsoft.com/office/drawing/2010/main" xmlns:ma14="http://schemas.microsoft.com/office/mac/drawingml/2011/main" val="1"/>
+                <ma14:wrappingTextBoxFlag xmlns:ma14="http://schemas.microsoft.com/office/mac/drawingml/2011/main" xmlns:a14="http://schemas.microsoft.com/office/drawing/2010/main" xmlns:m="http://schemas.openxmlformats.org/officeDocument/2006/math" xmlns="" val="1"/>
               </a:ext>
             </a:extLst>
           </p:spPr>
@@ -8520,7 +8520,7 @@
           </a:ln>
           <a:extLst>
             <a:ext uri="{C572A759-6A51-4108-AA02-DFA0A04FC94B}">
-              <ma14:wrappingTextBoxFlag xmlns="" xmlns:m="http://schemas.openxmlformats.org/officeDocument/2006/math" xmlns:a14="http://schemas.microsoft.com/office/drawing/2010/main" xmlns:ma14="http://schemas.microsoft.com/office/mac/drawingml/2011/main" val="1"/>
+              <ma14:wrappingTextBoxFlag xmlns:ma14="http://schemas.microsoft.com/office/mac/drawingml/2011/main" xmlns:a14="http://schemas.microsoft.com/office/drawing/2010/main" xmlns:m="http://schemas.openxmlformats.org/officeDocument/2006/math" xmlns="" val="1"/>
             </a:ext>
           </a:extLst>
         </p:spPr>
@@ -8705,7 +8705,7 @@
           </a:ln>
           <a:extLst>
             <a:ext uri="{C572A759-6A51-4108-AA02-DFA0A04FC94B}">
-              <ma14:wrappingTextBoxFlag xmlns="" xmlns:m="http://schemas.openxmlformats.org/officeDocument/2006/math" xmlns:a14="http://schemas.microsoft.com/office/drawing/2010/main" xmlns:ma14="http://schemas.microsoft.com/office/mac/drawingml/2011/main" val="1"/>
+              <ma14:wrappingTextBoxFlag xmlns:ma14="http://schemas.microsoft.com/office/mac/drawingml/2011/main" xmlns:a14="http://schemas.microsoft.com/office/drawing/2010/main" xmlns:m="http://schemas.openxmlformats.org/officeDocument/2006/math" xmlns="" val="1"/>
             </a:ext>
           </a:extLst>
         </p:spPr>
@@ -8749,7 +8749,7 @@
           </a:prstGeom>
           <a:extLst>
             <a:ext uri="{C572A759-6A51-4108-AA02-DFA0A04FC94B}">
-              <ma14:wrappingTextBoxFlag xmlns="" xmlns:m="http://schemas.openxmlformats.org/officeDocument/2006/math" xmlns:a14="http://schemas.microsoft.com/office/drawing/2010/main" xmlns:ma14="http://schemas.microsoft.com/office/mac/drawingml/2011/main" val="1"/>
+              <ma14:wrappingTextBoxFlag xmlns:ma14="http://schemas.microsoft.com/office/mac/drawingml/2011/main" xmlns:a14="http://schemas.microsoft.com/office/drawing/2010/main" xmlns:m="http://schemas.openxmlformats.org/officeDocument/2006/math" xmlns="" val="1"/>
             </a:ext>
           </a:extLst>
         </p:spPr>
@@ -8910,7 +8910,7 @@
             <a:effectLst/>
             <a:extLst>
               <a:ext uri="{C572A759-6A51-4108-AA02-DFA0A04FC94B}">
-                <ma14:wrappingTextBoxFlag xmlns="" xmlns:m="http://schemas.openxmlformats.org/officeDocument/2006/math" xmlns:a14="http://schemas.microsoft.com/office/drawing/2010/main" xmlns:ma14="http://schemas.microsoft.com/office/mac/drawingml/2011/main" val="1"/>
+                <ma14:wrappingTextBoxFlag xmlns:ma14="http://schemas.microsoft.com/office/mac/drawingml/2011/main" xmlns:a14="http://schemas.microsoft.com/office/drawing/2010/main" xmlns:m="http://schemas.openxmlformats.org/officeDocument/2006/math" xmlns="" val="1"/>
               </a:ext>
             </a:extLst>
           </p:spPr>
@@ -8972,7 +8972,7 @@
           </a:ln>
           <a:extLst>
             <a:ext uri="{C572A759-6A51-4108-AA02-DFA0A04FC94B}">
-              <ma14:wrappingTextBoxFlag xmlns="" xmlns:m="http://schemas.openxmlformats.org/officeDocument/2006/math" xmlns:a14="http://schemas.microsoft.com/office/drawing/2010/main" xmlns:ma14="http://schemas.microsoft.com/office/mac/drawingml/2011/main" val="1"/>
+              <ma14:wrappingTextBoxFlag xmlns:ma14="http://schemas.microsoft.com/office/mac/drawingml/2011/main" xmlns:a14="http://schemas.microsoft.com/office/drawing/2010/main" xmlns:m="http://schemas.openxmlformats.org/officeDocument/2006/math" xmlns="" val="1"/>
             </a:ext>
           </a:extLst>
         </p:spPr>
@@ -9072,7 +9072,7 @@
           </a:prstGeom>
           <a:extLst>
             <a:ext uri="{C572A759-6A51-4108-AA02-DFA0A04FC94B}">
-              <ma14:wrappingTextBoxFlag xmlns="" xmlns:m="http://schemas.openxmlformats.org/officeDocument/2006/math" xmlns:a14="http://schemas.microsoft.com/office/drawing/2010/main" xmlns:ma14="http://schemas.microsoft.com/office/mac/drawingml/2011/main" val="1"/>
+              <ma14:wrappingTextBoxFlag xmlns:ma14="http://schemas.microsoft.com/office/mac/drawingml/2011/main" xmlns:a14="http://schemas.microsoft.com/office/drawing/2010/main" xmlns:m="http://schemas.openxmlformats.org/officeDocument/2006/math" xmlns="" val="1"/>
             </a:ext>
           </a:extLst>
         </p:spPr>
@@ -9107,7 +9107,7 @@
           </a:ln>
           <a:extLst>
             <a:ext uri="{C572A759-6A51-4108-AA02-DFA0A04FC94B}">
-              <ma14:wrappingTextBoxFlag xmlns="" xmlns:m="http://schemas.openxmlformats.org/officeDocument/2006/math" xmlns:a14="http://schemas.microsoft.com/office/drawing/2010/main" xmlns:ma14="http://schemas.microsoft.com/office/mac/drawingml/2011/main" val="1"/>
+              <ma14:wrappingTextBoxFlag xmlns:ma14="http://schemas.microsoft.com/office/mac/drawingml/2011/main" xmlns:a14="http://schemas.microsoft.com/office/drawing/2010/main" xmlns:m="http://schemas.openxmlformats.org/officeDocument/2006/math" xmlns="" val="1"/>
             </a:ext>
           </a:extLst>
         </p:spPr>
@@ -9150,7 +9150,7 @@
           </a:ln>
           <a:extLst>
             <a:ext uri="{C572A759-6A51-4108-AA02-DFA0A04FC94B}">
-              <ma14:wrappingTextBoxFlag xmlns="" xmlns:m="http://schemas.openxmlformats.org/officeDocument/2006/math" xmlns:a14="http://schemas.microsoft.com/office/drawing/2010/main" xmlns:ma14="http://schemas.microsoft.com/office/mac/drawingml/2011/main" val="1"/>
+              <ma14:wrappingTextBoxFlag xmlns:ma14="http://schemas.microsoft.com/office/mac/drawingml/2011/main" xmlns:a14="http://schemas.microsoft.com/office/drawing/2010/main" xmlns:m="http://schemas.openxmlformats.org/officeDocument/2006/math" xmlns="" val="1"/>
             </a:ext>
           </a:extLst>
         </p:spPr>
@@ -9276,7 +9276,7 @@
           </a:ln>
           <a:extLst>
             <a:ext uri="{C572A759-6A51-4108-AA02-DFA0A04FC94B}">
-              <ma14:wrappingTextBoxFlag xmlns="" xmlns:m="http://schemas.openxmlformats.org/officeDocument/2006/math" xmlns:a14="http://schemas.microsoft.com/office/drawing/2010/main" xmlns:ma14="http://schemas.microsoft.com/office/mac/drawingml/2011/main" val="1"/>
+              <ma14:wrappingTextBoxFlag xmlns:ma14="http://schemas.microsoft.com/office/mac/drawingml/2011/main" xmlns:a14="http://schemas.microsoft.com/office/drawing/2010/main" xmlns:m="http://schemas.openxmlformats.org/officeDocument/2006/math" xmlns="" val="1"/>
             </a:ext>
           </a:extLst>
         </p:spPr>
@@ -9366,7 +9366,7 @@
           </a:ln>
           <a:extLst>
             <a:ext uri="{C572A759-6A51-4108-AA02-DFA0A04FC94B}">
-              <ma14:wrappingTextBoxFlag xmlns="" xmlns:m="http://schemas.openxmlformats.org/officeDocument/2006/math" xmlns:a14="http://schemas.microsoft.com/office/drawing/2010/main" xmlns:ma14="http://schemas.microsoft.com/office/mac/drawingml/2011/main" val="1"/>
+              <ma14:wrappingTextBoxFlag xmlns:ma14="http://schemas.microsoft.com/office/mac/drawingml/2011/main" xmlns:a14="http://schemas.microsoft.com/office/drawing/2010/main" xmlns:m="http://schemas.openxmlformats.org/officeDocument/2006/math" xmlns="" val="1"/>
             </a:ext>
           </a:extLst>
         </p:spPr>
@@ -9452,7 +9452,7 @@
           </a:ln>
           <a:extLst>
             <a:ext uri="{C572A759-6A51-4108-AA02-DFA0A04FC94B}">
-              <ma14:wrappingTextBoxFlag xmlns="" xmlns:m="http://schemas.openxmlformats.org/officeDocument/2006/math" xmlns:a14="http://schemas.microsoft.com/office/drawing/2010/main" xmlns:ma14="http://schemas.microsoft.com/office/mac/drawingml/2011/main" val="1"/>
+              <ma14:wrappingTextBoxFlag xmlns:ma14="http://schemas.microsoft.com/office/mac/drawingml/2011/main" xmlns:a14="http://schemas.microsoft.com/office/drawing/2010/main" xmlns:m="http://schemas.openxmlformats.org/officeDocument/2006/math" xmlns="" val="1"/>
             </a:ext>
           </a:extLst>
         </p:spPr>
@@ -9499,7 +9499,7 @@
           </a:ln>
           <a:extLst>
             <a:ext uri="{C572A759-6A51-4108-AA02-DFA0A04FC94B}">
-              <ma14:wrappingTextBoxFlag xmlns="" xmlns:m="http://schemas.openxmlformats.org/officeDocument/2006/math" xmlns:a14="http://schemas.microsoft.com/office/drawing/2010/main" xmlns:ma14="http://schemas.microsoft.com/office/mac/drawingml/2011/main" val="1"/>
+              <ma14:wrappingTextBoxFlag xmlns:ma14="http://schemas.microsoft.com/office/mac/drawingml/2011/main" xmlns:a14="http://schemas.microsoft.com/office/drawing/2010/main" xmlns:m="http://schemas.openxmlformats.org/officeDocument/2006/math" xmlns="" val="1"/>
             </a:ext>
           </a:extLst>
         </p:spPr>
@@ -9585,7 +9585,7 @@
           </a:ln>
           <a:extLst>
             <a:ext uri="{C572A759-6A51-4108-AA02-DFA0A04FC94B}">
-              <ma14:wrappingTextBoxFlag xmlns="" xmlns:m="http://schemas.openxmlformats.org/officeDocument/2006/math" xmlns:a14="http://schemas.microsoft.com/office/drawing/2010/main" xmlns:ma14="http://schemas.microsoft.com/office/mac/drawingml/2011/main" val="1"/>
+              <ma14:wrappingTextBoxFlag xmlns:ma14="http://schemas.microsoft.com/office/mac/drawingml/2011/main" xmlns:a14="http://schemas.microsoft.com/office/drawing/2010/main" xmlns:m="http://schemas.openxmlformats.org/officeDocument/2006/math" xmlns="" val="1"/>
             </a:ext>
           </a:extLst>
         </p:spPr>
@@ -9632,7 +9632,7 @@
           </a:ln>
           <a:extLst>
             <a:ext uri="{C572A759-6A51-4108-AA02-DFA0A04FC94B}">
-              <ma14:wrappingTextBoxFlag xmlns="" xmlns:m="http://schemas.openxmlformats.org/officeDocument/2006/math" xmlns:a14="http://schemas.microsoft.com/office/drawing/2010/main" xmlns:ma14="http://schemas.microsoft.com/office/mac/drawingml/2011/main" val="1"/>
+              <ma14:wrappingTextBoxFlag xmlns:ma14="http://schemas.microsoft.com/office/mac/drawingml/2011/main" xmlns:a14="http://schemas.microsoft.com/office/drawing/2010/main" xmlns:m="http://schemas.openxmlformats.org/officeDocument/2006/math" xmlns="" val="1"/>
             </a:ext>
           </a:extLst>
         </p:spPr>
@@ -9744,7 +9744,7 @@
           </a:ln>
           <a:extLst>
             <a:ext uri="{C572A759-6A51-4108-AA02-DFA0A04FC94B}">
-              <ma14:wrappingTextBoxFlag xmlns="" xmlns:m="http://schemas.openxmlformats.org/officeDocument/2006/math" xmlns:a14="http://schemas.microsoft.com/office/drawing/2010/main" xmlns:ma14="http://schemas.microsoft.com/office/mac/drawingml/2011/main" val="1"/>
+              <ma14:wrappingTextBoxFlag xmlns:ma14="http://schemas.microsoft.com/office/mac/drawingml/2011/main" xmlns:a14="http://schemas.microsoft.com/office/drawing/2010/main" xmlns:m="http://schemas.openxmlformats.org/officeDocument/2006/math" xmlns="" val="1"/>
             </a:ext>
           </a:extLst>
         </p:spPr>
@@ -9791,7 +9791,7 @@
           </a:ln>
           <a:extLst>
             <a:ext uri="{C572A759-6A51-4108-AA02-DFA0A04FC94B}">
-              <ma14:wrappingTextBoxFlag xmlns="" xmlns:m="http://schemas.openxmlformats.org/officeDocument/2006/math" xmlns:a14="http://schemas.microsoft.com/office/drawing/2010/main" xmlns:ma14="http://schemas.microsoft.com/office/mac/drawingml/2011/main" val="1"/>
+              <ma14:wrappingTextBoxFlag xmlns:ma14="http://schemas.microsoft.com/office/mac/drawingml/2011/main" xmlns:a14="http://schemas.microsoft.com/office/drawing/2010/main" xmlns:m="http://schemas.openxmlformats.org/officeDocument/2006/math" xmlns="" val="1"/>
             </a:ext>
           </a:extLst>
         </p:spPr>
@@ -9884,7 +9884,7 @@
           </a:ln>
           <a:extLst>
             <a:ext uri="{C572A759-6A51-4108-AA02-DFA0A04FC94B}">
-              <ma14:wrappingTextBoxFlag xmlns="" xmlns:m="http://schemas.openxmlformats.org/officeDocument/2006/math" xmlns:a14="http://schemas.microsoft.com/office/drawing/2010/main" xmlns:ma14="http://schemas.microsoft.com/office/mac/drawingml/2011/main" val="1"/>
+              <ma14:wrappingTextBoxFlag xmlns:ma14="http://schemas.microsoft.com/office/mac/drawingml/2011/main" xmlns:a14="http://schemas.microsoft.com/office/drawing/2010/main" xmlns:m="http://schemas.openxmlformats.org/officeDocument/2006/math" xmlns="" val="1"/>
             </a:ext>
           </a:extLst>
         </p:spPr>
@@ -10000,7 +10000,7 @@
           </a:ln>
           <a:extLst>
             <a:ext uri="{C572A759-6A51-4108-AA02-DFA0A04FC94B}">
-              <ma14:wrappingTextBoxFlag xmlns="" xmlns:m="http://schemas.openxmlformats.org/officeDocument/2006/math" xmlns:a14="http://schemas.microsoft.com/office/drawing/2010/main" xmlns:ma14="http://schemas.microsoft.com/office/mac/drawingml/2011/main" val="1"/>
+              <ma14:wrappingTextBoxFlag xmlns:ma14="http://schemas.microsoft.com/office/mac/drawingml/2011/main" xmlns:a14="http://schemas.microsoft.com/office/drawing/2010/main" xmlns:m="http://schemas.openxmlformats.org/officeDocument/2006/math" xmlns="" val="1"/>
             </a:ext>
           </a:extLst>
         </p:spPr>
@@ -10090,7 +10090,7 @@
           </a:ln>
           <a:extLst>
             <a:ext uri="{C572A759-6A51-4108-AA02-DFA0A04FC94B}">
-              <ma14:wrappingTextBoxFlag xmlns="" xmlns:m="http://schemas.openxmlformats.org/officeDocument/2006/math" xmlns:a14="http://schemas.microsoft.com/office/drawing/2010/main" xmlns:ma14="http://schemas.microsoft.com/office/mac/drawingml/2011/main" val="1"/>
+              <ma14:wrappingTextBoxFlag xmlns:ma14="http://schemas.microsoft.com/office/mac/drawingml/2011/main" xmlns:a14="http://schemas.microsoft.com/office/drawing/2010/main" xmlns:m="http://schemas.openxmlformats.org/officeDocument/2006/math" xmlns="" val="1"/>
             </a:ext>
           </a:extLst>
         </p:spPr>
@@ -10138,7 +10138,7 @@
           </a:ln>
           <a:extLst>
             <a:ext uri="{C572A759-6A51-4108-AA02-DFA0A04FC94B}">
-              <ma14:wrappingTextBoxFlag xmlns="" xmlns:m="http://schemas.openxmlformats.org/officeDocument/2006/math" xmlns:a14="http://schemas.microsoft.com/office/drawing/2010/main" xmlns:ma14="http://schemas.microsoft.com/office/mac/drawingml/2011/main" val="1"/>
+              <ma14:wrappingTextBoxFlag xmlns:ma14="http://schemas.microsoft.com/office/mac/drawingml/2011/main" xmlns:a14="http://schemas.microsoft.com/office/drawing/2010/main" xmlns:m="http://schemas.openxmlformats.org/officeDocument/2006/math" xmlns="" val="1"/>
             </a:ext>
           </a:extLst>
         </p:spPr>
@@ -10185,7 +10185,7 @@
           </a:ln>
           <a:extLst>
             <a:ext uri="{C572A759-6A51-4108-AA02-DFA0A04FC94B}">
-              <ma14:wrappingTextBoxFlag xmlns="" xmlns:m="http://schemas.openxmlformats.org/officeDocument/2006/math" xmlns:a14="http://schemas.microsoft.com/office/drawing/2010/main" xmlns:ma14="http://schemas.microsoft.com/office/mac/drawingml/2011/main" val="1"/>
+              <ma14:wrappingTextBoxFlag xmlns:ma14="http://schemas.microsoft.com/office/mac/drawingml/2011/main" xmlns:a14="http://schemas.microsoft.com/office/drawing/2010/main" xmlns:m="http://schemas.openxmlformats.org/officeDocument/2006/math" xmlns="" val="1"/>
             </a:ext>
           </a:extLst>
         </p:spPr>
@@ -10232,7 +10232,7 @@
           </a:ln>
           <a:extLst>
             <a:ext uri="{C572A759-6A51-4108-AA02-DFA0A04FC94B}">
-              <ma14:wrappingTextBoxFlag xmlns="" xmlns:m="http://schemas.openxmlformats.org/officeDocument/2006/math" xmlns:a14="http://schemas.microsoft.com/office/drawing/2010/main" xmlns:ma14="http://schemas.microsoft.com/office/mac/drawingml/2011/main" val="1"/>
+              <ma14:wrappingTextBoxFlag xmlns:ma14="http://schemas.microsoft.com/office/mac/drawingml/2011/main" xmlns:a14="http://schemas.microsoft.com/office/drawing/2010/main" xmlns:m="http://schemas.openxmlformats.org/officeDocument/2006/math" xmlns="" val="1"/>
             </a:ext>
           </a:extLst>
         </p:spPr>
@@ -10308,7 +10308,7 @@
           </a:ln>
           <a:extLst>
             <a:ext uri="{C572A759-6A51-4108-AA02-DFA0A04FC94B}">
-              <ma14:wrappingTextBoxFlag xmlns="" xmlns:m="http://schemas.openxmlformats.org/officeDocument/2006/math" xmlns:a14="http://schemas.microsoft.com/office/drawing/2010/main" xmlns:ma14="http://schemas.microsoft.com/office/mac/drawingml/2011/main" val="1"/>
+              <ma14:wrappingTextBoxFlag xmlns:ma14="http://schemas.microsoft.com/office/mac/drawingml/2011/main" xmlns:a14="http://schemas.microsoft.com/office/drawing/2010/main" xmlns:m="http://schemas.openxmlformats.org/officeDocument/2006/math" xmlns="" val="1"/>
             </a:ext>
           </a:extLst>
         </p:spPr>
@@ -10355,7 +10355,7 @@
           </a:ln>
           <a:extLst>
             <a:ext uri="{C572A759-6A51-4108-AA02-DFA0A04FC94B}">
-              <ma14:wrappingTextBoxFlag xmlns="" xmlns:m="http://schemas.openxmlformats.org/officeDocument/2006/math" xmlns:a14="http://schemas.microsoft.com/office/drawing/2010/main" xmlns:ma14="http://schemas.microsoft.com/office/mac/drawingml/2011/main" val="1"/>
+              <ma14:wrappingTextBoxFlag xmlns:ma14="http://schemas.microsoft.com/office/mac/drawingml/2011/main" xmlns:a14="http://schemas.microsoft.com/office/drawing/2010/main" xmlns:m="http://schemas.openxmlformats.org/officeDocument/2006/math" xmlns="" val="1"/>
             </a:ext>
           </a:extLst>
         </p:spPr>
@@ -10444,7 +10444,7 @@
           </a:ln>
           <a:extLst>
             <a:ext uri="{C572A759-6A51-4108-AA02-DFA0A04FC94B}">
-              <ma14:wrappingTextBoxFlag xmlns="" xmlns:m="http://schemas.openxmlformats.org/officeDocument/2006/math" xmlns:a14="http://schemas.microsoft.com/office/drawing/2010/main" xmlns:ma14="http://schemas.microsoft.com/office/mac/drawingml/2011/main" val="1"/>
+              <ma14:wrappingTextBoxFlag xmlns:ma14="http://schemas.microsoft.com/office/mac/drawingml/2011/main" xmlns:a14="http://schemas.microsoft.com/office/drawing/2010/main" xmlns:m="http://schemas.openxmlformats.org/officeDocument/2006/math" xmlns="" val="1"/>
             </a:ext>
           </a:extLst>
         </p:spPr>
@@ -10527,7 +10527,7 @@
           </a:ln>
           <a:extLst>
             <a:ext uri="{C572A759-6A51-4108-AA02-DFA0A04FC94B}">
-              <ma14:wrappingTextBoxFlag xmlns="" xmlns:m="http://schemas.openxmlformats.org/officeDocument/2006/math" xmlns:a14="http://schemas.microsoft.com/office/drawing/2010/main" xmlns:ma14="http://schemas.microsoft.com/office/mac/drawingml/2011/main" val="1"/>
+              <ma14:wrappingTextBoxFlag xmlns:ma14="http://schemas.microsoft.com/office/mac/drawingml/2011/main" xmlns:a14="http://schemas.microsoft.com/office/drawing/2010/main" xmlns:m="http://schemas.openxmlformats.org/officeDocument/2006/math" xmlns="" val="1"/>
             </a:ext>
           </a:extLst>
         </p:spPr>
@@ -10583,7 +10583,7 @@
           </a:ln>
           <a:extLst>
             <a:ext uri="{C572A759-6A51-4108-AA02-DFA0A04FC94B}">
-              <ma14:wrappingTextBoxFlag xmlns="" xmlns:m="http://schemas.openxmlformats.org/officeDocument/2006/math" xmlns:a14="http://schemas.microsoft.com/office/drawing/2010/main" xmlns:ma14="http://schemas.microsoft.com/office/mac/drawingml/2011/main" val="1"/>
+              <ma14:wrappingTextBoxFlag xmlns:ma14="http://schemas.microsoft.com/office/mac/drawingml/2011/main" xmlns:a14="http://schemas.microsoft.com/office/drawing/2010/main" xmlns:m="http://schemas.openxmlformats.org/officeDocument/2006/math" xmlns="" val="1"/>
             </a:ext>
           </a:extLst>
         </p:spPr>
@@ -10630,7 +10630,7 @@
           </a:ln>
           <a:extLst>
             <a:ext uri="{C572A759-6A51-4108-AA02-DFA0A04FC94B}">
-              <ma14:wrappingTextBoxFlag xmlns="" xmlns:m="http://schemas.openxmlformats.org/officeDocument/2006/math" xmlns:a14="http://schemas.microsoft.com/office/drawing/2010/main" xmlns:ma14="http://schemas.microsoft.com/office/mac/drawingml/2011/main" val="1"/>
+              <ma14:wrappingTextBoxFlag xmlns:ma14="http://schemas.microsoft.com/office/mac/drawingml/2011/main" xmlns:a14="http://schemas.microsoft.com/office/drawing/2010/main" xmlns:m="http://schemas.openxmlformats.org/officeDocument/2006/math" xmlns="" val="1"/>
             </a:ext>
           </a:extLst>
         </p:spPr>
@@ -10703,7 +10703,7 @@
           </a:ln>
           <a:extLst>
             <a:ext uri="{C572A759-6A51-4108-AA02-DFA0A04FC94B}">
-              <ma14:wrappingTextBoxFlag xmlns="" xmlns:m="http://schemas.openxmlformats.org/officeDocument/2006/math" xmlns:a14="http://schemas.microsoft.com/office/drawing/2010/main" xmlns:ma14="http://schemas.microsoft.com/office/mac/drawingml/2011/main" val="1"/>
+              <ma14:wrappingTextBoxFlag xmlns:ma14="http://schemas.microsoft.com/office/mac/drawingml/2011/main" xmlns:a14="http://schemas.microsoft.com/office/drawing/2010/main" xmlns:m="http://schemas.openxmlformats.org/officeDocument/2006/math" xmlns="" val="1"/>
             </a:ext>
           </a:extLst>
         </p:spPr>
@@ -10775,7 +10775,7 @@
           </a:ln>
           <a:extLst>
             <a:ext uri="{C572A759-6A51-4108-AA02-DFA0A04FC94B}">
-              <ma14:wrappingTextBoxFlag xmlns="" xmlns:m="http://schemas.openxmlformats.org/officeDocument/2006/math" xmlns:a14="http://schemas.microsoft.com/office/drawing/2010/main" xmlns:ma14="http://schemas.microsoft.com/office/mac/drawingml/2011/main" val="1"/>
+              <ma14:wrappingTextBoxFlag xmlns:ma14="http://schemas.microsoft.com/office/mac/drawingml/2011/main" xmlns:a14="http://schemas.microsoft.com/office/drawing/2010/main" xmlns:m="http://schemas.openxmlformats.org/officeDocument/2006/math" xmlns="" val="1"/>
             </a:ext>
           </a:extLst>
         </p:spPr>
@@ -10819,7 +10819,7 @@
           </a:prstGeom>
           <a:extLst>
             <a:ext uri="{C572A759-6A51-4108-AA02-DFA0A04FC94B}">
-              <ma14:wrappingTextBoxFlag xmlns="" xmlns:m="http://schemas.openxmlformats.org/officeDocument/2006/math" xmlns:a14="http://schemas.microsoft.com/office/drawing/2010/main" xmlns:ma14="http://schemas.microsoft.com/office/mac/drawingml/2011/main" val="1"/>
+              <ma14:wrappingTextBoxFlag xmlns:ma14="http://schemas.microsoft.com/office/mac/drawingml/2011/main" xmlns:a14="http://schemas.microsoft.com/office/drawing/2010/main" xmlns:m="http://schemas.openxmlformats.org/officeDocument/2006/math" xmlns="" val="1"/>
             </a:ext>
           </a:extLst>
         </p:spPr>
@@ -10907,7 +10907,7 @@
           </a:ln>
           <a:extLst>
             <a:ext uri="{C572A759-6A51-4108-AA02-DFA0A04FC94B}">
-              <ma14:wrappingTextBoxFlag xmlns="" xmlns:m="http://schemas.openxmlformats.org/officeDocument/2006/math" xmlns:a14="http://schemas.microsoft.com/office/drawing/2010/main" xmlns:ma14="http://schemas.microsoft.com/office/mac/drawingml/2011/main" val="1"/>
+              <ma14:wrappingTextBoxFlag xmlns:ma14="http://schemas.microsoft.com/office/mac/drawingml/2011/main" xmlns:a14="http://schemas.microsoft.com/office/drawing/2010/main" xmlns:m="http://schemas.openxmlformats.org/officeDocument/2006/math" xmlns="" val="1"/>
             </a:ext>
           </a:extLst>
         </p:spPr>
@@ -10979,7 +10979,7 @@
           </a:ln>
           <a:extLst>
             <a:ext uri="{C572A759-6A51-4108-AA02-DFA0A04FC94B}">
-              <ma14:wrappingTextBoxFlag xmlns="" xmlns:m="http://schemas.openxmlformats.org/officeDocument/2006/math" xmlns:a14="http://schemas.microsoft.com/office/drawing/2010/main" xmlns:ma14="http://schemas.microsoft.com/office/mac/drawingml/2011/main" val="1"/>
+              <ma14:wrappingTextBoxFlag xmlns:ma14="http://schemas.microsoft.com/office/mac/drawingml/2011/main" xmlns:a14="http://schemas.microsoft.com/office/drawing/2010/main" xmlns:m="http://schemas.openxmlformats.org/officeDocument/2006/math" xmlns="" val="1"/>
             </a:ext>
           </a:extLst>
         </p:spPr>
@@ -11023,7 +11023,7 @@
           </a:prstGeom>
           <a:extLst>
             <a:ext uri="{C572A759-6A51-4108-AA02-DFA0A04FC94B}">
-              <ma14:wrappingTextBoxFlag xmlns="" xmlns:m="http://schemas.openxmlformats.org/officeDocument/2006/math" xmlns:a14="http://schemas.microsoft.com/office/drawing/2010/main" xmlns:ma14="http://schemas.microsoft.com/office/mac/drawingml/2011/main" val="1"/>
+              <ma14:wrappingTextBoxFlag xmlns:ma14="http://schemas.microsoft.com/office/mac/drawingml/2011/main" xmlns:a14="http://schemas.microsoft.com/office/drawing/2010/main" xmlns:m="http://schemas.openxmlformats.org/officeDocument/2006/math" xmlns="" val="1"/>
             </a:ext>
           </a:extLst>
         </p:spPr>
@@ -11100,7 +11100,7 @@
           </a:ln>
           <a:extLst>
             <a:ext uri="{C572A759-6A51-4108-AA02-DFA0A04FC94B}">
-              <ma14:wrappingTextBoxFlag xmlns="" xmlns:m="http://schemas.openxmlformats.org/officeDocument/2006/math" xmlns:a14="http://schemas.microsoft.com/office/drawing/2010/main" xmlns:ma14="http://schemas.microsoft.com/office/mac/drawingml/2011/main" val="1"/>
+              <ma14:wrappingTextBoxFlag xmlns:ma14="http://schemas.microsoft.com/office/mac/drawingml/2011/main" xmlns:a14="http://schemas.microsoft.com/office/drawing/2010/main" xmlns:m="http://schemas.openxmlformats.org/officeDocument/2006/math" xmlns="" val="1"/>
             </a:ext>
           </a:extLst>
         </p:spPr>
@@ -11190,7 +11190,7 @@
           </a:ln>
           <a:extLst>
             <a:ext uri="{C572A759-6A51-4108-AA02-DFA0A04FC94B}">
-              <ma14:wrappingTextBoxFlag xmlns="" xmlns:m="http://schemas.openxmlformats.org/officeDocument/2006/math" xmlns:a14="http://schemas.microsoft.com/office/drawing/2010/main" xmlns:ma14="http://schemas.microsoft.com/office/mac/drawingml/2011/main" val="1"/>
+              <ma14:wrappingTextBoxFlag xmlns:ma14="http://schemas.microsoft.com/office/mac/drawingml/2011/main" xmlns:a14="http://schemas.microsoft.com/office/drawing/2010/main" xmlns:m="http://schemas.openxmlformats.org/officeDocument/2006/math" xmlns="" val="1"/>
             </a:ext>
           </a:extLst>
         </p:spPr>
@@ -11237,7 +11237,7 @@
           </a:ln>
           <a:extLst>
             <a:ext uri="{C572A759-6A51-4108-AA02-DFA0A04FC94B}">
-              <ma14:wrappingTextBoxFlag xmlns="" xmlns:m="http://schemas.openxmlformats.org/officeDocument/2006/math" xmlns:a14="http://schemas.microsoft.com/office/drawing/2010/main" xmlns:ma14="http://schemas.microsoft.com/office/mac/drawingml/2011/main" val="1"/>
+              <ma14:wrappingTextBoxFlag xmlns:ma14="http://schemas.microsoft.com/office/mac/drawingml/2011/main" xmlns:a14="http://schemas.microsoft.com/office/drawing/2010/main" xmlns:m="http://schemas.openxmlformats.org/officeDocument/2006/math" xmlns="" val="1"/>
             </a:ext>
           </a:extLst>
         </p:spPr>
@@ -11284,7 +11284,7 @@
           </a:ln>
           <a:extLst>
             <a:ext uri="{C572A759-6A51-4108-AA02-DFA0A04FC94B}">
-              <ma14:wrappingTextBoxFlag xmlns="" xmlns:m="http://schemas.openxmlformats.org/officeDocument/2006/math" xmlns:a14="http://schemas.microsoft.com/office/drawing/2010/main" xmlns:ma14="http://schemas.microsoft.com/office/mac/drawingml/2011/main" val="1"/>
+              <ma14:wrappingTextBoxFlag xmlns:ma14="http://schemas.microsoft.com/office/mac/drawingml/2011/main" xmlns:a14="http://schemas.microsoft.com/office/drawing/2010/main" xmlns:m="http://schemas.openxmlformats.org/officeDocument/2006/math" xmlns="" val="1"/>
             </a:ext>
           </a:extLst>
         </p:spPr>
@@ -11431,7 +11431,7 @@
           </a:ln>
           <a:extLst>
             <a:ext uri="{C572A759-6A51-4108-AA02-DFA0A04FC94B}">
-              <ma14:wrappingTextBoxFlag xmlns="" xmlns:m="http://schemas.openxmlformats.org/officeDocument/2006/math" xmlns:a14="http://schemas.microsoft.com/office/drawing/2010/main" xmlns:ma14="http://schemas.microsoft.com/office/mac/drawingml/2011/main" val="1"/>
+              <ma14:wrappingTextBoxFlag xmlns:ma14="http://schemas.microsoft.com/office/mac/drawingml/2011/main" xmlns:a14="http://schemas.microsoft.com/office/drawing/2010/main" xmlns:m="http://schemas.openxmlformats.org/officeDocument/2006/math" xmlns="" val="1"/>
             </a:ext>
           </a:extLst>
         </p:spPr>
@@ -11478,7 +11478,7 @@
           </a:ln>
           <a:extLst>
             <a:ext uri="{C572A759-6A51-4108-AA02-DFA0A04FC94B}">
-              <ma14:wrappingTextBoxFlag xmlns="" xmlns:m="http://schemas.openxmlformats.org/officeDocument/2006/math" xmlns:a14="http://schemas.microsoft.com/office/drawing/2010/main" xmlns:ma14="http://schemas.microsoft.com/office/mac/drawingml/2011/main" val="1"/>
+              <ma14:wrappingTextBoxFlag xmlns:ma14="http://schemas.microsoft.com/office/mac/drawingml/2011/main" xmlns:a14="http://schemas.microsoft.com/office/drawing/2010/main" xmlns:m="http://schemas.openxmlformats.org/officeDocument/2006/math" xmlns="" val="1"/>
             </a:ext>
           </a:extLst>
         </p:spPr>
@@ -11525,7 +11525,7 @@
           </a:ln>
           <a:extLst>
             <a:ext uri="{C572A759-6A51-4108-AA02-DFA0A04FC94B}">
-              <ma14:wrappingTextBoxFlag xmlns="" xmlns:m="http://schemas.openxmlformats.org/officeDocument/2006/math" xmlns:a14="http://schemas.microsoft.com/office/drawing/2010/main" xmlns:ma14="http://schemas.microsoft.com/office/mac/drawingml/2011/main" val="1"/>
+              <ma14:wrappingTextBoxFlag xmlns:ma14="http://schemas.microsoft.com/office/mac/drawingml/2011/main" xmlns:a14="http://schemas.microsoft.com/office/drawing/2010/main" xmlns:m="http://schemas.openxmlformats.org/officeDocument/2006/math" xmlns="" val="1"/>
             </a:ext>
           </a:extLst>
         </p:spPr>
@@ -11672,7 +11672,7 @@
           </a:ln>
           <a:extLst>
             <a:ext uri="{C572A759-6A51-4108-AA02-DFA0A04FC94B}">
-              <ma14:wrappingTextBoxFlag xmlns="" xmlns:m="http://schemas.openxmlformats.org/officeDocument/2006/math" xmlns:a14="http://schemas.microsoft.com/office/drawing/2010/main" xmlns:ma14="http://schemas.microsoft.com/office/mac/drawingml/2011/main" val="1"/>
+              <ma14:wrappingTextBoxFlag xmlns:ma14="http://schemas.microsoft.com/office/mac/drawingml/2011/main" xmlns:a14="http://schemas.microsoft.com/office/drawing/2010/main" xmlns:m="http://schemas.openxmlformats.org/officeDocument/2006/math" xmlns="" val="1"/>
             </a:ext>
           </a:extLst>
         </p:spPr>
@@ -11719,7 +11719,7 @@
           </a:ln>
           <a:extLst>
             <a:ext uri="{C572A759-6A51-4108-AA02-DFA0A04FC94B}">
-              <ma14:wrappingTextBoxFlag xmlns="" xmlns:m="http://schemas.openxmlformats.org/officeDocument/2006/math" xmlns:a14="http://schemas.microsoft.com/office/drawing/2010/main" xmlns:ma14="http://schemas.microsoft.com/office/mac/drawingml/2011/main" val="1"/>
+              <ma14:wrappingTextBoxFlag xmlns:ma14="http://schemas.microsoft.com/office/mac/drawingml/2011/main" xmlns:a14="http://schemas.microsoft.com/office/drawing/2010/main" xmlns:m="http://schemas.openxmlformats.org/officeDocument/2006/math" xmlns="" val="1"/>
             </a:ext>
           </a:extLst>
         </p:spPr>
@@ -11766,7 +11766,7 @@
           </a:ln>
           <a:extLst>
             <a:ext uri="{C572A759-6A51-4108-AA02-DFA0A04FC94B}">
-              <ma14:wrappingTextBoxFlag xmlns="" xmlns:m="http://schemas.openxmlformats.org/officeDocument/2006/math" xmlns:a14="http://schemas.microsoft.com/office/drawing/2010/main" xmlns:ma14="http://schemas.microsoft.com/office/mac/drawingml/2011/main" val="1"/>
+              <ma14:wrappingTextBoxFlag xmlns:ma14="http://schemas.microsoft.com/office/mac/drawingml/2011/main" xmlns:a14="http://schemas.microsoft.com/office/drawing/2010/main" xmlns:m="http://schemas.openxmlformats.org/officeDocument/2006/math" xmlns="" val="1"/>
             </a:ext>
           </a:extLst>
         </p:spPr>
@@ -11913,7 +11913,7 @@
           </a:ln>
           <a:extLst>
             <a:ext uri="{C572A759-6A51-4108-AA02-DFA0A04FC94B}">
-              <ma14:wrappingTextBoxFlag xmlns="" xmlns:m="http://schemas.openxmlformats.org/officeDocument/2006/math" xmlns:a14="http://schemas.microsoft.com/office/drawing/2010/main" xmlns:ma14="http://schemas.microsoft.com/office/mac/drawingml/2011/main" val="1"/>
+              <ma14:wrappingTextBoxFlag xmlns:ma14="http://schemas.microsoft.com/office/mac/drawingml/2011/main" xmlns:a14="http://schemas.microsoft.com/office/drawing/2010/main" xmlns:m="http://schemas.openxmlformats.org/officeDocument/2006/math" xmlns="" val="1"/>
             </a:ext>
           </a:extLst>
         </p:spPr>
@@ -11960,7 +11960,7 @@
           </a:ln>
           <a:extLst>
             <a:ext uri="{C572A759-6A51-4108-AA02-DFA0A04FC94B}">
-              <ma14:wrappingTextBoxFlag xmlns="" xmlns:m="http://schemas.openxmlformats.org/officeDocument/2006/math" xmlns:a14="http://schemas.microsoft.com/office/drawing/2010/main" xmlns:ma14="http://schemas.microsoft.com/office/mac/drawingml/2011/main" val="1"/>
+              <ma14:wrappingTextBoxFlag xmlns:ma14="http://schemas.microsoft.com/office/mac/drawingml/2011/main" xmlns:a14="http://schemas.microsoft.com/office/drawing/2010/main" xmlns:m="http://schemas.openxmlformats.org/officeDocument/2006/math" xmlns="" val="1"/>
             </a:ext>
           </a:extLst>
         </p:spPr>
@@ -12007,7 +12007,7 @@
           </a:ln>
           <a:extLst>
             <a:ext uri="{C572A759-6A51-4108-AA02-DFA0A04FC94B}">
-              <ma14:wrappingTextBoxFlag xmlns="" xmlns:m="http://schemas.openxmlformats.org/officeDocument/2006/math" xmlns:a14="http://schemas.microsoft.com/office/drawing/2010/main" xmlns:ma14="http://schemas.microsoft.com/office/mac/drawingml/2011/main" val="1"/>
+              <ma14:wrappingTextBoxFlag xmlns:ma14="http://schemas.microsoft.com/office/mac/drawingml/2011/main" xmlns:a14="http://schemas.microsoft.com/office/drawing/2010/main" xmlns:m="http://schemas.openxmlformats.org/officeDocument/2006/math" xmlns="" val="1"/>
             </a:ext>
           </a:extLst>
         </p:spPr>
@@ -12075,7 +12075,7 @@
           </a:ln>
           <a:extLst>
             <a:ext uri="{C572A759-6A51-4108-AA02-DFA0A04FC94B}">
-              <ma14:wrappingTextBoxFlag xmlns="" xmlns:m="http://schemas.openxmlformats.org/officeDocument/2006/math" xmlns:a14="http://schemas.microsoft.com/office/drawing/2010/main" xmlns:ma14="http://schemas.microsoft.com/office/mac/drawingml/2011/main" val="1"/>
+              <ma14:wrappingTextBoxFlag xmlns:ma14="http://schemas.microsoft.com/office/mac/drawingml/2011/main" xmlns:a14="http://schemas.microsoft.com/office/drawing/2010/main" xmlns:m="http://schemas.openxmlformats.org/officeDocument/2006/math" xmlns="" val="1"/>
             </a:ext>
           </a:extLst>
         </p:spPr>
@@ -12122,7 +12122,7 @@
           </a:ln>
           <a:extLst>
             <a:ext uri="{C572A759-6A51-4108-AA02-DFA0A04FC94B}">
-              <ma14:wrappingTextBoxFlag xmlns="" xmlns:m="http://schemas.openxmlformats.org/officeDocument/2006/math" xmlns:a14="http://schemas.microsoft.com/office/drawing/2010/main" xmlns:ma14="http://schemas.microsoft.com/office/mac/drawingml/2011/main" val="1"/>
+              <ma14:wrappingTextBoxFlag xmlns:ma14="http://schemas.microsoft.com/office/mac/drawingml/2011/main" xmlns:a14="http://schemas.microsoft.com/office/drawing/2010/main" xmlns:m="http://schemas.openxmlformats.org/officeDocument/2006/math" xmlns="" val="1"/>
             </a:ext>
           </a:extLst>
         </p:spPr>
@@ -12259,7 +12259,7 @@
           </a:ln>
           <a:extLst>
             <a:ext uri="{C572A759-6A51-4108-AA02-DFA0A04FC94B}">
-              <ma14:wrappingTextBoxFlag xmlns="" xmlns:m="http://schemas.openxmlformats.org/officeDocument/2006/math" xmlns:a14="http://schemas.microsoft.com/office/drawing/2010/main" xmlns:ma14="http://schemas.microsoft.com/office/mac/drawingml/2011/main" val="1"/>
+              <ma14:wrappingTextBoxFlag xmlns:ma14="http://schemas.microsoft.com/office/mac/drawingml/2011/main" xmlns:a14="http://schemas.microsoft.com/office/drawing/2010/main" xmlns:m="http://schemas.openxmlformats.org/officeDocument/2006/math" xmlns="" val="1"/>
             </a:ext>
           </a:extLst>
         </p:spPr>
@@ -12306,7 +12306,7 @@
           </a:ln>
           <a:extLst>
             <a:ext uri="{C572A759-6A51-4108-AA02-DFA0A04FC94B}">
-              <ma14:wrappingTextBoxFlag xmlns="" xmlns:m="http://schemas.openxmlformats.org/officeDocument/2006/math" xmlns:a14="http://schemas.microsoft.com/office/drawing/2010/main" xmlns:ma14="http://schemas.microsoft.com/office/mac/drawingml/2011/main" val="1"/>
+              <ma14:wrappingTextBoxFlag xmlns:ma14="http://schemas.microsoft.com/office/mac/drawingml/2011/main" xmlns:a14="http://schemas.microsoft.com/office/drawing/2010/main" xmlns:m="http://schemas.openxmlformats.org/officeDocument/2006/math" xmlns="" val="1"/>
             </a:ext>
           </a:extLst>
         </p:spPr>
@@ -12353,7 +12353,7 @@
           </a:ln>
           <a:extLst>
             <a:ext uri="{C572A759-6A51-4108-AA02-DFA0A04FC94B}">
-              <ma14:wrappingTextBoxFlag xmlns="" xmlns:m="http://schemas.openxmlformats.org/officeDocument/2006/math" xmlns:a14="http://schemas.microsoft.com/office/drawing/2010/main" xmlns:ma14="http://schemas.microsoft.com/office/mac/drawingml/2011/main" val="1"/>
+              <ma14:wrappingTextBoxFlag xmlns:ma14="http://schemas.microsoft.com/office/mac/drawingml/2011/main" xmlns:a14="http://schemas.microsoft.com/office/drawing/2010/main" xmlns:m="http://schemas.openxmlformats.org/officeDocument/2006/math" xmlns="" val="1"/>
             </a:ext>
           </a:extLst>
         </p:spPr>
@@ -12400,7 +12400,7 @@
           </a:ln>
           <a:extLst>
             <a:ext uri="{C572A759-6A51-4108-AA02-DFA0A04FC94B}">
-              <ma14:wrappingTextBoxFlag xmlns="" xmlns:m="http://schemas.openxmlformats.org/officeDocument/2006/math" xmlns:a14="http://schemas.microsoft.com/office/drawing/2010/main" xmlns:ma14="http://schemas.microsoft.com/office/mac/drawingml/2011/main" val="1"/>
+              <ma14:wrappingTextBoxFlag xmlns:ma14="http://schemas.microsoft.com/office/mac/drawingml/2011/main" xmlns:a14="http://schemas.microsoft.com/office/drawing/2010/main" xmlns:m="http://schemas.openxmlformats.org/officeDocument/2006/math" xmlns="" val="1"/>
             </a:ext>
           </a:extLst>
         </p:spPr>
@@ -12447,7 +12447,7 @@
           </a:ln>
           <a:extLst>
             <a:ext uri="{C572A759-6A51-4108-AA02-DFA0A04FC94B}">
-              <ma14:wrappingTextBoxFlag xmlns="" xmlns:m="http://schemas.openxmlformats.org/officeDocument/2006/math" xmlns:a14="http://schemas.microsoft.com/office/drawing/2010/main" xmlns:ma14="http://schemas.microsoft.com/office/mac/drawingml/2011/main" val="1"/>
+              <ma14:wrappingTextBoxFlag xmlns:ma14="http://schemas.microsoft.com/office/mac/drawingml/2011/main" xmlns:a14="http://schemas.microsoft.com/office/drawing/2010/main" xmlns:m="http://schemas.openxmlformats.org/officeDocument/2006/math" xmlns="" val="1"/>
             </a:ext>
           </a:extLst>
         </p:spPr>
@@ -12630,7 +12630,7 @@
           </a:ln>
           <a:extLst>
             <a:ext uri="{C572A759-6A51-4108-AA02-DFA0A04FC94B}">
-              <ma14:wrappingTextBoxFlag xmlns="" xmlns:m="http://schemas.openxmlformats.org/officeDocument/2006/math" xmlns:a14="http://schemas.microsoft.com/office/drawing/2010/main" xmlns:ma14="http://schemas.microsoft.com/office/mac/drawingml/2011/main" val="1"/>
+              <ma14:wrappingTextBoxFlag xmlns:ma14="http://schemas.microsoft.com/office/mac/drawingml/2011/main" xmlns:a14="http://schemas.microsoft.com/office/drawing/2010/main" xmlns:m="http://schemas.openxmlformats.org/officeDocument/2006/math" xmlns="" val="1"/>
             </a:ext>
           </a:extLst>
         </p:spPr>
@@ -12677,7 +12677,7 @@
           </a:ln>
           <a:extLst>
             <a:ext uri="{C572A759-6A51-4108-AA02-DFA0A04FC94B}">
-              <ma14:wrappingTextBoxFlag xmlns="" xmlns:m="http://schemas.openxmlformats.org/officeDocument/2006/math" xmlns:a14="http://schemas.microsoft.com/office/drawing/2010/main" xmlns:ma14="http://schemas.microsoft.com/office/mac/drawingml/2011/main" val="1"/>
+              <ma14:wrappingTextBoxFlag xmlns:ma14="http://schemas.microsoft.com/office/mac/drawingml/2011/main" xmlns:a14="http://schemas.microsoft.com/office/drawing/2010/main" xmlns:m="http://schemas.openxmlformats.org/officeDocument/2006/math" xmlns="" val="1"/>
             </a:ext>
           </a:extLst>
         </p:spPr>
@@ -12724,7 +12724,7 @@
           </a:ln>
           <a:extLst>
             <a:ext uri="{C572A759-6A51-4108-AA02-DFA0A04FC94B}">
-              <ma14:wrappingTextBoxFlag xmlns="" xmlns:m="http://schemas.openxmlformats.org/officeDocument/2006/math" xmlns:a14="http://schemas.microsoft.com/office/drawing/2010/main" xmlns:ma14="http://schemas.microsoft.com/office/mac/drawingml/2011/main" val="1"/>
+              <ma14:wrappingTextBoxFlag xmlns:ma14="http://schemas.microsoft.com/office/mac/drawingml/2011/main" xmlns:a14="http://schemas.microsoft.com/office/drawing/2010/main" xmlns:m="http://schemas.openxmlformats.org/officeDocument/2006/math" xmlns="" val="1"/>
             </a:ext>
           </a:extLst>
         </p:spPr>
@@ -12771,7 +12771,7 @@
           </a:ln>
           <a:extLst>
             <a:ext uri="{C572A759-6A51-4108-AA02-DFA0A04FC94B}">
-              <ma14:wrappingTextBoxFlag xmlns="" xmlns:m="http://schemas.openxmlformats.org/officeDocument/2006/math" xmlns:a14="http://schemas.microsoft.com/office/drawing/2010/main" xmlns:ma14="http://schemas.microsoft.com/office/mac/drawingml/2011/main" val="1"/>
+              <ma14:wrappingTextBoxFlag xmlns:ma14="http://schemas.microsoft.com/office/mac/drawingml/2011/main" xmlns:a14="http://schemas.microsoft.com/office/drawing/2010/main" xmlns:m="http://schemas.openxmlformats.org/officeDocument/2006/math" xmlns="" val="1"/>
             </a:ext>
           </a:extLst>
         </p:spPr>
@@ -12818,7 +12818,7 @@
           </a:ln>
           <a:extLst>
             <a:ext uri="{C572A759-6A51-4108-AA02-DFA0A04FC94B}">
-              <ma14:wrappingTextBoxFlag xmlns="" xmlns:m="http://schemas.openxmlformats.org/officeDocument/2006/math" xmlns:a14="http://schemas.microsoft.com/office/drawing/2010/main" xmlns:ma14="http://schemas.microsoft.com/office/mac/drawingml/2011/main" val="1"/>
+              <ma14:wrappingTextBoxFlag xmlns:ma14="http://schemas.microsoft.com/office/mac/drawingml/2011/main" xmlns:a14="http://schemas.microsoft.com/office/drawing/2010/main" xmlns:m="http://schemas.openxmlformats.org/officeDocument/2006/math" xmlns="" val="1"/>
             </a:ext>
           </a:extLst>
         </p:spPr>
@@ -13001,7 +13001,7 @@
           </a:ln>
           <a:extLst>
             <a:ext uri="{C572A759-6A51-4108-AA02-DFA0A04FC94B}">
-              <ma14:wrappingTextBoxFlag xmlns="" xmlns:m="http://schemas.openxmlformats.org/officeDocument/2006/math" xmlns:a14="http://schemas.microsoft.com/office/drawing/2010/main" xmlns:ma14="http://schemas.microsoft.com/office/mac/drawingml/2011/main" val="1"/>
+              <ma14:wrappingTextBoxFlag xmlns:ma14="http://schemas.microsoft.com/office/mac/drawingml/2011/main" xmlns:a14="http://schemas.microsoft.com/office/drawing/2010/main" xmlns:m="http://schemas.openxmlformats.org/officeDocument/2006/math" xmlns="" val="1"/>
             </a:ext>
           </a:extLst>
         </p:spPr>
@@ -13048,7 +13048,7 @@
           </a:ln>
           <a:extLst>
             <a:ext uri="{C572A759-6A51-4108-AA02-DFA0A04FC94B}">
-              <ma14:wrappingTextBoxFlag xmlns="" xmlns:m="http://schemas.openxmlformats.org/officeDocument/2006/math" xmlns:a14="http://schemas.microsoft.com/office/drawing/2010/main" xmlns:ma14="http://schemas.microsoft.com/office/mac/drawingml/2011/main" val="1"/>
+              <ma14:wrappingTextBoxFlag xmlns:ma14="http://schemas.microsoft.com/office/mac/drawingml/2011/main" xmlns:a14="http://schemas.microsoft.com/office/drawing/2010/main" xmlns:m="http://schemas.openxmlformats.org/officeDocument/2006/math" xmlns="" val="1"/>
             </a:ext>
           </a:extLst>
         </p:spPr>
@@ -13095,7 +13095,7 @@
           </a:ln>
           <a:extLst>
             <a:ext uri="{C572A759-6A51-4108-AA02-DFA0A04FC94B}">
-              <ma14:wrappingTextBoxFlag xmlns="" xmlns:m="http://schemas.openxmlformats.org/officeDocument/2006/math" xmlns:a14="http://schemas.microsoft.com/office/drawing/2010/main" xmlns:ma14="http://schemas.microsoft.com/office/mac/drawingml/2011/main" val="1"/>
+              <ma14:wrappingTextBoxFlag xmlns:ma14="http://schemas.microsoft.com/office/mac/drawingml/2011/main" xmlns:a14="http://schemas.microsoft.com/office/drawing/2010/main" xmlns:m="http://schemas.openxmlformats.org/officeDocument/2006/math" xmlns="" val="1"/>
             </a:ext>
           </a:extLst>
         </p:spPr>
@@ -13142,7 +13142,7 @@
           </a:ln>
           <a:extLst>
             <a:ext uri="{C572A759-6A51-4108-AA02-DFA0A04FC94B}">
-              <ma14:wrappingTextBoxFlag xmlns="" xmlns:m="http://schemas.openxmlformats.org/officeDocument/2006/math" xmlns:a14="http://schemas.microsoft.com/office/drawing/2010/main" xmlns:ma14="http://schemas.microsoft.com/office/mac/drawingml/2011/main" val="1"/>
+              <ma14:wrappingTextBoxFlag xmlns:ma14="http://schemas.microsoft.com/office/mac/drawingml/2011/main" xmlns:a14="http://schemas.microsoft.com/office/drawing/2010/main" xmlns:m="http://schemas.openxmlformats.org/officeDocument/2006/math" xmlns="" val="1"/>
             </a:ext>
           </a:extLst>
         </p:spPr>
@@ -13189,7 +13189,7 @@
           </a:ln>
           <a:extLst>
             <a:ext uri="{C572A759-6A51-4108-AA02-DFA0A04FC94B}">
-              <ma14:wrappingTextBoxFlag xmlns="" xmlns:m="http://schemas.openxmlformats.org/officeDocument/2006/math" xmlns:a14="http://schemas.microsoft.com/office/drawing/2010/main" xmlns:ma14="http://schemas.microsoft.com/office/mac/drawingml/2011/main" val="1"/>
+              <ma14:wrappingTextBoxFlag xmlns:ma14="http://schemas.microsoft.com/office/mac/drawingml/2011/main" xmlns:a14="http://schemas.microsoft.com/office/drawing/2010/main" xmlns:m="http://schemas.openxmlformats.org/officeDocument/2006/math" xmlns="" val="1"/>
             </a:ext>
           </a:extLst>
         </p:spPr>
@@ -13236,7 +13236,7 @@
           </a:ln>
           <a:extLst>
             <a:ext uri="{C572A759-6A51-4108-AA02-DFA0A04FC94B}">
-              <ma14:wrappingTextBoxFlag xmlns="" xmlns:m="http://schemas.openxmlformats.org/officeDocument/2006/math" xmlns:a14="http://schemas.microsoft.com/office/drawing/2010/main" xmlns:ma14="http://schemas.microsoft.com/office/mac/drawingml/2011/main" val="1"/>
+              <ma14:wrappingTextBoxFlag xmlns:ma14="http://schemas.microsoft.com/office/mac/drawingml/2011/main" xmlns:a14="http://schemas.microsoft.com/office/drawing/2010/main" xmlns:m="http://schemas.openxmlformats.org/officeDocument/2006/math" xmlns="" val="1"/>
             </a:ext>
           </a:extLst>
         </p:spPr>
@@ -13362,7 +13362,7 @@
           </a:ln>
           <a:extLst>
             <a:ext uri="{C572A759-6A51-4108-AA02-DFA0A04FC94B}">
-              <ma14:wrappingTextBoxFlag xmlns="" xmlns:m="http://schemas.openxmlformats.org/officeDocument/2006/math" xmlns:a14="http://schemas.microsoft.com/office/drawing/2010/main" xmlns:ma14="http://schemas.microsoft.com/office/mac/drawingml/2011/main" val="1"/>
+              <ma14:wrappingTextBoxFlag xmlns:ma14="http://schemas.microsoft.com/office/mac/drawingml/2011/main" xmlns:a14="http://schemas.microsoft.com/office/drawing/2010/main" xmlns:m="http://schemas.openxmlformats.org/officeDocument/2006/math" xmlns="" val="1"/>
             </a:ext>
           </a:extLst>
         </p:spPr>
@@ -13409,7 +13409,7 @@
           </a:ln>
           <a:extLst>
             <a:ext uri="{C572A759-6A51-4108-AA02-DFA0A04FC94B}">
-              <ma14:wrappingTextBoxFlag xmlns="" xmlns:m="http://schemas.openxmlformats.org/officeDocument/2006/math" xmlns:a14="http://schemas.microsoft.com/office/drawing/2010/main" xmlns:ma14="http://schemas.microsoft.com/office/mac/drawingml/2011/main" val="1"/>
+              <ma14:wrappingTextBoxFlag xmlns:ma14="http://schemas.microsoft.com/office/mac/drawingml/2011/main" xmlns:a14="http://schemas.microsoft.com/office/drawing/2010/main" xmlns:m="http://schemas.openxmlformats.org/officeDocument/2006/math" xmlns="" val="1"/>
             </a:ext>
           </a:extLst>
         </p:spPr>
@@ -13499,7 +13499,7 @@
           </a:ln>
           <a:extLst>
             <a:ext uri="{C572A759-6A51-4108-AA02-DFA0A04FC94B}">
-              <ma14:wrappingTextBoxFlag xmlns="" xmlns:m="http://schemas.openxmlformats.org/officeDocument/2006/math" xmlns:a14="http://schemas.microsoft.com/office/drawing/2010/main" xmlns:ma14="http://schemas.microsoft.com/office/mac/drawingml/2011/main" val="1"/>
+              <ma14:wrappingTextBoxFlag xmlns:ma14="http://schemas.microsoft.com/office/mac/drawingml/2011/main" xmlns:a14="http://schemas.microsoft.com/office/drawing/2010/main" xmlns:m="http://schemas.openxmlformats.org/officeDocument/2006/math" xmlns="" val="1"/>
             </a:ext>
           </a:extLst>
         </p:spPr>
@@ -13546,7 +13546,7 @@
           </a:ln>
           <a:extLst>
             <a:ext uri="{C572A759-6A51-4108-AA02-DFA0A04FC94B}">
-              <ma14:wrappingTextBoxFlag xmlns="" xmlns:m="http://schemas.openxmlformats.org/officeDocument/2006/math" xmlns:a14="http://schemas.microsoft.com/office/drawing/2010/main" xmlns:ma14="http://schemas.microsoft.com/office/mac/drawingml/2011/main" val="1"/>
+              <ma14:wrappingTextBoxFlag xmlns:ma14="http://schemas.microsoft.com/office/mac/drawingml/2011/main" xmlns:a14="http://schemas.microsoft.com/office/drawing/2010/main" xmlns:m="http://schemas.openxmlformats.org/officeDocument/2006/math" xmlns="" val="1"/>
             </a:ext>
           </a:extLst>
         </p:spPr>
@@ -13636,7 +13636,7 @@
           </a:ln>
           <a:extLst>
             <a:ext uri="{C572A759-6A51-4108-AA02-DFA0A04FC94B}">
-              <ma14:wrappingTextBoxFlag xmlns="" xmlns:m="http://schemas.openxmlformats.org/officeDocument/2006/math" xmlns:a14="http://schemas.microsoft.com/office/drawing/2010/main" xmlns:ma14="http://schemas.microsoft.com/office/mac/drawingml/2011/main" val="1"/>
+              <ma14:wrappingTextBoxFlag xmlns:ma14="http://schemas.microsoft.com/office/mac/drawingml/2011/main" xmlns:a14="http://schemas.microsoft.com/office/drawing/2010/main" xmlns:m="http://schemas.openxmlformats.org/officeDocument/2006/math" xmlns="" val="1"/>
             </a:ext>
           </a:extLst>
         </p:spPr>
@@ -13683,7 +13683,7 @@
           </a:ln>
           <a:extLst>
             <a:ext uri="{C572A759-6A51-4108-AA02-DFA0A04FC94B}">
-              <ma14:wrappingTextBoxFlag xmlns="" xmlns:m="http://schemas.openxmlformats.org/officeDocument/2006/math" xmlns:a14="http://schemas.microsoft.com/office/drawing/2010/main" xmlns:ma14="http://schemas.microsoft.com/office/mac/drawingml/2011/main" val="1"/>
+              <ma14:wrappingTextBoxFlag xmlns:ma14="http://schemas.microsoft.com/office/mac/drawingml/2011/main" xmlns:a14="http://schemas.microsoft.com/office/drawing/2010/main" xmlns:m="http://schemas.openxmlformats.org/officeDocument/2006/math" xmlns="" val="1"/>
             </a:ext>
           </a:extLst>
         </p:spPr>
@@ -13802,7 +13802,7 @@
           </a:ln>
           <a:extLst>
             <a:ext uri="{C572A759-6A51-4108-AA02-DFA0A04FC94B}">
-              <ma14:wrappingTextBoxFlag xmlns="" xmlns:m="http://schemas.openxmlformats.org/officeDocument/2006/math" xmlns:a14="http://schemas.microsoft.com/office/drawing/2010/main" xmlns:ma14="http://schemas.microsoft.com/office/mac/drawingml/2011/main" val="1"/>
+              <ma14:wrappingTextBoxFlag xmlns:ma14="http://schemas.microsoft.com/office/mac/drawingml/2011/main" xmlns:a14="http://schemas.microsoft.com/office/drawing/2010/main" xmlns:m="http://schemas.openxmlformats.org/officeDocument/2006/math" xmlns="" val="1"/>
             </a:ext>
           </a:extLst>
         </p:spPr>
@@ -13892,7 +13892,7 @@
           </a:ln>
           <a:extLst>
             <a:ext uri="{C572A759-6A51-4108-AA02-DFA0A04FC94B}">
-              <ma14:wrappingTextBoxFlag xmlns="" xmlns:m="http://schemas.openxmlformats.org/officeDocument/2006/math" xmlns:a14="http://schemas.microsoft.com/office/drawing/2010/main" xmlns:ma14="http://schemas.microsoft.com/office/mac/drawingml/2011/main" val="1"/>
+              <ma14:wrappingTextBoxFlag xmlns:ma14="http://schemas.microsoft.com/office/mac/drawingml/2011/main" xmlns:a14="http://schemas.microsoft.com/office/drawing/2010/main" xmlns:m="http://schemas.openxmlformats.org/officeDocument/2006/math" xmlns="" val="1"/>
             </a:ext>
           </a:extLst>
         </p:spPr>
@@ -13982,7 +13982,7 @@
           </a:ln>
           <a:extLst>
             <a:ext uri="{C572A759-6A51-4108-AA02-DFA0A04FC94B}">
-              <ma14:wrappingTextBoxFlag xmlns="" xmlns:m="http://schemas.openxmlformats.org/officeDocument/2006/math" xmlns:a14="http://schemas.microsoft.com/office/drawing/2010/main" xmlns:ma14="http://schemas.microsoft.com/office/mac/drawingml/2011/main" val="1"/>
+              <ma14:wrappingTextBoxFlag xmlns:ma14="http://schemas.microsoft.com/office/mac/drawingml/2011/main" xmlns:a14="http://schemas.microsoft.com/office/drawing/2010/main" xmlns:m="http://schemas.openxmlformats.org/officeDocument/2006/math" xmlns="" val="1"/>
             </a:ext>
           </a:extLst>
         </p:spPr>
@@ -14072,7 +14072,7 @@
           </a:ln>
           <a:extLst>
             <a:ext uri="{C572A759-6A51-4108-AA02-DFA0A04FC94B}">
-              <ma14:wrappingTextBoxFlag xmlns="" xmlns:m="http://schemas.openxmlformats.org/officeDocument/2006/math" xmlns:a14="http://schemas.microsoft.com/office/drawing/2010/main" xmlns:ma14="http://schemas.microsoft.com/office/mac/drawingml/2011/main" val="1"/>
+              <ma14:wrappingTextBoxFlag xmlns:ma14="http://schemas.microsoft.com/office/mac/drawingml/2011/main" xmlns:a14="http://schemas.microsoft.com/office/drawing/2010/main" xmlns:m="http://schemas.openxmlformats.org/officeDocument/2006/math" xmlns="" val="1"/>
             </a:ext>
           </a:extLst>
         </p:spPr>
@@ -14162,7 +14162,7 @@
           </a:ln>
           <a:extLst>
             <a:ext uri="{C572A759-6A51-4108-AA02-DFA0A04FC94B}">
-              <ma14:wrappingTextBoxFlag xmlns="" xmlns:m="http://schemas.openxmlformats.org/officeDocument/2006/math" xmlns:a14="http://schemas.microsoft.com/office/drawing/2010/main" xmlns:ma14="http://schemas.microsoft.com/office/mac/drawingml/2011/main" val="1"/>
+              <ma14:wrappingTextBoxFlag xmlns:ma14="http://schemas.microsoft.com/office/mac/drawingml/2011/main" xmlns:a14="http://schemas.microsoft.com/office/drawing/2010/main" xmlns:m="http://schemas.openxmlformats.org/officeDocument/2006/math" xmlns="" val="1"/>
             </a:ext>
           </a:extLst>
         </p:spPr>
@@ -14252,7 +14252,7 @@
           </a:ln>
           <a:extLst>
             <a:ext uri="{C572A759-6A51-4108-AA02-DFA0A04FC94B}">
-              <ma14:wrappingTextBoxFlag xmlns="" xmlns:m="http://schemas.openxmlformats.org/officeDocument/2006/math" xmlns:a14="http://schemas.microsoft.com/office/drawing/2010/main" xmlns:ma14="http://schemas.microsoft.com/office/mac/drawingml/2011/main" val="1"/>
+              <ma14:wrappingTextBoxFlag xmlns:ma14="http://schemas.microsoft.com/office/mac/drawingml/2011/main" xmlns:a14="http://schemas.microsoft.com/office/drawing/2010/main" xmlns:m="http://schemas.openxmlformats.org/officeDocument/2006/math" xmlns="" val="1"/>
             </a:ext>
           </a:extLst>
         </p:spPr>
@@ -14342,7 +14342,7 @@
           </a:ln>
           <a:extLst>
             <a:ext uri="{C572A759-6A51-4108-AA02-DFA0A04FC94B}">
-              <ma14:wrappingTextBoxFlag xmlns="" xmlns:m="http://schemas.openxmlformats.org/officeDocument/2006/math" xmlns:a14="http://schemas.microsoft.com/office/drawing/2010/main" xmlns:ma14="http://schemas.microsoft.com/office/mac/drawingml/2011/main" val="1"/>
+              <ma14:wrappingTextBoxFlag xmlns:ma14="http://schemas.microsoft.com/office/mac/drawingml/2011/main" xmlns:a14="http://schemas.microsoft.com/office/drawing/2010/main" xmlns:m="http://schemas.openxmlformats.org/officeDocument/2006/math" xmlns="" val="1"/>
             </a:ext>
           </a:extLst>
         </p:spPr>
@@ -14432,7 +14432,7 @@
           </a:ln>
           <a:extLst>
             <a:ext uri="{C572A759-6A51-4108-AA02-DFA0A04FC94B}">
-              <ma14:wrappingTextBoxFlag xmlns="" xmlns:m="http://schemas.openxmlformats.org/officeDocument/2006/math" xmlns:a14="http://schemas.microsoft.com/office/drawing/2010/main" xmlns:ma14="http://schemas.microsoft.com/office/mac/drawingml/2011/main" val="1"/>
+              <ma14:wrappingTextBoxFlag xmlns:ma14="http://schemas.microsoft.com/office/mac/drawingml/2011/main" xmlns:a14="http://schemas.microsoft.com/office/drawing/2010/main" xmlns:m="http://schemas.openxmlformats.org/officeDocument/2006/math" xmlns="" val="1"/>
             </a:ext>
           </a:extLst>
         </p:spPr>
@@ -14522,7 +14522,7 @@
           </a:ln>
           <a:extLst>
             <a:ext uri="{C572A759-6A51-4108-AA02-DFA0A04FC94B}">
-              <ma14:wrappingTextBoxFlag xmlns="" xmlns:m="http://schemas.openxmlformats.org/officeDocument/2006/math" xmlns:a14="http://schemas.microsoft.com/office/drawing/2010/main" xmlns:ma14="http://schemas.microsoft.com/office/mac/drawingml/2011/main" val="1"/>
+              <ma14:wrappingTextBoxFlag xmlns:ma14="http://schemas.microsoft.com/office/mac/drawingml/2011/main" xmlns:a14="http://schemas.microsoft.com/office/drawing/2010/main" xmlns:m="http://schemas.openxmlformats.org/officeDocument/2006/math" xmlns="" val="1"/>
             </a:ext>
           </a:extLst>
         </p:spPr>
@@ -14569,7 +14569,7 @@
           </a:ln>
           <a:extLst>
             <a:ext uri="{C572A759-6A51-4108-AA02-DFA0A04FC94B}">
-              <ma14:wrappingTextBoxFlag xmlns="" xmlns:m="http://schemas.openxmlformats.org/officeDocument/2006/math" xmlns:a14="http://schemas.microsoft.com/office/drawing/2010/main" xmlns:ma14="http://schemas.microsoft.com/office/mac/drawingml/2011/main" val="1"/>
+              <ma14:wrappingTextBoxFlag xmlns:ma14="http://schemas.microsoft.com/office/mac/drawingml/2011/main" xmlns:a14="http://schemas.microsoft.com/office/drawing/2010/main" xmlns:m="http://schemas.openxmlformats.org/officeDocument/2006/math" xmlns="" val="1"/>
             </a:ext>
           </a:extLst>
         </p:spPr>
@@ -14663,7 +14663,7 @@
           </a:ln>
           <a:extLst>
             <a:ext uri="{C572A759-6A51-4108-AA02-DFA0A04FC94B}">
-              <ma14:wrappingTextBoxFlag xmlns="" xmlns:m="http://schemas.openxmlformats.org/officeDocument/2006/math" xmlns:a14="http://schemas.microsoft.com/office/drawing/2010/main" xmlns:ma14="http://schemas.microsoft.com/office/mac/drawingml/2011/main" val="1"/>
+              <ma14:wrappingTextBoxFlag xmlns:ma14="http://schemas.microsoft.com/office/mac/drawingml/2011/main" xmlns:a14="http://schemas.microsoft.com/office/drawing/2010/main" xmlns:m="http://schemas.openxmlformats.org/officeDocument/2006/math" xmlns="" val="1"/>
             </a:ext>
           </a:extLst>
         </p:spPr>
@@ -14755,7 +14755,7 @@
           </a:ln>
           <a:extLst>
             <a:ext uri="{C572A759-6A51-4108-AA02-DFA0A04FC94B}">
-              <ma14:wrappingTextBoxFlag xmlns="" xmlns:m="http://schemas.openxmlformats.org/officeDocument/2006/math" xmlns:a14="http://schemas.microsoft.com/office/drawing/2010/main" xmlns:ma14="http://schemas.microsoft.com/office/mac/drawingml/2011/main" val="1"/>
+              <ma14:wrappingTextBoxFlag xmlns:ma14="http://schemas.microsoft.com/office/mac/drawingml/2011/main" xmlns:a14="http://schemas.microsoft.com/office/drawing/2010/main" xmlns:m="http://schemas.openxmlformats.org/officeDocument/2006/math" xmlns="" val="1"/>
             </a:ext>
           </a:extLst>
         </p:spPr>
@@ -14898,7 +14898,7 @@
           </a:ln>
           <a:extLst>
             <a:ext uri="{C572A759-6A51-4108-AA02-DFA0A04FC94B}">
-              <ma14:wrappingTextBoxFlag xmlns="" xmlns:m="http://schemas.openxmlformats.org/officeDocument/2006/math" xmlns:a14="http://schemas.microsoft.com/office/drawing/2010/main" xmlns:ma14="http://schemas.microsoft.com/office/mac/drawingml/2011/main" val="1"/>
+              <ma14:wrappingTextBoxFlag xmlns:ma14="http://schemas.microsoft.com/office/mac/drawingml/2011/main" xmlns:a14="http://schemas.microsoft.com/office/drawing/2010/main" xmlns:m="http://schemas.openxmlformats.org/officeDocument/2006/math" xmlns="" val="1"/>
             </a:ext>
           </a:extLst>
         </p:spPr>
@@ -14945,7 +14945,7 @@
           </a:ln>
           <a:extLst>
             <a:ext uri="{C572A759-6A51-4108-AA02-DFA0A04FC94B}">
-              <ma14:wrappingTextBoxFlag xmlns="" xmlns:m="http://schemas.openxmlformats.org/officeDocument/2006/math" xmlns:a14="http://schemas.microsoft.com/office/drawing/2010/main" xmlns:ma14="http://schemas.microsoft.com/office/mac/drawingml/2011/main" val="1"/>
+              <ma14:wrappingTextBoxFlag xmlns:ma14="http://schemas.microsoft.com/office/mac/drawingml/2011/main" xmlns:a14="http://schemas.microsoft.com/office/drawing/2010/main" xmlns:m="http://schemas.openxmlformats.org/officeDocument/2006/math" xmlns="" val="1"/>
             </a:ext>
           </a:extLst>
         </p:spPr>
@@ -15067,7 +15067,7 @@
           </a:ln>
           <a:extLst>
             <a:ext uri="{C572A759-6A51-4108-AA02-DFA0A04FC94B}">
-              <ma14:wrappingTextBoxFlag xmlns="" xmlns:m="http://schemas.openxmlformats.org/officeDocument/2006/math" xmlns:a14="http://schemas.microsoft.com/office/drawing/2010/main" xmlns:ma14="http://schemas.microsoft.com/office/mac/drawingml/2011/main" val="1"/>
+              <ma14:wrappingTextBoxFlag xmlns:ma14="http://schemas.microsoft.com/office/mac/drawingml/2011/main" xmlns:a14="http://schemas.microsoft.com/office/drawing/2010/main" xmlns:m="http://schemas.openxmlformats.org/officeDocument/2006/math" xmlns="" val="1"/>
             </a:ext>
           </a:extLst>
         </p:spPr>
@@ -15114,7 +15114,7 @@
           </a:ln>
           <a:extLst>
             <a:ext uri="{C572A759-6A51-4108-AA02-DFA0A04FC94B}">
-              <ma14:wrappingTextBoxFlag xmlns="" xmlns:m="http://schemas.openxmlformats.org/officeDocument/2006/math" xmlns:a14="http://schemas.microsoft.com/office/drawing/2010/main" xmlns:ma14="http://schemas.microsoft.com/office/mac/drawingml/2011/main" val="1"/>
+              <ma14:wrappingTextBoxFlag xmlns:ma14="http://schemas.microsoft.com/office/mac/drawingml/2011/main" xmlns:a14="http://schemas.microsoft.com/office/drawing/2010/main" xmlns:m="http://schemas.openxmlformats.org/officeDocument/2006/math" xmlns="" val="1"/>
             </a:ext>
           </a:extLst>
         </p:spPr>
@@ -15202,7 +15202,7 @@
           </a:ln>
           <a:extLst>
             <a:ext uri="{C572A759-6A51-4108-AA02-DFA0A04FC94B}">
-              <ma14:wrappingTextBoxFlag xmlns="" xmlns:m="http://schemas.openxmlformats.org/officeDocument/2006/math" xmlns:a14="http://schemas.microsoft.com/office/drawing/2010/main" xmlns:ma14="http://schemas.microsoft.com/office/mac/drawingml/2011/main" val="1"/>
+              <ma14:wrappingTextBoxFlag xmlns:ma14="http://schemas.microsoft.com/office/mac/drawingml/2011/main" xmlns:a14="http://schemas.microsoft.com/office/drawing/2010/main" xmlns:m="http://schemas.openxmlformats.org/officeDocument/2006/math" xmlns="" val="1"/>
             </a:ext>
           </a:extLst>
         </p:spPr>
@@ -15288,7 +15288,7 @@
           </a:ln>
           <a:extLst>
             <a:ext uri="{C572A759-6A51-4108-AA02-DFA0A04FC94B}">
-              <ma14:wrappingTextBoxFlag xmlns="" xmlns:m="http://schemas.openxmlformats.org/officeDocument/2006/math" xmlns:a14="http://schemas.microsoft.com/office/drawing/2010/main" xmlns:ma14="http://schemas.microsoft.com/office/mac/drawingml/2011/main" val="1"/>
+              <ma14:wrappingTextBoxFlag xmlns:ma14="http://schemas.microsoft.com/office/mac/drawingml/2011/main" xmlns:a14="http://schemas.microsoft.com/office/drawing/2010/main" xmlns:m="http://schemas.openxmlformats.org/officeDocument/2006/math" xmlns="" val="1"/>
             </a:ext>
           </a:extLst>
         </p:spPr>
@@ -15335,7 +15335,7 @@
           </a:ln>
           <a:extLst>
             <a:ext uri="{C572A759-6A51-4108-AA02-DFA0A04FC94B}">
-              <ma14:wrappingTextBoxFlag xmlns="" xmlns:m="http://schemas.openxmlformats.org/officeDocument/2006/math" xmlns:a14="http://schemas.microsoft.com/office/drawing/2010/main" xmlns:ma14="http://schemas.microsoft.com/office/mac/drawingml/2011/main" val="1"/>
+              <ma14:wrappingTextBoxFlag xmlns:ma14="http://schemas.microsoft.com/office/mac/drawingml/2011/main" xmlns:a14="http://schemas.microsoft.com/office/drawing/2010/main" xmlns:m="http://schemas.openxmlformats.org/officeDocument/2006/math" xmlns="" val="1"/>
             </a:ext>
           </a:extLst>
         </p:spPr>
@@ -15423,7 +15423,7 @@
           </a:ln>
           <a:extLst>
             <a:ext uri="{C572A759-6A51-4108-AA02-DFA0A04FC94B}">
-              <ma14:wrappingTextBoxFlag xmlns="" xmlns:m="http://schemas.openxmlformats.org/officeDocument/2006/math" xmlns:a14="http://schemas.microsoft.com/office/drawing/2010/main" xmlns:ma14="http://schemas.microsoft.com/office/mac/drawingml/2011/main" val="1"/>
+              <ma14:wrappingTextBoxFlag xmlns:ma14="http://schemas.microsoft.com/office/mac/drawingml/2011/main" xmlns:a14="http://schemas.microsoft.com/office/drawing/2010/main" xmlns:m="http://schemas.openxmlformats.org/officeDocument/2006/math" xmlns="" val="1"/>
             </a:ext>
           </a:extLst>
         </p:spPr>
@@ -15509,7 +15509,7 @@
           </a:ln>
           <a:extLst>
             <a:ext uri="{C572A759-6A51-4108-AA02-DFA0A04FC94B}">
-              <ma14:wrappingTextBoxFlag xmlns="" xmlns:m="http://schemas.openxmlformats.org/officeDocument/2006/math" xmlns:a14="http://schemas.microsoft.com/office/drawing/2010/main" xmlns:ma14="http://schemas.microsoft.com/office/mac/drawingml/2011/main" val="1"/>
+              <ma14:wrappingTextBoxFlag xmlns:ma14="http://schemas.microsoft.com/office/mac/drawingml/2011/main" xmlns:a14="http://schemas.microsoft.com/office/drawing/2010/main" xmlns:m="http://schemas.openxmlformats.org/officeDocument/2006/math" xmlns="" val="1"/>
             </a:ext>
           </a:extLst>
         </p:spPr>
@@ -15556,7 +15556,7 @@
           </a:ln>
           <a:extLst>
             <a:ext uri="{C572A759-6A51-4108-AA02-DFA0A04FC94B}">
-              <ma14:wrappingTextBoxFlag xmlns="" xmlns:m="http://schemas.openxmlformats.org/officeDocument/2006/math" xmlns:a14="http://schemas.microsoft.com/office/drawing/2010/main" xmlns:ma14="http://schemas.microsoft.com/office/mac/drawingml/2011/main" val="1"/>
+              <ma14:wrappingTextBoxFlag xmlns:ma14="http://schemas.microsoft.com/office/mac/drawingml/2011/main" xmlns:a14="http://schemas.microsoft.com/office/drawing/2010/main" xmlns:m="http://schemas.openxmlformats.org/officeDocument/2006/math" xmlns="" val="1"/>
             </a:ext>
           </a:extLst>
         </p:spPr>
@@ -15644,7 +15644,7 @@
           </a:ln>
           <a:extLst>
             <a:ext uri="{C572A759-6A51-4108-AA02-DFA0A04FC94B}">
-              <ma14:wrappingTextBoxFlag xmlns="" xmlns:m="http://schemas.openxmlformats.org/officeDocument/2006/math" xmlns:a14="http://schemas.microsoft.com/office/drawing/2010/main" xmlns:ma14="http://schemas.microsoft.com/office/mac/drawingml/2011/main" val="1"/>
+              <ma14:wrappingTextBoxFlag xmlns:ma14="http://schemas.microsoft.com/office/mac/drawingml/2011/main" xmlns:a14="http://schemas.microsoft.com/office/drawing/2010/main" xmlns:m="http://schemas.openxmlformats.org/officeDocument/2006/math" xmlns="" val="1"/>
             </a:ext>
           </a:extLst>
         </p:spPr>
@@ -15730,7 +15730,7 @@
           </a:ln>
           <a:extLst>
             <a:ext uri="{C572A759-6A51-4108-AA02-DFA0A04FC94B}">
-              <ma14:wrappingTextBoxFlag xmlns="" xmlns:m="http://schemas.openxmlformats.org/officeDocument/2006/math" xmlns:a14="http://schemas.microsoft.com/office/drawing/2010/main" xmlns:ma14="http://schemas.microsoft.com/office/mac/drawingml/2011/main" val="1"/>
+              <ma14:wrappingTextBoxFlag xmlns:ma14="http://schemas.microsoft.com/office/mac/drawingml/2011/main" xmlns:a14="http://schemas.microsoft.com/office/drawing/2010/main" xmlns:m="http://schemas.openxmlformats.org/officeDocument/2006/math" xmlns="" val="1"/>
             </a:ext>
           </a:extLst>
         </p:spPr>
@@ -15777,7 +15777,7 @@
           </a:ln>
           <a:extLst>
             <a:ext uri="{C572A759-6A51-4108-AA02-DFA0A04FC94B}">
-              <ma14:wrappingTextBoxFlag xmlns="" xmlns:m="http://schemas.openxmlformats.org/officeDocument/2006/math" xmlns:a14="http://schemas.microsoft.com/office/drawing/2010/main" xmlns:ma14="http://schemas.microsoft.com/office/mac/drawingml/2011/main" val="1"/>
+              <ma14:wrappingTextBoxFlag xmlns:ma14="http://schemas.microsoft.com/office/mac/drawingml/2011/main" xmlns:a14="http://schemas.microsoft.com/office/drawing/2010/main" xmlns:m="http://schemas.openxmlformats.org/officeDocument/2006/math" xmlns="" val="1"/>
             </a:ext>
           </a:extLst>
         </p:spPr>
@@ -15865,7 +15865,7 @@
           </a:ln>
           <a:extLst>
             <a:ext uri="{C572A759-6A51-4108-AA02-DFA0A04FC94B}">
-              <ma14:wrappingTextBoxFlag xmlns="" xmlns:m="http://schemas.openxmlformats.org/officeDocument/2006/math" xmlns:a14="http://schemas.microsoft.com/office/drawing/2010/main" xmlns:ma14="http://schemas.microsoft.com/office/mac/drawingml/2011/main" val="1"/>
+              <ma14:wrappingTextBoxFlag xmlns:ma14="http://schemas.microsoft.com/office/mac/drawingml/2011/main" xmlns:a14="http://schemas.microsoft.com/office/drawing/2010/main" xmlns:m="http://schemas.openxmlformats.org/officeDocument/2006/math" xmlns="" val="1"/>
             </a:ext>
           </a:extLst>
         </p:spPr>
@@ -15951,7 +15951,7 @@
           </a:ln>
           <a:extLst>
             <a:ext uri="{C572A759-6A51-4108-AA02-DFA0A04FC94B}">
-              <ma14:wrappingTextBoxFlag xmlns="" xmlns:m="http://schemas.openxmlformats.org/officeDocument/2006/math" xmlns:a14="http://schemas.microsoft.com/office/drawing/2010/main" xmlns:ma14="http://schemas.microsoft.com/office/mac/drawingml/2011/main" val="1"/>
+              <ma14:wrappingTextBoxFlag xmlns:ma14="http://schemas.microsoft.com/office/mac/drawingml/2011/main" xmlns:a14="http://schemas.microsoft.com/office/drawing/2010/main" xmlns:m="http://schemas.openxmlformats.org/officeDocument/2006/math" xmlns="" val="1"/>
             </a:ext>
           </a:extLst>
         </p:spPr>
@@ -15998,7 +15998,7 @@
           </a:ln>
           <a:extLst>
             <a:ext uri="{C572A759-6A51-4108-AA02-DFA0A04FC94B}">
-              <ma14:wrappingTextBoxFlag xmlns="" xmlns:m="http://schemas.openxmlformats.org/officeDocument/2006/math" xmlns:a14="http://schemas.microsoft.com/office/drawing/2010/main" xmlns:ma14="http://schemas.microsoft.com/office/mac/drawingml/2011/main" val="1"/>
+              <ma14:wrappingTextBoxFlag xmlns:ma14="http://schemas.microsoft.com/office/mac/drawingml/2011/main" xmlns:a14="http://schemas.microsoft.com/office/drawing/2010/main" xmlns:m="http://schemas.openxmlformats.org/officeDocument/2006/math" xmlns="" val="1"/>
             </a:ext>
           </a:extLst>
         </p:spPr>
@@ -16086,7 +16086,7 @@
           </a:ln>
           <a:extLst>
             <a:ext uri="{C572A759-6A51-4108-AA02-DFA0A04FC94B}">
-              <ma14:wrappingTextBoxFlag xmlns="" xmlns:m="http://schemas.openxmlformats.org/officeDocument/2006/math" xmlns:a14="http://schemas.microsoft.com/office/drawing/2010/main" xmlns:ma14="http://schemas.microsoft.com/office/mac/drawingml/2011/main" val="1"/>
+              <ma14:wrappingTextBoxFlag xmlns:ma14="http://schemas.microsoft.com/office/mac/drawingml/2011/main" xmlns:a14="http://schemas.microsoft.com/office/drawing/2010/main" xmlns:m="http://schemas.openxmlformats.org/officeDocument/2006/math" xmlns="" val="1"/>
             </a:ext>
           </a:extLst>
         </p:spPr>
@@ -16166,76 +16166,31 @@
           <a:lstStyle/>
           <a:p>
             <a:r>
-              <a:rPr lang="en-GB" dirty="0">
+              <a:rPr lang="de-CH" noProof="0" dirty="0">
                 <a:solidFill>
                   <a:schemeClr val="tx1"/>
                 </a:solidFill>
               </a:rPr>
-              <a:t>Fehler </a:t>
-            </a:r>
-            <a:r>
-              <a:rPr lang="en-GB" dirty="0" err="1">
+              <a:t>Fehler unterschiedlich </a:t>
+            </a:r>
+          </a:p>
+          <a:p>
+            <a:r>
+              <a:rPr lang="de-CH" dirty="0">
                 <a:solidFill>
                   <a:schemeClr val="tx1"/>
                 </a:solidFill>
               </a:rPr>
-              <a:t>unterschiedlich</a:t>
-            </a:r>
-            <a:r>
-              <a:rPr lang="en-GB" dirty="0">
+              <a:t>v</a:t>
+            </a:r>
+            <a:r>
+              <a:rPr lang="de-CH" noProof="0" dirty="0">
                 <a:solidFill>
                   <a:schemeClr val="tx1"/>
                 </a:solidFill>
               </a:rPr>
-              <a:t> </a:t>
-            </a:r>
-          </a:p>
-          <a:p>
-            <a:r>
-              <a:rPr lang="en-GB" dirty="0" err="1">
-                <a:solidFill>
-                  <a:schemeClr val="tx1"/>
-                </a:solidFill>
-              </a:rPr>
-              <a:t>Verteilt</a:t>
-            </a:r>
-            <a:r>
-              <a:rPr lang="en-GB" dirty="0">
-                <a:solidFill>
-                  <a:schemeClr val="tx1"/>
-                </a:solidFill>
-              </a:rPr>
-              <a:t>, nicht </a:t>
-            </a:r>
-            <a:r>
-              <a:rPr lang="en-GB" dirty="0" err="1">
-                <a:solidFill>
-                  <a:schemeClr val="tx1"/>
-                </a:solidFill>
-              </a:rPr>
-              <a:t>systematisch</a:t>
-            </a:r>
-            <a:r>
-              <a:rPr lang="en-GB" dirty="0">
-                <a:solidFill>
-                  <a:schemeClr val="tx1"/>
-                </a:solidFill>
-              </a:rPr>
-              <a:t> </a:t>
-            </a:r>
-            <a:r>
-              <a:rPr lang="en-GB" dirty="0" err="1">
-                <a:solidFill>
-                  <a:schemeClr val="tx1"/>
-                </a:solidFill>
-              </a:rPr>
-              <a:t>gleich</a:t>
-            </a:r>
-            <a:endParaRPr lang="en-GB" dirty="0">
-              <a:solidFill>
-                <a:schemeClr val="tx1"/>
-              </a:solidFill>
-            </a:endParaRPr>
+              <a:t>erteilt, nicht systematisch gleich</a:t>
+            </a:r>
           </a:p>
         </p:txBody>
       </p:sp>
@@ -16284,7 +16239,7 @@
           </a:ln>
           <a:extLst>
             <a:ext uri="{C572A759-6A51-4108-AA02-DFA0A04FC94B}">
-              <ma14:wrappingTextBoxFlag xmlns="" xmlns:m="http://schemas.openxmlformats.org/officeDocument/2006/math" xmlns:a14="http://schemas.microsoft.com/office/drawing/2010/main" xmlns:ma14="http://schemas.microsoft.com/office/mac/drawingml/2011/main" val="1"/>
+              <ma14:wrappingTextBoxFlag xmlns:ma14="http://schemas.microsoft.com/office/mac/drawingml/2011/main" xmlns:a14="http://schemas.microsoft.com/office/drawing/2010/main" xmlns:m="http://schemas.openxmlformats.org/officeDocument/2006/math" xmlns="" val="1"/>
             </a:ext>
           </a:extLst>
         </p:spPr>
@@ -16356,7 +16311,7 @@
           </a:ln>
           <a:extLst>
             <a:ext uri="{C572A759-6A51-4108-AA02-DFA0A04FC94B}">
-              <ma14:wrappingTextBoxFlag xmlns="" xmlns:m="http://schemas.openxmlformats.org/officeDocument/2006/math" xmlns:a14="http://schemas.microsoft.com/office/drawing/2010/main" xmlns:ma14="http://schemas.microsoft.com/office/mac/drawingml/2011/main" val="1"/>
+              <ma14:wrappingTextBoxFlag xmlns:ma14="http://schemas.microsoft.com/office/mac/drawingml/2011/main" xmlns:a14="http://schemas.microsoft.com/office/drawing/2010/main" xmlns:m="http://schemas.openxmlformats.org/officeDocument/2006/math" xmlns="" val="1"/>
             </a:ext>
           </a:extLst>
         </p:spPr>
@@ -16400,7 +16355,7 @@
           </a:prstGeom>
           <a:extLst>
             <a:ext uri="{C572A759-6A51-4108-AA02-DFA0A04FC94B}">
-              <ma14:wrappingTextBoxFlag xmlns="" xmlns:m="http://schemas.openxmlformats.org/officeDocument/2006/math" xmlns:a14="http://schemas.microsoft.com/office/drawing/2010/main" xmlns:ma14="http://schemas.microsoft.com/office/mac/drawingml/2011/main" val="1"/>
+              <ma14:wrappingTextBoxFlag xmlns:ma14="http://schemas.microsoft.com/office/mac/drawingml/2011/main" xmlns:a14="http://schemas.microsoft.com/office/drawing/2010/main" xmlns:m="http://schemas.openxmlformats.org/officeDocument/2006/math" xmlns="" val="1"/>
             </a:ext>
           </a:extLst>
         </p:spPr>
@@ -16495,7 +16450,7 @@
           <a:lstStyle/>
           <a:p>
             <a:r>
-              <a:rPr lang="en-GB" sz="1600" dirty="0" err="1">
+              <a:rPr lang="de-CH" sz="1600" noProof="0" dirty="0" err="1">
                 <a:solidFill>
                   <a:schemeClr val="tx1"/>
                 </a:solidFill>
@@ -16503,45 +16458,41 @@
               <a:t>Xgboost</a:t>
             </a:r>
             <a:r>
-              <a:rPr lang="en-GB" sz="1600" dirty="0">
+              <a:rPr lang="de-CH" sz="1600" noProof="0" dirty="0">
                 <a:solidFill>
                   <a:schemeClr val="tx1"/>
                 </a:solidFill>
               </a:rPr>
-              <a:t> fast </a:t>
-            </a:r>
-            <a:r>
-              <a:rPr lang="en-GB" sz="1600" dirty="0" err="1">
-                <a:solidFill>
-                  <a:schemeClr val="tx1"/>
-                </a:solidFill>
-              </a:rPr>
-              <a:t>überall</a:t>
-            </a:r>
-            <a:r>
-              <a:rPr lang="en-GB" sz="1600" dirty="0">
-                <a:solidFill>
-                  <a:schemeClr val="tx1"/>
-                </a:solidFill>
-              </a:rPr>
-              <a:t> am </a:t>
-            </a:r>
-            <a:r>
-              <a:rPr lang="en-GB" sz="1600" dirty="0" err="1">
-                <a:solidFill>
-                  <a:schemeClr val="tx1"/>
-                </a:solidFill>
-              </a:rPr>
-              <a:t>besten</a:t>
-            </a:r>
-            <a:endParaRPr lang="en-GB" sz="1600" dirty="0">
+              <a:t> fast überall am besten</a:t>
+            </a:r>
+          </a:p>
+          <a:p>
+            <a:endParaRPr lang="de-CH" sz="1600" noProof="0" dirty="0">
               <a:solidFill>
                 <a:schemeClr val="tx1"/>
               </a:solidFill>
             </a:endParaRPr>
           </a:p>
           <a:p>
-            <a:endParaRPr lang="en-GB" sz="1600" dirty="0">
+            <a:r>
+              <a:rPr lang="de-CH" sz="1600" noProof="0" dirty="0" err="1">
+                <a:solidFill>
+                  <a:schemeClr val="tx1"/>
+                </a:solidFill>
+              </a:rPr>
+              <a:t>Kindle_Store</a:t>
+            </a:r>
+            <a:r>
+              <a:rPr lang="de-CH" sz="1600" noProof="0" dirty="0">
+                <a:solidFill>
+                  <a:schemeClr val="tx1"/>
+                </a:solidFill>
+              </a:rPr>
+              <a:t> für FCNN einfach</a:t>
+            </a:r>
+          </a:p>
+          <a:p>
+            <a:endParaRPr lang="de-CH" sz="1600" noProof="0" dirty="0">
               <a:solidFill>
                 <a:schemeClr val="tx1"/>
               </a:solidFill>
@@ -16549,149 +16500,63 @@
           </a:p>
           <a:p>
             <a:r>
-              <a:rPr lang="en-GB" sz="1600" dirty="0" err="1">
+              <a:rPr lang="de-CH" sz="1600" noProof="0" dirty="0">
                 <a:solidFill>
                   <a:schemeClr val="tx1"/>
                 </a:solidFill>
               </a:rPr>
-              <a:t>Kindle_Store</a:t>
-            </a:r>
-            <a:r>
-              <a:rPr lang="en-GB" sz="1600" dirty="0">
+              <a:t>Sports &amp; </a:t>
+            </a:r>
+            <a:r>
+              <a:rPr lang="de-CH" sz="1600" noProof="0" dirty="0" err="1">
                 <a:solidFill>
                   <a:schemeClr val="tx1"/>
                 </a:solidFill>
               </a:rPr>
-              <a:t> für FCNN </a:t>
-            </a:r>
-            <a:r>
-              <a:rPr lang="en-GB" sz="1600" dirty="0" err="1">
+              <a:t>Outdoors</a:t>
+            </a:r>
+            <a:r>
+              <a:rPr lang="de-CH" sz="1600" noProof="0" dirty="0">
                 <a:solidFill>
                   <a:schemeClr val="tx1"/>
                 </a:solidFill>
               </a:rPr>
-              <a:t>einfach</a:t>
-            </a:r>
-            <a:endParaRPr lang="en-GB" sz="1600" dirty="0">
+              <a:t> ist auffällig:</a:t>
+            </a:r>
+            <a:br>
+              <a:rPr lang="de-CH" sz="1600" noProof="0" dirty="0">
+                <a:solidFill>
+                  <a:schemeClr val="tx1"/>
+                </a:solidFill>
+              </a:rPr>
+            </a:br>
+            <a:r>
+              <a:rPr lang="de-CH" sz="1600" noProof="0" dirty="0" err="1">
+                <a:solidFill>
+                  <a:schemeClr val="tx1"/>
+                </a:solidFill>
+              </a:rPr>
+              <a:t>xgboost</a:t>
+            </a:r>
+            <a:r>
+              <a:rPr lang="de-CH" sz="1600" noProof="0" dirty="0">
+                <a:solidFill>
+                  <a:schemeClr val="tx1"/>
+                </a:solidFill>
+              </a:rPr>
+              <a:t> 5% besser als FCNN</a:t>
+            </a:r>
+          </a:p>
+          <a:p>
+            <a:endParaRPr lang="de-CH" sz="1600" noProof="0" dirty="0">
               <a:solidFill>
                 <a:schemeClr val="tx1"/>
               </a:solidFill>
             </a:endParaRPr>
           </a:p>
           <a:p>
-            <a:endParaRPr lang="en-GB" sz="1600" dirty="0">
-              <a:solidFill>
-                <a:schemeClr val="tx1"/>
-              </a:solidFill>
-            </a:endParaRPr>
-          </a:p>
-          <a:p>
-            <a:r>
-              <a:rPr lang="en-GB" sz="1600" dirty="0">
-                <a:solidFill>
-                  <a:schemeClr val="tx1"/>
-                </a:solidFill>
-              </a:rPr>
-              <a:t>Sports &amp; Outdoors </a:t>
-            </a:r>
-            <a:r>
-              <a:rPr lang="en-GB" sz="1600" dirty="0" err="1">
-                <a:solidFill>
-                  <a:schemeClr val="tx1"/>
-                </a:solidFill>
-              </a:rPr>
-              <a:t>ist</a:t>
-            </a:r>
-            <a:r>
-              <a:rPr lang="en-GB" sz="1600" dirty="0">
-                <a:solidFill>
-                  <a:schemeClr val="tx1"/>
-                </a:solidFill>
-              </a:rPr>
-              <a:t> </a:t>
-            </a:r>
-            <a:r>
-              <a:rPr lang="en-GB" sz="1600" dirty="0" err="1">
-                <a:solidFill>
-                  <a:schemeClr val="tx1"/>
-                </a:solidFill>
-              </a:rPr>
-              <a:t>auffällig</a:t>
-            </a:r>
-            <a:r>
-              <a:rPr lang="en-GB" sz="1600" dirty="0">
-                <a:solidFill>
-                  <a:schemeClr val="tx1"/>
-                </a:solidFill>
-              </a:rPr>
-              <a:t>:</a:t>
-            </a:r>
-            <a:br>
-              <a:rPr lang="en-GB" sz="1600" dirty="0">
-                <a:solidFill>
-                  <a:schemeClr val="tx1"/>
-                </a:solidFill>
-              </a:rPr>
-            </a:br>
-            <a:r>
-              <a:rPr lang="en-GB" sz="1600" dirty="0" err="1">
-                <a:solidFill>
-                  <a:schemeClr val="tx1"/>
-                </a:solidFill>
-              </a:rPr>
-              <a:t>xgboost</a:t>
-            </a:r>
-            <a:r>
-              <a:rPr lang="en-GB" sz="1600" dirty="0">
-                <a:solidFill>
-                  <a:schemeClr val="tx1"/>
-                </a:solidFill>
-              </a:rPr>
-              <a:t> 5% </a:t>
-            </a:r>
-            <a:r>
-              <a:rPr lang="en-GB" sz="1600" dirty="0" err="1">
-                <a:solidFill>
-                  <a:schemeClr val="tx1"/>
-                </a:solidFill>
-              </a:rPr>
-              <a:t>besser</a:t>
-            </a:r>
-            <a:r>
-              <a:rPr lang="en-GB" sz="1600" dirty="0">
-                <a:solidFill>
-                  <a:schemeClr val="tx1"/>
-                </a:solidFill>
-              </a:rPr>
-              <a:t> </a:t>
-            </a:r>
-            <a:r>
-              <a:rPr lang="en-GB" sz="1600" dirty="0" err="1">
-                <a:solidFill>
-                  <a:schemeClr val="tx1"/>
-                </a:solidFill>
-              </a:rPr>
-              <a:t>als</a:t>
-            </a:r>
-            <a:r>
-              <a:rPr lang="en-GB" sz="1600" dirty="0">
-                <a:solidFill>
-                  <a:schemeClr val="tx1"/>
-                </a:solidFill>
-              </a:rPr>
-              <a:t> FCNN</a:t>
-            </a:r>
-          </a:p>
-          <a:p>
-            <a:endParaRPr lang="en-GB" sz="1600" dirty="0">
-              <a:solidFill>
-                <a:schemeClr val="tx1"/>
-              </a:solidFill>
-            </a:endParaRPr>
-          </a:p>
-          <a:p>
-            <a:r>
-              <a:rPr lang="en-GB" sz="1600" dirty="0" err="1">
+            <a:r>
+              <a:rPr lang="de-CH" sz="1600" noProof="0" dirty="0" err="1">
                 <a:solidFill>
                   <a:schemeClr val="tx1"/>
                 </a:solidFill>
@@ -16699,20 +16564,12 @@
               <a:t>Movies_and_TV</a:t>
             </a:r>
             <a:r>
-              <a:rPr lang="en-GB" sz="1600" dirty="0">
+              <a:rPr lang="de-CH" sz="1600" noProof="0" dirty="0">
                 <a:solidFill>
                   <a:schemeClr val="tx1"/>
                 </a:solidFill>
               </a:rPr>
-              <a:t> für alle </a:t>
-            </a:r>
-            <a:r>
-              <a:rPr lang="en-GB" sz="1600" dirty="0" err="1">
-                <a:solidFill>
-                  <a:schemeClr val="tx1"/>
-                </a:solidFill>
-              </a:rPr>
-              <a:t>schwierig</a:t>
+              <a:t> für alle schwierig</a:t>
             </a:r>
             <a:endParaRPr lang="en-GB" sz="1600" dirty="0">
               <a:solidFill>
@@ -16767,7 +16624,7 @@
           </a:ln>
           <a:extLst>
             <a:ext uri="{C572A759-6A51-4108-AA02-DFA0A04FC94B}">
-              <ma14:wrappingTextBoxFlag xmlns="" xmlns:m="http://schemas.openxmlformats.org/officeDocument/2006/math" xmlns:a14="http://schemas.microsoft.com/office/drawing/2010/main" xmlns:ma14="http://schemas.microsoft.com/office/mac/drawingml/2011/main" val="1"/>
+              <ma14:wrappingTextBoxFlag xmlns:ma14="http://schemas.microsoft.com/office/mac/drawingml/2011/main" xmlns:a14="http://schemas.microsoft.com/office/drawing/2010/main" xmlns:m="http://schemas.openxmlformats.org/officeDocument/2006/math" xmlns="" val="1"/>
             </a:ext>
           </a:extLst>
         </p:spPr>
@@ -16839,7 +16696,7 @@
           </a:ln>
           <a:extLst>
             <a:ext uri="{C572A759-6A51-4108-AA02-DFA0A04FC94B}">
-              <ma14:wrappingTextBoxFlag xmlns="" xmlns:m="http://schemas.openxmlformats.org/officeDocument/2006/math" xmlns:a14="http://schemas.microsoft.com/office/drawing/2010/main" xmlns:ma14="http://schemas.microsoft.com/office/mac/drawingml/2011/main" val="1"/>
+              <ma14:wrappingTextBoxFlag xmlns:ma14="http://schemas.microsoft.com/office/mac/drawingml/2011/main" xmlns:a14="http://schemas.microsoft.com/office/drawing/2010/main" xmlns:m="http://schemas.openxmlformats.org/officeDocument/2006/math" xmlns="" val="1"/>
             </a:ext>
           </a:extLst>
         </p:spPr>
@@ -16883,7 +16740,7 @@
           </a:prstGeom>
           <a:extLst>
             <a:ext uri="{C572A759-6A51-4108-AA02-DFA0A04FC94B}">
-              <ma14:wrappingTextBoxFlag xmlns="" xmlns:m="http://schemas.openxmlformats.org/officeDocument/2006/math" xmlns:a14="http://schemas.microsoft.com/office/drawing/2010/main" xmlns:ma14="http://schemas.microsoft.com/office/mac/drawingml/2011/main" val="1"/>
+              <ma14:wrappingTextBoxFlag xmlns:ma14="http://schemas.microsoft.com/office/mac/drawingml/2011/main" xmlns:a14="http://schemas.microsoft.com/office/drawing/2010/main" xmlns:m="http://schemas.openxmlformats.org/officeDocument/2006/math" xmlns="" val="1"/>
             </a:ext>
           </a:extLst>
         </p:spPr>
@@ -17416,7 +17273,7 @@
           </a:ln>
           <a:extLst>
             <a:ext uri="{C572A759-6A51-4108-AA02-DFA0A04FC94B}">
-              <ma14:wrappingTextBoxFlag xmlns="" xmlns:m="http://schemas.openxmlformats.org/officeDocument/2006/math" xmlns:a14="http://schemas.microsoft.com/office/drawing/2010/main" xmlns:ma14="http://schemas.microsoft.com/office/mac/drawingml/2011/main" val="1"/>
+              <ma14:wrappingTextBoxFlag xmlns:ma14="http://schemas.microsoft.com/office/mac/drawingml/2011/main" xmlns:a14="http://schemas.microsoft.com/office/drawing/2010/main" xmlns:m="http://schemas.openxmlformats.org/officeDocument/2006/math" xmlns="" val="1"/>
             </a:ext>
           </a:extLst>
         </p:spPr>
@@ -17488,7 +17345,7 @@
           </a:ln>
           <a:extLst>
             <a:ext uri="{C572A759-6A51-4108-AA02-DFA0A04FC94B}">
-              <ma14:wrappingTextBoxFlag xmlns="" xmlns:m="http://schemas.openxmlformats.org/officeDocument/2006/math" xmlns:a14="http://schemas.microsoft.com/office/drawing/2010/main" xmlns:ma14="http://schemas.microsoft.com/office/mac/drawingml/2011/main" val="1"/>
+              <ma14:wrappingTextBoxFlag xmlns:ma14="http://schemas.microsoft.com/office/mac/drawingml/2011/main" xmlns:a14="http://schemas.microsoft.com/office/drawing/2010/main" xmlns:m="http://schemas.openxmlformats.org/officeDocument/2006/math" xmlns="" val="1"/>
             </a:ext>
           </a:extLst>
         </p:spPr>
@@ -17532,7 +17389,7 @@
           </a:prstGeom>
           <a:extLst>
             <a:ext uri="{C572A759-6A51-4108-AA02-DFA0A04FC94B}">
-              <ma14:wrappingTextBoxFlag xmlns="" xmlns:m="http://schemas.openxmlformats.org/officeDocument/2006/math" xmlns:a14="http://schemas.microsoft.com/office/drawing/2010/main" xmlns:ma14="http://schemas.microsoft.com/office/mac/drawingml/2011/main" val="1"/>
+              <ma14:wrappingTextBoxFlag xmlns:ma14="http://schemas.microsoft.com/office/mac/drawingml/2011/main" xmlns:a14="http://schemas.microsoft.com/office/drawing/2010/main" xmlns:m="http://schemas.openxmlformats.org/officeDocument/2006/math" xmlns="" val="1"/>
             </a:ext>
           </a:extLst>
         </p:spPr>
@@ -17743,7 +17600,7 @@
           </a:ln>
           <a:extLst>
             <a:ext uri="{C572A759-6A51-4108-AA02-DFA0A04FC94B}">
-              <ma14:wrappingTextBoxFlag xmlns="" xmlns:m="http://schemas.openxmlformats.org/officeDocument/2006/math" xmlns:a14="http://schemas.microsoft.com/office/drawing/2010/main" xmlns:ma14="http://schemas.microsoft.com/office/mac/drawingml/2011/main" val="1"/>
+              <ma14:wrappingTextBoxFlag xmlns:ma14="http://schemas.microsoft.com/office/mac/drawingml/2011/main" xmlns:a14="http://schemas.microsoft.com/office/drawing/2010/main" xmlns:m="http://schemas.openxmlformats.org/officeDocument/2006/math" xmlns="" val="1"/>
             </a:ext>
           </a:extLst>
         </p:spPr>
@@ -17820,7 +17677,7 @@
           </a:ln>
           <a:extLst>
             <a:ext uri="{C572A759-6A51-4108-AA02-DFA0A04FC94B}">
-              <ma14:wrappingTextBoxFlag xmlns="" xmlns:m="http://schemas.openxmlformats.org/officeDocument/2006/math" xmlns:a14="http://schemas.microsoft.com/office/drawing/2010/main" xmlns:ma14="http://schemas.microsoft.com/office/mac/drawingml/2011/main" val="1"/>
+              <ma14:wrappingTextBoxFlag xmlns:ma14="http://schemas.microsoft.com/office/mac/drawingml/2011/main" xmlns:a14="http://schemas.microsoft.com/office/drawing/2010/main" xmlns:m="http://schemas.openxmlformats.org/officeDocument/2006/math" xmlns="" val="1"/>
             </a:ext>
           </a:extLst>
         </p:spPr>
@@ -17864,7 +17721,7 @@
           </a:prstGeom>
           <a:extLst>
             <a:ext uri="{C572A759-6A51-4108-AA02-DFA0A04FC94B}">
-              <ma14:wrappingTextBoxFlag xmlns="" xmlns:m="http://schemas.openxmlformats.org/officeDocument/2006/math" xmlns:a14="http://schemas.microsoft.com/office/drawing/2010/main" xmlns:ma14="http://schemas.microsoft.com/office/mac/drawingml/2011/main" val="1"/>
+              <ma14:wrappingTextBoxFlag xmlns:ma14="http://schemas.microsoft.com/office/mac/drawingml/2011/main" xmlns:a14="http://schemas.microsoft.com/office/drawing/2010/main" xmlns:m="http://schemas.openxmlformats.org/officeDocument/2006/math" xmlns="" val="1"/>
             </a:ext>
           </a:extLst>
         </p:spPr>
@@ -17899,7 +17756,7 @@
           </a:ln>
           <a:extLst>
             <a:ext uri="{C572A759-6A51-4108-AA02-DFA0A04FC94B}">
-              <ma14:wrappingTextBoxFlag xmlns="" xmlns:m="http://schemas.openxmlformats.org/officeDocument/2006/math" xmlns:a14="http://schemas.microsoft.com/office/drawing/2010/main" xmlns:ma14="http://schemas.microsoft.com/office/mac/drawingml/2011/main" val="1"/>
+              <ma14:wrappingTextBoxFlag xmlns:ma14="http://schemas.microsoft.com/office/mac/drawingml/2011/main" xmlns:a14="http://schemas.microsoft.com/office/drawing/2010/main" xmlns:m="http://schemas.openxmlformats.org/officeDocument/2006/math" xmlns="" val="1"/>
             </a:ext>
           </a:extLst>
         </p:spPr>
@@ -17993,7 +17850,7 @@
           </a:ln>
           <a:extLst>
             <a:ext uri="{C572A759-6A51-4108-AA02-DFA0A04FC94B}">
-              <ma14:wrappingTextBoxFlag xmlns="" xmlns:m="http://schemas.openxmlformats.org/officeDocument/2006/math" xmlns:a14="http://schemas.microsoft.com/office/drawing/2010/main" xmlns:ma14="http://schemas.microsoft.com/office/mac/drawingml/2011/main" val="1"/>
+              <ma14:wrappingTextBoxFlag xmlns:ma14="http://schemas.microsoft.com/office/mac/drawingml/2011/main" xmlns:a14="http://schemas.microsoft.com/office/drawing/2010/main" xmlns:m="http://schemas.openxmlformats.org/officeDocument/2006/math" xmlns="" val="1"/>
             </a:ext>
           </a:extLst>
         </p:spPr>
@@ -18108,7 +17965,7 @@
             <a:effectLst/>
             <a:extLst>
               <a:ext uri="{C572A759-6A51-4108-AA02-DFA0A04FC94B}">
-                <ma14:wrappingTextBoxFlag xmlns="" xmlns:m="http://schemas.openxmlformats.org/officeDocument/2006/math" xmlns:a14="http://schemas.microsoft.com/office/drawing/2010/main" xmlns:ma14="http://schemas.microsoft.com/office/mac/drawingml/2011/main" val="1"/>
+                <ma14:wrappingTextBoxFlag xmlns:ma14="http://schemas.microsoft.com/office/mac/drawingml/2011/main" xmlns:a14="http://schemas.microsoft.com/office/drawing/2010/main" xmlns:m="http://schemas.openxmlformats.org/officeDocument/2006/math" xmlns="" val="1"/>
               </a:ext>
             </a:extLst>
           </p:spPr>
@@ -18156,7 +18013,7 @@
           </a:ln>
           <a:extLst>
             <a:ext uri="{C572A759-6A51-4108-AA02-DFA0A04FC94B}">
-              <ma14:wrappingTextBoxFlag xmlns="" xmlns:m="http://schemas.openxmlformats.org/officeDocument/2006/math" xmlns:a14="http://schemas.microsoft.com/office/drawing/2010/main" xmlns:ma14="http://schemas.microsoft.com/office/mac/drawingml/2011/main" val="1"/>
+              <ma14:wrappingTextBoxFlag xmlns:ma14="http://schemas.microsoft.com/office/mac/drawingml/2011/main" xmlns:a14="http://schemas.microsoft.com/office/drawing/2010/main" xmlns:m="http://schemas.openxmlformats.org/officeDocument/2006/math" xmlns="" val="1"/>
             </a:ext>
           </a:extLst>
         </p:spPr>
@@ -18310,7 +18167,7 @@
             <a:effectLst/>
             <a:extLst>
               <a:ext uri="{C572A759-6A51-4108-AA02-DFA0A04FC94B}">
-                <ma14:wrappingTextBoxFlag xmlns="" xmlns:m="http://schemas.openxmlformats.org/officeDocument/2006/math" xmlns:a14="http://schemas.microsoft.com/office/drawing/2010/main" xmlns:ma14="http://schemas.microsoft.com/office/mac/drawingml/2011/main" val="1"/>
+                <ma14:wrappingTextBoxFlag xmlns:ma14="http://schemas.microsoft.com/office/mac/drawingml/2011/main" xmlns:a14="http://schemas.microsoft.com/office/drawing/2010/main" xmlns:m="http://schemas.openxmlformats.org/officeDocument/2006/math" xmlns="" val="1"/>
               </a:ext>
             </a:extLst>
           </p:spPr>
@@ -18358,7 +18215,7 @@
           </a:ln>
           <a:extLst>
             <a:ext uri="{C572A759-6A51-4108-AA02-DFA0A04FC94B}">
-              <ma14:wrappingTextBoxFlag xmlns="" xmlns:m="http://schemas.openxmlformats.org/officeDocument/2006/math" xmlns:a14="http://schemas.microsoft.com/office/drawing/2010/main" xmlns:ma14="http://schemas.microsoft.com/office/mac/drawingml/2011/main" val="1"/>
+              <ma14:wrappingTextBoxFlag xmlns:ma14="http://schemas.microsoft.com/office/mac/drawingml/2011/main" xmlns:a14="http://schemas.microsoft.com/office/drawing/2010/main" xmlns:m="http://schemas.openxmlformats.org/officeDocument/2006/math" xmlns="" val="1"/>
             </a:ext>
           </a:extLst>
         </p:spPr>
@@ -18484,7 +18341,7 @@
             <a:effectLst/>
             <a:extLst>
               <a:ext uri="{C572A759-6A51-4108-AA02-DFA0A04FC94B}">
-                <ma14:wrappingTextBoxFlag xmlns="" xmlns:m="http://schemas.openxmlformats.org/officeDocument/2006/math" xmlns:a14="http://schemas.microsoft.com/office/drawing/2010/main" xmlns:ma14="http://schemas.microsoft.com/office/mac/drawingml/2011/main" val="1"/>
+                <ma14:wrappingTextBoxFlag xmlns:ma14="http://schemas.microsoft.com/office/mac/drawingml/2011/main" xmlns:a14="http://schemas.microsoft.com/office/drawing/2010/main" xmlns:m="http://schemas.openxmlformats.org/officeDocument/2006/math" xmlns="" val="1"/>
               </a:ext>
             </a:extLst>
           </p:spPr>
@@ -18532,7 +18389,7 @@
           </a:ln>
           <a:extLst>
             <a:ext uri="{C572A759-6A51-4108-AA02-DFA0A04FC94B}">
-              <ma14:wrappingTextBoxFlag xmlns="" xmlns:m="http://schemas.openxmlformats.org/officeDocument/2006/math" xmlns:a14="http://schemas.microsoft.com/office/drawing/2010/main" xmlns:ma14="http://schemas.microsoft.com/office/mac/drawingml/2011/main" val="1"/>
+              <ma14:wrappingTextBoxFlag xmlns:ma14="http://schemas.microsoft.com/office/mac/drawingml/2011/main" xmlns:a14="http://schemas.microsoft.com/office/drawing/2010/main" xmlns:m="http://schemas.openxmlformats.org/officeDocument/2006/math" xmlns="" val="1"/>
             </a:ext>
           </a:extLst>
         </p:spPr>
@@ -18658,7 +18515,7 @@
             <a:effectLst/>
             <a:extLst>
               <a:ext uri="{C572A759-6A51-4108-AA02-DFA0A04FC94B}">
-                <ma14:wrappingTextBoxFlag xmlns="" xmlns:m="http://schemas.openxmlformats.org/officeDocument/2006/math" xmlns:a14="http://schemas.microsoft.com/office/drawing/2010/main" xmlns:ma14="http://schemas.microsoft.com/office/mac/drawingml/2011/main" val="1"/>
+                <ma14:wrappingTextBoxFlag xmlns:ma14="http://schemas.microsoft.com/office/mac/drawingml/2011/main" xmlns:a14="http://schemas.microsoft.com/office/drawing/2010/main" xmlns:m="http://schemas.openxmlformats.org/officeDocument/2006/math" xmlns="" val="1"/>
               </a:ext>
             </a:extLst>
           </p:spPr>
@@ -18706,7 +18563,7 @@
           </a:ln>
           <a:extLst>
             <a:ext uri="{C572A759-6A51-4108-AA02-DFA0A04FC94B}">
-              <ma14:wrappingTextBoxFlag xmlns="" xmlns:m="http://schemas.openxmlformats.org/officeDocument/2006/math" xmlns:a14="http://schemas.microsoft.com/office/drawing/2010/main" xmlns:ma14="http://schemas.microsoft.com/office/mac/drawingml/2011/main" val="1"/>
+              <ma14:wrappingTextBoxFlag xmlns:ma14="http://schemas.microsoft.com/office/mac/drawingml/2011/main" xmlns:a14="http://schemas.microsoft.com/office/drawing/2010/main" xmlns:m="http://schemas.openxmlformats.org/officeDocument/2006/math" xmlns="" val="1"/>
             </a:ext>
           </a:extLst>
         </p:spPr>
@@ -18860,7 +18717,7 @@
             <a:effectLst/>
             <a:extLst>
               <a:ext uri="{C572A759-6A51-4108-AA02-DFA0A04FC94B}">
-                <ma14:wrappingTextBoxFlag xmlns="" xmlns:m="http://schemas.openxmlformats.org/officeDocument/2006/math" xmlns:a14="http://schemas.microsoft.com/office/drawing/2010/main" xmlns:ma14="http://schemas.microsoft.com/office/mac/drawingml/2011/main" val="1"/>
+                <ma14:wrappingTextBoxFlag xmlns:ma14="http://schemas.microsoft.com/office/mac/drawingml/2011/main" xmlns:a14="http://schemas.microsoft.com/office/drawing/2010/main" xmlns:m="http://schemas.openxmlformats.org/officeDocument/2006/math" xmlns="" val="1"/>
               </a:ext>
             </a:extLst>
           </p:spPr>
@@ -18908,7 +18765,7 @@
           </a:ln>
           <a:extLst>
             <a:ext uri="{C572A759-6A51-4108-AA02-DFA0A04FC94B}">
-              <ma14:wrappingTextBoxFlag xmlns="" xmlns:m="http://schemas.openxmlformats.org/officeDocument/2006/math" xmlns:a14="http://schemas.microsoft.com/office/drawing/2010/main" xmlns:ma14="http://schemas.microsoft.com/office/mac/drawingml/2011/main" val="1"/>
+              <ma14:wrappingTextBoxFlag xmlns:ma14="http://schemas.microsoft.com/office/mac/drawingml/2011/main" xmlns:a14="http://schemas.microsoft.com/office/drawing/2010/main" xmlns:m="http://schemas.openxmlformats.org/officeDocument/2006/math" xmlns="" val="1"/>
             </a:ext>
           </a:extLst>
         </p:spPr>
@@ -19013,7 +18870,7 @@
           </a:ln>
           <a:extLst>
             <a:ext uri="{C572A759-6A51-4108-AA02-DFA0A04FC94B}">
-              <ma14:wrappingTextBoxFlag xmlns="" xmlns:m="http://schemas.openxmlformats.org/officeDocument/2006/math" xmlns:a14="http://schemas.microsoft.com/office/drawing/2010/main" xmlns:ma14="http://schemas.microsoft.com/office/mac/drawingml/2011/main" val="1"/>
+              <ma14:wrappingTextBoxFlag xmlns:ma14="http://schemas.microsoft.com/office/mac/drawingml/2011/main" xmlns:a14="http://schemas.microsoft.com/office/drawing/2010/main" xmlns:m="http://schemas.openxmlformats.org/officeDocument/2006/math" xmlns="" val="1"/>
             </a:ext>
           </a:extLst>
         </p:spPr>
@@ -19146,7 +19003,7 @@
             <a:effectLst/>
             <a:extLst>
               <a:ext uri="{C572A759-6A51-4108-AA02-DFA0A04FC94B}">
-                <ma14:wrappingTextBoxFlag xmlns="" xmlns:m="http://schemas.openxmlformats.org/officeDocument/2006/math" xmlns:a14="http://schemas.microsoft.com/office/drawing/2010/main" xmlns:ma14="http://schemas.microsoft.com/office/mac/drawingml/2011/main" val="1"/>
+                <ma14:wrappingTextBoxFlag xmlns:ma14="http://schemas.microsoft.com/office/mac/drawingml/2011/main" xmlns:a14="http://schemas.microsoft.com/office/drawing/2010/main" xmlns:m="http://schemas.openxmlformats.org/officeDocument/2006/math" xmlns="" val="1"/>
               </a:ext>
             </a:extLst>
           </p:spPr>
@@ -19194,7 +19051,7 @@
           </a:ln>
           <a:extLst>
             <a:ext uri="{C572A759-6A51-4108-AA02-DFA0A04FC94B}">
-              <ma14:wrappingTextBoxFlag xmlns="" xmlns:m="http://schemas.openxmlformats.org/officeDocument/2006/math" xmlns:a14="http://schemas.microsoft.com/office/drawing/2010/main" xmlns:ma14="http://schemas.microsoft.com/office/mac/drawingml/2011/main" val="1"/>
+              <ma14:wrappingTextBoxFlag xmlns:ma14="http://schemas.microsoft.com/office/mac/drawingml/2011/main" xmlns:a14="http://schemas.microsoft.com/office/drawing/2010/main" xmlns:m="http://schemas.openxmlformats.org/officeDocument/2006/math" xmlns="" val="1"/>
             </a:ext>
           </a:extLst>
         </p:spPr>
@@ -19335,7 +19192,7 @@
           </a:ln>
           <a:extLst>
             <a:ext uri="{C572A759-6A51-4108-AA02-DFA0A04FC94B}">
-              <ma14:wrappingTextBoxFlag xmlns="" xmlns:m="http://schemas.openxmlformats.org/officeDocument/2006/math" xmlns:a14="http://schemas.microsoft.com/office/drawing/2010/main" xmlns:ma14="http://schemas.microsoft.com/office/mac/drawingml/2011/main" val="1"/>
+              <ma14:wrappingTextBoxFlag xmlns:ma14="http://schemas.microsoft.com/office/mac/drawingml/2011/main" xmlns:a14="http://schemas.microsoft.com/office/drawing/2010/main" xmlns:m="http://schemas.openxmlformats.org/officeDocument/2006/math" xmlns="" val="1"/>
             </a:ext>
           </a:extLst>
         </p:spPr>
@@ -19382,7 +19239,7 @@
           </a:ln>
           <a:extLst>
             <a:ext uri="{C572A759-6A51-4108-AA02-DFA0A04FC94B}">
-              <ma14:wrappingTextBoxFlag xmlns="" xmlns:m="http://schemas.openxmlformats.org/officeDocument/2006/math" xmlns:a14="http://schemas.microsoft.com/office/drawing/2010/main" xmlns:ma14="http://schemas.microsoft.com/office/mac/drawingml/2011/main" val="1"/>
+              <ma14:wrappingTextBoxFlag xmlns:ma14="http://schemas.microsoft.com/office/mac/drawingml/2011/main" xmlns:a14="http://schemas.microsoft.com/office/drawing/2010/main" xmlns:m="http://schemas.openxmlformats.org/officeDocument/2006/math" xmlns="" val="1"/>
             </a:ext>
           </a:extLst>
         </p:spPr>
@@ -19523,7 +19380,7 @@
           </a:ln>
           <a:extLst>
             <a:ext uri="{C572A759-6A51-4108-AA02-DFA0A04FC94B}">
-              <ma14:wrappingTextBoxFlag xmlns="" xmlns:m="http://schemas.openxmlformats.org/officeDocument/2006/math" xmlns:a14="http://schemas.microsoft.com/office/drawing/2010/main" xmlns:ma14="http://schemas.microsoft.com/office/mac/drawingml/2011/main" val="1"/>
+              <ma14:wrappingTextBoxFlag xmlns:ma14="http://schemas.microsoft.com/office/mac/drawingml/2011/main" xmlns:a14="http://schemas.microsoft.com/office/drawing/2010/main" xmlns:m="http://schemas.openxmlformats.org/officeDocument/2006/math" xmlns="" val="1"/>
             </a:ext>
           </a:extLst>
         </p:spPr>
@@ -19570,7 +19427,7 @@
           </a:ln>
           <a:extLst>
             <a:ext uri="{C572A759-6A51-4108-AA02-DFA0A04FC94B}">
-              <ma14:wrappingTextBoxFlag xmlns="" xmlns:m="http://schemas.openxmlformats.org/officeDocument/2006/math" xmlns:a14="http://schemas.microsoft.com/office/drawing/2010/main" xmlns:ma14="http://schemas.microsoft.com/office/mac/drawingml/2011/main" val="1"/>
+              <ma14:wrappingTextBoxFlag xmlns:ma14="http://schemas.microsoft.com/office/mac/drawingml/2011/main" xmlns:a14="http://schemas.microsoft.com/office/drawing/2010/main" xmlns:m="http://schemas.openxmlformats.org/officeDocument/2006/math" xmlns="" val="1"/>
             </a:ext>
           </a:extLst>
         </p:spPr>
@@ -19711,7 +19568,7 @@
           </a:ln>
           <a:extLst>
             <a:ext uri="{C572A759-6A51-4108-AA02-DFA0A04FC94B}">
-              <ma14:wrappingTextBoxFlag xmlns="" xmlns:m="http://schemas.openxmlformats.org/officeDocument/2006/math" xmlns:a14="http://schemas.microsoft.com/office/drawing/2010/main" xmlns:ma14="http://schemas.microsoft.com/office/mac/drawingml/2011/main" val="1"/>
+              <ma14:wrappingTextBoxFlag xmlns:ma14="http://schemas.microsoft.com/office/mac/drawingml/2011/main" xmlns:a14="http://schemas.microsoft.com/office/drawing/2010/main" xmlns:m="http://schemas.openxmlformats.org/officeDocument/2006/math" xmlns="" val="1"/>
             </a:ext>
           </a:extLst>
         </p:spPr>
@@ -19758,7 +19615,7 @@
           </a:ln>
           <a:extLst>
             <a:ext uri="{C572A759-6A51-4108-AA02-DFA0A04FC94B}">
-              <ma14:wrappingTextBoxFlag xmlns="" xmlns:m="http://schemas.openxmlformats.org/officeDocument/2006/math" xmlns:a14="http://schemas.microsoft.com/office/drawing/2010/main" xmlns:ma14="http://schemas.microsoft.com/office/mac/drawingml/2011/main" val="1"/>
+              <ma14:wrappingTextBoxFlag xmlns:ma14="http://schemas.microsoft.com/office/mac/drawingml/2011/main" xmlns:a14="http://schemas.microsoft.com/office/drawing/2010/main" xmlns:m="http://schemas.openxmlformats.org/officeDocument/2006/math" xmlns="" val="1"/>
             </a:ext>
           </a:extLst>
         </p:spPr>
@@ -19899,7 +19756,7 @@
           </a:ln>
           <a:extLst>
             <a:ext uri="{C572A759-6A51-4108-AA02-DFA0A04FC94B}">
-              <ma14:wrappingTextBoxFlag xmlns="" xmlns:m="http://schemas.openxmlformats.org/officeDocument/2006/math" xmlns:a14="http://schemas.microsoft.com/office/drawing/2010/main" xmlns:ma14="http://schemas.microsoft.com/office/mac/drawingml/2011/main" val="1"/>
+              <ma14:wrappingTextBoxFlag xmlns:ma14="http://schemas.microsoft.com/office/mac/drawingml/2011/main" xmlns:a14="http://schemas.microsoft.com/office/drawing/2010/main" xmlns:m="http://schemas.openxmlformats.org/officeDocument/2006/math" xmlns="" val="1"/>
             </a:ext>
           </a:extLst>
         </p:spPr>
@@ -19946,7 +19803,7 @@
           </a:ln>
           <a:extLst>
             <a:ext uri="{C572A759-6A51-4108-AA02-DFA0A04FC94B}">
-              <ma14:wrappingTextBoxFlag xmlns="" xmlns:m="http://schemas.openxmlformats.org/officeDocument/2006/math" xmlns:a14="http://schemas.microsoft.com/office/drawing/2010/main" xmlns:ma14="http://schemas.microsoft.com/office/mac/drawingml/2011/main" val="1"/>
+              <ma14:wrappingTextBoxFlag xmlns:ma14="http://schemas.microsoft.com/office/mac/drawingml/2011/main" xmlns:a14="http://schemas.microsoft.com/office/drawing/2010/main" xmlns:m="http://schemas.openxmlformats.org/officeDocument/2006/math" xmlns="" val="1"/>
             </a:ext>
           </a:extLst>
         </p:spPr>
@@ -20087,7 +19944,7 @@
           </a:ln>
           <a:extLst>
             <a:ext uri="{C572A759-6A51-4108-AA02-DFA0A04FC94B}">
-              <ma14:wrappingTextBoxFlag xmlns="" xmlns:m="http://schemas.openxmlformats.org/officeDocument/2006/math" xmlns:a14="http://schemas.microsoft.com/office/drawing/2010/main" xmlns:ma14="http://schemas.microsoft.com/office/mac/drawingml/2011/main" val="1"/>
+              <ma14:wrappingTextBoxFlag xmlns:ma14="http://schemas.microsoft.com/office/mac/drawingml/2011/main" xmlns:a14="http://schemas.microsoft.com/office/drawing/2010/main" xmlns:m="http://schemas.openxmlformats.org/officeDocument/2006/math" xmlns="" val="1"/>
             </a:ext>
           </a:extLst>
         </p:spPr>
@@ -20134,7 +19991,7 @@
           </a:ln>
           <a:extLst>
             <a:ext uri="{C572A759-6A51-4108-AA02-DFA0A04FC94B}">
-              <ma14:wrappingTextBoxFlag xmlns="" xmlns:m="http://schemas.openxmlformats.org/officeDocument/2006/math" xmlns:a14="http://schemas.microsoft.com/office/drawing/2010/main" xmlns:ma14="http://schemas.microsoft.com/office/mac/drawingml/2011/main" val="1"/>
+              <ma14:wrappingTextBoxFlag xmlns:ma14="http://schemas.microsoft.com/office/mac/drawingml/2011/main" xmlns:a14="http://schemas.microsoft.com/office/drawing/2010/main" xmlns:m="http://schemas.openxmlformats.org/officeDocument/2006/math" xmlns="" val="1"/>
             </a:ext>
           </a:extLst>
         </p:spPr>
@@ -20275,7 +20132,7 @@
           </a:ln>
           <a:extLst>
             <a:ext uri="{C572A759-6A51-4108-AA02-DFA0A04FC94B}">
-              <ma14:wrappingTextBoxFlag xmlns="" xmlns:m="http://schemas.openxmlformats.org/officeDocument/2006/math" xmlns:a14="http://schemas.microsoft.com/office/drawing/2010/main" xmlns:ma14="http://schemas.microsoft.com/office/mac/drawingml/2011/main" val="1"/>
+              <ma14:wrappingTextBoxFlag xmlns:ma14="http://schemas.microsoft.com/office/mac/drawingml/2011/main" xmlns:a14="http://schemas.microsoft.com/office/drawing/2010/main" xmlns:m="http://schemas.openxmlformats.org/officeDocument/2006/math" xmlns="" val="1"/>
             </a:ext>
           </a:extLst>
         </p:spPr>
@@ -20322,7 +20179,7 @@
           </a:ln>
           <a:extLst>
             <a:ext uri="{C572A759-6A51-4108-AA02-DFA0A04FC94B}">
-              <ma14:wrappingTextBoxFlag xmlns="" xmlns:m="http://schemas.openxmlformats.org/officeDocument/2006/math" xmlns:a14="http://schemas.microsoft.com/office/drawing/2010/main" xmlns:ma14="http://schemas.microsoft.com/office/mac/drawingml/2011/main" val="1"/>
+              <ma14:wrappingTextBoxFlag xmlns:ma14="http://schemas.microsoft.com/office/mac/drawingml/2011/main" xmlns:a14="http://schemas.microsoft.com/office/drawing/2010/main" xmlns:m="http://schemas.openxmlformats.org/officeDocument/2006/math" xmlns="" val="1"/>
             </a:ext>
           </a:extLst>
         </p:spPr>
@@ -20463,7 +20320,7 @@
           </a:ln>
           <a:extLst>
             <a:ext uri="{C572A759-6A51-4108-AA02-DFA0A04FC94B}">
-              <ma14:wrappingTextBoxFlag xmlns="" xmlns:m="http://schemas.openxmlformats.org/officeDocument/2006/math" xmlns:a14="http://schemas.microsoft.com/office/drawing/2010/main" xmlns:ma14="http://schemas.microsoft.com/office/mac/drawingml/2011/main" val="1"/>
+              <ma14:wrappingTextBoxFlag xmlns:ma14="http://schemas.microsoft.com/office/mac/drawingml/2011/main" xmlns:a14="http://schemas.microsoft.com/office/drawing/2010/main" xmlns:m="http://schemas.openxmlformats.org/officeDocument/2006/math" xmlns="" val="1"/>
             </a:ext>
           </a:extLst>
         </p:spPr>
@@ -20578,7 +20435,7 @@
             <a:effectLst/>
             <a:extLst>
               <a:ext uri="{C572A759-6A51-4108-AA02-DFA0A04FC94B}">
-                <ma14:wrappingTextBoxFlag xmlns="" xmlns:m="http://schemas.openxmlformats.org/officeDocument/2006/math" xmlns:a14="http://schemas.microsoft.com/office/drawing/2010/main" xmlns:ma14="http://schemas.microsoft.com/office/mac/drawingml/2011/main" val="1"/>
+                <ma14:wrappingTextBoxFlag xmlns:ma14="http://schemas.microsoft.com/office/mac/drawingml/2011/main" xmlns:a14="http://schemas.microsoft.com/office/drawing/2010/main" xmlns:m="http://schemas.openxmlformats.org/officeDocument/2006/math" xmlns="" val="1"/>
               </a:ext>
             </a:extLst>
           </p:spPr>
